--- a/docs/RUDP_Presentation_with_notes.pptx
+++ b/docs/RUDP_Presentation_with_notes.pptx
@@ -27,9 +27,10 @@
     <p:sldId id="275" r:id="rId21"/>
     <p:sldId id="276" r:id="rId22"/>
     <p:sldId id="277" r:id="rId23"/>
+    <p:sldId id="278" r:id="rId24"/>
   </p:sldIdLst>
   <p:notesMasterIdLst>
-    <p:notesMasterId r:id="rId24"/>
+    <p:notesMasterId r:id="rId25"/>
   </p:notesMasterIdLst>
   <p:sldSz cx="12192000" cy="6858000"/>
   <p:notesSz cx="6858000" cy="12192000"/>
@@ -1261,33 +1262,38 @@
           <a:lstStyle/>
           <a:p>
             <a:r>
-              <a:t>SAY (0:50):</a:t>
-            </a:r>
-          </a:p>
-          <a:p>
-            <a:r>
-              <a:t>- Be honest: it did not beat AIMD. Plus 63 percent time on 5G-like, plus 10 percent on satellite, a tie on the lossy path.</a:t>
-            </a:r>
-          </a:p>
-          <a:p>
-            <a:r>
-              <a:t>- It used somewhat fewer retransmissions on two paths, within run-to-run noise.</a:t>
-            </a:r>
-          </a:p>
-          <a:p>
-            <a:r>
-              <a:t>- Earlier training rounds were much worse; this is the final configuration. The finding is that a simple learner does not beat a tuned rule.</a:t>
-            </a:r>
-          </a:p>
-          <a:p>
-            <a:r>
-              <a:t>- In the chat, retrained for bursty random-loss traffic, it does beat AIMD on most simulated paths; mention that on slide 19.</a:t>
+              <a:t>SAY (1:00):</a:t>
+            </a:r>
+          </a:p>
+          <a:p>
+            <a:r>
+              <a:t>- This is the agent itself. Left: rl_cc.h, 73 lines of C. The state is 80 buckets of RTT ratio, loss and window size.</a:t>
+            </a:r>
+          </a:p>
+          <a:p>
+            <a:r>
+              <a:t>- choose picks one of five window multipliers, usually the best, sometimes random so it keeps exploring.</a:t>
+            </a:r>
+          </a:p>
+          <a:p>
+            <a:r>
+              <a:t>- update is the Q-learning rule: move the value of the action we took toward the reward plus the best value of the next state.</a:t>
+            </a:r>
+          </a:p>
+          <a:p>
+            <a:r>
+              <a:t>- Right: the loop in smart_client.c. Once per RTT it computes the reward, throughput minus delay growth minus loss, updates the table, picks the next action and scales the window.</a:t>
+            </a:r>
+          </a:p>
+          <a:p>
+            <a:r>
+              <a:t>- The code on the slide is simplified; the real files are in the repo.</a:t>
             </a:r>
           </a:p>
           <a:p/>
           <a:p>
             <a:r>
-              <a:t>IF ASKED: Q: Then what was the point? A: The experiment. We tested whether a learned window helps and report the answer, including the negative result.</a:t>
+              <a:t>IF ASKED: Q: Is this deep RL? A: No, tabular Q-learning. 80 states fit in a table; a neural network is future work. Q: Where is it trained? A: web/train.py for the chat, the smart client trains online for the main experiments; table in results/q_chat.txt.</a:t>
             </a:r>
           </a:p>
         </p:txBody>
@@ -1373,33 +1379,33 @@
           <a:lstStyle/>
           <a:p>
             <a:r>
-              <a:t>SAY (0:40):</a:t>
-            </a:r>
-          </a:p>
-          <a:p>
-            <a:r>
-              <a:t>- We wrote a Lua dissector, named smartrudp, that decodes sequence, ack, flags, checksum and length.</a:t>
-            </a:r>
-          </a:p>
-          <a:p>
-            <a:r>
-              <a:t>- Useful filters: smartrudp.flags.data == 1 and smartrudp.seq == N.</a:t>
-            </a:r>
-          </a:p>
-          <a:p>
-            <a:r>
-              <a:t>- In a 400-packet lossy run the receiver saw 87 (AIMD) and 95 (Smart) repeated data segments.</a:t>
-            </a:r>
-          </a:p>
-          <a:p>
-            <a:r>
-              <a:t>- The program's exported trace uses topology addresses and has no handshake.</a:t>
+              <a:t>SAY (0:50):</a:t>
+            </a:r>
+          </a:p>
+          <a:p>
+            <a:r>
+              <a:t>- Be honest: it did not beat AIMD. Plus 63 percent time on 5G-like, plus 10 percent on satellite, a tie on the lossy path.</a:t>
+            </a:r>
+          </a:p>
+          <a:p>
+            <a:r>
+              <a:t>- It used somewhat fewer retransmissions on two paths, within run-to-run noise.</a:t>
+            </a:r>
+          </a:p>
+          <a:p>
+            <a:r>
+              <a:t>- Earlier training rounds were much worse; this is the final configuration. The finding is that a simple learner does not beat a tuned rule.</a:t>
+            </a:r>
+          </a:p>
+          <a:p>
+            <a:r>
+              <a:t>- In the chat, retrained for bursty random-loss traffic, it does beat AIMD on most simulated paths; mention that on slide 19.</a:t>
             </a:r>
           </a:p>
           <a:p/>
           <a:p>
             <a:r>
-              <a:t>IF ASKED: Q: Why no handshake in the export? A: The export builds synthetic packets. The real tshark capture on the next slide shows the handshake.</a:t>
+              <a:t>IF ASKED: Q: Then what was the point? A: The experiment. We tested whether a learned window helps and report the answer, including the negative result.</a:t>
             </a:r>
           </a:p>
         </p:txBody>
@@ -1485,23 +1491,33 @@
           <a:lstStyle/>
           <a:p>
             <a:r>
-              <a:t>SAY (0:50):</a:t>
-            </a:r>
-          </a:p>
-          <a:p>
-            <a:r>
-              <a:t>- Left: the first three packets, SYN, SYN-ACK and ACK, decoded by our dissector (filter frame.number &lt;= 3).</a:t>
-            </a:r>
-          </a:p>
-          <a:p>
-            <a:r>
-              <a:t>- Right: filter smartrudp.seq == N shows the same segment twice, a retransmission.</a:t>
+              <a:t>SAY (0:40):</a:t>
+            </a:r>
+          </a:p>
+          <a:p>
+            <a:r>
+              <a:t>- We wrote a Lua dissector, named smartrudp, that decodes sequence, ack, flags, checksum and length.</a:t>
+            </a:r>
+          </a:p>
+          <a:p>
+            <a:r>
+              <a:t>- Useful filters: smartrudp.flags.data == 1 and smartrudp.seq == N.</a:t>
+            </a:r>
+          </a:p>
+          <a:p>
+            <a:r>
+              <a:t>- In a 400-packet lossy run the receiver saw 87 (AIMD) and 95 (Smart) repeated data segments.</a:t>
+            </a:r>
+          </a:p>
+          <a:p>
+            <a:r>
+              <a:t>- The program's exported trace uses topology addresses and has no handshake.</a:t>
             </a:r>
           </a:p>
           <a:p/>
           <a:p>
             <a:r>
-              <a:t>IF ASKED: If Wireshark is open live: Analyze, Decode As, UDP 8888 = RUDP, then use these two filters.</a:t>
+              <a:t>IF ASKED: Q: Why no handshake in the export? A: The export builds synthetic packets. The real tshark capture on the next slide shows the handshake.</a:t>
             </a:r>
           </a:p>
         </p:txBody>
@@ -1587,33 +1603,23 @@
           <a:lstStyle/>
           <a:p>
             <a:r>
-              <a:t>SAY (1:00):</a:t>
-            </a:r>
-          </a:p>
-          <a:p>
-            <a:r>
-              <a:t>- The protocol in use: each message is one numbered, checksummed RUDP segment, ACKed in order.</a:t>
-            </a:r>
-          </a:p>
-          <a:p>
-            <a:r>
-              <a:t>- There is a terminal version and a browser version; two devices were linked over Tailscale, laptop and phone.</a:t>
-            </a:r>
-          </a:p>
-          <a:p>
-            <a:r>
-              <a:t>- Drag the loss slider: lost messages are resent and still arrive in order. The right panel shows sent, lost and resent counts and the log.</a:t>
-            </a:r>
-          </a:p>
-          <a:p>
-            <a:r>
-              <a:t>- There is a controller switch: fixed window, AIMD, or Smart-RUDP. For the chat we retrained Smart-RUDP on simulated paths: it was faster than AIMD on 5 of 6 held-out paths and equal on 1, because AIMD resets to one packet on random loss. Say it is simulated, and that the agent may not shrink the window without a congestion signal. Stress test: 48 random paths the agent never trained on, 3 seeds each. Mean delivery time was 3.73 seconds for Smart-RUDP against 7.16 for AIMD. Smart-RUDP was faster on 27 paths, slower on 5, within 5 percent on 16. So on our data, in simulation, it beats AIMD in the chat setting.</a:t>
+              <a:t>SAY (0:50):</a:t>
+            </a:r>
+          </a:p>
+          <a:p>
+            <a:r>
+              <a:t>- Left: the first three packets, SYN, SYN-ACK and ACK, decoded by our dissector (filter frame.number &lt;= 3).</a:t>
+            </a:r>
+          </a:p>
+          <a:p>
+            <a:r>
+              <a:t>- Right: filter smartrudp.seq == N shows the same segment twice, a retransmission.</a:t>
             </a:r>
           </a:p>
           <a:p/>
           <a:p>
             <a:r>
-              <a:t>IF ASKED: Q: Is that a fair win? A: Both start from the same window of 10; held-out paths and seeds; honest limits: simulated, and without the no-shrink rule the agent lost. Q: Did it win in Section 8? A: No, that result stands. Q: Where does it lose? A: Tight bottleneck queues and very high loss; the fixed window of 8 is hard to beat there. A broader-trained agent did worse, so we kept the first.</a:t>
+              <a:t>IF ASKED: If Wireshark is open live: Analyze, Decode As, UDP 8888 = RUDP, then use these two filters.</a:t>
             </a:r>
           </a:p>
         </p:txBody>
@@ -1811,28 +1817,33 @@
           <a:lstStyle/>
           <a:p>
             <a:r>
-              <a:t>SAY (0:50):</a:t>
-            </a:r>
-          </a:p>
-          <a:p>
-            <a:r>
-              <a:t>- Learned: reliability is a set of simple rules working together; congestion control matters as much as retransmission; testing tools fail in surprising ways.</a:t>
-            </a:r>
-          </a:p>
-          <a:p>
-            <a:r>
-              <a:t>- Next: Selective Repeat with SACK, a stronger learning agent, adaptive timeout, and tests on a real multi-machine network.</a:t>
-            </a:r>
-          </a:p>
-          <a:p>
-            <a:r>
-              <a:t>- Name the limits before she does: Go-Back-N, loopback-only protocol tests, Smart-RUDP not beating AIMD.</a:t>
+              <a:t>SAY (1:00):</a:t>
+            </a:r>
+          </a:p>
+          <a:p>
+            <a:r>
+              <a:t>- The protocol in use: each message is one numbered, checksummed RUDP segment, ACKed in order.</a:t>
+            </a:r>
+          </a:p>
+          <a:p>
+            <a:r>
+              <a:t>- There is a terminal version and a browser version; two devices were linked over Tailscale, laptop and phone.</a:t>
+            </a:r>
+          </a:p>
+          <a:p>
+            <a:r>
+              <a:t>- Drag the loss slider: lost messages are resent and still arrive in order. The right panel shows sent, lost and resent counts and the log.</a:t>
+            </a:r>
+          </a:p>
+          <a:p>
+            <a:r>
+              <a:t>- There is a controller switch: fixed window, AIMD, or Smart-RUDP. For the chat we retrained Smart-RUDP on simulated paths: it was faster than AIMD on 5 of 6 held-out paths and equal on 1, because AIMD resets to one packet on random loss. Say it is simulated, and that the agent may not shrink the window without a congestion signal. Stress test: 48 random paths the agent never trained on, 3 seeds each. Mean delivery time was 3.73 seconds for Smart-RUDP against 7.16 for AIMD. Smart-RUDP was faster on 27 paths, slower on 5, within 5 percent on 16. So on our data, in simulation, it beats AIMD in the chat setting.</a:t>
             </a:r>
           </a:p>
           <a:p/>
           <a:p>
             <a:r>
-              <a:t>IF ASKED: End on the limits and the fix order: SACK, adaptive timeout, real-network tests.</a:t>
+              <a:t>IF ASKED: Q: Is that a fair win? A: Both start from the same window of 10; held-out paths and seeds; honest limits: simulated, and without the no-shrink rule the agent lost. Q: Did it win in Section 8? A: No, that result stands. Q: Where does it lose? A: Tight bottleneck queues and very high loss; the fixed window of 8 is hard to beat there. A broader-trained agent did worse, so we kept the first.</a:t>
             </a:r>
           </a:p>
         </p:txBody>
@@ -1918,18 +1929,28 @@
           <a:lstStyle/>
           <a:p>
             <a:r>
-              <a:t>SAY (0:15):</a:t>
-            </a:r>
-          </a:p>
-          <a:p>
-            <a:r>
-              <a:t>- Thank you. The code, report and captures are at github.com/Capsturrrr/rudp. Happy to take questions.</a:t>
+              <a:t>SAY (0:50):</a:t>
+            </a:r>
+          </a:p>
+          <a:p>
+            <a:r>
+              <a:t>- Learned: reliability is a set of simple rules working together; congestion control matters as much as retransmission; testing tools fail in surprising ways.</a:t>
+            </a:r>
+          </a:p>
+          <a:p>
+            <a:r>
+              <a:t>- Next: Selective Repeat with SACK, a stronger learning agent, adaptive timeout, and tests on a real multi-machine network.</a:t>
+            </a:r>
+          </a:p>
+          <a:p>
+            <a:r>
+              <a:t>- Name the limits before she does: Go-Back-N, loopback-only protocol tests, Smart-RUDP not beating AIMD.</a:t>
             </a:r>
           </a:p>
           <a:p/>
           <a:p>
             <a:r>
-              <a:t>IF ASKED: Pause and smile; hand over to questions.</a:t>
+              <a:t>IF ASKED: End on the limits and the fix order: SACK, adaptive timeout, real-network tests.</a:t>
             </a:r>
           </a:p>
         </p:txBody>
@@ -2015,18 +2036,18 @@
           <a:lstStyle/>
           <a:p>
             <a:r>
-              <a:t>SAY (-):</a:t>
-            </a:r>
-          </a:p>
-          <a:p>
-            <a:r>
-              <a:t>- Only if asked: the window starts at 1, adds 1 per ACK until the threshold 16, then 1/window per ACK. In the 62-packet run the final window was 18.71.</a:t>
+              <a:t>SAY (0:15):</a:t>
+            </a:r>
+          </a:p>
+          <a:p>
+            <a:r>
+              <a:t>- Thank you. The code, report and captures are at github.com/Capsturrrr/rudp. Happy to take questions.</a:t>
             </a:r>
           </a:p>
           <a:p/>
           <a:p>
             <a:r>
-              <a:t>IF ASKED: Use this slide to answer 'show me congestion avoidance'.</a:t>
+              <a:t>IF ASKED: Pause and smile; hand over to questions.</a:t>
             </a:r>
           </a:p>
         </p:txBody>
@@ -2049,6 +2070,103 @@
             <a:fld id="{F7021451-1387-4CA6-816F-3879F97B5CBC}" type="slidenum">
               <a:rPr lang="en-US"/>
               <a:t>22</a:t>
+            </a:fld>
+            <a:endParaRPr lang="en-US"/>
+          </a:p>
+        </p:txBody>
+      </p:sp>
+    </p:spTree>
+    <p:extLst>
+      <p:ext uri="{BB962C8B-B14F-4D97-AF65-F5344CB8AC3E}">
+        <p14:creationId xmlns:p14="http://schemas.microsoft.com/office/powerpoint/2010/main" val="1024086991"/>
+      </p:ext>
+    </p:extLst>
+  </p:cSld>
+  <p:clrMapOvr>
+    <a:masterClrMapping/>
+  </p:clrMapOvr>
+</p:notes>
+</file>
+
+<file path=ppt/notesSlides/notesSlide23.xml><?xml version="1.0" encoding="utf-8"?>
+<p:notes xmlns:a="http://schemas.openxmlformats.org/drawingml/2006/main" xmlns:r="http://schemas.openxmlformats.org/officeDocument/2006/relationships" xmlns:p="http://schemas.openxmlformats.org/presentationml/2006/main">
+  <p:cSld>
+    <p:spTree>
+      <p:nvGrpSpPr>
+        <p:cNvPr id="1" name=""/>
+        <p:cNvGrpSpPr/>
+        <p:nvPr/>
+      </p:nvGrpSpPr>
+      <p:grpSpPr>
+        <a:xfrm>
+          <a:off x="0" y="0"/>
+          <a:ext cx="0" cy="0"/>
+          <a:chOff x="0" y="0"/>
+          <a:chExt cx="0" cy="0"/>
+        </a:xfrm>
+      </p:grpSpPr>
+      <p:sp>
+        <p:nvSpPr>
+          <p:cNvPr id="2" name="Slide Image Placeholder 1"/>
+          <p:cNvSpPr>
+            <a:spLocks noGrp="1" noRot="1" noChangeAspect="1"/>
+          </p:cNvSpPr>
+          <p:nvPr>
+            <p:ph type="sldImg"/>
+          </p:nvPr>
+        </p:nvSpPr>
+        <p:spPr/>
+      </p:sp>
+      <p:sp>
+        <p:nvSpPr>
+          <p:cNvPr id="3" name="Notes Placeholder 2"/>
+          <p:cNvSpPr>
+            <a:spLocks noGrp="1"/>
+          </p:cNvSpPr>
+          <p:nvPr>
+            <p:ph type="body" idx="1"/>
+          </p:nvPr>
+        </p:nvSpPr>
+        <p:spPr/>
+        <p:txBody>
+          <a:bodyPr/>
+          <a:lstStyle/>
+          <a:p>
+            <a:r>
+              <a:t>SAY (-):</a:t>
+            </a:r>
+          </a:p>
+          <a:p>
+            <a:r>
+              <a:t>- Only if asked: the window starts at 1, adds 1 per ACK until the threshold 16, then 1/window per ACK. In the 62-packet run the final window was 18.71.</a:t>
+            </a:r>
+          </a:p>
+          <a:p/>
+          <a:p>
+            <a:r>
+              <a:t>IF ASKED: Use this slide to answer 'show me congestion avoidance'.</a:t>
+            </a:r>
+          </a:p>
+        </p:txBody>
+      </p:sp>
+      <p:sp>
+        <p:nvSpPr>
+          <p:cNvPr id="4" name="Slide Number Placeholder 3"/>
+          <p:cNvSpPr>
+            <a:spLocks noGrp="1"/>
+          </p:cNvSpPr>
+          <p:nvPr>
+            <p:ph type="sldNum" sz="quarter" idx="10"/>
+          </p:nvPr>
+        </p:nvSpPr>
+        <p:spPr/>
+        <p:txBody>
+          <a:bodyPr/>
+          <a:lstStyle/>
+          <a:p>
+            <a:fld id="{F7021451-1387-4CA6-816F-3879F97B5CBC}" type="slidenum">
+              <a:rPr lang="en-US"/>
+              <a:t>23</a:t>
             </a:fld>
             <a:endParaRPr lang="en-US"/>
           </a:p>
@@ -3397,7 +3515,7 @@
                 <a:ea typeface="Courier New" pitchFamily="34" charset="-122"/>
                 <a:cs typeface="Courier New" pitchFamily="34" charset="-120"/>
               </a:rPr>
-              <a:t>10 / 21   Smart-RUDP</a:t>
+              <a:t>10 / 22   Smart-RUDP</a:t>
             </a:r>
             <a:endParaRPr lang="en-US" sz="1000" dirty="0"/>
           </a:p>
@@ -3594,7 +3712,7 @@
                 <a:ea typeface="Courier New" pitchFamily="34" charset="-122"/>
                 <a:cs typeface="Courier New" pitchFamily="34" charset="-120"/>
               </a:rPr>
-              <a:t>11 / 21   Smart-RUDP</a:t>
+              <a:t>11 / 22   Smart-RUDP</a:t>
             </a:r>
             <a:endParaRPr lang="en-US" sz="1000" dirty="0"/>
           </a:p>
@@ -4424,7 +4542,7 @@
                 <a:ea typeface="Courier New" pitchFamily="34" charset="-122"/>
                 <a:cs typeface="Courier New" pitchFamily="34" charset="-120"/>
               </a:rPr>
-              <a:t>12 / 21   Smart-RUDP</a:t>
+              <a:t>12 / 22   Smart-RUDP</a:t>
             </a:r>
             <a:endParaRPr lang="en-US" sz="1000" dirty="0"/>
           </a:p>
@@ -4721,7 +4839,7 @@
                 <a:ea typeface="Courier New" pitchFamily="34" charset="-122"/>
                 <a:cs typeface="Courier New" pitchFamily="34" charset="-120"/>
               </a:rPr>
-              <a:t>13 / 21   Smart-RUDP</a:t>
+              <a:t>13 / 22   Smart-RUDP</a:t>
             </a:r>
             <a:endParaRPr lang="en-US" sz="1000" dirty="0"/>
           </a:p>
@@ -5021,7 +5139,7 @@
                 <a:ea typeface="Courier New" pitchFamily="34" charset="-122"/>
                 <a:cs typeface="Courier New" pitchFamily="34" charset="-120"/>
               </a:rPr>
-              <a:t>14 / 21   Smart-RUDP</a:t>
+              <a:t>14 / 22   Smart-RUDP</a:t>
             </a:r>
             <a:endParaRPr lang="en-US" sz="1000" dirty="0"/>
           </a:p>
@@ -5405,7 +5523,7 @@
                 <a:ea typeface="Courier New" pitchFamily="34" charset="-122"/>
                 <a:cs typeface="Courier New" pitchFamily="34" charset="-120"/>
               </a:rPr>
-              <a:t>15 / 21   Smart-RUDP</a:t>
+              <a:t>15 / 22   Smart-RUDP</a:t>
             </a:r>
             <a:endParaRPr lang="en-US" sz="1000" dirty="0"/>
           </a:p>
@@ -5824,7 +5942,7 @@
                 <a:ea typeface="Courier New" pitchFamily="34" charset="-122"/>
                 <a:cs typeface="Courier New" pitchFamily="34" charset="-120"/>
               </a:rPr>
-              <a:t>Smart-RUDP vs AIMD: honest result</a:t>
+              <a:t>The AI agent in our code</a:t>
             </a:r>
             <a:endParaRPr lang="en-US" sz="3000" dirty="0"/>
           </a:p>
@@ -5863,46 +5981,86 @@
                 <a:ea typeface="Courier New" pitchFamily="34" charset="-122"/>
                 <a:cs typeface="Courier New" pitchFamily="34" charset="-120"/>
               </a:rPr>
-              <a:t>16 / 21   Smart-RUDP</a:t>
+              <a:t>16 / 22   Smart-RUDP</a:t>
             </a:r>
             <a:endParaRPr lang="en-US" sz="1000" dirty="0"/>
           </a:p>
         </p:txBody>
       </p:sp>
-      <p:pic>
-        <p:nvPicPr>
-          <p:cNvPr id="4" name="Image 0" descr="sm_fig1_comparison.png">    </p:cNvPr>
-          <p:cNvPicPr>
-            <a:picLocks noChangeAspect="1"/>
-          </p:cNvPicPr>
-          <p:nvPr/>
-        </p:nvPicPr>
-        <p:blipFill>
-          <a:blip r:embed="rId1"/>
-          <a:stretch>
-            <a:fillRect/>
-          </a:stretch>
-        </p:blipFill>
-        <p:spPr>
-          <a:xfrm>
-            <a:off x="548640" y="1097280"/>
-            <a:ext cx="11064240" cy="3621024"/>
-          </a:xfrm>
-          <a:prstGeom prst="rect">
-            <a:avLst/>
-          </a:prstGeom>
-        </p:spPr>
-      </p:pic>
-      <p:sp>
-        <p:nvSpPr>
-          <p:cNvPr id="5" name="Text 2"/>
-          <p:cNvSpPr/>
-          <p:nvPr/>
-        </p:nvSpPr>
-        <p:spPr>
-          <a:xfrm>
-            <a:off x="548640" y="4937760"/>
-            <a:ext cx="11064240" cy="1463040"/>
+      <p:sp>
+        <p:nvSpPr>
+          <p:cNvPr id="4" name="Shape 2"/>
+          <p:cNvSpPr/>
+          <p:nvPr/>
+        </p:nvSpPr>
+        <p:spPr>
+          <a:xfrm>
+            <a:off x="457200" y="1188720"/>
+            <a:ext cx="5669280" cy="4206240"/>
+          </a:xfrm>
+          <a:prstGeom prst="rect">
+            <a:avLst/>
+          </a:prstGeom>
+          <a:solidFill>
+            <a:srgbClr val="141B24"/>
+          </a:solidFill>
+          <a:ln w="12700">
+            <a:solidFill>
+              <a:srgbClr val="39FF88"/>
+            </a:solidFill>
+            <a:prstDash val="solid"/>
+          </a:ln>
+        </p:spPr>
+      </p:sp>
+      <p:sp>
+        <p:nvSpPr>
+          <p:cNvPr id="5" name="Text 3"/>
+          <p:cNvSpPr/>
+          <p:nvPr/>
+        </p:nvSpPr>
+        <p:spPr>
+          <a:xfrm>
+            <a:off x="594360" y="1234440"/>
+            <a:ext cx="5394960" cy="320040"/>
+          </a:xfrm>
+          <a:prstGeom prst="rect">
+            <a:avLst/>
+          </a:prstGeom>
+          <a:noFill/>
+          <a:ln/>
+        </p:spPr>
+        <p:txBody>
+          <a:bodyPr wrap="square" lIns="0" tIns="0" rIns="0" bIns="0" rtlCol="0" anchor="ctr"/>
+          <a:lstStyle/>
+          <a:p>
+            <a:pPr indent="0" marL="0">
+              <a:buNone/>
+            </a:pPr>
+            <a:r>
+              <a:rPr lang="en-US" sz="1300" b="1" dirty="0">
+                <a:solidFill>
+                  <a:srgbClr val="39FF88"/>
+                </a:solidFill>
+                <a:latin typeface="Courier New" pitchFamily="34" charset="0"/>
+                <a:ea typeface="Courier New" pitchFamily="34" charset="-122"/>
+                <a:cs typeface="Courier New" pitchFamily="34" charset="-120"/>
+              </a:rPr>
+              <a:t>src/rl_cc.h  (agent, simplified)</a:t>
+            </a:r>
+            <a:endParaRPr lang="en-US" sz="1300" dirty="0"/>
+          </a:p>
+        </p:txBody>
+      </p:sp>
+      <p:sp>
+        <p:nvSpPr>
+          <p:cNvPr id="6" name="Text 4"/>
+          <p:cNvSpPr/>
+          <p:nvPr/>
+        </p:nvSpPr>
+        <p:spPr>
+          <a:xfrm>
+            <a:off x="594360" y="1600200"/>
+            <a:ext cx="5394960" cy="3749040"/>
           </a:xfrm>
           <a:prstGeom prst="rect">
             <a:avLst/>
@@ -5914,86 +6072,491 @@
           <a:bodyPr wrap="square" lIns="0" tIns="0" rIns="0" bIns="0" rtlCol="0" anchor="t"/>
           <a:lstStyle/>
           <a:p>
-            <a:pPr marL="342900" indent="-342900">
-              <a:spcAft>
-                <a:spcPts val="800"/>
-              </a:spcAft>
-              <a:buSzPct val="100000"/>
-              <a:buChar char="•"/>
+            <a:pPr indent="0" marL="0">
+              <a:buNone/>
+            </a:pPr>
+            <a:r>
+              <a:rPr lang="en-US" sz="1400" dirty="0">
+                <a:solidFill>
+                  <a:srgbClr val="E6EDF3"/>
+                </a:solidFill>
+                <a:latin typeface="Courier New" pitchFamily="34" charset="0"/>
+                <a:ea typeface="Courier New" pitchFamily="34" charset="-122"/>
+                <a:cs typeface="Courier New" pitchFamily="34" charset="-120"/>
+              </a:rPr>
+              <a:t>// state: 4 x 4 x 5 = 80 buckets</a:t>
+            </a:r>
+            <a:endParaRPr lang="en-US" sz="1400" dirty="0"/>
+          </a:p>
+          <a:p>
+            <a:pPr indent="0" marL="0">
+              <a:buNone/>
+            </a:pPr>
+            <a:r>
+              <a:rPr lang="en-US" sz="1400" dirty="0">
+                <a:solidFill>
+                  <a:srgbClr val="E6EDF3"/>
+                </a:solidFill>
+                <a:latin typeface="Courier New" pitchFamily="34" charset="0"/>
+                <a:ea typeface="Courier New" pitchFamily="34" charset="-122"/>
+                <a:cs typeface="Courier New" pitchFamily="34" charset="-120"/>
+              </a:rPr>
+              <a:t>s = (rtt_bucket*4 + loss_bucket)*5 + cwnd_bucket;</a:t>
+            </a:r>
+            <a:endParaRPr lang="en-US" sz="1400" dirty="0"/>
+          </a:p>
+          <a:p>
+            <a:pPr indent="0" marL="0">
+              <a:buNone/>
+            </a:pPr>
+            <a:endParaRPr lang="en-US" sz="1400" dirty="0"/>
+          </a:p>
+          <a:p>
+            <a:pPr indent="0" marL="0">
+              <a:buNone/>
+            </a:pPr>
+            <a:r>
+              <a:rPr lang="en-US" sz="1400" dirty="0">
+                <a:solidFill>
+                  <a:srgbClr val="E6EDF3"/>
+                </a:solidFill>
+                <a:latin typeface="Courier New" pitchFamily="34" charset="0"/>
+                <a:ea typeface="Courier New" pitchFamily="34" charset="-122"/>
+                <a:cs typeface="Courier New" pitchFamily="34" charset="-120"/>
+              </a:rPr>
+              <a:t>// choose: explore with prob. eps, else best</a:t>
+            </a:r>
+            <a:endParaRPr lang="en-US" sz="1400" dirty="0"/>
+          </a:p>
+          <a:p>
+            <a:pPr indent="0" marL="0">
+              <a:buNone/>
+            </a:pPr>
+            <a:r>
+              <a:rPr lang="en-US" sz="1400" dirty="0">
+                <a:solidFill>
+                  <a:srgbClr val="E6EDF3"/>
+                </a:solidFill>
+                <a:latin typeface="Courier New" pitchFamily="34" charset="0"/>
+                <a:ea typeface="Courier New" pitchFamily="34" charset="-122"/>
+                <a:cs typeface="Courier New" pitchFamily="34" charset="-120"/>
+              </a:rPr>
+              <a:t>int rl_choose(a, s) {</a:t>
+            </a:r>
+            <a:endParaRPr lang="en-US" sz="1400" dirty="0"/>
+          </a:p>
+          <a:p>
+            <a:pPr indent="0" marL="0">
+              <a:buNone/>
+            </a:pPr>
+            <a:r>
+              <a:rPr lang="en-US" sz="1400" dirty="0">
+                <a:solidFill>
+                  <a:srgbClr val="E6EDF3"/>
+                </a:solidFill>
+                <a:latin typeface="Courier New" pitchFamily="34" charset="0"/>
+                <a:ea typeface="Courier New" pitchFamily="34" charset="-122"/>
+                <a:cs typeface="Courier New" pitchFamily="34" charset="-120"/>
+              </a:rPr>
+              <a:t>  if (rand01() &lt; a-&gt;eps) return rand() % 5;</a:t>
+            </a:r>
+            <a:endParaRPr lang="en-US" sz="1400" dirty="0"/>
+          </a:p>
+          <a:p>
+            <a:pPr indent="0" marL="0">
+              <a:buNone/>
+            </a:pPr>
+            <a:r>
+              <a:rPr lang="en-US" sz="1400" dirty="0">
+                <a:solidFill>
+                  <a:srgbClr val="E6EDF3"/>
+                </a:solidFill>
+                <a:latin typeface="Courier New" pitchFamily="34" charset="0"/>
+                <a:ea typeface="Courier New" pitchFamily="34" charset="-122"/>
+                <a:cs typeface="Courier New" pitchFamily="34" charset="-120"/>
+              </a:rPr>
+              <a:t>  return argmax(a-&gt;q[s]);        // 5 actions</a:t>
+            </a:r>
+            <a:endParaRPr lang="en-US" sz="1400" dirty="0"/>
+          </a:p>
+          <a:p>
+            <a:pPr indent="0" marL="0">
+              <a:buNone/>
+            </a:pPr>
+            <a:r>
+              <a:rPr lang="en-US" sz="1400" dirty="0">
+                <a:solidFill>
+                  <a:srgbClr val="E6EDF3"/>
+                </a:solidFill>
+                <a:latin typeface="Courier New" pitchFamily="34" charset="0"/>
+                <a:ea typeface="Courier New" pitchFamily="34" charset="-122"/>
+                <a:cs typeface="Courier New" pitchFamily="34" charset="-120"/>
+              </a:rPr>
+              <a:t>}</a:t>
+            </a:r>
+            <a:endParaRPr lang="en-US" sz="1400" dirty="0"/>
+          </a:p>
+          <a:p>
+            <a:pPr indent="0" marL="0">
+              <a:buNone/>
+            </a:pPr>
+            <a:endParaRPr lang="en-US" sz="1400" dirty="0"/>
+          </a:p>
+          <a:p>
+            <a:pPr indent="0" marL="0">
+              <a:buNone/>
+            </a:pPr>
+            <a:r>
+              <a:rPr lang="en-US" sz="1400" dirty="0">
+                <a:solidFill>
+                  <a:srgbClr val="E6EDF3"/>
+                </a:solidFill>
+                <a:latin typeface="Courier New" pitchFamily="34" charset="0"/>
+                <a:ea typeface="Courier New" pitchFamily="34" charset="-122"/>
+                <a:cs typeface="Courier New" pitchFamily="34" charset="-120"/>
+              </a:rPr>
+              <a:t>// learn: the Q-learning update</a:t>
+            </a:r>
+            <a:endParaRPr lang="en-US" sz="1400" dirty="0"/>
+          </a:p>
+          <a:p>
+            <a:pPr indent="0" marL="0">
+              <a:buNone/>
+            </a:pPr>
+            <a:r>
+              <a:rPr lang="en-US" sz="1400" dirty="0">
+                <a:solidFill>
+                  <a:srgbClr val="E6EDF3"/>
+                </a:solidFill>
+                <a:latin typeface="Courier New" pitchFamily="34" charset="0"/>
+                <a:ea typeface="Courier New" pitchFamily="34" charset="-122"/>
+                <a:cs typeface="Courier New" pitchFamily="34" charset="-120"/>
+              </a:rPr>
+              <a:t>void rl_update(a, s, act, r, s2) {</a:t>
+            </a:r>
+            <a:endParaRPr lang="en-US" sz="1400" dirty="0"/>
+          </a:p>
+          <a:p>
+            <a:pPr indent="0" marL="0">
+              <a:buNone/>
+            </a:pPr>
+            <a:r>
+              <a:rPr lang="en-US" sz="1400" dirty="0">
+                <a:solidFill>
+                  <a:srgbClr val="E6EDF3"/>
+                </a:solidFill>
+                <a:latin typeface="Courier New" pitchFamily="34" charset="0"/>
+                <a:ea typeface="Courier New" pitchFamily="34" charset="-122"/>
+                <a:cs typeface="Courier New" pitchFamily="34" charset="-120"/>
+              </a:rPr>
+              <a:t>  target = r + a-&gt;gamma * max(a-&gt;q[s2]);</a:t>
+            </a:r>
+            <a:endParaRPr lang="en-US" sz="1400" dirty="0"/>
+          </a:p>
+          <a:p>
+            <a:pPr indent="0" marL="0">
+              <a:buNone/>
+            </a:pPr>
+            <a:r>
+              <a:rPr lang="en-US" sz="1400" dirty="0">
+                <a:solidFill>
+                  <a:srgbClr val="E6EDF3"/>
+                </a:solidFill>
+                <a:latin typeface="Courier New" pitchFamily="34" charset="0"/>
+                <a:ea typeface="Courier New" pitchFamily="34" charset="-122"/>
+                <a:cs typeface="Courier New" pitchFamily="34" charset="-120"/>
+              </a:rPr>
+              <a:t>  a-&gt;q[s][act] += a-&gt;alpha * (target - a-&gt;q[s][act]);</a:t>
+            </a:r>
+            <a:endParaRPr lang="en-US" sz="1400" dirty="0"/>
+          </a:p>
+          <a:p>
+            <a:pPr indent="0" marL="0">
+              <a:buNone/>
+            </a:pPr>
+            <a:r>
+              <a:rPr lang="en-US" sz="1400" dirty="0">
+                <a:solidFill>
+                  <a:srgbClr val="E6EDF3"/>
+                </a:solidFill>
+                <a:latin typeface="Courier New" pitchFamily="34" charset="0"/>
+                <a:ea typeface="Courier New" pitchFamily="34" charset="-122"/>
+                <a:cs typeface="Courier New" pitchFamily="34" charset="-120"/>
+              </a:rPr>
+              <a:t>}</a:t>
+            </a:r>
+            <a:endParaRPr lang="en-US" sz="1400" dirty="0"/>
+          </a:p>
+        </p:txBody>
+      </p:sp>
+      <p:sp>
+        <p:nvSpPr>
+          <p:cNvPr id="7" name="Shape 5"/>
+          <p:cNvSpPr/>
+          <p:nvPr/>
+        </p:nvSpPr>
+        <p:spPr>
+          <a:xfrm>
+            <a:off x="6309360" y="1188720"/>
+            <a:ext cx="5394960" cy="4206240"/>
+          </a:xfrm>
+          <a:prstGeom prst="rect">
+            <a:avLst/>
+          </a:prstGeom>
+          <a:solidFill>
+            <a:srgbClr val="141B24"/>
+          </a:solidFill>
+          <a:ln w="12700">
+            <a:solidFill>
+              <a:srgbClr val="FFB000"/>
+            </a:solidFill>
+            <a:prstDash val="solid"/>
+          </a:ln>
+        </p:spPr>
+      </p:sp>
+      <p:sp>
+        <p:nvSpPr>
+          <p:cNvPr id="8" name="Text 6"/>
+          <p:cNvSpPr/>
+          <p:nvPr/>
+        </p:nvSpPr>
+        <p:spPr>
+          <a:xfrm>
+            <a:off x="6446520" y="1234440"/>
+            <a:ext cx="5120640" cy="320040"/>
+          </a:xfrm>
+          <a:prstGeom prst="rect">
+            <a:avLst/>
+          </a:prstGeom>
+          <a:noFill/>
+          <a:ln/>
+        </p:spPr>
+        <p:txBody>
+          <a:bodyPr wrap="square" lIns="0" tIns="0" rIns="0" bIns="0" rtlCol="0" anchor="ctr"/>
+          <a:lstStyle/>
+          <a:p>
+            <a:pPr indent="0" marL="0">
+              <a:buNone/>
+            </a:pPr>
+            <a:r>
+              <a:rPr lang="en-US" sz="1300" b="1" dirty="0">
+                <a:solidFill>
+                  <a:srgbClr val="FFB000"/>
+                </a:solidFill>
+                <a:latin typeface="Courier New" pitchFamily="34" charset="0"/>
+                <a:ea typeface="Courier New" pitchFamily="34" charset="-122"/>
+                <a:cs typeface="Courier New" pitchFamily="34" charset="-120"/>
+              </a:rPr>
+              <a:t>src/smart_client.c  (decision loop, simplified)</a:t>
+            </a:r>
+            <a:endParaRPr lang="en-US" sz="1300" dirty="0"/>
+          </a:p>
+        </p:txBody>
+      </p:sp>
+      <p:sp>
+        <p:nvSpPr>
+          <p:cNvPr id="9" name="Text 7"/>
+          <p:cNvSpPr/>
+          <p:nvPr/>
+        </p:nvSpPr>
+        <p:spPr>
+          <a:xfrm>
+            <a:off x="6446520" y="1600200"/>
+            <a:ext cx="5120640" cy="3749040"/>
+          </a:xfrm>
+          <a:prstGeom prst="rect">
+            <a:avLst/>
+          </a:prstGeom>
+          <a:noFill/>
+          <a:ln/>
+        </p:spPr>
+        <p:txBody>
+          <a:bodyPr wrap="square" lIns="0" tIns="0" rIns="0" bIns="0" rtlCol="0" anchor="t"/>
+          <a:lstStyle/>
+          <a:p>
+            <a:pPr indent="0" marL="0">
+              <a:buNone/>
+            </a:pPr>
+            <a:r>
+              <a:rPr lang="en-US" sz="1400" dirty="0">
+                <a:solidFill>
+                  <a:srgbClr val="E6EDF3"/>
+                </a:solidFill>
+                <a:latin typeface="Courier New" pitchFamily="34" charset="0"/>
+                <a:ea typeface="Courier New" pitchFamily="34" charset="-122"/>
+                <a:cs typeface="Courier New" pitchFamily="34" charset="-120"/>
+              </a:rPr>
+              <a:t>// once per RTT, in smart_client.c</a:t>
+            </a:r>
+            <a:endParaRPr lang="en-US" sz="1400" dirty="0"/>
+          </a:p>
+          <a:p>
+            <a:pPr indent="0" marL="0">
+              <a:buNone/>
+            </a:pPr>
+            <a:r>
+              <a:rPr lang="en-US" sz="1400" dirty="0">
+                <a:solidFill>
+                  <a:srgbClr val="E6EDF3"/>
+                </a:solidFill>
+                <a:latin typeface="Courier New" pitchFamily="34" charset="0"/>
+                <a:ea typeface="Courier New" pitchFamily="34" charset="-122"/>
+                <a:cs typeface="Courier New" pitchFamily="34" charset="-120"/>
+              </a:rPr>
+              <a:t>ratio = rtt / base_rtt;   lossf = losses / sent;</a:t>
+            </a:r>
+            <a:endParaRPr lang="en-US" sz="1400" dirty="0"/>
+          </a:p>
+          <a:p>
+            <a:pPr indent="0" marL="0">
+              <a:buNone/>
+            </a:pPr>
+            <a:endParaRPr lang="en-US" sz="1400" dirty="0"/>
+          </a:p>
+          <a:p>
+            <a:pPr indent="0" marL="0">
+              <a:buNone/>
+            </a:pPr>
+            <a:r>
+              <a:rPr lang="en-US" sz="1400" dirty="0">
+                <a:solidFill>
+                  <a:srgbClr val="E6EDF3"/>
+                </a:solidFill>
+                <a:latin typeface="Courier New" pitchFamily="34" charset="0"/>
+                <a:ea typeface="Courier New" pitchFamily="34" charset="-122"/>
+                <a:cs typeface="Courier New" pitchFamily="34" charset="-120"/>
+              </a:rPr>
+              <a:t>reward = sqrt(throughput_norm)</a:t>
+            </a:r>
+            <a:endParaRPr lang="en-US" sz="1400" dirty="0"/>
+          </a:p>
+          <a:p>
+            <a:pPr indent="0" marL="0">
+              <a:buNone/>
+            </a:pPr>
+            <a:r>
+              <a:rPr lang="en-US" sz="1400" dirty="0">
+                <a:solidFill>
+                  <a:srgbClr val="E6EDF3"/>
+                </a:solidFill>
+                <a:latin typeface="Courier New" pitchFamily="34" charset="0"/>
+                <a:ea typeface="Courier New" pitchFamily="34" charset="-122"/>
+                <a:cs typeface="Courier New" pitchFamily="34" charset="-120"/>
+              </a:rPr>
+              <a:t>       - 0.5 * max(0, ratio - 1)   // delay growth</a:t>
+            </a:r>
+            <a:endParaRPr lang="en-US" sz="1400" dirty="0"/>
+          </a:p>
+          <a:p>
+            <a:pPr indent="0" marL="0">
+              <a:buNone/>
+            </a:pPr>
+            <a:r>
+              <a:rPr lang="en-US" sz="1400" dirty="0">
+                <a:solidFill>
+                  <a:srgbClr val="E6EDF3"/>
+                </a:solidFill>
+                <a:latin typeface="Courier New" pitchFamily="34" charset="0"/>
+                <a:ea typeface="Courier New" pitchFamily="34" charset="-122"/>
+                <a:cs typeface="Courier New" pitchFamily="34" charset="-120"/>
+              </a:rPr>
+              <a:t>       - 4.0 * lossf;              // loss</a:t>
+            </a:r>
+            <a:endParaRPr lang="en-US" sz="1400" dirty="0"/>
+          </a:p>
+          <a:p>
+            <a:pPr indent="0" marL="0">
+              <a:buNone/>
+            </a:pPr>
+            <a:endParaRPr lang="en-US" sz="1400" dirty="0"/>
+          </a:p>
+          <a:p>
+            <a:pPr indent="0" marL="0">
+              <a:buNone/>
+            </a:pPr>
+            <a:r>
+              <a:rPr lang="en-US" sz="1400" dirty="0">
+                <a:solidFill>
+                  <a:srgbClr val="E6EDF3"/>
+                </a:solidFill>
+                <a:latin typeface="Courier New" pitchFamily="34" charset="0"/>
+                <a:ea typeface="Courier New" pitchFamily="34" charset="-122"/>
+                <a:cs typeface="Courier New" pitchFamily="34" charset="-120"/>
+              </a:rPr>
+              <a:t>rl_update(&amp;ag, prev_s, prev_a, reward, s2);</a:t>
+            </a:r>
+            <a:endParaRPr lang="en-US" sz="1400" dirty="0"/>
+          </a:p>
+          <a:p>
+            <a:pPr indent="0" marL="0">
+              <a:buNone/>
+            </a:pPr>
+            <a:r>
+              <a:rPr lang="en-US" sz="1400" dirty="0">
+                <a:solidFill>
+                  <a:srgbClr val="E6EDF3"/>
+                </a:solidFill>
+                <a:latin typeface="Courier New" pitchFamily="34" charset="0"/>
+                <a:ea typeface="Courier New" pitchFamily="34" charset="-122"/>
+                <a:cs typeface="Courier New" pitchFamily="34" charset="-120"/>
+              </a:rPr>
+              <a:t>act   = rl_choose(&amp;ag, s2);</a:t>
+            </a:r>
+            <a:endParaRPr lang="en-US" sz="1400" dirty="0"/>
+          </a:p>
+          <a:p>
+            <a:pPr indent="0" marL="0">
+              <a:buNone/>
+            </a:pPr>
+            <a:r>
+              <a:rPr lang="en-US" sz="1400" dirty="0">
+                <a:solidFill>
+                  <a:srgbClr val="E6EDF3"/>
+                </a:solidFill>
+                <a:latin typeface="Courier New" pitchFamily="34" charset="0"/>
+                <a:ea typeface="Courier New" pitchFamily="34" charset="-122"/>
+                <a:cs typeface="Courier New" pitchFamily="34" charset="-120"/>
+              </a:rPr>
+              <a:t>cwnd *= {0.5, 0.85, 1.0, 1.15, 1.5}[act];</a:t>
+            </a:r>
+            <a:endParaRPr lang="en-US" sz="1400" dirty="0"/>
+          </a:p>
+        </p:txBody>
+      </p:sp>
+      <p:sp>
+        <p:nvSpPr>
+          <p:cNvPr id="10" name="Text 8"/>
+          <p:cNvSpPr/>
+          <p:nvPr/>
+        </p:nvSpPr>
+        <p:spPr>
+          <a:xfrm>
+            <a:off x="457200" y="5577840"/>
+            <a:ext cx="11247120" cy="731520"/>
+          </a:xfrm>
+          <a:prstGeom prst="rect">
+            <a:avLst/>
+          </a:prstGeom>
+          <a:noFill/>
+          <a:ln/>
+        </p:spPr>
+        <p:txBody>
+          <a:bodyPr wrap="square" lIns="0" tIns="0" rIns="0" bIns="0" rtlCol="0" anchor="ctr"/>
+          <a:lstStyle/>
+          <a:p>
+            <a:pPr indent="0" marL="0">
+              <a:buNone/>
             </a:pPr>
             <a:r>
               <a:rPr lang="en-US" sz="1500" dirty="0">
                 <a:solidFill>
-                  <a:srgbClr val="E6EDF3"/>
+                  <a:srgbClr val="8B98A5"/>
                 </a:solidFill>
                 <a:latin typeface="Calibri" pitchFamily="34" charset="0"/>
                 <a:ea typeface="Calibri" pitchFamily="34" charset="-122"/>
                 <a:cs typeface="Calibri" pitchFamily="34" charset="-120"/>
               </a:rPr>
-              <a:t>6 evaluation runs per scenario after 40 training episodes</a:t>
-            </a:r>
-            <a:endParaRPr lang="en-US" sz="1500" dirty="0"/>
-          </a:p>
-          <a:p>
-            <a:pPr marL="342900" indent="-342900">
-              <a:spcAft>
-                <a:spcPts val="800"/>
-              </a:spcAft>
-              <a:buSzPct val="100000"/>
-              <a:buChar char="•"/>
-            </a:pPr>
-            <a:r>
-              <a:rPr lang="en-US" sz="1500" dirty="0">
-                <a:solidFill>
-                  <a:srgbClr val="E6EDF3"/>
-                </a:solidFill>
-                <a:latin typeface="Calibri" pitchFamily="34" charset="0"/>
-                <a:ea typeface="Calibri" pitchFamily="34" charset="-122"/>
-                <a:cs typeface="Calibri" pitchFamily="34" charset="-120"/>
-              </a:rPr>
-              <a:t>Not faster: +63% time on 5G-like, +10% on satellite, tie on lossy</a:t>
-            </a:r>
-            <a:endParaRPr lang="en-US" sz="1500" dirty="0"/>
-          </a:p>
-          <a:p>
-            <a:pPr marL="342900" indent="-342900">
-              <a:spcAft>
-                <a:spcPts val="800"/>
-              </a:spcAft>
-              <a:buSzPct val="100000"/>
-              <a:buChar char="•"/>
-            </a:pPr>
-            <a:r>
-              <a:rPr lang="en-US" sz="1500" dirty="0">
-                <a:solidFill>
-                  <a:srgbClr val="E6EDF3"/>
-                </a:solidFill>
-                <a:latin typeface="Calibri" pitchFamily="34" charset="0"/>
-                <a:ea typeface="Calibri" pitchFamily="34" charset="-122"/>
-                <a:cs typeface="Calibri" pitchFamily="34" charset="-120"/>
-              </a:rPr>
-              <a:t>Fewer retransmissions on 5G-like and satellite, but within run-to-run noise</a:t>
-            </a:r>
-            <a:endParaRPr lang="en-US" sz="1500" dirty="0"/>
-          </a:p>
-          <a:p>
-            <a:pPr marL="342900" indent="-342900">
-              <a:spcAft>
-                <a:spcPts val="800"/>
-              </a:spcAft>
-              <a:buSzPct val="100000"/>
-              <a:buChar char="•"/>
-            </a:pPr>
-            <a:r>
-              <a:rPr lang="en-US" sz="1500" dirty="0">
-                <a:solidFill>
-                  <a:srgbClr val="E6EDF3"/>
-                </a:solidFill>
-                <a:latin typeface="Calibri" pitchFamily="34" charset="0"/>
-                <a:ea typeface="Calibri" pitchFamily="34" charset="-122"/>
-                <a:cs typeface="Calibri" pitchFamily="34" charset="-120"/>
-              </a:rPr>
-              <a:t>Earlier training rounds were much worse; reported run is the final configuration</a:t>
+              <a:t>Tabular Q-learning: alpha 0.15, gamma 0.9. The chat version (web/cc.py) uses the same state and actions; trained offline in web/train.py, table saved in results/q_chat.txt. A neural network (deep RL) is future work: 80 states do not need one.</a:t>
             </a:r>
             <a:endParaRPr lang="en-US" sz="1500" dirty="0"/>
           </a:p>
@@ -6064,7 +6627,7 @@
                 <a:ea typeface="Courier New" pitchFamily="34" charset="-122"/>
                 <a:cs typeface="Courier New" pitchFamily="34" charset="-120"/>
               </a:rPr>
-              <a:t>Wireshark: RUDP dissector and traces</a:t>
+              <a:t>Smart-RUDP vs AIMD: honest result</a:t>
             </a:r>
             <a:endParaRPr lang="en-US" sz="3000" dirty="0"/>
           </a:p>
@@ -6103,7 +6666,7 @@
                 <a:ea typeface="Courier New" pitchFamily="34" charset="-122"/>
                 <a:cs typeface="Courier New" pitchFamily="34" charset="-120"/>
               </a:rPr>
-              <a:t>17 / 21   Smart-RUDP</a:t>
+              <a:t>17 / 22   Smart-RUDP</a:t>
             </a:r>
             <a:endParaRPr lang="en-US" sz="1000" dirty="0"/>
           </a:p>
@@ -6111,7 +6674,7 @@
       </p:sp>
       <p:pic>
         <p:nvPicPr>
-          <p:cNvPr id="4" name="Image 0" descr="wireshark_seq_time.png">    </p:cNvPr>
+          <p:cNvPr id="4" name="Image 0" descr="sm_fig1_comparison.png">    </p:cNvPr>
           <p:cNvPicPr>
             <a:picLocks noChangeAspect="1"/>
           </p:cNvPicPr>
@@ -6126,7 +6689,7 @@
         <p:spPr>
           <a:xfrm>
             <a:off x="548640" y="1097280"/>
-            <a:ext cx="7863840" cy="2716599"/>
+            <a:ext cx="11064240" cy="3621024"/>
           </a:xfrm>
           <a:prstGeom prst="rect">
             <a:avLst/>
@@ -6141,8 +6704,8 @@
         </p:nvSpPr>
         <p:spPr>
           <a:xfrm>
-            <a:off x="8595360" y="1280160"/>
-            <a:ext cx="3200400" cy="4114800"/>
+            <a:off x="548640" y="4937760"/>
+            <a:ext cx="11064240" cy="1463040"/>
           </a:xfrm>
           <a:prstGeom prst="rect">
             <a:avLst/>
@@ -6162,7 +6725,7 @@
               <a:buChar char="•"/>
             </a:pPr>
             <a:r>
-              <a:rPr lang="en-US" sz="1400" dirty="0">
+              <a:rPr lang="en-US" sz="1500" dirty="0">
                 <a:solidFill>
                   <a:srgbClr val="E6EDF3"/>
                 </a:solidFill>
@@ -6170,9 +6733,9 @@
                 <a:ea typeface="Calibri" pitchFamily="34" charset="-122"/>
                 <a:cs typeface="Calibri" pitchFamily="34" charset="-120"/>
               </a:rPr>
-              <a:t>rudp.lua decodes seq, ack, flags, checksum, length</a:t>
-            </a:r>
-            <a:endParaRPr lang="en-US" sz="1400" dirty="0"/>
+              <a:t>6 evaluation runs per scenario after 40 training episodes</a:t>
+            </a:r>
+            <a:endParaRPr lang="en-US" sz="1500" dirty="0"/>
           </a:p>
           <a:p>
             <a:pPr marL="342900" indent="-342900">
@@ -6183,7 +6746,7 @@
               <a:buChar char="•"/>
             </a:pPr>
             <a:r>
-              <a:rPr lang="en-US" sz="1400" dirty="0">
+              <a:rPr lang="en-US" sz="1500" dirty="0">
                 <a:solidFill>
                   <a:srgbClr val="E6EDF3"/>
                 </a:solidFill>
@@ -6191,9 +6754,9 @@
                 <a:ea typeface="Calibri" pitchFamily="34" charset="-122"/>
                 <a:cs typeface="Calibri" pitchFamily="34" charset="-120"/>
               </a:rPr>
-              <a:t>Filters: smartrudp.flags.data == 1, smartrudp.seq == N</a:t>
-            </a:r>
-            <a:endParaRPr lang="en-US" sz="1400" dirty="0"/>
+              <a:t>Not faster: +63% time on 5G-like, +10% on satellite, tie on lossy</a:t>
+            </a:r>
+            <a:endParaRPr lang="en-US" sz="1500" dirty="0"/>
           </a:p>
           <a:p>
             <a:pPr marL="342900" indent="-342900">
@@ -6204,7 +6767,7 @@
               <a:buChar char="•"/>
             </a:pPr>
             <a:r>
-              <a:rPr lang="en-US" sz="1400" dirty="0">
+              <a:rPr lang="en-US" sz="1500" dirty="0">
                 <a:solidFill>
                   <a:srgbClr val="E6EDF3"/>
                 </a:solidFill>
@@ -6212,9 +6775,9 @@
                 <a:ea typeface="Calibri" pitchFamily="34" charset="-122"/>
                 <a:cs typeface="Calibri" pitchFamily="34" charset="-120"/>
               </a:rPr>
-              <a:t>400 packets, lossy path: 87 (AIMD) and 95 (Smart) repeated data segments seen at the receiver</a:t>
-            </a:r>
-            <a:endParaRPr lang="en-US" sz="1400" dirty="0"/>
+              <a:t>Fewer retransmissions on 5G-like and satellite, but within run-to-run noise</a:t>
+            </a:r>
+            <a:endParaRPr lang="en-US" sz="1500" dirty="0"/>
           </a:p>
           <a:p>
             <a:pPr marL="342900" indent="-342900">
@@ -6225,7 +6788,7 @@
               <a:buChar char="•"/>
             </a:pPr>
             <a:r>
-              <a:rPr lang="en-US" sz="1400" dirty="0">
+              <a:rPr lang="en-US" sz="1500" dirty="0">
                 <a:solidFill>
                   <a:srgbClr val="E6EDF3"/>
                 </a:solidFill>
@@ -6233,9 +6796,9 @@
                 <a:ea typeface="Calibri" pitchFamily="34" charset="-122"/>
                 <a:cs typeface="Calibri" pitchFamily="34" charset="-120"/>
               </a:rPr>
-              <a:t>Trace exported by the program, topology addresses, handshake not included</a:t>
-            </a:r>
-            <a:endParaRPr lang="en-US" sz="1400" dirty="0"/>
+              <a:t>Earlier training rounds were much worse; reported run is the final configuration</a:t>
+            </a:r>
+            <a:endParaRPr lang="en-US" sz="1500" dirty="0"/>
           </a:p>
         </p:txBody>
       </p:sp>
@@ -6304,7 +6867,7 @@
                 <a:ea typeface="Courier New" pitchFamily="34" charset="-122"/>
                 <a:cs typeface="Courier New" pitchFamily="34" charset="-120"/>
               </a:rPr>
-              <a:t>Wireshark: real capture</a:t>
+              <a:t>Wireshark: RUDP dissector and traces</a:t>
             </a:r>
             <a:endParaRPr lang="en-US" sz="3000" dirty="0"/>
           </a:p>
@@ -6343,7 +6906,7 @@
                 <a:ea typeface="Courier New" pitchFamily="34" charset="-122"/>
                 <a:cs typeface="Courier New" pitchFamily="34" charset="-120"/>
               </a:rPr>
-              <a:t>18 / 21   Smart-RUDP</a:t>
+              <a:t>18 / 22   Smart-RUDP</a:t>
             </a:r>
             <a:endParaRPr lang="en-US" sz="1000" dirty="0"/>
           </a:p>
@@ -6351,7 +6914,7 @@
       </p:sp>
       <p:pic>
         <p:nvPicPr>
-          <p:cNvPr id="4" name="Image 0" descr="ws_handshake.png">    </p:cNvPr>
+          <p:cNvPr id="4" name="Image 0" descr="wireshark_seq_time.png">    </p:cNvPr>
           <p:cNvPicPr>
             <a:picLocks noChangeAspect="1"/>
           </p:cNvPicPr>
@@ -6366,47 +6929,23 @@
         <p:spPr>
           <a:xfrm>
             <a:off x="548640" y="1097280"/>
-            <a:ext cx="3840480" cy="4456406"/>
+            <a:ext cx="7863840" cy="2716599"/>
           </a:xfrm>
           <a:prstGeom prst="rect">
             <a:avLst/>
           </a:prstGeom>
         </p:spPr>
       </p:pic>
-      <p:pic>
-        <p:nvPicPr>
-          <p:cNvPr id="5" name="Image 1" descr="ws_retx.png">    </p:cNvPr>
-          <p:cNvPicPr>
-            <a:picLocks noChangeAspect="1"/>
-          </p:cNvPicPr>
-          <p:nvPr/>
-        </p:nvPicPr>
-        <p:blipFill>
-          <a:blip r:embed="rId2"/>
-          <a:stretch>
-            <a:fillRect/>
-          </a:stretch>
-        </p:blipFill>
-        <p:spPr>
-          <a:xfrm>
-            <a:off x="4663440" y="1097280"/>
-            <a:ext cx="6949440" cy="3431286"/>
-          </a:xfrm>
-          <a:prstGeom prst="rect">
-            <a:avLst/>
-          </a:prstGeom>
-        </p:spPr>
-      </p:pic>
-      <p:sp>
-        <p:nvSpPr>
-          <p:cNvPr id="6" name="Text 2"/>
-          <p:cNvSpPr/>
-          <p:nvPr/>
-        </p:nvSpPr>
-        <p:spPr>
-          <a:xfrm>
-            <a:off x="4663440" y="4663440"/>
-            <a:ext cx="6949440" cy="1645920"/>
+      <p:sp>
+        <p:nvSpPr>
+          <p:cNvPr id="5" name="Text 2"/>
+          <p:cNvSpPr/>
+          <p:nvPr/>
+        </p:nvSpPr>
+        <p:spPr>
+          <a:xfrm>
+            <a:off x="8595360" y="1280160"/>
+            <a:ext cx="3200400" cy="4114800"/>
           </a:xfrm>
           <a:prstGeom prst="rect">
             <a:avLst/>
@@ -6426,7 +6965,7 @@
               <a:buChar char="•"/>
             </a:pPr>
             <a:r>
-              <a:rPr lang="en-US" sz="1500" dirty="0">
+              <a:rPr lang="en-US" sz="1400" dirty="0">
                 <a:solidFill>
                   <a:srgbClr val="E6EDF3"/>
                 </a:solidFill>
@@ -6434,9 +6973,9 @@
                 <a:ea typeface="Calibri" pitchFamily="34" charset="-122"/>
                 <a:cs typeface="Calibri" pitchFamily="34" charset="-120"/>
               </a:rPr>
-              <a:t>Left: SYN, SYN-ACK, ACK decoded by the smartrudp dissector (filter frame.number &lt;= 3)</a:t>
-            </a:r>
-            <a:endParaRPr lang="en-US" sz="1500" dirty="0"/>
+              <a:t>rudp.lua decodes seq, ack, flags, checksum, length</a:t>
+            </a:r>
+            <a:endParaRPr lang="en-US" sz="1400" dirty="0"/>
           </a:p>
           <a:p>
             <a:pPr marL="342900" indent="-342900">
@@ -6447,7 +6986,7 @@
               <a:buChar char="•"/>
             </a:pPr>
             <a:r>
-              <a:rPr lang="en-US" sz="1500" dirty="0">
+              <a:rPr lang="en-US" sz="1400" dirty="0">
                 <a:solidFill>
                   <a:srgbClr val="E6EDF3"/>
                 </a:solidFill>
@@ -6455,9 +6994,51 @@
                 <a:ea typeface="Calibri" pitchFamily="34" charset="-122"/>
                 <a:cs typeface="Calibri" pitchFamily="34" charset="-120"/>
               </a:rPr>
-              <a:t>Right: smartrudp.seq == N shows the same segment sent twice, a retransmission</a:t>
-            </a:r>
-            <a:endParaRPr lang="en-US" sz="1500" dirty="0"/>
+              <a:t>Filters: smartrudp.flags.data == 1, smartrudp.seq == N</a:t>
+            </a:r>
+            <a:endParaRPr lang="en-US" sz="1400" dirty="0"/>
+          </a:p>
+          <a:p>
+            <a:pPr marL="342900" indent="-342900">
+              <a:spcAft>
+                <a:spcPts val="800"/>
+              </a:spcAft>
+              <a:buSzPct val="100000"/>
+              <a:buChar char="•"/>
+            </a:pPr>
+            <a:r>
+              <a:rPr lang="en-US" sz="1400" dirty="0">
+                <a:solidFill>
+                  <a:srgbClr val="E6EDF3"/>
+                </a:solidFill>
+                <a:latin typeface="Calibri" pitchFamily="34" charset="0"/>
+                <a:ea typeface="Calibri" pitchFamily="34" charset="-122"/>
+                <a:cs typeface="Calibri" pitchFamily="34" charset="-120"/>
+              </a:rPr>
+              <a:t>400 packets, lossy path: 87 (AIMD) and 95 (Smart) repeated data segments seen at the receiver</a:t>
+            </a:r>
+            <a:endParaRPr lang="en-US" sz="1400" dirty="0"/>
+          </a:p>
+          <a:p>
+            <a:pPr marL="342900" indent="-342900">
+              <a:spcAft>
+                <a:spcPts val="800"/>
+              </a:spcAft>
+              <a:buSzPct val="100000"/>
+              <a:buChar char="•"/>
+            </a:pPr>
+            <a:r>
+              <a:rPr lang="en-US" sz="1400" dirty="0">
+                <a:solidFill>
+                  <a:srgbClr val="E6EDF3"/>
+                </a:solidFill>
+                <a:latin typeface="Calibri" pitchFamily="34" charset="0"/>
+                <a:ea typeface="Calibri" pitchFamily="34" charset="-122"/>
+                <a:cs typeface="Calibri" pitchFamily="34" charset="-120"/>
+              </a:rPr>
+              <a:t>Trace exported by the program, topology addresses, handshake not included</a:t>
+            </a:r>
+            <a:endParaRPr lang="en-US" sz="1400" dirty="0"/>
           </a:p>
         </p:txBody>
       </p:sp>
@@ -6526,7 +7107,7 @@
                 <a:ea typeface="Courier New" pitchFamily="34" charset="-122"/>
                 <a:cs typeface="Courier New" pitchFamily="34" charset="-120"/>
               </a:rPr>
-              <a:t>Demo: RUDP Chat over the internet</a:t>
+              <a:t>Wireshark: real capture</a:t>
             </a:r>
             <a:endParaRPr lang="en-US" sz="3000" dirty="0"/>
           </a:p>
@@ -6565,7 +7146,7 @@
                 <a:ea typeface="Courier New" pitchFamily="34" charset="-122"/>
                 <a:cs typeface="Courier New" pitchFamily="34" charset="-120"/>
               </a:rPr>
-              <a:t>19 / 21   Smart-RUDP</a:t>
+              <a:t>19 / 22   Smart-RUDP</a:t>
             </a:r>
             <a:endParaRPr lang="en-US" sz="1000" dirty="0"/>
           </a:p>
@@ -6573,7 +7154,7 @@
       </p:sp>
       <p:pic>
         <p:nvPicPr>
-          <p:cNvPr id="4" name="Image 0" descr="web_chat.png">    </p:cNvPr>
+          <p:cNvPr id="4" name="Image 0" descr="ws_handshake.png">    </p:cNvPr>
           <p:cNvPicPr>
             <a:picLocks noChangeAspect="1"/>
           </p:cNvPicPr>
@@ -6587,24 +7168,48 @@
         </p:blipFill>
         <p:spPr>
           <a:xfrm>
-            <a:off x="457200" y="1097280"/>
-            <a:ext cx="7223760" cy="4465597"/>
+            <a:off x="548640" y="1097280"/>
+            <a:ext cx="3840480" cy="4456406"/>
           </a:xfrm>
           <a:prstGeom prst="rect">
             <a:avLst/>
           </a:prstGeom>
         </p:spPr>
       </p:pic>
-      <p:sp>
-        <p:nvSpPr>
-          <p:cNvPr id="5" name="Text 2"/>
-          <p:cNvSpPr/>
-          <p:nvPr/>
-        </p:nvSpPr>
-        <p:spPr>
-          <a:xfrm>
-            <a:off x="7955280" y="1188720"/>
-            <a:ext cx="3840480" cy="4389120"/>
+      <p:pic>
+        <p:nvPicPr>
+          <p:cNvPr id="5" name="Image 1" descr="ws_retx.png">    </p:cNvPr>
+          <p:cNvPicPr>
+            <a:picLocks noChangeAspect="1"/>
+          </p:cNvPicPr>
+          <p:nvPr/>
+        </p:nvPicPr>
+        <p:blipFill>
+          <a:blip r:embed="rId2"/>
+          <a:stretch>
+            <a:fillRect/>
+          </a:stretch>
+        </p:blipFill>
+        <p:spPr>
+          <a:xfrm>
+            <a:off x="4663440" y="1097280"/>
+            <a:ext cx="6949440" cy="3431286"/>
+          </a:xfrm>
+          <a:prstGeom prst="rect">
+            <a:avLst/>
+          </a:prstGeom>
+        </p:spPr>
+      </p:pic>
+      <p:sp>
+        <p:nvSpPr>
+          <p:cNvPr id="6" name="Text 2"/>
+          <p:cNvSpPr/>
+          <p:nvPr/>
+        </p:nvSpPr>
+        <p:spPr>
+          <a:xfrm>
+            <a:off x="4663440" y="4663440"/>
+            <a:ext cx="6949440" cy="1645920"/>
           </a:xfrm>
           <a:prstGeom prst="rect">
             <a:avLst/>
@@ -6624,7 +7229,7 @@
               <a:buChar char="•"/>
             </a:pPr>
             <a:r>
-              <a:rPr lang="en-US" sz="1600" dirty="0">
+              <a:rPr lang="en-US" sz="1500" dirty="0">
                 <a:solidFill>
                   <a:srgbClr val="E6EDF3"/>
                 </a:solidFill>
@@ -6632,9 +7237,9 @@
                 <a:ea typeface="Calibri" pitchFamily="34" charset="-122"/>
                 <a:cs typeface="Calibri" pitchFamily="34" charset="-120"/>
               </a:rPr>
-              <a:t>Each message is one RUDP segment: numbered, checksummed, ACKed in order</a:t>
-            </a:r>
-            <a:endParaRPr lang="en-US" sz="1600" dirty="0"/>
+              <a:t>Left: SYN, SYN-ACK, ACK decoded by the smartrudp dissector (filter frame.number &lt;= 3)</a:t>
+            </a:r>
+            <a:endParaRPr lang="en-US" sz="1500" dirty="0"/>
           </a:p>
           <a:p>
             <a:pPr marL="342900" indent="-342900">
@@ -6645,7 +7250,7 @@
               <a:buChar char="•"/>
             </a:pPr>
             <a:r>
-              <a:rPr lang="en-US" sz="1600" dirty="0">
+              <a:rPr lang="en-US" sz="1500" dirty="0">
                 <a:solidFill>
                   <a:srgbClr val="E6EDF3"/>
                 </a:solidFill>
@@ -6653,114 +7258,9 @@
                 <a:ea typeface="Calibri" pitchFamily="34" charset="-122"/>
                 <a:cs typeface="Calibri" pitchFamily="34" charset="-120"/>
               </a:rPr>
-              <a:t>Browser UI via a small gateway; terminal version too</a:t>
-            </a:r>
-            <a:endParaRPr lang="en-US" sz="1600" dirty="0"/>
-          </a:p>
-          <a:p>
-            <a:pPr marL="342900" indent="-342900">
-              <a:spcAft>
-                <a:spcPts val="800"/>
-              </a:spcAft>
-              <a:buSzPct val="100000"/>
-              <a:buChar char="•"/>
-            </a:pPr>
-            <a:r>
-              <a:rPr lang="en-US" sz="1600" dirty="0">
-                <a:solidFill>
-                  <a:srgbClr val="E6EDF3"/>
-                </a:solidFill>
-                <a:latin typeface="Calibri" pitchFamily="34" charset="0"/>
-                <a:ea typeface="Calibri" pitchFamily="34" charset="-122"/>
-                <a:cs typeface="Calibri" pitchFamily="34" charset="-120"/>
-              </a:rPr>
-              <a:t>Two machines linked over Tailscale (laptop and phone)</a:t>
-            </a:r>
-            <a:endParaRPr lang="en-US" sz="1600" dirty="0"/>
-          </a:p>
-          <a:p>
-            <a:pPr marL="342900" indent="-342900">
-              <a:spcAft>
-                <a:spcPts val="800"/>
-              </a:spcAft>
-              <a:buSzPct val="100000"/>
-              <a:buChar char="•"/>
-            </a:pPr>
-            <a:r>
-              <a:rPr lang="en-US" sz="1600" dirty="0">
-                <a:solidFill>
-                  <a:srgbClr val="E6EDF3"/>
-                </a:solidFill>
-                <a:latin typeface="Calibri" pitchFamily="34" charset="0"/>
-                <a:ea typeface="Calibri" pitchFamily="34" charset="-122"/>
-                <a:cs typeface="Calibri" pitchFamily="34" charset="-120"/>
-              </a:rPr>
-              <a:t>Loss slider: lost messages are resent and still arrive in order</a:t>
-            </a:r>
-            <a:endParaRPr lang="en-US" sz="1600" dirty="0"/>
-          </a:p>
-          <a:p>
-            <a:pPr marL="342900" indent="-342900">
-              <a:spcAft>
-                <a:spcPts val="800"/>
-              </a:spcAft>
-              <a:buSzPct val="100000"/>
-              <a:buChar char="•"/>
-            </a:pPr>
-            <a:r>
-              <a:rPr lang="en-US" sz="1600" dirty="0">
-                <a:solidFill>
-                  <a:srgbClr val="E6EDF3"/>
-                </a:solidFill>
-                <a:latin typeface="Calibri" pitchFamily="34" charset="0"/>
-                <a:ea typeface="Calibri" pitchFamily="34" charset="-122"/>
-                <a:cs typeface="Calibri" pitchFamily="34" charset="-120"/>
-              </a:rPr>
-              <a:t>Window controller switch: fixed, AIMD or Smart-RUDP (Q-learning, learns live)</a:t>
-            </a:r>
-            <a:endParaRPr lang="en-US" sz="1600" dirty="0"/>
-          </a:p>
-          <a:p>
-            <a:pPr marL="342900" indent="-342900">
-              <a:spcAft>
-                <a:spcPts val="800"/>
-              </a:spcAft>
-              <a:buSzPct val="100000"/>
-              <a:buChar char="•"/>
-            </a:pPr>
-            <a:r>
-              <a:rPr lang="en-US" sz="1600" dirty="0">
-                <a:solidFill>
-                  <a:srgbClr val="E6EDF3"/>
-                </a:solidFill>
-                <a:latin typeface="Calibri" pitchFamily="34" charset="0"/>
-                <a:ea typeface="Calibri" pitchFamily="34" charset="-122"/>
-                <a:cs typeface="Calibri" pitchFamily="34" charset="-120"/>
-              </a:rPr>
-              <a:t>Retrained for the chat: faster than AIMD on 5 of 6 held-out paths, equal on 1 (Table 11)</a:t>
-            </a:r>
-            <a:endParaRPr lang="en-US" sz="1600" dirty="0"/>
-          </a:p>
-          <a:p>
-            <a:pPr marL="342900" indent="-342900">
-              <a:spcAft>
-                <a:spcPts val="800"/>
-              </a:spcAft>
-              <a:buSzPct val="100000"/>
-              <a:buChar char="•"/>
-            </a:pPr>
-            <a:r>
-              <a:rPr lang="en-US" sz="1600" dirty="0">
-                <a:solidFill>
-                  <a:srgbClr val="E6EDF3"/>
-                </a:solidFill>
-                <a:latin typeface="Calibri" pitchFamily="34" charset="0"/>
-                <a:ea typeface="Calibri" pitchFamily="34" charset="-122"/>
-                <a:cs typeface="Calibri" pitchFamily="34" charset="-120"/>
-              </a:rPr>
-              <a:t>Stress test, 48 unseen random paths: Smart 3.73 s, AIMD 7.16 s mean; faster than AIMD on 27, slower on 5</a:t>
-            </a:r>
-            <a:endParaRPr lang="en-US" sz="1600" dirty="0"/>
+              <a:t>Right: smartrudp.seq == N shows the same segment sent twice, a retransmission</a:t>
+            </a:r>
+            <a:endParaRPr lang="en-US" sz="1500" dirty="0"/>
           </a:p>
         </p:txBody>
       </p:sp>
@@ -6868,7 +7368,7 @@
                 <a:ea typeface="Courier New" pitchFamily="34" charset="-122"/>
                 <a:cs typeface="Courier New" pitchFamily="34" charset="-120"/>
               </a:rPr>
-              <a:t>2 / 21   Smart-RUDP</a:t>
+              <a:t>2 / 22   Smart-RUDP</a:t>
             </a:r>
             <a:endParaRPr lang="en-US" sz="1000" dirty="0"/>
           </a:p>
@@ -7223,7 +7723,7 @@
                 <a:ea typeface="Courier New" pitchFamily="34" charset="-122"/>
                 <a:cs typeface="Courier New" pitchFamily="34" charset="-120"/>
               </a:rPr>
-              <a:t>Learnings and future work</a:t>
+              <a:t>Demo: RUDP Chat over the internet</a:t>
             </a:r>
             <a:endParaRPr lang="en-US" sz="3000" dirty="0"/>
           </a:p>
@@ -7262,86 +7762,46 @@
                 <a:ea typeface="Courier New" pitchFamily="34" charset="-122"/>
                 <a:cs typeface="Courier New" pitchFamily="34" charset="-120"/>
               </a:rPr>
-              <a:t>20 / 21   Smart-RUDP</a:t>
+              <a:t>20 / 22   Smart-RUDP</a:t>
             </a:r>
             <a:endParaRPr lang="en-US" sz="1000" dirty="0"/>
           </a:p>
         </p:txBody>
       </p:sp>
-      <p:sp>
-        <p:nvSpPr>
-          <p:cNvPr id="4" name="Shape 2"/>
-          <p:cNvSpPr/>
-          <p:nvPr/>
-        </p:nvSpPr>
-        <p:spPr>
-          <a:xfrm>
-            <a:off x="548640" y="1371600"/>
-            <a:ext cx="5394960" cy="4206240"/>
-          </a:xfrm>
-          <a:prstGeom prst="rect">
-            <a:avLst/>
-          </a:prstGeom>
-          <a:solidFill>
-            <a:srgbClr val="141B24"/>
-          </a:solidFill>
-          <a:ln w="12700">
-            <a:solidFill>
-              <a:srgbClr val="39FF88"/>
-            </a:solidFill>
-            <a:prstDash val="solid"/>
-          </a:ln>
-        </p:spPr>
-      </p:sp>
-      <p:sp>
-        <p:nvSpPr>
-          <p:cNvPr id="5" name="Text 3"/>
-          <p:cNvSpPr/>
-          <p:nvPr/>
-        </p:nvSpPr>
-        <p:spPr>
-          <a:xfrm>
-            <a:off x="731520" y="1508760"/>
-            <a:ext cx="5029200" cy="457200"/>
-          </a:xfrm>
-          <a:prstGeom prst="rect">
-            <a:avLst/>
-          </a:prstGeom>
-          <a:noFill/>
-          <a:ln/>
-        </p:spPr>
-        <p:txBody>
-          <a:bodyPr wrap="square" lIns="0" tIns="0" rIns="0" bIns="0" rtlCol="0" anchor="ctr"/>
-          <a:lstStyle/>
-          <a:p>
-            <a:pPr indent="0" marL="0">
-              <a:buNone/>
-            </a:pPr>
-            <a:r>
-              <a:rPr lang="en-US" sz="2000" b="1" dirty="0">
-                <a:solidFill>
-                  <a:srgbClr val="39FF88"/>
-                </a:solidFill>
-                <a:latin typeface="Courier New" pitchFamily="34" charset="0"/>
-                <a:ea typeface="Courier New" pitchFamily="34" charset="-122"/>
-                <a:cs typeface="Courier New" pitchFamily="34" charset="-120"/>
-              </a:rPr>
-              <a:t>Learned</a:t>
-            </a:r>
-            <a:endParaRPr lang="en-US" sz="2000" dirty="0"/>
-          </a:p>
-        </p:txBody>
-      </p:sp>
-      <p:sp>
-        <p:nvSpPr>
-          <p:cNvPr id="6" name="Text 4"/>
-          <p:cNvSpPr/>
-          <p:nvPr/>
-        </p:nvSpPr>
-        <p:spPr>
-          <a:xfrm>
-            <a:off x="731520" y="2011680"/>
-            <a:ext cx="5029200" cy="3429000"/>
+      <p:pic>
+        <p:nvPicPr>
+          <p:cNvPr id="4" name="Image 0" descr="web_chat.png">    </p:cNvPr>
+          <p:cNvPicPr>
+            <a:picLocks noChangeAspect="1"/>
+          </p:cNvPicPr>
+          <p:nvPr/>
+        </p:nvPicPr>
+        <p:blipFill>
+          <a:blip r:embed="rId1"/>
+          <a:stretch>
+            <a:fillRect/>
+          </a:stretch>
+        </p:blipFill>
+        <p:spPr>
+          <a:xfrm>
+            <a:off x="457200" y="1097280"/>
+            <a:ext cx="7223760" cy="4465597"/>
+          </a:xfrm>
+          <a:prstGeom prst="rect">
+            <a:avLst/>
+          </a:prstGeom>
+        </p:spPr>
+      </p:pic>
+      <p:sp>
+        <p:nvSpPr>
+          <p:cNvPr id="5" name="Text 2"/>
+          <p:cNvSpPr/>
+          <p:nvPr/>
+        </p:nvSpPr>
+        <p:spPr>
+          <a:xfrm>
+            <a:off x="7955280" y="1188720"/>
+            <a:ext cx="3840480" cy="4389120"/>
           </a:xfrm>
           <a:prstGeom prst="rect">
             <a:avLst/>
@@ -7353,11 +7813,15 @@
           <a:bodyPr wrap="square" lIns="0" tIns="0" rIns="0" bIns="0" rtlCol="0" anchor="t"/>
           <a:lstStyle/>
           <a:p>
-            <a:pPr indent="0" marL="0">
-              <a:buNone/>
-            </a:pPr>
-            <a:r>
-              <a:rPr lang="en-US" sz="2000" dirty="0">
+            <a:pPr marL="342900" indent="-342900">
+              <a:spcAft>
+                <a:spcPts val="800"/>
+              </a:spcAft>
+              <a:buSzPct val="100000"/>
+              <a:buChar char="•"/>
+            </a:pPr>
+            <a:r>
+              <a:rPr lang="en-US" sz="1600" dirty="0">
                 <a:solidFill>
                   <a:srgbClr val="E6EDF3"/>
                 </a:solidFill>
@@ -7365,16 +7829,20 @@
                 <a:ea typeface="Calibri" pitchFamily="34" charset="-122"/>
                 <a:cs typeface="Calibri" pitchFamily="34" charset="-120"/>
               </a:rPr>
-              <a:t>Reliability is a set of simple rules working together.</a:t>
-            </a:r>
-            <a:endParaRPr lang="en-US" sz="2000" dirty="0"/>
-          </a:p>
-          <a:p>
-            <a:pPr indent="0" marL="0">
-              <a:buNone/>
-            </a:pPr>
-            <a:r>
-              <a:rPr lang="en-US" sz="2000" dirty="0">
+              <a:t>Each message is one RUDP segment: numbered, checksummed, ACKed in order</a:t>
+            </a:r>
+            <a:endParaRPr lang="en-US" sz="1600" dirty="0"/>
+          </a:p>
+          <a:p>
+            <a:pPr marL="342900" indent="-342900">
+              <a:spcAft>
+                <a:spcPts val="800"/>
+              </a:spcAft>
+              <a:buSzPct val="100000"/>
+              <a:buChar char="•"/>
+            </a:pPr>
+            <a:r>
+              <a:rPr lang="en-US" sz="1600" dirty="0">
                 <a:solidFill>
                   <a:srgbClr val="E6EDF3"/>
                 </a:solidFill>
@@ -7382,16 +7850,20 @@
                 <a:ea typeface="Calibri" pitchFamily="34" charset="-122"/>
                 <a:cs typeface="Calibri" pitchFamily="34" charset="-120"/>
               </a:rPr>
-              <a:t>Congestion control matters as much as retransmission.</a:t>
-            </a:r>
-            <a:endParaRPr lang="en-US" sz="2000" dirty="0"/>
-          </a:p>
-          <a:p>
-            <a:pPr indent="0" marL="0">
-              <a:buNone/>
-            </a:pPr>
-            <a:r>
-              <a:rPr lang="en-US" sz="2000" dirty="0">
+              <a:t>Browser UI via a small gateway; terminal version too</a:t>
+            </a:r>
+            <a:endParaRPr lang="en-US" sz="1600" dirty="0"/>
+          </a:p>
+          <a:p>
+            <a:pPr marL="342900" indent="-342900">
+              <a:spcAft>
+                <a:spcPts val="800"/>
+              </a:spcAft>
+              <a:buSzPct val="100000"/>
+              <a:buChar char="•"/>
+            </a:pPr>
+            <a:r>
+              <a:rPr lang="en-US" sz="1600" dirty="0">
                 <a:solidFill>
                   <a:srgbClr val="E6EDF3"/>
                 </a:solidFill>
@@ -7399,102 +7871,20 @@
                 <a:ea typeface="Calibri" pitchFamily="34" charset="-122"/>
                 <a:cs typeface="Calibri" pitchFamily="34" charset="-120"/>
               </a:rPr>
-              <a:t>Testing tools fail in surprising ways.</a:t>
-            </a:r>
-            <a:endParaRPr lang="en-US" sz="2000" dirty="0"/>
-          </a:p>
-        </p:txBody>
-      </p:sp>
-      <p:sp>
-        <p:nvSpPr>
-          <p:cNvPr id="7" name="Shape 5"/>
-          <p:cNvSpPr/>
-          <p:nvPr/>
-        </p:nvSpPr>
-        <p:spPr>
-          <a:xfrm>
-            <a:off x="6217920" y="1371600"/>
-            <a:ext cx="5394960" cy="4206240"/>
-          </a:xfrm>
-          <a:prstGeom prst="rect">
-            <a:avLst/>
-          </a:prstGeom>
-          <a:solidFill>
-            <a:srgbClr val="141B24"/>
-          </a:solidFill>
-          <a:ln w="12700">
-            <a:solidFill>
-              <a:srgbClr val="FFB000"/>
-            </a:solidFill>
-            <a:prstDash val="solid"/>
-          </a:ln>
-        </p:spPr>
-      </p:sp>
-      <p:sp>
-        <p:nvSpPr>
-          <p:cNvPr id="8" name="Text 6"/>
-          <p:cNvSpPr/>
-          <p:nvPr/>
-        </p:nvSpPr>
-        <p:spPr>
-          <a:xfrm>
-            <a:off x="6400800" y="1508760"/>
-            <a:ext cx="5029200" cy="457200"/>
-          </a:xfrm>
-          <a:prstGeom prst="rect">
-            <a:avLst/>
-          </a:prstGeom>
-          <a:noFill/>
-          <a:ln/>
-        </p:spPr>
-        <p:txBody>
-          <a:bodyPr wrap="square" lIns="0" tIns="0" rIns="0" bIns="0" rtlCol="0" anchor="ctr"/>
-          <a:lstStyle/>
-          <a:p>
-            <a:pPr indent="0" marL="0">
-              <a:buNone/>
-            </a:pPr>
-            <a:r>
-              <a:rPr lang="en-US" sz="2000" b="1" dirty="0">
-                <a:solidFill>
-                  <a:srgbClr val="FFB000"/>
-                </a:solidFill>
-                <a:latin typeface="Courier New" pitchFamily="34" charset="0"/>
-                <a:ea typeface="Courier New" pitchFamily="34" charset="-122"/>
-                <a:cs typeface="Courier New" pitchFamily="34" charset="-120"/>
-              </a:rPr>
-              <a:t>Next</a:t>
-            </a:r>
-            <a:endParaRPr lang="en-US" sz="2000" dirty="0"/>
-          </a:p>
-        </p:txBody>
-      </p:sp>
-      <p:sp>
-        <p:nvSpPr>
-          <p:cNvPr id="9" name="Text 7"/>
-          <p:cNvSpPr/>
-          <p:nvPr/>
-        </p:nvSpPr>
-        <p:spPr>
-          <a:xfrm>
-            <a:off x="6400800" y="2011680"/>
-            <a:ext cx="5029200" cy="3429000"/>
-          </a:xfrm>
-          <a:prstGeom prst="rect">
-            <a:avLst/>
-          </a:prstGeom>
-          <a:noFill/>
-          <a:ln/>
-        </p:spPr>
-        <p:txBody>
-          <a:bodyPr wrap="square" lIns="0" tIns="0" rIns="0" bIns="0" rtlCol="0" anchor="t"/>
-          <a:lstStyle/>
-          <a:p>
-            <a:pPr indent="0" marL="0">
-              <a:buNone/>
-            </a:pPr>
-            <a:r>
-              <a:rPr lang="en-US" sz="2000" dirty="0">
+              <a:t>Two machines linked over Tailscale (laptop and phone)</a:t>
+            </a:r>
+            <a:endParaRPr lang="en-US" sz="1600" dirty="0"/>
+          </a:p>
+          <a:p>
+            <a:pPr marL="342900" indent="-342900">
+              <a:spcAft>
+                <a:spcPts val="800"/>
+              </a:spcAft>
+              <a:buSzPct val="100000"/>
+              <a:buChar char="•"/>
+            </a:pPr>
+            <a:r>
+              <a:rPr lang="en-US" sz="1600" dirty="0">
                 <a:solidFill>
                   <a:srgbClr val="E6EDF3"/>
                 </a:solidFill>
@@ -7502,16 +7892,20 @@
                 <a:ea typeface="Calibri" pitchFamily="34" charset="-122"/>
                 <a:cs typeface="Calibri" pitchFamily="34" charset="-120"/>
               </a:rPr>
-              <a:t>Selective Repeat / SACK</a:t>
-            </a:r>
-            <a:endParaRPr lang="en-US" sz="2000" dirty="0"/>
-          </a:p>
-          <a:p>
-            <a:pPr indent="0" marL="0">
-              <a:buNone/>
-            </a:pPr>
-            <a:r>
-              <a:rPr lang="en-US" sz="2000" dirty="0">
+              <a:t>Loss slider: lost messages are resent and still arrive in order</a:t>
+            </a:r>
+            <a:endParaRPr lang="en-US" sz="1600" dirty="0"/>
+          </a:p>
+          <a:p>
+            <a:pPr marL="342900" indent="-342900">
+              <a:spcAft>
+                <a:spcPts val="800"/>
+              </a:spcAft>
+              <a:buSzPct val="100000"/>
+              <a:buChar char="•"/>
+            </a:pPr>
+            <a:r>
+              <a:rPr lang="en-US" sz="1600" dirty="0">
                 <a:solidFill>
                   <a:srgbClr val="E6EDF3"/>
                 </a:solidFill>
@@ -7519,16 +7913,20 @@
                 <a:ea typeface="Calibri" pitchFamily="34" charset="-122"/>
                 <a:cs typeface="Calibri" pitchFamily="34" charset="-120"/>
               </a:rPr>
-              <a:t>A stronger learning agent</a:t>
-            </a:r>
-            <a:endParaRPr lang="en-US" sz="2000" dirty="0"/>
-          </a:p>
-          <a:p>
-            <a:pPr indent="0" marL="0">
-              <a:buNone/>
-            </a:pPr>
-            <a:r>
-              <a:rPr lang="en-US" sz="2000" dirty="0">
+              <a:t>Window controller switch: fixed, AIMD or Smart-RUDP (Q-learning, learns live)</a:t>
+            </a:r>
+            <a:endParaRPr lang="en-US" sz="1600" dirty="0"/>
+          </a:p>
+          <a:p>
+            <a:pPr marL="342900" indent="-342900">
+              <a:spcAft>
+                <a:spcPts val="800"/>
+              </a:spcAft>
+              <a:buSzPct val="100000"/>
+              <a:buChar char="•"/>
+            </a:pPr>
+            <a:r>
+              <a:rPr lang="en-US" sz="1600" dirty="0">
                 <a:solidFill>
                   <a:srgbClr val="E6EDF3"/>
                 </a:solidFill>
@@ -7536,16 +7934,20 @@
                 <a:ea typeface="Calibri" pitchFamily="34" charset="-122"/>
                 <a:cs typeface="Calibri" pitchFamily="34" charset="-120"/>
               </a:rPr>
-              <a:t>Kernel netem and real multi-machine tests</a:t>
-            </a:r>
-            <a:endParaRPr lang="en-US" sz="2000" dirty="0"/>
-          </a:p>
-          <a:p>
-            <a:pPr indent="0" marL="0">
-              <a:buNone/>
-            </a:pPr>
-            <a:r>
-              <a:rPr lang="en-US" sz="2000" dirty="0">
+              <a:t>Retrained for the chat: faster than AIMD on 5 of 6 held-out paths, equal on 1 (Table 11)</a:t>
+            </a:r>
+            <a:endParaRPr lang="en-US" sz="1600" dirty="0"/>
+          </a:p>
+          <a:p>
+            <a:pPr marL="342900" indent="-342900">
+              <a:spcAft>
+                <a:spcPts val="800"/>
+              </a:spcAft>
+              <a:buSzPct val="100000"/>
+              <a:buChar char="•"/>
+            </a:pPr>
+            <a:r>
+              <a:rPr lang="en-US" sz="1600" dirty="0">
                 <a:solidFill>
                   <a:srgbClr val="E6EDF3"/>
                 </a:solidFill>
@@ -7553,48 +7955,9 @@
                 <a:ea typeface="Calibri" pitchFamily="34" charset="-122"/>
                 <a:cs typeface="Calibri" pitchFamily="34" charset="-120"/>
               </a:rPr>
-              <a:t>Run RUDP across a real multi-machine network</a:t>
-            </a:r>
-            <a:endParaRPr lang="en-US" sz="2000" dirty="0"/>
-          </a:p>
-        </p:txBody>
-      </p:sp>
-      <p:sp>
-        <p:nvSpPr>
-          <p:cNvPr id="10" name="Text 8"/>
-          <p:cNvSpPr/>
-          <p:nvPr/>
-        </p:nvSpPr>
-        <p:spPr>
-          <a:xfrm>
-            <a:off x="548640" y="5852160"/>
-            <a:ext cx="10972800" cy="365760"/>
-          </a:xfrm>
-          <a:prstGeom prst="rect">
-            <a:avLst/>
-          </a:prstGeom>
-          <a:noFill/>
-          <a:ln/>
-        </p:spPr>
-        <p:txBody>
-          <a:bodyPr wrap="square" lIns="0" tIns="0" rIns="0" bIns="0" rtlCol="0" anchor="ctr"/>
-          <a:lstStyle/>
-          <a:p>
-            <a:pPr indent="0" marL="0">
-              <a:buNone/>
-            </a:pPr>
-            <a:r>
-              <a:rPr lang="en-US" sz="1400" dirty="0">
-                <a:solidFill>
-                  <a:srgbClr val="8B98A5"/>
-                </a:solidFill>
-                <a:latin typeface="Calibri" pitchFamily="34" charset="0"/>
-                <a:ea typeface="Calibri" pitchFamily="34" charset="-122"/>
-                <a:cs typeface="Calibri" pitchFamily="34" charset="-120"/>
-              </a:rPr>
-              <a:t>Limits: Go-Back-N wastes bandwidth; emulated (not kernel) paths; Smart-RUDP did not beat AIMD.</a:t>
-            </a:r>
-            <a:endParaRPr lang="en-US" sz="1400" dirty="0"/>
+              <a:t>Stress test, 48 unseen random paths: Smart 3.73 s, AIMD 7.16 s mean; faster than AIMD on 27, slower on 5</a:t>
+            </a:r>
+            <a:endParaRPr lang="en-US" sz="1600" dirty="0"/>
           </a:p>
         </p:txBody>
       </p:sp>
@@ -7638,8 +8001,8 @@
         </p:nvSpPr>
         <p:spPr>
           <a:xfrm>
-            <a:off x="731520" y="2103120"/>
-            <a:ext cx="10058400" cy="1097280"/>
+            <a:off x="548640" y="320040"/>
+            <a:ext cx="11064240" cy="731520"/>
           </a:xfrm>
           <a:prstGeom prst="rect">
             <a:avLst/>
@@ -7655,7 +8018,7 @@
               <a:buNone/>
             </a:pPr>
             <a:r>
-              <a:rPr lang="en-US" sz="6400" b="1" dirty="0">
+              <a:rPr lang="en-US" sz="3000" b="1" dirty="0">
                 <a:solidFill>
                   <a:srgbClr val="39FF88"/>
                 </a:solidFill>
@@ -7663,9 +8026,9 @@
                 <a:ea typeface="Courier New" pitchFamily="34" charset="-122"/>
                 <a:cs typeface="Courier New" pitchFamily="34" charset="-120"/>
               </a:rPr>
-              <a:t>Thank you</a:t>
-            </a:r>
-            <a:endParaRPr lang="en-US" sz="6400" dirty="0"/>
+              <a:t>Learnings and future work</a:t>
+            </a:r>
+            <a:endParaRPr lang="en-US" sz="3000" dirty="0"/>
           </a:p>
         </p:txBody>
       </p:sp>
@@ -7677,8 +8040,8 @@
         </p:nvSpPr>
         <p:spPr>
           <a:xfrm>
-            <a:off x="731520" y="3474720"/>
-            <a:ext cx="10058400" cy="548640"/>
+            <a:off x="9418320" y="6446520"/>
+            <a:ext cx="2377440" cy="274320"/>
           </a:xfrm>
           <a:prstGeom prst="rect">
             <a:avLst/>
@@ -7690,34 +8053,59 @@
           <a:bodyPr wrap="square" lIns="0" tIns="0" rIns="0" bIns="0" rtlCol="0" anchor="ctr"/>
           <a:lstStyle/>
           <a:p>
-            <a:pPr indent="0" marL="0">
-              <a:buNone/>
-            </a:pPr>
-            <a:r>
-              <a:rPr lang="en-US" sz="2600" dirty="0">
-                <a:solidFill>
-                  <a:srgbClr val="E6EDF3"/>
+            <a:pPr algn="r" indent="0" marL="0">
+              <a:buNone/>
+            </a:pPr>
+            <a:r>
+              <a:rPr lang="en-US" sz="1000" dirty="0">
+                <a:solidFill>
+                  <a:srgbClr val="8B98A5"/>
                 </a:solidFill>
                 <a:latin typeface="Courier New" pitchFamily="34" charset="0"/>
                 <a:ea typeface="Courier New" pitchFamily="34" charset="-122"/>
                 <a:cs typeface="Courier New" pitchFamily="34" charset="-120"/>
               </a:rPr>
-              <a:t>github.com/Capsturrrr/rudp</a:t>
-            </a:r>
-            <a:endParaRPr lang="en-US" sz="2600" dirty="0"/>
-          </a:p>
-        </p:txBody>
-      </p:sp>
-      <p:sp>
-        <p:nvSpPr>
-          <p:cNvPr id="4" name="Text 2"/>
-          <p:cNvSpPr/>
-          <p:nvPr/>
-        </p:nvSpPr>
-        <p:spPr>
-          <a:xfrm>
-            <a:off x="731520" y="4206240"/>
-            <a:ext cx="10058400" cy="457200"/>
+              <a:t>21 / 22   Smart-RUDP</a:t>
+            </a:r>
+            <a:endParaRPr lang="en-US" sz="1000" dirty="0"/>
+          </a:p>
+        </p:txBody>
+      </p:sp>
+      <p:sp>
+        <p:nvSpPr>
+          <p:cNvPr id="4" name="Shape 2"/>
+          <p:cNvSpPr/>
+          <p:nvPr/>
+        </p:nvSpPr>
+        <p:spPr>
+          <a:xfrm>
+            <a:off x="548640" y="1371600"/>
+            <a:ext cx="5394960" cy="4206240"/>
+          </a:xfrm>
+          <a:prstGeom prst="rect">
+            <a:avLst/>
+          </a:prstGeom>
+          <a:solidFill>
+            <a:srgbClr val="141B24"/>
+          </a:solidFill>
+          <a:ln w="12700">
+            <a:solidFill>
+              <a:srgbClr val="39FF88"/>
+            </a:solidFill>
+            <a:prstDash val="solid"/>
+          </a:ln>
+        </p:spPr>
+      </p:sp>
+      <p:sp>
+        <p:nvSpPr>
+          <p:cNvPr id="5" name="Text 3"/>
+          <p:cNvSpPr/>
+          <p:nvPr/>
+        </p:nvSpPr>
+        <p:spPr>
+          <a:xfrm>
+            <a:off x="731520" y="1508760"/>
+            <a:ext cx="5029200" cy="457200"/>
           </a:xfrm>
           <a:prstGeom prst="rect">
             <a:avLst/>
@@ -7733,17 +8121,283 @@
               <a:buNone/>
             </a:pPr>
             <a:r>
-              <a:rPr lang="en-US" sz="1800" dirty="0">
-                <a:solidFill>
-                  <a:srgbClr val="8B98A5"/>
+              <a:rPr lang="en-US" sz="2000" b="1" dirty="0">
+                <a:solidFill>
+                  <a:srgbClr val="39FF88"/>
+                </a:solidFill>
+                <a:latin typeface="Courier New" pitchFamily="34" charset="0"/>
+                <a:ea typeface="Courier New" pitchFamily="34" charset="-122"/>
+                <a:cs typeface="Courier New" pitchFamily="34" charset="-120"/>
+              </a:rPr>
+              <a:t>Learned</a:t>
+            </a:r>
+            <a:endParaRPr lang="en-US" sz="2000" dirty="0"/>
+          </a:p>
+        </p:txBody>
+      </p:sp>
+      <p:sp>
+        <p:nvSpPr>
+          <p:cNvPr id="6" name="Text 4"/>
+          <p:cNvSpPr/>
+          <p:nvPr/>
+        </p:nvSpPr>
+        <p:spPr>
+          <a:xfrm>
+            <a:off x="731520" y="2011680"/>
+            <a:ext cx="5029200" cy="3429000"/>
+          </a:xfrm>
+          <a:prstGeom prst="rect">
+            <a:avLst/>
+          </a:prstGeom>
+          <a:noFill/>
+          <a:ln/>
+        </p:spPr>
+        <p:txBody>
+          <a:bodyPr wrap="square" lIns="0" tIns="0" rIns="0" bIns="0" rtlCol="0" anchor="t"/>
+          <a:lstStyle/>
+          <a:p>
+            <a:pPr indent="0" marL="0">
+              <a:buNone/>
+            </a:pPr>
+            <a:r>
+              <a:rPr lang="en-US" sz="2000" dirty="0">
+                <a:solidFill>
+                  <a:srgbClr val="E6EDF3"/>
                 </a:solidFill>
                 <a:latin typeface="Calibri" pitchFamily="34" charset="0"/>
                 <a:ea typeface="Calibri" pitchFamily="34" charset="-122"/>
                 <a:cs typeface="Calibri" pitchFamily="34" charset="-120"/>
               </a:rPr>
-              <a:t>Harshavardhan Mallela   Rohit Arya   Shloak Sinha</a:t>
-            </a:r>
-            <a:endParaRPr lang="en-US" sz="1800" dirty="0"/>
+              <a:t>Reliability is a set of simple rules working together.</a:t>
+            </a:r>
+            <a:endParaRPr lang="en-US" sz="2000" dirty="0"/>
+          </a:p>
+          <a:p>
+            <a:pPr indent="0" marL="0">
+              <a:buNone/>
+            </a:pPr>
+            <a:r>
+              <a:rPr lang="en-US" sz="2000" dirty="0">
+                <a:solidFill>
+                  <a:srgbClr val="E6EDF3"/>
+                </a:solidFill>
+                <a:latin typeface="Calibri" pitchFamily="34" charset="0"/>
+                <a:ea typeface="Calibri" pitchFamily="34" charset="-122"/>
+                <a:cs typeface="Calibri" pitchFamily="34" charset="-120"/>
+              </a:rPr>
+              <a:t>Congestion control matters as much as retransmission.</a:t>
+            </a:r>
+            <a:endParaRPr lang="en-US" sz="2000" dirty="0"/>
+          </a:p>
+          <a:p>
+            <a:pPr indent="0" marL="0">
+              <a:buNone/>
+            </a:pPr>
+            <a:r>
+              <a:rPr lang="en-US" sz="2000" dirty="0">
+                <a:solidFill>
+                  <a:srgbClr val="E6EDF3"/>
+                </a:solidFill>
+                <a:latin typeface="Calibri" pitchFamily="34" charset="0"/>
+                <a:ea typeface="Calibri" pitchFamily="34" charset="-122"/>
+                <a:cs typeface="Calibri" pitchFamily="34" charset="-120"/>
+              </a:rPr>
+              <a:t>Testing tools fail in surprising ways.</a:t>
+            </a:r>
+            <a:endParaRPr lang="en-US" sz="2000" dirty="0"/>
+          </a:p>
+        </p:txBody>
+      </p:sp>
+      <p:sp>
+        <p:nvSpPr>
+          <p:cNvPr id="7" name="Shape 5"/>
+          <p:cNvSpPr/>
+          <p:nvPr/>
+        </p:nvSpPr>
+        <p:spPr>
+          <a:xfrm>
+            <a:off x="6217920" y="1371600"/>
+            <a:ext cx="5394960" cy="4206240"/>
+          </a:xfrm>
+          <a:prstGeom prst="rect">
+            <a:avLst/>
+          </a:prstGeom>
+          <a:solidFill>
+            <a:srgbClr val="141B24"/>
+          </a:solidFill>
+          <a:ln w="12700">
+            <a:solidFill>
+              <a:srgbClr val="FFB000"/>
+            </a:solidFill>
+            <a:prstDash val="solid"/>
+          </a:ln>
+        </p:spPr>
+      </p:sp>
+      <p:sp>
+        <p:nvSpPr>
+          <p:cNvPr id="8" name="Text 6"/>
+          <p:cNvSpPr/>
+          <p:nvPr/>
+        </p:nvSpPr>
+        <p:spPr>
+          <a:xfrm>
+            <a:off x="6400800" y="1508760"/>
+            <a:ext cx="5029200" cy="457200"/>
+          </a:xfrm>
+          <a:prstGeom prst="rect">
+            <a:avLst/>
+          </a:prstGeom>
+          <a:noFill/>
+          <a:ln/>
+        </p:spPr>
+        <p:txBody>
+          <a:bodyPr wrap="square" lIns="0" tIns="0" rIns="0" bIns="0" rtlCol="0" anchor="ctr"/>
+          <a:lstStyle/>
+          <a:p>
+            <a:pPr indent="0" marL="0">
+              <a:buNone/>
+            </a:pPr>
+            <a:r>
+              <a:rPr lang="en-US" sz="2000" b="1" dirty="0">
+                <a:solidFill>
+                  <a:srgbClr val="FFB000"/>
+                </a:solidFill>
+                <a:latin typeface="Courier New" pitchFamily="34" charset="0"/>
+                <a:ea typeface="Courier New" pitchFamily="34" charset="-122"/>
+                <a:cs typeface="Courier New" pitchFamily="34" charset="-120"/>
+              </a:rPr>
+              <a:t>Next</a:t>
+            </a:r>
+            <a:endParaRPr lang="en-US" sz="2000" dirty="0"/>
+          </a:p>
+        </p:txBody>
+      </p:sp>
+      <p:sp>
+        <p:nvSpPr>
+          <p:cNvPr id="9" name="Text 7"/>
+          <p:cNvSpPr/>
+          <p:nvPr/>
+        </p:nvSpPr>
+        <p:spPr>
+          <a:xfrm>
+            <a:off x="6400800" y="2011680"/>
+            <a:ext cx="5029200" cy="3429000"/>
+          </a:xfrm>
+          <a:prstGeom prst="rect">
+            <a:avLst/>
+          </a:prstGeom>
+          <a:noFill/>
+          <a:ln/>
+        </p:spPr>
+        <p:txBody>
+          <a:bodyPr wrap="square" lIns="0" tIns="0" rIns="0" bIns="0" rtlCol="0" anchor="t"/>
+          <a:lstStyle/>
+          <a:p>
+            <a:pPr indent="0" marL="0">
+              <a:buNone/>
+            </a:pPr>
+            <a:r>
+              <a:rPr lang="en-US" sz="2000" dirty="0">
+                <a:solidFill>
+                  <a:srgbClr val="E6EDF3"/>
+                </a:solidFill>
+                <a:latin typeface="Calibri" pitchFamily="34" charset="0"/>
+                <a:ea typeface="Calibri" pitchFamily="34" charset="-122"/>
+                <a:cs typeface="Calibri" pitchFamily="34" charset="-120"/>
+              </a:rPr>
+              <a:t>Selective Repeat / SACK</a:t>
+            </a:r>
+            <a:endParaRPr lang="en-US" sz="2000" dirty="0"/>
+          </a:p>
+          <a:p>
+            <a:pPr indent="0" marL="0">
+              <a:buNone/>
+            </a:pPr>
+            <a:r>
+              <a:rPr lang="en-US" sz="2000" dirty="0">
+                <a:solidFill>
+                  <a:srgbClr val="E6EDF3"/>
+                </a:solidFill>
+                <a:latin typeface="Calibri" pitchFamily="34" charset="0"/>
+                <a:ea typeface="Calibri" pitchFamily="34" charset="-122"/>
+                <a:cs typeface="Calibri" pitchFamily="34" charset="-120"/>
+              </a:rPr>
+              <a:t>A stronger learning agent</a:t>
+            </a:r>
+            <a:endParaRPr lang="en-US" sz="2000" dirty="0"/>
+          </a:p>
+          <a:p>
+            <a:pPr indent="0" marL="0">
+              <a:buNone/>
+            </a:pPr>
+            <a:r>
+              <a:rPr lang="en-US" sz="2000" dirty="0">
+                <a:solidFill>
+                  <a:srgbClr val="E6EDF3"/>
+                </a:solidFill>
+                <a:latin typeface="Calibri" pitchFamily="34" charset="0"/>
+                <a:ea typeface="Calibri" pitchFamily="34" charset="-122"/>
+                <a:cs typeface="Calibri" pitchFamily="34" charset="-120"/>
+              </a:rPr>
+              <a:t>Kernel netem and real multi-machine tests</a:t>
+            </a:r>
+            <a:endParaRPr lang="en-US" sz="2000" dirty="0"/>
+          </a:p>
+          <a:p>
+            <a:pPr indent="0" marL="0">
+              <a:buNone/>
+            </a:pPr>
+            <a:r>
+              <a:rPr lang="en-US" sz="2000" dirty="0">
+                <a:solidFill>
+                  <a:srgbClr val="E6EDF3"/>
+                </a:solidFill>
+                <a:latin typeface="Calibri" pitchFamily="34" charset="0"/>
+                <a:ea typeface="Calibri" pitchFamily="34" charset="-122"/>
+                <a:cs typeface="Calibri" pitchFamily="34" charset="-120"/>
+              </a:rPr>
+              <a:t>Run RUDP across a real multi-machine network</a:t>
+            </a:r>
+            <a:endParaRPr lang="en-US" sz="2000" dirty="0"/>
+          </a:p>
+        </p:txBody>
+      </p:sp>
+      <p:sp>
+        <p:nvSpPr>
+          <p:cNvPr id="10" name="Text 8"/>
+          <p:cNvSpPr/>
+          <p:nvPr/>
+        </p:nvSpPr>
+        <p:spPr>
+          <a:xfrm>
+            <a:off x="548640" y="5852160"/>
+            <a:ext cx="10972800" cy="365760"/>
+          </a:xfrm>
+          <a:prstGeom prst="rect">
+            <a:avLst/>
+          </a:prstGeom>
+          <a:noFill/>
+          <a:ln/>
+        </p:spPr>
+        <p:txBody>
+          <a:bodyPr wrap="square" lIns="0" tIns="0" rIns="0" bIns="0" rtlCol="0" anchor="ctr"/>
+          <a:lstStyle/>
+          <a:p>
+            <a:pPr indent="0" marL="0">
+              <a:buNone/>
+            </a:pPr>
+            <a:r>
+              <a:rPr lang="en-US" sz="1400" dirty="0">
+                <a:solidFill>
+                  <a:srgbClr val="8B98A5"/>
+                </a:solidFill>
+                <a:latin typeface="Calibri" pitchFamily="34" charset="0"/>
+                <a:ea typeface="Calibri" pitchFamily="34" charset="-122"/>
+                <a:cs typeface="Calibri" pitchFamily="34" charset="-120"/>
+              </a:rPr>
+              <a:t>Limits: Go-Back-N wastes bandwidth; emulated (not kernel) paths; Smart-RUDP did not beat AIMD.</a:t>
+            </a:r>
+            <a:endParaRPr lang="en-US" sz="1400" dirty="0"/>
           </a:p>
         </p:txBody>
       </p:sp>
@@ -7787,6 +8441,155 @@
         </p:nvSpPr>
         <p:spPr>
           <a:xfrm>
+            <a:off x="731520" y="2103120"/>
+            <a:ext cx="10058400" cy="1097280"/>
+          </a:xfrm>
+          <a:prstGeom prst="rect">
+            <a:avLst/>
+          </a:prstGeom>
+          <a:noFill/>
+          <a:ln/>
+        </p:spPr>
+        <p:txBody>
+          <a:bodyPr wrap="square" lIns="0" tIns="0" rIns="0" bIns="0" rtlCol="0" anchor="ctr"/>
+          <a:lstStyle/>
+          <a:p>
+            <a:pPr indent="0" marL="0">
+              <a:buNone/>
+            </a:pPr>
+            <a:r>
+              <a:rPr lang="en-US" sz="6400" b="1" dirty="0">
+                <a:solidFill>
+                  <a:srgbClr val="39FF88"/>
+                </a:solidFill>
+                <a:latin typeface="Courier New" pitchFamily="34" charset="0"/>
+                <a:ea typeface="Courier New" pitchFamily="34" charset="-122"/>
+                <a:cs typeface="Courier New" pitchFamily="34" charset="-120"/>
+              </a:rPr>
+              <a:t>Thank you</a:t>
+            </a:r>
+            <a:endParaRPr lang="en-US" sz="6400" dirty="0"/>
+          </a:p>
+        </p:txBody>
+      </p:sp>
+      <p:sp>
+        <p:nvSpPr>
+          <p:cNvPr id="3" name="Text 1"/>
+          <p:cNvSpPr/>
+          <p:nvPr/>
+        </p:nvSpPr>
+        <p:spPr>
+          <a:xfrm>
+            <a:off x="731520" y="3474720"/>
+            <a:ext cx="10058400" cy="548640"/>
+          </a:xfrm>
+          <a:prstGeom prst="rect">
+            <a:avLst/>
+          </a:prstGeom>
+          <a:noFill/>
+          <a:ln/>
+        </p:spPr>
+        <p:txBody>
+          <a:bodyPr wrap="square" lIns="0" tIns="0" rIns="0" bIns="0" rtlCol="0" anchor="ctr"/>
+          <a:lstStyle/>
+          <a:p>
+            <a:pPr indent="0" marL="0">
+              <a:buNone/>
+            </a:pPr>
+            <a:r>
+              <a:rPr lang="en-US" sz="2600" dirty="0">
+                <a:solidFill>
+                  <a:srgbClr val="E6EDF3"/>
+                </a:solidFill>
+                <a:latin typeface="Courier New" pitchFamily="34" charset="0"/>
+                <a:ea typeface="Courier New" pitchFamily="34" charset="-122"/>
+                <a:cs typeface="Courier New" pitchFamily="34" charset="-120"/>
+              </a:rPr>
+              <a:t>github.com/Capsturrrr/rudp</a:t>
+            </a:r>
+            <a:endParaRPr lang="en-US" sz="2600" dirty="0"/>
+          </a:p>
+        </p:txBody>
+      </p:sp>
+      <p:sp>
+        <p:nvSpPr>
+          <p:cNvPr id="4" name="Text 2"/>
+          <p:cNvSpPr/>
+          <p:nvPr/>
+        </p:nvSpPr>
+        <p:spPr>
+          <a:xfrm>
+            <a:off x="731520" y="4206240"/>
+            <a:ext cx="10058400" cy="457200"/>
+          </a:xfrm>
+          <a:prstGeom prst="rect">
+            <a:avLst/>
+          </a:prstGeom>
+          <a:noFill/>
+          <a:ln/>
+        </p:spPr>
+        <p:txBody>
+          <a:bodyPr wrap="square" lIns="0" tIns="0" rIns="0" bIns="0" rtlCol="0" anchor="ctr"/>
+          <a:lstStyle/>
+          <a:p>
+            <a:pPr indent="0" marL="0">
+              <a:buNone/>
+            </a:pPr>
+            <a:r>
+              <a:rPr lang="en-US" sz="1800" dirty="0">
+                <a:solidFill>
+                  <a:srgbClr val="8B98A5"/>
+                </a:solidFill>
+                <a:latin typeface="Calibri" pitchFamily="34" charset="0"/>
+                <a:ea typeface="Calibri" pitchFamily="34" charset="-122"/>
+                <a:cs typeface="Calibri" pitchFamily="34" charset="-120"/>
+              </a:rPr>
+              <a:t>Harshavardhan Mallela   Rohit Arya   Shloak Sinha</a:t>
+            </a:r>
+            <a:endParaRPr lang="en-US" sz="1800" dirty="0"/>
+          </a:p>
+        </p:txBody>
+      </p:sp>
+    </p:spTree>
+  </p:cSld>
+  <p:clrMapOvr>
+    <a:masterClrMapping/>
+  </p:clrMapOvr>
+</p:sld>
+</file>
+
+<file path=ppt/slides/slide23.xml><?xml version="1.0" encoding="utf-8"?>
+<p:sld xmlns:a="http://schemas.openxmlformats.org/drawingml/2006/main" xmlns:r="http://schemas.openxmlformats.org/officeDocument/2006/relationships" xmlns:p="http://schemas.openxmlformats.org/presentationml/2006/main">
+  <p:cSld name="Slide 23">
+    <p:bg>
+      <p:bgPr>
+        <a:solidFill>
+          <a:srgbClr val="0B0F14"/>
+        </a:solidFill>
+      </p:bgPr>
+    </p:bg>
+    <p:spTree>
+      <p:nvGrpSpPr>
+        <p:cNvPr id="1" name=""/>
+        <p:cNvGrpSpPr/>
+        <p:nvPr/>
+      </p:nvGrpSpPr>
+      <p:grpSpPr>
+        <a:xfrm>
+          <a:off x="0" y="0"/>
+          <a:ext cx="0" cy="0"/>
+          <a:chOff x="0" y="0"/>
+          <a:chExt cx="0" cy="0"/>
+        </a:xfrm>
+      </p:grpSpPr>
+      <p:sp>
+        <p:nvSpPr>
+          <p:cNvPr id="2" name="Text 0"/>
+          <p:cNvSpPr/>
+          <p:nvPr/>
+        </p:nvSpPr>
+        <p:spPr>
+          <a:xfrm>
             <a:off x="548640" y="320040"/>
             <a:ext cx="11064240" cy="731520"/>
           </a:xfrm>
@@ -8091,7 +8894,7 @@
                 <a:ea typeface="Courier New" pitchFamily="34" charset="-122"/>
                 <a:cs typeface="Courier New" pitchFamily="34" charset="-120"/>
               </a:rPr>
-              <a:t>3 / 21   Smart-RUDP</a:t>
+              <a:t>3 / 22   Smart-RUDP</a:t>
             </a:r>
             <a:endParaRPr lang="en-US" sz="1000" dirty="0"/>
           </a:p>
@@ -8485,7 +9288,7 @@
                 <a:ea typeface="Courier New" pitchFamily="34" charset="-122"/>
                 <a:cs typeface="Courier New" pitchFamily="34" charset="-120"/>
               </a:rPr>
-              <a:t>4 / 21   Smart-RUDP</a:t>
+              <a:t>4 / 22   Smart-RUDP</a:t>
             </a:r>
             <a:endParaRPr lang="en-US" sz="1000" dirty="0"/>
           </a:p>
@@ -9046,7 +9849,7 @@
                 <a:ea typeface="Courier New" pitchFamily="34" charset="-122"/>
                 <a:cs typeface="Courier New" pitchFamily="34" charset="-120"/>
               </a:rPr>
-              <a:t>5 / 21   Smart-RUDP</a:t>
+              <a:t>5 / 22   Smart-RUDP</a:t>
             </a:r>
             <a:endParaRPr lang="en-US" sz="1000" dirty="0"/>
           </a:p>
@@ -10485,7 +11288,7 @@
                 <a:ea typeface="Courier New" pitchFamily="34" charset="-122"/>
                 <a:cs typeface="Courier New" pitchFamily="34" charset="-120"/>
               </a:rPr>
-              <a:t>6 / 21   Smart-RUDP</a:t>
+              <a:t>6 / 22   Smart-RUDP</a:t>
             </a:r>
             <a:endParaRPr lang="en-US" sz="1000" dirty="0"/>
           </a:p>
@@ -11720,7 +12523,7 @@
                 <a:ea typeface="Courier New" pitchFamily="34" charset="-122"/>
                 <a:cs typeface="Courier New" pitchFamily="34" charset="-120"/>
               </a:rPr>
-              <a:t>7 / 21   Smart-RUDP</a:t>
+              <a:t>7 / 22   Smart-RUDP</a:t>
             </a:r>
             <a:endParaRPr lang="en-US" sz="1000" dirty="0"/>
           </a:p>
@@ -12163,7 +12966,7 @@
                 <a:ea typeface="Courier New" pitchFamily="34" charset="-122"/>
                 <a:cs typeface="Courier New" pitchFamily="34" charset="-120"/>
               </a:rPr>
-              <a:t>8 / 21   Smart-RUDP</a:t>
+              <a:t>8 / 22   Smart-RUDP</a:t>
             </a:r>
             <a:endParaRPr lang="en-US" sz="1000" dirty="0"/>
           </a:p>
@@ -12463,7 +13266,7 @@
                 <a:ea typeface="Courier New" pitchFamily="34" charset="-122"/>
                 <a:cs typeface="Courier New" pitchFamily="34" charset="-120"/>
               </a:rPr>
-              <a:t>9 / 21   Smart-RUDP</a:t>
+              <a:t>9 / 22   Smart-RUDP</a:t>
             </a:r>
             <a:endParaRPr lang="en-US" sz="1000" dirty="0"/>
           </a:p>

--- a/docs/RUDP_Presentation_with_notes.pptx
+++ b/docs/RUDP_Presentation_with_notes.pptx
@@ -1290,10 +1290,15 @@
               <a:t>- The code on the slide is simplified; the real files are in the repo.</a:t>
             </a:r>
           </a:p>
+          <a:p>
+            <a:r>
+              <a:t>- We also built a deep version: web/dqn.py is a small neural network, two hidden layers of 32, trained with DQN in the same simulator. It reads continuous inputs instead of buckets.</a:t>
+            </a:r>
+          </a:p>
           <a:p/>
           <a:p>
             <a:r>
-              <a:t>IF ASKED: Q: Is this deep RL? A: No, tabular Q-learning. 80 states fit in a table; a neural network is future work. Q: Where is it trained? A: web/train.py for the chat, the smart client trains online for the main experiments; table in results/q_chat.txt.</a:t>
+              <a:t>IF ASKED: Q: Is this deep RL? A: The C agent is tabular. The chat also has a deep agent, a small DQN in numpy (5-32-32-5). Q: Does deep beat the table? A: Modestly: 3.20 s vs 3.73 s mean on 48 unseen paths, faster on 19, slower on 6. Q: Any problem? A: Training is seed-sensitive: 1 of 4 seeds failed, so we select on validation paths. It is simulated and not in the C code. Q: Where is it trained? A: web/train.py for the chat, the smart client trains online for the main experiments; table in results/q_chat.txt.</a:t>
             </a:r>
           </a:p>
         </p:txBody>
@@ -1837,7 +1842,7 @@
           </a:p>
           <a:p>
             <a:r>
-              <a:t>- There is a controller switch: fixed window, AIMD, or Smart-RUDP. For the chat we retrained Smart-RUDP on simulated paths: it was faster than AIMD on 5 of 6 held-out paths and equal on 1, because AIMD resets to one packet on random loss. Say it is simulated, and that the agent may not shrink the window without a congestion signal. Stress test: 48 random paths the agent never trained on, 3 seeds each. Mean delivery time was 3.73 seconds for Smart-RUDP against 7.16 for AIMD. Smart-RUDP was faster on 27 paths, slower on 5, within 5 percent on 16. So on our data, in simulation, it beats AIMD in the chat setting.</a:t>
+              <a:t>- There is a controller switch: fixed window, AIMD, or Smart-RUDP. For the chat we retrained Smart-RUDP on simulated paths: it was faster than AIMD on 5 of 6 held-out paths and equal on 1, because AIMD resets to one packet on random loss. Say it is simulated, and that the agent may not shrink the window without a congestion signal. Stress test: 48 random paths the agent never trained on, 3 seeds each. Mean delivery time was 3.73 seconds for Smart-RUDP against 7.16 for AIMD. Smart-RUDP was faster on 27 paths, slower on 5, within 5 percent on 16. So on our data, in simulation, it beats AIMD in the chat setting. There is also a deep neural-network option in the controller dropdown; it gave 3.20 seconds mean on the stress paths against 3.73 for the table.</a:t>
             </a:r>
           </a:p>
           <a:p/>
@@ -6076,7 +6081,7 @@
               <a:buNone/>
             </a:pPr>
             <a:r>
-              <a:rPr lang="en-US" sz="1400" dirty="0">
+              <a:rPr lang="en-US" sz="1300" dirty="0">
                 <a:solidFill>
                   <a:srgbClr val="E6EDF3"/>
                 </a:solidFill>
@@ -6086,14 +6091,14 @@
               </a:rPr>
               <a:t>// state: 4 x 4 x 5 = 80 buckets</a:t>
             </a:r>
-            <a:endParaRPr lang="en-US" sz="1400" dirty="0"/>
+            <a:endParaRPr lang="en-US" sz="1300" dirty="0"/>
           </a:p>
           <a:p>
             <a:pPr indent="0" marL="0">
               <a:buNone/>
             </a:pPr>
             <a:r>
-              <a:rPr lang="en-US" sz="1400" dirty="0">
+              <a:rPr lang="en-US" sz="1300" dirty="0">
                 <a:solidFill>
                   <a:srgbClr val="E6EDF3"/>
                 </a:solidFill>
@@ -6103,20 +6108,20 @@
               </a:rPr>
               <a:t>s = (rtt_bucket*4 + loss_bucket)*5 + cwnd_bucket;</a:t>
             </a:r>
-            <a:endParaRPr lang="en-US" sz="1400" dirty="0"/>
+            <a:endParaRPr lang="en-US" sz="1300" dirty="0"/>
           </a:p>
           <a:p>
             <a:pPr indent="0" marL="0">
               <a:buNone/>
             </a:pPr>
-            <a:endParaRPr lang="en-US" sz="1400" dirty="0"/>
+            <a:endParaRPr lang="en-US" sz="1300" dirty="0"/>
           </a:p>
           <a:p>
             <a:pPr indent="0" marL="0">
               <a:buNone/>
             </a:pPr>
             <a:r>
-              <a:rPr lang="en-US" sz="1400" dirty="0">
+              <a:rPr lang="en-US" sz="1300" dirty="0">
                 <a:solidFill>
                   <a:srgbClr val="E6EDF3"/>
                 </a:solidFill>
@@ -6126,14 +6131,14 @@
               </a:rPr>
               <a:t>// choose: explore with prob. eps, else best</a:t>
             </a:r>
-            <a:endParaRPr lang="en-US" sz="1400" dirty="0"/>
+            <a:endParaRPr lang="en-US" sz="1300" dirty="0"/>
           </a:p>
           <a:p>
             <a:pPr indent="0" marL="0">
               <a:buNone/>
             </a:pPr>
             <a:r>
-              <a:rPr lang="en-US" sz="1400" dirty="0">
+              <a:rPr lang="en-US" sz="1300" dirty="0">
                 <a:solidFill>
                   <a:srgbClr val="E6EDF3"/>
                 </a:solidFill>
@@ -6143,14 +6148,14 @@
               </a:rPr>
               <a:t>int rl_choose(a, s) {</a:t>
             </a:r>
-            <a:endParaRPr lang="en-US" sz="1400" dirty="0"/>
+            <a:endParaRPr lang="en-US" sz="1300" dirty="0"/>
           </a:p>
           <a:p>
             <a:pPr indent="0" marL="0">
               <a:buNone/>
             </a:pPr>
             <a:r>
-              <a:rPr lang="en-US" sz="1400" dirty="0">
+              <a:rPr lang="en-US" sz="1300" dirty="0">
                 <a:solidFill>
                   <a:srgbClr val="E6EDF3"/>
                 </a:solidFill>
@@ -6160,14 +6165,14 @@
               </a:rPr>
               <a:t>  if (rand01() &lt; a-&gt;eps) return rand() % 5;</a:t>
             </a:r>
-            <a:endParaRPr lang="en-US" sz="1400" dirty="0"/>
+            <a:endParaRPr lang="en-US" sz="1300" dirty="0"/>
           </a:p>
           <a:p>
             <a:pPr indent="0" marL="0">
               <a:buNone/>
             </a:pPr>
             <a:r>
-              <a:rPr lang="en-US" sz="1400" dirty="0">
+              <a:rPr lang="en-US" sz="1300" dirty="0">
                 <a:solidFill>
                   <a:srgbClr val="E6EDF3"/>
                 </a:solidFill>
@@ -6177,14 +6182,14 @@
               </a:rPr>
               <a:t>  return argmax(a-&gt;q[s]);        // 5 actions</a:t>
             </a:r>
-            <a:endParaRPr lang="en-US" sz="1400" dirty="0"/>
+            <a:endParaRPr lang="en-US" sz="1300" dirty="0"/>
           </a:p>
           <a:p>
             <a:pPr indent="0" marL="0">
               <a:buNone/>
             </a:pPr>
             <a:r>
-              <a:rPr lang="en-US" sz="1400" dirty="0">
+              <a:rPr lang="en-US" sz="1300" dirty="0">
                 <a:solidFill>
                   <a:srgbClr val="E6EDF3"/>
                 </a:solidFill>
@@ -6194,20 +6199,20 @@
               </a:rPr>
               <a:t>}</a:t>
             </a:r>
-            <a:endParaRPr lang="en-US" sz="1400" dirty="0"/>
+            <a:endParaRPr lang="en-US" sz="1300" dirty="0"/>
           </a:p>
           <a:p>
             <a:pPr indent="0" marL="0">
               <a:buNone/>
             </a:pPr>
-            <a:endParaRPr lang="en-US" sz="1400" dirty="0"/>
+            <a:endParaRPr lang="en-US" sz="1300" dirty="0"/>
           </a:p>
           <a:p>
             <a:pPr indent="0" marL="0">
               <a:buNone/>
             </a:pPr>
             <a:r>
-              <a:rPr lang="en-US" sz="1400" dirty="0">
+              <a:rPr lang="en-US" sz="1300" dirty="0">
                 <a:solidFill>
                   <a:srgbClr val="E6EDF3"/>
                 </a:solidFill>
@@ -6217,14 +6222,14 @@
               </a:rPr>
               <a:t>// learn: the Q-learning update</a:t>
             </a:r>
-            <a:endParaRPr lang="en-US" sz="1400" dirty="0"/>
+            <a:endParaRPr lang="en-US" sz="1300" dirty="0"/>
           </a:p>
           <a:p>
             <a:pPr indent="0" marL="0">
               <a:buNone/>
             </a:pPr>
             <a:r>
-              <a:rPr lang="en-US" sz="1400" dirty="0">
+              <a:rPr lang="en-US" sz="1300" dirty="0">
                 <a:solidFill>
                   <a:srgbClr val="E6EDF3"/>
                 </a:solidFill>
@@ -6234,14 +6239,14 @@
               </a:rPr>
               <a:t>void rl_update(a, s, act, r, s2) {</a:t>
             </a:r>
-            <a:endParaRPr lang="en-US" sz="1400" dirty="0"/>
+            <a:endParaRPr lang="en-US" sz="1300" dirty="0"/>
           </a:p>
           <a:p>
             <a:pPr indent="0" marL="0">
               <a:buNone/>
             </a:pPr>
             <a:r>
-              <a:rPr lang="en-US" sz="1400" dirty="0">
+              <a:rPr lang="en-US" sz="1300" dirty="0">
                 <a:solidFill>
                   <a:srgbClr val="E6EDF3"/>
                 </a:solidFill>
@@ -6251,14 +6256,14 @@
               </a:rPr>
               <a:t>  target = r + a-&gt;gamma * max(a-&gt;q[s2]);</a:t>
             </a:r>
-            <a:endParaRPr lang="en-US" sz="1400" dirty="0"/>
+            <a:endParaRPr lang="en-US" sz="1300" dirty="0"/>
           </a:p>
           <a:p>
             <a:pPr indent="0" marL="0">
               <a:buNone/>
             </a:pPr>
             <a:r>
-              <a:rPr lang="en-US" sz="1400" dirty="0">
+              <a:rPr lang="en-US" sz="1300" dirty="0">
                 <a:solidFill>
                   <a:srgbClr val="E6EDF3"/>
                 </a:solidFill>
@@ -6268,14 +6273,14 @@
               </a:rPr>
               <a:t>  a-&gt;q[s][act] += a-&gt;alpha * (target - a-&gt;q[s][act]);</a:t>
             </a:r>
-            <a:endParaRPr lang="en-US" sz="1400" dirty="0"/>
+            <a:endParaRPr lang="en-US" sz="1300" dirty="0"/>
           </a:p>
           <a:p>
             <a:pPr indent="0" marL="0">
               <a:buNone/>
             </a:pPr>
             <a:r>
-              <a:rPr lang="en-US" sz="1400" dirty="0">
+              <a:rPr lang="en-US" sz="1300" dirty="0">
                 <a:solidFill>
                   <a:srgbClr val="E6EDF3"/>
                 </a:solidFill>
@@ -6285,7 +6290,7 @@
               </a:rPr>
               <a:t>}</a:t>
             </a:r>
-            <a:endParaRPr lang="en-US" sz="1400" dirty="0"/>
+            <a:endParaRPr lang="en-US" sz="1300" dirty="0"/>
           </a:p>
         </p:txBody>
       </p:sp>
@@ -6378,7 +6383,7 @@
               <a:buNone/>
             </a:pPr>
             <a:r>
-              <a:rPr lang="en-US" sz="1400" dirty="0">
+              <a:rPr lang="en-US" sz="1300" dirty="0">
                 <a:solidFill>
                   <a:srgbClr val="E6EDF3"/>
                 </a:solidFill>
@@ -6388,14 +6393,14 @@
               </a:rPr>
               <a:t>// once per RTT, in smart_client.c</a:t>
             </a:r>
-            <a:endParaRPr lang="en-US" sz="1400" dirty="0"/>
+            <a:endParaRPr lang="en-US" sz="1300" dirty="0"/>
           </a:p>
           <a:p>
             <a:pPr indent="0" marL="0">
               <a:buNone/>
             </a:pPr>
             <a:r>
-              <a:rPr lang="en-US" sz="1400" dirty="0">
+              <a:rPr lang="en-US" sz="1300" dirty="0">
                 <a:solidFill>
                   <a:srgbClr val="E6EDF3"/>
                 </a:solidFill>
@@ -6405,20 +6410,20 @@
               </a:rPr>
               <a:t>ratio = rtt / base_rtt;   lossf = losses / sent;</a:t>
             </a:r>
-            <a:endParaRPr lang="en-US" sz="1400" dirty="0"/>
+            <a:endParaRPr lang="en-US" sz="1300" dirty="0"/>
           </a:p>
           <a:p>
             <a:pPr indent="0" marL="0">
               <a:buNone/>
             </a:pPr>
-            <a:endParaRPr lang="en-US" sz="1400" dirty="0"/>
+            <a:endParaRPr lang="en-US" sz="1300" dirty="0"/>
           </a:p>
           <a:p>
             <a:pPr indent="0" marL="0">
               <a:buNone/>
             </a:pPr>
             <a:r>
-              <a:rPr lang="en-US" sz="1400" dirty="0">
+              <a:rPr lang="en-US" sz="1300" dirty="0">
                 <a:solidFill>
                   <a:srgbClr val="E6EDF3"/>
                 </a:solidFill>
@@ -6428,14 +6433,14 @@
               </a:rPr>
               <a:t>reward = sqrt(throughput_norm)</a:t>
             </a:r>
-            <a:endParaRPr lang="en-US" sz="1400" dirty="0"/>
+            <a:endParaRPr lang="en-US" sz="1300" dirty="0"/>
           </a:p>
           <a:p>
             <a:pPr indent="0" marL="0">
               <a:buNone/>
             </a:pPr>
             <a:r>
-              <a:rPr lang="en-US" sz="1400" dirty="0">
+              <a:rPr lang="en-US" sz="1300" dirty="0">
                 <a:solidFill>
                   <a:srgbClr val="E6EDF3"/>
                 </a:solidFill>
@@ -6445,14 +6450,14 @@
               </a:rPr>
               <a:t>       - 0.5 * max(0, ratio - 1)   // delay growth</a:t>
             </a:r>
-            <a:endParaRPr lang="en-US" sz="1400" dirty="0"/>
+            <a:endParaRPr lang="en-US" sz="1300" dirty="0"/>
           </a:p>
           <a:p>
             <a:pPr indent="0" marL="0">
               <a:buNone/>
             </a:pPr>
             <a:r>
-              <a:rPr lang="en-US" sz="1400" dirty="0">
+              <a:rPr lang="en-US" sz="1300" dirty="0">
                 <a:solidFill>
                   <a:srgbClr val="E6EDF3"/>
                 </a:solidFill>
@@ -6462,20 +6467,20 @@
               </a:rPr>
               <a:t>       - 4.0 * lossf;              // loss</a:t>
             </a:r>
-            <a:endParaRPr lang="en-US" sz="1400" dirty="0"/>
+            <a:endParaRPr lang="en-US" sz="1300" dirty="0"/>
           </a:p>
           <a:p>
             <a:pPr indent="0" marL="0">
               <a:buNone/>
             </a:pPr>
-            <a:endParaRPr lang="en-US" sz="1400" dirty="0"/>
+            <a:endParaRPr lang="en-US" sz="1300" dirty="0"/>
           </a:p>
           <a:p>
             <a:pPr indent="0" marL="0">
               <a:buNone/>
             </a:pPr>
             <a:r>
-              <a:rPr lang="en-US" sz="1400" dirty="0">
+              <a:rPr lang="en-US" sz="1300" dirty="0">
                 <a:solidFill>
                   <a:srgbClr val="E6EDF3"/>
                 </a:solidFill>
@@ -6485,14 +6490,14 @@
               </a:rPr>
               <a:t>rl_update(&amp;ag, prev_s, prev_a, reward, s2);</a:t>
             </a:r>
-            <a:endParaRPr lang="en-US" sz="1400" dirty="0"/>
+            <a:endParaRPr lang="en-US" sz="1300" dirty="0"/>
           </a:p>
           <a:p>
             <a:pPr indent="0" marL="0">
               <a:buNone/>
             </a:pPr>
             <a:r>
-              <a:rPr lang="en-US" sz="1400" dirty="0">
+              <a:rPr lang="en-US" sz="1300" dirty="0">
                 <a:solidFill>
                   <a:srgbClr val="E6EDF3"/>
                 </a:solidFill>
@@ -6502,14 +6507,14 @@
               </a:rPr>
               <a:t>act   = rl_choose(&amp;ag, s2);</a:t>
             </a:r>
-            <a:endParaRPr lang="en-US" sz="1400" dirty="0"/>
+            <a:endParaRPr lang="en-US" sz="1300" dirty="0"/>
           </a:p>
           <a:p>
             <a:pPr indent="0" marL="0">
               <a:buNone/>
             </a:pPr>
             <a:r>
-              <a:rPr lang="en-US" sz="1400" dirty="0">
+              <a:rPr lang="en-US" sz="1300" dirty="0">
                 <a:solidFill>
                   <a:srgbClr val="E6EDF3"/>
                 </a:solidFill>
@@ -6519,7 +6524,7 @@
               </a:rPr>
               <a:t>cwnd *= {0.5, 0.85, 1.0, 1.15, 1.5}[act];</a:t>
             </a:r>
-            <a:endParaRPr lang="en-US" sz="1400" dirty="0"/>
+            <a:endParaRPr lang="en-US" sz="1300" dirty="0"/>
           </a:p>
         </p:txBody>
       </p:sp>
@@ -6556,7 +6561,7 @@
                 <a:ea typeface="Calibri" pitchFamily="34" charset="-122"/>
                 <a:cs typeface="Calibri" pitchFamily="34" charset="-120"/>
               </a:rPr>
-              <a:t>Tabular Q-learning: alpha 0.15, gamma 0.9. The chat version (web/cc.py) uses the same state and actions; trained offline in web/train.py, table saved in results/q_chat.txt. A neural network (deep RL) is future work: 80 states do not need one.</a:t>
+              <a:t>Tabular Q-learning: alpha 0.15, gamma 0.9. Chat version: web/cc.py, trained in web/train.py (results/q_chat.txt). Deep version: web/dqn.py, a small neural network (5-32-32-5) trained by DQN in web/train_deep.py.</a:t>
             </a:r>
             <a:endParaRPr lang="en-US" sz="1500" dirty="0"/>
           </a:p>
@@ -7801,7 +7806,7 @@
         <p:spPr>
           <a:xfrm>
             <a:off x="7955280" y="1188720"/>
-            <a:ext cx="3840480" cy="4389120"/>
+            <a:ext cx="3840480" cy="4937760"/>
           </a:xfrm>
           <a:prstGeom prst="rect">
             <a:avLst/>
@@ -7821,7 +7826,7 @@
               <a:buChar char="•"/>
             </a:pPr>
             <a:r>
-              <a:rPr lang="en-US" sz="1600" dirty="0">
+              <a:rPr lang="en-US" sz="1400" dirty="0">
                 <a:solidFill>
                   <a:srgbClr val="E6EDF3"/>
                 </a:solidFill>
@@ -7831,7 +7836,7 @@
               </a:rPr>
               <a:t>Each message is one RUDP segment: numbered, checksummed, ACKed in order</a:t>
             </a:r>
-            <a:endParaRPr lang="en-US" sz="1600" dirty="0"/>
+            <a:endParaRPr lang="en-US" sz="1400" dirty="0"/>
           </a:p>
           <a:p>
             <a:pPr marL="342900" indent="-342900">
@@ -7842,7 +7847,7 @@
               <a:buChar char="•"/>
             </a:pPr>
             <a:r>
-              <a:rPr lang="en-US" sz="1600" dirty="0">
+              <a:rPr lang="en-US" sz="1400" dirty="0">
                 <a:solidFill>
                   <a:srgbClr val="E6EDF3"/>
                 </a:solidFill>
@@ -7852,7 +7857,7 @@
               </a:rPr>
               <a:t>Browser UI via a small gateway; terminal version too</a:t>
             </a:r>
-            <a:endParaRPr lang="en-US" sz="1600" dirty="0"/>
+            <a:endParaRPr lang="en-US" sz="1400" dirty="0"/>
           </a:p>
           <a:p>
             <a:pPr marL="342900" indent="-342900">
@@ -7863,7 +7868,7 @@
               <a:buChar char="•"/>
             </a:pPr>
             <a:r>
-              <a:rPr lang="en-US" sz="1600" dirty="0">
+              <a:rPr lang="en-US" sz="1400" dirty="0">
                 <a:solidFill>
                   <a:srgbClr val="E6EDF3"/>
                 </a:solidFill>
@@ -7873,7 +7878,7 @@
               </a:rPr>
               <a:t>Two machines linked over Tailscale (laptop and phone)</a:t>
             </a:r>
-            <a:endParaRPr lang="en-US" sz="1600" dirty="0"/>
+            <a:endParaRPr lang="en-US" sz="1400" dirty="0"/>
           </a:p>
           <a:p>
             <a:pPr marL="342900" indent="-342900">
@@ -7884,7 +7889,7 @@
               <a:buChar char="•"/>
             </a:pPr>
             <a:r>
-              <a:rPr lang="en-US" sz="1600" dirty="0">
+              <a:rPr lang="en-US" sz="1400" dirty="0">
                 <a:solidFill>
                   <a:srgbClr val="E6EDF3"/>
                 </a:solidFill>
@@ -7894,7 +7899,7 @@
               </a:rPr>
               <a:t>Loss slider: lost messages are resent and still arrive in order</a:t>
             </a:r>
-            <a:endParaRPr lang="en-US" sz="1600" dirty="0"/>
+            <a:endParaRPr lang="en-US" sz="1400" dirty="0"/>
           </a:p>
           <a:p>
             <a:pPr marL="342900" indent="-342900">
@@ -7905,7 +7910,7 @@
               <a:buChar char="•"/>
             </a:pPr>
             <a:r>
-              <a:rPr lang="en-US" sz="1600" dirty="0">
+              <a:rPr lang="en-US" sz="1400" dirty="0">
                 <a:solidFill>
                   <a:srgbClr val="E6EDF3"/>
                 </a:solidFill>
@@ -7915,7 +7920,7 @@
               </a:rPr>
               <a:t>Window controller switch: fixed, AIMD or Smart-RUDP (Q-learning, learns live)</a:t>
             </a:r>
-            <a:endParaRPr lang="en-US" sz="1600" dirty="0"/>
+            <a:endParaRPr lang="en-US" sz="1400" dirty="0"/>
           </a:p>
           <a:p>
             <a:pPr marL="342900" indent="-342900">
@@ -7926,7 +7931,7 @@
               <a:buChar char="•"/>
             </a:pPr>
             <a:r>
-              <a:rPr lang="en-US" sz="1600" dirty="0">
+              <a:rPr lang="en-US" sz="1400" dirty="0">
                 <a:solidFill>
                   <a:srgbClr val="E6EDF3"/>
                 </a:solidFill>
@@ -7936,7 +7941,7 @@
               </a:rPr>
               <a:t>Retrained for the chat: faster than AIMD on 5 of 6 held-out paths, equal on 1 (Table 11)</a:t>
             </a:r>
-            <a:endParaRPr lang="en-US" sz="1600" dirty="0"/>
+            <a:endParaRPr lang="en-US" sz="1400" dirty="0"/>
           </a:p>
           <a:p>
             <a:pPr marL="342900" indent="-342900">
@@ -7947,7 +7952,7 @@
               <a:buChar char="•"/>
             </a:pPr>
             <a:r>
-              <a:rPr lang="en-US" sz="1600" dirty="0">
+              <a:rPr lang="en-US" sz="1400" dirty="0">
                 <a:solidFill>
                   <a:srgbClr val="E6EDF3"/>
                 </a:solidFill>
@@ -7955,9 +7960,30 @@
                 <a:ea typeface="Calibri" pitchFamily="34" charset="-122"/>
                 <a:cs typeface="Calibri" pitchFamily="34" charset="-120"/>
               </a:rPr>
-              <a:t>Stress test, 48 unseen random paths: Smart 3.73 s, AIMD 7.16 s mean; faster than AIMD on 27, slower on 5</a:t>
-            </a:r>
-            <a:endParaRPr lang="en-US" sz="1600" dirty="0"/>
+              <a:t>Stress test, 48 unseen paths: table 3.73 s, deep (DQN) 3.20 s, AIMD 7.16 s</a:t>
+            </a:r>
+            <a:endParaRPr lang="en-US" sz="1400" dirty="0"/>
+          </a:p>
+          <a:p>
+            <a:pPr marL="342900" indent="-342900">
+              <a:spcAft>
+                <a:spcPts val="800"/>
+              </a:spcAft>
+              <a:buSzPct val="100000"/>
+              <a:buChar char="•"/>
+            </a:pPr>
+            <a:r>
+              <a:rPr lang="en-US" sz="1400" dirty="0">
+                <a:solidFill>
+                  <a:srgbClr val="E6EDF3"/>
+                </a:solidFill>
+                <a:latin typeface="Calibri" pitchFamily="34" charset="0"/>
+                <a:ea typeface="Calibri" pitchFamily="34" charset="-122"/>
+                <a:cs typeface="Calibri" pitchFamily="34" charset="-120"/>
+              </a:rPr>
+              <a:t>Deep agent is seed-sensitive, so picked on validation paths</a:t>
+            </a:r>
+            <a:endParaRPr lang="en-US" sz="1400" dirty="0"/>
           </a:p>
         </p:txBody>
       </p:sp>

--- a/docs/RUDP_Presentation_with_notes.pptx
+++ b/docs/RUDP_Presentation_with_notes.pptx
@@ -28,9 +28,10 @@
     <p:sldId id="276" r:id="rId22"/>
     <p:sldId id="277" r:id="rId23"/>
     <p:sldId id="278" r:id="rId24"/>
+    <p:sldId id="279" r:id="rId25"/>
   </p:sldIdLst>
   <p:notesMasterIdLst>
-    <p:notesMasterId r:id="rId25"/>
+    <p:notesMasterId r:id="rId26"/>
   </p:notesMasterIdLst>
   <p:sldSz cx="12192000" cy="6858000"/>
   <p:notesSz cx="6858000" cy="12192000"/>
@@ -1934,28 +1935,43 @@
           <a:lstStyle/>
           <a:p>
             <a:r>
-              <a:t>SAY (0:50):</a:t>
-            </a:r>
-          </a:p>
-          <a:p>
-            <a:r>
-              <a:t>- Learned: reliability is a set of simple rules working together; congestion control matters as much as retransmission; testing tools fail in surprising ways.</a:t>
-            </a:r>
-          </a:p>
-          <a:p>
-            <a:r>
-              <a:t>- Next: Selective Repeat with SACK, a stronger learning agent, adaptive timeout, and tests on a real multi-machine network.</a:t>
-            </a:r>
-          </a:p>
-          <a:p>
-            <a:r>
-              <a:t>- Name the limits before she does: Go-Back-N, loopback-only protocol tests, Smart-RUDP not beating AIMD.</a:t>
+              <a:t>SAY (1:00):</a:t>
+            </a:r>
+          </a:p>
+          <a:p>
+            <a:r>
+              <a:t>- The abstract also promised TCP and plain UDP baselines, so we ran them on the same 48 unseen simulated paths.</a:t>
+            </a:r>
+          </a:p>
+          <a:p>
+            <a:r>
+              <a:t>- Plain UDP delivered only 68 percent of the messages, so reliability is needed. Our TCP model, with selective acknowledgments, has the lowest median at 1.48 seconds.</a:t>
+            </a:r>
+          </a:p>
+          <a:p>
+            <a:r>
+              <a:t>- Smart-RUDP deep is at 3.20 seconds mean and is about even with the TCP model path by path: faster on 22, slower on 23.</a:t>
+            </a:r>
+          </a:p>
+          <a:p>
+            <a:r>
+              <a:t>- The gap to TCP is mostly Go-Back-N. A selective-ack version of our transport cut AIMD from 7.16 to 4.90 seconds in simulation.</a:t>
+            </a:r>
+          </a:p>
+          <a:p>
+            <a:r>
+              <a:t>- Reordering hurts Go-Back-N badly: AIMD goes from 0.82 to 6.79 seconds at 20 milliseconds of jitter. The learned agents cope better and selective ack removes most of the damage.</a:t>
+            </a:r>
+          </a:p>
+          <a:p>
+            <a:r>
+              <a:t>- For the C experiments we repeated 20 runs per mode: Smart-RUDP is still slower on 5G and satellite and ties on lossy.</a:t>
             </a:r>
           </a:p>
           <a:p/>
           <a:p>
             <a:r>
-              <a:t>IF ASKED: End on the limits and the fix order: SACK, adaptive timeout, real-network tests.</a:t>
+              <a:t>IF ASKED: Q: Is the TCP row real TCP? A: No, it is a model with the same window cap; real kernel TCP needs netem on Linux, and we provide the script. Q: Why did you not implement SACK in C? A: Time; the simulation shows it is the biggest win and it is the first item of future work. Q: Is 20 runs enough? A: The intervals exclude zero for 5G and satellite and include zero for lossy.</a:t>
             </a:r>
           </a:p>
         </p:txBody>
@@ -2041,18 +2057,28 @@
           <a:lstStyle/>
           <a:p>
             <a:r>
-              <a:t>SAY (0:15):</a:t>
-            </a:r>
-          </a:p>
-          <a:p>
-            <a:r>
-              <a:t>- Thank you. The code, report and captures are at github.com/Capsturrrr/rudp. Happy to take questions.</a:t>
+              <a:t>SAY (0:50):</a:t>
+            </a:r>
+          </a:p>
+          <a:p>
+            <a:r>
+              <a:t>- Learned: reliability is a set of simple rules working together; congestion control matters as much as retransmission; testing tools fail in surprising ways.</a:t>
+            </a:r>
+          </a:p>
+          <a:p>
+            <a:r>
+              <a:t>- Next: Selective Repeat with SACK, a stronger learning agent, adaptive timeout, and tests on a real multi-machine network.</a:t>
+            </a:r>
+          </a:p>
+          <a:p>
+            <a:r>
+              <a:t>- Name the limits before she does: Go-Back-N, loopback-only protocol tests, Smart-RUDP not beating AIMD.</a:t>
             </a:r>
           </a:p>
           <a:p/>
           <a:p>
             <a:r>
-              <a:t>IF ASKED: Pause and smile; hand over to questions.</a:t>
+              <a:t>IF ASKED: End on the limits and the fix order: SACK, adaptive timeout, real-network tests.</a:t>
             </a:r>
           </a:p>
         </p:txBody>
@@ -2138,18 +2164,18 @@
           <a:lstStyle/>
           <a:p>
             <a:r>
-              <a:t>SAY (-):</a:t>
-            </a:r>
-          </a:p>
-          <a:p>
-            <a:r>
-              <a:t>- Only if asked: the window starts at 1, adds 1 per ACK until the threshold 16, then 1/window per ACK. In the 62-packet run the final window was 18.71.</a:t>
+              <a:t>SAY (0:15):</a:t>
+            </a:r>
+          </a:p>
+          <a:p>
+            <a:r>
+              <a:t>- Thank you. The code, report and captures are at github.com/Capsturrrr/rudp. Happy to take questions.</a:t>
             </a:r>
           </a:p>
           <a:p/>
           <a:p>
             <a:r>
-              <a:t>IF ASKED: Use this slide to answer 'show me congestion avoidance'.</a:t>
+              <a:t>IF ASKED: Pause and smile; hand over to questions.</a:t>
             </a:r>
           </a:p>
         </p:txBody>
@@ -2172,6 +2198,103 @@
             <a:fld id="{F7021451-1387-4CA6-816F-3879F97B5CBC}" type="slidenum">
               <a:rPr lang="en-US"/>
               <a:t>23</a:t>
+            </a:fld>
+            <a:endParaRPr lang="en-US"/>
+          </a:p>
+        </p:txBody>
+      </p:sp>
+    </p:spTree>
+    <p:extLst>
+      <p:ext uri="{BB962C8B-B14F-4D97-AF65-F5344CB8AC3E}">
+        <p14:creationId xmlns:p14="http://schemas.microsoft.com/office/powerpoint/2010/main" val="1024086991"/>
+      </p:ext>
+    </p:extLst>
+  </p:cSld>
+  <p:clrMapOvr>
+    <a:masterClrMapping/>
+  </p:clrMapOvr>
+</p:notes>
+</file>
+
+<file path=ppt/notesSlides/notesSlide24.xml><?xml version="1.0" encoding="utf-8"?>
+<p:notes xmlns:a="http://schemas.openxmlformats.org/drawingml/2006/main" xmlns:r="http://schemas.openxmlformats.org/officeDocument/2006/relationships" xmlns:p="http://schemas.openxmlformats.org/presentationml/2006/main">
+  <p:cSld>
+    <p:spTree>
+      <p:nvGrpSpPr>
+        <p:cNvPr id="1" name=""/>
+        <p:cNvGrpSpPr/>
+        <p:nvPr/>
+      </p:nvGrpSpPr>
+      <p:grpSpPr>
+        <a:xfrm>
+          <a:off x="0" y="0"/>
+          <a:ext cx="0" cy="0"/>
+          <a:chOff x="0" y="0"/>
+          <a:chExt cx="0" cy="0"/>
+        </a:xfrm>
+      </p:grpSpPr>
+      <p:sp>
+        <p:nvSpPr>
+          <p:cNvPr id="2" name="Slide Image Placeholder 1"/>
+          <p:cNvSpPr>
+            <a:spLocks noGrp="1" noRot="1" noChangeAspect="1"/>
+          </p:cNvSpPr>
+          <p:nvPr>
+            <p:ph type="sldImg"/>
+          </p:nvPr>
+        </p:nvSpPr>
+        <p:spPr/>
+      </p:sp>
+      <p:sp>
+        <p:nvSpPr>
+          <p:cNvPr id="3" name="Notes Placeholder 2"/>
+          <p:cNvSpPr>
+            <a:spLocks noGrp="1"/>
+          </p:cNvSpPr>
+          <p:nvPr>
+            <p:ph type="body" idx="1"/>
+          </p:nvPr>
+        </p:nvSpPr>
+        <p:spPr/>
+        <p:txBody>
+          <a:bodyPr/>
+          <a:lstStyle/>
+          <a:p>
+            <a:r>
+              <a:t>SAY (-):</a:t>
+            </a:r>
+          </a:p>
+          <a:p>
+            <a:r>
+              <a:t>- Only if asked: the window starts at 1, adds 1 per ACK until the threshold 16, then 1/window per ACK. In the 62-packet run the final window was 18.71.</a:t>
+            </a:r>
+          </a:p>
+          <a:p/>
+          <a:p>
+            <a:r>
+              <a:t>IF ASKED: Use this slide to answer 'show me congestion avoidance'.</a:t>
+            </a:r>
+          </a:p>
+        </p:txBody>
+      </p:sp>
+      <p:sp>
+        <p:nvSpPr>
+          <p:cNvPr id="4" name="Slide Number Placeholder 3"/>
+          <p:cNvSpPr>
+            <a:spLocks noGrp="1"/>
+          </p:cNvSpPr>
+          <p:nvPr>
+            <p:ph type="sldNum" sz="quarter" idx="10"/>
+          </p:nvPr>
+        </p:nvSpPr>
+        <p:spPr/>
+        <p:txBody>
+          <a:bodyPr/>
+          <a:lstStyle/>
+          <a:p>
+            <a:fld id="{F7021451-1387-4CA6-816F-3879F97B5CBC}" type="slidenum">
+              <a:rPr lang="en-US"/>
+              <a:t>24</a:t>
             </a:fld>
             <a:endParaRPr lang="en-US"/>
           </a:p>
@@ -3520,7 +3643,7 @@
                 <a:ea typeface="Courier New" pitchFamily="34" charset="-122"/>
                 <a:cs typeface="Courier New" pitchFamily="34" charset="-120"/>
               </a:rPr>
-              <a:t>10 / 22   Smart-RUDP</a:t>
+              <a:t>10 / 23   Smart-RUDP</a:t>
             </a:r>
             <a:endParaRPr lang="en-US" sz="1000" dirty="0"/>
           </a:p>
@@ -3717,7 +3840,7 @@
                 <a:ea typeface="Courier New" pitchFamily="34" charset="-122"/>
                 <a:cs typeface="Courier New" pitchFamily="34" charset="-120"/>
               </a:rPr>
-              <a:t>11 / 22   Smart-RUDP</a:t>
+              <a:t>11 / 23   Smart-RUDP</a:t>
             </a:r>
             <a:endParaRPr lang="en-US" sz="1000" dirty="0"/>
           </a:p>
@@ -4547,7 +4670,7 @@
                 <a:ea typeface="Courier New" pitchFamily="34" charset="-122"/>
                 <a:cs typeface="Courier New" pitchFamily="34" charset="-120"/>
               </a:rPr>
-              <a:t>12 / 22   Smart-RUDP</a:t>
+              <a:t>12 / 23   Smart-RUDP</a:t>
             </a:r>
             <a:endParaRPr lang="en-US" sz="1000" dirty="0"/>
           </a:p>
@@ -4844,7 +4967,7 @@
                 <a:ea typeface="Courier New" pitchFamily="34" charset="-122"/>
                 <a:cs typeface="Courier New" pitchFamily="34" charset="-120"/>
               </a:rPr>
-              <a:t>13 / 22   Smart-RUDP</a:t>
+              <a:t>13 / 23   Smart-RUDP</a:t>
             </a:r>
             <a:endParaRPr lang="en-US" sz="1000" dirty="0"/>
           </a:p>
@@ -5144,7 +5267,7 @@
                 <a:ea typeface="Courier New" pitchFamily="34" charset="-122"/>
                 <a:cs typeface="Courier New" pitchFamily="34" charset="-120"/>
               </a:rPr>
-              <a:t>14 / 22   Smart-RUDP</a:t>
+              <a:t>14 / 23   Smart-RUDP</a:t>
             </a:r>
             <a:endParaRPr lang="en-US" sz="1000" dirty="0"/>
           </a:p>
@@ -5528,7 +5651,7 @@
                 <a:ea typeface="Courier New" pitchFamily="34" charset="-122"/>
                 <a:cs typeface="Courier New" pitchFamily="34" charset="-120"/>
               </a:rPr>
-              <a:t>15 / 22   Smart-RUDP</a:t>
+              <a:t>15 / 23   Smart-RUDP</a:t>
             </a:r>
             <a:endParaRPr lang="en-US" sz="1000" dirty="0"/>
           </a:p>
@@ -5986,7 +6109,7 @@
                 <a:ea typeface="Courier New" pitchFamily="34" charset="-122"/>
                 <a:cs typeface="Courier New" pitchFamily="34" charset="-120"/>
               </a:rPr>
-              <a:t>16 / 22   Smart-RUDP</a:t>
+              <a:t>16 / 23   Smart-RUDP</a:t>
             </a:r>
             <a:endParaRPr lang="en-US" sz="1000" dirty="0"/>
           </a:p>
@@ -6671,7 +6794,7 @@
                 <a:ea typeface="Courier New" pitchFamily="34" charset="-122"/>
                 <a:cs typeface="Courier New" pitchFamily="34" charset="-120"/>
               </a:rPr>
-              <a:t>17 / 22   Smart-RUDP</a:t>
+              <a:t>17 / 23   Smart-RUDP</a:t>
             </a:r>
             <a:endParaRPr lang="en-US" sz="1000" dirty="0"/>
           </a:p>
@@ -6911,7 +7034,7 @@
                 <a:ea typeface="Courier New" pitchFamily="34" charset="-122"/>
                 <a:cs typeface="Courier New" pitchFamily="34" charset="-120"/>
               </a:rPr>
-              <a:t>18 / 22   Smart-RUDP</a:t>
+              <a:t>18 / 23   Smart-RUDP</a:t>
             </a:r>
             <a:endParaRPr lang="en-US" sz="1000" dirty="0"/>
           </a:p>
@@ -7151,7 +7274,7 @@
                 <a:ea typeface="Courier New" pitchFamily="34" charset="-122"/>
                 <a:cs typeface="Courier New" pitchFamily="34" charset="-120"/>
               </a:rPr>
-              <a:t>19 / 22   Smart-RUDP</a:t>
+              <a:t>19 / 23   Smart-RUDP</a:t>
             </a:r>
             <a:endParaRPr lang="en-US" sz="1000" dirty="0"/>
           </a:p>
@@ -7373,7 +7496,7 @@
                 <a:ea typeface="Courier New" pitchFamily="34" charset="-122"/>
                 <a:cs typeface="Courier New" pitchFamily="34" charset="-120"/>
               </a:rPr>
-              <a:t>2 / 22   Smart-RUDP</a:t>
+              <a:t>2 / 23   Smart-RUDP</a:t>
             </a:r>
             <a:endParaRPr lang="en-US" sz="1000" dirty="0"/>
           </a:p>
@@ -7767,7 +7890,7 @@
                 <a:ea typeface="Courier New" pitchFamily="34" charset="-122"/>
                 <a:cs typeface="Courier New" pitchFamily="34" charset="-120"/>
               </a:rPr>
-              <a:t>20 / 22   Smart-RUDP</a:t>
+              <a:t>20 / 23   Smart-RUDP</a:t>
             </a:r>
             <a:endParaRPr lang="en-US" sz="1000" dirty="0"/>
           </a:p>
@@ -8052,7 +8175,7 @@
                 <a:ea typeface="Courier New" pitchFamily="34" charset="-122"/>
                 <a:cs typeface="Courier New" pitchFamily="34" charset="-120"/>
               </a:rPr>
-              <a:t>Learnings and future work</a:t>
+              <a:t>More evidence: baselines, SACK, reordering</a:t>
             </a:r>
             <a:endParaRPr lang="en-US" sz="3000" dirty="0"/>
           </a:p>
@@ -8091,47 +8214,1495 @@
                 <a:ea typeface="Courier New" pitchFamily="34" charset="-122"/>
                 <a:cs typeface="Courier New" pitchFamily="34" charset="-120"/>
               </a:rPr>
-              <a:t>21 / 22   Smart-RUDP</a:t>
+              <a:t>21 / 23   Smart-RUDP</a:t>
             </a:r>
             <a:endParaRPr lang="en-US" sz="1000" dirty="0"/>
           </a:p>
         </p:txBody>
       </p:sp>
-      <p:sp>
-        <p:nvSpPr>
-          <p:cNvPr id="4" name="Shape 2"/>
-          <p:cNvSpPr/>
-          <p:nvPr/>
-        </p:nvSpPr>
-        <p:spPr>
-          <a:xfrm>
-            <a:off x="548640" y="1371600"/>
+      <p:graphicFrame>
+        <p:nvGraphicFramePr>
+          <p:cNvPr id="22" name="Table 0"/>
+          <p:cNvGraphicFramePr>
+            <a:graphicFrameLocks noGrp="1"/>
+          </p:cNvGraphicFramePr>
+          <p:nvPr>
+            <p:extLst>
+              <p:ext uri="{D42A27DB-BD31-4B8C-83A1-F6EECF244321}">
+                <p14:modId xmlns:p14="http://schemas.microsoft.com/office/powerpoint/2010/main" val="1579011935"/>
+              </p:ext>
+            </p:extLst>
+          </p:nvPr>
+        </p:nvGraphicFramePr>
+        <p:xfrm>
+          <a:off x="548640" y="1188720"/>
+          <a:ext cx="5486400" cy="914400"/>
+        </p:xfrm>
+        <a:graphic>
+          <a:graphicData uri="http://schemas.openxmlformats.org/drawingml/2006/table">
+            <a:tbl>
+              <a:tblPr/>
+              <a:tblGrid>
+                <a:gridCol w="2926080"/>
+                <a:gridCol w="1371600"/>
+                <a:gridCol w="1188720"/>
+              </a:tblGrid>
+              <a:tr h="384048">
+                <a:tc>
+                  <a:txBody>
+                    <a:bodyPr/>
+                    <a:lstStyle/>
+                    <a:p>
+                      <a:pPr indent="0" marL="0">
+                        <a:buNone/>
+                      </a:pPr>
+                      <a:r>
+                        <a:rPr lang="en-US" sz="1300" b="1" dirty="0">
+                          <a:solidFill>
+                            <a:srgbClr val="0B0F14"/>
+                          </a:solidFill>
+                          <a:latin typeface="Courier New" pitchFamily="34" charset="0"/>
+                          <a:ea typeface="Courier New" pitchFamily="34" charset="-122"/>
+                          <a:cs typeface="Courier New" pitchFamily="34" charset="-120"/>
+                        </a:rPr>
+                        <a:t>48 unseen paths (simulated)</a:t>
+                      </a:r>
+                      <a:endParaRPr lang="en-US" sz="1300" dirty="0">
+                        <a:latin typeface="Courier New" charset="0"/>
+                        <a:ea typeface="Courier New" charset="0"/>
+                        <a:cs typeface="Courier New" charset="0"/>
+                      </a:endParaRPr>
+                    </a:p>
+                  </a:txBody>
+                  <a:tcPr marL="91440" marR="91440" marT="45720" marB="45720">
+                    <a:lnL w="12700" cap="flat" cmpd="sng" algn="ctr">
+                      <a:solidFill>
+                        <a:srgbClr val="2A3441"/>
+                      </a:solidFill>
+                      <a:prstDash val="solid"/>
+                      <a:round/>
+                      <a:headEnd type="none" w="med" len="med"/>
+                      <a:tailEnd type="none" w="med" len="med"/>
+                    </a:lnL>
+                    <a:lnR w="12700" cap="flat" cmpd="sng" algn="ctr">
+                      <a:solidFill>
+                        <a:srgbClr val="2A3441"/>
+                      </a:solidFill>
+                      <a:prstDash val="solid"/>
+                      <a:round/>
+                      <a:headEnd type="none" w="med" len="med"/>
+                      <a:tailEnd type="none" w="med" len="med"/>
+                    </a:lnR>
+                    <a:lnT w="12700" cap="flat" cmpd="sng" algn="ctr">
+                      <a:solidFill>
+                        <a:srgbClr val="2A3441"/>
+                      </a:solidFill>
+                      <a:prstDash val="solid"/>
+                      <a:round/>
+                      <a:headEnd type="none" w="med" len="med"/>
+                      <a:tailEnd type="none" w="med" len="med"/>
+                    </a:lnT>
+                    <a:lnB w="12700" cap="flat" cmpd="sng" algn="ctr">
+                      <a:solidFill>
+                        <a:srgbClr val="2A3441"/>
+                      </a:solidFill>
+                      <a:prstDash val="solid"/>
+                      <a:round/>
+                      <a:headEnd type="none" w="med" len="med"/>
+                      <a:tailEnd type="none" w="med" len="med"/>
+                    </a:lnB>
+                    <a:solidFill>
+                      <a:srgbClr val="39FF88"/>
+                    </a:solidFill>
+                  </a:tcPr>
+                </a:tc>
+                <a:tc>
+                  <a:txBody>
+                    <a:bodyPr/>
+                    <a:lstStyle/>
+                    <a:p>
+                      <a:pPr indent="0" marL="0">
+                        <a:buNone/>
+                      </a:pPr>
+                      <a:r>
+                        <a:rPr lang="en-US" sz="1300" b="1" dirty="0">
+                          <a:solidFill>
+                            <a:srgbClr val="0B0F14"/>
+                          </a:solidFill>
+                          <a:latin typeface="Courier New" pitchFamily="34" charset="0"/>
+                          <a:ea typeface="Courier New" pitchFamily="34" charset="-122"/>
+                          <a:cs typeface="Courier New" pitchFamily="34" charset="-120"/>
+                        </a:rPr>
+                        <a:t>Mean</a:t>
+                      </a:r>
+                      <a:endParaRPr lang="en-US" sz="1300" dirty="0">
+                        <a:latin typeface="Courier New" charset="0"/>
+                        <a:ea typeface="Courier New" charset="0"/>
+                        <a:cs typeface="Courier New" charset="0"/>
+                      </a:endParaRPr>
+                    </a:p>
+                  </a:txBody>
+                  <a:tcPr marL="91440" marR="91440" marT="45720" marB="45720">
+                    <a:lnL w="12700" cap="flat" cmpd="sng" algn="ctr">
+                      <a:solidFill>
+                        <a:srgbClr val="2A3441"/>
+                      </a:solidFill>
+                      <a:prstDash val="solid"/>
+                      <a:round/>
+                      <a:headEnd type="none" w="med" len="med"/>
+                      <a:tailEnd type="none" w="med" len="med"/>
+                    </a:lnL>
+                    <a:lnR w="12700" cap="flat" cmpd="sng" algn="ctr">
+                      <a:solidFill>
+                        <a:srgbClr val="2A3441"/>
+                      </a:solidFill>
+                      <a:prstDash val="solid"/>
+                      <a:round/>
+                      <a:headEnd type="none" w="med" len="med"/>
+                      <a:tailEnd type="none" w="med" len="med"/>
+                    </a:lnR>
+                    <a:lnT w="12700" cap="flat" cmpd="sng" algn="ctr">
+                      <a:solidFill>
+                        <a:srgbClr val="2A3441"/>
+                      </a:solidFill>
+                      <a:prstDash val="solid"/>
+                      <a:round/>
+                      <a:headEnd type="none" w="med" len="med"/>
+                      <a:tailEnd type="none" w="med" len="med"/>
+                    </a:lnT>
+                    <a:lnB w="12700" cap="flat" cmpd="sng" algn="ctr">
+                      <a:solidFill>
+                        <a:srgbClr val="2A3441"/>
+                      </a:solidFill>
+                      <a:prstDash val="solid"/>
+                      <a:round/>
+                      <a:headEnd type="none" w="med" len="med"/>
+                      <a:tailEnd type="none" w="med" len="med"/>
+                    </a:lnB>
+                    <a:solidFill>
+                      <a:srgbClr val="39FF88"/>
+                    </a:solidFill>
+                  </a:tcPr>
+                </a:tc>
+                <a:tc>
+                  <a:txBody>
+                    <a:bodyPr/>
+                    <a:lstStyle/>
+                    <a:p>
+                      <a:pPr indent="0" marL="0">
+                        <a:buNone/>
+                      </a:pPr>
+                      <a:r>
+                        <a:rPr lang="en-US" sz="1300" b="1" dirty="0">
+                          <a:solidFill>
+                            <a:srgbClr val="0B0F14"/>
+                          </a:solidFill>
+                          <a:latin typeface="Courier New" pitchFamily="34" charset="0"/>
+                          <a:ea typeface="Courier New" pitchFamily="34" charset="-122"/>
+                          <a:cs typeface="Courier New" pitchFamily="34" charset="-120"/>
+                        </a:rPr>
+                        <a:t>Median</a:t>
+                      </a:r>
+                      <a:endParaRPr lang="en-US" sz="1300" dirty="0">
+                        <a:latin typeface="Courier New" charset="0"/>
+                        <a:ea typeface="Courier New" charset="0"/>
+                        <a:cs typeface="Courier New" charset="0"/>
+                      </a:endParaRPr>
+                    </a:p>
+                  </a:txBody>
+                  <a:tcPr marL="91440" marR="91440" marT="45720" marB="45720">
+                    <a:lnL w="12700" cap="flat" cmpd="sng" algn="ctr">
+                      <a:solidFill>
+                        <a:srgbClr val="2A3441"/>
+                      </a:solidFill>
+                      <a:prstDash val="solid"/>
+                      <a:round/>
+                      <a:headEnd type="none" w="med" len="med"/>
+                      <a:tailEnd type="none" w="med" len="med"/>
+                    </a:lnL>
+                    <a:lnR w="12700" cap="flat" cmpd="sng" algn="ctr">
+                      <a:solidFill>
+                        <a:srgbClr val="2A3441"/>
+                      </a:solidFill>
+                      <a:prstDash val="solid"/>
+                      <a:round/>
+                      <a:headEnd type="none" w="med" len="med"/>
+                      <a:tailEnd type="none" w="med" len="med"/>
+                    </a:lnR>
+                    <a:lnT w="12700" cap="flat" cmpd="sng" algn="ctr">
+                      <a:solidFill>
+                        <a:srgbClr val="2A3441"/>
+                      </a:solidFill>
+                      <a:prstDash val="solid"/>
+                      <a:round/>
+                      <a:headEnd type="none" w="med" len="med"/>
+                      <a:tailEnd type="none" w="med" len="med"/>
+                    </a:lnT>
+                    <a:lnB w="12700" cap="flat" cmpd="sng" algn="ctr">
+                      <a:solidFill>
+                        <a:srgbClr val="2A3441"/>
+                      </a:solidFill>
+                      <a:prstDash val="solid"/>
+                      <a:round/>
+                      <a:headEnd type="none" w="med" len="med"/>
+                      <a:tailEnd type="none" w="med" len="med"/>
+                    </a:lnB>
+                    <a:solidFill>
+                      <a:srgbClr val="39FF88"/>
+                    </a:solidFill>
+                  </a:tcPr>
+                </a:tc>
+              </a:tr>
+              <a:tr h="384048">
+                <a:tc>
+                  <a:txBody>
+                    <a:bodyPr/>
+                    <a:lstStyle/>
+                    <a:p>
+                      <a:pPr indent="0" marL="0">
+                        <a:buNone/>
+                      </a:pPr>
+                      <a:r>
+                        <a:rPr lang="en-US" sz="1300" dirty="0">
+                          <a:solidFill>
+                            <a:srgbClr val="E6EDF3"/>
+                          </a:solidFill>
+                          <a:latin typeface="Calibri" pitchFamily="34" charset="0"/>
+                          <a:ea typeface="Calibri" pitchFamily="34" charset="-122"/>
+                          <a:cs typeface="Calibri" pitchFamily="34" charset="-120"/>
+                        </a:rPr>
+                        <a:t>Plain UDP</a:t>
+                      </a:r>
+                      <a:endParaRPr lang="en-US" sz="1300" dirty="0">
+                        <a:latin typeface="Calibri" charset="0"/>
+                        <a:ea typeface="Calibri" charset="0"/>
+                        <a:cs typeface="Calibri" charset="0"/>
+                      </a:endParaRPr>
+                    </a:p>
+                  </a:txBody>
+                  <a:tcPr marL="91440" marR="91440" marT="45720" marB="45720">
+                    <a:lnL w="12700" cap="flat" cmpd="sng" algn="ctr">
+                      <a:solidFill>
+                        <a:srgbClr val="2A3441"/>
+                      </a:solidFill>
+                      <a:prstDash val="solid"/>
+                      <a:round/>
+                      <a:headEnd type="none" w="med" len="med"/>
+                      <a:tailEnd type="none" w="med" len="med"/>
+                    </a:lnL>
+                    <a:lnR w="12700" cap="flat" cmpd="sng" algn="ctr">
+                      <a:solidFill>
+                        <a:srgbClr val="2A3441"/>
+                      </a:solidFill>
+                      <a:prstDash val="solid"/>
+                      <a:round/>
+                      <a:headEnd type="none" w="med" len="med"/>
+                      <a:tailEnd type="none" w="med" len="med"/>
+                    </a:lnR>
+                    <a:lnT w="12700" cap="flat" cmpd="sng" algn="ctr">
+                      <a:solidFill>
+                        <a:srgbClr val="2A3441"/>
+                      </a:solidFill>
+                      <a:prstDash val="solid"/>
+                      <a:round/>
+                      <a:headEnd type="none" w="med" len="med"/>
+                      <a:tailEnd type="none" w="med" len="med"/>
+                    </a:lnT>
+                    <a:lnB w="12700" cap="flat" cmpd="sng" algn="ctr">
+                      <a:solidFill>
+                        <a:srgbClr val="2A3441"/>
+                      </a:solidFill>
+                      <a:prstDash val="solid"/>
+                      <a:round/>
+                      <a:headEnd type="none" w="med" len="med"/>
+                      <a:tailEnd type="none" w="med" len="med"/>
+                    </a:lnB>
+                    <a:solidFill>
+                      <a:srgbClr val="141B24"/>
+                    </a:solidFill>
+                  </a:tcPr>
+                </a:tc>
+                <a:tc>
+                  <a:txBody>
+                    <a:bodyPr/>
+                    <a:lstStyle/>
+                    <a:p>
+                      <a:pPr indent="0" marL="0">
+                        <a:buNone/>
+                      </a:pPr>
+                      <a:r>
+                        <a:rPr lang="en-US" sz="1300" dirty="0">
+                          <a:solidFill>
+                            <a:srgbClr val="E6EDF3"/>
+                          </a:solidFill>
+                          <a:latin typeface="Calibri" pitchFamily="34" charset="0"/>
+                          <a:ea typeface="Calibri" pitchFamily="34" charset="-122"/>
+                          <a:cs typeface="Calibri" pitchFamily="34" charset="-120"/>
+                        </a:rPr>
+                        <a:t>68% delivered</a:t>
+                      </a:r>
+                      <a:endParaRPr lang="en-US" sz="1300" dirty="0">
+                        <a:latin typeface="Calibri" charset="0"/>
+                        <a:ea typeface="Calibri" charset="0"/>
+                        <a:cs typeface="Calibri" charset="0"/>
+                      </a:endParaRPr>
+                    </a:p>
+                  </a:txBody>
+                  <a:tcPr marL="91440" marR="91440" marT="45720" marB="45720">
+                    <a:lnL w="12700" cap="flat" cmpd="sng" algn="ctr">
+                      <a:solidFill>
+                        <a:srgbClr val="2A3441"/>
+                      </a:solidFill>
+                      <a:prstDash val="solid"/>
+                      <a:round/>
+                      <a:headEnd type="none" w="med" len="med"/>
+                      <a:tailEnd type="none" w="med" len="med"/>
+                    </a:lnL>
+                    <a:lnR w="12700" cap="flat" cmpd="sng" algn="ctr">
+                      <a:solidFill>
+                        <a:srgbClr val="2A3441"/>
+                      </a:solidFill>
+                      <a:prstDash val="solid"/>
+                      <a:round/>
+                      <a:headEnd type="none" w="med" len="med"/>
+                      <a:tailEnd type="none" w="med" len="med"/>
+                    </a:lnR>
+                    <a:lnT w="12700" cap="flat" cmpd="sng" algn="ctr">
+                      <a:solidFill>
+                        <a:srgbClr val="2A3441"/>
+                      </a:solidFill>
+                      <a:prstDash val="solid"/>
+                      <a:round/>
+                      <a:headEnd type="none" w="med" len="med"/>
+                      <a:tailEnd type="none" w="med" len="med"/>
+                    </a:lnT>
+                    <a:lnB w="12700" cap="flat" cmpd="sng" algn="ctr">
+                      <a:solidFill>
+                        <a:srgbClr val="2A3441"/>
+                      </a:solidFill>
+                      <a:prstDash val="solid"/>
+                      <a:round/>
+                      <a:headEnd type="none" w="med" len="med"/>
+                      <a:tailEnd type="none" w="med" len="med"/>
+                    </a:lnB>
+                    <a:solidFill>
+                      <a:srgbClr val="141B24"/>
+                    </a:solidFill>
+                  </a:tcPr>
+                </a:tc>
+                <a:tc>
+                  <a:txBody>
+                    <a:bodyPr/>
+                    <a:lstStyle/>
+                    <a:p>
+                      <a:pPr indent="0" marL="0">
+                        <a:buNone/>
+                      </a:pPr>
+                      <a:r>
+                        <a:rPr lang="en-US" sz="1300" dirty="0">
+                          <a:solidFill>
+                            <a:srgbClr val="E6EDF3"/>
+                          </a:solidFill>
+                          <a:latin typeface="Calibri" pitchFamily="34" charset="0"/>
+                          <a:ea typeface="Calibri" pitchFamily="34" charset="-122"/>
+                          <a:cs typeface="Calibri" pitchFamily="34" charset="-120"/>
+                        </a:rPr>
+                        <a:t>-</a:t>
+                      </a:r>
+                      <a:endParaRPr lang="en-US" sz="1300" dirty="0">
+                        <a:latin typeface="Calibri" charset="0"/>
+                        <a:ea typeface="Calibri" charset="0"/>
+                        <a:cs typeface="Calibri" charset="0"/>
+                      </a:endParaRPr>
+                    </a:p>
+                  </a:txBody>
+                  <a:tcPr marL="91440" marR="91440" marT="45720" marB="45720">
+                    <a:lnL w="12700" cap="flat" cmpd="sng" algn="ctr">
+                      <a:solidFill>
+                        <a:srgbClr val="2A3441"/>
+                      </a:solidFill>
+                      <a:prstDash val="solid"/>
+                      <a:round/>
+                      <a:headEnd type="none" w="med" len="med"/>
+                      <a:tailEnd type="none" w="med" len="med"/>
+                    </a:lnL>
+                    <a:lnR w="12700" cap="flat" cmpd="sng" algn="ctr">
+                      <a:solidFill>
+                        <a:srgbClr val="2A3441"/>
+                      </a:solidFill>
+                      <a:prstDash val="solid"/>
+                      <a:round/>
+                      <a:headEnd type="none" w="med" len="med"/>
+                      <a:tailEnd type="none" w="med" len="med"/>
+                    </a:lnR>
+                    <a:lnT w="12700" cap="flat" cmpd="sng" algn="ctr">
+                      <a:solidFill>
+                        <a:srgbClr val="2A3441"/>
+                      </a:solidFill>
+                      <a:prstDash val="solid"/>
+                      <a:round/>
+                      <a:headEnd type="none" w="med" len="med"/>
+                      <a:tailEnd type="none" w="med" len="med"/>
+                    </a:lnT>
+                    <a:lnB w="12700" cap="flat" cmpd="sng" algn="ctr">
+                      <a:solidFill>
+                        <a:srgbClr val="2A3441"/>
+                      </a:solidFill>
+                      <a:prstDash val="solid"/>
+                      <a:round/>
+                      <a:headEnd type="none" w="med" len="med"/>
+                      <a:tailEnd type="none" w="med" len="med"/>
+                    </a:lnB>
+                    <a:solidFill>
+                      <a:srgbClr val="141B24"/>
+                    </a:solidFill>
+                  </a:tcPr>
+                </a:tc>
+              </a:tr>
+              <a:tr h="384048">
+                <a:tc>
+                  <a:txBody>
+                    <a:bodyPr/>
+                    <a:lstStyle/>
+                    <a:p>
+                      <a:pPr indent="0" marL="0">
+                        <a:buNone/>
+                      </a:pPr>
+                      <a:r>
+                        <a:rPr lang="en-US" sz="1300" dirty="0">
+                          <a:solidFill>
+                            <a:srgbClr val="E6EDF3"/>
+                          </a:solidFill>
+                          <a:latin typeface="Calibri" pitchFamily="34" charset="0"/>
+                          <a:ea typeface="Calibri" pitchFamily="34" charset="-122"/>
+                          <a:cs typeface="Calibri" pitchFamily="34" charset="-120"/>
+                        </a:rPr>
+                        <a:t>TCP model (selective ACK)</a:t>
+                      </a:r>
+                      <a:endParaRPr lang="en-US" sz="1300" dirty="0">
+                        <a:latin typeface="Calibri" charset="0"/>
+                        <a:ea typeface="Calibri" charset="0"/>
+                        <a:cs typeface="Calibri" charset="0"/>
+                      </a:endParaRPr>
+                    </a:p>
+                  </a:txBody>
+                  <a:tcPr marL="91440" marR="91440" marT="45720" marB="45720">
+                    <a:lnL w="12700" cap="flat" cmpd="sng" algn="ctr">
+                      <a:solidFill>
+                        <a:srgbClr val="2A3441"/>
+                      </a:solidFill>
+                      <a:prstDash val="solid"/>
+                      <a:round/>
+                      <a:headEnd type="none" w="med" len="med"/>
+                      <a:tailEnd type="none" w="med" len="med"/>
+                    </a:lnL>
+                    <a:lnR w="12700" cap="flat" cmpd="sng" algn="ctr">
+                      <a:solidFill>
+                        <a:srgbClr val="2A3441"/>
+                      </a:solidFill>
+                      <a:prstDash val="solid"/>
+                      <a:round/>
+                      <a:headEnd type="none" w="med" len="med"/>
+                      <a:tailEnd type="none" w="med" len="med"/>
+                    </a:lnR>
+                    <a:lnT w="12700" cap="flat" cmpd="sng" algn="ctr">
+                      <a:solidFill>
+                        <a:srgbClr val="2A3441"/>
+                      </a:solidFill>
+                      <a:prstDash val="solid"/>
+                      <a:round/>
+                      <a:headEnd type="none" w="med" len="med"/>
+                      <a:tailEnd type="none" w="med" len="med"/>
+                    </a:lnT>
+                    <a:lnB w="12700" cap="flat" cmpd="sng" algn="ctr">
+                      <a:solidFill>
+                        <a:srgbClr val="2A3441"/>
+                      </a:solidFill>
+                      <a:prstDash val="solid"/>
+                      <a:round/>
+                      <a:headEnd type="none" w="med" len="med"/>
+                      <a:tailEnd type="none" w="med" len="med"/>
+                    </a:lnB>
+                    <a:solidFill>
+                      <a:srgbClr val="141B24"/>
+                    </a:solidFill>
+                  </a:tcPr>
+                </a:tc>
+                <a:tc>
+                  <a:txBody>
+                    <a:bodyPr/>
+                    <a:lstStyle/>
+                    <a:p>
+                      <a:pPr indent="0" marL="0">
+                        <a:buNone/>
+                      </a:pPr>
+                      <a:r>
+                        <a:rPr lang="en-US" sz="1300" dirty="0">
+                          <a:solidFill>
+                            <a:srgbClr val="E6EDF3"/>
+                          </a:solidFill>
+                          <a:latin typeface="Calibri" pitchFamily="34" charset="0"/>
+                          <a:ea typeface="Calibri" pitchFamily="34" charset="-122"/>
+                          <a:cs typeface="Calibri" pitchFamily="34" charset="-120"/>
+                        </a:rPr>
+                        <a:t>4.56 s</a:t>
+                      </a:r>
+                      <a:endParaRPr lang="en-US" sz="1300" dirty="0">
+                        <a:latin typeface="Calibri" charset="0"/>
+                        <a:ea typeface="Calibri" charset="0"/>
+                        <a:cs typeface="Calibri" charset="0"/>
+                      </a:endParaRPr>
+                    </a:p>
+                  </a:txBody>
+                  <a:tcPr marL="91440" marR="91440" marT="45720" marB="45720">
+                    <a:lnL w="12700" cap="flat" cmpd="sng" algn="ctr">
+                      <a:solidFill>
+                        <a:srgbClr val="2A3441"/>
+                      </a:solidFill>
+                      <a:prstDash val="solid"/>
+                      <a:round/>
+                      <a:headEnd type="none" w="med" len="med"/>
+                      <a:tailEnd type="none" w="med" len="med"/>
+                    </a:lnL>
+                    <a:lnR w="12700" cap="flat" cmpd="sng" algn="ctr">
+                      <a:solidFill>
+                        <a:srgbClr val="2A3441"/>
+                      </a:solidFill>
+                      <a:prstDash val="solid"/>
+                      <a:round/>
+                      <a:headEnd type="none" w="med" len="med"/>
+                      <a:tailEnd type="none" w="med" len="med"/>
+                    </a:lnR>
+                    <a:lnT w="12700" cap="flat" cmpd="sng" algn="ctr">
+                      <a:solidFill>
+                        <a:srgbClr val="2A3441"/>
+                      </a:solidFill>
+                      <a:prstDash val="solid"/>
+                      <a:round/>
+                      <a:headEnd type="none" w="med" len="med"/>
+                      <a:tailEnd type="none" w="med" len="med"/>
+                    </a:lnT>
+                    <a:lnB w="12700" cap="flat" cmpd="sng" algn="ctr">
+                      <a:solidFill>
+                        <a:srgbClr val="2A3441"/>
+                      </a:solidFill>
+                      <a:prstDash val="solid"/>
+                      <a:round/>
+                      <a:headEnd type="none" w="med" len="med"/>
+                      <a:tailEnd type="none" w="med" len="med"/>
+                    </a:lnB>
+                    <a:solidFill>
+                      <a:srgbClr val="141B24"/>
+                    </a:solidFill>
+                  </a:tcPr>
+                </a:tc>
+                <a:tc>
+                  <a:txBody>
+                    <a:bodyPr/>
+                    <a:lstStyle/>
+                    <a:p>
+                      <a:pPr indent="0" marL="0">
+                        <a:buNone/>
+                      </a:pPr>
+                      <a:r>
+                        <a:rPr lang="en-US" sz="1300" dirty="0">
+                          <a:solidFill>
+                            <a:srgbClr val="E6EDF3"/>
+                          </a:solidFill>
+                          <a:latin typeface="Calibri" pitchFamily="34" charset="0"/>
+                          <a:ea typeface="Calibri" pitchFamily="34" charset="-122"/>
+                          <a:cs typeface="Calibri" pitchFamily="34" charset="-120"/>
+                        </a:rPr>
+                        <a:t>1.48 s</a:t>
+                      </a:r>
+                      <a:endParaRPr lang="en-US" sz="1300" dirty="0">
+                        <a:latin typeface="Calibri" charset="0"/>
+                        <a:ea typeface="Calibri" charset="0"/>
+                        <a:cs typeface="Calibri" charset="0"/>
+                      </a:endParaRPr>
+                    </a:p>
+                  </a:txBody>
+                  <a:tcPr marL="91440" marR="91440" marT="45720" marB="45720">
+                    <a:lnL w="12700" cap="flat" cmpd="sng" algn="ctr">
+                      <a:solidFill>
+                        <a:srgbClr val="2A3441"/>
+                      </a:solidFill>
+                      <a:prstDash val="solid"/>
+                      <a:round/>
+                      <a:headEnd type="none" w="med" len="med"/>
+                      <a:tailEnd type="none" w="med" len="med"/>
+                    </a:lnL>
+                    <a:lnR w="12700" cap="flat" cmpd="sng" algn="ctr">
+                      <a:solidFill>
+                        <a:srgbClr val="2A3441"/>
+                      </a:solidFill>
+                      <a:prstDash val="solid"/>
+                      <a:round/>
+                      <a:headEnd type="none" w="med" len="med"/>
+                      <a:tailEnd type="none" w="med" len="med"/>
+                    </a:lnR>
+                    <a:lnT w="12700" cap="flat" cmpd="sng" algn="ctr">
+                      <a:solidFill>
+                        <a:srgbClr val="2A3441"/>
+                      </a:solidFill>
+                      <a:prstDash val="solid"/>
+                      <a:round/>
+                      <a:headEnd type="none" w="med" len="med"/>
+                      <a:tailEnd type="none" w="med" len="med"/>
+                    </a:lnT>
+                    <a:lnB w="12700" cap="flat" cmpd="sng" algn="ctr">
+                      <a:solidFill>
+                        <a:srgbClr val="2A3441"/>
+                      </a:solidFill>
+                      <a:prstDash val="solid"/>
+                      <a:round/>
+                      <a:headEnd type="none" w="med" len="med"/>
+                      <a:tailEnd type="none" w="med" len="med"/>
+                    </a:lnB>
+                    <a:solidFill>
+                      <a:srgbClr val="141B24"/>
+                    </a:solidFill>
+                  </a:tcPr>
+                </a:tc>
+              </a:tr>
+              <a:tr h="384048">
+                <a:tc>
+                  <a:txBody>
+                    <a:bodyPr/>
+                    <a:lstStyle/>
+                    <a:p>
+                      <a:pPr indent="0" marL="0">
+                        <a:buNone/>
+                      </a:pPr>
+                      <a:r>
+                        <a:rPr lang="en-US" sz="1300" dirty="0">
+                          <a:solidFill>
+                            <a:srgbClr val="E6EDF3"/>
+                          </a:solidFill>
+                          <a:latin typeface="Calibri" pitchFamily="34" charset="0"/>
+                          <a:ea typeface="Calibri" pitchFamily="34" charset="-122"/>
+                          <a:cs typeface="Calibri" pitchFamily="34" charset="-120"/>
+                        </a:rPr>
+                        <a:t>RUDP fixed window</a:t>
+                      </a:r>
+                      <a:endParaRPr lang="en-US" sz="1300" dirty="0">
+                        <a:latin typeface="Calibri" charset="0"/>
+                        <a:ea typeface="Calibri" charset="0"/>
+                        <a:cs typeface="Calibri" charset="0"/>
+                      </a:endParaRPr>
+                    </a:p>
+                  </a:txBody>
+                  <a:tcPr marL="91440" marR="91440" marT="45720" marB="45720">
+                    <a:lnL w="12700" cap="flat" cmpd="sng" algn="ctr">
+                      <a:solidFill>
+                        <a:srgbClr val="2A3441"/>
+                      </a:solidFill>
+                      <a:prstDash val="solid"/>
+                      <a:round/>
+                      <a:headEnd type="none" w="med" len="med"/>
+                      <a:tailEnd type="none" w="med" len="med"/>
+                    </a:lnL>
+                    <a:lnR w="12700" cap="flat" cmpd="sng" algn="ctr">
+                      <a:solidFill>
+                        <a:srgbClr val="2A3441"/>
+                      </a:solidFill>
+                      <a:prstDash val="solid"/>
+                      <a:round/>
+                      <a:headEnd type="none" w="med" len="med"/>
+                      <a:tailEnd type="none" w="med" len="med"/>
+                    </a:lnR>
+                    <a:lnT w="12700" cap="flat" cmpd="sng" algn="ctr">
+                      <a:solidFill>
+                        <a:srgbClr val="2A3441"/>
+                      </a:solidFill>
+                      <a:prstDash val="solid"/>
+                      <a:round/>
+                      <a:headEnd type="none" w="med" len="med"/>
+                      <a:tailEnd type="none" w="med" len="med"/>
+                    </a:lnT>
+                    <a:lnB w="12700" cap="flat" cmpd="sng" algn="ctr">
+                      <a:solidFill>
+                        <a:srgbClr val="2A3441"/>
+                      </a:solidFill>
+                      <a:prstDash val="solid"/>
+                      <a:round/>
+                      <a:headEnd type="none" w="med" len="med"/>
+                      <a:tailEnd type="none" w="med" len="med"/>
+                    </a:lnB>
+                    <a:solidFill>
+                      <a:srgbClr val="141B24"/>
+                    </a:solidFill>
+                  </a:tcPr>
+                </a:tc>
+                <a:tc>
+                  <a:txBody>
+                    <a:bodyPr/>
+                    <a:lstStyle/>
+                    <a:p>
+                      <a:pPr indent="0" marL="0">
+                        <a:buNone/>
+                      </a:pPr>
+                      <a:r>
+                        <a:rPr lang="en-US" sz="1300" dirty="0">
+                          <a:solidFill>
+                            <a:srgbClr val="E6EDF3"/>
+                          </a:solidFill>
+                          <a:latin typeface="Calibri" pitchFamily="34" charset="0"/>
+                          <a:ea typeface="Calibri" pitchFamily="34" charset="-122"/>
+                          <a:cs typeface="Calibri" pitchFamily="34" charset="-120"/>
+                        </a:rPr>
+                        <a:t>3.88 s</a:t>
+                      </a:r>
+                      <a:endParaRPr lang="en-US" sz="1300" dirty="0">
+                        <a:latin typeface="Calibri" charset="0"/>
+                        <a:ea typeface="Calibri" charset="0"/>
+                        <a:cs typeface="Calibri" charset="0"/>
+                      </a:endParaRPr>
+                    </a:p>
+                  </a:txBody>
+                  <a:tcPr marL="91440" marR="91440" marT="45720" marB="45720">
+                    <a:lnL w="12700" cap="flat" cmpd="sng" algn="ctr">
+                      <a:solidFill>
+                        <a:srgbClr val="2A3441"/>
+                      </a:solidFill>
+                      <a:prstDash val="solid"/>
+                      <a:round/>
+                      <a:headEnd type="none" w="med" len="med"/>
+                      <a:tailEnd type="none" w="med" len="med"/>
+                    </a:lnL>
+                    <a:lnR w="12700" cap="flat" cmpd="sng" algn="ctr">
+                      <a:solidFill>
+                        <a:srgbClr val="2A3441"/>
+                      </a:solidFill>
+                      <a:prstDash val="solid"/>
+                      <a:round/>
+                      <a:headEnd type="none" w="med" len="med"/>
+                      <a:tailEnd type="none" w="med" len="med"/>
+                    </a:lnR>
+                    <a:lnT w="12700" cap="flat" cmpd="sng" algn="ctr">
+                      <a:solidFill>
+                        <a:srgbClr val="2A3441"/>
+                      </a:solidFill>
+                      <a:prstDash val="solid"/>
+                      <a:round/>
+                      <a:headEnd type="none" w="med" len="med"/>
+                      <a:tailEnd type="none" w="med" len="med"/>
+                    </a:lnT>
+                    <a:lnB w="12700" cap="flat" cmpd="sng" algn="ctr">
+                      <a:solidFill>
+                        <a:srgbClr val="2A3441"/>
+                      </a:solidFill>
+                      <a:prstDash val="solid"/>
+                      <a:round/>
+                      <a:headEnd type="none" w="med" len="med"/>
+                      <a:tailEnd type="none" w="med" len="med"/>
+                    </a:lnB>
+                    <a:solidFill>
+                      <a:srgbClr val="141B24"/>
+                    </a:solidFill>
+                  </a:tcPr>
+                </a:tc>
+                <a:tc>
+                  <a:txBody>
+                    <a:bodyPr/>
+                    <a:lstStyle/>
+                    <a:p>
+                      <a:pPr indent="0" marL="0">
+                        <a:buNone/>
+                      </a:pPr>
+                      <a:r>
+                        <a:rPr lang="en-US" sz="1300" dirty="0">
+                          <a:solidFill>
+                            <a:srgbClr val="E6EDF3"/>
+                          </a:solidFill>
+                          <a:latin typeface="Calibri" pitchFamily="34" charset="0"/>
+                          <a:ea typeface="Calibri" pitchFamily="34" charset="-122"/>
+                          <a:cs typeface="Calibri" pitchFamily="34" charset="-120"/>
+                        </a:rPr>
+                        <a:t>2.00 s</a:t>
+                      </a:r>
+                      <a:endParaRPr lang="en-US" sz="1300" dirty="0">
+                        <a:latin typeface="Calibri" charset="0"/>
+                        <a:ea typeface="Calibri" charset="0"/>
+                        <a:cs typeface="Calibri" charset="0"/>
+                      </a:endParaRPr>
+                    </a:p>
+                  </a:txBody>
+                  <a:tcPr marL="91440" marR="91440" marT="45720" marB="45720">
+                    <a:lnL w="12700" cap="flat" cmpd="sng" algn="ctr">
+                      <a:solidFill>
+                        <a:srgbClr val="2A3441"/>
+                      </a:solidFill>
+                      <a:prstDash val="solid"/>
+                      <a:round/>
+                      <a:headEnd type="none" w="med" len="med"/>
+                      <a:tailEnd type="none" w="med" len="med"/>
+                    </a:lnL>
+                    <a:lnR w="12700" cap="flat" cmpd="sng" algn="ctr">
+                      <a:solidFill>
+                        <a:srgbClr val="2A3441"/>
+                      </a:solidFill>
+                      <a:prstDash val="solid"/>
+                      <a:round/>
+                      <a:headEnd type="none" w="med" len="med"/>
+                      <a:tailEnd type="none" w="med" len="med"/>
+                    </a:lnR>
+                    <a:lnT w="12700" cap="flat" cmpd="sng" algn="ctr">
+                      <a:solidFill>
+                        <a:srgbClr val="2A3441"/>
+                      </a:solidFill>
+                      <a:prstDash val="solid"/>
+                      <a:round/>
+                      <a:headEnd type="none" w="med" len="med"/>
+                      <a:tailEnd type="none" w="med" len="med"/>
+                    </a:lnT>
+                    <a:lnB w="12700" cap="flat" cmpd="sng" algn="ctr">
+                      <a:solidFill>
+                        <a:srgbClr val="2A3441"/>
+                      </a:solidFill>
+                      <a:prstDash val="solid"/>
+                      <a:round/>
+                      <a:headEnd type="none" w="med" len="med"/>
+                      <a:tailEnd type="none" w="med" len="med"/>
+                    </a:lnB>
+                    <a:solidFill>
+                      <a:srgbClr val="141B24"/>
+                    </a:solidFill>
+                  </a:tcPr>
+                </a:tc>
+              </a:tr>
+              <a:tr h="384048">
+                <a:tc>
+                  <a:txBody>
+                    <a:bodyPr/>
+                    <a:lstStyle/>
+                    <a:p>
+                      <a:pPr indent="0" marL="0">
+                        <a:buNone/>
+                      </a:pPr>
+                      <a:r>
+                        <a:rPr lang="en-US" sz="1300" dirty="0">
+                          <a:solidFill>
+                            <a:srgbClr val="E6EDF3"/>
+                          </a:solidFill>
+                          <a:latin typeface="Calibri" pitchFamily="34" charset="0"/>
+                          <a:ea typeface="Calibri" pitchFamily="34" charset="-122"/>
+                          <a:cs typeface="Calibri" pitchFamily="34" charset="-120"/>
+                        </a:rPr>
+                        <a:t>RUDP AIMD</a:t>
+                      </a:r>
+                      <a:endParaRPr lang="en-US" sz="1300" dirty="0">
+                        <a:latin typeface="Calibri" charset="0"/>
+                        <a:ea typeface="Calibri" charset="0"/>
+                        <a:cs typeface="Calibri" charset="0"/>
+                      </a:endParaRPr>
+                    </a:p>
+                  </a:txBody>
+                  <a:tcPr marL="91440" marR="91440" marT="45720" marB="45720">
+                    <a:lnL w="12700" cap="flat" cmpd="sng" algn="ctr">
+                      <a:solidFill>
+                        <a:srgbClr val="2A3441"/>
+                      </a:solidFill>
+                      <a:prstDash val="solid"/>
+                      <a:round/>
+                      <a:headEnd type="none" w="med" len="med"/>
+                      <a:tailEnd type="none" w="med" len="med"/>
+                    </a:lnL>
+                    <a:lnR w="12700" cap="flat" cmpd="sng" algn="ctr">
+                      <a:solidFill>
+                        <a:srgbClr val="2A3441"/>
+                      </a:solidFill>
+                      <a:prstDash val="solid"/>
+                      <a:round/>
+                      <a:headEnd type="none" w="med" len="med"/>
+                      <a:tailEnd type="none" w="med" len="med"/>
+                    </a:lnR>
+                    <a:lnT w="12700" cap="flat" cmpd="sng" algn="ctr">
+                      <a:solidFill>
+                        <a:srgbClr val="2A3441"/>
+                      </a:solidFill>
+                      <a:prstDash val="solid"/>
+                      <a:round/>
+                      <a:headEnd type="none" w="med" len="med"/>
+                      <a:tailEnd type="none" w="med" len="med"/>
+                    </a:lnT>
+                    <a:lnB w="12700" cap="flat" cmpd="sng" algn="ctr">
+                      <a:solidFill>
+                        <a:srgbClr val="2A3441"/>
+                      </a:solidFill>
+                      <a:prstDash val="solid"/>
+                      <a:round/>
+                      <a:headEnd type="none" w="med" len="med"/>
+                      <a:tailEnd type="none" w="med" len="med"/>
+                    </a:lnB>
+                    <a:solidFill>
+                      <a:srgbClr val="141B24"/>
+                    </a:solidFill>
+                  </a:tcPr>
+                </a:tc>
+                <a:tc>
+                  <a:txBody>
+                    <a:bodyPr/>
+                    <a:lstStyle/>
+                    <a:p>
+                      <a:pPr indent="0" marL="0">
+                        <a:buNone/>
+                      </a:pPr>
+                      <a:r>
+                        <a:rPr lang="en-US" sz="1300" dirty="0">
+                          <a:solidFill>
+                            <a:srgbClr val="E6EDF3"/>
+                          </a:solidFill>
+                          <a:latin typeface="Calibri" pitchFamily="34" charset="0"/>
+                          <a:ea typeface="Calibri" pitchFamily="34" charset="-122"/>
+                          <a:cs typeface="Calibri" pitchFamily="34" charset="-120"/>
+                        </a:rPr>
+                        <a:t>7.16 s</a:t>
+                      </a:r>
+                      <a:endParaRPr lang="en-US" sz="1300" dirty="0">
+                        <a:latin typeface="Calibri" charset="0"/>
+                        <a:ea typeface="Calibri" charset="0"/>
+                        <a:cs typeface="Calibri" charset="0"/>
+                      </a:endParaRPr>
+                    </a:p>
+                  </a:txBody>
+                  <a:tcPr marL="91440" marR="91440" marT="45720" marB="45720">
+                    <a:lnL w="12700" cap="flat" cmpd="sng" algn="ctr">
+                      <a:solidFill>
+                        <a:srgbClr val="2A3441"/>
+                      </a:solidFill>
+                      <a:prstDash val="solid"/>
+                      <a:round/>
+                      <a:headEnd type="none" w="med" len="med"/>
+                      <a:tailEnd type="none" w="med" len="med"/>
+                    </a:lnL>
+                    <a:lnR w="12700" cap="flat" cmpd="sng" algn="ctr">
+                      <a:solidFill>
+                        <a:srgbClr val="2A3441"/>
+                      </a:solidFill>
+                      <a:prstDash val="solid"/>
+                      <a:round/>
+                      <a:headEnd type="none" w="med" len="med"/>
+                      <a:tailEnd type="none" w="med" len="med"/>
+                    </a:lnR>
+                    <a:lnT w="12700" cap="flat" cmpd="sng" algn="ctr">
+                      <a:solidFill>
+                        <a:srgbClr val="2A3441"/>
+                      </a:solidFill>
+                      <a:prstDash val="solid"/>
+                      <a:round/>
+                      <a:headEnd type="none" w="med" len="med"/>
+                      <a:tailEnd type="none" w="med" len="med"/>
+                    </a:lnT>
+                    <a:lnB w="12700" cap="flat" cmpd="sng" algn="ctr">
+                      <a:solidFill>
+                        <a:srgbClr val="2A3441"/>
+                      </a:solidFill>
+                      <a:prstDash val="solid"/>
+                      <a:round/>
+                      <a:headEnd type="none" w="med" len="med"/>
+                      <a:tailEnd type="none" w="med" len="med"/>
+                    </a:lnB>
+                    <a:solidFill>
+                      <a:srgbClr val="141B24"/>
+                    </a:solidFill>
+                  </a:tcPr>
+                </a:tc>
+                <a:tc>
+                  <a:txBody>
+                    <a:bodyPr/>
+                    <a:lstStyle/>
+                    <a:p>
+                      <a:pPr indent="0" marL="0">
+                        <a:buNone/>
+                      </a:pPr>
+                      <a:r>
+                        <a:rPr lang="en-US" sz="1300" dirty="0">
+                          <a:solidFill>
+                            <a:srgbClr val="E6EDF3"/>
+                          </a:solidFill>
+                          <a:latin typeface="Calibri" pitchFamily="34" charset="0"/>
+                          <a:ea typeface="Calibri" pitchFamily="34" charset="-122"/>
+                          <a:cs typeface="Calibri" pitchFamily="34" charset="-120"/>
+                        </a:rPr>
+                        <a:t>2.72 s</a:t>
+                      </a:r>
+                      <a:endParaRPr lang="en-US" sz="1300" dirty="0">
+                        <a:latin typeface="Calibri" charset="0"/>
+                        <a:ea typeface="Calibri" charset="0"/>
+                        <a:cs typeface="Calibri" charset="0"/>
+                      </a:endParaRPr>
+                    </a:p>
+                  </a:txBody>
+                  <a:tcPr marL="91440" marR="91440" marT="45720" marB="45720">
+                    <a:lnL w="12700" cap="flat" cmpd="sng" algn="ctr">
+                      <a:solidFill>
+                        <a:srgbClr val="2A3441"/>
+                      </a:solidFill>
+                      <a:prstDash val="solid"/>
+                      <a:round/>
+                      <a:headEnd type="none" w="med" len="med"/>
+                      <a:tailEnd type="none" w="med" len="med"/>
+                    </a:lnL>
+                    <a:lnR w="12700" cap="flat" cmpd="sng" algn="ctr">
+                      <a:solidFill>
+                        <a:srgbClr val="2A3441"/>
+                      </a:solidFill>
+                      <a:prstDash val="solid"/>
+                      <a:round/>
+                      <a:headEnd type="none" w="med" len="med"/>
+                      <a:tailEnd type="none" w="med" len="med"/>
+                    </a:lnR>
+                    <a:lnT w="12700" cap="flat" cmpd="sng" algn="ctr">
+                      <a:solidFill>
+                        <a:srgbClr val="2A3441"/>
+                      </a:solidFill>
+                      <a:prstDash val="solid"/>
+                      <a:round/>
+                      <a:headEnd type="none" w="med" len="med"/>
+                      <a:tailEnd type="none" w="med" len="med"/>
+                    </a:lnT>
+                    <a:lnB w="12700" cap="flat" cmpd="sng" algn="ctr">
+                      <a:solidFill>
+                        <a:srgbClr val="2A3441"/>
+                      </a:solidFill>
+                      <a:prstDash val="solid"/>
+                      <a:round/>
+                      <a:headEnd type="none" w="med" len="med"/>
+                      <a:tailEnd type="none" w="med" len="med"/>
+                    </a:lnB>
+                    <a:solidFill>
+                      <a:srgbClr val="141B24"/>
+                    </a:solidFill>
+                  </a:tcPr>
+                </a:tc>
+              </a:tr>
+              <a:tr h="384048">
+                <a:tc>
+                  <a:txBody>
+                    <a:bodyPr/>
+                    <a:lstStyle/>
+                    <a:p>
+                      <a:pPr indent="0" marL="0">
+                        <a:buNone/>
+                      </a:pPr>
+                      <a:r>
+                        <a:rPr lang="en-US" sz="1300" dirty="0">
+                          <a:solidFill>
+                            <a:srgbClr val="E6EDF3"/>
+                          </a:solidFill>
+                          <a:latin typeface="Calibri" pitchFamily="34" charset="0"/>
+                          <a:ea typeface="Calibri" pitchFamily="34" charset="-122"/>
+                          <a:cs typeface="Calibri" pitchFamily="34" charset="-120"/>
+                        </a:rPr>
+                        <a:t>Smart-RUDP, table</a:t>
+                      </a:r>
+                      <a:endParaRPr lang="en-US" sz="1300" dirty="0">
+                        <a:latin typeface="Calibri" charset="0"/>
+                        <a:ea typeface="Calibri" charset="0"/>
+                        <a:cs typeface="Calibri" charset="0"/>
+                      </a:endParaRPr>
+                    </a:p>
+                  </a:txBody>
+                  <a:tcPr marL="91440" marR="91440" marT="45720" marB="45720">
+                    <a:lnL w="12700" cap="flat" cmpd="sng" algn="ctr">
+                      <a:solidFill>
+                        <a:srgbClr val="2A3441"/>
+                      </a:solidFill>
+                      <a:prstDash val="solid"/>
+                      <a:round/>
+                      <a:headEnd type="none" w="med" len="med"/>
+                      <a:tailEnd type="none" w="med" len="med"/>
+                    </a:lnL>
+                    <a:lnR w="12700" cap="flat" cmpd="sng" algn="ctr">
+                      <a:solidFill>
+                        <a:srgbClr val="2A3441"/>
+                      </a:solidFill>
+                      <a:prstDash val="solid"/>
+                      <a:round/>
+                      <a:headEnd type="none" w="med" len="med"/>
+                      <a:tailEnd type="none" w="med" len="med"/>
+                    </a:lnR>
+                    <a:lnT w="12700" cap="flat" cmpd="sng" algn="ctr">
+                      <a:solidFill>
+                        <a:srgbClr val="2A3441"/>
+                      </a:solidFill>
+                      <a:prstDash val="solid"/>
+                      <a:round/>
+                      <a:headEnd type="none" w="med" len="med"/>
+                      <a:tailEnd type="none" w="med" len="med"/>
+                    </a:lnT>
+                    <a:lnB w="12700" cap="flat" cmpd="sng" algn="ctr">
+                      <a:solidFill>
+                        <a:srgbClr val="2A3441"/>
+                      </a:solidFill>
+                      <a:prstDash val="solid"/>
+                      <a:round/>
+                      <a:headEnd type="none" w="med" len="med"/>
+                      <a:tailEnd type="none" w="med" len="med"/>
+                    </a:lnB>
+                    <a:solidFill>
+                      <a:srgbClr val="141B24"/>
+                    </a:solidFill>
+                  </a:tcPr>
+                </a:tc>
+                <a:tc>
+                  <a:txBody>
+                    <a:bodyPr/>
+                    <a:lstStyle/>
+                    <a:p>
+                      <a:pPr indent="0" marL="0">
+                        <a:buNone/>
+                      </a:pPr>
+                      <a:r>
+                        <a:rPr lang="en-US" sz="1300" dirty="0">
+                          <a:solidFill>
+                            <a:srgbClr val="E6EDF3"/>
+                          </a:solidFill>
+                          <a:latin typeface="Calibri" pitchFamily="34" charset="0"/>
+                          <a:ea typeface="Calibri" pitchFamily="34" charset="-122"/>
+                          <a:cs typeface="Calibri" pitchFamily="34" charset="-120"/>
+                        </a:rPr>
+                        <a:t>3.73 s</a:t>
+                      </a:r>
+                      <a:endParaRPr lang="en-US" sz="1300" dirty="0">
+                        <a:latin typeface="Calibri" charset="0"/>
+                        <a:ea typeface="Calibri" charset="0"/>
+                        <a:cs typeface="Calibri" charset="0"/>
+                      </a:endParaRPr>
+                    </a:p>
+                  </a:txBody>
+                  <a:tcPr marL="91440" marR="91440" marT="45720" marB="45720">
+                    <a:lnL w="12700" cap="flat" cmpd="sng" algn="ctr">
+                      <a:solidFill>
+                        <a:srgbClr val="2A3441"/>
+                      </a:solidFill>
+                      <a:prstDash val="solid"/>
+                      <a:round/>
+                      <a:headEnd type="none" w="med" len="med"/>
+                      <a:tailEnd type="none" w="med" len="med"/>
+                    </a:lnL>
+                    <a:lnR w="12700" cap="flat" cmpd="sng" algn="ctr">
+                      <a:solidFill>
+                        <a:srgbClr val="2A3441"/>
+                      </a:solidFill>
+                      <a:prstDash val="solid"/>
+                      <a:round/>
+                      <a:headEnd type="none" w="med" len="med"/>
+                      <a:tailEnd type="none" w="med" len="med"/>
+                    </a:lnR>
+                    <a:lnT w="12700" cap="flat" cmpd="sng" algn="ctr">
+                      <a:solidFill>
+                        <a:srgbClr val="2A3441"/>
+                      </a:solidFill>
+                      <a:prstDash val="solid"/>
+                      <a:round/>
+                      <a:headEnd type="none" w="med" len="med"/>
+                      <a:tailEnd type="none" w="med" len="med"/>
+                    </a:lnT>
+                    <a:lnB w="12700" cap="flat" cmpd="sng" algn="ctr">
+                      <a:solidFill>
+                        <a:srgbClr val="2A3441"/>
+                      </a:solidFill>
+                      <a:prstDash val="solid"/>
+                      <a:round/>
+                      <a:headEnd type="none" w="med" len="med"/>
+                      <a:tailEnd type="none" w="med" len="med"/>
+                    </a:lnB>
+                    <a:solidFill>
+                      <a:srgbClr val="141B24"/>
+                    </a:solidFill>
+                  </a:tcPr>
+                </a:tc>
+                <a:tc>
+                  <a:txBody>
+                    <a:bodyPr/>
+                    <a:lstStyle/>
+                    <a:p>
+                      <a:pPr indent="0" marL="0">
+                        <a:buNone/>
+                      </a:pPr>
+                      <a:r>
+                        <a:rPr lang="en-US" sz="1300" dirty="0">
+                          <a:solidFill>
+                            <a:srgbClr val="E6EDF3"/>
+                          </a:solidFill>
+                          <a:latin typeface="Calibri" pitchFamily="34" charset="0"/>
+                          <a:ea typeface="Calibri" pitchFamily="34" charset="-122"/>
+                          <a:cs typeface="Calibri" pitchFamily="34" charset="-120"/>
+                        </a:rPr>
+                        <a:t>1.99 s</a:t>
+                      </a:r>
+                      <a:endParaRPr lang="en-US" sz="1300" dirty="0">
+                        <a:latin typeface="Calibri" charset="0"/>
+                        <a:ea typeface="Calibri" charset="0"/>
+                        <a:cs typeface="Calibri" charset="0"/>
+                      </a:endParaRPr>
+                    </a:p>
+                  </a:txBody>
+                  <a:tcPr marL="91440" marR="91440" marT="45720" marB="45720">
+                    <a:lnL w="12700" cap="flat" cmpd="sng" algn="ctr">
+                      <a:solidFill>
+                        <a:srgbClr val="2A3441"/>
+                      </a:solidFill>
+                      <a:prstDash val="solid"/>
+                      <a:round/>
+                      <a:headEnd type="none" w="med" len="med"/>
+                      <a:tailEnd type="none" w="med" len="med"/>
+                    </a:lnL>
+                    <a:lnR w="12700" cap="flat" cmpd="sng" algn="ctr">
+                      <a:solidFill>
+                        <a:srgbClr val="2A3441"/>
+                      </a:solidFill>
+                      <a:prstDash val="solid"/>
+                      <a:round/>
+                      <a:headEnd type="none" w="med" len="med"/>
+                      <a:tailEnd type="none" w="med" len="med"/>
+                    </a:lnR>
+                    <a:lnT w="12700" cap="flat" cmpd="sng" algn="ctr">
+                      <a:solidFill>
+                        <a:srgbClr val="2A3441"/>
+                      </a:solidFill>
+                      <a:prstDash val="solid"/>
+                      <a:round/>
+                      <a:headEnd type="none" w="med" len="med"/>
+                      <a:tailEnd type="none" w="med" len="med"/>
+                    </a:lnT>
+                    <a:lnB w="12700" cap="flat" cmpd="sng" algn="ctr">
+                      <a:solidFill>
+                        <a:srgbClr val="2A3441"/>
+                      </a:solidFill>
+                      <a:prstDash val="solid"/>
+                      <a:round/>
+                      <a:headEnd type="none" w="med" len="med"/>
+                      <a:tailEnd type="none" w="med" len="med"/>
+                    </a:lnB>
+                    <a:solidFill>
+                      <a:srgbClr val="141B24"/>
+                    </a:solidFill>
+                  </a:tcPr>
+                </a:tc>
+              </a:tr>
+              <a:tr h="384048">
+                <a:tc>
+                  <a:txBody>
+                    <a:bodyPr/>
+                    <a:lstStyle/>
+                    <a:p>
+                      <a:pPr indent="0" marL="0">
+                        <a:buNone/>
+                      </a:pPr>
+                      <a:r>
+                        <a:rPr lang="en-US" sz="1300" dirty="0">
+                          <a:solidFill>
+                            <a:srgbClr val="E6EDF3"/>
+                          </a:solidFill>
+                          <a:latin typeface="Calibri" pitchFamily="34" charset="0"/>
+                          <a:ea typeface="Calibri" pitchFamily="34" charset="-122"/>
+                          <a:cs typeface="Calibri" pitchFamily="34" charset="-120"/>
+                        </a:rPr>
+                        <a:t>Smart-RUDP, deep</a:t>
+                      </a:r>
+                      <a:endParaRPr lang="en-US" sz="1300" dirty="0">
+                        <a:latin typeface="Calibri" charset="0"/>
+                        <a:ea typeface="Calibri" charset="0"/>
+                        <a:cs typeface="Calibri" charset="0"/>
+                      </a:endParaRPr>
+                    </a:p>
+                  </a:txBody>
+                  <a:tcPr marL="91440" marR="91440" marT="45720" marB="45720">
+                    <a:lnL w="12700" cap="flat" cmpd="sng" algn="ctr">
+                      <a:solidFill>
+                        <a:srgbClr val="2A3441"/>
+                      </a:solidFill>
+                      <a:prstDash val="solid"/>
+                      <a:round/>
+                      <a:headEnd type="none" w="med" len="med"/>
+                      <a:tailEnd type="none" w="med" len="med"/>
+                    </a:lnL>
+                    <a:lnR w="12700" cap="flat" cmpd="sng" algn="ctr">
+                      <a:solidFill>
+                        <a:srgbClr val="2A3441"/>
+                      </a:solidFill>
+                      <a:prstDash val="solid"/>
+                      <a:round/>
+                      <a:headEnd type="none" w="med" len="med"/>
+                      <a:tailEnd type="none" w="med" len="med"/>
+                    </a:lnR>
+                    <a:lnT w="12700" cap="flat" cmpd="sng" algn="ctr">
+                      <a:solidFill>
+                        <a:srgbClr val="2A3441"/>
+                      </a:solidFill>
+                      <a:prstDash val="solid"/>
+                      <a:round/>
+                      <a:headEnd type="none" w="med" len="med"/>
+                      <a:tailEnd type="none" w="med" len="med"/>
+                    </a:lnT>
+                    <a:lnB w="12700" cap="flat" cmpd="sng" algn="ctr">
+                      <a:solidFill>
+                        <a:srgbClr val="2A3441"/>
+                      </a:solidFill>
+                      <a:prstDash val="solid"/>
+                      <a:round/>
+                      <a:headEnd type="none" w="med" len="med"/>
+                      <a:tailEnd type="none" w="med" len="med"/>
+                    </a:lnB>
+                    <a:solidFill>
+                      <a:srgbClr val="141B24"/>
+                    </a:solidFill>
+                  </a:tcPr>
+                </a:tc>
+                <a:tc>
+                  <a:txBody>
+                    <a:bodyPr/>
+                    <a:lstStyle/>
+                    <a:p>
+                      <a:pPr indent="0" marL="0">
+                        <a:buNone/>
+                      </a:pPr>
+                      <a:r>
+                        <a:rPr lang="en-US" sz="1300" dirty="0">
+                          <a:solidFill>
+                            <a:srgbClr val="E6EDF3"/>
+                          </a:solidFill>
+                          <a:latin typeface="Calibri" pitchFamily="34" charset="0"/>
+                          <a:ea typeface="Calibri" pitchFamily="34" charset="-122"/>
+                          <a:cs typeface="Calibri" pitchFamily="34" charset="-120"/>
+                        </a:rPr>
+                        <a:t>3.20 s</a:t>
+                      </a:r>
+                      <a:endParaRPr lang="en-US" sz="1300" dirty="0">
+                        <a:latin typeface="Calibri" charset="0"/>
+                        <a:ea typeface="Calibri" charset="0"/>
+                        <a:cs typeface="Calibri" charset="0"/>
+                      </a:endParaRPr>
+                    </a:p>
+                  </a:txBody>
+                  <a:tcPr marL="91440" marR="91440" marT="45720" marB="45720">
+                    <a:lnL w="12700" cap="flat" cmpd="sng" algn="ctr">
+                      <a:solidFill>
+                        <a:srgbClr val="2A3441"/>
+                      </a:solidFill>
+                      <a:prstDash val="solid"/>
+                      <a:round/>
+                      <a:headEnd type="none" w="med" len="med"/>
+                      <a:tailEnd type="none" w="med" len="med"/>
+                    </a:lnL>
+                    <a:lnR w="12700" cap="flat" cmpd="sng" algn="ctr">
+                      <a:solidFill>
+                        <a:srgbClr val="2A3441"/>
+                      </a:solidFill>
+                      <a:prstDash val="solid"/>
+                      <a:round/>
+                      <a:headEnd type="none" w="med" len="med"/>
+                      <a:tailEnd type="none" w="med" len="med"/>
+                    </a:lnR>
+                    <a:lnT w="12700" cap="flat" cmpd="sng" algn="ctr">
+                      <a:solidFill>
+                        <a:srgbClr val="2A3441"/>
+                      </a:solidFill>
+                      <a:prstDash val="solid"/>
+                      <a:round/>
+                      <a:headEnd type="none" w="med" len="med"/>
+                      <a:tailEnd type="none" w="med" len="med"/>
+                    </a:lnT>
+                    <a:lnB w="12700" cap="flat" cmpd="sng" algn="ctr">
+                      <a:solidFill>
+                        <a:srgbClr val="2A3441"/>
+                      </a:solidFill>
+                      <a:prstDash val="solid"/>
+                      <a:round/>
+                      <a:headEnd type="none" w="med" len="med"/>
+                      <a:tailEnd type="none" w="med" len="med"/>
+                    </a:lnB>
+                    <a:solidFill>
+                      <a:srgbClr val="141B24"/>
+                    </a:solidFill>
+                  </a:tcPr>
+                </a:tc>
+                <a:tc>
+                  <a:txBody>
+                    <a:bodyPr/>
+                    <a:lstStyle/>
+                    <a:p>
+                      <a:pPr indent="0" marL="0">
+                        <a:buNone/>
+                      </a:pPr>
+                      <a:r>
+                        <a:rPr lang="en-US" sz="1300" dirty="0">
+                          <a:solidFill>
+                            <a:srgbClr val="E6EDF3"/>
+                          </a:solidFill>
+                          <a:latin typeface="Calibri" pitchFamily="34" charset="0"/>
+                          <a:ea typeface="Calibri" pitchFamily="34" charset="-122"/>
+                          <a:cs typeface="Calibri" pitchFamily="34" charset="-120"/>
+                        </a:rPr>
+                        <a:t>1.79 s</a:t>
+                      </a:r>
+                      <a:endParaRPr lang="en-US" sz="1300" dirty="0">
+                        <a:latin typeface="Calibri" charset="0"/>
+                        <a:ea typeface="Calibri" charset="0"/>
+                        <a:cs typeface="Calibri" charset="0"/>
+                      </a:endParaRPr>
+                    </a:p>
+                  </a:txBody>
+                  <a:tcPr marL="91440" marR="91440" marT="45720" marB="45720">
+                    <a:lnL w="12700" cap="flat" cmpd="sng" algn="ctr">
+                      <a:solidFill>
+                        <a:srgbClr val="2A3441"/>
+                      </a:solidFill>
+                      <a:prstDash val="solid"/>
+                      <a:round/>
+                      <a:headEnd type="none" w="med" len="med"/>
+                      <a:tailEnd type="none" w="med" len="med"/>
+                    </a:lnL>
+                    <a:lnR w="12700" cap="flat" cmpd="sng" algn="ctr">
+                      <a:solidFill>
+                        <a:srgbClr val="2A3441"/>
+                      </a:solidFill>
+                      <a:prstDash val="solid"/>
+                      <a:round/>
+                      <a:headEnd type="none" w="med" len="med"/>
+                      <a:tailEnd type="none" w="med" len="med"/>
+                    </a:lnR>
+                    <a:lnT w="12700" cap="flat" cmpd="sng" algn="ctr">
+                      <a:solidFill>
+                        <a:srgbClr val="2A3441"/>
+                      </a:solidFill>
+                      <a:prstDash val="solid"/>
+                      <a:round/>
+                      <a:headEnd type="none" w="med" len="med"/>
+                      <a:tailEnd type="none" w="med" len="med"/>
+                    </a:lnT>
+                    <a:lnB w="12700" cap="flat" cmpd="sng" algn="ctr">
+                      <a:solidFill>
+                        <a:srgbClr val="2A3441"/>
+                      </a:solidFill>
+                      <a:prstDash val="solid"/>
+                      <a:round/>
+                      <a:headEnd type="none" w="med" len="med"/>
+                      <a:tailEnd type="none" w="med" len="med"/>
+                    </a:lnB>
+                    <a:solidFill>
+                      <a:srgbClr val="141B24"/>
+                    </a:solidFill>
+                  </a:tcPr>
+                </a:tc>
+              </a:tr>
+            </a:tbl>
+          </a:graphicData>
+        </a:graphic>
+      </p:graphicFrame>
+      <p:sp>
+        <p:nvSpPr>
+          <p:cNvPr id="5" name="Text 2"/>
+          <p:cNvSpPr/>
+          <p:nvPr/>
+        </p:nvSpPr>
+        <p:spPr>
+          <a:xfrm>
+            <a:off x="6309360" y="1188720"/>
             <a:ext cx="5394960" cy="4206240"/>
-          </a:xfrm>
-          <a:prstGeom prst="rect">
-            <a:avLst/>
-          </a:prstGeom>
-          <a:solidFill>
-            <a:srgbClr val="141B24"/>
-          </a:solidFill>
-          <a:ln w="12700">
-            <a:solidFill>
-              <a:srgbClr val="39FF88"/>
-            </a:solidFill>
-            <a:prstDash val="solid"/>
-          </a:ln>
-        </p:spPr>
-      </p:sp>
-      <p:sp>
-        <p:nvSpPr>
-          <p:cNvPr id="5" name="Text 3"/>
-          <p:cNvSpPr/>
-          <p:nvPr/>
-        </p:nvSpPr>
-        <p:spPr>
-          <a:xfrm>
-            <a:off x="731520" y="1508760"/>
-            <a:ext cx="5029200" cy="457200"/>
           </a:xfrm>
           <a:prstGeom prst="rect">
             <a:avLst/>
@@ -8140,53 +9711,18 @@
           <a:ln/>
         </p:spPr>
         <p:txBody>
-          <a:bodyPr wrap="square" lIns="0" tIns="0" rIns="0" bIns="0" rtlCol="0" anchor="ctr"/>
-          <a:lstStyle/>
-          <a:p>
-            <a:pPr indent="0" marL="0">
-              <a:buNone/>
-            </a:pPr>
-            <a:r>
-              <a:rPr lang="en-US" sz="2000" b="1" dirty="0">
-                <a:solidFill>
-                  <a:srgbClr val="39FF88"/>
-                </a:solidFill>
-                <a:latin typeface="Courier New" pitchFamily="34" charset="0"/>
-                <a:ea typeface="Courier New" pitchFamily="34" charset="-122"/>
-                <a:cs typeface="Courier New" pitchFamily="34" charset="-120"/>
-              </a:rPr>
-              <a:t>Learned</a:t>
-            </a:r>
-            <a:endParaRPr lang="en-US" sz="2000" dirty="0"/>
-          </a:p>
-        </p:txBody>
-      </p:sp>
-      <p:sp>
-        <p:nvSpPr>
-          <p:cNvPr id="6" name="Text 4"/>
-          <p:cNvSpPr/>
-          <p:nvPr/>
-        </p:nvSpPr>
-        <p:spPr>
-          <a:xfrm>
-            <a:off x="731520" y="2011680"/>
-            <a:ext cx="5029200" cy="3429000"/>
-          </a:xfrm>
-          <a:prstGeom prst="rect">
-            <a:avLst/>
-          </a:prstGeom>
-          <a:noFill/>
-          <a:ln/>
-        </p:spPr>
-        <p:txBody>
           <a:bodyPr wrap="square" lIns="0" tIns="0" rIns="0" bIns="0" rtlCol="0" anchor="t"/>
           <a:lstStyle/>
           <a:p>
-            <a:pPr indent="0" marL="0">
-              <a:buNone/>
-            </a:pPr>
-            <a:r>
-              <a:rPr lang="en-US" sz="2000" dirty="0">
+            <a:pPr marL="342900" indent="-342900">
+              <a:spcAft>
+                <a:spcPts val="800"/>
+              </a:spcAft>
+              <a:buSzPct val="100000"/>
+              <a:buChar char="•"/>
+            </a:pPr>
+            <a:r>
+              <a:rPr lang="en-US" sz="1500" dirty="0">
                 <a:solidFill>
                   <a:srgbClr val="E6EDF3"/>
                 </a:solidFill>
@@ -8194,16 +9730,20 @@
                 <a:ea typeface="Calibri" pitchFamily="34" charset="-122"/>
                 <a:cs typeface="Calibri" pitchFamily="34" charset="-120"/>
               </a:rPr>
-              <a:t>Reliability is a set of simple rules working together.</a:t>
-            </a:r>
-            <a:endParaRPr lang="en-US" sz="2000" dirty="0"/>
-          </a:p>
-          <a:p>
-            <a:pPr indent="0" marL="0">
-              <a:buNone/>
-            </a:pPr>
-            <a:r>
-              <a:rPr lang="en-US" sz="2000" dirty="0">
+              <a:t>Selective ACK (simulated): AIMD mean 7.16 s to 4.90 s, median 2.72 s to 1.44 s; faster on 34 of 48 paths. Go-Back-N is the main weakness.</a:t>
+            </a:r>
+            <a:endParaRPr lang="en-US" sz="1500" dirty="0"/>
+          </a:p>
+          <a:p>
+            <a:pPr marL="342900" indent="-342900">
+              <a:spcAft>
+                <a:spcPts val="800"/>
+              </a:spcAft>
+              <a:buSzPct val="100000"/>
+              <a:buChar char="•"/>
+            </a:pPr>
+            <a:r>
+              <a:rPr lang="en-US" sz="1500" dirty="0">
                 <a:solidFill>
                   <a:srgbClr val="E6EDF3"/>
                 </a:solidFill>
@@ -8211,16 +9751,20 @@
                 <a:ea typeface="Calibri" pitchFamily="34" charset="-122"/>
                 <a:cs typeface="Calibri" pitchFamily="34" charset="-120"/>
               </a:rPr>
-              <a:t>Congestion control matters as much as retransmission.</a:t>
-            </a:r>
-            <a:endParaRPr lang="en-US" sz="2000" dirty="0"/>
-          </a:p>
-          <a:p>
-            <a:pPr indent="0" marL="0">
-              <a:buNone/>
-            </a:pPr>
-            <a:r>
-              <a:rPr lang="en-US" sz="2000" dirty="0">
+              <a:t>Reordering (20 ms jitter): AIMD 0.82 s to 6.79 s; deep agent 0.93 s; SACK removes most of the damage.</a:t>
+            </a:r>
+            <a:endParaRPr lang="en-US" sz="1500" dirty="0"/>
+          </a:p>
+          <a:p>
+            <a:pPr marL="342900" indent="-342900">
+              <a:spcAft>
+                <a:spcPts val="800"/>
+              </a:spcAft>
+              <a:buSzPct val="100000"/>
+              <a:buChar char="•"/>
+            </a:pPr>
+            <a:r>
+              <a:rPr lang="en-US" sz="1500" dirty="0">
                 <a:solidFill>
                   <a:srgbClr val="E6EDF3"/>
                 </a:solidFill>
@@ -8228,47 +9772,22 @@
                 <a:ea typeface="Calibri" pitchFamily="34" charset="-122"/>
                 <a:cs typeface="Calibri" pitchFamily="34" charset="-120"/>
               </a:rPr>
-              <a:t>Testing tools fail in surprising ways.</a:t>
-            </a:r>
-            <a:endParaRPr lang="en-US" sz="2000" dirty="0"/>
-          </a:p>
-        </p:txBody>
-      </p:sp>
-      <p:sp>
-        <p:nvSpPr>
-          <p:cNvPr id="7" name="Shape 5"/>
-          <p:cNvSpPr/>
-          <p:nvPr/>
-        </p:nvSpPr>
-        <p:spPr>
-          <a:xfrm>
-            <a:off x="6217920" y="1371600"/>
-            <a:ext cx="5394960" cy="4206240"/>
-          </a:xfrm>
-          <a:prstGeom prst="rect">
-            <a:avLst/>
-          </a:prstGeom>
-          <a:solidFill>
-            <a:srgbClr val="141B24"/>
-          </a:solidFill>
-          <a:ln w="12700">
-            <a:solidFill>
-              <a:srgbClr val="FFB000"/>
-            </a:solidFill>
-            <a:prstDash val="solid"/>
-          </a:ln>
-        </p:spPr>
-      </p:sp>
-      <p:sp>
-        <p:nvSpPr>
-          <p:cNvPr id="8" name="Text 6"/>
-          <p:cNvSpPr/>
-          <p:nvPr/>
-        </p:nvSpPr>
-        <p:spPr>
-          <a:xfrm>
-            <a:off x="6400800" y="1508760"/>
-            <a:ext cx="5029200" cy="457200"/>
+              <a:t>20-run intervals for the C experiments: Smart slower on 5G-like (+0.92 s) and satellite-like (+6.3 s), tie on lossy.</a:t>
+            </a:r>
+            <a:endParaRPr lang="en-US" sz="1500" dirty="0"/>
+          </a:p>
+        </p:txBody>
+      </p:sp>
+      <p:sp>
+        <p:nvSpPr>
+          <p:cNvPr id="6" name="Text 3"/>
+          <p:cNvSpPr/>
+          <p:nvPr/>
+        </p:nvSpPr>
+        <p:spPr>
+          <a:xfrm>
+            <a:off x="548640" y="5120640"/>
+            <a:ext cx="5486400" cy="731520"/>
           </a:xfrm>
           <a:prstGeom prst="rect">
             <a:avLst/>
@@ -8284,146 +9803,17 @@
               <a:buNone/>
             </a:pPr>
             <a:r>
-              <a:rPr lang="en-US" sz="2000" b="1" dirty="0">
-                <a:solidFill>
-                  <a:srgbClr val="FFB000"/>
-                </a:solidFill>
-                <a:latin typeface="Courier New" pitchFamily="34" charset="0"/>
-                <a:ea typeface="Courier New" pitchFamily="34" charset="-122"/>
-                <a:cs typeface="Courier New" pitchFamily="34" charset="-120"/>
-              </a:rPr>
-              <a:t>Next</a:t>
-            </a:r>
-            <a:endParaRPr lang="en-US" sz="2000" dirty="0"/>
-          </a:p>
-        </p:txBody>
-      </p:sp>
-      <p:sp>
-        <p:nvSpPr>
-          <p:cNvPr id="9" name="Text 7"/>
-          <p:cNvSpPr/>
-          <p:nvPr/>
-        </p:nvSpPr>
-        <p:spPr>
-          <a:xfrm>
-            <a:off x="6400800" y="2011680"/>
-            <a:ext cx="5029200" cy="3429000"/>
-          </a:xfrm>
-          <a:prstGeom prst="rect">
-            <a:avLst/>
-          </a:prstGeom>
-          <a:noFill/>
-          <a:ln/>
-        </p:spPr>
-        <p:txBody>
-          <a:bodyPr wrap="square" lIns="0" tIns="0" rIns="0" bIns="0" rtlCol="0" anchor="t"/>
-          <a:lstStyle/>
-          <a:p>
-            <a:pPr indent="0" marL="0">
-              <a:buNone/>
-            </a:pPr>
-            <a:r>
-              <a:rPr lang="en-US" sz="2000" dirty="0">
-                <a:solidFill>
-                  <a:srgbClr val="E6EDF3"/>
+              <a:rPr lang="en-US" sz="1300" dirty="0">
+                <a:solidFill>
+                  <a:srgbClr val="8B98A5"/>
                 </a:solidFill>
                 <a:latin typeface="Calibri" pitchFamily="34" charset="0"/>
                 <a:ea typeface="Calibri" pitchFamily="34" charset="-122"/>
                 <a:cs typeface="Calibri" pitchFamily="34" charset="-120"/>
               </a:rPr>
-              <a:t>Selective Repeat / SACK</a:t>
-            </a:r>
-            <a:endParaRPr lang="en-US" sz="2000" dirty="0"/>
-          </a:p>
-          <a:p>
-            <a:pPr indent="0" marL="0">
-              <a:buNone/>
-            </a:pPr>
-            <a:r>
-              <a:rPr lang="en-US" sz="2000" dirty="0">
-                <a:solidFill>
-                  <a:srgbClr val="E6EDF3"/>
-                </a:solidFill>
-                <a:latin typeface="Calibri" pitchFamily="34" charset="0"/>
-                <a:ea typeface="Calibri" pitchFamily="34" charset="-122"/>
-                <a:cs typeface="Calibri" pitchFamily="34" charset="-120"/>
-              </a:rPr>
-              <a:t>A stronger learning agent</a:t>
-            </a:r>
-            <a:endParaRPr lang="en-US" sz="2000" dirty="0"/>
-          </a:p>
-          <a:p>
-            <a:pPr indent="0" marL="0">
-              <a:buNone/>
-            </a:pPr>
-            <a:r>
-              <a:rPr lang="en-US" sz="2000" dirty="0">
-                <a:solidFill>
-                  <a:srgbClr val="E6EDF3"/>
-                </a:solidFill>
-                <a:latin typeface="Calibri" pitchFamily="34" charset="0"/>
-                <a:ea typeface="Calibri" pitchFamily="34" charset="-122"/>
-                <a:cs typeface="Calibri" pitchFamily="34" charset="-120"/>
-              </a:rPr>
-              <a:t>Kernel netem and real multi-machine tests</a:t>
-            </a:r>
-            <a:endParaRPr lang="en-US" sz="2000" dirty="0"/>
-          </a:p>
-          <a:p>
-            <a:pPr indent="0" marL="0">
-              <a:buNone/>
-            </a:pPr>
-            <a:r>
-              <a:rPr lang="en-US" sz="2000" dirty="0">
-                <a:solidFill>
-                  <a:srgbClr val="E6EDF3"/>
-                </a:solidFill>
-                <a:latin typeface="Calibri" pitchFamily="34" charset="0"/>
-                <a:ea typeface="Calibri" pitchFamily="34" charset="-122"/>
-                <a:cs typeface="Calibri" pitchFamily="34" charset="-120"/>
-              </a:rPr>
-              <a:t>Run RUDP across a real multi-machine network</a:t>
-            </a:r>
-            <a:endParaRPr lang="en-US" sz="2000" dirty="0"/>
-          </a:p>
-        </p:txBody>
-      </p:sp>
-      <p:sp>
-        <p:nvSpPr>
-          <p:cNvPr id="10" name="Text 8"/>
-          <p:cNvSpPr/>
-          <p:nvPr/>
-        </p:nvSpPr>
-        <p:spPr>
-          <a:xfrm>
-            <a:off x="548640" y="5852160"/>
-            <a:ext cx="10972800" cy="365760"/>
-          </a:xfrm>
-          <a:prstGeom prst="rect">
-            <a:avLst/>
-          </a:prstGeom>
-          <a:noFill/>
-          <a:ln/>
-        </p:spPr>
-        <p:txBody>
-          <a:bodyPr wrap="square" lIns="0" tIns="0" rIns="0" bIns="0" rtlCol="0" anchor="ctr"/>
-          <a:lstStyle/>
-          <a:p>
-            <a:pPr indent="0" marL="0">
-              <a:buNone/>
-            </a:pPr>
-            <a:r>
-              <a:rPr lang="en-US" sz="1400" dirty="0">
-                <a:solidFill>
-                  <a:srgbClr val="8B98A5"/>
-                </a:solidFill>
-                <a:latin typeface="Calibri" pitchFamily="34" charset="0"/>
-                <a:ea typeface="Calibri" pitchFamily="34" charset="-122"/>
-                <a:cs typeface="Calibri" pitchFamily="34" charset="-120"/>
-              </a:rPr>
-              <a:t>Limits: Go-Back-N wastes bandwidth; emulated (not kernel) paths; Smart-RUDP did not beat AIMD.</a:t>
-            </a:r>
-            <a:endParaRPr lang="en-US" sz="1400" dirty="0"/>
+              <a:t>The TCP row is a model, not kernel TCP. Real netem numbers need a Linux machine: netem_baselines.sh.</a:t>
+            </a:r>
+            <a:endParaRPr lang="en-US" sz="1300" dirty="0"/>
           </a:p>
         </p:txBody>
       </p:sp>
@@ -8467,8 +9857,8 @@
         </p:nvSpPr>
         <p:spPr>
           <a:xfrm>
-            <a:off x="731520" y="2103120"/>
-            <a:ext cx="10058400" cy="1097280"/>
+            <a:off x="548640" y="320040"/>
+            <a:ext cx="11064240" cy="731520"/>
           </a:xfrm>
           <a:prstGeom prst="rect">
             <a:avLst/>
@@ -8484,7 +9874,7 @@
               <a:buNone/>
             </a:pPr>
             <a:r>
-              <a:rPr lang="en-US" sz="6400" b="1" dirty="0">
+              <a:rPr lang="en-US" sz="3000" b="1" dirty="0">
                 <a:solidFill>
                   <a:srgbClr val="39FF88"/>
                 </a:solidFill>
@@ -8492,9 +9882,9 @@
                 <a:ea typeface="Courier New" pitchFamily="34" charset="-122"/>
                 <a:cs typeface="Courier New" pitchFamily="34" charset="-120"/>
               </a:rPr>
-              <a:t>Thank you</a:t>
-            </a:r>
-            <a:endParaRPr lang="en-US" sz="6400" dirty="0"/>
+              <a:t>Learnings and future work</a:t>
+            </a:r>
+            <a:endParaRPr lang="en-US" sz="3000" dirty="0"/>
           </a:p>
         </p:txBody>
       </p:sp>
@@ -8506,8 +9896,8 @@
         </p:nvSpPr>
         <p:spPr>
           <a:xfrm>
-            <a:off x="731520" y="3474720"/>
-            <a:ext cx="10058400" cy="548640"/>
+            <a:off x="9418320" y="6446520"/>
+            <a:ext cx="2377440" cy="274320"/>
           </a:xfrm>
           <a:prstGeom prst="rect">
             <a:avLst/>
@@ -8519,34 +9909,59 @@
           <a:bodyPr wrap="square" lIns="0" tIns="0" rIns="0" bIns="0" rtlCol="0" anchor="ctr"/>
           <a:lstStyle/>
           <a:p>
-            <a:pPr indent="0" marL="0">
-              <a:buNone/>
-            </a:pPr>
-            <a:r>
-              <a:rPr lang="en-US" sz="2600" dirty="0">
-                <a:solidFill>
-                  <a:srgbClr val="E6EDF3"/>
+            <a:pPr algn="r" indent="0" marL="0">
+              <a:buNone/>
+            </a:pPr>
+            <a:r>
+              <a:rPr lang="en-US" sz="1000" dirty="0">
+                <a:solidFill>
+                  <a:srgbClr val="8B98A5"/>
                 </a:solidFill>
                 <a:latin typeface="Courier New" pitchFamily="34" charset="0"/>
                 <a:ea typeface="Courier New" pitchFamily="34" charset="-122"/>
                 <a:cs typeface="Courier New" pitchFamily="34" charset="-120"/>
               </a:rPr>
-              <a:t>github.com/Capsturrrr/rudp</a:t>
-            </a:r>
-            <a:endParaRPr lang="en-US" sz="2600" dirty="0"/>
-          </a:p>
-        </p:txBody>
-      </p:sp>
-      <p:sp>
-        <p:nvSpPr>
-          <p:cNvPr id="4" name="Text 2"/>
-          <p:cNvSpPr/>
-          <p:nvPr/>
-        </p:nvSpPr>
-        <p:spPr>
-          <a:xfrm>
-            <a:off x="731520" y="4206240"/>
-            <a:ext cx="10058400" cy="457200"/>
+              <a:t>22 / 23   Smart-RUDP</a:t>
+            </a:r>
+            <a:endParaRPr lang="en-US" sz="1000" dirty="0"/>
+          </a:p>
+        </p:txBody>
+      </p:sp>
+      <p:sp>
+        <p:nvSpPr>
+          <p:cNvPr id="4" name="Shape 2"/>
+          <p:cNvSpPr/>
+          <p:nvPr/>
+        </p:nvSpPr>
+        <p:spPr>
+          <a:xfrm>
+            <a:off x="548640" y="1371600"/>
+            <a:ext cx="5394960" cy="4206240"/>
+          </a:xfrm>
+          <a:prstGeom prst="rect">
+            <a:avLst/>
+          </a:prstGeom>
+          <a:solidFill>
+            <a:srgbClr val="141B24"/>
+          </a:solidFill>
+          <a:ln w="12700">
+            <a:solidFill>
+              <a:srgbClr val="39FF88"/>
+            </a:solidFill>
+            <a:prstDash val="solid"/>
+          </a:ln>
+        </p:spPr>
+      </p:sp>
+      <p:sp>
+        <p:nvSpPr>
+          <p:cNvPr id="5" name="Text 3"/>
+          <p:cNvSpPr/>
+          <p:nvPr/>
+        </p:nvSpPr>
+        <p:spPr>
+          <a:xfrm>
+            <a:off x="731520" y="1508760"/>
+            <a:ext cx="5029200" cy="457200"/>
           </a:xfrm>
           <a:prstGeom prst="rect">
             <a:avLst/>
@@ -8562,17 +9977,266 @@
               <a:buNone/>
             </a:pPr>
             <a:r>
-              <a:rPr lang="en-US" sz="1800" dirty="0">
-                <a:solidFill>
-                  <a:srgbClr val="8B98A5"/>
+              <a:rPr lang="en-US" sz="2000" b="1" dirty="0">
+                <a:solidFill>
+                  <a:srgbClr val="39FF88"/>
+                </a:solidFill>
+                <a:latin typeface="Courier New" pitchFamily="34" charset="0"/>
+                <a:ea typeface="Courier New" pitchFamily="34" charset="-122"/>
+                <a:cs typeface="Courier New" pitchFamily="34" charset="-120"/>
+              </a:rPr>
+              <a:t>Learned</a:t>
+            </a:r>
+            <a:endParaRPr lang="en-US" sz="2000" dirty="0"/>
+          </a:p>
+        </p:txBody>
+      </p:sp>
+      <p:sp>
+        <p:nvSpPr>
+          <p:cNvPr id="6" name="Text 4"/>
+          <p:cNvSpPr/>
+          <p:nvPr/>
+        </p:nvSpPr>
+        <p:spPr>
+          <a:xfrm>
+            <a:off x="731520" y="2011680"/>
+            <a:ext cx="5029200" cy="3429000"/>
+          </a:xfrm>
+          <a:prstGeom prst="rect">
+            <a:avLst/>
+          </a:prstGeom>
+          <a:noFill/>
+          <a:ln/>
+        </p:spPr>
+        <p:txBody>
+          <a:bodyPr wrap="square" lIns="0" tIns="0" rIns="0" bIns="0" rtlCol="0" anchor="t"/>
+          <a:lstStyle/>
+          <a:p>
+            <a:pPr indent="0" marL="0">
+              <a:buNone/>
+            </a:pPr>
+            <a:r>
+              <a:rPr lang="en-US" sz="2000" dirty="0">
+                <a:solidFill>
+                  <a:srgbClr val="E6EDF3"/>
                 </a:solidFill>
                 <a:latin typeface="Calibri" pitchFamily="34" charset="0"/>
                 <a:ea typeface="Calibri" pitchFamily="34" charset="-122"/>
                 <a:cs typeface="Calibri" pitchFamily="34" charset="-120"/>
               </a:rPr>
-              <a:t>Harshavardhan Mallela   Rohit Arya   Shloak Sinha</a:t>
-            </a:r>
-            <a:endParaRPr lang="en-US" sz="1800" dirty="0"/>
+              <a:t>Reliability is a set of simple rules working together.</a:t>
+            </a:r>
+            <a:endParaRPr lang="en-US" sz="2000" dirty="0"/>
+          </a:p>
+          <a:p>
+            <a:pPr indent="0" marL="0">
+              <a:buNone/>
+            </a:pPr>
+            <a:r>
+              <a:rPr lang="en-US" sz="2000" dirty="0">
+                <a:solidFill>
+                  <a:srgbClr val="E6EDF3"/>
+                </a:solidFill>
+                <a:latin typeface="Calibri" pitchFamily="34" charset="0"/>
+                <a:ea typeface="Calibri" pitchFamily="34" charset="-122"/>
+                <a:cs typeface="Calibri" pitchFamily="34" charset="-120"/>
+              </a:rPr>
+              <a:t>Congestion control matters as much as retransmission.</a:t>
+            </a:r>
+            <a:endParaRPr lang="en-US" sz="2000" dirty="0"/>
+          </a:p>
+          <a:p>
+            <a:pPr indent="0" marL="0">
+              <a:buNone/>
+            </a:pPr>
+            <a:r>
+              <a:rPr lang="en-US" sz="2000" dirty="0">
+                <a:solidFill>
+                  <a:srgbClr val="E6EDF3"/>
+                </a:solidFill>
+                <a:latin typeface="Calibri" pitchFamily="34" charset="0"/>
+                <a:ea typeface="Calibri" pitchFamily="34" charset="-122"/>
+                <a:cs typeface="Calibri" pitchFamily="34" charset="-120"/>
+              </a:rPr>
+              <a:t>Testing tools fail in surprising ways.</a:t>
+            </a:r>
+            <a:endParaRPr lang="en-US" sz="2000" dirty="0"/>
+          </a:p>
+        </p:txBody>
+      </p:sp>
+      <p:sp>
+        <p:nvSpPr>
+          <p:cNvPr id="7" name="Shape 5"/>
+          <p:cNvSpPr/>
+          <p:nvPr/>
+        </p:nvSpPr>
+        <p:spPr>
+          <a:xfrm>
+            <a:off x="6217920" y="1371600"/>
+            <a:ext cx="5394960" cy="4206240"/>
+          </a:xfrm>
+          <a:prstGeom prst="rect">
+            <a:avLst/>
+          </a:prstGeom>
+          <a:solidFill>
+            <a:srgbClr val="141B24"/>
+          </a:solidFill>
+          <a:ln w="12700">
+            <a:solidFill>
+              <a:srgbClr val="FFB000"/>
+            </a:solidFill>
+            <a:prstDash val="solid"/>
+          </a:ln>
+        </p:spPr>
+      </p:sp>
+      <p:sp>
+        <p:nvSpPr>
+          <p:cNvPr id="8" name="Text 6"/>
+          <p:cNvSpPr/>
+          <p:nvPr/>
+        </p:nvSpPr>
+        <p:spPr>
+          <a:xfrm>
+            <a:off x="6400800" y="1508760"/>
+            <a:ext cx="5029200" cy="457200"/>
+          </a:xfrm>
+          <a:prstGeom prst="rect">
+            <a:avLst/>
+          </a:prstGeom>
+          <a:noFill/>
+          <a:ln/>
+        </p:spPr>
+        <p:txBody>
+          <a:bodyPr wrap="square" lIns="0" tIns="0" rIns="0" bIns="0" rtlCol="0" anchor="ctr"/>
+          <a:lstStyle/>
+          <a:p>
+            <a:pPr indent="0" marL="0">
+              <a:buNone/>
+            </a:pPr>
+            <a:r>
+              <a:rPr lang="en-US" sz="2000" b="1" dirty="0">
+                <a:solidFill>
+                  <a:srgbClr val="FFB000"/>
+                </a:solidFill>
+                <a:latin typeface="Courier New" pitchFamily="34" charset="0"/>
+                <a:ea typeface="Courier New" pitchFamily="34" charset="-122"/>
+                <a:cs typeface="Courier New" pitchFamily="34" charset="-120"/>
+              </a:rPr>
+              <a:t>Next</a:t>
+            </a:r>
+            <a:endParaRPr lang="en-US" sz="2000" dirty="0"/>
+          </a:p>
+        </p:txBody>
+      </p:sp>
+      <p:sp>
+        <p:nvSpPr>
+          <p:cNvPr id="9" name="Text 7"/>
+          <p:cNvSpPr/>
+          <p:nvPr/>
+        </p:nvSpPr>
+        <p:spPr>
+          <a:xfrm>
+            <a:off x="6400800" y="2011680"/>
+            <a:ext cx="5029200" cy="3429000"/>
+          </a:xfrm>
+          <a:prstGeom prst="rect">
+            <a:avLst/>
+          </a:prstGeom>
+          <a:noFill/>
+          <a:ln/>
+        </p:spPr>
+        <p:txBody>
+          <a:bodyPr wrap="square" lIns="0" tIns="0" rIns="0" bIns="0" rtlCol="0" anchor="t"/>
+          <a:lstStyle/>
+          <a:p>
+            <a:pPr indent="0" marL="0">
+              <a:buNone/>
+            </a:pPr>
+            <a:r>
+              <a:rPr lang="en-US" sz="2000" dirty="0">
+                <a:solidFill>
+                  <a:srgbClr val="E6EDF3"/>
+                </a:solidFill>
+                <a:latin typeface="Calibri" pitchFamily="34" charset="0"/>
+                <a:ea typeface="Calibri" pitchFamily="34" charset="-122"/>
+                <a:cs typeface="Calibri" pitchFamily="34" charset="-120"/>
+              </a:rPr>
+              <a:t>Selective ACK in the C code (largest gain in simulation)</a:t>
+            </a:r>
+            <a:endParaRPr lang="en-US" sz="2000" dirty="0"/>
+          </a:p>
+          <a:p>
+            <a:pPr indent="0" marL="0">
+              <a:buNone/>
+            </a:pPr>
+            <a:r>
+              <a:rPr lang="en-US" sz="2000" dirty="0">
+                <a:solidFill>
+                  <a:srgbClr val="E6EDF3"/>
+                </a:solidFill>
+                <a:latin typeface="Calibri" pitchFamily="34" charset="0"/>
+                <a:ea typeface="Calibri" pitchFamily="34" charset="-122"/>
+                <a:cs typeface="Calibri" pitchFamily="34" charset="-120"/>
+              </a:rPr>
+              <a:t>Deep agent in the C transport</a:t>
+            </a:r>
+            <a:endParaRPr lang="en-US" sz="2000" dirty="0"/>
+          </a:p>
+          <a:p>
+            <a:pPr indent="0" marL="0">
+              <a:buNone/>
+            </a:pPr>
+            <a:r>
+              <a:rPr lang="en-US" sz="2000" dirty="0">
+                <a:solidFill>
+                  <a:srgbClr val="E6EDF3"/>
+                </a:solidFill>
+                <a:latin typeface="Calibri" pitchFamily="34" charset="0"/>
+                <a:ea typeface="Calibri" pitchFamily="34" charset="-122"/>
+                <a:cs typeface="Calibri" pitchFamily="34" charset="-120"/>
+              </a:rPr>
+              <a:t>Kernel netem and real multi-machine tests</a:t>
+            </a:r>
+            <a:endParaRPr lang="en-US" sz="2000" dirty="0"/>
+          </a:p>
+        </p:txBody>
+      </p:sp>
+      <p:sp>
+        <p:nvSpPr>
+          <p:cNvPr id="10" name="Text 8"/>
+          <p:cNvSpPr/>
+          <p:nvPr/>
+        </p:nvSpPr>
+        <p:spPr>
+          <a:xfrm>
+            <a:off x="548640" y="5852160"/>
+            <a:ext cx="10972800" cy="365760"/>
+          </a:xfrm>
+          <a:prstGeom prst="rect">
+            <a:avLst/>
+          </a:prstGeom>
+          <a:noFill/>
+          <a:ln/>
+        </p:spPr>
+        <p:txBody>
+          <a:bodyPr wrap="square" lIns="0" tIns="0" rIns="0" bIns="0" rtlCol="0" anchor="ctr"/>
+          <a:lstStyle/>
+          <a:p>
+            <a:pPr indent="0" marL="0">
+              <a:buNone/>
+            </a:pPr>
+            <a:r>
+              <a:rPr lang="en-US" sz="1400" dirty="0">
+                <a:solidFill>
+                  <a:srgbClr val="8B98A5"/>
+                </a:solidFill>
+                <a:latin typeface="Calibri" pitchFamily="34" charset="0"/>
+                <a:ea typeface="Calibri" pitchFamily="34" charset="-122"/>
+                <a:cs typeface="Calibri" pitchFamily="34" charset="-120"/>
+              </a:rPr>
+              <a:t>Limits: Go-Back-N wastes bandwidth and suffers under reordering; C tests use an emulated path; the tabular agent did not beat AIMD in C.</a:t>
+            </a:r>
+            <a:endParaRPr lang="en-US" sz="1400" dirty="0"/>
           </a:p>
         </p:txBody>
       </p:sp>
@@ -8616,6 +10280,155 @@
         </p:nvSpPr>
         <p:spPr>
           <a:xfrm>
+            <a:off x="731520" y="2103120"/>
+            <a:ext cx="10058400" cy="1097280"/>
+          </a:xfrm>
+          <a:prstGeom prst="rect">
+            <a:avLst/>
+          </a:prstGeom>
+          <a:noFill/>
+          <a:ln/>
+        </p:spPr>
+        <p:txBody>
+          <a:bodyPr wrap="square" lIns="0" tIns="0" rIns="0" bIns="0" rtlCol="0" anchor="ctr"/>
+          <a:lstStyle/>
+          <a:p>
+            <a:pPr indent="0" marL="0">
+              <a:buNone/>
+            </a:pPr>
+            <a:r>
+              <a:rPr lang="en-US" sz="6400" b="1" dirty="0">
+                <a:solidFill>
+                  <a:srgbClr val="39FF88"/>
+                </a:solidFill>
+                <a:latin typeface="Courier New" pitchFamily="34" charset="0"/>
+                <a:ea typeface="Courier New" pitchFamily="34" charset="-122"/>
+                <a:cs typeface="Courier New" pitchFamily="34" charset="-120"/>
+              </a:rPr>
+              <a:t>Thank you</a:t>
+            </a:r>
+            <a:endParaRPr lang="en-US" sz="6400" dirty="0"/>
+          </a:p>
+        </p:txBody>
+      </p:sp>
+      <p:sp>
+        <p:nvSpPr>
+          <p:cNvPr id="3" name="Text 1"/>
+          <p:cNvSpPr/>
+          <p:nvPr/>
+        </p:nvSpPr>
+        <p:spPr>
+          <a:xfrm>
+            <a:off x="731520" y="3474720"/>
+            <a:ext cx="10058400" cy="548640"/>
+          </a:xfrm>
+          <a:prstGeom prst="rect">
+            <a:avLst/>
+          </a:prstGeom>
+          <a:noFill/>
+          <a:ln/>
+        </p:spPr>
+        <p:txBody>
+          <a:bodyPr wrap="square" lIns="0" tIns="0" rIns="0" bIns="0" rtlCol="0" anchor="ctr"/>
+          <a:lstStyle/>
+          <a:p>
+            <a:pPr indent="0" marL="0">
+              <a:buNone/>
+            </a:pPr>
+            <a:r>
+              <a:rPr lang="en-US" sz="2600" dirty="0">
+                <a:solidFill>
+                  <a:srgbClr val="E6EDF3"/>
+                </a:solidFill>
+                <a:latin typeface="Courier New" pitchFamily="34" charset="0"/>
+                <a:ea typeface="Courier New" pitchFamily="34" charset="-122"/>
+                <a:cs typeface="Courier New" pitchFamily="34" charset="-120"/>
+              </a:rPr>
+              <a:t>github.com/Capsturrrr/rudp</a:t>
+            </a:r>
+            <a:endParaRPr lang="en-US" sz="2600" dirty="0"/>
+          </a:p>
+        </p:txBody>
+      </p:sp>
+      <p:sp>
+        <p:nvSpPr>
+          <p:cNvPr id="4" name="Text 2"/>
+          <p:cNvSpPr/>
+          <p:nvPr/>
+        </p:nvSpPr>
+        <p:spPr>
+          <a:xfrm>
+            <a:off x="731520" y="4206240"/>
+            <a:ext cx="10058400" cy="457200"/>
+          </a:xfrm>
+          <a:prstGeom prst="rect">
+            <a:avLst/>
+          </a:prstGeom>
+          <a:noFill/>
+          <a:ln/>
+        </p:spPr>
+        <p:txBody>
+          <a:bodyPr wrap="square" lIns="0" tIns="0" rIns="0" bIns="0" rtlCol="0" anchor="ctr"/>
+          <a:lstStyle/>
+          <a:p>
+            <a:pPr indent="0" marL="0">
+              <a:buNone/>
+            </a:pPr>
+            <a:r>
+              <a:rPr lang="en-US" sz="1800" dirty="0">
+                <a:solidFill>
+                  <a:srgbClr val="8B98A5"/>
+                </a:solidFill>
+                <a:latin typeface="Calibri" pitchFamily="34" charset="0"/>
+                <a:ea typeface="Calibri" pitchFamily="34" charset="-122"/>
+                <a:cs typeface="Calibri" pitchFamily="34" charset="-120"/>
+              </a:rPr>
+              <a:t>Harshavardhan Mallela   Rohit Arya   Shloak Sinha</a:t>
+            </a:r>
+            <a:endParaRPr lang="en-US" sz="1800" dirty="0"/>
+          </a:p>
+        </p:txBody>
+      </p:sp>
+    </p:spTree>
+  </p:cSld>
+  <p:clrMapOvr>
+    <a:masterClrMapping/>
+  </p:clrMapOvr>
+</p:sld>
+</file>
+
+<file path=ppt/slides/slide24.xml><?xml version="1.0" encoding="utf-8"?>
+<p:sld xmlns:a="http://schemas.openxmlformats.org/drawingml/2006/main" xmlns:r="http://schemas.openxmlformats.org/officeDocument/2006/relationships" xmlns:p="http://schemas.openxmlformats.org/presentationml/2006/main">
+  <p:cSld name="Slide 24">
+    <p:bg>
+      <p:bgPr>
+        <a:solidFill>
+          <a:srgbClr val="0B0F14"/>
+        </a:solidFill>
+      </p:bgPr>
+    </p:bg>
+    <p:spTree>
+      <p:nvGrpSpPr>
+        <p:cNvPr id="1" name=""/>
+        <p:cNvGrpSpPr/>
+        <p:nvPr/>
+      </p:nvGrpSpPr>
+      <p:grpSpPr>
+        <a:xfrm>
+          <a:off x="0" y="0"/>
+          <a:ext cx="0" cy="0"/>
+          <a:chOff x="0" y="0"/>
+          <a:chExt cx="0" cy="0"/>
+        </a:xfrm>
+      </p:grpSpPr>
+      <p:sp>
+        <p:nvSpPr>
+          <p:cNvPr id="2" name="Text 0"/>
+          <p:cNvSpPr/>
+          <p:nvPr/>
+        </p:nvSpPr>
+        <p:spPr>
+          <a:xfrm>
             <a:off x="548640" y="320040"/>
             <a:ext cx="11064240" cy="731520"/>
           </a:xfrm>
@@ -8920,7 +10733,7 @@
                 <a:ea typeface="Courier New" pitchFamily="34" charset="-122"/>
                 <a:cs typeface="Courier New" pitchFamily="34" charset="-120"/>
               </a:rPr>
-              <a:t>3 / 22   Smart-RUDP</a:t>
+              <a:t>3 / 23   Smart-RUDP</a:t>
             </a:r>
             <a:endParaRPr lang="en-US" sz="1000" dirty="0"/>
           </a:p>
@@ -9314,7 +11127,7 @@
                 <a:ea typeface="Courier New" pitchFamily="34" charset="-122"/>
                 <a:cs typeface="Courier New" pitchFamily="34" charset="-120"/>
               </a:rPr>
-              <a:t>4 / 22   Smart-RUDP</a:t>
+              <a:t>4 / 23   Smart-RUDP</a:t>
             </a:r>
             <a:endParaRPr lang="en-US" sz="1000" dirty="0"/>
           </a:p>
@@ -9875,7 +11688,7 @@
                 <a:ea typeface="Courier New" pitchFamily="34" charset="-122"/>
                 <a:cs typeface="Courier New" pitchFamily="34" charset="-120"/>
               </a:rPr>
-              <a:t>5 / 22   Smart-RUDP</a:t>
+              <a:t>5 / 23   Smart-RUDP</a:t>
             </a:r>
             <a:endParaRPr lang="en-US" sz="1000" dirty="0"/>
           </a:p>
@@ -11314,7 +13127,7 @@
                 <a:ea typeface="Courier New" pitchFamily="34" charset="-122"/>
                 <a:cs typeface="Courier New" pitchFamily="34" charset="-120"/>
               </a:rPr>
-              <a:t>6 / 22   Smart-RUDP</a:t>
+              <a:t>6 / 23   Smart-RUDP</a:t>
             </a:r>
             <a:endParaRPr lang="en-US" sz="1000" dirty="0"/>
           </a:p>
@@ -12549,7 +14362,7 @@
                 <a:ea typeface="Courier New" pitchFamily="34" charset="-122"/>
                 <a:cs typeface="Courier New" pitchFamily="34" charset="-120"/>
               </a:rPr>
-              <a:t>7 / 22   Smart-RUDP</a:t>
+              <a:t>7 / 23   Smart-RUDP</a:t>
             </a:r>
             <a:endParaRPr lang="en-US" sz="1000" dirty="0"/>
           </a:p>
@@ -12992,7 +14805,7 @@
                 <a:ea typeface="Courier New" pitchFamily="34" charset="-122"/>
                 <a:cs typeface="Courier New" pitchFamily="34" charset="-120"/>
               </a:rPr>
-              <a:t>8 / 22   Smart-RUDP</a:t>
+              <a:t>8 / 23   Smart-RUDP</a:t>
             </a:r>
             <a:endParaRPr lang="en-US" sz="1000" dirty="0"/>
           </a:p>
@@ -13292,7 +15105,7 @@
                 <a:ea typeface="Courier New" pitchFamily="34" charset="-122"/>
                 <a:cs typeface="Courier New" pitchFamily="34" charset="-120"/>
               </a:rPr>
-              <a:t>9 / 22   Smart-RUDP</a:t>
+              <a:t>9 / 23   Smart-RUDP</a:t>
             </a:r>
             <a:endParaRPr lang="en-US" sz="1000" dirty="0"/>
           </a:p>

--- a/docs/RUDP_Presentation_with_notes.pptx
+++ b/docs/RUDP_Presentation_with_notes.pptx
@@ -29,9 +29,10 @@
     <p:sldId id="277" r:id="rId23"/>
     <p:sldId id="278" r:id="rId24"/>
     <p:sldId id="279" r:id="rId25"/>
+    <p:sldId id="280" r:id="rId26"/>
   </p:sldIdLst>
   <p:notesMasterIdLst>
-    <p:notesMasterId r:id="rId26"/>
+    <p:notesMasterId r:id="rId27"/>
   </p:notesMasterIdLst>
   <p:sldSz cx="12192000" cy="6858000"/>
   <p:notesSz cx="6858000" cy="12192000"/>
@@ -2057,28 +2058,33 @@
           <a:lstStyle/>
           <a:p>
             <a:r>
-              <a:t>SAY (0:50):</a:t>
-            </a:r>
-          </a:p>
-          <a:p>
-            <a:r>
-              <a:t>- Learned: reliability is a set of simple rules working together; congestion control matters as much as retransmission; testing tools fail in surprising ways.</a:t>
-            </a:r>
-          </a:p>
-          <a:p>
-            <a:r>
-              <a:t>- Next: Selective Repeat with SACK, a stronger learning agent, adaptive timeout, and tests on a real multi-machine network.</a:t>
-            </a:r>
-          </a:p>
-          <a:p>
-            <a:r>
-              <a:t>- Name the limits before she does: Go-Back-N, loopback-only protocol tests, Smart-RUDP not beating AIMD.</a:t>
+              <a:t>SAY (1:00):</a:t>
+            </a:r>
+          </a:p>
+          <a:p>
+            <a:r>
+              <a:t>- We then put the neural agent into the C transport, the same code as Section 8, and tested it on the same three emulated paths with 15 runs each.</a:t>
+            </a:r>
+          </a:p>
+          <a:p>
+            <a:r>
+              <a:t>- AIMD and the agents all start from a window of 10. The neural agent was faster than AIMD on all three: 15 percent on 5G-like, 27 percent on lossy, 24 percent on satellite-like. The intervals exclude zero.</a:t>
+            </a:r>
+          </a:p>
+          <a:p>
+            <a:r>
+              <a:t>- The retrained table did not carry over: it was slower on 5G and satellite. A network generalises to unseen paths where a table does not.</a:t>
+            </a:r>
+          </a:p>
+          <a:p>
+            <a:r>
+              <a:t>- We also added selective acknowledgments to the C code: about ten times fewer retransmissions, but no significant change in completion time on these emulated paths.</a:t>
             </a:r>
           </a:p>
           <a:p/>
           <a:p>
             <a:r>
-              <a:t>IF ASKED: End on the limits and the fix order: SACK, adaptive timeout, real-network tests.</a:t>
+              <a:t>IF ASKED: Q: So Smart-RUDP now beats AIMD? A: The neural version does, in the C transport on emulated paths, trained in a simulator; the original table agent in Section 8 did not. Q: Is it fair? A: Same start window; AIMD keeps a cap of 128 while the agents are capped at 32; the agent retransmits more on random loss. Q: Why no gain from SACK? A: Those paths are limited by the bottleneck rate, so extra retransmissions cost little; the simulator, with different paths, showed a large gain.</a:t>
             </a:r>
           </a:p>
         </p:txBody>
@@ -2164,18 +2170,28 @@
           <a:lstStyle/>
           <a:p>
             <a:r>
-              <a:t>SAY (0:15):</a:t>
-            </a:r>
-          </a:p>
-          <a:p>
-            <a:r>
-              <a:t>- Thank you. The code, report and captures are at github.com/Capsturrrr/rudp. Happy to take questions.</a:t>
+              <a:t>SAY (0:50):</a:t>
+            </a:r>
+          </a:p>
+          <a:p>
+            <a:r>
+              <a:t>- Learned: reliability is a set of simple rules working together; congestion control matters as much as retransmission; testing tools fail in surprising ways.</a:t>
+            </a:r>
+          </a:p>
+          <a:p>
+            <a:r>
+              <a:t>- Next: Selective Repeat with SACK, a stronger learning agent, adaptive timeout, and tests on a real multi-machine network.</a:t>
+            </a:r>
+          </a:p>
+          <a:p>
+            <a:r>
+              <a:t>- Name the limits before she does: Go-Back-N, loopback-only protocol tests, Smart-RUDP not beating AIMD.</a:t>
             </a:r>
           </a:p>
           <a:p/>
           <a:p>
             <a:r>
-              <a:t>IF ASKED: Pause and smile; hand over to questions.</a:t>
+              <a:t>IF ASKED: End on the limits and the fix order: SACK, adaptive timeout, real-network tests.</a:t>
             </a:r>
           </a:p>
         </p:txBody>
@@ -2261,18 +2277,18 @@
           <a:lstStyle/>
           <a:p>
             <a:r>
-              <a:t>SAY (-):</a:t>
-            </a:r>
-          </a:p>
-          <a:p>
-            <a:r>
-              <a:t>- Only if asked: the window starts at 1, adds 1 per ACK until the threshold 16, then 1/window per ACK. In the 62-packet run the final window was 18.71.</a:t>
+              <a:t>SAY (0:15):</a:t>
+            </a:r>
+          </a:p>
+          <a:p>
+            <a:r>
+              <a:t>- Thank you. The code, report and captures are at github.com/Capsturrrr/rudp. Happy to take questions.</a:t>
             </a:r>
           </a:p>
           <a:p/>
           <a:p>
             <a:r>
-              <a:t>IF ASKED: Use this slide to answer 'show me congestion avoidance'.</a:t>
+              <a:t>IF ASKED: Pause and smile; hand over to questions.</a:t>
             </a:r>
           </a:p>
         </p:txBody>
@@ -2295,6 +2311,103 @@
             <a:fld id="{F7021451-1387-4CA6-816F-3879F97B5CBC}" type="slidenum">
               <a:rPr lang="en-US"/>
               <a:t>24</a:t>
+            </a:fld>
+            <a:endParaRPr lang="en-US"/>
+          </a:p>
+        </p:txBody>
+      </p:sp>
+    </p:spTree>
+    <p:extLst>
+      <p:ext uri="{BB962C8B-B14F-4D97-AF65-F5344CB8AC3E}">
+        <p14:creationId xmlns:p14="http://schemas.microsoft.com/office/powerpoint/2010/main" val="1024086991"/>
+      </p:ext>
+    </p:extLst>
+  </p:cSld>
+  <p:clrMapOvr>
+    <a:masterClrMapping/>
+  </p:clrMapOvr>
+</p:notes>
+</file>
+
+<file path=ppt/notesSlides/notesSlide25.xml><?xml version="1.0" encoding="utf-8"?>
+<p:notes xmlns:a="http://schemas.openxmlformats.org/drawingml/2006/main" xmlns:r="http://schemas.openxmlformats.org/officeDocument/2006/relationships" xmlns:p="http://schemas.openxmlformats.org/presentationml/2006/main">
+  <p:cSld>
+    <p:spTree>
+      <p:nvGrpSpPr>
+        <p:cNvPr id="1" name=""/>
+        <p:cNvGrpSpPr/>
+        <p:nvPr/>
+      </p:nvGrpSpPr>
+      <p:grpSpPr>
+        <a:xfrm>
+          <a:off x="0" y="0"/>
+          <a:ext cx="0" cy="0"/>
+          <a:chOff x="0" y="0"/>
+          <a:chExt cx="0" cy="0"/>
+        </a:xfrm>
+      </p:grpSpPr>
+      <p:sp>
+        <p:nvSpPr>
+          <p:cNvPr id="2" name="Slide Image Placeholder 1"/>
+          <p:cNvSpPr>
+            <a:spLocks noGrp="1" noRot="1" noChangeAspect="1"/>
+          </p:cNvSpPr>
+          <p:nvPr>
+            <p:ph type="sldImg"/>
+          </p:nvPr>
+        </p:nvSpPr>
+        <p:spPr/>
+      </p:sp>
+      <p:sp>
+        <p:nvSpPr>
+          <p:cNvPr id="3" name="Notes Placeholder 2"/>
+          <p:cNvSpPr>
+            <a:spLocks noGrp="1"/>
+          </p:cNvSpPr>
+          <p:nvPr>
+            <p:ph type="body" idx="1"/>
+          </p:nvPr>
+        </p:nvSpPr>
+        <p:spPr/>
+        <p:txBody>
+          <a:bodyPr/>
+          <a:lstStyle/>
+          <a:p>
+            <a:r>
+              <a:t>SAY (-):</a:t>
+            </a:r>
+          </a:p>
+          <a:p>
+            <a:r>
+              <a:t>- Only if asked: the window starts at 1, adds 1 per ACK until the threshold 16, then 1/window per ACK. In the 62-packet run the final window was 18.71.</a:t>
+            </a:r>
+          </a:p>
+          <a:p/>
+          <a:p>
+            <a:r>
+              <a:t>IF ASKED: Use this slide to answer 'show me congestion avoidance'.</a:t>
+            </a:r>
+          </a:p>
+        </p:txBody>
+      </p:sp>
+      <p:sp>
+        <p:nvSpPr>
+          <p:cNvPr id="4" name="Slide Number Placeholder 3"/>
+          <p:cNvSpPr>
+            <a:spLocks noGrp="1"/>
+          </p:cNvSpPr>
+          <p:nvPr>
+            <p:ph type="sldNum" sz="quarter" idx="10"/>
+          </p:nvPr>
+        </p:nvSpPr>
+        <p:spPr/>
+        <p:txBody>
+          <a:bodyPr/>
+          <a:lstStyle/>
+          <a:p>
+            <a:fld id="{F7021451-1387-4CA6-816F-3879F97B5CBC}" type="slidenum">
+              <a:rPr lang="en-US"/>
+              <a:t>25</a:t>
             </a:fld>
             <a:endParaRPr lang="en-US"/>
           </a:p>
@@ -3643,7 +3756,7 @@
                 <a:ea typeface="Courier New" pitchFamily="34" charset="-122"/>
                 <a:cs typeface="Courier New" pitchFamily="34" charset="-120"/>
               </a:rPr>
-              <a:t>10 / 23   Smart-RUDP</a:t>
+              <a:t>10 / 24   Smart-RUDP</a:t>
             </a:r>
             <a:endParaRPr lang="en-US" sz="1000" dirty="0"/>
           </a:p>
@@ -3840,7 +3953,7 @@
                 <a:ea typeface="Courier New" pitchFamily="34" charset="-122"/>
                 <a:cs typeface="Courier New" pitchFamily="34" charset="-120"/>
               </a:rPr>
-              <a:t>11 / 23   Smart-RUDP</a:t>
+              <a:t>11 / 24   Smart-RUDP</a:t>
             </a:r>
             <a:endParaRPr lang="en-US" sz="1000" dirty="0"/>
           </a:p>
@@ -4670,7 +4783,7 @@
                 <a:ea typeface="Courier New" pitchFamily="34" charset="-122"/>
                 <a:cs typeface="Courier New" pitchFamily="34" charset="-120"/>
               </a:rPr>
-              <a:t>12 / 23   Smart-RUDP</a:t>
+              <a:t>12 / 24   Smart-RUDP</a:t>
             </a:r>
             <a:endParaRPr lang="en-US" sz="1000" dirty="0"/>
           </a:p>
@@ -4967,7 +5080,7 @@
                 <a:ea typeface="Courier New" pitchFamily="34" charset="-122"/>
                 <a:cs typeface="Courier New" pitchFamily="34" charset="-120"/>
               </a:rPr>
-              <a:t>13 / 23   Smart-RUDP</a:t>
+              <a:t>13 / 24   Smart-RUDP</a:t>
             </a:r>
             <a:endParaRPr lang="en-US" sz="1000" dirty="0"/>
           </a:p>
@@ -5267,7 +5380,7 @@
                 <a:ea typeface="Courier New" pitchFamily="34" charset="-122"/>
                 <a:cs typeface="Courier New" pitchFamily="34" charset="-120"/>
               </a:rPr>
-              <a:t>14 / 23   Smart-RUDP</a:t>
+              <a:t>14 / 24   Smart-RUDP</a:t>
             </a:r>
             <a:endParaRPr lang="en-US" sz="1000" dirty="0"/>
           </a:p>
@@ -5651,7 +5764,7 @@
                 <a:ea typeface="Courier New" pitchFamily="34" charset="-122"/>
                 <a:cs typeface="Courier New" pitchFamily="34" charset="-120"/>
               </a:rPr>
-              <a:t>15 / 23   Smart-RUDP</a:t>
+              <a:t>15 / 24   Smart-RUDP</a:t>
             </a:r>
             <a:endParaRPr lang="en-US" sz="1000" dirty="0"/>
           </a:p>
@@ -6109,7 +6222,7 @@
                 <a:ea typeface="Courier New" pitchFamily="34" charset="-122"/>
                 <a:cs typeface="Courier New" pitchFamily="34" charset="-120"/>
               </a:rPr>
-              <a:t>16 / 23   Smart-RUDP</a:t>
+              <a:t>16 / 24   Smart-RUDP</a:t>
             </a:r>
             <a:endParaRPr lang="en-US" sz="1000" dirty="0"/>
           </a:p>
@@ -6794,7 +6907,7 @@
                 <a:ea typeface="Courier New" pitchFamily="34" charset="-122"/>
                 <a:cs typeface="Courier New" pitchFamily="34" charset="-120"/>
               </a:rPr>
-              <a:t>17 / 23   Smart-RUDP</a:t>
+              <a:t>17 / 24   Smart-RUDP</a:t>
             </a:r>
             <a:endParaRPr lang="en-US" sz="1000" dirty="0"/>
           </a:p>
@@ -7034,7 +7147,7 @@
                 <a:ea typeface="Courier New" pitchFamily="34" charset="-122"/>
                 <a:cs typeface="Courier New" pitchFamily="34" charset="-120"/>
               </a:rPr>
-              <a:t>18 / 23   Smart-RUDP</a:t>
+              <a:t>18 / 24   Smart-RUDP</a:t>
             </a:r>
             <a:endParaRPr lang="en-US" sz="1000" dirty="0"/>
           </a:p>
@@ -7274,7 +7387,7 @@
                 <a:ea typeface="Courier New" pitchFamily="34" charset="-122"/>
                 <a:cs typeface="Courier New" pitchFamily="34" charset="-120"/>
               </a:rPr>
-              <a:t>19 / 23   Smart-RUDP</a:t>
+              <a:t>19 / 24   Smart-RUDP</a:t>
             </a:r>
             <a:endParaRPr lang="en-US" sz="1000" dirty="0"/>
           </a:p>
@@ -7496,7 +7609,7 @@
                 <a:ea typeface="Courier New" pitchFamily="34" charset="-122"/>
                 <a:cs typeface="Courier New" pitchFamily="34" charset="-120"/>
               </a:rPr>
-              <a:t>2 / 23   Smart-RUDP</a:t>
+              <a:t>2 / 24   Smart-RUDP</a:t>
             </a:r>
             <a:endParaRPr lang="en-US" sz="1000" dirty="0"/>
           </a:p>
@@ -7890,7 +8003,7 @@
                 <a:ea typeface="Courier New" pitchFamily="34" charset="-122"/>
                 <a:cs typeface="Courier New" pitchFamily="34" charset="-120"/>
               </a:rPr>
-              <a:t>20 / 23   Smart-RUDP</a:t>
+              <a:t>20 / 24   Smart-RUDP</a:t>
             </a:r>
             <a:endParaRPr lang="en-US" sz="1000" dirty="0"/>
           </a:p>
@@ -8214,7 +8327,7 @@
                 <a:ea typeface="Courier New" pitchFamily="34" charset="-122"/>
                 <a:cs typeface="Courier New" pitchFamily="34" charset="-120"/>
               </a:rPr>
-              <a:t>21 / 23   Smart-RUDP</a:t>
+              <a:t>21 / 24   Smart-RUDP</a:t>
             </a:r>
             <a:endParaRPr lang="en-US" sz="1000" dirty="0"/>
           </a:p>
@@ -9882,7 +9995,7 @@
                 <a:ea typeface="Courier New" pitchFamily="34" charset="-122"/>
                 <a:cs typeface="Courier New" pitchFamily="34" charset="-120"/>
               </a:rPr>
-              <a:t>Learnings and future work</a:t>
+              <a:t>Neural agent in the C transport</a:t>
             </a:r>
             <a:endParaRPr lang="en-US" sz="3000" dirty="0"/>
           </a:p>
@@ -9921,47 +10034,1150 @@
                 <a:ea typeface="Courier New" pitchFamily="34" charset="-122"/>
                 <a:cs typeface="Courier New" pitchFamily="34" charset="-120"/>
               </a:rPr>
-              <a:t>22 / 23   Smart-RUDP</a:t>
+              <a:t>22 / 24   Smart-RUDP</a:t>
             </a:r>
             <a:endParaRPr lang="en-US" sz="1000" dirty="0"/>
           </a:p>
         </p:txBody>
       </p:sp>
-      <p:sp>
-        <p:nvSpPr>
-          <p:cNvPr id="4" name="Shape 2"/>
-          <p:cNvSpPr/>
-          <p:nvPr/>
-        </p:nvSpPr>
-        <p:spPr>
-          <a:xfrm>
-            <a:off x="548640" y="1371600"/>
-            <a:ext cx="5394960" cy="4206240"/>
-          </a:xfrm>
-          <a:prstGeom prst="rect">
-            <a:avLst/>
-          </a:prstGeom>
-          <a:solidFill>
-            <a:srgbClr val="141B24"/>
-          </a:solidFill>
-          <a:ln w="12700">
-            <a:solidFill>
-              <a:srgbClr val="39FF88"/>
-            </a:solidFill>
-            <a:prstDash val="solid"/>
-          </a:ln>
-        </p:spPr>
-      </p:sp>
-      <p:sp>
-        <p:nvSpPr>
-          <p:cNvPr id="5" name="Text 3"/>
-          <p:cNvSpPr/>
-          <p:nvPr/>
-        </p:nvSpPr>
-        <p:spPr>
-          <a:xfrm>
-            <a:off x="731520" y="1508760"/>
-            <a:ext cx="5029200" cy="457200"/>
+      <p:graphicFrame>
+        <p:nvGraphicFramePr>
+          <p:cNvPr id="23" name="Table 0"/>
+          <p:cNvGraphicFramePr>
+            <a:graphicFrameLocks noGrp="1"/>
+          </p:cNvGraphicFramePr>
+          <p:nvPr>
+            <p:extLst>
+              <p:ext uri="{D42A27DB-BD31-4B8C-83A1-F6EECF244321}">
+                <p14:modId xmlns:p14="http://schemas.microsoft.com/office/powerpoint/2010/main" val="1579011935"/>
+              </p:ext>
+            </p:extLst>
+          </p:nvPr>
+        </p:nvGraphicFramePr>
+        <p:xfrm>
+          <a:off x="548640" y="1188720"/>
+          <a:ext cx="6583680" cy="914400"/>
+        </p:xfrm>
+        <a:graphic>
+          <a:graphicData uri="http://schemas.openxmlformats.org/drawingml/2006/table">
+            <a:tbl>
+              <a:tblPr/>
+              <a:tblGrid>
+                <a:gridCol w="2468880"/>
+                <a:gridCol w="1280160"/>
+                <a:gridCol w="1463040"/>
+                <a:gridCol w="1371600"/>
+              </a:tblGrid>
+              <a:tr h="457200">
+                <a:tc>
+                  <a:txBody>
+                    <a:bodyPr/>
+                    <a:lstStyle/>
+                    <a:p>
+                      <a:pPr indent="0" marL="0">
+                        <a:buNone/>
+                      </a:pPr>
+                      <a:r>
+                        <a:rPr lang="en-US" sz="1300" b="1" dirty="0">
+                          <a:solidFill>
+                            <a:srgbClr val="0B0F14"/>
+                          </a:solidFill>
+                          <a:latin typeface="Courier New" pitchFamily="34" charset="0"/>
+                          <a:ea typeface="Courier New" pitchFamily="34" charset="-122"/>
+                          <a:cs typeface="Courier New" pitchFamily="34" charset="-120"/>
+                        </a:rPr>
+                        <a:t>1,200 packets, C transport</a:t>
+                      </a:r>
+                      <a:endParaRPr lang="en-US" sz="1300" dirty="0">
+                        <a:latin typeface="Courier New" charset="0"/>
+                        <a:ea typeface="Courier New" charset="0"/>
+                        <a:cs typeface="Courier New" charset="0"/>
+                      </a:endParaRPr>
+                    </a:p>
+                  </a:txBody>
+                  <a:tcPr marL="91440" marR="91440" marT="45720" marB="45720">
+                    <a:lnL w="12700" cap="flat" cmpd="sng" algn="ctr">
+                      <a:solidFill>
+                        <a:srgbClr val="2A3441"/>
+                      </a:solidFill>
+                      <a:prstDash val="solid"/>
+                      <a:round/>
+                      <a:headEnd type="none" w="med" len="med"/>
+                      <a:tailEnd type="none" w="med" len="med"/>
+                    </a:lnL>
+                    <a:lnR w="12700" cap="flat" cmpd="sng" algn="ctr">
+                      <a:solidFill>
+                        <a:srgbClr val="2A3441"/>
+                      </a:solidFill>
+                      <a:prstDash val="solid"/>
+                      <a:round/>
+                      <a:headEnd type="none" w="med" len="med"/>
+                      <a:tailEnd type="none" w="med" len="med"/>
+                    </a:lnR>
+                    <a:lnT w="12700" cap="flat" cmpd="sng" algn="ctr">
+                      <a:solidFill>
+                        <a:srgbClr val="2A3441"/>
+                      </a:solidFill>
+                      <a:prstDash val="solid"/>
+                      <a:round/>
+                      <a:headEnd type="none" w="med" len="med"/>
+                      <a:tailEnd type="none" w="med" len="med"/>
+                    </a:lnT>
+                    <a:lnB w="12700" cap="flat" cmpd="sng" algn="ctr">
+                      <a:solidFill>
+                        <a:srgbClr val="2A3441"/>
+                      </a:solidFill>
+                      <a:prstDash val="solid"/>
+                      <a:round/>
+                      <a:headEnd type="none" w="med" len="med"/>
+                      <a:tailEnd type="none" w="med" len="med"/>
+                    </a:lnB>
+                    <a:solidFill>
+                      <a:srgbClr val="39FF88"/>
+                    </a:solidFill>
+                  </a:tcPr>
+                </a:tc>
+                <a:tc>
+                  <a:txBody>
+                    <a:bodyPr/>
+                    <a:lstStyle/>
+                    <a:p>
+                      <a:pPr indent="0" marL="0">
+                        <a:buNone/>
+                      </a:pPr>
+                      <a:r>
+                        <a:rPr lang="en-US" sz="1300" b="1" dirty="0">
+                          <a:solidFill>
+                            <a:srgbClr val="0B0F14"/>
+                          </a:solidFill>
+                          <a:latin typeface="Courier New" pitchFamily="34" charset="0"/>
+                          <a:ea typeface="Courier New" pitchFamily="34" charset="-122"/>
+                          <a:cs typeface="Courier New" pitchFamily="34" charset="-120"/>
+                        </a:rPr>
+                        <a:t>AIMD</a:t>
+                      </a:r>
+                      <a:endParaRPr lang="en-US" sz="1300" dirty="0">
+                        <a:latin typeface="Courier New" charset="0"/>
+                        <a:ea typeface="Courier New" charset="0"/>
+                        <a:cs typeface="Courier New" charset="0"/>
+                      </a:endParaRPr>
+                    </a:p>
+                  </a:txBody>
+                  <a:tcPr marL="91440" marR="91440" marT="45720" marB="45720">
+                    <a:lnL w="12700" cap="flat" cmpd="sng" algn="ctr">
+                      <a:solidFill>
+                        <a:srgbClr val="2A3441"/>
+                      </a:solidFill>
+                      <a:prstDash val="solid"/>
+                      <a:round/>
+                      <a:headEnd type="none" w="med" len="med"/>
+                      <a:tailEnd type="none" w="med" len="med"/>
+                    </a:lnL>
+                    <a:lnR w="12700" cap="flat" cmpd="sng" algn="ctr">
+                      <a:solidFill>
+                        <a:srgbClr val="2A3441"/>
+                      </a:solidFill>
+                      <a:prstDash val="solid"/>
+                      <a:round/>
+                      <a:headEnd type="none" w="med" len="med"/>
+                      <a:tailEnd type="none" w="med" len="med"/>
+                    </a:lnR>
+                    <a:lnT w="12700" cap="flat" cmpd="sng" algn="ctr">
+                      <a:solidFill>
+                        <a:srgbClr val="2A3441"/>
+                      </a:solidFill>
+                      <a:prstDash val="solid"/>
+                      <a:round/>
+                      <a:headEnd type="none" w="med" len="med"/>
+                      <a:tailEnd type="none" w="med" len="med"/>
+                    </a:lnT>
+                    <a:lnB w="12700" cap="flat" cmpd="sng" algn="ctr">
+                      <a:solidFill>
+                        <a:srgbClr val="2A3441"/>
+                      </a:solidFill>
+                      <a:prstDash val="solid"/>
+                      <a:round/>
+                      <a:headEnd type="none" w="med" len="med"/>
+                      <a:tailEnd type="none" w="med" len="med"/>
+                    </a:lnB>
+                    <a:solidFill>
+                      <a:srgbClr val="39FF88"/>
+                    </a:solidFill>
+                  </a:tcPr>
+                </a:tc>
+                <a:tc>
+                  <a:txBody>
+                    <a:bodyPr/>
+                    <a:lstStyle/>
+                    <a:p>
+                      <a:pPr indent="0" marL="0">
+                        <a:buNone/>
+                      </a:pPr>
+                      <a:r>
+                        <a:rPr lang="en-US" sz="1300" b="1" dirty="0">
+                          <a:solidFill>
+                            <a:srgbClr val="0B0F14"/>
+                          </a:solidFill>
+                          <a:latin typeface="Courier New" pitchFamily="34" charset="0"/>
+                          <a:ea typeface="Courier New" pitchFamily="34" charset="-122"/>
+                          <a:cs typeface="Courier New" pitchFamily="34" charset="-120"/>
+                        </a:rPr>
+                        <a:t>Table (rl2)</a:t>
+                      </a:r>
+                      <a:endParaRPr lang="en-US" sz="1300" dirty="0">
+                        <a:latin typeface="Courier New" charset="0"/>
+                        <a:ea typeface="Courier New" charset="0"/>
+                        <a:cs typeface="Courier New" charset="0"/>
+                      </a:endParaRPr>
+                    </a:p>
+                  </a:txBody>
+                  <a:tcPr marL="91440" marR="91440" marT="45720" marB="45720">
+                    <a:lnL w="12700" cap="flat" cmpd="sng" algn="ctr">
+                      <a:solidFill>
+                        <a:srgbClr val="2A3441"/>
+                      </a:solidFill>
+                      <a:prstDash val="solid"/>
+                      <a:round/>
+                      <a:headEnd type="none" w="med" len="med"/>
+                      <a:tailEnd type="none" w="med" len="med"/>
+                    </a:lnL>
+                    <a:lnR w="12700" cap="flat" cmpd="sng" algn="ctr">
+                      <a:solidFill>
+                        <a:srgbClr val="2A3441"/>
+                      </a:solidFill>
+                      <a:prstDash val="solid"/>
+                      <a:round/>
+                      <a:headEnd type="none" w="med" len="med"/>
+                      <a:tailEnd type="none" w="med" len="med"/>
+                    </a:lnR>
+                    <a:lnT w="12700" cap="flat" cmpd="sng" algn="ctr">
+                      <a:solidFill>
+                        <a:srgbClr val="2A3441"/>
+                      </a:solidFill>
+                      <a:prstDash val="solid"/>
+                      <a:round/>
+                      <a:headEnd type="none" w="med" len="med"/>
+                      <a:tailEnd type="none" w="med" len="med"/>
+                    </a:lnT>
+                    <a:lnB w="12700" cap="flat" cmpd="sng" algn="ctr">
+                      <a:solidFill>
+                        <a:srgbClr val="2A3441"/>
+                      </a:solidFill>
+                      <a:prstDash val="solid"/>
+                      <a:round/>
+                      <a:headEnd type="none" w="med" len="med"/>
+                      <a:tailEnd type="none" w="med" len="med"/>
+                    </a:lnB>
+                    <a:solidFill>
+                      <a:srgbClr val="39FF88"/>
+                    </a:solidFill>
+                  </a:tcPr>
+                </a:tc>
+                <a:tc>
+                  <a:txBody>
+                    <a:bodyPr/>
+                    <a:lstStyle/>
+                    <a:p>
+                      <a:pPr indent="0" marL="0">
+                        <a:buNone/>
+                      </a:pPr>
+                      <a:r>
+                        <a:rPr lang="en-US" sz="1300" b="1" dirty="0">
+                          <a:solidFill>
+                            <a:srgbClr val="0B0F14"/>
+                          </a:solidFill>
+                          <a:latin typeface="Courier New" pitchFamily="34" charset="0"/>
+                          <a:ea typeface="Courier New" pitchFamily="34" charset="-122"/>
+                          <a:cs typeface="Courier New" pitchFamily="34" charset="-120"/>
+                        </a:rPr>
+                        <a:t>Neural</a:t>
+                      </a:r>
+                      <a:endParaRPr lang="en-US" sz="1300" dirty="0">
+                        <a:latin typeface="Courier New" charset="0"/>
+                        <a:ea typeface="Courier New" charset="0"/>
+                        <a:cs typeface="Courier New" charset="0"/>
+                      </a:endParaRPr>
+                    </a:p>
+                  </a:txBody>
+                  <a:tcPr marL="91440" marR="91440" marT="45720" marB="45720">
+                    <a:lnL w="12700" cap="flat" cmpd="sng" algn="ctr">
+                      <a:solidFill>
+                        <a:srgbClr val="2A3441"/>
+                      </a:solidFill>
+                      <a:prstDash val="solid"/>
+                      <a:round/>
+                      <a:headEnd type="none" w="med" len="med"/>
+                      <a:tailEnd type="none" w="med" len="med"/>
+                    </a:lnL>
+                    <a:lnR w="12700" cap="flat" cmpd="sng" algn="ctr">
+                      <a:solidFill>
+                        <a:srgbClr val="2A3441"/>
+                      </a:solidFill>
+                      <a:prstDash val="solid"/>
+                      <a:round/>
+                      <a:headEnd type="none" w="med" len="med"/>
+                      <a:tailEnd type="none" w="med" len="med"/>
+                    </a:lnR>
+                    <a:lnT w="12700" cap="flat" cmpd="sng" algn="ctr">
+                      <a:solidFill>
+                        <a:srgbClr val="2A3441"/>
+                      </a:solidFill>
+                      <a:prstDash val="solid"/>
+                      <a:round/>
+                      <a:headEnd type="none" w="med" len="med"/>
+                      <a:tailEnd type="none" w="med" len="med"/>
+                    </a:lnT>
+                    <a:lnB w="12700" cap="flat" cmpd="sng" algn="ctr">
+                      <a:solidFill>
+                        <a:srgbClr val="2A3441"/>
+                      </a:solidFill>
+                      <a:prstDash val="solid"/>
+                      <a:round/>
+                      <a:headEnd type="none" w="med" len="med"/>
+                      <a:tailEnd type="none" w="med" len="med"/>
+                    </a:lnB>
+                    <a:solidFill>
+                      <a:srgbClr val="39FF88"/>
+                    </a:solidFill>
+                  </a:tcPr>
+                </a:tc>
+              </a:tr>
+              <a:tr h="457200">
+                <a:tc>
+                  <a:txBody>
+                    <a:bodyPr/>
+                    <a:lstStyle/>
+                    <a:p>
+                      <a:pPr indent="0" marL="0">
+                        <a:buNone/>
+                      </a:pPr>
+                      <a:r>
+                        <a:rPr lang="en-US" sz="1300" dirty="0">
+                          <a:solidFill>
+                            <a:srgbClr val="E6EDF3"/>
+                          </a:solidFill>
+                          <a:latin typeface="Calibri" pitchFamily="34" charset="0"/>
+                          <a:ea typeface="Calibri" pitchFamily="34" charset="-122"/>
+                          <a:cs typeface="Calibri" pitchFamily="34" charset="-120"/>
+                        </a:rPr>
+                        <a:t>5G-like</a:t>
+                      </a:r>
+                      <a:endParaRPr lang="en-US" sz="1300" dirty="0">
+                        <a:latin typeface="Calibri" charset="0"/>
+                        <a:ea typeface="Calibri" charset="0"/>
+                        <a:cs typeface="Calibri" charset="0"/>
+                      </a:endParaRPr>
+                    </a:p>
+                  </a:txBody>
+                  <a:tcPr marL="91440" marR="91440" marT="45720" marB="45720">
+                    <a:lnL w="12700" cap="flat" cmpd="sng" algn="ctr">
+                      <a:solidFill>
+                        <a:srgbClr val="2A3441"/>
+                      </a:solidFill>
+                      <a:prstDash val="solid"/>
+                      <a:round/>
+                      <a:headEnd type="none" w="med" len="med"/>
+                      <a:tailEnd type="none" w="med" len="med"/>
+                    </a:lnL>
+                    <a:lnR w="12700" cap="flat" cmpd="sng" algn="ctr">
+                      <a:solidFill>
+                        <a:srgbClr val="2A3441"/>
+                      </a:solidFill>
+                      <a:prstDash val="solid"/>
+                      <a:round/>
+                      <a:headEnd type="none" w="med" len="med"/>
+                      <a:tailEnd type="none" w="med" len="med"/>
+                    </a:lnR>
+                    <a:lnT w="12700" cap="flat" cmpd="sng" algn="ctr">
+                      <a:solidFill>
+                        <a:srgbClr val="2A3441"/>
+                      </a:solidFill>
+                      <a:prstDash val="solid"/>
+                      <a:round/>
+                      <a:headEnd type="none" w="med" len="med"/>
+                      <a:tailEnd type="none" w="med" len="med"/>
+                    </a:lnT>
+                    <a:lnB w="12700" cap="flat" cmpd="sng" algn="ctr">
+                      <a:solidFill>
+                        <a:srgbClr val="2A3441"/>
+                      </a:solidFill>
+                      <a:prstDash val="solid"/>
+                      <a:round/>
+                      <a:headEnd type="none" w="med" len="med"/>
+                      <a:tailEnd type="none" w="med" len="med"/>
+                    </a:lnB>
+                    <a:solidFill>
+                      <a:srgbClr val="141B24"/>
+                    </a:solidFill>
+                  </a:tcPr>
+                </a:tc>
+                <a:tc>
+                  <a:txBody>
+                    <a:bodyPr/>
+                    <a:lstStyle/>
+                    <a:p>
+                      <a:pPr indent="0" marL="0">
+                        <a:buNone/>
+                      </a:pPr>
+                      <a:r>
+                        <a:rPr lang="en-US" sz="1300" dirty="0">
+                          <a:solidFill>
+                            <a:srgbClr val="E6EDF3"/>
+                          </a:solidFill>
+                          <a:latin typeface="Calibri" pitchFamily="34" charset="0"/>
+                          <a:ea typeface="Calibri" pitchFamily="34" charset="-122"/>
+                          <a:cs typeface="Calibri" pitchFamily="34" charset="-120"/>
+                        </a:rPr>
+                        <a:t>1.38 s</a:t>
+                      </a:r>
+                      <a:endParaRPr lang="en-US" sz="1300" dirty="0">
+                        <a:latin typeface="Calibri" charset="0"/>
+                        <a:ea typeface="Calibri" charset="0"/>
+                        <a:cs typeface="Calibri" charset="0"/>
+                      </a:endParaRPr>
+                    </a:p>
+                  </a:txBody>
+                  <a:tcPr marL="91440" marR="91440" marT="45720" marB="45720">
+                    <a:lnL w="12700" cap="flat" cmpd="sng" algn="ctr">
+                      <a:solidFill>
+                        <a:srgbClr val="2A3441"/>
+                      </a:solidFill>
+                      <a:prstDash val="solid"/>
+                      <a:round/>
+                      <a:headEnd type="none" w="med" len="med"/>
+                      <a:tailEnd type="none" w="med" len="med"/>
+                    </a:lnL>
+                    <a:lnR w="12700" cap="flat" cmpd="sng" algn="ctr">
+                      <a:solidFill>
+                        <a:srgbClr val="2A3441"/>
+                      </a:solidFill>
+                      <a:prstDash val="solid"/>
+                      <a:round/>
+                      <a:headEnd type="none" w="med" len="med"/>
+                      <a:tailEnd type="none" w="med" len="med"/>
+                    </a:lnR>
+                    <a:lnT w="12700" cap="flat" cmpd="sng" algn="ctr">
+                      <a:solidFill>
+                        <a:srgbClr val="2A3441"/>
+                      </a:solidFill>
+                      <a:prstDash val="solid"/>
+                      <a:round/>
+                      <a:headEnd type="none" w="med" len="med"/>
+                      <a:tailEnd type="none" w="med" len="med"/>
+                    </a:lnT>
+                    <a:lnB w="12700" cap="flat" cmpd="sng" algn="ctr">
+                      <a:solidFill>
+                        <a:srgbClr val="2A3441"/>
+                      </a:solidFill>
+                      <a:prstDash val="solid"/>
+                      <a:round/>
+                      <a:headEnd type="none" w="med" len="med"/>
+                      <a:tailEnd type="none" w="med" len="med"/>
+                    </a:lnB>
+                    <a:solidFill>
+                      <a:srgbClr val="141B24"/>
+                    </a:solidFill>
+                  </a:tcPr>
+                </a:tc>
+                <a:tc>
+                  <a:txBody>
+                    <a:bodyPr/>
+                    <a:lstStyle/>
+                    <a:p>
+                      <a:pPr indent="0" marL="0">
+                        <a:buNone/>
+                      </a:pPr>
+                      <a:r>
+                        <a:rPr lang="en-US" sz="1300" dirty="0">
+                          <a:solidFill>
+                            <a:srgbClr val="E6EDF3"/>
+                          </a:solidFill>
+                          <a:latin typeface="Calibri" pitchFamily="34" charset="0"/>
+                          <a:ea typeface="Calibri" pitchFamily="34" charset="-122"/>
+                          <a:cs typeface="Calibri" pitchFamily="34" charset="-120"/>
+                        </a:rPr>
+                        <a:t>2.64 s</a:t>
+                      </a:r>
+                      <a:endParaRPr lang="en-US" sz="1300" dirty="0">
+                        <a:latin typeface="Calibri" charset="0"/>
+                        <a:ea typeface="Calibri" charset="0"/>
+                        <a:cs typeface="Calibri" charset="0"/>
+                      </a:endParaRPr>
+                    </a:p>
+                  </a:txBody>
+                  <a:tcPr marL="91440" marR="91440" marT="45720" marB="45720">
+                    <a:lnL w="12700" cap="flat" cmpd="sng" algn="ctr">
+                      <a:solidFill>
+                        <a:srgbClr val="2A3441"/>
+                      </a:solidFill>
+                      <a:prstDash val="solid"/>
+                      <a:round/>
+                      <a:headEnd type="none" w="med" len="med"/>
+                      <a:tailEnd type="none" w="med" len="med"/>
+                    </a:lnL>
+                    <a:lnR w="12700" cap="flat" cmpd="sng" algn="ctr">
+                      <a:solidFill>
+                        <a:srgbClr val="2A3441"/>
+                      </a:solidFill>
+                      <a:prstDash val="solid"/>
+                      <a:round/>
+                      <a:headEnd type="none" w="med" len="med"/>
+                      <a:tailEnd type="none" w="med" len="med"/>
+                    </a:lnR>
+                    <a:lnT w="12700" cap="flat" cmpd="sng" algn="ctr">
+                      <a:solidFill>
+                        <a:srgbClr val="2A3441"/>
+                      </a:solidFill>
+                      <a:prstDash val="solid"/>
+                      <a:round/>
+                      <a:headEnd type="none" w="med" len="med"/>
+                      <a:tailEnd type="none" w="med" len="med"/>
+                    </a:lnT>
+                    <a:lnB w="12700" cap="flat" cmpd="sng" algn="ctr">
+                      <a:solidFill>
+                        <a:srgbClr val="2A3441"/>
+                      </a:solidFill>
+                      <a:prstDash val="solid"/>
+                      <a:round/>
+                      <a:headEnd type="none" w="med" len="med"/>
+                      <a:tailEnd type="none" w="med" len="med"/>
+                    </a:lnB>
+                    <a:solidFill>
+                      <a:srgbClr val="141B24"/>
+                    </a:solidFill>
+                  </a:tcPr>
+                </a:tc>
+                <a:tc>
+                  <a:txBody>
+                    <a:bodyPr/>
+                    <a:lstStyle/>
+                    <a:p>
+                      <a:pPr indent="0" marL="0">
+                        <a:buNone/>
+                      </a:pPr>
+                      <a:r>
+                        <a:rPr lang="en-US" sz="1300" dirty="0">
+                          <a:solidFill>
+                            <a:srgbClr val="E6EDF3"/>
+                          </a:solidFill>
+                          <a:latin typeface="Calibri" pitchFamily="34" charset="0"/>
+                          <a:ea typeface="Calibri" pitchFamily="34" charset="-122"/>
+                          <a:cs typeface="Calibri" pitchFamily="34" charset="-120"/>
+                        </a:rPr>
+                        <a:t>1.18 s</a:t>
+                      </a:r>
+                      <a:endParaRPr lang="en-US" sz="1300" dirty="0">
+                        <a:latin typeface="Calibri" charset="0"/>
+                        <a:ea typeface="Calibri" charset="0"/>
+                        <a:cs typeface="Calibri" charset="0"/>
+                      </a:endParaRPr>
+                    </a:p>
+                  </a:txBody>
+                  <a:tcPr marL="91440" marR="91440" marT="45720" marB="45720">
+                    <a:lnL w="12700" cap="flat" cmpd="sng" algn="ctr">
+                      <a:solidFill>
+                        <a:srgbClr val="2A3441"/>
+                      </a:solidFill>
+                      <a:prstDash val="solid"/>
+                      <a:round/>
+                      <a:headEnd type="none" w="med" len="med"/>
+                      <a:tailEnd type="none" w="med" len="med"/>
+                    </a:lnL>
+                    <a:lnR w="12700" cap="flat" cmpd="sng" algn="ctr">
+                      <a:solidFill>
+                        <a:srgbClr val="2A3441"/>
+                      </a:solidFill>
+                      <a:prstDash val="solid"/>
+                      <a:round/>
+                      <a:headEnd type="none" w="med" len="med"/>
+                      <a:tailEnd type="none" w="med" len="med"/>
+                    </a:lnR>
+                    <a:lnT w="12700" cap="flat" cmpd="sng" algn="ctr">
+                      <a:solidFill>
+                        <a:srgbClr val="2A3441"/>
+                      </a:solidFill>
+                      <a:prstDash val="solid"/>
+                      <a:round/>
+                      <a:headEnd type="none" w="med" len="med"/>
+                      <a:tailEnd type="none" w="med" len="med"/>
+                    </a:lnT>
+                    <a:lnB w="12700" cap="flat" cmpd="sng" algn="ctr">
+                      <a:solidFill>
+                        <a:srgbClr val="2A3441"/>
+                      </a:solidFill>
+                      <a:prstDash val="solid"/>
+                      <a:round/>
+                      <a:headEnd type="none" w="med" len="med"/>
+                      <a:tailEnd type="none" w="med" len="med"/>
+                    </a:lnB>
+                    <a:solidFill>
+                      <a:srgbClr val="141B24"/>
+                    </a:solidFill>
+                  </a:tcPr>
+                </a:tc>
+              </a:tr>
+              <a:tr h="457200">
+                <a:tc>
+                  <a:txBody>
+                    <a:bodyPr/>
+                    <a:lstStyle/>
+                    <a:p>
+                      <a:pPr indent="0" marL="0">
+                        <a:buNone/>
+                      </a:pPr>
+                      <a:r>
+                        <a:rPr lang="en-US" sz="1300" dirty="0">
+                          <a:solidFill>
+                            <a:srgbClr val="E6EDF3"/>
+                          </a:solidFill>
+                          <a:latin typeface="Calibri" pitchFamily="34" charset="0"/>
+                          <a:ea typeface="Calibri" pitchFamily="34" charset="-122"/>
+                          <a:cs typeface="Calibri" pitchFamily="34" charset="-120"/>
+                        </a:rPr>
+                        <a:t>Lossy wireless</a:t>
+                      </a:r>
+                      <a:endParaRPr lang="en-US" sz="1300" dirty="0">
+                        <a:latin typeface="Calibri" charset="0"/>
+                        <a:ea typeface="Calibri" charset="0"/>
+                        <a:cs typeface="Calibri" charset="0"/>
+                      </a:endParaRPr>
+                    </a:p>
+                  </a:txBody>
+                  <a:tcPr marL="91440" marR="91440" marT="45720" marB="45720">
+                    <a:lnL w="12700" cap="flat" cmpd="sng" algn="ctr">
+                      <a:solidFill>
+                        <a:srgbClr val="2A3441"/>
+                      </a:solidFill>
+                      <a:prstDash val="solid"/>
+                      <a:round/>
+                      <a:headEnd type="none" w="med" len="med"/>
+                      <a:tailEnd type="none" w="med" len="med"/>
+                    </a:lnL>
+                    <a:lnR w="12700" cap="flat" cmpd="sng" algn="ctr">
+                      <a:solidFill>
+                        <a:srgbClr val="2A3441"/>
+                      </a:solidFill>
+                      <a:prstDash val="solid"/>
+                      <a:round/>
+                      <a:headEnd type="none" w="med" len="med"/>
+                      <a:tailEnd type="none" w="med" len="med"/>
+                    </a:lnR>
+                    <a:lnT w="12700" cap="flat" cmpd="sng" algn="ctr">
+                      <a:solidFill>
+                        <a:srgbClr val="2A3441"/>
+                      </a:solidFill>
+                      <a:prstDash val="solid"/>
+                      <a:round/>
+                      <a:headEnd type="none" w="med" len="med"/>
+                      <a:tailEnd type="none" w="med" len="med"/>
+                    </a:lnT>
+                    <a:lnB w="12700" cap="flat" cmpd="sng" algn="ctr">
+                      <a:solidFill>
+                        <a:srgbClr val="2A3441"/>
+                      </a:solidFill>
+                      <a:prstDash val="solid"/>
+                      <a:round/>
+                      <a:headEnd type="none" w="med" len="med"/>
+                      <a:tailEnd type="none" w="med" len="med"/>
+                    </a:lnB>
+                    <a:solidFill>
+                      <a:srgbClr val="141B24"/>
+                    </a:solidFill>
+                  </a:tcPr>
+                </a:tc>
+                <a:tc>
+                  <a:txBody>
+                    <a:bodyPr/>
+                    <a:lstStyle/>
+                    <a:p>
+                      <a:pPr indent="0" marL="0">
+                        <a:buNone/>
+                      </a:pPr>
+                      <a:r>
+                        <a:rPr lang="en-US" sz="1300" dirty="0">
+                          <a:solidFill>
+                            <a:srgbClr val="E6EDF3"/>
+                          </a:solidFill>
+                          <a:latin typeface="Calibri" pitchFamily="34" charset="0"/>
+                          <a:ea typeface="Calibri" pitchFamily="34" charset="-122"/>
+                          <a:cs typeface="Calibri" pitchFamily="34" charset="-120"/>
+                        </a:rPr>
+                        <a:t>9.13 s</a:t>
+                      </a:r>
+                      <a:endParaRPr lang="en-US" sz="1300" dirty="0">
+                        <a:latin typeface="Calibri" charset="0"/>
+                        <a:ea typeface="Calibri" charset="0"/>
+                        <a:cs typeface="Calibri" charset="0"/>
+                      </a:endParaRPr>
+                    </a:p>
+                  </a:txBody>
+                  <a:tcPr marL="91440" marR="91440" marT="45720" marB="45720">
+                    <a:lnL w="12700" cap="flat" cmpd="sng" algn="ctr">
+                      <a:solidFill>
+                        <a:srgbClr val="2A3441"/>
+                      </a:solidFill>
+                      <a:prstDash val="solid"/>
+                      <a:round/>
+                      <a:headEnd type="none" w="med" len="med"/>
+                      <a:tailEnd type="none" w="med" len="med"/>
+                    </a:lnL>
+                    <a:lnR w="12700" cap="flat" cmpd="sng" algn="ctr">
+                      <a:solidFill>
+                        <a:srgbClr val="2A3441"/>
+                      </a:solidFill>
+                      <a:prstDash val="solid"/>
+                      <a:round/>
+                      <a:headEnd type="none" w="med" len="med"/>
+                      <a:tailEnd type="none" w="med" len="med"/>
+                    </a:lnR>
+                    <a:lnT w="12700" cap="flat" cmpd="sng" algn="ctr">
+                      <a:solidFill>
+                        <a:srgbClr val="2A3441"/>
+                      </a:solidFill>
+                      <a:prstDash val="solid"/>
+                      <a:round/>
+                      <a:headEnd type="none" w="med" len="med"/>
+                      <a:tailEnd type="none" w="med" len="med"/>
+                    </a:lnT>
+                    <a:lnB w="12700" cap="flat" cmpd="sng" algn="ctr">
+                      <a:solidFill>
+                        <a:srgbClr val="2A3441"/>
+                      </a:solidFill>
+                      <a:prstDash val="solid"/>
+                      <a:round/>
+                      <a:headEnd type="none" w="med" len="med"/>
+                      <a:tailEnd type="none" w="med" len="med"/>
+                    </a:lnB>
+                    <a:solidFill>
+                      <a:srgbClr val="141B24"/>
+                    </a:solidFill>
+                  </a:tcPr>
+                </a:tc>
+                <a:tc>
+                  <a:txBody>
+                    <a:bodyPr/>
+                    <a:lstStyle/>
+                    <a:p>
+                      <a:pPr indent="0" marL="0">
+                        <a:buNone/>
+                      </a:pPr>
+                      <a:r>
+                        <a:rPr lang="en-US" sz="1300" dirty="0">
+                          <a:solidFill>
+                            <a:srgbClr val="E6EDF3"/>
+                          </a:solidFill>
+                          <a:latin typeface="Calibri" pitchFamily="34" charset="0"/>
+                          <a:ea typeface="Calibri" pitchFamily="34" charset="-122"/>
+                          <a:cs typeface="Calibri" pitchFamily="34" charset="-120"/>
+                        </a:rPr>
+                        <a:t>7.54 s</a:t>
+                      </a:r>
+                      <a:endParaRPr lang="en-US" sz="1300" dirty="0">
+                        <a:latin typeface="Calibri" charset="0"/>
+                        <a:ea typeface="Calibri" charset="0"/>
+                        <a:cs typeface="Calibri" charset="0"/>
+                      </a:endParaRPr>
+                    </a:p>
+                  </a:txBody>
+                  <a:tcPr marL="91440" marR="91440" marT="45720" marB="45720">
+                    <a:lnL w="12700" cap="flat" cmpd="sng" algn="ctr">
+                      <a:solidFill>
+                        <a:srgbClr val="2A3441"/>
+                      </a:solidFill>
+                      <a:prstDash val="solid"/>
+                      <a:round/>
+                      <a:headEnd type="none" w="med" len="med"/>
+                      <a:tailEnd type="none" w="med" len="med"/>
+                    </a:lnL>
+                    <a:lnR w="12700" cap="flat" cmpd="sng" algn="ctr">
+                      <a:solidFill>
+                        <a:srgbClr val="2A3441"/>
+                      </a:solidFill>
+                      <a:prstDash val="solid"/>
+                      <a:round/>
+                      <a:headEnd type="none" w="med" len="med"/>
+                      <a:tailEnd type="none" w="med" len="med"/>
+                    </a:lnR>
+                    <a:lnT w="12700" cap="flat" cmpd="sng" algn="ctr">
+                      <a:solidFill>
+                        <a:srgbClr val="2A3441"/>
+                      </a:solidFill>
+                      <a:prstDash val="solid"/>
+                      <a:round/>
+                      <a:headEnd type="none" w="med" len="med"/>
+                      <a:tailEnd type="none" w="med" len="med"/>
+                    </a:lnT>
+                    <a:lnB w="12700" cap="flat" cmpd="sng" algn="ctr">
+                      <a:solidFill>
+                        <a:srgbClr val="2A3441"/>
+                      </a:solidFill>
+                      <a:prstDash val="solid"/>
+                      <a:round/>
+                      <a:headEnd type="none" w="med" len="med"/>
+                      <a:tailEnd type="none" w="med" len="med"/>
+                    </a:lnB>
+                    <a:solidFill>
+                      <a:srgbClr val="141B24"/>
+                    </a:solidFill>
+                  </a:tcPr>
+                </a:tc>
+                <a:tc>
+                  <a:txBody>
+                    <a:bodyPr/>
+                    <a:lstStyle/>
+                    <a:p>
+                      <a:pPr indent="0" marL="0">
+                        <a:buNone/>
+                      </a:pPr>
+                      <a:r>
+                        <a:rPr lang="en-US" sz="1300" dirty="0">
+                          <a:solidFill>
+                            <a:srgbClr val="E6EDF3"/>
+                          </a:solidFill>
+                          <a:latin typeface="Calibri" pitchFamily="34" charset="0"/>
+                          <a:ea typeface="Calibri" pitchFamily="34" charset="-122"/>
+                          <a:cs typeface="Calibri" pitchFamily="34" charset="-120"/>
+                        </a:rPr>
+                        <a:t>6.63 s</a:t>
+                      </a:r>
+                      <a:endParaRPr lang="en-US" sz="1300" dirty="0">
+                        <a:latin typeface="Calibri" charset="0"/>
+                        <a:ea typeface="Calibri" charset="0"/>
+                        <a:cs typeface="Calibri" charset="0"/>
+                      </a:endParaRPr>
+                    </a:p>
+                  </a:txBody>
+                  <a:tcPr marL="91440" marR="91440" marT="45720" marB="45720">
+                    <a:lnL w="12700" cap="flat" cmpd="sng" algn="ctr">
+                      <a:solidFill>
+                        <a:srgbClr val="2A3441"/>
+                      </a:solidFill>
+                      <a:prstDash val="solid"/>
+                      <a:round/>
+                      <a:headEnd type="none" w="med" len="med"/>
+                      <a:tailEnd type="none" w="med" len="med"/>
+                    </a:lnL>
+                    <a:lnR w="12700" cap="flat" cmpd="sng" algn="ctr">
+                      <a:solidFill>
+                        <a:srgbClr val="2A3441"/>
+                      </a:solidFill>
+                      <a:prstDash val="solid"/>
+                      <a:round/>
+                      <a:headEnd type="none" w="med" len="med"/>
+                      <a:tailEnd type="none" w="med" len="med"/>
+                    </a:lnR>
+                    <a:lnT w="12700" cap="flat" cmpd="sng" algn="ctr">
+                      <a:solidFill>
+                        <a:srgbClr val="2A3441"/>
+                      </a:solidFill>
+                      <a:prstDash val="solid"/>
+                      <a:round/>
+                      <a:headEnd type="none" w="med" len="med"/>
+                      <a:tailEnd type="none" w="med" len="med"/>
+                    </a:lnT>
+                    <a:lnB w="12700" cap="flat" cmpd="sng" algn="ctr">
+                      <a:solidFill>
+                        <a:srgbClr val="2A3441"/>
+                      </a:solidFill>
+                      <a:prstDash val="solid"/>
+                      <a:round/>
+                      <a:headEnd type="none" w="med" len="med"/>
+                      <a:tailEnd type="none" w="med" len="med"/>
+                    </a:lnB>
+                    <a:solidFill>
+                      <a:srgbClr val="141B24"/>
+                    </a:solidFill>
+                  </a:tcPr>
+                </a:tc>
+              </a:tr>
+              <a:tr h="457200">
+                <a:tc>
+                  <a:txBody>
+                    <a:bodyPr/>
+                    <a:lstStyle/>
+                    <a:p>
+                      <a:pPr indent="0" marL="0">
+                        <a:buNone/>
+                      </a:pPr>
+                      <a:r>
+                        <a:rPr lang="en-US" sz="1300" dirty="0">
+                          <a:solidFill>
+                            <a:srgbClr val="E6EDF3"/>
+                          </a:solidFill>
+                          <a:latin typeface="Calibri" pitchFamily="34" charset="0"/>
+                          <a:ea typeface="Calibri" pitchFamily="34" charset="-122"/>
+                          <a:cs typeface="Calibri" pitchFamily="34" charset="-120"/>
+                        </a:rPr>
+                        <a:t>Satellite-like</a:t>
+                      </a:r>
+                      <a:endParaRPr lang="en-US" sz="1300" dirty="0">
+                        <a:latin typeface="Calibri" charset="0"/>
+                        <a:ea typeface="Calibri" charset="0"/>
+                        <a:cs typeface="Calibri" charset="0"/>
+                      </a:endParaRPr>
+                    </a:p>
+                  </a:txBody>
+                  <a:tcPr marL="91440" marR="91440" marT="45720" marB="45720">
+                    <a:lnL w="12700" cap="flat" cmpd="sng" algn="ctr">
+                      <a:solidFill>
+                        <a:srgbClr val="2A3441"/>
+                      </a:solidFill>
+                      <a:prstDash val="solid"/>
+                      <a:round/>
+                      <a:headEnd type="none" w="med" len="med"/>
+                      <a:tailEnd type="none" w="med" len="med"/>
+                    </a:lnL>
+                    <a:lnR w="12700" cap="flat" cmpd="sng" algn="ctr">
+                      <a:solidFill>
+                        <a:srgbClr val="2A3441"/>
+                      </a:solidFill>
+                      <a:prstDash val="solid"/>
+                      <a:round/>
+                      <a:headEnd type="none" w="med" len="med"/>
+                      <a:tailEnd type="none" w="med" len="med"/>
+                    </a:lnR>
+                    <a:lnT w="12700" cap="flat" cmpd="sng" algn="ctr">
+                      <a:solidFill>
+                        <a:srgbClr val="2A3441"/>
+                      </a:solidFill>
+                      <a:prstDash val="solid"/>
+                      <a:round/>
+                      <a:headEnd type="none" w="med" len="med"/>
+                      <a:tailEnd type="none" w="med" len="med"/>
+                    </a:lnT>
+                    <a:lnB w="12700" cap="flat" cmpd="sng" algn="ctr">
+                      <a:solidFill>
+                        <a:srgbClr val="2A3441"/>
+                      </a:solidFill>
+                      <a:prstDash val="solid"/>
+                      <a:round/>
+                      <a:headEnd type="none" w="med" len="med"/>
+                      <a:tailEnd type="none" w="med" len="med"/>
+                    </a:lnB>
+                    <a:solidFill>
+                      <a:srgbClr val="141B24"/>
+                    </a:solidFill>
+                  </a:tcPr>
+                </a:tc>
+                <a:tc>
+                  <a:txBody>
+                    <a:bodyPr/>
+                    <a:lstStyle/>
+                    <a:p>
+                      <a:pPr indent="0" marL="0">
+                        <a:buNone/>
+                      </a:pPr>
+                      <a:r>
+                        <a:rPr lang="en-US" sz="1300" dirty="0">
+                          <a:solidFill>
+                            <a:srgbClr val="E6EDF3"/>
+                          </a:solidFill>
+                          <a:latin typeface="Calibri" pitchFamily="34" charset="0"/>
+                          <a:ea typeface="Calibri" pitchFamily="34" charset="-122"/>
+                          <a:cs typeface="Calibri" pitchFamily="34" charset="-120"/>
+                        </a:rPr>
+                        <a:t>17.9 s</a:t>
+                      </a:r>
+                      <a:endParaRPr lang="en-US" sz="1300" dirty="0">
+                        <a:latin typeface="Calibri" charset="0"/>
+                        <a:ea typeface="Calibri" charset="0"/>
+                        <a:cs typeface="Calibri" charset="0"/>
+                      </a:endParaRPr>
+                    </a:p>
+                  </a:txBody>
+                  <a:tcPr marL="91440" marR="91440" marT="45720" marB="45720">
+                    <a:lnL w="12700" cap="flat" cmpd="sng" algn="ctr">
+                      <a:solidFill>
+                        <a:srgbClr val="2A3441"/>
+                      </a:solidFill>
+                      <a:prstDash val="solid"/>
+                      <a:round/>
+                      <a:headEnd type="none" w="med" len="med"/>
+                      <a:tailEnd type="none" w="med" len="med"/>
+                    </a:lnL>
+                    <a:lnR w="12700" cap="flat" cmpd="sng" algn="ctr">
+                      <a:solidFill>
+                        <a:srgbClr val="2A3441"/>
+                      </a:solidFill>
+                      <a:prstDash val="solid"/>
+                      <a:round/>
+                      <a:headEnd type="none" w="med" len="med"/>
+                      <a:tailEnd type="none" w="med" len="med"/>
+                    </a:lnR>
+                    <a:lnT w="12700" cap="flat" cmpd="sng" algn="ctr">
+                      <a:solidFill>
+                        <a:srgbClr val="2A3441"/>
+                      </a:solidFill>
+                      <a:prstDash val="solid"/>
+                      <a:round/>
+                      <a:headEnd type="none" w="med" len="med"/>
+                      <a:tailEnd type="none" w="med" len="med"/>
+                    </a:lnT>
+                    <a:lnB w="12700" cap="flat" cmpd="sng" algn="ctr">
+                      <a:solidFill>
+                        <a:srgbClr val="2A3441"/>
+                      </a:solidFill>
+                      <a:prstDash val="solid"/>
+                      <a:round/>
+                      <a:headEnd type="none" w="med" len="med"/>
+                      <a:tailEnd type="none" w="med" len="med"/>
+                    </a:lnB>
+                    <a:solidFill>
+                      <a:srgbClr val="141B24"/>
+                    </a:solidFill>
+                  </a:tcPr>
+                </a:tc>
+                <a:tc>
+                  <a:txBody>
+                    <a:bodyPr/>
+                    <a:lstStyle/>
+                    <a:p>
+                      <a:pPr indent="0" marL="0">
+                        <a:buNone/>
+                      </a:pPr>
+                      <a:r>
+                        <a:rPr lang="en-US" sz="1300" dirty="0">
+                          <a:solidFill>
+                            <a:srgbClr val="E6EDF3"/>
+                          </a:solidFill>
+                          <a:latin typeface="Calibri" pitchFamily="34" charset="0"/>
+                          <a:ea typeface="Calibri" pitchFamily="34" charset="-122"/>
+                          <a:cs typeface="Calibri" pitchFamily="34" charset="-120"/>
+                        </a:rPr>
+                        <a:t>38.1 s</a:t>
+                      </a:r>
+                      <a:endParaRPr lang="en-US" sz="1300" dirty="0">
+                        <a:latin typeface="Calibri" charset="0"/>
+                        <a:ea typeface="Calibri" charset="0"/>
+                        <a:cs typeface="Calibri" charset="0"/>
+                      </a:endParaRPr>
+                    </a:p>
+                  </a:txBody>
+                  <a:tcPr marL="91440" marR="91440" marT="45720" marB="45720">
+                    <a:lnL w="12700" cap="flat" cmpd="sng" algn="ctr">
+                      <a:solidFill>
+                        <a:srgbClr val="2A3441"/>
+                      </a:solidFill>
+                      <a:prstDash val="solid"/>
+                      <a:round/>
+                      <a:headEnd type="none" w="med" len="med"/>
+                      <a:tailEnd type="none" w="med" len="med"/>
+                    </a:lnL>
+                    <a:lnR w="12700" cap="flat" cmpd="sng" algn="ctr">
+                      <a:solidFill>
+                        <a:srgbClr val="2A3441"/>
+                      </a:solidFill>
+                      <a:prstDash val="solid"/>
+                      <a:round/>
+                      <a:headEnd type="none" w="med" len="med"/>
+                      <a:tailEnd type="none" w="med" len="med"/>
+                    </a:lnR>
+                    <a:lnT w="12700" cap="flat" cmpd="sng" algn="ctr">
+                      <a:solidFill>
+                        <a:srgbClr val="2A3441"/>
+                      </a:solidFill>
+                      <a:prstDash val="solid"/>
+                      <a:round/>
+                      <a:headEnd type="none" w="med" len="med"/>
+                      <a:tailEnd type="none" w="med" len="med"/>
+                    </a:lnT>
+                    <a:lnB w="12700" cap="flat" cmpd="sng" algn="ctr">
+                      <a:solidFill>
+                        <a:srgbClr val="2A3441"/>
+                      </a:solidFill>
+                      <a:prstDash val="solid"/>
+                      <a:round/>
+                      <a:headEnd type="none" w="med" len="med"/>
+                      <a:tailEnd type="none" w="med" len="med"/>
+                    </a:lnB>
+                    <a:solidFill>
+                      <a:srgbClr val="141B24"/>
+                    </a:solidFill>
+                  </a:tcPr>
+                </a:tc>
+                <a:tc>
+                  <a:txBody>
+                    <a:bodyPr/>
+                    <a:lstStyle/>
+                    <a:p>
+                      <a:pPr indent="0" marL="0">
+                        <a:buNone/>
+                      </a:pPr>
+                      <a:r>
+                        <a:rPr lang="en-US" sz="1300" dirty="0">
+                          <a:solidFill>
+                            <a:srgbClr val="E6EDF3"/>
+                          </a:solidFill>
+                          <a:latin typeface="Calibri" pitchFamily="34" charset="0"/>
+                          <a:ea typeface="Calibri" pitchFamily="34" charset="-122"/>
+                          <a:cs typeface="Calibri" pitchFamily="34" charset="-120"/>
+                        </a:rPr>
+                        <a:t>13.1 s</a:t>
+                      </a:r>
+                      <a:endParaRPr lang="en-US" sz="1300" dirty="0">
+                        <a:latin typeface="Calibri" charset="0"/>
+                        <a:ea typeface="Calibri" charset="0"/>
+                        <a:cs typeface="Calibri" charset="0"/>
+                      </a:endParaRPr>
+                    </a:p>
+                  </a:txBody>
+                  <a:tcPr marL="91440" marR="91440" marT="45720" marB="45720">
+                    <a:lnL w="12700" cap="flat" cmpd="sng" algn="ctr">
+                      <a:solidFill>
+                        <a:srgbClr val="2A3441"/>
+                      </a:solidFill>
+                      <a:prstDash val="solid"/>
+                      <a:round/>
+                      <a:headEnd type="none" w="med" len="med"/>
+                      <a:tailEnd type="none" w="med" len="med"/>
+                    </a:lnL>
+                    <a:lnR w="12700" cap="flat" cmpd="sng" algn="ctr">
+                      <a:solidFill>
+                        <a:srgbClr val="2A3441"/>
+                      </a:solidFill>
+                      <a:prstDash val="solid"/>
+                      <a:round/>
+                      <a:headEnd type="none" w="med" len="med"/>
+                      <a:tailEnd type="none" w="med" len="med"/>
+                    </a:lnR>
+                    <a:lnT w="12700" cap="flat" cmpd="sng" algn="ctr">
+                      <a:solidFill>
+                        <a:srgbClr val="2A3441"/>
+                      </a:solidFill>
+                      <a:prstDash val="solid"/>
+                      <a:round/>
+                      <a:headEnd type="none" w="med" len="med"/>
+                      <a:tailEnd type="none" w="med" len="med"/>
+                    </a:lnT>
+                    <a:lnB w="12700" cap="flat" cmpd="sng" algn="ctr">
+                      <a:solidFill>
+                        <a:srgbClr val="2A3441"/>
+                      </a:solidFill>
+                      <a:prstDash val="solid"/>
+                      <a:round/>
+                      <a:headEnd type="none" w="med" len="med"/>
+                      <a:tailEnd type="none" w="med" len="med"/>
+                    </a:lnB>
+                    <a:solidFill>
+                      <a:srgbClr val="141B24"/>
+                    </a:solidFill>
+                  </a:tcPr>
+                </a:tc>
+              </a:tr>
+            </a:tbl>
+          </a:graphicData>
+        </a:graphic>
+      </p:graphicFrame>
+      <p:sp>
+        <p:nvSpPr>
+          <p:cNvPr id="5" name="Text 2"/>
+          <p:cNvSpPr/>
+          <p:nvPr/>
+        </p:nvSpPr>
+        <p:spPr>
+          <a:xfrm>
+            <a:off x="7406640" y="1188720"/>
+            <a:ext cx="4297680" cy="4572000"/>
           </a:xfrm>
           <a:prstGeom prst="rect">
             <a:avLst/>
@@ -9970,53 +11186,18 @@
           <a:ln/>
         </p:spPr>
         <p:txBody>
-          <a:bodyPr wrap="square" lIns="0" tIns="0" rIns="0" bIns="0" rtlCol="0" anchor="ctr"/>
-          <a:lstStyle/>
-          <a:p>
-            <a:pPr indent="0" marL="0">
-              <a:buNone/>
-            </a:pPr>
-            <a:r>
-              <a:rPr lang="en-US" sz="2000" b="1" dirty="0">
-                <a:solidFill>
-                  <a:srgbClr val="39FF88"/>
-                </a:solidFill>
-                <a:latin typeface="Courier New" pitchFamily="34" charset="0"/>
-                <a:ea typeface="Courier New" pitchFamily="34" charset="-122"/>
-                <a:cs typeface="Courier New" pitchFamily="34" charset="-120"/>
-              </a:rPr>
-              <a:t>Learned</a:t>
-            </a:r>
-            <a:endParaRPr lang="en-US" sz="2000" dirty="0"/>
-          </a:p>
-        </p:txBody>
-      </p:sp>
-      <p:sp>
-        <p:nvSpPr>
-          <p:cNvPr id="6" name="Text 4"/>
-          <p:cNvSpPr/>
-          <p:nvPr/>
-        </p:nvSpPr>
-        <p:spPr>
-          <a:xfrm>
-            <a:off x="731520" y="2011680"/>
-            <a:ext cx="5029200" cy="3429000"/>
-          </a:xfrm>
-          <a:prstGeom prst="rect">
-            <a:avLst/>
-          </a:prstGeom>
-          <a:noFill/>
-          <a:ln/>
-        </p:spPr>
-        <p:txBody>
           <a:bodyPr wrap="square" lIns="0" tIns="0" rIns="0" bIns="0" rtlCol="0" anchor="t"/>
           <a:lstStyle/>
           <a:p>
-            <a:pPr indent="0" marL="0">
-              <a:buNone/>
-            </a:pPr>
-            <a:r>
-              <a:rPr lang="en-US" sz="2000" dirty="0">
+            <a:pPr marL="342900" indent="-342900">
+              <a:spcAft>
+                <a:spcPts val="800"/>
+              </a:spcAft>
+              <a:buSzPct val="100000"/>
+              <a:buChar char="•"/>
+            </a:pPr>
+            <a:r>
+              <a:rPr lang="en-US" sz="1500" dirty="0">
                 <a:solidFill>
                   <a:srgbClr val="E6EDF3"/>
                 </a:solidFill>
@@ -10024,16 +11205,20 @@
                 <a:ea typeface="Calibri" pitchFamily="34" charset="-122"/>
                 <a:cs typeface="Calibri" pitchFamily="34" charset="-120"/>
               </a:rPr>
-              <a:t>Reliability is a set of simple rules working together.</a:t>
-            </a:r>
-            <a:endParaRPr lang="en-US" sz="2000" dirty="0"/>
-          </a:p>
-          <a:p>
-            <a:pPr indent="0" marL="0">
-              <a:buNone/>
-            </a:pPr>
-            <a:r>
-              <a:rPr lang="en-US" sz="2000" dirty="0">
+              <a:t>Neural agent beats AIMD on all three paths: 15%, 27%, 24% faster (95% intervals exclude zero)</a:t>
+            </a:r>
+            <a:endParaRPr lang="en-US" sz="1500" dirty="0"/>
+          </a:p>
+          <a:p>
+            <a:pPr marL="342900" indent="-342900">
+              <a:spcAft>
+                <a:spcPts val="800"/>
+              </a:spcAft>
+              <a:buSzPct val="100000"/>
+              <a:buChar char="•"/>
+            </a:pPr>
+            <a:r>
+              <a:rPr lang="en-US" sz="1500" dirty="0">
                 <a:solidFill>
                   <a:srgbClr val="E6EDF3"/>
                 </a:solidFill>
@@ -10041,16 +11226,20 @@
                 <a:ea typeface="Calibri" pitchFamily="34" charset="-122"/>
                 <a:cs typeface="Calibri" pitchFamily="34" charset="-120"/>
               </a:rPr>
-              <a:t>Congestion control matters as much as retransmission.</a:t>
-            </a:r>
-            <a:endParaRPr lang="en-US" sz="2000" dirty="0"/>
-          </a:p>
-          <a:p>
-            <a:pPr indent="0" marL="0">
-              <a:buNone/>
-            </a:pPr>
-            <a:r>
-              <a:rPr lang="en-US" sz="2000" dirty="0">
+              <a:t>Table agent does not generalise: slower on 5G-like and satellite-like</a:t>
+            </a:r>
+            <a:endParaRPr lang="en-US" sz="1500" dirty="0"/>
+          </a:p>
+          <a:p>
+            <a:pPr marL="342900" indent="-342900">
+              <a:spcAft>
+                <a:spcPts val="800"/>
+              </a:spcAft>
+              <a:buSzPct val="100000"/>
+              <a:buChar char="•"/>
+            </a:pPr>
+            <a:r>
+              <a:rPr lang="en-US" sz="1500" dirty="0">
                 <a:solidFill>
                   <a:srgbClr val="E6EDF3"/>
                 </a:solidFill>
@@ -10058,102 +11247,20 @@
                 <a:ea typeface="Calibri" pitchFamily="34" charset="-122"/>
                 <a:cs typeface="Calibri" pitchFamily="34" charset="-120"/>
               </a:rPr>
-              <a:t>Testing tools fail in surprising ways.</a:t>
-            </a:r>
-            <a:endParaRPr lang="en-US" sz="2000" dirty="0"/>
-          </a:p>
-        </p:txBody>
-      </p:sp>
-      <p:sp>
-        <p:nvSpPr>
-          <p:cNvPr id="7" name="Shape 5"/>
-          <p:cNvSpPr/>
-          <p:nvPr/>
-        </p:nvSpPr>
-        <p:spPr>
-          <a:xfrm>
-            <a:off x="6217920" y="1371600"/>
-            <a:ext cx="5394960" cy="4206240"/>
-          </a:xfrm>
-          <a:prstGeom prst="rect">
-            <a:avLst/>
-          </a:prstGeom>
-          <a:solidFill>
-            <a:srgbClr val="141B24"/>
-          </a:solidFill>
-          <a:ln w="12700">
-            <a:solidFill>
-              <a:srgbClr val="FFB000"/>
-            </a:solidFill>
-            <a:prstDash val="solid"/>
-          </a:ln>
-        </p:spPr>
-      </p:sp>
-      <p:sp>
-        <p:nvSpPr>
-          <p:cNvPr id="8" name="Text 6"/>
-          <p:cNvSpPr/>
-          <p:nvPr/>
-        </p:nvSpPr>
-        <p:spPr>
-          <a:xfrm>
-            <a:off x="6400800" y="1508760"/>
-            <a:ext cx="5029200" cy="457200"/>
-          </a:xfrm>
-          <a:prstGeom prst="rect">
-            <a:avLst/>
-          </a:prstGeom>
-          <a:noFill/>
-          <a:ln/>
-        </p:spPr>
-        <p:txBody>
-          <a:bodyPr wrap="square" lIns="0" tIns="0" rIns="0" bIns="0" rtlCol="0" anchor="ctr"/>
-          <a:lstStyle/>
-          <a:p>
-            <a:pPr indent="0" marL="0">
-              <a:buNone/>
-            </a:pPr>
-            <a:r>
-              <a:rPr lang="en-US" sz="2000" b="1" dirty="0">
-                <a:solidFill>
-                  <a:srgbClr val="FFB000"/>
-                </a:solidFill>
-                <a:latin typeface="Courier New" pitchFamily="34" charset="0"/>
-                <a:ea typeface="Courier New" pitchFamily="34" charset="-122"/>
-                <a:cs typeface="Courier New" pitchFamily="34" charset="-120"/>
-              </a:rPr>
-              <a:t>Next</a:t>
-            </a:r>
-            <a:endParaRPr lang="en-US" sz="2000" dirty="0"/>
-          </a:p>
-        </p:txBody>
-      </p:sp>
-      <p:sp>
-        <p:nvSpPr>
-          <p:cNvPr id="9" name="Text 7"/>
-          <p:cNvSpPr/>
-          <p:nvPr/>
-        </p:nvSpPr>
-        <p:spPr>
-          <a:xfrm>
-            <a:off x="6400800" y="2011680"/>
-            <a:ext cx="5029200" cy="3429000"/>
-          </a:xfrm>
-          <a:prstGeom prst="rect">
-            <a:avLst/>
-          </a:prstGeom>
-          <a:noFill/>
-          <a:ln/>
-        </p:spPr>
-        <p:txBody>
-          <a:bodyPr wrap="square" lIns="0" tIns="0" rIns="0" bIns="0" rtlCol="0" anchor="t"/>
-          <a:lstStyle/>
-          <a:p>
-            <a:pPr indent="0" marL="0">
-              <a:buNone/>
-            </a:pPr>
-            <a:r>
-              <a:rPr lang="en-US" sz="2000" dirty="0">
+              <a:t>Selective ACK in C: about 10x fewer retransmissions, no significant time change here</a:t>
+            </a:r>
+            <a:endParaRPr lang="en-US" sz="1500" dirty="0"/>
+          </a:p>
+          <a:p>
+            <a:pPr marL="342900" indent="-342900">
+              <a:spcAft>
+                <a:spcPts val="800"/>
+              </a:spcAft>
+              <a:buSzPct val="100000"/>
+              <a:buChar char="•"/>
+            </a:pPr>
+            <a:r>
+              <a:rPr lang="en-US" sz="1500" dirty="0">
                 <a:solidFill>
                   <a:srgbClr val="E6EDF3"/>
                 </a:solidFill>
@@ -10161,82 +11268,48 @@
                 <a:ea typeface="Calibri" pitchFamily="34" charset="-122"/>
                 <a:cs typeface="Calibri" pitchFamily="34" charset="-120"/>
               </a:rPr>
-              <a:t>Selective ACK in the C code (largest gain in simulation)</a:t>
-            </a:r>
-            <a:endParaRPr lang="en-US" sz="2000" dirty="0"/>
-          </a:p>
+              <a:t>Caveats: trained in a simulator; emulated paths; AIMD cap 128 vs agents 32; agent retransmits more on random loss</a:t>
+            </a:r>
+            <a:endParaRPr lang="en-US" sz="1500" dirty="0"/>
+          </a:p>
+        </p:txBody>
+      </p:sp>
+      <p:sp>
+        <p:nvSpPr>
+          <p:cNvPr id="6" name="Text 3"/>
+          <p:cNvSpPr/>
+          <p:nvPr/>
+        </p:nvSpPr>
+        <p:spPr>
+          <a:xfrm>
+            <a:off x="548640" y="3840480"/>
+            <a:ext cx="6583680" cy="731520"/>
+          </a:xfrm>
+          <a:prstGeom prst="rect">
+            <a:avLst/>
+          </a:prstGeom>
+          <a:noFill/>
+          <a:ln/>
+        </p:spPr>
+        <p:txBody>
+          <a:bodyPr wrap="square" lIns="0" tIns="0" rIns="0" bIns="0" rtlCol="0" anchor="ctr"/>
+          <a:lstStyle/>
           <a:p>
             <a:pPr indent="0" marL="0">
               <a:buNone/>
             </a:pPr>
             <a:r>
-              <a:rPr lang="en-US" sz="2000" dirty="0">
-                <a:solidFill>
-                  <a:srgbClr val="E6EDF3"/>
+              <a:rPr lang="en-US" sz="1300" dirty="0">
+                <a:solidFill>
+                  <a:srgbClr val="8B98A5"/>
                 </a:solidFill>
                 <a:latin typeface="Calibri" pitchFamily="34" charset="0"/>
                 <a:ea typeface="Calibri" pitchFamily="34" charset="-122"/>
                 <a:cs typeface="Calibri" pitchFamily="34" charset="-120"/>
               </a:rPr>
-              <a:t>Deep agent in the C transport</a:t>
-            </a:r>
-            <a:endParaRPr lang="en-US" sz="2000" dirty="0"/>
-          </a:p>
-          <a:p>
-            <a:pPr indent="0" marL="0">
-              <a:buNone/>
-            </a:pPr>
-            <a:r>
-              <a:rPr lang="en-US" sz="2000" dirty="0">
-                <a:solidFill>
-                  <a:srgbClr val="E6EDF3"/>
-                </a:solidFill>
-                <a:latin typeface="Calibri" pitchFamily="34" charset="0"/>
-                <a:ea typeface="Calibri" pitchFamily="34" charset="-122"/>
-                <a:cs typeface="Calibri" pitchFamily="34" charset="-120"/>
-              </a:rPr>
-              <a:t>Kernel netem and real multi-machine tests</a:t>
-            </a:r>
-            <a:endParaRPr lang="en-US" sz="2000" dirty="0"/>
-          </a:p>
-        </p:txBody>
-      </p:sp>
-      <p:sp>
-        <p:nvSpPr>
-          <p:cNvPr id="10" name="Text 8"/>
-          <p:cNvSpPr/>
-          <p:nvPr/>
-        </p:nvSpPr>
-        <p:spPr>
-          <a:xfrm>
-            <a:off x="548640" y="5852160"/>
-            <a:ext cx="10972800" cy="365760"/>
-          </a:xfrm>
-          <a:prstGeom prst="rect">
-            <a:avLst/>
-          </a:prstGeom>
-          <a:noFill/>
-          <a:ln/>
-        </p:spPr>
-        <p:txBody>
-          <a:bodyPr wrap="square" lIns="0" tIns="0" rIns="0" bIns="0" rtlCol="0" anchor="ctr"/>
-          <a:lstStyle/>
-          <a:p>
-            <a:pPr indent="0" marL="0">
-              <a:buNone/>
-            </a:pPr>
-            <a:r>
-              <a:rPr lang="en-US" sz="1400" dirty="0">
-                <a:solidFill>
-                  <a:srgbClr val="8B98A5"/>
-                </a:solidFill>
-                <a:latin typeface="Calibri" pitchFamily="34" charset="0"/>
-                <a:ea typeface="Calibri" pitchFamily="34" charset="-122"/>
-                <a:cs typeface="Calibri" pitchFamily="34" charset="-120"/>
-              </a:rPr>
-              <a:t>Limits: Go-Back-N wastes bandwidth and suffers under reordering; C tests use an emulated path; the tabular agent did not beat AIMD in C.</a:t>
-            </a:r>
-            <a:endParaRPr lang="en-US" sz="1400" dirty="0"/>
+              <a:t>15 runs per cell (satellite: 8), 95% confidence intervals. Code: src/deep_cc.h, web/dqn.py, eval_ci2.sh.</a:t>
+            </a:r>
+            <a:endParaRPr lang="en-US" sz="1300" dirty="0"/>
           </a:p>
         </p:txBody>
       </p:sp>
@@ -10280,8 +11353,8 @@
         </p:nvSpPr>
         <p:spPr>
           <a:xfrm>
-            <a:off x="731520" y="2103120"/>
-            <a:ext cx="10058400" cy="1097280"/>
+            <a:off x="548640" y="320040"/>
+            <a:ext cx="11064240" cy="731520"/>
           </a:xfrm>
           <a:prstGeom prst="rect">
             <a:avLst/>
@@ -10297,7 +11370,7 @@
               <a:buNone/>
             </a:pPr>
             <a:r>
-              <a:rPr lang="en-US" sz="6400" b="1" dirty="0">
+              <a:rPr lang="en-US" sz="3000" b="1" dirty="0">
                 <a:solidFill>
                   <a:srgbClr val="39FF88"/>
                 </a:solidFill>
@@ -10305,9 +11378,9 @@
                 <a:ea typeface="Courier New" pitchFamily="34" charset="-122"/>
                 <a:cs typeface="Courier New" pitchFamily="34" charset="-120"/>
               </a:rPr>
-              <a:t>Thank you</a:t>
-            </a:r>
-            <a:endParaRPr lang="en-US" sz="6400" dirty="0"/>
+              <a:t>Learnings and future work</a:t>
+            </a:r>
+            <a:endParaRPr lang="en-US" sz="3000" dirty="0"/>
           </a:p>
         </p:txBody>
       </p:sp>
@@ -10319,8 +11392,8 @@
         </p:nvSpPr>
         <p:spPr>
           <a:xfrm>
-            <a:off x="731520" y="3474720"/>
-            <a:ext cx="10058400" cy="548640"/>
+            <a:off x="9418320" y="6446520"/>
+            <a:ext cx="2377440" cy="274320"/>
           </a:xfrm>
           <a:prstGeom prst="rect">
             <a:avLst/>
@@ -10332,34 +11405,59 @@
           <a:bodyPr wrap="square" lIns="0" tIns="0" rIns="0" bIns="0" rtlCol="0" anchor="ctr"/>
           <a:lstStyle/>
           <a:p>
-            <a:pPr indent="0" marL="0">
+            <a:pPr algn="r" indent="0" marL="0">
               <a:buNone/>
             </a:pPr>
             <a:r>
-              <a:rPr lang="en-US" sz="2600" dirty="0">
-                <a:solidFill>
-                  <a:srgbClr val="E6EDF3"/>
+              <a:rPr lang="en-US" sz="1000" dirty="0">
+                <a:solidFill>
+                  <a:srgbClr val="8B98A5"/>
                 </a:solidFill>
                 <a:latin typeface="Courier New" pitchFamily="34" charset="0"/>
                 <a:ea typeface="Courier New" pitchFamily="34" charset="-122"/>
                 <a:cs typeface="Courier New" pitchFamily="34" charset="-120"/>
               </a:rPr>
-              <a:t>github.com/Capsturrrr/rudp</a:t>
-            </a:r>
-            <a:endParaRPr lang="en-US" sz="2600" dirty="0"/>
-          </a:p>
-        </p:txBody>
-      </p:sp>
-      <p:sp>
-        <p:nvSpPr>
-          <p:cNvPr id="4" name="Text 2"/>
-          <p:cNvSpPr/>
-          <p:nvPr/>
-        </p:nvSpPr>
-        <p:spPr>
-          <a:xfrm>
-            <a:off x="731520" y="4206240"/>
-            <a:ext cx="10058400" cy="457200"/>
+              <a:t>23 / 24   Smart-RUDP</a:t>
+            </a:r>
+            <a:endParaRPr lang="en-US" sz="1000" dirty="0"/>
+          </a:p>
+        </p:txBody>
+      </p:sp>
+      <p:sp>
+        <p:nvSpPr>
+          <p:cNvPr id="4" name="Shape 2"/>
+          <p:cNvSpPr/>
+          <p:nvPr/>
+        </p:nvSpPr>
+        <p:spPr>
+          <a:xfrm>
+            <a:off x="548640" y="1371600"/>
+            <a:ext cx="5394960" cy="4206240"/>
+          </a:xfrm>
+          <a:prstGeom prst="rect">
+            <a:avLst/>
+          </a:prstGeom>
+          <a:solidFill>
+            <a:srgbClr val="141B24"/>
+          </a:solidFill>
+          <a:ln w="12700">
+            <a:solidFill>
+              <a:srgbClr val="39FF88"/>
+            </a:solidFill>
+            <a:prstDash val="solid"/>
+          </a:ln>
+        </p:spPr>
+      </p:sp>
+      <p:sp>
+        <p:nvSpPr>
+          <p:cNvPr id="5" name="Text 3"/>
+          <p:cNvSpPr/>
+          <p:nvPr/>
+        </p:nvSpPr>
+        <p:spPr>
+          <a:xfrm>
+            <a:off x="731520" y="1508760"/>
+            <a:ext cx="5029200" cy="457200"/>
           </a:xfrm>
           <a:prstGeom prst="rect">
             <a:avLst/>
@@ -10375,17 +11473,266 @@
               <a:buNone/>
             </a:pPr>
             <a:r>
-              <a:rPr lang="en-US" sz="1800" dirty="0">
-                <a:solidFill>
-                  <a:srgbClr val="8B98A5"/>
+              <a:rPr lang="en-US" sz="2000" b="1" dirty="0">
+                <a:solidFill>
+                  <a:srgbClr val="39FF88"/>
+                </a:solidFill>
+                <a:latin typeface="Courier New" pitchFamily="34" charset="0"/>
+                <a:ea typeface="Courier New" pitchFamily="34" charset="-122"/>
+                <a:cs typeface="Courier New" pitchFamily="34" charset="-120"/>
+              </a:rPr>
+              <a:t>Learned</a:t>
+            </a:r>
+            <a:endParaRPr lang="en-US" sz="2000" dirty="0"/>
+          </a:p>
+        </p:txBody>
+      </p:sp>
+      <p:sp>
+        <p:nvSpPr>
+          <p:cNvPr id="6" name="Text 4"/>
+          <p:cNvSpPr/>
+          <p:nvPr/>
+        </p:nvSpPr>
+        <p:spPr>
+          <a:xfrm>
+            <a:off x="731520" y="2011680"/>
+            <a:ext cx="5029200" cy="3429000"/>
+          </a:xfrm>
+          <a:prstGeom prst="rect">
+            <a:avLst/>
+          </a:prstGeom>
+          <a:noFill/>
+          <a:ln/>
+        </p:spPr>
+        <p:txBody>
+          <a:bodyPr wrap="square" lIns="0" tIns="0" rIns="0" bIns="0" rtlCol="0" anchor="t"/>
+          <a:lstStyle/>
+          <a:p>
+            <a:pPr indent="0" marL="0">
+              <a:buNone/>
+            </a:pPr>
+            <a:r>
+              <a:rPr lang="en-US" sz="2000" dirty="0">
+                <a:solidFill>
+                  <a:srgbClr val="E6EDF3"/>
                 </a:solidFill>
                 <a:latin typeface="Calibri" pitchFamily="34" charset="0"/>
                 <a:ea typeface="Calibri" pitchFamily="34" charset="-122"/>
                 <a:cs typeface="Calibri" pitchFamily="34" charset="-120"/>
               </a:rPr>
-              <a:t>Harshavardhan Mallela   Rohit Arya   Shloak Sinha</a:t>
-            </a:r>
-            <a:endParaRPr lang="en-US" sz="1800" dirty="0"/>
+              <a:t>Reliability is a set of simple rules working together.</a:t>
+            </a:r>
+            <a:endParaRPr lang="en-US" sz="2000" dirty="0"/>
+          </a:p>
+          <a:p>
+            <a:pPr indent="0" marL="0">
+              <a:buNone/>
+            </a:pPr>
+            <a:r>
+              <a:rPr lang="en-US" sz="2000" dirty="0">
+                <a:solidFill>
+                  <a:srgbClr val="E6EDF3"/>
+                </a:solidFill>
+                <a:latin typeface="Calibri" pitchFamily="34" charset="0"/>
+                <a:ea typeface="Calibri" pitchFamily="34" charset="-122"/>
+                <a:cs typeface="Calibri" pitchFamily="34" charset="-120"/>
+              </a:rPr>
+              <a:t>Congestion control matters as much as retransmission.</a:t>
+            </a:r>
+            <a:endParaRPr lang="en-US" sz="2000" dirty="0"/>
+          </a:p>
+          <a:p>
+            <a:pPr indent="0" marL="0">
+              <a:buNone/>
+            </a:pPr>
+            <a:r>
+              <a:rPr lang="en-US" sz="2000" dirty="0">
+                <a:solidFill>
+                  <a:srgbClr val="E6EDF3"/>
+                </a:solidFill>
+                <a:latin typeface="Calibri" pitchFamily="34" charset="0"/>
+                <a:ea typeface="Calibri" pitchFamily="34" charset="-122"/>
+                <a:cs typeface="Calibri" pitchFamily="34" charset="-120"/>
+              </a:rPr>
+              <a:t>Testing tools fail in surprising ways.</a:t>
+            </a:r>
+            <a:endParaRPr lang="en-US" sz="2000" dirty="0"/>
+          </a:p>
+        </p:txBody>
+      </p:sp>
+      <p:sp>
+        <p:nvSpPr>
+          <p:cNvPr id="7" name="Shape 5"/>
+          <p:cNvSpPr/>
+          <p:nvPr/>
+        </p:nvSpPr>
+        <p:spPr>
+          <a:xfrm>
+            <a:off x="6217920" y="1371600"/>
+            <a:ext cx="5394960" cy="4206240"/>
+          </a:xfrm>
+          <a:prstGeom prst="rect">
+            <a:avLst/>
+          </a:prstGeom>
+          <a:solidFill>
+            <a:srgbClr val="141B24"/>
+          </a:solidFill>
+          <a:ln w="12700">
+            <a:solidFill>
+              <a:srgbClr val="FFB000"/>
+            </a:solidFill>
+            <a:prstDash val="solid"/>
+          </a:ln>
+        </p:spPr>
+      </p:sp>
+      <p:sp>
+        <p:nvSpPr>
+          <p:cNvPr id="8" name="Text 6"/>
+          <p:cNvSpPr/>
+          <p:nvPr/>
+        </p:nvSpPr>
+        <p:spPr>
+          <a:xfrm>
+            <a:off x="6400800" y="1508760"/>
+            <a:ext cx="5029200" cy="457200"/>
+          </a:xfrm>
+          <a:prstGeom prst="rect">
+            <a:avLst/>
+          </a:prstGeom>
+          <a:noFill/>
+          <a:ln/>
+        </p:spPr>
+        <p:txBody>
+          <a:bodyPr wrap="square" lIns="0" tIns="0" rIns="0" bIns="0" rtlCol="0" anchor="ctr"/>
+          <a:lstStyle/>
+          <a:p>
+            <a:pPr indent="0" marL="0">
+              <a:buNone/>
+            </a:pPr>
+            <a:r>
+              <a:rPr lang="en-US" sz="2000" b="1" dirty="0">
+                <a:solidFill>
+                  <a:srgbClr val="FFB000"/>
+                </a:solidFill>
+                <a:latin typeface="Courier New" pitchFamily="34" charset="0"/>
+                <a:ea typeface="Courier New" pitchFamily="34" charset="-122"/>
+                <a:cs typeface="Courier New" pitchFamily="34" charset="-120"/>
+              </a:rPr>
+              <a:t>Next</a:t>
+            </a:r>
+            <a:endParaRPr lang="en-US" sz="2000" dirty="0"/>
+          </a:p>
+        </p:txBody>
+      </p:sp>
+      <p:sp>
+        <p:nvSpPr>
+          <p:cNvPr id="9" name="Text 7"/>
+          <p:cNvSpPr/>
+          <p:nvPr/>
+        </p:nvSpPr>
+        <p:spPr>
+          <a:xfrm>
+            <a:off x="6400800" y="2011680"/>
+            <a:ext cx="5029200" cy="3429000"/>
+          </a:xfrm>
+          <a:prstGeom prst="rect">
+            <a:avLst/>
+          </a:prstGeom>
+          <a:noFill/>
+          <a:ln/>
+        </p:spPr>
+        <p:txBody>
+          <a:bodyPr wrap="square" lIns="0" tIns="0" rIns="0" bIns="0" rtlCol="0" anchor="t"/>
+          <a:lstStyle/>
+          <a:p>
+            <a:pPr indent="0" marL="0">
+              <a:buNone/>
+            </a:pPr>
+            <a:r>
+              <a:rPr lang="en-US" sz="2000" dirty="0">
+                <a:solidFill>
+                  <a:srgbClr val="E6EDF3"/>
+                </a:solidFill>
+                <a:latin typeface="Calibri" pitchFamily="34" charset="0"/>
+                <a:ea typeface="Calibri" pitchFamily="34" charset="-122"/>
+                <a:cs typeface="Calibri" pitchFamily="34" charset="-120"/>
+              </a:rPr>
+              <a:t>Train the neural agent in C / on real netem</a:t>
+            </a:r>
+            <a:endParaRPr lang="en-US" sz="2000" dirty="0"/>
+          </a:p>
+          <a:p>
+            <a:pPr indent="0" marL="0">
+              <a:buNone/>
+            </a:pPr>
+            <a:r>
+              <a:rPr lang="en-US" sz="2000" dirty="0">
+                <a:solidFill>
+                  <a:srgbClr val="E6EDF3"/>
+                </a:solidFill>
+                <a:latin typeface="Calibri" pitchFamily="34" charset="0"/>
+                <a:ea typeface="Calibri" pitchFamily="34" charset="-122"/>
+                <a:cs typeface="Calibri" pitchFamily="34" charset="-120"/>
+              </a:rPr>
+              <a:t>Selective ACK where throughput limits the path</a:t>
+            </a:r>
+            <a:endParaRPr lang="en-US" sz="2000" dirty="0"/>
+          </a:p>
+          <a:p>
+            <a:pPr indent="0" marL="0">
+              <a:buNone/>
+            </a:pPr>
+            <a:r>
+              <a:rPr lang="en-US" sz="2000" dirty="0">
+                <a:solidFill>
+                  <a:srgbClr val="E6EDF3"/>
+                </a:solidFill>
+                <a:latin typeface="Calibri" pitchFamily="34" charset="0"/>
+                <a:ea typeface="Calibri" pitchFamily="34" charset="-122"/>
+                <a:cs typeface="Calibri" pitchFamily="34" charset="-120"/>
+              </a:rPr>
+              <a:t>Kernel netem and real multi-machine tests</a:t>
+            </a:r>
+            <a:endParaRPr lang="en-US" sz="2000" dirty="0"/>
+          </a:p>
+        </p:txBody>
+      </p:sp>
+      <p:sp>
+        <p:nvSpPr>
+          <p:cNvPr id="10" name="Text 8"/>
+          <p:cNvSpPr/>
+          <p:nvPr/>
+        </p:nvSpPr>
+        <p:spPr>
+          <a:xfrm>
+            <a:off x="548640" y="5852160"/>
+            <a:ext cx="10972800" cy="365760"/>
+          </a:xfrm>
+          <a:prstGeom prst="rect">
+            <a:avLst/>
+          </a:prstGeom>
+          <a:noFill/>
+          <a:ln/>
+        </p:spPr>
+        <p:txBody>
+          <a:bodyPr wrap="square" lIns="0" tIns="0" rIns="0" bIns="0" rtlCol="0" anchor="ctr"/>
+          <a:lstStyle/>
+          <a:p>
+            <a:pPr indent="0" marL="0">
+              <a:buNone/>
+            </a:pPr>
+            <a:r>
+              <a:rPr lang="en-US" sz="1400" dirty="0">
+                <a:solidFill>
+                  <a:srgbClr val="8B98A5"/>
+                </a:solidFill>
+                <a:latin typeface="Calibri" pitchFamily="34" charset="0"/>
+                <a:ea typeface="Calibri" pitchFamily="34" charset="-122"/>
+                <a:cs typeface="Calibri" pitchFamily="34" charset="-120"/>
+              </a:rPr>
+              <a:t>Limits: Go-Back-N wastes bandwidth and suffers under reordering; C tests use an emulated path; the tabular agent did not beat AIMD in C.</a:t>
+            </a:r>
+            <a:endParaRPr lang="en-US" sz="1400" dirty="0"/>
           </a:p>
         </p:txBody>
       </p:sp>
@@ -10429,6 +11776,155 @@
         </p:nvSpPr>
         <p:spPr>
           <a:xfrm>
+            <a:off x="731520" y="2103120"/>
+            <a:ext cx="10058400" cy="1097280"/>
+          </a:xfrm>
+          <a:prstGeom prst="rect">
+            <a:avLst/>
+          </a:prstGeom>
+          <a:noFill/>
+          <a:ln/>
+        </p:spPr>
+        <p:txBody>
+          <a:bodyPr wrap="square" lIns="0" tIns="0" rIns="0" bIns="0" rtlCol="0" anchor="ctr"/>
+          <a:lstStyle/>
+          <a:p>
+            <a:pPr indent="0" marL="0">
+              <a:buNone/>
+            </a:pPr>
+            <a:r>
+              <a:rPr lang="en-US" sz="6400" b="1" dirty="0">
+                <a:solidFill>
+                  <a:srgbClr val="39FF88"/>
+                </a:solidFill>
+                <a:latin typeface="Courier New" pitchFamily="34" charset="0"/>
+                <a:ea typeface="Courier New" pitchFamily="34" charset="-122"/>
+                <a:cs typeface="Courier New" pitchFamily="34" charset="-120"/>
+              </a:rPr>
+              <a:t>Thank you</a:t>
+            </a:r>
+            <a:endParaRPr lang="en-US" sz="6400" dirty="0"/>
+          </a:p>
+        </p:txBody>
+      </p:sp>
+      <p:sp>
+        <p:nvSpPr>
+          <p:cNvPr id="3" name="Text 1"/>
+          <p:cNvSpPr/>
+          <p:nvPr/>
+        </p:nvSpPr>
+        <p:spPr>
+          <a:xfrm>
+            <a:off x="731520" y="3474720"/>
+            <a:ext cx="10058400" cy="548640"/>
+          </a:xfrm>
+          <a:prstGeom prst="rect">
+            <a:avLst/>
+          </a:prstGeom>
+          <a:noFill/>
+          <a:ln/>
+        </p:spPr>
+        <p:txBody>
+          <a:bodyPr wrap="square" lIns="0" tIns="0" rIns="0" bIns="0" rtlCol="0" anchor="ctr"/>
+          <a:lstStyle/>
+          <a:p>
+            <a:pPr indent="0" marL="0">
+              <a:buNone/>
+            </a:pPr>
+            <a:r>
+              <a:rPr lang="en-US" sz="2600" dirty="0">
+                <a:solidFill>
+                  <a:srgbClr val="E6EDF3"/>
+                </a:solidFill>
+                <a:latin typeface="Courier New" pitchFamily="34" charset="0"/>
+                <a:ea typeface="Courier New" pitchFamily="34" charset="-122"/>
+                <a:cs typeface="Courier New" pitchFamily="34" charset="-120"/>
+              </a:rPr>
+              <a:t>github.com/Capsturrrr/rudp</a:t>
+            </a:r>
+            <a:endParaRPr lang="en-US" sz="2600" dirty="0"/>
+          </a:p>
+        </p:txBody>
+      </p:sp>
+      <p:sp>
+        <p:nvSpPr>
+          <p:cNvPr id="4" name="Text 2"/>
+          <p:cNvSpPr/>
+          <p:nvPr/>
+        </p:nvSpPr>
+        <p:spPr>
+          <a:xfrm>
+            <a:off x="731520" y="4206240"/>
+            <a:ext cx="10058400" cy="457200"/>
+          </a:xfrm>
+          <a:prstGeom prst="rect">
+            <a:avLst/>
+          </a:prstGeom>
+          <a:noFill/>
+          <a:ln/>
+        </p:spPr>
+        <p:txBody>
+          <a:bodyPr wrap="square" lIns="0" tIns="0" rIns="0" bIns="0" rtlCol="0" anchor="ctr"/>
+          <a:lstStyle/>
+          <a:p>
+            <a:pPr indent="0" marL="0">
+              <a:buNone/>
+            </a:pPr>
+            <a:r>
+              <a:rPr lang="en-US" sz="1800" dirty="0">
+                <a:solidFill>
+                  <a:srgbClr val="8B98A5"/>
+                </a:solidFill>
+                <a:latin typeface="Calibri" pitchFamily="34" charset="0"/>
+                <a:ea typeface="Calibri" pitchFamily="34" charset="-122"/>
+                <a:cs typeface="Calibri" pitchFamily="34" charset="-120"/>
+              </a:rPr>
+              <a:t>Harshavardhan Mallela   Rohit Arya   Shloak Sinha</a:t>
+            </a:r>
+            <a:endParaRPr lang="en-US" sz="1800" dirty="0"/>
+          </a:p>
+        </p:txBody>
+      </p:sp>
+    </p:spTree>
+  </p:cSld>
+  <p:clrMapOvr>
+    <a:masterClrMapping/>
+  </p:clrMapOvr>
+</p:sld>
+</file>
+
+<file path=ppt/slides/slide25.xml><?xml version="1.0" encoding="utf-8"?>
+<p:sld xmlns:a="http://schemas.openxmlformats.org/drawingml/2006/main" xmlns:r="http://schemas.openxmlformats.org/officeDocument/2006/relationships" xmlns:p="http://schemas.openxmlformats.org/presentationml/2006/main">
+  <p:cSld name="Slide 25">
+    <p:bg>
+      <p:bgPr>
+        <a:solidFill>
+          <a:srgbClr val="0B0F14"/>
+        </a:solidFill>
+      </p:bgPr>
+    </p:bg>
+    <p:spTree>
+      <p:nvGrpSpPr>
+        <p:cNvPr id="1" name=""/>
+        <p:cNvGrpSpPr/>
+        <p:nvPr/>
+      </p:nvGrpSpPr>
+      <p:grpSpPr>
+        <a:xfrm>
+          <a:off x="0" y="0"/>
+          <a:ext cx="0" cy="0"/>
+          <a:chOff x="0" y="0"/>
+          <a:chExt cx="0" cy="0"/>
+        </a:xfrm>
+      </p:grpSpPr>
+      <p:sp>
+        <p:nvSpPr>
+          <p:cNvPr id="2" name="Text 0"/>
+          <p:cNvSpPr/>
+          <p:nvPr/>
+        </p:nvSpPr>
+        <p:spPr>
+          <a:xfrm>
             <a:off x="548640" y="320040"/>
             <a:ext cx="11064240" cy="731520"/>
           </a:xfrm>
@@ -10733,7 +12229,7 @@
                 <a:ea typeface="Courier New" pitchFamily="34" charset="-122"/>
                 <a:cs typeface="Courier New" pitchFamily="34" charset="-120"/>
               </a:rPr>
-              <a:t>3 / 23   Smart-RUDP</a:t>
+              <a:t>3 / 24   Smart-RUDP</a:t>
             </a:r>
             <a:endParaRPr lang="en-US" sz="1000" dirty="0"/>
           </a:p>
@@ -11127,7 +12623,7 @@
                 <a:ea typeface="Courier New" pitchFamily="34" charset="-122"/>
                 <a:cs typeface="Courier New" pitchFamily="34" charset="-120"/>
               </a:rPr>
-              <a:t>4 / 23   Smart-RUDP</a:t>
+              <a:t>4 / 24   Smart-RUDP</a:t>
             </a:r>
             <a:endParaRPr lang="en-US" sz="1000" dirty="0"/>
           </a:p>
@@ -11688,7 +13184,7 @@
                 <a:ea typeface="Courier New" pitchFamily="34" charset="-122"/>
                 <a:cs typeface="Courier New" pitchFamily="34" charset="-120"/>
               </a:rPr>
-              <a:t>5 / 23   Smart-RUDP</a:t>
+              <a:t>5 / 24   Smart-RUDP</a:t>
             </a:r>
             <a:endParaRPr lang="en-US" sz="1000" dirty="0"/>
           </a:p>
@@ -13127,7 +14623,7 @@
                 <a:ea typeface="Courier New" pitchFamily="34" charset="-122"/>
                 <a:cs typeface="Courier New" pitchFamily="34" charset="-120"/>
               </a:rPr>
-              <a:t>6 / 23   Smart-RUDP</a:t>
+              <a:t>6 / 24   Smart-RUDP</a:t>
             </a:r>
             <a:endParaRPr lang="en-US" sz="1000" dirty="0"/>
           </a:p>
@@ -14362,7 +15858,7 @@
                 <a:ea typeface="Courier New" pitchFamily="34" charset="-122"/>
                 <a:cs typeface="Courier New" pitchFamily="34" charset="-120"/>
               </a:rPr>
-              <a:t>7 / 23   Smart-RUDP</a:t>
+              <a:t>7 / 24   Smart-RUDP</a:t>
             </a:r>
             <a:endParaRPr lang="en-US" sz="1000" dirty="0"/>
           </a:p>
@@ -14805,7 +16301,7 @@
                 <a:ea typeface="Courier New" pitchFamily="34" charset="-122"/>
                 <a:cs typeface="Courier New" pitchFamily="34" charset="-120"/>
               </a:rPr>
-              <a:t>8 / 23   Smart-RUDP</a:t>
+              <a:t>8 / 24   Smart-RUDP</a:t>
             </a:r>
             <a:endParaRPr lang="en-US" sz="1000" dirty="0"/>
           </a:p>
@@ -15105,7 +16601,7 @@
                 <a:ea typeface="Courier New" pitchFamily="34" charset="-122"/>
                 <a:cs typeface="Courier New" pitchFamily="34" charset="-120"/>
               </a:rPr>
-              <a:t>9 / 23   Smart-RUDP</a:t>
+              <a:t>9 / 24   Smart-RUDP</a:t>
             </a:r>
             <a:endParaRPr lang="en-US" sz="1000" dirty="0"/>
           </a:p>

--- a/docs/RUDP_Presentation_with_notes.pptx
+++ b/docs/RUDP_Presentation_with_notes.pptx
@@ -30,9 +30,10 @@
     <p:sldId id="278" r:id="rId24"/>
     <p:sldId id="279" r:id="rId25"/>
     <p:sldId id="280" r:id="rId26"/>
+    <p:sldId id="281" r:id="rId27"/>
   </p:sldIdLst>
   <p:notesMasterIdLst>
-    <p:notesMasterId r:id="rId27"/>
+    <p:notesMasterId r:id="rId28"/>
   </p:notesMasterIdLst>
   <p:sldSz cx="12192000" cy="6858000"/>
   <p:notesSz cx="6858000" cy="12192000"/>
@@ -525,9 +526,10 @@
           <a:lstStyle/>
           <a:p>
             <a:r>
-              <a:t>SAY (0:20):</a:t>
-            </a:r>
-          </a:p>
+              <a:t>Time: 0:20</a:t>
+            </a:r>
+          </a:p>
+          <a:p/>
           <a:p>
             <a:r>
               <a:t>- Good morning ma'am. We are Harshavardhan, Rohit and Shloak.</a:t>
@@ -627,9 +629,10 @@
           <a:lstStyle/>
           <a:p>
             <a:r>
-              <a:t>SAY (0:40):</a:t>
-            </a:r>
-          </a:p>
+              <a:t>Time: 0:40</a:t>
+            </a:r>
+          </a:p>
+          <a:p/>
           <a:p>
             <a:r>
               <a:t>- 62 of 62 packets were delivered at every loss level from 0 to 40 percent.</a:t>
@@ -729,9 +732,10 @@
           <a:lstStyle/>
           <a:p>
             <a:r>
-              <a:t>SAY (0:40):</a:t>
-            </a:r>
-          </a:p>
+              <a:t>Time: 0:40</a:t>
+            </a:r>
+          </a:p>
+          <a:p/>
           <a:p>
             <a:r>
               <a:t>- Server stuck after a killed client: it hung 15.5 s; fix was to accept SYN in any state.</a:t>
@@ -841,9 +845,10 @@
           <a:lstStyle/>
           <a:p>
             <a:r>
-              <a:t>SAY (0:30):</a:t>
-            </a:r>
-          </a:p>
+              <a:t>Time: 0:30</a:t>
+            </a:r>
+          </a:p>
+          <a:p/>
           <a:p>
             <a:r>
               <a:t>- Jacobson and Karels 1988 is the origin of AIMD; Chiu and Jain 1989 explains why it converges fairly.</a:t>
@@ -953,9 +958,10 @@
           <a:lstStyle/>
           <a:p>
             <a:r>
-              <a:t>SAY (0:50):</a:t>
-            </a:r>
-          </a:p>
+              <a:t>Time: 0:50</a:t>
+            </a:r>
+          </a:p>
+          <a:p/>
           <a:p>
             <a:r>
               <a:t>- Four routers, OSPF area 0: R1, R2, R3 form a triangle and R4 is a branch.</a:t>
@@ -1060,9 +1066,10 @@
           <a:lstStyle/>
           <a:p>
             <a:r>
-              <a:t>SAY (0:40):</a:t>
-            </a:r>
-          </a:p>
+              <a:t>Time: 0:40</a:t>
+            </a:r>
+          </a:p>
+          <a:p/>
           <a:p>
             <a:r>
               <a:t>- Left: OSPF routes on R1 with the metrics. Middle: the link-failure test, 70 of 71 pings. Right: the ACL, where the student gets destination unreachable to staff but the server is still reachable (TTL 126).</a:t>
@@ -1157,9 +1164,10 @@
           <a:lstStyle/>
           <a:p>
             <a:r>
-              <a:t>SAY (0:50):</a:t>
-            </a:r>
-          </a:p>
+              <a:t>Time: 0:50</a:t>
+            </a:r>
+          </a:p>
+          <a:p/>
           <a:p>
             <a:r>
               <a:t>- Q-learning with 80 states (RTT ratio, loss fraction, window size), sampled once per RTT.</a:t>
@@ -1264,9 +1272,10 @@
           <a:lstStyle/>
           <a:p>
             <a:r>
-              <a:t>SAY (1:00):</a:t>
-            </a:r>
-          </a:p>
+              <a:t>Time: 1:00</a:t>
+            </a:r>
+          </a:p>
+          <a:p/>
           <a:p>
             <a:r>
               <a:t>- This is the agent itself. Left: rl_cc.h, 73 lines of C. The state is 80 buckets of RTT ratio, loss and window size.</a:t>
@@ -1386,9 +1395,10 @@
           <a:lstStyle/>
           <a:p>
             <a:r>
-              <a:t>SAY (0:50):</a:t>
-            </a:r>
-          </a:p>
+              <a:t>Time: 0:50</a:t>
+            </a:r>
+          </a:p>
+          <a:p/>
           <a:p>
             <a:r>
               <a:t>- Be honest: it did not beat AIMD. Plus 63 percent time on 5G-like, plus 10 percent on satellite, a tie on the lossy path.</a:t>
@@ -1498,9 +1508,10 @@
           <a:lstStyle/>
           <a:p>
             <a:r>
-              <a:t>SAY (0:40):</a:t>
-            </a:r>
-          </a:p>
+              <a:t>Time: 0:40</a:t>
+            </a:r>
+          </a:p>
+          <a:p/>
           <a:p>
             <a:r>
               <a:t>- We wrote a Lua dissector, named smartrudp, that decodes sequence, ack, flags, checksum and length.</a:t>
@@ -1610,9 +1621,10 @@
           <a:lstStyle/>
           <a:p>
             <a:r>
-              <a:t>SAY (0:50):</a:t>
-            </a:r>
-          </a:p>
+              <a:t>Time: 0:50</a:t>
+            </a:r>
+          </a:p>
+          <a:p/>
           <a:p>
             <a:r>
               <a:t>- Left: the first three packets, SYN, SYN-ACK and ACK, decoded by our dissector (filter frame.number &lt;= 3).</a:t>
@@ -1712,9 +1724,10 @@
           <a:lstStyle/>
           <a:p>
             <a:r>
-              <a:t>SAY (0:40):</a:t>
-            </a:r>
-          </a:p>
+              <a:t>Time: 0:40</a:t>
+            </a:r>
+          </a:p>
+          <a:p/>
           <a:p>
             <a:r>
               <a:t>- UDP is fast but gives no guarantees: packets can be lost, duplicated or reordered.</a:t>
@@ -1824,9 +1837,10 @@
           <a:lstStyle/>
           <a:p>
             <a:r>
-              <a:t>SAY (1:00):</a:t>
-            </a:r>
-          </a:p>
+              <a:t>Time: 1:00</a:t>
+            </a:r>
+          </a:p>
+          <a:p/>
           <a:p>
             <a:r>
               <a:t>- The protocol in use: each message is one numbered, checksummed RUDP segment, ACKed in order.</a:t>
@@ -1936,9 +1950,10 @@
           <a:lstStyle/>
           <a:p>
             <a:r>
-              <a:t>SAY (1:00):</a:t>
-            </a:r>
-          </a:p>
+              <a:t>Time: 1:00</a:t>
+            </a:r>
+          </a:p>
+          <a:p/>
           <a:p>
             <a:r>
               <a:t>- The abstract also promised TCP and plain UDP baselines, so we ran them on the same 48 unseen simulated paths.</a:t>
@@ -2058,9 +2073,10 @@
           <a:lstStyle/>
           <a:p>
             <a:r>
-              <a:t>SAY (1:00):</a:t>
-            </a:r>
-          </a:p>
+              <a:t>Time: 1:00</a:t>
+            </a:r>
+          </a:p>
+          <a:p/>
           <a:p>
             <a:r>
               <a:t>- We then put the neural agent into the C transport, the same code as Section 8, and tested it on the same three emulated paths with 15 runs each.</a:t>
@@ -2170,28 +2186,34 @@
           <a:lstStyle/>
           <a:p>
             <a:r>
-              <a:t>SAY (0:50):</a:t>
-            </a:r>
-          </a:p>
-          <a:p>
-            <a:r>
-              <a:t>- Learned: reliability is a set of simple rules working together; congestion control matters as much as retransmission; testing tools fail in surprising ways.</a:t>
-            </a:r>
-          </a:p>
-          <a:p>
-            <a:r>
-              <a:t>- Next: Selective Repeat with SACK, a stronger learning agent, adaptive timeout, and tests on a real multi-machine network.</a:t>
-            </a:r>
-          </a:p>
-          <a:p>
-            <a:r>
-              <a:t>- Name the limits before she does: Go-Back-N, loopback-only protocol tests, Smart-RUDP not beating AIMD.</a:t>
+              <a:t>Time: 0:50</a:t>
             </a:r>
           </a:p>
           <a:p/>
           <a:p>
             <a:r>
-              <a:t>IF ASKED: End on the limits and the fix order: SACK, adaptive timeout, real-network tests.</a:t>
+              <a:t>- We also tested two things people ask about. Fairness: two flows through one bottleneck. The neural agent is fair against itself and on short paths, but takes 74 percent against AIMD on the long 120 ms path, about like a fixed window.</a:t>
+            </a:r>
+          </a:p>
+          <a:p>
+            <a:r>
+              <a:t>- Ablation: we retrained the agent with one piece removed. Only the no-shrink mask matters; without it the agent is no better than AIMD. The other pieces showed no measurable value.</a:t>
+            </a:r>
+          </a:p>
+          <a:p>
+            <a:r>
+              <a:t>- The same recipe also gave very different results by seed, between 3.2 and 7.4 seconds, so we pick the seed on validation paths.</a:t>
+            </a:r>
+          </a:p>
+          <a:p>
+            <a:r>
+              <a:t>- While building the dashboard we found a retransmission storm in the web gateway and fixed it; there is also an adaptive timeout option now.</a:t>
+            </a:r>
+          </a:p>
+          <a:p/>
+          <a:p>
+            <a:r>
+              <a:t>IF ASKED: Is the agent fair? Mostly, but not on the long path against AIMD (74% share, Jain 0.82). Fairness was only tested in the simulator, not in C.</a:t>
             </a:r>
           </a:p>
         </p:txBody>
@@ -2277,18 +2299,29 @@
           <a:lstStyle/>
           <a:p>
             <a:r>
-              <a:t>SAY (0:15):</a:t>
-            </a:r>
-          </a:p>
-          <a:p>
-            <a:r>
-              <a:t>- Thank you. The code, report and captures are at github.com/Capsturrrr/rudp. Happy to take questions.</a:t>
+              <a:t>Time: 0:50</a:t>
             </a:r>
           </a:p>
           <a:p/>
           <a:p>
             <a:r>
-              <a:t>IF ASKED: Pause and smile; hand over to questions.</a:t>
+              <a:t>- Learned: reliability is a set of simple rules working together; congestion control matters as much as retransmission; testing tools fail in surprising ways.</a:t>
+            </a:r>
+          </a:p>
+          <a:p>
+            <a:r>
+              <a:t>- Next: Selective Repeat with SACK, a stronger learning agent, adaptive timeout, and tests on a real multi-machine network.</a:t>
+            </a:r>
+          </a:p>
+          <a:p>
+            <a:r>
+              <a:t>- Name the limits before she does: Go-Back-N, loopback-only protocol tests, Smart-RUDP not beating AIMD.</a:t>
+            </a:r>
+          </a:p>
+          <a:p/>
+          <a:p>
+            <a:r>
+              <a:t>IF ASKED: End on the limits and the fix order: SACK, adaptive timeout, real-network tests.</a:t>
             </a:r>
           </a:p>
         </p:txBody>
@@ -2374,18 +2407,19 @@
           <a:lstStyle/>
           <a:p>
             <a:r>
-              <a:t>SAY (-):</a:t>
-            </a:r>
-          </a:p>
-          <a:p>
-            <a:r>
-              <a:t>- Only if asked: the window starts at 1, adds 1 per ACK until the threshold 16, then 1/window per ACK. In the 62-packet run the final window was 18.71.</a:t>
+              <a:t>Time: 0:15</a:t>
             </a:r>
           </a:p>
           <a:p/>
           <a:p>
             <a:r>
-              <a:t>IF ASKED: Use this slide to answer 'show me congestion avoidance'.</a:t>
+              <a:t>- Thank you. The code, report and captures are at github.com/Capsturrrr/rudp. Happy to take questions.</a:t>
+            </a:r>
+          </a:p>
+          <a:p/>
+          <a:p>
+            <a:r>
+              <a:t>IF ASKED: Pause and smile; hand over to questions.</a:t>
             </a:r>
           </a:p>
         </p:txBody>
@@ -2408,6 +2442,104 @@
             <a:fld id="{F7021451-1387-4CA6-816F-3879F97B5CBC}" type="slidenum">
               <a:rPr lang="en-US"/>
               <a:t>25</a:t>
+            </a:fld>
+            <a:endParaRPr lang="en-US"/>
+          </a:p>
+        </p:txBody>
+      </p:sp>
+    </p:spTree>
+    <p:extLst>
+      <p:ext uri="{BB962C8B-B14F-4D97-AF65-F5344CB8AC3E}">
+        <p14:creationId xmlns:p14="http://schemas.microsoft.com/office/powerpoint/2010/main" val="1024086991"/>
+      </p:ext>
+    </p:extLst>
+  </p:cSld>
+  <p:clrMapOvr>
+    <a:masterClrMapping/>
+  </p:clrMapOvr>
+</p:notes>
+</file>
+
+<file path=ppt/notesSlides/notesSlide26.xml><?xml version="1.0" encoding="utf-8"?>
+<p:notes xmlns:a="http://schemas.openxmlformats.org/drawingml/2006/main" xmlns:r="http://schemas.openxmlformats.org/officeDocument/2006/relationships" xmlns:p="http://schemas.openxmlformats.org/presentationml/2006/main">
+  <p:cSld>
+    <p:spTree>
+      <p:nvGrpSpPr>
+        <p:cNvPr id="1" name=""/>
+        <p:cNvGrpSpPr/>
+        <p:nvPr/>
+      </p:nvGrpSpPr>
+      <p:grpSpPr>
+        <a:xfrm>
+          <a:off x="0" y="0"/>
+          <a:ext cx="0" cy="0"/>
+          <a:chOff x="0" y="0"/>
+          <a:chExt cx="0" cy="0"/>
+        </a:xfrm>
+      </p:grpSpPr>
+      <p:sp>
+        <p:nvSpPr>
+          <p:cNvPr id="2" name="Slide Image Placeholder 1"/>
+          <p:cNvSpPr>
+            <a:spLocks noGrp="1" noRot="1" noChangeAspect="1"/>
+          </p:cNvSpPr>
+          <p:nvPr>
+            <p:ph type="sldImg"/>
+          </p:nvPr>
+        </p:nvSpPr>
+        <p:spPr/>
+      </p:sp>
+      <p:sp>
+        <p:nvSpPr>
+          <p:cNvPr id="3" name="Notes Placeholder 2"/>
+          <p:cNvSpPr>
+            <a:spLocks noGrp="1"/>
+          </p:cNvSpPr>
+          <p:nvPr>
+            <p:ph type="body" idx="1"/>
+          </p:nvPr>
+        </p:nvSpPr>
+        <p:spPr/>
+        <p:txBody>
+          <a:bodyPr/>
+          <a:lstStyle/>
+          <a:p>
+            <a:r>
+              <a:t>Time: -</a:t>
+            </a:r>
+          </a:p>
+          <a:p/>
+          <a:p>
+            <a:r>
+              <a:t>- Only if asked: the window starts at 1, adds 1 per ACK until the threshold 16, then 1/window per ACK. In the 62-packet run the final window was 18.71.</a:t>
+            </a:r>
+          </a:p>
+          <a:p/>
+          <a:p>
+            <a:r>
+              <a:t>IF ASKED: Use this slide to answer 'show me congestion avoidance'.</a:t>
+            </a:r>
+          </a:p>
+        </p:txBody>
+      </p:sp>
+      <p:sp>
+        <p:nvSpPr>
+          <p:cNvPr id="4" name="Slide Number Placeholder 3"/>
+          <p:cNvSpPr>
+            <a:spLocks noGrp="1"/>
+          </p:cNvSpPr>
+          <p:nvPr>
+            <p:ph type="sldNum" sz="quarter" idx="10"/>
+          </p:nvPr>
+        </p:nvSpPr>
+        <p:spPr/>
+        <p:txBody>
+          <a:bodyPr/>
+          <a:lstStyle/>
+          <a:p>
+            <a:fld id="{F7021451-1387-4CA6-816F-3879F97B5CBC}" type="slidenum">
+              <a:rPr lang="en-US"/>
+              <a:t>26</a:t>
             </a:fld>
             <a:endParaRPr lang="en-US"/>
           </a:p>
@@ -2471,9 +2603,10 @@
           <a:lstStyle/>
           <a:p>
             <a:r>
-              <a:t>SAY (0:50):</a:t>
-            </a:r>
-          </a:p>
+              <a:t>Time: 0:50</a:t>
+            </a:r>
+          </a:p>
+          <a:p/>
           <a:p>
             <a:r>
               <a:t>- The need: campus users send data to a server across a routed network. TCP is fixed in the kernel; UDP gives no guarantees.</a:t>
@@ -2578,9 +2711,10 @@
           <a:lstStyle/>
           <a:p>
             <a:r>
-              <a:t>SAY (0:40):</a:t>
-            </a:r>
-          </a:p>
+              <a:t>Time: 0:40</a:t>
+            </a:r>
+          </a:p>
+          <a:p/>
           <a:p>
             <a:r>
               <a:t>- Four pieces: handshake, reliability, flow control and congestion control.</a:t>
@@ -2680,9 +2814,10 @@
           <a:lstStyle/>
           <a:p>
             <a:r>
-              <a:t>SAY (0:40):</a:t>
-            </a:r>
-          </a:p>
+              <a:t>Time: 0:40</a:t>
+            </a:r>
+          </a:p>
+          <a:p/>
           <a:p>
             <a:r>
               <a:t>- 13-byte header: sequence 4, ack 4, flags 1, checksum 2, payload length 2.</a:t>
@@ -2787,9 +2922,10 @@
           <a:lstStyle/>
           <a:p>
             <a:r>
-              <a:t>SAY (0:50):</a:t>
-            </a:r>
-          </a:p>
+              <a:t>Time: 0:50</a:t>
+            </a:r>
+          </a:p>
+          <a:p/>
           <a:p>
             <a:r>
               <a:t>- Three-way handshake: SYN, SYN-ACK, ACK. Then data, up to a window of packets in flight.</a:t>
@@ -2894,9 +3030,10 @@
           <a:lstStyle/>
           <a:p>
             <a:r>
-              <a:t>SAY (0:50):</a:t>
-            </a:r>
-          </a:p>
+              <a:t>Time: 0:50</a:t>
+            </a:r>
+          </a:p>
+          <a:p/>
           <a:p>
             <a:r>
               <a:t>- The window is the number of packets in flight; it started fixed at 4 and is now driven by the congestion window.</a:t>
@@ -3001,9 +3138,10 @@
           <a:lstStyle/>
           <a:p>
             <a:r>
-              <a:t>SAY (0:50):</a:t>
-            </a:r>
-          </a:p>
+              <a:t>Time: 0:50</a:t>
+            </a:r>
+          </a:p>
+          <a:p/>
           <a:p>
             <a:r>
               <a:t>- Slow start: window grows by one per ACK until the threshold of 16. Then avoidance: plus 1/window per ACK.</a:t>
@@ -3108,9 +3246,10 @@
           <a:lstStyle/>
           <a:p>
             <a:r>
-              <a:t>SAY (0:40):</a:t>
-            </a:r>
-          </a:p>
+              <a:t>Time: 0:40</a:t>
+            </a:r>
+          </a:p>
+          <a:p/>
           <a:p>
             <a:r>
               <a:t>- Three tools: a loss simulator inside the code (used for the benchmark), Linux tc/netem injecting real loss on loopback, and Wireshark/tshark.</a:t>
@@ -3756,7 +3895,7 @@
                 <a:ea typeface="Courier New" pitchFamily="34" charset="-122"/>
                 <a:cs typeface="Courier New" pitchFamily="34" charset="-120"/>
               </a:rPr>
-              <a:t>10 / 24   Smart-RUDP</a:t>
+              <a:t>10 / 25   Smart-RUDP</a:t>
             </a:r>
             <a:endParaRPr lang="en-US" sz="1000" dirty="0"/>
           </a:p>
@@ -3953,7 +4092,7 @@
                 <a:ea typeface="Courier New" pitchFamily="34" charset="-122"/>
                 <a:cs typeface="Courier New" pitchFamily="34" charset="-120"/>
               </a:rPr>
-              <a:t>11 / 24   Smart-RUDP</a:t>
+              <a:t>11 / 25   Smart-RUDP</a:t>
             </a:r>
             <a:endParaRPr lang="en-US" sz="1000" dirty="0"/>
           </a:p>
@@ -4783,7 +4922,7 @@
                 <a:ea typeface="Courier New" pitchFamily="34" charset="-122"/>
                 <a:cs typeface="Courier New" pitchFamily="34" charset="-120"/>
               </a:rPr>
-              <a:t>12 / 24   Smart-RUDP</a:t>
+              <a:t>12 / 25   Smart-RUDP</a:t>
             </a:r>
             <a:endParaRPr lang="en-US" sz="1000" dirty="0"/>
           </a:p>
@@ -5080,7 +5219,7 @@
                 <a:ea typeface="Courier New" pitchFamily="34" charset="-122"/>
                 <a:cs typeface="Courier New" pitchFamily="34" charset="-120"/>
               </a:rPr>
-              <a:t>13 / 24   Smart-RUDP</a:t>
+              <a:t>13 / 25   Smart-RUDP</a:t>
             </a:r>
             <a:endParaRPr lang="en-US" sz="1000" dirty="0"/>
           </a:p>
@@ -5380,7 +5519,7 @@
                 <a:ea typeface="Courier New" pitchFamily="34" charset="-122"/>
                 <a:cs typeface="Courier New" pitchFamily="34" charset="-120"/>
               </a:rPr>
-              <a:t>14 / 24   Smart-RUDP</a:t>
+              <a:t>14 / 25   Smart-RUDP</a:t>
             </a:r>
             <a:endParaRPr lang="en-US" sz="1000" dirty="0"/>
           </a:p>
@@ -5764,7 +5903,7 @@
                 <a:ea typeface="Courier New" pitchFamily="34" charset="-122"/>
                 <a:cs typeface="Courier New" pitchFamily="34" charset="-120"/>
               </a:rPr>
-              <a:t>15 / 24   Smart-RUDP</a:t>
+              <a:t>15 / 25   Smart-RUDP</a:t>
             </a:r>
             <a:endParaRPr lang="en-US" sz="1000" dirty="0"/>
           </a:p>
@@ -6222,7 +6361,7 @@
                 <a:ea typeface="Courier New" pitchFamily="34" charset="-122"/>
                 <a:cs typeface="Courier New" pitchFamily="34" charset="-120"/>
               </a:rPr>
-              <a:t>16 / 24   Smart-RUDP</a:t>
+              <a:t>16 / 25   Smart-RUDP</a:t>
             </a:r>
             <a:endParaRPr lang="en-US" sz="1000" dirty="0"/>
           </a:p>
@@ -6907,7 +7046,7 @@
                 <a:ea typeface="Courier New" pitchFamily="34" charset="-122"/>
                 <a:cs typeface="Courier New" pitchFamily="34" charset="-120"/>
               </a:rPr>
-              <a:t>17 / 24   Smart-RUDP</a:t>
+              <a:t>17 / 25   Smart-RUDP</a:t>
             </a:r>
             <a:endParaRPr lang="en-US" sz="1000" dirty="0"/>
           </a:p>
@@ -7147,7 +7286,7 @@
                 <a:ea typeface="Courier New" pitchFamily="34" charset="-122"/>
                 <a:cs typeface="Courier New" pitchFamily="34" charset="-120"/>
               </a:rPr>
-              <a:t>18 / 24   Smart-RUDP</a:t>
+              <a:t>18 / 25   Smart-RUDP</a:t>
             </a:r>
             <a:endParaRPr lang="en-US" sz="1000" dirty="0"/>
           </a:p>
@@ -7387,7 +7526,7 @@
                 <a:ea typeface="Courier New" pitchFamily="34" charset="-122"/>
                 <a:cs typeface="Courier New" pitchFamily="34" charset="-120"/>
               </a:rPr>
-              <a:t>19 / 24   Smart-RUDP</a:t>
+              <a:t>19 / 25   Smart-RUDP</a:t>
             </a:r>
             <a:endParaRPr lang="en-US" sz="1000" dirty="0"/>
           </a:p>
@@ -7609,7 +7748,7 @@
                 <a:ea typeface="Courier New" pitchFamily="34" charset="-122"/>
                 <a:cs typeface="Courier New" pitchFamily="34" charset="-120"/>
               </a:rPr>
-              <a:t>2 / 24   Smart-RUDP</a:t>
+              <a:t>2 / 25   Smart-RUDP</a:t>
             </a:r>
             <a:endParaRPr lang="en-US" sz="1000" dirty="0"/>
           </a:p>
@@ -8003,7 +8142,7 @@
                 <a:ea typeface="Courier New" pitchFamily="34" charset="-122"/>
                 <a:cs typeface="Courier New" pitchFamily="34" charset="-120"/>
               </a:rPr>
-              <a:t>20 / 24   Smart-RUDP</a:t>
+              <a:t>20 / 25   Smart-RUDP</a:t>
             </a:r>
             <a:endParaRPr lang="en-US" sz="1000" dirty="0"/>
           </a:p>
@@ -8327,7 +8466,7 @@
                 <a:ea typeface="Courier New" pitchFamily="34" charset="-122"/>
                 <a:cs typeface="Courier New" pitchFamily="34" charset="-120"/>
               </a:rPr>
-              <a:t>21 / 24   Smart-RUDP</a:t>
+              <a:t>21 / 25   Smart-RUDP</a:t>
             </a:r>
             <a:endParaRPr lang="en-US" sz="1000" dirty="0"/>
           </a:p>
@@ -10034,7 +10173,7 @@
                 <a:ea typeface="Courier New" pitchFamily="34" charset="-122"/>
                 <a:cs typeface="Courier New" pitchFamily="34" charset="-120"/>
               </a:rPr>
-              <a:t>22 / 24   Smart-RUDP</a:t>
+              <a:t>22 / 25   Smart-RUDP</a:t>
             </a:r>
             <a:endParaRPr lang="en-US" sz="1000" dirty="0"/>
           </a:p>
@@ -11378,7 +11517,7 @@
                 <a:ea typeface="Courier New" pitchFamily="34" charset="-122"/>
                 <a:cs typeface="Courier New" pitchFamily="34" charset="-120"/>
               </a:rPr>
-              <a:t>Learnings and future work</a:t>
+              <a:t>Fairness, ablations, chat fixes</a:t>
             </a:r>
             <a:endParaRPr lang="en-US" sz="3000" dirty="0"/>
           </a:p>
@@ -11417,47 +11556,1289 @@
                 <a:ea typeface="Courier New" pitchFamily="34" charset="-122"/>
                 <a:cs typeface="Courier New" pitchFamily="34" charset="-120"/>
               </a:rPr>
-              <a:t>23 / 24   Smart-RUDP</a:t>
+              <a:t>23 / 25   Smart-RUDP</a:t>
             </a:r>
             <a:endParaRPr lang="en-US" sz="1000" dirty="0"/>
           </a:p>
         </p:txBody>
       </p:sp>
-      <p:sp>
-        <p:nvSpPr>
-          <p:cNvPr id="4" name="Shape 2"/>
+      <p:graphicFrame>
+        <p:nvGraphicFramePr>
+          <p:cNvPr id="24" name="Table 0"/>
+          <p:cNvGraphicFramePr>
+            <a:graphicFrameLocks noGrp="1"/>
+          </p:cNvGraphicFramePr>
+          <p:nvPr>
+            <p:extLst>
+              <p:ext uri="{D42A27DB-BD31-4B8C-83A1-F6EECF244321}">
+                <p14:modId xmlns:p14="http://schemas.microsoft.com/office/powerpoint/2010/main" val="1579011935"/>
+              </p:ext>
+            </p:extLst>
+          </p:nvPr>
+        </p:nvGraphicFramePr>
+        <p:xfrm>
+          <a:off x="548640" y="1188720"/>
+          <a:ext cx="5852160" cy="914400"/>
+        </p:xfrm>
+        <a:graphic>
+          <a:graphicData uri="http://schemas.openxmlformats.org/drawingml/2006/table">
+            <a:tbl>
+              <a:tblPr/>
+              <a:tblGrid>
+                <a:gridCol w="3291840"/>
+                <a:gridCol w="1280160"/>
+                <a:gridCol w="1280160"/>
+              </a:tblGrid>
+              <a:tr h="384048">
+                <a:tc>
+                  <a:txBody>
+                    <a:bodyPr/>
+                    <a:lstStyle/>
+                    <a:p>
+                      <a:pPr indent="0" marL="0">
+                        <a:buNone/>
+                      </a:pPr>
+                      <a:r>
+                        <a:rPr lang="en-US" sz="1300" b="1" dirty="0">
+                          <a:solidFill>
+                            <a:srgbClr val="0B0F14"/>
+                          </a:solidFill>
+                          <a:latin typeface="Courier New" pitchFamily="34" charset="0"/>
+                          <a:ea typeface="Courier New" pitchFamily="34" charset="-122"/>
+                          <a:cs typeface="Courier New" pitchFamily="34" charset="-120"/>
+                        </a:rPr>
+                        <a:t>Two flows, one bottleneck</a:t>
+                      </a:r>
+                      <a:endParaRPr lang="en-US" sz="1300" dirty="0">
+                        <a:latin typeface="Courier New" charset="0"/>
+                        <a:ea typeface="Courier New" charset="0"/>
+                        <a:cs typeface="Courier New" charset="0"/>
+                      </a:endParaRPr>
+                    </a:p>
+                  </a:txBody>
+                  <a:tcPr marL="91440" marR="91440" marT="45720" marB="45720">
+                    <a:lnL w="12700" cap="flat" cmpd="sng" algn="ctr">
+                      <a:solidFill>
+                        <a:srgbClr val="2A3441"/>
+                      </a:solidFill>
+                      <a:prstDash val="solid"/>
+                      <a:round/>
+                      <a:headEnd type="none" w="med" len="med"/>
+                      <a:tailEnd type="none" w="med" len="med"/>
+                    </a:lnL>
+                    <a:lnR w="12700" cap="flat" cmpd="sng" algn="ctr">
+                      <a:solidFill>
+                        <a:srgbClr val="2A3441"/>
+                      </a:solidFill>
+                      <a:prstDash val="solid"/>
+                      <a:round/>
+                      <a:headEnd type="none" w="med" len="med"/>
+                      <a:tailEnd type="none" w="med" len="med"/>
+                    </a:lnR>
+                    <a:lnT w="12700" cap="flat" cmpd="sng" algn="ctr">
+                      <a:solidFill>
+                        <a:srgbClr val="2A3441"/>
+                      </a:solidFill>
+                      <a:prstDash val="solid"/>
+                      <a:round/>
+                      <a:headEnd type="none" w="med" len="med"/>
+                      <a:tailEnd type="none" w="med" len="med"/>
+                    </a:lnT>
+                    <a:lnB w="12700" cap="flat" cmpd="sng" algn="ctr">
+                      <a:solidFill>
+                        <a:srgbClr val="2A3441"/>
+                      </a:solidFill>
+                      <a:prstDash val="solid"/>
+                      <a:round/>
+                      <a:headEnd type="none" w="med" len="med"/>
+                      <a:tailEnd type="none" w="med" len="med"/>
+                    </a:lnB>
+                    <a:solidFill>
+                      <a:srgbClr val="39FF88"/>
+                    </a:solidFill>
+                  </a:tcPr>
+                </a:tc>
+                <a:tc>
+                  <a:txBody>
+                    <a:bodyPr/>
+                    <a:lstStyle/>
+                    <a:p>
+                      <a:pPr indent="0" marL="0">
+                        <a:buNone/>
+                      </a:pPr>
+                      <a:r>
+                        <a:rPr lang="en-US" sz="1300" b="1" dirty="0">
+                          <a:solidFill>
+                            <a:srgbClr val="0B0F14"/>
+                          </a:solidFill>
+                          <a:latin typeface="Courier New" pitchFamily="34" charset="0"/>
+                          <a:ea typeface="Courier New" pitchFamily="34" charset="-122"/>
+                          <a:cs typeface="Courier New" pitchFamily="34" charset="-120"/>
+                        </a:rPr>
+                        <a:t>Share of A</a:t>
+                      </a:r>
+                      <a:endParaRPr lang="en-US" sz="1300" dirty="0">
+                        <a:latin typeface="Courier New" charset="0"/>
+                        <a:ea typeface="Courier New" charset="0"/>
+                        <a:cs typeface="Courier New" charset="0"/>
+                      </a:endParaRPr>
+                    </a:p>
+                  </a:txBody>
+                  <a:tcPr marL="91440" marR="91440" marT="45720" marB="45720">
+                    <a:lnL w="12700" cap="flat" cmpd="sng" algn="ctr">
+                      <a:solidFill>
+                        <a:srgbClr val="2A3441"/>
+                      </a:solidFill>
+                      <a:prstDash val="solid"/>
+                      <a:round/>
+                      <a:headEnd type="none" w="med" len="med"/>
+                      <a:tailEnd type="none" w="med" len="med"/>
+                    </a:lnL>
+                    <a:lnR w="12700" cap="flat" cmpd="sng" algn="ctr">
+                      <a:solidFill>
+                        <a:srgbClr val="2A3441"/>
+                      </a:solidFill>
+                      <a:prstDash val="solid"/>
+                      <a:round/>
+                      <a:headEnd type="none" w="med" len="med"/>
+                      <a:tailEnd type="none" w="med" len="med"/>
+                    </a:lnR>
+                    <a:lnT w="12700" cap="flat" cmpd="sng" algn="ctr">
+                      <a:solidFill>
+                        <a:srgbClr val="2A3441"/>
+                      </a:solidFill>
+                      <a:prstDash val="solid"/>
+                      <a:round/>
+                      <a:headEnd type="none" w="med" len="med"/>
+                      <a:tailEnd type="none" w="med" len="med"/>
+                    </a:lnT>
+                    <a:lnB w="12700" cap="flat" cmpd="sng" algn="ctr">
+                      <a:solidFill>
+                        <a:srgbClr val="2A3441"/>
+                      </a:solidFill>
+                      <a:prstDash val="solid"/>
+                      <a:round/>
+                      <a:headEnd type="none" w="med" len="med"/>
+                      <a:tailEnd type="none" w="med" len="med"/>
+                    </a:lnB>
+                    <a:solidFill>
+                      <a:srgbClr val="39FF88"/>
+                    </a:solidFill>
+                  </a:tcPr>
+                </a:tc>
+                <a:tc>
+                  <a:txBody>
+                    <a:bodyPr/>
+                    <a:lstStyle/>
+                    <a:p>
+                      <a:pPr indent="0" marL="0">
+                        <a:buNone/>
+                      </a:pPr>
+                      <a:r>
+                        <a:rPr lang="en-US" sz="1300" b="1" dirty="0">
+                          <a:solidFill>
+                            <a:srgbClr val="0B0F14"/>
+                          </a:solidFill>
+                          <a:latin typeface="Courier New" pitchFamily="34" charset="0"/>
+                          <a:ea typeface="Courier New" pitchFamily="34" charset="-122"/>
+                          <a:cs typeface="Courier New" pitchFamily="34" charset="-120"/>
+                        </a:rPr>
+                        <a:t>Jain</a:t>
+                      </a:r>
+                      <a:endParaRPr lang="en-US" sz="1300" dirty="0">
+                        <a:latin typeface="Courier New" charset="0"/>
+                        <a:ea typeface="Courier New" charset="0"/>
+                        <a:cs typeface="Courier New" charset="0"/>
+                      </a:endParaRPr>
+                    </a:p>
+                  </a:txBody>
+                  <a:tcPr marL="91440" marR="91440" marT="45720" marB="45720">
+                    <a:lnL w="12700" cap="flat" cmpd="sng" algn="ctr">
+                      <a:solidFill>
+                        <a:srgbClr val="2A3441"/>
+                      </a:solidFill>
+                      <a:prstDash val="solid"/>
+                      <a:round/>
+                      <a:headEnd type="none" w="med" len="med"/>
+                      <a:tailEnd type="none" w="med" len="med"/>
+                    </a:lnL>
+                    <a:lnR w="12700" cap="flat" cmpd="sng" algn="ctr">
+                      <a:solidFill>
+                        <a:srgbClr val="2A3441"/>
+                      </a:solidFill>
+                      <a:prstDash val="solid"/>
+                      <a:round/>
+                      <a:headEnd type="none" w="med" len="med"/>
+                      <a:tailEnd type="none" w="med" len="med"/>
+                    </a:lnR>
+                    <a:lnT w="12700" cap="flat" cmpd="sng" algn="ctr">
+                      <a:solidFill>
+                        <a:srgbClr val="2A3441"/>
+                      </a:solidFill>
+                      <a:prstDash val="solid"/>
+                      <a:round/>
+                      <a:headEnd type="none" w="med" len="med"/>
+                      <a:tailEnd type="none" w="med" len="med"/>
+                    </a:lnT>
+                    <a:lnB w="12700" cap="flat" cmpd="sng" algn="ctr">
+                      <a:solidFill>
+                        <a:srgbClr val="2A3441"/>
+                      </a:solidFill>
+                      <a:prstDash val="solid"/>
+                      <a:round/>
+                      <a:headEnd type="none" w="med" len="med"/>
+                      <a:tailEnd type="none" w="med" len="med"/>
+                    </a:lnB>
+                    <a:solidFill>
+                      <a:srgbClr val="39FF88"/>
+                    </a:solidFill>
+                  </a:tcPr>
+                </a:tc>
+              </a:tr>
+              <a:tr h="384048">
+                <a:tc>
+                  <a:txBody>
+                    <a:bodyPr/>
+                    <a:lstStyle/>
+                    <a:p>
+                      <a:pPr indent="0" marL="0">
+                        <a:buNone/>
+                      </a:pPr>
+                      <a:r>
+                        <a:rPr lang="en-US" sz="1300" dirty="0">
+                          <a:solidFill>
+                            <a:srgbClr val="E6EDF3"/>
+                          </a:solidFill>
+                          <a:latin typeface="Calibri" pitchFamily="34" charset="0"/>
+                          <a:ea typeface="Calibri" pitchFamily="34" charset="-122"/>
+                          <a:cs typeface="Calibri" pitchFamily="34" charset="-120"/>
+                        </a:rPr>
+                        <a:t>AIMD vs AIMD (long path)</a:t>
+                      </a:r>
+                      <a:endParaRPr lang="en-US" sz="1300" dirty="0">
+                        <a:latin typeface="Calibri" charset="0"/>
+                        <a:ea typeface="Calibri" charset="0"/>
+                        <a:cs typeface="Calibri" charset="0"/>
+                      </a:endParaRPr>
+                    </a:p>
+                  </a:txBody>
+                  <a:tcPr marL="91440" marR="91440" marT="45720" marB="45720">
+                    <a:lnL w="12700" cap="flat" cmpd="sng" algn="ctr">
+                      <a:solidFill>
+                        <a:srgbClr val="2A3441"/>
+                      </a:solidFill>
+                      <a:prstDash val="solid"/>
+                      <a:round/>
+                      <a:headEnd type="none" w="med" len="med"/>
+                      <a:tailEnd type="none" w="med" len="med"/>
+                    </a:lnL>
+                    <a:lnR w="12700" cap="flat" cmpd="sng" algn="ctr">
+                      <a:solidFill>
+                        <a:srgbClr val="2A3441"/>
+                      </a:solidFill>
+                      <a:prstDash val="solid"/>
+                      <a:round/>
+                      <a:headEnd type="none" w="med" len="med"/>
+                      <a:tailEnd type="none" w="med" len="med"/>
+                    </a:lnR>
+                    <a:lnT w="12700" cap="flat" cmpd="sng" algn="ctr">
+                      <a:solidFill>
+                        <a:srgbClr val="2A3441"/>
+                      </a:solidFill>
+                      <a:prstDash val="solid"/>
+                      <a:round/>
+                      <a:headEnd type="none" w="med" len="med"/>
+                      <a:tailEnd type="none" w="med" len="med"/>
+                    </a:lnT>
+                    <a:lnB w="12700" cap="flat" cmpd="sng" algn="ctr">
+                      <a:solidFill>
+                        <a:srgbClr val="2A3441"/>
+                      </a:solidFill>
+                      <a:prstDash val="solid"/>
+                      <a:round/>
+                      <a:headEnd type="none" w="med" len="med"/>
+                      <a:tailEnd type="none" w="med" len="med"/>
+                    </a:lnB>
+                    <a:solidFill>
+                      <a:srgbClr val="141B24"/>
+                    </a:solidFill>
+                  </a:tcPr>
+                </a:tc>
+                <a:tc>
+                  <a:txBody>
+                    <a:bodyPr/>
+                    <a:lstStyle/>
+                    <a:p>
+                      <a:pPr indent="0" marL="0">
+                        <a:buNone/>
+                      </a:pPr>
+                      <a:r>
+                        <a:rPr lang="en-US" sz="1300" dirty="0">
+                          <a:solidFill>
+                            <a:srgbClr val="E6EDF3"/>
+                          </a:solidFill>
+                          <a:latin typeface="Calibri" pitchFamily="34" charset="0"/>
+                          <a:ea typeface="Calibri" pitchFamily="34" charset="-122"/>
+                          <a:cs typeface="Calibri" pitchFamily="34" charset="-120"/>
+                        </a:rPr>
+                        <a:t>51%</a:t>
+                      </a:r>
+                      <a:endParaRPr lang="en-US" sz="1300" dirty="0">
+                        <a:latin typeface="Calibri" charset="0"/>
+                        <a:ea typeface="Calibri" charset="0"/>
+                        <a:cs typeface="Calibri" charset="0"/>
+                      </a:endParaRPr>
+                    </a:p>
+                  </a:txBody>
+                  <a:tcPr marL="91440" marR="91440" marT="45720" marB="45720">
+                    <a:lnL w="12700" cap="flat" cmpd="sng" algn="ctr">
+                      <a:solidFill>
+                        <a:srgbClr val="2A3441"/>
+                      </a:solidFill>
+                      <a:prstDash val="solid"/>
+                      <a:round/>
+                      <a:headEnd type="none" w="med" len="med"/>
+                      <a:tailEnd type="none" w="med" len="med"/>
+                    </a:lnL>
+                    <a:lnR w="12700" cap="flat" cmpd="sng" algn="ctr">
+                      <a:solidFill>
+                        <a:srgbClr val="2A3441"/>
+                      </a:solidFill>
+                      <a:prstDash val="solid"/>
+                      <a:round/>
+                      <a:headEnd type="none" w="med" len="med"/>
+                      <a:tailEnd type="none" w="med" len="med"/>
+                    </a:lnR>
+                    <a:lnT w="12700" cap="flat" cmpd="sng" algn="ctr">
+                      <a:solidFill>
+                        <a:srgbClr val="2A3441"/>
+                      </a:solidFill>
+                      <a:prstDash val="solid"/>
+                      <a:round/>
+                      <a:headEnd type="none" w="med" len="med"/>
+                      <a:tailEnd type="none" w="med" len="med"/>
+                    </a:lnT>
+                    <a:lnB w="12700" cap="flat" cmpd="sng" algn="ctr">
+                      <a:solidFill>
+                        <a:srgbClr val="2A3441"/>
+                      </a:solidFill>
+                      <a:prstDash val="solid"/>
+                      <a:round/>
+                      <a:headEnd type="none" w="med" len="med"/>
+                      <a:tailEnd type="none" w="med" len="med"/>
+                    </a:lnB>
+                    <a:solidFill>
+                      <a:srgbClr val="141B24"/>
+                    </a:solidFill>
+                  </a:tcPr>
+                </a:tc>
+                <a:tc>
+                  <a:txBody>
+                    <a:bodyPr/>
+                    <a:lstStyle/>
+                    <a:p>
+                      <a:pPr indent="0" marL="0">
+                        <a:buNone/>
+                      </a:pPr>
+                      <a:r>
+                        <a:rPr lang="en-US" sz="1300" dirty="0">
+                          <a:solidFill>
+                            <a:srgbClr val="E6EDF3"/>
+                          </a:solidFill>
+                          <a:latin typeface="Calibri" pitchFamily="34" charset="0"/>
+                          <a:ea typeface="Calibri" pitchFamily="34" charset="-122"/>
+                          <a:cs typeface="Calibri" pitchFamily="34" charset="-120"/>
+                        </a:rPr>
+                        <a:t>0.999</a:t>
+                      </a:r>
+                      <a:endParaRPr lang="en-US" sz="1300" dirty="0">
+                        <a:latin typeface="Calibri" charset="0"/>
+                        <a:ea typeface="Calibri" charset="0"/>
+                        <a:cs typeface="Calibri" charset="0"/>
+                      </a:endParaRPr>
+                    </a:p>
+                  </a:txBody>
+                  <a:tcPr marL="91440" marR="91440" marT="45720" marB="45720">
+                    <a:lnL w="12700" cap="flat" cmpd="sng" algn="ctr">
+                      <a:solidFill>
+                        <a:srgbClr val="2A3441"/>
+                      </a:solidFill>
+                      <a:prstDash val="solid"/>
+                      <a:round/>
+                      <a:headEnd type="none" w="med" len="med"/>
+                      <a:tailEnd type="none" w="med" len="med"/>
+                    </a:lnL>
+                    <a:lnR w="12700" cap="flat" cmpd="sng" algn="ctr">
+                      <a:solidFill>
+                        <a:srgbClr val="2A3441"/>
+                      </a:solidFill>
+                      <a:prstDash val="solid"/>
+                      <a:round/>
+                      <a:headEnd type="none" w="med" len="med"/>
+                      <a:tailEnd type="none" w="med" len="med"/>
+                    </a:lnR>
+                    <a:lnT w="12700" cap="flat" cmpd="sng" algn="ctr">
+                      <a:solidFill>
+                        <a:srgbClr val="2A3441"/>
+                      </a:solidFill>
+                      <a:prstDash val="solid"/>
+                      <a:round/>
+                      <a:headEnd type="none" w="med" len="med"/>
+                      <a:tailEnd type="none" w="med" len="med"/>
+                    </a:lnT>
+                    <a:lnB w="12700" cap="flat" cmpd="sng" algn="ctr">
+                      <a:solidFill>
+                        <a:srgbClr val="2A3441"/>
+                      </a:solidFill>
+                      <a:prstDash val="solid"/>
+                      <a:round/>
+                      <a:headEnd type="none" w="med" len="med"/>
+                      <a:tailEnd type="none" w="med" len="med"/>
+                    </a:lnB>
+                    <a:solidFill>
+                      <a:srgbClr val="141B24"/>
+                    </a:solidFill>
+                  </a:tcPr>
+                </a:tc>
+              </a:tr>
+              <a:tr h="384048">
+                <a:tc>
+                  <a:txBody>
+                    <a:bodyPr/>
+                    <a:lstStyle/>
+                    <a:p>
+                      <a:pPr indent="0" marL="0">
+                        <a:buNone/>
+                      </a:pPr>
+                      <a:r>
+                        <a:rPr lang="en-US" sz="1300" dirty="0">
+                          <a:solidFill>
+                            <a:srgbClr val="E6EDF3"/>
+                          </a:solidFill>
+                          <a:latin typeface="Calibri" pitchFamily="34" charset="0"/>
+                          <a:ea typeface="Calibri" pitchFamily="34" charset="-122"/>
+                          <a:cs typeface="Calibri" pitchFamily="34" charset="-120"/>
+                        </a:rPr>
+                        <a:t>Deep vs deep (long path)</a:t>
+                      </a:r>
+                      <a:endParaRPr lang="en-US" sz="1300" dirty="0">
+                        <a:latin typeface="Calibri" charset="0"/>
+                        <a:ea typeface="Calibri" charset="0"/>
+                        <a:cs typeface="Calibri" charset="0"/>
+                      </a:endParaRPr>
+                    </a:p>
+                  </a:txBody>
+                  <a:tcPr marL="91440" marR="91440" marT="45720" marB="45720">
+                    <a:lnL w="12700" cap="flat" cmpd="sng" algn="ctr">
+                      <a:solidFill>
+                        <a:srgbClr val="2A3441"/>
+                      </a:solidFill>
+                      <a:prstDash val="solid"/>
+                      <a:round/>
+                      <a:headEnd type="none" w="med" len="med"/>
+                      <a:tailEnd type="none" w="med" len="med"/>
+                    </a:lnL>
+                    <a:lnR w="12700" cap="flat" cmpd="sng" algn="ctr">
+                      <a:solidFill>
+                        <a:srgbClr val="2A3441"/>
+                      </a:solidFill>
+                      <a:prstDash val="solid"/>
+                      <a:round/>
+                      <a:headEnd type="none" w="med" len="med"/>
+                      <a:tailEnd type="none" w="med" len="med"/>
+                    </a:lnR>
+                    <a:lnT w="12700" cap="flat" cmpd="sng" algn="ctr">
+                      <a:solidFill>
+                        <a:srgbClr val="2A3441"/>
+                      </a:solidFill>
+                      <a:prstDash val="solid"/>
+                      <a:round/>
+                      <a:headEnd type="none" w="med" len="med"/>
+                      <a:tailEnd type="none" w="med" len="med"/>
+                    </a:lnT>
+                    <a:lnB w="12700" cap="flat" cmpd="sng" algn="ctr">
+                      <a:solidFill>
+                        <a:srgbClr val="2A3441"/>
+                      </a:solidFill>
+                      <a:prstDash val="solid"/>
+                      <a:round/>
+                      <a:headEnd type="none" w="med" len="med"/>
+                      <a:tailEnd type="none" w="med" len="med"/>
+                    </a:lnB>
+                    <a:solidFill>
+                      <a:srgbClr val="141B24"/>
+                    </a:solidFill>
+                  </a:tcPr>
+                </a:tc>
+                <a:tc>
+                  <a:txBody>
+                    <a:bodyPr/>
+                    <a:lstStyle/>
+                    <a:p>
+                      <a:pPr indent="0" marL="0">
+                        <a:buNone/>
+                      </a:pPr>
+                      <a:r>
+                        <a:rPr lang="en-US" sz="1300" dirty="0">
+                          <a:solidFill>
+                            <a:srgbClr val="E6EDF3"/>
+                          </a:solidFill>
+                          <a:latin typeface="Calibri" pitchFamily="34" charset="0"/>
+                          <a:ea typeface="Calibri" pitchFamily="34" charset="-122"/>
+                          <a:cs typeface="Calibri" pitchFamily="34" charset="-120"/>
+                        </a:rPr>
+                        <a:t>59%</a:t>
+                      </a:r>
+                      <a:endParaRPr lang="en-US" sz="1300" dirty="0">
+                        <a:latin typeface="Calibri" charset="0"/>
+                        <a:ea typeface="Calibri" charset="0"/>
+                        <a:cs typeface="Calibri" charset="0"/>
+                      </a:endParaRPr>
+                    </a:p>
+                  </a:txBody>
+                  <a:tcPr marL="91440" marR="91440" marT="45720" marB="45720">
+                    <a:lnL w="12700" cap="flat" cmpd="sng" algn="ctr">
+                      <a:solidFill>
+                        <a:srgbClr val="2A3441"/>
+                      </a:solidFill>
+                      <a:prstDash val="solid"/>
+                      <a:round/>
+                      <a:headEnd type="none" w="med" len="med"/>
+                      <a:tailEnd type="none" w="med" len="med"/>
+                    </a:lnL>
+                    <a:lnR w="12700" cap="flat" cmpd="sng" algn="ctr">
+                      <a:solidFill>
+                        <a:srgbClr val="2A3441"/>
+                      </a:solidFill>
+                      <a:prstDash val="solid"/>
+                      <a:round/>
+                      <a:headEnd type="none" w="med" len="med"/>
+                      <a:tailEnd type="none" w="med" len="med"/>
+                    </a:lnR>
+                    <a:lnT w="12700" cap="flat" cmpd="sng" algn="ctr">
+                      <a:solidFill>
+                        <a:srgbClr val="2A3441"/>
+                      </a:solidFill>
+                      <a:prstDash val="solid"/>
+                      <a:round/>
+                      <a:headEnd type="none" w="med" len="med"/>
+                      <a:tailEnd type="none" w="med" len="med"/>
+                    </a:lnT>
+                    <a:lnB w="12700" cap="flat" cmpd="sng" algn="ctr">
+                      <a:solidFill>
+                        <a:srgbClr val="2A3441"/>
+                      </a:solidFill>
+                      <a:prstDash val="solid"/>
+                      <a:round/>
+                      <a:headEnd type="none" w="med" len="med"/>
+                      <a:tailEnd type="none" w="med" len="med"/>
+                    </a:lnB>
+                    <a:solidFill>
+                      <a:srgbClr val="141B24"/>
+                    </a:solidFill>
+                  </a:tcPr>
+                </a:tc>
+                <a:tc>
+                  <a:txBody>
+                    <a:bodyPr/>
+                    <a:lstStyle/>
+                    <a:p>
+                      <a:pPr indent="0" marL="0">
+                        <a:buNone/>
+                      </a:pPr>
+                      <a:r>
+                        <a:rPr lang="en-US" sz="1300" dirty="0">
+                          <a:solidFill>
+                            <a:srgbClr val="E6EDF3"/>
+                          </a:solidFill>
+                          <a:latin typeface="Calibri" pitchFamily="34" charset="0"/>
+                          <a:ea typeface="Calibri" pitchFamily="34" charset="-122"/>
+                          <a:cs typeface="Calibri" pitchFamily="34" charset="-120"/>
+                        </a:rPr>
+                        <a:t>0.969</a:t>
+                      </a:r>
+                      <a:endParaRPr lang="en-US" sz="1300" dirty="0">
+                        <a:latin typeface="Calibri" charset="0"/>
+                        <a:ea typeface="Calibri" charset="0"/>
+                        <a:cs typeface="Calibri" charset="0"/>
+                      </a:endParaRPr>
+                    </a:p>
+                  </a:txBody>
+                  <a:tcPr marL="91440" marR="91440" marT="45720" marB="45720">
+                    <a:lnL w="12700" cap="flat" cmpd="sng" algn="ctr">
+                      <a:solidFill>
+                        <a:srgbClr val="2A3441"/>
+                      </a:solidFill>
+                      <a:prstDash val="solid"/>
+                      <a:round/>
+                      <a:headEnd type="none" w="med" len="med"/>
+                      <a:tailEnd type="none" w="med" len="med"/>
+                    </a:lnL>
+                    <a:lnR w="12700" cap="flat" cmpd="sng" algn="ctr">
+                      <a:solidFill>
+                        <a:srgbClr val="2A3441"/>
+                      </a:solidFill>
+                      <a:prstDash val="solid"/>
+                      <a:round/>
+                      <a:headEnd type="none" w="med" len="med"/>
+                      <a:tailEnd type="none" w="med" len="med"/>
+                    </a:lnR>
+                    <a:lnT w="12700" cap="flat" cmpd="sng" algn="ctr">
+                      <a:solidFill>
+                        <a:srgbClr val="2A3441"/>
+                      </a:solidFill>
+                      <a:prstDash val="solid"/>
+                      <a:round/>
+                      <a:headEnd type="none" w="med" len="med"/>
+                      <a:tailEnd type="none" w="med" len="med"/>
+                    </a:lnT>
+                    <a:lnB w="12700" cap="flat" cmpd="sng" algn="ctr">
+                      <a:solidFill>
+                        <a:srgbClr val="2A3441"/>
+                      </a:solidFill>
+                      <a:prstDash val="solid"/>
+                      <a:round/>
+                      <a:headEnd type="none" w="med" len="med"/>
+                      <a:tailEnd type="none" w="med" len="med"/>
+                    </a:lnB>
+                    <a:solidFill>
+                      <a:srgbClr val="141B24"/>
+                    </a:solidFill>
+                  </a:tcPr>
+                </a:tc>
+              </a:tr>
+              <a:tr h="384048">
+                <a:tc>
+                  <a:txBody>
+                    <a:bodyPr/>
+                    <a:lstStyle/>
+                    <a:p>
+                      <a:pPr indent="0" marL="0">
+                        <a:buNone/>
+                      </a:pPr>
+                      <a:r>
+                        <a:rPr lang="en-US" sz="1300" dirty="0">
+                          <a:solidFill>
+                            <a:srgbClr val="E6EDF3"/>
+                          </a:solidFill>
+                          <a:latin typeface="Calibri" pitchFamily="34" charset="0"/>
+                          <a:ea typeface="Calibri" pitchFamily="34" charset="-122"/>
+                          <a:cs typeface="Calibri" pitchFamily="34" charset="-120"/>
+                        </a:rPr>
+                        <a:t>Deep vs AIMD (no-loss path)</a:t>
+                      </a:r>
+                      <a:endParaRPr lang="en-US" sz="1300" dirty="0">
+                        <a:latin typeface="Calibri" charset="0"/>
+                        <a:ea typeface="Calibri" charset="0"/>
+                        <a:cs typeface="Calibri" charset="0"/>
+                      </a:endParaRPr>
+                    </a:p>
+                  </a:txBody>
+                  <a:tcPr marL="91440" marR="91440" marT="45720" marB="45720">
+                    <a:lnL w="12700" cap="flat" cmpd="sng" algn="ctr">
+                      <a:solidFill>
+                        <a:srgbClr val="2A3441"/>
+                      </a:solidFill>
+                      <a:prstDash val="solid"/>
+                      <a:round/>
+                      <a:headEnd type="none" w="med" len="med"/>
+                      <a:tailEnd type="none" w="med" len="med"/>
+                    </a:lnL>
+                    <a:lnR w="12700" cap="flat" cmpd="sng" algn="ctr">
+                      <a:solidFill>
+                        <a:srgbClr val="2A3441"/>
+                      </a:solidFill>
+                      <a:prstDash val="solid"/>
+                      <a:round/>
+                      <a:headEnd type="none" w="med" len="med"/>
+                      <a:tailEnd type="none" w="med" len="med"/>
+                    </a:lnR>
+                    <a:lnT w="12700" cap="flat" cmpd="sng" algn="ctr">
+                      <a:solidFill>
+                        <a:srgbClr val="2A3441"/>
+                      </a:solidFill>
+                      <a:prstDash val="solid"/>
+                      <a:round/>
+                      <a:headEnd type="none" w="med" len="med"/>
+                      <a:tailEnd type="none" w="med" len="med"/>
+                    </a:lnT>
+                    <a:lnB w="12700" cap="flat" cmpd="sng" algn="ctr">
+                      <a:solidFill>
+                        <a:srgbClr val="2A3441"/>
+                      </a:solidFill>
+                      <a:prstDash val="solid"/>
+                      <a:round/>
+                      <a:headEnd type="none" w="med" len="med"/>
+                      <a:tailEnd type="none" w="med" len="med"/>
+                    </a:lnB>
+                    <a:solidFill>
+                      <a:srgbClr val="141B24"/>
+                    </a:solidFill>
+                  </a:tcPr>
+                </a:tc>
+                <a:tc>
+                  <a:txBody>
+                    <a:bodyPr/>
+                    <a:lstStyle/>
+                    <a:p>
+                      <a:pPr indent="0" marL="0">
+                        <a:buNone/>
+                      </a:pPr>
+                      <a:r>
+                        <a:rPr lang="en-US" sz="1300" dirty="0">
+                          <a:solidFill>
+                            <a:srgbClr val="E6EDF3"/>
+                          </a:solidFill>
+                          <a:latin typeface="Calibri" pitchFamily="34" charset="0"/>
+                          <a:ea typeface="Calibri" pitchFamily="34" charset="-122"/>
+                          <a:cs typeface="Calibri" pitchFamily="34" charset="-120"/>
+                        </a:rPr>
+                        <a:t>44%</a:t>
+                      </a:r>
+                      <a:endParaRPr lang="en-US" sz="1300" dirty="0">
+                        <a:latin typeface="Calibri" charset="0"/>
+                        <a:ea typeface="Calibri" charset="0"/>
+                        <a:cs typeface="Calibri" charset="0"/>
+                      </a:endParaRPr>
+                    </a:p>
+                  </a:txBody>
+                  <a:tcPr marL="91440" marR="91440" marT="45720" marB="45720">
+                    <a:lnL w="12700" cap="flat" cmpd="sng" algn="ctr">
+                      <a:solidFill>
+                        <a:srgbClr val="2A3441"/>
+                      </a:solidFill>
+                      <a:prstDash val="solid"/>
+                      <a:round/>
+                      <a:headEnd type="none" w="med" len="med"/>
+                      <a:tailEnd type="none" w="med" len="med"/>
+                    </a:lnL>
+                    <a:lnR w="12700" cap="flat" cmpd="sng" algn="ctr">
+                      <a:solidFill>
+                        <a:srgbClr val="2A3441"/>
+                      </a:solidFill>
+                      <a:prstDash val="solid"/>
+                      <a:round/>
+                      <a:headEnd type="none" w="med" len="med"/>
+                      <a:tailEnd type="none" w="med" len="med"/>
+                    </a:lnR>
+                    <a:lnT w="12700" cap="flat" cmpd="sng" algn="ctr">
+                      <a:solidFill>
+                        <a:srgbClr val="2A3441"/>
+                      </a:solidFill>
+                      <a:prstDash val="solid"/>
+                      <a:round/>
+                      <a:headEnd type="none" w="med" len="med"/>
+                      <a:tailEnd type="none" w="med" len="med"/>
+                    </a:lnT>
+                    <a:lnB w="12700" cap="flat" cmpd="sng" algn="ctr">
+                      <a:solidFill>
+                        <a:srgbClr val="2A3441"/>
+                      </a:solidFill>
+                      <a:prstDash val="solid"/>
+                      <a:round/>
+                      <a:headEnd type="none" w="med" len="med"/>
+                      <a:tailEnd type="none" w="med" len="med"/>
+                    </a:lnB>
+                    <a:solidFill>
+                      <a:srgbClr val="141B24"/>
+                    </a:solidFill>
+                  </a:tcPr>
+                </a:tc>
+                <a:tc>
+                  <a:txBody>
+                    <a:bodyPr/>
+                    <a:lstStyle/>
+                    <a:p>
+                      <a:pPr indent="0" marL="0">
+                        <a:buNone/>
+                      </a:pPr>
+                      <a:r>
+                        <a:rPr lang="en-US" sz="1300" dirty="0">
+                          <a:solidFill>
+                            <a:srgbClr val="E6EDF3"/>
+                          </a:solidFill>
+                          <a:latin typeface="Calibri" pitchFamily="34" charset="0"/>
+                          <a:ea typeface="Calibri" pitchFamily="34" charset="-122"/>
+                          <a:cs typeface="Calibri" pitchFamily="34" charset="-120"/>
+                        </a:rPr>
+                        <a:t>0.987</a:t>
+                      </a:r>
+                      <a:endParaRPr lang="en-US" sz="1300" dirty="0">
+                        <a:latin typeface="Calibri" charset="0"/>
+                        <a:ea typeface="Calibri" charset="0"/>
+                        <a:cs typeface="Calibri" charset="0"/>
+                      </a:endParaRPr>
+                    </a:p>
+                  </a:txBody>
+                  <a:tcPr marL="91440" marR="91440" marT="45720" marB="45720">
+                    <a:lnL w="12700" cap="flat" cmpd="sng" algn="ctr">
+                      <a:solidFill>
+                        <a:srgbClr val="2A3441"/>
+                      </a:solidFill>
+                      <a:prstDash val="solid"/>
+                      <a:round/>
+                      <a:headEnd type="none" w="med" len="med"/>
+                      <a:tailEnd type="none" w="med" len="med"/>
+                    </a:lnL>
+                    <a:lnR w="12700" cap="flat" cmpd="sng" algn="ctr">
+                      <a:solidFill>
+                        <a:srgbClr val="2A3441"/>
+                      </a:solidFill>
+                      <a:prstDash val="solid"/>
+                      <a:round/>
+                      <a:headEnd type="none" w="med" len="med"/>
+                      <a:tailEnd type="none" w="med" len="med"/>
+                    </a:lnR>
+                    <a:lnT w="12700" cap="flat" cmpd="sng" algn="ctr">
+                      <a:solidFill>
+                        <a:srgbClr val="2A3441"/>
+                      </a:solidFill>
+                      <a:prstDash val="solid"/>
+                      <a:round/>
+                      <a:headEnd type="none" w="med" len="med"/>
+                      <a:tailEnd type="none" w="med" len="med"/>
+                    </a:lnT>
+                    <a:lnB w="12700" cap="flat" cmpd="sng" algn="ctr">
+                      <a:solidFill>
+                        <a:srgbClr val="2A3441"/>
+                      </a:solidFill>
+                      <a:prstDash val="solid"/>
+                      <a:round/>
+                      <a:headEnd type="none" w="med" len="med"/>
+                      <a:tailEnd type="none" w="med" len="med"/>
+                    </a:lnB>
+                    <a:solidFill>
+                      <a:srgbClr val="141B24"/>
+                    </a:solidFill>
+                  </a:tcPr>
+                </a:tc>
+              </a:tr>
+              <a:tr h="384048">
+                <a:tc>
+                  <a:txBody>
+                    <a:bodyPr/>
+                    <a:lstStyle/>
+                    <a:p>
+                      <a:pPr indent="0" marL="0">
+                        <a:buNone/>
+                      </a:pPr>
+                      <a:r>
+                        <a:rPr lang="en-US" sz="1300" dirty="0">
+                          <a:solidFill>
+                            <a:srgbClr val="E6EDF3"/>
+                          </a:solidFill>
+                          <a:latin typeface="Calibri" pitchFamily="34" charset="0"/>
+                          <a:ea typeface="Calibri" pitchFamily="34" charset="-122"/>
+                          <a:cs typeface="Calibri" pitchFamily="34" charset="-120"/>
+                        </a:rPr>
+                        <a:t>Deep vs AIMD (long path)</a:t>
+                      </a:r>
+                      <a:endParaRPr lang="en-US" sz="1300" dirty="0">
+                        <a:latin typeface="Calibri" charset="0"/>
+                        <a:ea typeface="Calibri" charset="0"/>
+                        <a:cs typeface="Calibri" charset="0"/>
+                      </a:endParaRPr>
+                    </a:p>
+                  </a:txBody>
+                  <a:tcPr marL="91440" marR="91440" marT="45720" marB="45720">
+                    <a:lnL w="12700" cap="flat" cmpd="sng" algn="ctr">
+                      <a:solidFill>
+                        <a:srgbClr val="2A3441"/>
+                      </a:solidFill>
+                      <a:prstDash val="solid"/>
+                      <a:round/>
+                      <a:headEnd type="none" w="med" len="med"/>
+                      <a:tailEnd type="none" w="med" len="med"/>
+                    </a:lnL>
+                    <a:lnR w="12700" cap="flat" cmpd="sng" algn="ctr">
+                      <a:solidFill>
+                        <a:srgbClr val="2A3441"/>
+                      </a:solidFill>
+                      <a:prstDash val="solid"/>
+                      <a:round/>
+                      <a:headEnd type="none" w="med" len="med"/>
+                      <a:tailEnd type="none" w="med" len="med"/>
+                    </a:lnR>
+                    <a:lnT w="12700" cap="flat" cmpd="sng" algn="ctr">
+                      <a:solidFill>
+                        <a:srgbClr val="2A3441"/>
+                      </a:solidFill>
+                      <a:prstDash val="solid"/>
+                      <a:round/>
+                      <a:headEnd type="none" w="med" len="med"/>
+                      <a:tailEnd type="none" w="med" len="med"/>
+                    </a:lnT>
+                    <a:lnB w="12700" cap="flat" cmpd="sng" algn="ctr">
+                      <a:solidFill>
+                        <a:srgbClr val="2A3441"/>
+                      </a:solidFill>
+                      <a:prstDash val="solid"/>
+                      <a:round/>
+                      <a:headEnd type="none" w="med" len="med"/>
+                      <a:tailEnd type="none" w="med" len="med"/>
+                    </a:lnB>
+                    <a:solidFill>
+                      <a:srgbClr val="141B24"/>
+                    </a:solidFill>
+                  </a:tcPr>
+                </a:tc>
+                <a:tc>
+                  <a:txBody>
+                    <a:bodyPr/>
+                    <a:lstStyle/>
+                    <a:p>
+                      <a:pPr indent="0" marL="0">
+                        <a:buNone/>
+                      </a:pPr>
+                      <a:r>
+                        <a:rPr lang="en-US" sz="1300" dirty="0">
+                          <a:solidFill>
+                            <a:srgbClr val="E6EDF3"/>
+                          </a:solidFill>
+                          <a:latin typeface="Calibri" pitchFamily="34" charset="0"/>
+                          <a:ea typeface="Calibri" pitchFamily="34" charset="-122"/>
+                          <a:cs typeface="Calibri" pitchFamily="34" charset="-120"/>
+                        </a:rPr>
+                        <a:t>74%</a:t>
+                      </a:r>
+                      <a:endParaRPr lang="en-US" sz="1300" dirty="0">
+                        <a:latin typeface="Calibri" charset="0"/>
+                        <a:ea typeface="Calibri" charset="0"/>
+                        <a:cs typeface="Calibri" charset="0"/>
+                      </a:endParaRPr>
+                    </a:p>
+                  </a:txBody>
+                  <a:tcPr marL="91440" marR="91440" marT="45720" marB="45720">
+                    <a:lnL w="12700" cap="flat" cmpd="sng" algn="ctr">
+                      <a:solidFill>
+                        <a:srgbClr val="2A3441"/>
+                      </a:solidFill>
+                      <a:prstDash val="solid"/>
+                      <a:round/>
+                      <a:headEnd type="none" w="med" len="med"/>
+                      <a:tailEnd type="none" w="med" len="med"/>
+                    </a:lnL>
+                    <a:lnR w="12700" cap="flat" cmpd="sng" algn="ctr">
+                      <a:solidFill>
+                        <a:srgbClr val="2A3441"/>
+                      </a:solidFill>
+                      <a:prstDash val="solid"/>
+                      <a:round/>
+                      <a:headEnd type="none" w="med" len="med"/>
+                      <a:tailEnd type="none" w="med" len="med"/>
+                    </a:lnR>
+                    <a:lnT w="12700" cap="flat" cmpd="sng" algn="ctr">
+                      <a:solidFill>
+                        <a:srgbClr val="2A3441"/>
+                      </a:solidFill>
+                      <a:prstDash val="solid"/>
+                      <a:round/>
+                      <a:headEnd type="none" w="med" len="med"/>
+                      <a:tailEnd type="none" w="med" len="med"/>
+                    </a:lnT>
+                    <a:lnB w="12700" cap="flat" cmpd="sng" algn="ctr">
+                      <a:solidFill>
+                        <a:srgbClr val="2A3441"/>
+                      </a:solidFill>
+                      <a:prstDash val="solid"/>
+                      <a:round/>
+                      <a:headEnd type="none" w="med" len="med"/>
+                      <a:tailEnd type="none" w="med" len="med"/>
+                    </a:lnB>
+                    <a:solidFill>
+                      <a:srgbClr val="141B24"/>
+                    </a:solidFill>
+                  </a:tcPr>
+                </a:tc>
+                <a:tc>
+                  <a:txBody>
+                    <a:bodyPr/>
+                    <a:lstStyle/>
+                    <a:p>
+                      <a:pPr indent="0" marL="0">
+                        <a:buNone/>
+                      </a:pPr>
+                      <a:r>
+                        <a:rPr lang="en-US" sz="1300" dirty="0">
+                          <a:solidFill>
+                            <a:srgbClr val="E6EDF3"/>
+                          </a:solidFill>
+                          <a:latin typeface="Calibri" pitchFamily="34" charset="0"/>
+                          <a:ea typeface="Calibri" pitchFamily="34" charset="-122"/>
+                          <a:cs typeface="Calibri" pitchFamily="34" charset="-120"/>
+                        </a:rPr>
+                        <a:t>0.819</a:t>
+                      </a:r>
+                      <a:endParaRPr lang="en-US" sz="1300" dirty="0">
+                        <a:latin typeface="Calibri" charset="0"/>
+                        <a:ea typeface="Calibri" charset="0"/>
+                        <a:cs typeface="Calibri" charset="0"/>
+                      </a:endParaRPr>
+                    </a:p>
+                  </a:txBody>
+                  <a:tcPr marL="91440" marR="91440" marT="45720" marB="45720">
+                    <a:lnL w="12700" cap="flat" cmpd="sng" algn="ctr">
+                      <a:solidFill>
+                        <a:srgbClr val="2A3441"/>
+                      </a:solidFill>
+                      <a:prstDash val="solid"/>
+                      <a:round/>
+                      <a:headEnd type="none" w="med" len="med"/>
+                      <a:tailEnd type="none" w="med" len="med"/>
+                    </a:lnL>
+                    <a:lnR w="12700" cap="flat" cmpd="sng" algn="ctr">
+                      <a:solidFill>
+                        <a:srgbClr val="2A3441"/>
+                      </a:solidFill>
+                      <a:prstDash val="solid"/>
+                      <a:round/>
+                      <a:headEnd type="none" w="med" len="med"/>
+                      <a:tailEnd type="none" w="med" len="med"/>
+                    </a:lnR>
+                    <a:lnT w="12700" cap="flat" cmpd="sng" algn="ctr">
+                      <a:solidFill>
+                        <a:srgbClr val="2A3441"/>
+                      </a:solidFill>
+                      <a:prstDash val="solid"/>
+                      <a:round/>
+                      <a:headEnd type="none" w="med" len="med"/>
+                      <a:tailEnd type="none" w="med" len="med"/>
+                    </a:lnT>
+                    <a:lnB w="12700" cap="flat" cmpd="sng" algn="ctr">
+                      <a:solidFill>
+                        <a:srgbClr val="2A3441"/>
+                      </a:solidFill>
+                      <a:prstDash val="solid"/>
+                      <a:round/>
+                      <a:headEnd type="none" w="med" len="med"/>
+                      <a:tailEnd type="none" w="med" len="med"/>
+                    </a:lnB>
+                    <a:solidFill>
+                      <a:srgbClr val="141B24"/>
+                    </a:solidFill>
+                  </a:tcPr>
+                </a:tc>
+              </a:tr>
+              <a:tr h="384048">
+                <a:tc>
+                  <a:txBody>
+                    <a:bodyPr/>
+                    <a:lstStyle/>
+                    <a:p>
+                      <a:pPr indent="0" marL="0">
+                        <a:buNone/>
+                      </a:pPr>
+                      <a:r>
+                        <a:rPr lang="en-US" sz="1300" dirty="0">
+                          <a:solidFill>
+                            <a:srgbClr val="E6EDF3"/>
+                          </a:solidFill>
+                          <a:latin typeface="Calibri" pitchFamily="34" charset="0"/>
+                          <a:ea typeface="Calibri" pitchFamily="34" charset="-122"/>
+                          <a:cs typeface="Calibri" pitchFamily="34" charset="-120"/>
+                        </a:rPr>
+                        <a:t>Fixed 8 vs AIMD (long path)</a:t>
+                      </a:r>
+                      <a:endParaRPr lang="en-US" sz="1300" dirty="0">
+                        <a:latin typeface="Calibri" charset="0"/>
+                        <a:ea typeface="Calibri" charset="0"/>
+                        <a:cs typeface="Calibri" charset="0"/>
+                      </a:endParaRPr>
+                    </a:p>
+                  </a:txBody>
+                  <a:tcPr marL="91440" marR="91440" marT="45720" marB="45720">
+                    <a:lnL w="12700" cap="flat" cmpd="sng" algn="ctr">
+                      <a:solidFill>
+                        <a:srgbClr val="2A3441"/>
+                      </a:solidFill>
+                      <a:prstDash val="solid"/>
+                      <a:round/>
+                      <a:headEnd type="none" w="med" len="med"/>
+                      <a:tailEnd type="none" w="med" len="med"/>
+                    </a:lnL>
+                    <a:lnR w="12700" cap="flat" cmpd="sng" algn="ctr">
+                      <a:solidFill>
+                        <a:srgbClr val="2A3441"/>
+                      </a:solidFill>
+                      <a:prstDash val="solid"/>
+                      <a:round/>
+                      <a:headEnd type="none" w="med" len="med"/>
+                      <a:tailEnd type="none" w="med" len="med"/>
+                    </a:lnR>
+                    <a:lnT w="12700" cap="flat" cmpd="sng" algn="ctr">
+                      <a:solidFill>
+                        <a:srgbClr val="2A3441"/>
+                      </a:solidFill>
+                      <a:prstDash val="solid"/>
+                      <a:round/>
+                      <a:headEnd type="none" w="med" len="med"/>
+                      <a:tailEnd type="none" w="med" len="med"/>
+                    </a:lnT>
+                    <a:lnB w="12700" cap="flat" cmpd="sng" algn="ctr">
+                      <a:solidFill>
+                        <a:srgbClr val="2A3441"/>
+                      </a:solidFill>
+                      <a:prstDash val="solid"/>
+                      <a:round/>
+                      <a:headEnd type="none" w="med" len="med"/>
+                      <a:tailEnd type="none" w="med" len="med"/>
+                    </a:lnB>
+                    <a:solidFill>
+                      <a:srgbClr val="141B24"/>
+                    </a:solidFill>
+                  </a:tcPr>
+                </a:tc>
+                <a:tc>
+                  <a:txBody>
+                    <a:bodyPr/>
+                    <a:lstStyle/>
+                    <a:p>
+                      <a:pPr indent="0" marL="0">
+                        <a:buNone/>
+                      </a:pPr>
+                      <a:r>
+                        <a:rPr lang="en-US" sz="1300" dirty="0">
+                          <a:solidFill>
+                            <a:srgbClr val="E6EDF3"/>
+                          </a:solidFill>
+                          <a:latin typeface="Calibri" pitchFamily="34" charset="0"/>
+                          <a:ea typeface="Calibri" pitchFamily="34" charset="-122"/>
+                          <a:cs typeface="Calibri" pitchFamily="34" charset="-120"/>
+                        </a:rPr>
+                        <a:t>72%</a:t>
+                      </a:r>
+                      <a:endParaRPr lang="en-US" sz="1300" dirty="0">
+                        <a:latin typeface="Calibri" charset="0"/>
+                        <a:ea typeface="Calibri" charset="0"/>
+                        <a:cs typeface="Calibri" charset="0"/>
+                      </a:endParaRPr>
+                    </a:p>
+                  </a:txBody>
+                  <a:tcPr marL="91440" marR="91440" marT="45720" marB="45720">
+                    <a:lnL w="12700" cap="flat" cmpd="sng" algn="ctr">
+                      <a:solidFill>
+                        <a:srgbClr val="2A3441"/>
+                      </a:solidFill>
+                      <a:prstDash val="solid"/>
+                      <a:round/>
+                      <a:headEnd type="none" w="med" len="med"/>
+                      <a:tailEnd type="none" w="med" len="med"/>
+                    </a:lnL>
+                    <a:lnR w="12700" cap="flat" cmpd="sng" algn="ctr">
+                      <a:solidFill>
+                        <a:srgbClr val="2A3441"/>
+                      </a:solidFill>
+                      <a:prstDash val="solid"/>
+                      <a:round/>
+                      <a:headEnd type="none" w="med" len="med"/>
+                      <a:tailEnd type="none" w="med" len="med"/>
+                    </a:lnR>
+                    <a:lnT w="12700" cap="flat" cmpd="sng" algn="ctr">
+                      <a:solidFill>
+                        <a:srgbClr val="2A3441"/>
+                      </a:solidFill>
+                      <a:prstDash val="solid"/>
+                      <a:round/>
+                      <a:headEnd type="none" w="med" len="med"/>
+                      <a:tailEnd type="none" w="med" len="med"/>
+                    </a:lnT>
+                    <a:lnB w="12700" cap="flat" cmpd="sng" algn="ctr">
+                      <a:solidFill>
+                        <a:srgbClr val="2A3441"/>
+                      </a:solidFill>
+                      <a:prstDash val="solid"/>
+                      <a:round/>
+                      <a:headEnd type="none" w="med" len="med"/>
+                      <a:tailEnd type="none" w="med" len="med"/>
+                    </a:lnB>
+                    <a:solidFill>
+                      <a:srgbClr val="141B24"/>
+                    </a:solidFill>
+                  </a:tcPr>
+                </a:tc>
+                <a:tc>
+                  <a:txBody>
+                    <a:bodyPr/>
+                    <a:lstStyle/>
+                    <a:p>
+                      <a:pPr indent="0" marL="0">
+                        <a:buNone/>
+                      </a:pPr>
+                      <a:r>
+                        <a:rPr lang="en-US" sz="1300" dirty="0">
+                          <a:solidFill>
+                            <a:srgbClr val="E6EDF3"/>
+                          </a:solidFill>
+                          <a:latin typeface="Calibri" pitchFamily="34" charset="0"/>
+                          <a:ea typeface="Calibri" pitchFamily="34" charset="-122"/>
+                          <a:cs typeface="Calibri" pitchFamily="34" charset="-120"/>
+                        </a:rPr>
+                        <a:t>0.843</a:t>
+                      </a:r>
+                      <a:endParaRPr lang="en-US" sz="1300" dirty="0">
+                        <a:latin typeface="Calibri" charset="0"/>
+                        <a:ea typeface="Calibri" charset="0"/>
+                        <a:cs typeface="Calibri" charset="0"/>
+                      </a:endParaRPr>
+                    </a:p>
+                  </a:txBody>
+                  <a:tcPr marL="91440" marR="91440" marT="45720" marB="45720">
+                    <a:lnL w="12700" cap="flat" cmpd="sng" algn="ctr">
+                      <a:solidFill>
+                        <a:srgbClr val="2A3441"/>
+                      </a:solidFill>
+                      <a:prstDash val="solid"/>
+                      <a:round/>
+                      <a:headEnd type="none" w="med" len="med"/>
+                      <a:tailEnd type="none" w="med" len="med"/>
+                    </a:lnL>
+                    <a:lnR w="12700" cap="flat" cmpd="sng" algn="ctr">
+                      <a:solidFill>
+                        <a:srgbClr val="2A3441"/>
+                      </a:solidFill>
+                      <a:prstDash val="solid"/>
+                      <a:round/>
+                      <a:headEnd type="none" w="med" len="med"/>
+                      <a:tailEnd type="none" w="med" len="med"/>
+                    </a:lnR>
+                    <a:lnT w="12700" cap="flat" cmpd="sng" algn="ctr">
+                      <a:solidFill>
+                        <a:srgbClr val="2A3441"/>
+                      </a:solidFill>
+                      <a:prstDash val="solid"/>
+                      <a:round/>
+                      <a:headEnd type="none" w="med" len="med"/>
+                      <a:tailEnd type="none" w="med" len="med"/>
+                    </a:lnT>
+                    <a:lnB w="12700" cap="flat" cmpd="sng" algn="ctr">
+                      <a:solidFill>
+                        <a:srgbClr val="2A3441"/>
+                      </a:solidFill>
+                      <a:prstDash val="solid"/>
+                      <a:round/>
+                      <a:headEnd type="none" w="med" len="med"/>
+                      <a:tailEnd type="none" w="med" len="med"/>
+                    </a:lnB>
+                    <a:solidFill>
+                      <a:srgbClr val="141B24"/>
+                    </a:solidFill>
+                  </a:tcPr>
+                </a:tc>
+              </a:tr>
+            </a:tbl>
+          </a:graphicData>
+        </a:graphic>
+      </p:graphicFrame>
+      <p:sp>
+        <p:nvSpPr>
+          <p:cNvPr id="5" name="Text 2"/>
           <p:cNvSpPr/>
           <p:nvPr/>
         </p:nvSpPr>
         <p:spPr>
           <a:xfrm>
-            <a:off x="548640" y="1371600"/>
-            <a:ext cx="5394960" cy="4206240"/>
-          </a:xfrm>
-          <a:prstGeom prst="rect">
-            <a:avLst/>
-          </a:prstGeom>
-          <a:solidFill>
-            <a:srgbClr val="141B24"/>
-          </a:solidFill>
-          <a:ln w="12700">
-            <a:solidFill>
-              <a:srgbClr val="39FF88"/>
-            </a:solidFill>
-            <a:prstDash val="solid"/>
-          </a:ln>
-        </p:spPr>
-      </p:sp>
-      <p:sp>
-        <p:nvSpPr>
-          <p:cNvPr id="5" name="Text 3"/>
-          <p:cNvSpPr/>
-          <p:nvPr/>
-        </p:nvSpPr>
-        <p:spPr>
-          <a:xfrm>
-            <a:off x="731520" y="1508760"/>
-            <a:ext cx="5029200" cy="457200"/>
+            <a:off x="6766560" y="1188720"/>
+            <a:ext cx="5029200" cy="4937760"/>
           </a:xfrm>
           <a:prstGeom prst="rect">
             <a:avLst/>
@@ -11466,53 +12847,18 @@
           <a:ln/>
         </p:spPr>
         <p:txBody>
-          <a:bodyPr wrap="square" lIns="0" tIns="0" rIns="0" bIns="0" rtlCol="0" anchor="ctr"/>
-          <a:lstStyle/>
-          <a:p>
-            <a:pPr indent="0" marL="0">
-              <a:buNone/>
-            </a:pPr>
-            <a:r>
-              <a:rPr lang="en-US" sz="2000" b="1" dirty="0">
-                <a:solidFill>
-                  <a:srgbClr val="39FF88"/>
-                </a:solidFill>
-                <a:latin typeface="Courier New" pitchFamily="34" charset="0"/>
-                <a:ea typeface="Courier New" pitchFamily="34" charset="-122"/>
-                <a:cs typeface="Courier New" pitchFamily="34" charset="-120"/>
-              </a:rPr>
-              <a:t>Learned</a:t>
-            </a:r>
-            <a:endParaRPr lang="en-US" sz="2000" dirty="0"/>
-          </a:p>
-        </p:txBody>
-      </p:sp>
-      <p:sp>
-        <p:nvSpPr>
-          <p:cNvPr id="6" name="Text 4"/>
-          <p:cNvSpPr/>
-          <p:nvPr/>
-        </p:nvSpPr>
-        <p:spPr>
-          <a:xfrm>
-            <a:off x="731520" y="2011680"/>
-            <a:ext cx="5029200" cy="3429000"/>
-          </a:xfrm>
-          <a:prstGeom prst="rect">
-            <a:avLst/>
-          </a:prstGeom>
-          <a:noFill/>
-          <a:ln/>
-        </p:spPr>
-        <p:txBody>
           <a:bodyPr wrap="square" lIns="0" tIns="0" rIns="0" bIns="0" rtlCol="0" anchor="t"/>
           <a:lstStyle/>
           <a:p>
-            <a:pPr indent="0" marL="0">
-              <a:buNone/>
-            </a:pPr>
-            <a:r>
-              <a:rPr lang="en-US" sz="2000" dirty="0">
+            <a:pPr marL="342900" indent="-342900">
+              <a:spcAft>
+                <a:spcPts val="800"/>
+              </a:spcAft>
+              <a:buSzPct val="100000"/>
+              <a:buChar char="•"/>
+            </a:pPr>
+            <a:r>
+              <a:rPr lang="en-US" sz="1400" dirty="0">
                 <a:solidFill>
                   <a:srgbClr val="E6EDF3"/>
                 </a:solidFill>
@@ -11520,16 +12866,20 @@
                 <a:ea typeface="Calibri" pitchFamily="34" charset="-122"/>
                 <a:cs typeface="Calibri" pitchFamily="34" charset="-120"/>
               </a:rPr>
-              <a:t>Reliability is a set of simple rules working together.</a:t>
-            </a:r>
-            <a:endParaRPr lang="en-US" sz="2000" dirty="0"/>
-          </a:p>
-          <a:p>
-            <a:pPr indent="0" marL="0">
-              <a:buNone/>
-            </a:pPr>
-            <a:r>
-              <a:rPr lang="en-US" sz="2000" dirty="0">
+              <a:t>Fair on short paths; takes 74% against AIMD on the 120 ms path, like a fixed window</a:t>
+            </a:r>
+            <a:endParaRPr lang="en-US" sz="1400" dirty="0"/>
+          </a:p>
+          <a:p>
+            <a:pPr marL="342900" indent="-342900">
+              <a:spcAft>
+                <a:spcPts val="800"/>
+              </a:spcAft>
+              <a:buSzPct val="100000"/>
+              <a:buChar char="•"/>
+            </a:pPr>
+            <a:r>
+              <a:rPr lang="en-US" sz="1400" dirty="0">
                 <a:solidFill>
                   <a:srgbClr val="E6EDF3"/>
                 </a:solidFill>
@@ -11537,16 +12887,20 @@
                 <a:ea typeface="Calibri" pitchFamily="34" charset="-122"/>
                 <a:cs typeface="Calibri" pitchFamily="34" charset="-120"/>
               </a:rPr>
-              <a:t>Congestion control matters as much as retransmission.</a:t>
-            </a:r>
-            <a:endParaRPr lang="en-US" sz="2000" dirty="0"/>
-          </a:p>
-          <a:p>
-            <a:pPr indent="0" marL="0">
-              <a:buNone/>
-            </a:pPr>
-            <a:r>
-              <a:rPr lang="en-US" sz="2000" dirty="0">
+              <a:t>Ablation: the no-shrink mask is what matters (6.54 s without it, about 3.3 s with it; AIMD 7.16 s)</a:t>
+            </a:r>
+            <a:endParaRPr lang="en-US" sz="1400" dirty="0"/>
+          </a:p>
+          <a:p>
+            <a:pPr marL="342900" indent="-342900">
+              <a:spcAft>
+                <a:spcPts val="800"/>
+              </a:spcAft>
+              <a:buSzPct val="100000"/>
+              <a:buChar char="•"/>
+            </a:pPr>
+            <a:r>
+              <a:rPr lang="en-US" sz="1400" dirty="0">
                 <a:solidFill>
                   <a:srgbClr val="E6EDF3"/>
                 </a:solidFill>
@@ -11554,102 +12908,20 @@
                 <a:ea typeface="Calibri" pitchFamily="34" charset="-122"/>
                 <a:cs typeface="Calibri" pitchFamily="34" charset="-120"/>
               </a:rPr>
-              <a:t>Testing tools fail in surprising ways.</a:t>
-            </a:r>
-            <a:endParaRPr lang="en-US" sz="2000" dirty="0"/>
-          </a:p>
-        </p:txBody>
-      </p:sp>
-      <p:sp>
-        <p:nvSpPr>
-          <p:cNvPr id="7" name="Shape 5"/>
-          <p:cNvSpPr/>
-          <p:nvPr/>
-        </p:nvSpPr>
-        <p:spPr>
-          <a:xfrm>
-            <a:off x="6217920" y="1371600"/>
-            <a:ext cx="5394960" cy="4206240"/>
-          </a:xfrm>
-          <a:prstGeom prst="rect">
-            <a:avLst/>
-          </a:prstGeom>
-          <a:solidFill>
-            <a:srgbClr val="141B24"/>
-          </a:solidFill>
-          <a:ln w="12700">
-            <a:solidFill>
-              <a:srgbClr val="FFB000"/>
-            </a:solidFill>
-            <a:prstDash val="solid"/>
-          </a:ln>
-        </p:spPr>
-      </p:sp>
-      <p:sp>
-        <p:nvSpPr>
-          <p:cNvPr id="8" name="Text 6"/>
-          <p:cNvSpPr/>
-          <p:nvPr/>
-        </p:nvSpPr>
-        <p:spPr>
-          <a:xfrm>
-            <a:off x="6400800" y="1508760"/>
-            <a:ext cx="5029200" cy="457200"/>
-          </a:xfrm>
-          <a:prstGeom prst="rect">
-            <a:avLst/>
-          </a:prstGeom>
-          <a:noFill/>
-          <a:ln/>
-        </p:spPr>
-        <p:txBody>
-          <a:bodyPr wrap="square" lIns="0" tIns="0" rIns="0" bIns="0" rtlCol="0" anchor="ctr"/>
-          <a:lstStyle/>
-          <a:p>
-            <a:pPr indent="0" marL="0">
-              <a:buNone/>
-            </a:pPr>
-            <a:r>
-              <a:rPr lang="en-US" sz="2000" b="1" dirty="0">
-                <a:solidFill>
-                  <a:srgbClr val="FFB000"/>
-                </a:solidFill>
-                <a:latin typeface="Courier New" pitchFamily="34" charset="0"/>
-                <a:ea typeface="Courier New" pitchFamily="34" charset="-122"/>
-                <a:cs typeface="Courier New" pitchFamily="34" charset="-120"/>
-              </a:rPr>
-              <a:t>Next</a:t>
-            </a:r>
-            <a:endParaRPr lang="en-US" sz="2000" dirty="0"/>
-          </a:p>
-        </p:txBody>
-      </p:sp>
-      <p:sp>
-        <p:nvSpPr>
-          <p:cNvPr id="9" name="Text 7"/>
-          <p:cNvSpPr/>
-          <p:nvPr/>
-        </p:nvSpPr>
-        <p:spPr>
-          <a:xfrm>
-            <a:off x="6400800" y="2011680"/>
-            <a:ext cx="5029200" cy="3429000"/>
-          </a:xfrm>
-          <a:prstGeom prst="rect">
-            <a:avLst/>
-          </a:prstGeom>
-          <a:noFill/>
-          <a:ln/>
-        </p:spPr>
-        <p:txBody>
-          <a:bodyPr wrap="square" lIns="0" tIns="0" rIns="0" bIns="0" rtlCol="0" anchor="t"/>
-          <a:lstStyle/>
-          <a:p>
-            <a:pPr indent="0" marL="0">
-              <a:buNone/>
-            </a:pPr>
-            <a:r>
-              <a:rPr lang="en-US" sz="2000" dirty="0">
+              <a:t>Other parts (delay penalty, last action, throughput input) showed no measurable value</a:t>
+            </a:r>
+            <a:endParaRPr lang="en-US" sz="1400" dirty="0"/>
+          </a:p>
+          <a:p>
+            <a:pPr marL="342900" indent="-342900">
+              <a:spcAft>
+                <a:spcPts val="800"/>
+              </a:spcAft>
+              <a:buSzPct val="100000"/>
+              <a:buChar char="•"/>
+            </a:pPr>
+            <a:r>
+              <a:rPr lang="en-US" sz="1400" dirty="0">
                 <a:solidFill>
                   <a:srgbClr val="E6EDF3"/>
                 </a:solidFill>
@@ -11657,16 +12929,20 @@
                 <a:ea typeface="Calibri" pitchFamily="34" charset="-122"/>
                 <a:cs typeface="Calibri" pitchFamily="34" charset="-120"/>
               </a:rPr>
-              <a:t>Train the neural agent in C / on real netem</a:t>
-            </a:r>
-            <a:endParaRPr lang="en-US" sz="2000" dirty="0"/>
-          </a:p>
-          <a:p>
-            <a:pPr indent="0" marL="0">
-              <a:buNone/>
-            </a:pPr>
-            <a:r>
-              <a:rPr lang="en-US" sz="2000" dirty="0">
+              <a:t>Same recipe gave 3.2 to 7.4 s across seeds: seed sensitivity is a real weakness</a:t>
+            </a:r>
+            <a:endParaRPr lang="en-US" sz="1400" dirty="0"/>
+          </a:p>
+          <a:p>
+            <a:pPr marL="342900" indent="-342900">
+              <a:spcAft>
+                <a:spcPts val="800"/>
+              </a:spcAft>
+              <a:buSzPct val="100000"/>
+              <a:buChar char="•"/>
+            </a:pPr>
+            <a:r>
+              <a:rPr lang="en-US" sz="1400" dirty="0">
                 <a:solidFill>
                   <a:srgbClr val="E6EDF3"/>
                 </a:solidFill>
@@ -11674,65 +12950,48 @@
                 <a:ea typeface="Calibri" pitchFamily="34" charset="-122"/>
                 <a:cs typeface="Calibri" pitchFamily="34" charset="-120"/>
               </a:rPr>
-              <a:t>Selective ACK where throughput limits the path</a:t>
-            </a:r>
-            <a:endParaRPr lang="en-US" sz="2000" dirty="0"/>
-          </a:p>
+              <a:t>Found and fixed a dup-ACK retransmission storm in the chat gateway; added a live dashboard and an adaptive RTO</a:t>
+            </a:r>
+            <a:endParaRPr lang="en-US" sz="1400" dirty="0"/>
+          </a:p>
+        </p:txBody>
+      </p:sp>
+      <p:sp>
+        <p:nvSpPr>
+          <p:cNvPr id="6" name="Text 3"/>
+          <p:cNvSpPr/>
+          <p:nvPr/>
+        </p:nvSpPr>
+        <p:spPr>
+          <a:xfrm>
+            <a:off x="548640" y="3840480"/>
+            <a:ext cx="5852160" cy="731520"/>
+          </a:xfrm>
+          <a:prstGeom prst="rect">
+            <a:avLst/>
+          </a:prstGeom>
+          <a:noFill/>
+          <a:ln/>
+        </p:spPr>
+        <p:txBody>
+          <a:bodyPr wrap="square" lIns="0" tIns="0" rIns="0" bIns="0" rtlCol="0" anchor="ctr"/>
+          <a:lstStyle/>
           <a:p>
             <a:pPr indent="0" marL="0">
               <a:buNone/>
             </a:pPr>
             <a:r>
-              <a:rPr lang="en-US" sz="2000" dirty="0">
-                <a:solidFill>
-                  <a:srgbClr val="E6EDF3"/>
+              <a:rPr lang="en-US" sz="1300" dirty="0">
+                <a:solidFill>
+                  <a:srgbClr val="8B98A5"/>
                 </a:solidFill>
                 <a:latin typeface="Calibri" pitchFamily="34" charset="0"/>
                 <a:ea typeface="Calibri" pitchFamily="34" charset="-122"/>
                 <a:cs typeface="Calibri" pitchFamily="34" charset="-120"/>
               </a:rPr>
-              <a:t>Kernel netem and real multi-machine tests</a:t>
-            </a:r>
-            <a:endParaRPr lang="en-US" sz="2000" dirty="0"/>
-          </a:p>
-        </p:txBody>
-      </p:sp>
-      <p:sp>
-        <p:nvSpPr>
-          <p:cNvPr id="10" name="Text 8"/>
-          <p:cNvSpPr/>
-          <p:nvPr/>
-        </p:nvSpPr>
-        <p:spPr>
-          <a:xfrm>
-            <a:off x="548640" y="5852160"/>
-            <a:ext cx="10972800" cy="365760"/>
-          </a:xfrm>
-          <a:prstGeom prst="rect">
-            <a:avLst/>
-          </a:prstGeom>
-          <a:noFill/>
-          <a:ln/>
-        </p:spPr>
-        <p:txBody>
-          <a:bodyPr wrap="square" lIns="0" tIns="0" rIns="0" bIns="0" rtlCol="0" anchor="ctr"/>
-          <a:lstStyle/>
-          <a:p>
-            <a:pPr indent="0" marL="0">
-              <a:buNone/>
-            </a:pPr>
-            <a:r>
-              <a:rPr lang="en-US" sz="1400" dirty="0">
-                <a:solidFill>
-                  <a:srgbClr val="8B98A5"/>
-                </a:solidFill>
-                <a:latin typeface="Calibri" pitchFamily="34" charset="0"/>
-                <a:ea typeface="Calibri" pitchFamily="34" charset="-122"/>
-                <a:cs typeface="Calibri" pitchFamily="34" charset="-120"/>
-              </a:rPr>
-              <a:t>Limits: Go-Back-N wastes bandwidth and suffers under reordering; C tests use an emulated path; the tabular agent did not beat AIMD in C.</a:t>
-            </a:r>
-            <a:endParaRPr lang="en-US" sz="1400" dirty="0"/>
+              <a:t>Simulator, 20 seeds; ablation on 48 stress paths. Code: web/fairness_test.py, web/ablate.py.</a:t>
+            </a:r>
+            <a:endParaRPr lang="en-US" sz="1300" dirty="0"/>
           </a:p>
         </p:txBody>
       </p:sp>
@@ -11776,8 +13035,8 @@
         </p:nvSpPr>
         <p:spPr>
           <a:xfrm>
-            <a:off x="731520" y="2103120"/>
-            <a:ext cx="10058400" cy="1097280"/>
+            <a:off x="548640" y="320040"/>
+            <a:ext cx="11064240" cy="731520"/>
           </a:xfrm>
           <a:prstGeom prst="rect">
             <a:avLst/>
@@ -11793,7 +13052,7 @@
               <a:buNone/>
             </a:pPr>
             <a:r>
-              <a:rPr lang="en-US" sz="6400" b="1" dirty="0">
+              <a:rPr lang="en-US" sz="3000" b="1" dirty="0">
                 <a:solidFill>
                   <a:srgbClr val="39FF88"/>
                 </a:solidFill>
@@ -11801,9 +13060,9 @@
                 <a:ea typeface="Courier New" pitchFamily="34" charset="-122"/>
                 <a:cs typeface="Courier New" pitchFamily="34" charset="-120"/>
               </a:rPr>
-              <a:t>Thank you</a:t>
-            </a:r>
-            <a:endParaRPr lang="en-US" sz="6400" dirty="0"/>
+              <a:t>Learnings and future work</a:t>
+            </a:r>
+            <a:endParaRPr lang="en-US" sz="3000" dirty="0"/>
           </a:p>
         </p:txBody>
       </p:sp>
@@ -11815,8 +13074,8 @@
         </p:nvSpPr>
         <p:spPr>
           <a:xfrm>
-            <a:off x="731520" y="3474720"/>
-            <a:ext cx="10058400" cy="548640"/>
+            <a:off x="9418320" y="6446520"/>
+            <a:ext cx="2377440" cy="274320"/>
           </a:xfrm>
           <a:prstGeom prst="rect">
             <a:avLst/>
@@ -11828,34 +13087,59 @@
           <a:bodyPr wrap="square" lIns="0" tIns="0" rIns="0" bIns="0" rtlCol="0" anchor="ctr"/>
           <a:lstStyle/>
           <a:p>
-            <a:pPr indent="0" marL="0">
+            <a:pPr algn="r" indent="0" marL="0">
               <a:buNone/>
             </a:pPr>
             <a:r>
-              <a:rPr lang="en-US" sz="2600" dirty="0">
-                <a:solidFill>
-                  <a:srgbClr val="E6EDF3"/>
+              <a:rPr lang="en-US" sz="1000" dirty="0">
+                <a:solidFill>
+                  <a:srgbClr val="8B98A5"/>
                 </a:solidFill>
                 <a:latin typeface="Courier New" pitchFamily="34" charset="0"/>
                 <a:ea typeface="Courier New" pitchFamily="34" charset="-122"/>
                 <a:cs typeface="Courier New" pitchFamily="34" charset="-120"/>
               </a:rPr>
-              <a:t>github.com/Capsturrrr/rudp</a:t>
-            </a:r>
-            <a:endParaRPr lang="en-US" sz="2600" dirty="0"/>
-          </a:p>
-        </p:txBody>
-      </p:sp>
-      <p:sp>
-        <p:nvSpPr>
-          <p:cNvPr id="4" name="Text 2"/>
+              <a:t>24 / 25   Smart-RUDP</a:t>
+            </a:r>
+            <a:endParaRPr lang="en-US" sz="1000" dirty="0"/>
+          </a:p>
+        </p:txBody>
+      </p:sp>
+      <p:sp>
+        <p:nvSpPr>
+          <p:cNvPr id="4" name="Shape 2"/>
           <p:cNvSpPr/>
           <p:nvPr/>
         </p:nvSpPr>
         <p:spPr>
           <a:xfrm>
-            <a:off x="731520" y="4206240"/>
-            <a:ext cx="10058400" cy="457200"/>
+            <a:off x="548640" y="1371600"/>
+            <a:ext cx="5394960" cy="4206240"/>
+          </a:xfrm>
+          <a:prstGeom prst="rect">
+            <a:avLst/>
+          </a:prstGeom>
+          <a:solidFill>
+            <a:srgbClr val="141B24"/>
+          </a:solidFill>
+          <a:ln w="12700">
+            <a:solidFill>
+              <a:srgbClr val="39FF88"/>
+            </a:solidFill>
+            <a:prstDash val="solid"/>
+          </a:ln>
+        </p:spPr>
+      </p:sp>
+      <p:sp>
+        <p:nvSpPr>
+          <p:cNvPr id="5" name="Text 3"/>
+          <p:cNvSpPr/>
+          <p:nvPr/>
+        </p:nvSpPr>
+        <p:spPr>
+          <a:xfrm>
+            <a:off x="731520" y="1508760"/>
+            <a:ext cx="5029200" cy="457200"/>
           </a:xfrm>
           <a:prstGeom prst="rect">
             <a:avLst/>
@@ -11871,17 +13155,266 @@
               <a:buNone/>
             </a:pPr>
             <a:r>
-              <a:rPr lang="en-US" sz="1800" dirty="0">
-                <a:solidFill>
-                  <a:srgbClr val="8B98A5"/>
+              <a:rPr lang="en-US" sz="2000" b="1" dirty="0">
+                <a:solidFill>
+                  <a:srgbClr val="39FF88"/>
+                </a:solidFill>
+                <a:latin typeface="Courier New" pitchFamily="34" charset="0"/>
+                <a:ea typeface="Courier New" pitchFamily="34" charset="-122"/>
+                <a:cs typeface="Courier New" pitchFamily="34" charset="-120"/>
+              </a:rPr>
+              <a:t>Learned</a:t>
+            </a:r>
+            <a:endParaRPr lang="en-US" sz="2000" dirty="0"/>
+          </a:p>
+        </p:txBody>
+      </p:sp>
+      <p:sp>
+        <p:nvSpPr>
+          <p:cNvPr id="6" name="Text 4"/>
+          <p:cNvSpPr/>
+          <p:nvPr/>
+        </p:nvSpPr>
+        <p:spPr>
+          <a:xfrm>
+            <a:off x="731520" y="2011680"/>
+            <a:ext cx="5029200" cy="3429000"/>
+          </a:xfrm>
+          <a:prstGeom prst="rect">
+            <a:avLst/>
+          </a:prstGeom>
+          <a:noFill/>
+          <a:ln/>
+        </p:spPr>
+        <p:txBody>
+          <a:bodyPr wrap="square" lIns="0" tIns="0" rIns="0" bIns="0" rtlCol="0" anchor="t"/>
+          <a:lstStyle/>
+          <a:p>
+            <a:pPr indent="0" marL="0">
+              <a:buNone/>
+            </a:pPr>
+            <a:r>
+              <a:rPr lang="en-US" sz="2000" dirty="0">
+                <a:solidFill>
+                  <a:srgbClr val="E6EDF3"/>
                 </a:solidFill>
                 <a:latin typeface="Calibri" pitchFamily="34" charset="0"/>
                 <a:ea typeface="Calibri" pitchFamily="34" charset="-122"/>
                 <a:cs typeface="Calibri" pitchFamily="34" charset="-120"/>
               </a:rPr>
-              <a:t>Harshavardhan Mallela   Rohit Arya   Shloak Sinha</a:t>
-            </a:r>
-            <a:endParaRPr lang="en-US" sz="1800" dirty="0"/>
+              <a:t>Reliability is a set of simple rules working together.</a:t>
+            </a:r>
+            <a:endParaRPr lang="en-US" sz="2000" dirty="0"/>
+          </a:p>
+          <a:p>
+            <a:pPr indent="0" marL="0">
+              <a:buNone/>
+            </a:pPr>
+            <a:r>
+              <a:rPr lang="en-US" sz="2000" dirty="0">
+                <a:solidFill>
+                  <a:srgbClr val="E6EDF3"/>
+                </a:solidFill>
+                <a:latin typeface="Calibri" pitchFamily="34" charset="0"/>
+                <a:ea typeface="Calibri" pitchFamily="34" charset="-122"/>
+                <a:cs typeface="Calibri" pitchFamily="34" charset="-120"/>
+              </a:rPr>
+              <a:t>Congestion control matters as much as retransmission.</a:t>
+            </a:r>
+            <a:endParaRPr lang="en-US" sz="2000" dirty="0"/>
+          </a:p>
+          <a:p>
+            <a:pPr indent="0" marL="0">
+              <a:buNone/>
+            </a:pPr>
+            <a:r>
+              <a:rPr lang="en-US" sz="2000" dirty="0">
+                <a:solidFill>
+                  <a:srgbClr val="E6EDF3"/>
+                </a:solidFill>
+                <a:latin typeface="Calibri" pitchFamily="34" charset="0"/>
+                <a:ea typeface="Calibri" pitchFamily="34" charset="-122"/>
+                <a:cs typeface="Calibri" pitchFamily="34" charset="-120"/>
+              </a:rPr>
+              <a:t>Testing tools fail in surprising ways.</a:t>
+            </a:r>
+            <a:endParaRPr lang="en-US" sz="2000" dirty="0"/>
+          </a:p>
+        </p:txBody>
+      </p:sp>
+      <p:sp>
+        <p:nvSpPr>
+          <p:cNvPr id="7" name="Shape 5"/>
+          <p:cNvSpPr/>
+          <p:nvPr/>
+        </p:nvSpPr>
+        <p:spPr>
+          <a:xfrm>
+            <a:off x="6217920" y="1371600"/>
+            <a:ext cx="5394960" cy="4206240"/>
+          </a:xfrm>
+          <a:prstGeom prst="rect">
+            <a:avLst/>
+          </a:prstGeom>
+          <a:solidFill>
+            <a:srgbClr val="141B24"/>
+          </a:solidFill>
+          <a:ln w="12700">
+            <a:solidFill>
+              <a:srgbClr val="FFB000"/>
+            </a:solidFill>
+            <a:prstDash val="solid"/>
+          </a:ln>
+        </p:spPr>
+      </p:sp>
+      <p:sp>
+        <p:nvSpPr>
+          <p:cNvPr id="8" name="Text 6"/>
+          <p:cNvSpPr/>
+          <p:nvPr/>
+        </p:nvSpPr>
+        <p:spPr>
+          <a:xfrm>
+            <a:off x="6400800" y="1508760"/>
+            <a:ext cx="5029200" cy="457200"/>
+          </a:xfrm>
+          <a:prstGeom prst="rect">
+            <a:avLst/>
+          </a:prstGeom>
+          <a:noFill/>
+          <a:ln/>
+        </p:spPr>
+        <p:txBody>
+          <a:bodyPr wrap="square" lIns="0" tIns="0" rIns="0" bIns="0" rtlCol="0" anchor="ctr"/>
+          <a:lstStyle/>
+          <a:p>
+            <a:pPr indent="0" marL="0">
+              <a:buNone/>
+            </a:pPr>
+            <a:r>
+              <a:rPr lang="en-US" sz="2000" b="1" dirty="0">
+                <a:solidFill>
+                  <a:srgbClr val="FFB000"/>
+                </a:solidFill>
+                <a:latin typeface="Courier New" pitchFamily="34" charset="0"/>
+                <a:ea typeface="Courier New" pitchFamily="34" charset="-122"/>
+                <a:cs typeface="Courier New" pitchFamily="34" charset="-120"/>
+              </a:rPr>
+              <a:t>Next</a:t>
+            </a:r>
+            <a:endParaRPr lang="en-US" sz="2000" dirty="0"/>
+          </a:p>
+        </p:txBody>
+      </p:sp>
+      <p:sp>
+        <p:nvSpPr>
+          <p:cNvPr id="9" name="Text 7"/>
+          <p:cNvSpPr/>
+          <p:nvPr/>
+        </p:nvSpPr>
+        <p:spPr>
+          <a:xfrm>
+            <a:off x="6400800" y="2011680"/>
+            <a:ext cx="5029200" cy="3429000"/>
+          </a:xfrm>
+          <a:prstGeom prst="rect">
+            <a:avLst/>
+          </a:prstGeom>
+          <a:noFill/>
+          <a:ln/>
+        </p:spPr>
+        <p:txBody>
+          <a:bodyPr wrap="square" lIns="0" tIns="0" rIns="0" bIns="0" rtlCol="0" anchor="t"/>
+          <a:lstStyle/>
+          <a:p>
+            <a:pPr indent="0" marL="0">
+              <a:buNone/>
+            </a:pPr>
+            <a:r>
+              <a:rPr lang="en-US" sz="2000" dirty="0">
+                <a:solidFill>
+                  <a:srgbClr val="E6EDF3"/>
+                </a:solidFill>
+                <a:latin typeface="Calibri" pitchFamily="34" charset="0"/>
+                <a:ea typeface="Calibri" pitchFamily="34" charset="-122"/>
+                <a:cs typeface="Calibri" pitchFamily="34" charset="-120"/>
+              </a:rPr>
+              <a:t>Train the neural agent in C / on real netem</a:t>
+            </a:r>
+            <a:endParaRPr lang="en-US" sz="2000" dirty="0"/>
+          </a:p>
+          <a:p>
+            <a:pPr indent="0" marL="0">
+              <a:buNone/>
+            </a:pPr>
+            <a:r>
+              <a:rPr lang="en-US" sz="2000" dirty="0">
+                <a:solidFill>
+                  <a:srgbClr val="E6EDF3"/>
+                </a:solidFill>
+                <a:latin typeface="Calibri" pitchFamily="34" charset="0"/>
+                <a:ea typeface="Calibri" pitchFamily="34" charset="-122"/>
+                <a:cs typeface="Calibri" pitchFamily="34" charset="-120"/>
+              </a:rPr>
+              <a:t>Selective ACK where throughput limits the path</a:t>
+            </a:r>
+            <a:endParaRPr lang="en-US" sz="2000" dirty="0"/>
+          </a:p>
+          <a:p>
+            <a:pPr indent="0" marL="0">
+              <a:buNone/>
+            </a:pPr>
+            <a:r>
+              <a:rPr lang="en-US" sz="2000" dirty="0">
+                <a:solidFill>
+                  <a:srgbClr val="E6EDF3"/>
+                </a:solidFill>
+                <a:latin typeface="Calibri" pitchFamily="34" charset="0"/>
+                <a:ea typeface="Calibri" pitchFamily="34" charset="-122"/>
+                <a:cs typeface="Calibri" pitchFamily="34" charset="-120"/>
+              </a:rPr>
+              <a:t>Kernel netem and real multi-machine tests</a:t>
+            </a:r>
+            <a:endParaRPr lang="en-US" sz="2000" dirty="0"/>
+          </a:p>
+        </p:txBody>
+      </p:sp>
+      <p:sp>
+        <p:nvSpPr>
+          <p:cNvPr id="10" name="Text 8"/>
+          <p:cNvSpPr/>
+          <p:nvPr/>
+        </p:nvSpPr>
+        <p:spPr>
+          <a:xfrm>
+            <a:off x="548640" y="5852160"/>
+            <a:ext cx="10972800" cy="365760"/>
+          </a:xfrm>
+          <a:prstGeom prst="rect">
+            <a:avLst/>
+          </a:prstGeom>
+          <a:noFill/>
+          <a:ln/>
+        </p:spPr>
+        <p:txBody>
+          <a:bodyPr wrap="square" lIns="0" tIns="0" rIns="0" bIns="0" rtlCol="0" anchor="ctr"/>
+          <a:lstStyle/>
+          <a:p>
+            <a:pPr indent="0" marL="0">
+              <a:buNone/>
+            </a:pPr>
+            <a:r>
+              <a:rPr lang="en-US" sz="1400" dirty="0">
+                <a:solidFill>
+                  <a:srgbClr val="8B98A5"/>
+                </a:solidFill>
+                <a:latin typeface="Calibri" pitchFamily="34" charset="0"/>
+                <a:ea typeface="Calibri" pitchFamily="34" charset="-122"/>
+                <a:cs typeface="Calibri" pitchFamily="34" charset="-120"/>
+              </a:rPr>
+              <a:t>Limits: Go-Back-N wastes bandwidth and suffers under reordering; C tests use an emulated path; the tabular agent did not beat AIMD in C.</a:t>
+            </a:r>
+            <a:endParaRPr lang="en-US" sz="1400" dirty="0"/>
           </a:p>
         </p:txBody>
       </p:sp>
@@ -11925,6 +13458,155 @@
         </p:nvSpPr>
         <p:spPr>
           <a:xfrm>
+            <a:off x="731520" y="2103120"/>
+            <a:ext cx="10058400" cy="1097280"/>
+          </a:xfrm>
+          <a:prstGeom prst="rect">
+            <a:avLst/>
+          </a:prstGeom>
+          <a:noFill/>
+          <a:ln/>
+        </p:spPr>
+        <p:txBody>
+          <a:bodyPr wrap="square" lIns="0" tIns="0" rIns="0" bIns="0" rtlCol="0" anchor="ctr"/>
+          <a:lstStyle/>
+          <a:p>
+            <a:pPr indent="0" marL="0">
+              <a:buNone/>
+            </a:pPr>
+            <a:r>
+              <a:rPr lang="en-US" sz="6400" b="1" dirty="0">
+                <a:solidFill>
+                  <a:srgbClr val="39FF88"/>
+                </a:solidFill>
+                <a:latin typeface="Courier New" pitchFamily="34" charset="0"/>
+                <a:ea typeface="Courier New" pitchFamily="34" charset="-122"/>
+                <a:cs typeface="Courier New" pitchFamily="34" charset="-120"/>
+              </a:rPr>
+              <a:t>Thank you</a:t>
+            </a:r>
+            <a:endParaRPr lang="en-US" sz="6400" dirty="0"/>
+          </a:p>
+        </p:txBody>
+      </p:sp>
+      <p:sp>
+        <p:nvSpPr>
+          <p:cNvPr id="3" name="Text 1"/>
+          <p:cNvSpPr/>
+          <p:nvPr/>
+        </p:nvSpPr>
+        <p:spPr>
+          <a:xfrm>
+            <a:off x="731520" y="3474720"/>
+            <a:ext cx="10058400" cy="548640"/>
+          </a:xfrm>
+          <a:prstGeom prst="rect">
+            <a:avLst/>
+          </a:prstGeom>
+          <a:noFill/>
+          <a:ln/>
+        </p:spPr>
+        <p:txBody>
+          <a:bodyPr wrap="square" lIns="0" tIns="0" rIns="0" bIns="0" rtlCol="0" anchor="ctr"/>
+          <a:lstStyle/>
+          <a:p>
+            <a:pPr indent="0" marL="0">
+              <a:buNone/>
+            </a:pPr>
+            <a:r>
+              <a:rPr lang="en-US" sz="2600" dirty="0">
+                <a:solidFill>
+                  <a:srgbClr val="E6EDF3"/>
+                </a:solidFill>
+                <a:latin typeface="Courier New" pitchFamily="34" charset="0"/>
+                <a:ea typeface="Courier New" pitchFamily="34" charset="-122"/>
+                <a:cs typeface="Courier New" pitchFamily="34" charset="-120"/>
+              </a:rPr>
+              <a:t>github.com/Capsturrrr/rudp</a:t>
+            </a:r>
+            <a:endParaRPr lang="en-US" sz="2600" dirty="0"/>
+          </a:p>
+        </p:txBody>
+      </p:sp>
+      <p:sp>
+        <p:nvSpPr>
+          <p:cNvPr id="4" name="Text 2"/>
+          <p:cNvSpPr/>
+          <p:nvPr/>
+        </p:nvSpPr>
+        <p:spPr>
+          <a:xfrm>
+            <a:off x="731520" y="4206240"/>
+            <a:ext cx="10058400" cy="457200"/>
+          </a:xfrm>
+          <a:prstGeom prst="rect">
+            <a:avLst/>
+          </a:prstGeom>
+          <a:noFill/>
+          <a:ln/>
+        </p:spPr>
+        <p:txBody>
+          <a:bodyPr wrap="square" lIns="0" tIns="0" rIns="0" bIns="0" rtlCol="0" anchor="ctr"/>
+          <a:lstStyle/>
+          <a:p>
+            <a:pPr indent="0" marL="0">
+              <a:buNone/>
+            </a:pPr>
+            <a:r>
+              <a:rPr lang="en-US" sz="1800" dirty="0">
+                <a:solidFill>
+                  <a:srgbClr val="8B98A5"/>
+                </a:solidFill>
+                <a:latin typeface="Calibri" pitchFamily="34" charset="0"/>
+                <a:ea typeface="Calibri" pitchFamily="34" charset="-122"/>
+                <a:cs typeface="Calibri" pitchFamily="34" charset="-120"/>
+              </a:rPr>
+              <a:t>Harshavardhan Mallela   Rohit Arya   Shloak Sinha</a:t>
+            </a:r>
+            <a:endParaRPr lang="en-US" sz="1800" dirty="0"/>
+          </a:p>
+        </p:txBody>
+      </p:sp>
+    </p:spTree>
+  </p:cSld>
+  <p:clrMapOvr>
+    <a:masterClrMapping/>
+  </p:clrMapOvr>
+</p:sld>
+</file>
+
+<file path=ppt/slides/slide26.xml><?xml version="1.0" encoding="utf-8"?>
+<p:sld xmlns:a="http://schemas.openxmlformats.org/drawingml/2006/main" xmlns:r="http://schemas.openxmlformats.org/officeDocument/2006/relationships" xmlns:p="http://schemas.openxmlformats.org/presentationml/2006/main">
+  <p:cSld name="Slide 26">
+    <p:bg>
+      <p:bgPr>
+        <a:solidFill>
+          <a:srgbClr val="0B0F14"/>
+        </a:solidFill>
+      </p:bgPr>
+    </p:bg>
+    <p:spTree>
+      <p:nvGrpSpPr>
+        <p:cNvPr id="1" name=""/>
+        <p:cNvGrpSpPr/>
+        <p:nvPr/>
+      </p:nvGrpSpPr>
+      <p:grpSpPr>
+        <a:xfrm>
+          <a:off x="0" y="0"/>
+          <a:ext cx="0" cy="0"/>
+          <a:chOff x="0" y="0"/>
+          <a:chExt cx="0" cy="0"/>
+        </a:xfrm>
+      </p:grpSpPr>
+      <p:sp>
+        <p:nvSpPr>
+          <p:cNvPr id="2" name="Text 0"/>
+          <p:cNvSpPr/>
+          <p:nvPr/>
+        </p:nvSpPr>
+        <p:spPr>
+          <a:xfrm>
             <a:off x="548640" y="320040"/>
             <a:ext cx="11064240" cy="731520"/>
           </a:xfrm>
@@ -12229,7 +13911,7 @@
                 <a:ea typeface="Courier New" pitchFamily="34" charset="-122"/>
                 <a:cs typeface="Courier New" pitchFamily="34" charset="-120"/>
               </a:rPr>
-              <a:t>3 / 24   Smart-RUDP</a:t>
+              <a:t>3 / 25   Smart-RUDP</a:t>
             </a:r>
             <a:endParaRPr lang="en-US" sz="1000" dirty="0"/>
           </a:p>
@@ -12623,7 +14305,7 @@
                 <a:ea typeface="Courier New" pitchFamily="34" charset="-122"/>
                 <a:cs typeface="Courier New" pitchFamily="34" charset="-120"/>
               </a:rPr>
-              <a:t>4 / 24   Smart-RUDP</a:t>
+              <a:t>4 / 25   Smart-RUDP</a:t>
             </a:r>
             <a:endParaRPr lang="en-US" sz="1000" dirty="0"/>
           </a:p>
@@ -13184,7 +14866,7 @@
                 <a:ea typeface="Courier New" pitchFamily="34" charset="-122"/>
                 <a:cs typeface="Courier New" pitchFamily="34" charset="-120"/>
               </a:rPr>
-              <a:t>5 / 24   Smart-RUDP</a:t>
+              <a:t>5 / 25   Smart-RUDP</a:t>
             </a:r>
             <a:endParaRPr lang="en-US" sz="1000" dirty="0"/>
           </a:p>
@@ -14623,7 +16305,7 @@
                 <a:ea typeface="Courier New" pitchFamily="34" charset="-122"/>
                 <a:cs typeface="Courier New" pitchFamily="34" charset="-120"/>
               </a:rPr>
-              <a:t>6 / 24   Smart-RUDP</a:t>
+              <a:t>6 / 25   Smart-RUDP</a:t>
             </a:r>
             <a:endParaRPr lang="en-US" sz="1000" dirty="0"/>
           </a:p>
@@ -15858,7 +17540,7 @@
                 <a:ea typeface="Courier New" pitchFamily="34" charset="-122"/>
                 <a:cs typeface="Courier New" pitchFamily="34" charset="-120"/>
               </a:rPr>
-              <a:t>7 / 24   Smart-RUDP</a:t>
+              <a:t>7 / 25   Smart-RUDP</a:t>
             </a:r>
             <a:endParaRPr lang="en-US" sz="1000" dirty="0"/>
           </a:p>
@@ -16301,7 +17983,7 @@
                 <a:ea typeface="Courier New" pitchFamily="34" charset="-122"/>
                 <a:cs typeface="Courier New" pitchFamily="34" charset="-120"/>
               </a:rPr>
-              <a:t>8 / 24   Smart-RUDP</a:t>
+              <a:t>8 / 25   Smart-RUDP</a:t>
             </a:r>
             <a:endParaRPr lang="en-US" sz="1000" dirty="0"/>
           </a:p>
@@ -16601,7 +18283,7 @@
                 <a:ea typeface="Courier New" pitchFamily="34" charset="-122"/>
                 <a:cs typeface="Courier New" pitchFamily="34" charset="-120"/>
               </a:rPr>
-              <a:t>9 / 24   Smart-RUDP</a:t>
+              <a:t>9 / 25   Smart-RUDP</a:t>
             </a:r>
             <a:endParaRPr lang="en-US" sz="1000" dirty="0"/>
           </a:p>

--- a/docs/RUDP_Presentation_with_notes.pptx
+++ b/docs/RUDP_Presentation_with_notes.pptx
@@ -1984,10 +1984,15 @@
               <a:t>- For the C experiments we repeated 20 runs per mode: Smart-RUDP is still slower on 5G and satellite and ties on lossy.</a:t>
             </a:r>
           </a:p>
+          <a:p>
+            <a:r>
+              <a:t>- Be upfront: our simulator originally allowed a duplicate-ACK retransmission storm that flatters aggressive controllers. With the realistic rule the neural agent is about level with AIMD in simulation (7.27 s against 7.75 s). The C results are the evidence we rely on.</a:t>
+            </a:r>
+          </a:p>
           <a:p/>
           <a:p>
             <a:r>
-              <a:t>IF ASKED: Q: Is the TCP row real TCP? A: No, it is a model with the same window cap; real kernel TCP needs netem on Linux, and we provide the script. Q: Why did you not implement SACK in C? A: Time; the simulation shows it is the biggest win and it is the first item of future work. Q: Is 20 runs enough? A: The intervals exclude zero for 5G and satellite and include zero for lossy.</a:t>
+              <a:t>IF ASKED: Q: Is the TCP row real TCP? A: No, it is a model with the same window cap; real kernel TCP needs netem on Linux, and we provide the script. Q: Why did you not implement SACK in C? A: Time; the simulation shows it is the biggest win and it is the first item of future work. Q: Is 20 runs enough? A: The intervals exclude zero for 5G and satellite and include zero for lossy. Did you check it is not a simulator artefact? Yes: with the realistic rule the simulated gain mostly disappears, so we lean on the C results, which use that rule and equal window caps.</a:t>
             </a:r>
           </a:p>
         </p:txBody>
@@ -2095,6 +2100,11 @@
           <a:p>
             <a:r>
               <a:t>- We also added selective acknowledgments to the C code: about ten times fewer retransmissions, but no significant change in completion time on these emulated paths.</a:t>
+            </a:r>
+          </a:p>
+          <a:p>
+            <a:r>
+              <a:t>- We also reran it with AIMD capped at 32 like the agent: the neural agent still wins by 19, 29 and 28 percent, all significant.</a:t>
             </a:r>
           </a:p>
           <a:p/>
@@ -8517,7 +8527,7 @@
                           <a:ea typeface="Courier New" pitchFamily="34" charset="-122"/>
                           <a:cs typeface="Courier New" pitchFamily="34" charset="-120"/>
                         </a:rPr>
-                        <a:t>48 unseen paths (simulated)</a:t>
+                        <a:t>48 paths, original simulator</a:t>
                       </a:r>
                       <a:endParaRPr lang="en-US" sz="1300" dirty="0">
                         <a:latin typeface="Courier New" charset="0"/>
@@ -10063,7 +10073,7 @@
                 <a:ea typeface="Calibri" pitchFamily="34" charset="-122"/>
                 <a:cs typeface="Calibri" pitchFamily="34" charset="-120"/>
               </a:rPr>
-              <a:t>The TCP row is a model, not kernel TCP. Real netem numbers need a Linux machine: netem_baselines.sh.</a:t>
+              <a:t>Caveat: this simulator allowed a dup-ACK retransmission storm. With the realistic rule, stress means are AIMD 7.75 s, neural 7.27 s: about level. The TCP row is a model, not kernel TCP.</a:t>
             </a:r>
             <a:endParaRPr lang="en-US" sz="1300" dirty="0"/>
           </a:p>
@@ -11407,7 +11417,7 @@
                 <a:ea typeface="Calibri" pitchFamily="34" charset="-122"/>
                 <a:cs typeface="Calibri" pitchFamily="34" charset="-120"/>
               </a:rPr>
-              <a:t>Caveats: trained in a simulator; emulated paths; AIMD cap 128 vs agents 32; agent retransmits more on random loss</a:t>
+              <a:t>Caveats: trained in a simulator; emulated paths (not real networks); agent retransmits more on random loss</a:t>
             </a:r>
             <a:endParaRPr lang="en-US" sz="1500" dirty="0"/>
           </a:p>
@@ -11446,7 +11456,7 @@
                 <a:ea typeface="Calibri" pitchFamily="34" charset="-122"/>
                 <a:cs typeface="Calibri" pitchFamily="34" charset="-120"/>
               </a:rPr>
-              <a:t>15 runs per cell (satellite: 8), 95% confidence intervals. Code: src/deep_cc.h, web/dqn.py, eval_ci2.sh.</a:t>
+              <a:t>15 runs per cell (satellite: 8), 95% intervals. Equal-cap check (AIMD capped at 32, 10 runs): neural still wins by 19%, 29%, 28%, all significant (eval_ci4.sh).</a:t>
             </a:r>
             <a:endParaRPr lang="en-US" sz="1300" dirty="0"/>
           </a:p>

--- a/docs/RUDP_Presentation_with_notes.pptx
+++ b/docs/RUDP_Presentation_with_notes.pptx
@@ -31,9 +31,10 @@
     <p:sldId id="279" r:id="rId25"/>
     <p:sldId id="280" r:id="rId26"/>
     <p:sldId id="281" r:id="rId27"/>
+    <p:sldId id="282" r:id="rId28"/>
   </p:sldIdLst>
   <p:notesMasterIdLst>
-    <p:notesMasterId r:id="rId28"/>
+    <p:notesMasterId r:id="rId29"/>
   </p:notesMasterIdLst>
   <p:sldSz cx="12192000" cy="6858000"/>
   <p:notesSz cx="6858000" cy="12192000"/>
@@ -2315,23 +2316,28 @@
           <a:p/>
           <a:p>
             <a:r>
-              <a:t>- Learned: reliability is a set of simple rules working together; congestion control matters as much as retransmission; testing tools fail in surprising ways.</a:t>
-            </a:r>
-          </a:p>
-          <a:p>
-            <a:r>
-              <a:t>- Next: Selective Repeat with SACK, a stronger learning agent, adaptive timeout, and tests on a real multi-machine network.</a:t>
-            </a:r>
-          </a:p>
-          <a:p>
-            <a:r>
-              <a:t>- Name the limits before she does: Go-Back-N, loopback-only protocol tests, Smart-RUDP not beating AIMD.</a:t>
+              <a:t>- While checking our own result we found where the neural agent fails: on a hostile path with 10 percent loss it needed about 85 seconds where AIMD needed 11.</a:t>
+            </a:r>
+          </a:p>
+          <a:p>
+            <a:r>
+              <a:t>- The fix is a hand-over: when a decision interval loses 10 percent or more of its packets, plain AIMD controls the window; after three clean intervals the agent takes over again.</a:t>
+            </a:r>
+          </a:p>
+          <a:p>
+            <a:r>
+              <a:t>- With that, the three benign paths keep the agent's advantage and the hostile path is back near AIMD at about 14 seconds.</a:t>
+            </a:r>
+          </a:p>
+          <a:p>
+            <a:r>
+              <a:t>- We also tried cutting the window on every timeout; it fixed the hostile case but made the 2 percent path much worse, so we dropped it. So the learned agent is useful on clean to moderate paths and needs a classical safety net elsewhere.</a:t>
             </a:r>
           </a:p>
           <a:p/>
           <a:p>
             <a:r>
-              <a:t>IF ASKED: End on the limits and the fix order: SACK, adaptive timeout, real-network tests.</a:t>
+              <a:t>IF ASKED: Is the hybrid still 'AI'? Yes on clean and moderate paths, where the neural network decides; on heavy loss it deliberately defers to AIMD. It is a rule we added, not something the network learned.</a:t>
             </a:r>
           </a:p>
         </p:txBody>
@@ -2417,19 +2423,29 @@
           <a:lstStyle/>
           <a:p>
             <a:r>
-              <a:t>Time: 0:15</a:t>
+              <a:t>Time: 0:50</a:t>
             </a:r>
           </a:p>
           <a:p/>
           <a:p>
             <a:r>
-              <a:t>- Thank you. The code, report and captures are at github.com/Capsturrrr/rudp. Happy to take questions.</a:t>
+              <a:t>- Learned: reliability is a set of simple rules working together; congestion control matters as much as retransmission; testing tools fail in surprising ways.</a:t>
+            </a:r>
+          </a:p>
+          <a:p>
+            <a:r>
+              <a:t>- Next: Selective Repeat with SACK, a stronger learning agent, adaptive timeout, and tests on a real multi-machine network.</a:t>
+            </a:r>
+          </a:p>
+          <a:p>
+            <a:r>
+              <a:t>- Name the limits before she does: Go-Back-N, loopback-only protocol tests, Smart-RUDP not beating AIMD.</a:t>
             </a:r>
           </a:p>
           <a:p/>
           <a:p>
             <a:r>
-              <a:t>IF ASKED: Pause and smile; hand over to questions.</a:t>
+              <a:t>IF ASKED: End on the limits and the fix order: SACK, adaptive timeout, real-network tests.</a:t>
             </a:r>
           </a:p>
         </p:txBody>
@@ -2515,19 +2531,19 @@
           <a:lstStyle/>
           <a:p>
             <a:r>
-              <a:t>Time: -</a:t>
+              <a:t>Time: 0:15</a:t>
             </a:r>
           </a:p>
           <a:p/>
           <a:p>
             <a:r>
-              <a:t>- Only if asked: the window starts at 1, adds 1 per ACK until the threshold 16, then 1/window per ACK. In the 62-packet run the final window was 18.71.</a:t>
+              <a:t>- Thank you. The code, report and captures are at github.com/Capsturrrr/rudp. Happy to take questions.</a:t>
             </a:r>
           </a:p>
           <a:p/>
           <a:p>
             <a:r>
-              <a:t>IF ASKED: Use this slide to answer 'show me congestion avoidance'.</a:t>
+              <a:t>IF ASKED: Pause and smile; hand over to questions.</a:t>
             </a:r>
           </a:p>
         </p:txBody>
@@ -2550,6 +2566,104 @@
             <a:fld id="{F7021451-1387-4CA6-816F-3879F97B5CBC}" type="slidenum">
               <a:rPr lang="en-US"/>
               <a:t>26</a:t>
+            </a:fld>
+            <a:endParaRPr lang="en-US"/>
+          </a:p>
+        </p:txBody>
+      </p:sp>
+    </p:spTree>
+    <p:extLst>
+      <p:ext uri="{BB962C8B-B14F-4D97-AF65-F5344CB8AC3E}">
+        <p14:creationId xmlns:p14="http://schemas.microsoft.com/office/powerpoint/2010/main" val="1024086991"/>
+      </p:ext>
+    </p:extLst>
+  </p:cSld>
+  <p:clrMapOvr>
+    <a:masterClrMapping/>
+  </p:clrMapOvr>
+</p:notes>
+</file>
+
+<file path=ppt/notesSlides/notesSlide27.xml><?xml version="1.0" encoding="utf-8"?>
+<p:notes xmlns:a="http://schemas.openxmlformats.org/drawingml/2006/main" xmlns:r="http://schemas.openxmlformats.org/officeDocument/2006/relationships" xmlns:p="http://schemas.openxmlformats.org/presentationml/2006/main">
+  <p:cSld>
+    <p:spTree>
+      <p:nvGrpSpPr>
+        <p:cNvPr id="1" name=""/>
+        <p:cNvGrpSpPr/>
+        <p:nvPr/>
+      </p:nvGrpSpPr>
+      <p:grpSpPr>
+        <a:xfrm>
+          <a:off x="0" y="0"/>
+          <a:ext cx="0" cy="0"/>
+          <a:chOff x="0" y="0"/>
+          <a:chExt cx="0" cy="0"/>
+        </a:xfrm>
+      </p:grpSpPr>
+      <p:sp>
+        <p:nvSpPr>
+          <p:cNvPr id="2" name="Slide Image Placeholder 1"/>
+          <p:cNvSpPr>
+            <a:spLocks noGrp="1" noRot="1" noChangeAspect="1"/>
+          </p:cNvSpPr>
+          <p:nvPr>
+            <p:ph type="sldImg"/>
+          </p:nvPr>
+        </p:nvSpPr>
+        <p:spPr/>
+      </p:sp>
+      <p:sp>
+        <p:nvSpPr>
+          <p:cNvPr id="3" name="Notes Placeholder 2"/>
+          <p:cNvSpPr>
+            <a:spLocks noGrp="1"/>
+          </p:cNvSpPr>
+          <p:nvPr>
+            <p:ph type="body" idx="1"/>
+          </p:nvPr>
+        </p:nvSpPr>
+        <p:spPr/>
+        <p:txBody>
+          <a:bodyPr/>
+          <a:lstStyle/>
+          <a:p>
+            <a:r>
+              <a:t>Time: -</a:t>
+            </a:r>
+          </a:p>
+          <a:p/>
+          <a:p>
+            <a:r>
+              <a:t>- Only if asked: the window starts at 1, adds 1 per ACK until the threshold 16, then 1/window per ACK. In the 62-packet run the final window was 18.71.</a:t>
+            </a:r>
+          </a:p>
+          <a:p/>
+          <a:p>
+            <a:r>
+              <a:t>IF ASKED: Use this slide to answer 'show me congestion avoidance'.</a:t>
+            </a:r>
+          </a:p>
+        </p:txBody>
+      </p:sp>
+      <p:sp>
+        <p:nvSpPr>
+          <p:cNvPr id="4" name="Slide Number Placeholder 3"/>
+          <p:cNvSpPr>
+            <a:spLocks noGrp="1"/>
+          </p:cNvSpPr>
+          <p:nvPr>
+            <p:ph type="sldNum" sz="quarter" idx="10"/>
+          </p:nvPr>
+        </p:nvSpPr>
+        <p:spPr/>
+        <p:txBody>
+          <a:bodyPr/>
+          <a:lstStyle/>
+          <a:p>
+            <a:fld id="{F7021451-1387-4CA6-816F-3879F97B5CBC}" type="slidenum">
+              <a:rPr lang="en-US"/>
+              <a:t>27</a:t>
             </a:fld>
             <a:endParaRPr lang="en-US"/>
           </a:p>
@@ -3905,7 +4019,7 @@
                 <a:ea typeface="Courier New" pitchFamily="34" charset="-122"/>
                 <a:cs typeface="Courier New" pitchFamily="34" charset="-120"/>
               </a:rPr>
-              <a:t>10 / 25   Smart-RUDP</a:t>
+              <a:t>10 / 26   Smart-RUDP</a:t>
             </a:r>
             <a:endParaRPr lang="en-US" sz="1000" dirty="0"/>
           </a:p>
@@ -4102,7 +4216,7 @@
                 <a:ea typeface="Courier New" pitchFamily="34" charset="-122"/>
                 <a:cs typeface="Courier New" pitchFamily="34" charset="-120"/>
               </a:rPr>
-              <a:t>11 / 25   Smart-RUDP</a:t>
+              <a:t>11 / 26   Smart-RUDP</a:t>
             </a:r>
             <a:endParaRPr lang="en-US" sz="1000" dirty="0"/>
           </a:p>
@@ -4932,7 +5046,7 @@
                 <a:ea typeface="Courier New" pitchFamily="34" charset="-122"/>
                 <a:cs typeface="Courier New" pitchFamily="34" charset="-120"/>
               </a:rPr>
-              <a:t>12 / 25   Smart-RUDP</a:t>
+              <a:t>12 / 26   Smart-RUDP</a:t>
             </a:r>
             <a:endParaRPr lang="en-US" sz="1000" dirty="0"/>
           </a:p>
@@ -5229,7 +5343,7 @@
                 <a:ea typeface="Courier New" pitchFamily="34" charset="-122"/>
                 <a:cs typeface="Courier New" pitchFamily="34" charset="-120"/>
               </a:rPr>
-              <a:t>13 / 25   Smart-RUDP</a:t>
+              <a:t>13 / 26   Smart-RUDP</a:t>
             </a:r>
             <a:endParaRPr lang="en-US" sz="1000" dirty="0"/>
           </a:p>
@@ -5529,7 +5643,7 @@
                 <a:ea typeface="Courier New" pitchFamily="34" charset="-122"/>
                 <a:cs typeface="Courier New" pitchFamily="34" charset="-120"/>
               </a:rPr>
-              <a:t>14 / 25   Smart-RUDP</a:t>
+              <a:t>14 / 26   Smart-RUDP</a:t>
             </a:r>
             <a:endParaRPr lang="en-US" sz="1000" dirty="0"/>
           </a:p>
@@ -5913,7 +6027,7 @@
                 <a:ea typeface="Courier New" pitchFamily="34" charset="-122"/>
                 <a:cs typeface="Courier New" pitchFamily="34" charset="-120"/>
               </a:rPr>
-              <a:t>15 / 25   Smart-RUDP</a:t>
+              <a:t>15 / 26   Smart-RUDP</a:t>
             </a:r>
             <a:endParaRPr lang="en-US" sz="1000" dirty="0"/>
           </a:p>
@@ -6371,7 +6485,7 @@
                 <a:ea typeface="Courier New" pitchFamily="34" charset="-122"/>
                 <a:cs typeface="Courier New" pitchFamily="34" charset="-120"/>
               </a:rPr>
-              <a:t>16 / 25   Smart-RUDP</a:t>
+              <a:t>16 / 26   Smart-RUDP</a:t>
             </a:r>
             <a:endParaRPr lang="en-US" sz="1000" dirty="0"/>
           </a:p>
@@ -7056,7 +7170,7 @@
                 <a:ea typeface="Courier New" pitchFamily="34" charset="-122"/>
                 <a:cs typeface="Courier New" pitchFamily="34" charset="-120"/>
               </a:rPr>
-              <a:t>17 / 25   Smart-RUDP</a:t>
+              <a:t>17 / 26   Smart-RUDP</a:t>
             </a:r>
             <a:endParaRPr lang="en-US" sz="1000" dirty="0"/>
           </a:p>
@@ -7296,7 +7410,7 @@
                 <a:ea typeface="Courier New" pitchFamily="34" charset="-122"/>
                 <a:cs typeface="Courier New" pitchFamily="34" charset="-120"/>
               </a:rPr>
-              <a:t>18 / 25   Smart-RUDP</a:t>
+              <a:t>18 / 26   Smart-RUDP</a:t>
             </a:r>
             <a:endParaRPr lang="en-US" sz="1000" dirty="0"/>
           </a:p>
@@ -7536,7 +7650,7 @@
                 <a:ea typeface="Courier New" pitchFamily="34" charset="-122"/>
                 <a:cs typeface="Courier New" pitchFamily="34" charset="-120"/>
               </a:rPr>
-              <a:t>19 / 25   Smart-RUDP</a:t>
+              <a:t>19 / 26   Smart-RUDP</a:t>
             </a:r>
             <a:endParaRPr lang="en-US" sz="1000" dirty="0"/>
           </a:p>
@@ -7758,7 +7872,7 @@
                 <a:ea typeface="Courier New" pitchFamily="34" charset="-122"/>
                 <a:cs typeface="Courier New" pitchFamily="34" charset="-120"/>
               </a:rPr>
-              <a:t>2 / 25   Smart-RUDP</a:t>
+              <a:t>2 / 26   Smart-RUDP</a:t>
             </a:r>
             <a:endParaRPr lang="en-US" sz="1000" dirty="0"/>
           </a:p>
@@ -8152,7 +8266,7 @@
                 <a:ea typeface="Courier New" pitchFamily="34" charset="-122"/>
                 <a:cs typeface="Courier New" pitchFamily="34" charset="-120"/>
               </a:rPr>
-              <a:t>20 / 25   Smart-RUDP</a:t>
+              <a:t>20 / 26   Smart-RUDP</a:t>
             </a:r>
             <a:endParaRPr lang="en-US" sz="1000" dirty="0"/>
           </a:p>
@@ -8476,7 +8590,7 @@
                 <a:ea typeface="Courier New" pitchFamily="34" charset="-122"/>
                 <a:cs typeface="Courier New" pitchFamily="34" charset="-120"/>
               </a:rPr>
-              <a:t>21 / 25   Smart-RUDP</a:t>
+              <a:t>21 / 26   Smart-RUDP</a:t>
             </a:r>
             <a:endParaRPr lang="en-US" sz="1000" dirty="0"/>
           </a:p>
@@ -10183,7 +10297,7 @@
                 <a:ea typeface="Courier New" pitchFamily="34" charset="-122"/>
                 <a:cs typeface="Courier New" pitchFamily="34" charset="-120"/>
               </a:rPr>
-              <a:t>22 / 25   Smart-RUDP</a:t>
+              <a:t>22 / 26   Smart-RUDP</a:t>
             </a:r>
             <a:endParaRPr lang="en-US" sz="1000" dirty="0"/>
           </a:p>
@@ -11566,7 +11680,7 @@
                 <a:ea typeface="Courier New" pitchFamily="34" charset="-122"/>
                 <a:cs typeface="Courier New" pitchFamily="34" charset="-120"/>
               </a:rPr>
-              <a:t>23 / 25   Smart-RUDP</a:t>
+              <a:t>23 / 26   Smart-RUDP</a:t>
             </a:r>
             <a:endParaRPr lang="en-US" sz="1000" dirty="0"/>
           </a:p>
@@ -13070,7 +13184,7 @@
                 <a:ea typeface="Courier New" pitchFamily="34" charset="-122"/>
                 <a:cs typeface="Courier New" pitchFamily="34" charset="-120"/>
               </a:rPr>
-              <a:t>Learnings and future work</a:t>
+              <a:t>Safety net: hand over to AIMD</a:t>
             </a:r>
             <a:endParaRPr lang="en-US" sz="3000" dirty="0"/>
           </a:p>
@@ -13109,47 +13223,1424 @@
                 <a:ea typeface="Courier New" pitchFamily="34" charset="-122"/>
                 <a:cs typeface="Courier New" pitchFamily="34" charset="-120"/>
               </a:rPr>
-              <a:t>24 / 25   Smart-RUDP</a:t>
+              <a:t>24 / 26   Smart-RUDP</a:t>
             </a:r>
             <a:endParaRPr lang="en-US" sz="1000" dirty="0"/>
           </a:p>
         </p:txBody>
       </p:sp>
-      <p:sp>
-        <p:nvSpPr>
-          <p:cNvPr id="4" name="Shape 2"/>
+      <p:graphicFrame>
+        <p:nvGraphicFramePr>
+          <p:cNvPr id="25" name="Table 0"/>
+          <p:cNvGraphicFramePr>
+            <a:graphicFrameLocks noGrp="1"/>
+          </p:cNvGraphicFramePr>
+          <p:nvPr>
+            <p:extLst>
+              <p:ext uri="{D42A27DB-BD31-4B8C-83A1-F6EECF244321}">
+                <p14:modId xmlns:p14="http://schemas.microsoft.com/office/powerpoint/2010/main" val="1579011935"/>
+              </p:ext>
+            </p:extLst>
+          </p:nvPr>
+        </p:nvGraphicFramePr>
+        <p:xfrm>
+          <a:off x="548640" y="1188720"/>
+          <a:ext cx="6035040" cy="914400"/>
+        </p:xfrm>
+        <a:graphic>
+          <a:graphicData uri="http://schemas.openxmlformats.org/drawingml/2006/table">
+            <a:tbl>
+              <a:tblPr/>
+              <a:tblGrid>
+                <a:gridCol w="2468880"/>
+                <a:gridCol w="1097280"/>
+                <a:gridCol w="1188720"/>
+                <a:gridCol w="1280160"/>
+              </a:tblGrid>
+              <a:tr h="420624">
+                <a:tc>
+                  <a:txBody>
+                    <a:bodyPr/>
+                    <a:lstStyle/>
+                    <a:p>
+                      <a:pPr indent="0" marL="0">
+                        <a:buNone/>
+                      </a:pPr>
+                      <a:r>
+                        <a:rPr lang="en-US" sz="1300" b="1" dirty="0">
+                          <a:solidFill>
+                            <a:srgbClr val="0B0F14"/>
+                          </a:solidFill>
+                          <a:latin typeface="Courier New" pitchFamily="34" charset="0"/>
+                          <a:ea typeface="Courier New" pitchFamily="34" charset="-122"/>
+                          <a:cs typeface="Courier New" pitchFamily="34" charset="-120"/>
+                        </a:rPr>
+                        <a:t>C transport, seconds</a:t>
+                      </a:r>
+                      <a:endParaRPr lang="en-US" sz="1300" dirty="0">
+                        <a:latin typeface="Courier New" charset="0"/>
+                        <a:ea typeface="Courier New" charset="0"/>
+                        <a:cs typeface="Courier New" charset="0"/>
+                      </a:endParaRPr>
+                    </a:p>
+                  </a:txBody>
+                  <a:tcPr marL="91440" marR="91440" marT="45720" marB="45720">
+                    <a:lnL w="12700" cap="flat" cmpd="sng" algn="ctr">
+                      <a:solidFill>
+                        <a:srgbClr val="2A3441"/>
+                      </a:solidFill>
+                      <a:prstDash val="solid"/>
+                      <a:round/>
+                      <a:headEnd type="none" w="med" len="med"/>
+                      <a:tailEnd type="none" w="med" len="med"/>
+                    </a:lnL>
+                    <a:lnR w="12700" cap="flat" cmpd="sng" algn="ctr">
+                      <a:solidFill>
+                        <a:srgbClr val="2A3441"/>
+                      </a:solidFill>
+                      <a:prstDash val="solid"/>
+                      <a:round/>
+                      <a:headEnd type="none" w="med" len="med"/>
+                      <a:tailEnd type="none" w="med" len="med"/>
+                    </a:lnR>
+                    <a:lnT w="12700" cap="flat" cmpd="sng" algn="ctr">
+                      <a:solidFill>
+                        <a:srgbClr val="2A3441"/>
+                      </a:solidFill>
+                      <a:prstDash val="solid"/>
+                      <a:round/>
+                      <a:headEnd type="none" w="med" len="med"/>
+                      <a:tailEnd type="none" w="med" len="med"/>
+                    </a:lnT>
+                    <a:lnB w="12700" cap="flat" cmpd="sng" algn="ctr">
+                      <a:solidFill>
+                        <a:srgbClr val="2A3441"/>
+                      </a:solidFill>
+                      <a:prstDash val="solid"/>
+                      <a:round/>
+                      <a:headEnd type="none" w="med" len="med"/>
+                      <a:tailEnd type="none" w="med" len="med"/>
+                    </a:lnB>
+                    <a:solidFill>
+                      <a:srgbClr val="39FF88"/>
+                    </a:solidFill>
+                  </a:tcPr>
+                </a:tc>
+                <a:tc>
+                  <a:txBody>
+                    <a:bodyPr/>
+                    <a:lstStyle/>
+                    <a:p>
+                      <a:pPr indent="0" marL="0">
+                        <a:buNone/>
+                      </a:pPr>
+                      <a:r>
+                        <a:rPr lang="en-US" sz="1300" b="1" dirty="0">
+                          <a:solidFill>
+                            <a:srgbClr val="0B0F14"/>
+                          </a:solidFill>
+                          <a:latin typeface="Courier New" pitchFamily="34" charset="0"/>
+                          <a:ea typeface="Courier New" pitchFamily="34" charset="-122"/>
+                          <a:cs typeface="Courier New" pitchFamily="34" charset="-120"/>
+                        </a:rPr>
+                        <a:t>AIMD 32</a:t>
+                      </a:r>
+                      <a:endParaRPr lang="en-US" sz="1300" dirty="0">
+                        <a:latin typeface="Courier New" charset="0"/>
+                        <a:ea typeface="Courier New" charset="0"/>
+                        <a:cs typeface="Courier New" charset="0"/>
+                      </a:endParaRPr>
+                    </a:p>
+                  </a:txBody>
+                  <a:tcPr marL="91440" marR="91440" marT="45720" marB="45720">
+                    <a:lnL w="12700" cap="flat" cmpd="sng" algn="ctr">
+                      <a:solidFill>
+                        <a:srgbClr val="2A3441"/>
+                      </a:solidFill>
+                      <a:prstDash val="solid"/>
+                      <a:round/>
+                      <a:headEnd type="none" w="med" len="med"/>
+                      <a:tailEnd type="none" w="med" len="med"/>
+                    </a:lnL>
+                    <a:lnR w="12700" cap="flat" cmpd="sng" algn="ctr">
+                      <a:solidFill>
+                        <a:srgbClr val="2A3441"/>
+                      </a:solidFill>
+                      <a:prstDash val="solid"/>
+                      <a:round/>
+                      <a:headEnd type="none" w="med" len="med"/>
+                      <a:tailEnd type="none" w="med" len="med"/>
+                    </a:lnR>
+                    <a:lnT w="12700" cap="flat" cmpd="sng" algn="ctr">
+                      <a:solidFill>
+                        <a:srgbClr val="2A3441"/>
+                      </a:solidFill>
+                      <a:prstDash val="solid"/>
+                      <a:round/>
+                      <a:headEnd type="none" w="med" len="med"/>
+                      <a:tailEnd type="none" w="med" len="med"/>
+                    </a:lnT>
+                    <a:lnB w="12700" cap="flat" cmpd="sng" algn="ctr">
+                      <a:solidFill>
+                        <a:srgbClr val="2A3441"/>
+                      </a:solidFill>
+                      <a:prstDash val="solid"/>
+                      <a:round/>
+                      <a:headEnd type="none" w="med" len="med"/>
+                      <a:tailEnd type="none" w="med" len="med"/>
+                    </a:lnB>
+                    <a:solidFill>
+                      <a:srgbClr val="39FF88"/>
+                    </a:solidFill>
+                  </a:tcPr>
+                </a:tc>
+                <a:tc>
+                  <a:txBody>
+                    <a:bodyPr/>
+                    <a:lstStyle/>
+                    <a:p>
+                      <a:pPr indent="0" marL="0">
+                        <a:buNone/>
+                      </a:pPr>
+                      <a:r>
+                        <a:rPr lang="en-US" sz="1300" b="1" dirty="0">
+                          <a:solidFill>
+                            <a:srgbClr val="0B0F14"/>
+                          </a:solidFill>
+                          <a:latin typeface="Courier New" pitchFamily="34" charset="0"/>
+                          <a:ea typeface="Courier New" pitchFamily="34" charset="-122"/>
+                          <a:cs typeface="Courier New" pitchFamily="34" charset="-120"/>
+                        </a:rPr>
+                        <a:t>Neural</a:t>
+                      </a:r>
+                      <a:endParaRPr lang="en-US" sz="1300" dirty="0">
+                        <a:latin typeface="Courier New" charset="0"/>
+                        <a:ea typeface="Courier New" charset="0"/>
+                        <a:cs typeface="Courier New" charset="0"/>
+                      </a:endParaRPr>
+                    </a:p>
+                  </a:txBody>
+                  <a:tcPr marL="91440" marR="91440" marT="45720" marB="45720">
+                    <a:lnL w="12700" cap="flat" cmpd="sng" algn="ctr">
+                      <a:solidFill>
+                        <a:srgbClr val="2A3441"/>
+                      </a:solidFill>
+                      <a:prstDash val="solid"/>
+                      <a:round/>
+                      <a:headEnd type="none" w="med" len="med"/>
+                      <a:tailEnd type="none" w="med" len="med"/>
+                    </a:lnL>
+                    <a:lnR w="12700" cap="flat" cmpd="sng" algn="ctr">
+                      <a:solidFill>
+                        <a:srgbClr val="2A3441"/>
+                      </a:solidFill>
+                      <a:prstDash val="solid"/>
+                      <a:round/>
+                      <a:headEnd type="none" w="med" len="med"/>
+                      <a:tailEnd type="none" w="med" len="med"/>
+                    </a:lnR>
+                    <a:lnT w="12700" cap="flat" cmpd="sng" algn="ctr">
+                      <a:solidFill>
+                        <a:srgbClr val="2A3441"/>
+                      </a:solidFill>
+                      <a:prstDash val="solid"/>
+                      <a:round/>
+                      <a:headEnd type="none" w="med" len="med"/>
+                      <a:tailEnd type="none" w="med" len="med"/>
+                    </a:lnT>
+                    <a:lnB w="12700" cap="flat" cmpd="sng" algn="ctr">
+                      <a:solidFill>
+                        <a:srgbClr val="2A3441"/>
+                      </a:solidFill>
+                      <a:prstDash val="solid"/>
+                      <a:round/>
+                      <a:headEnd type="none" w="med" len="med"/>
+                      <a:tailEnd type="none" w="med" len="med"/>
+                    </a:lnB>
+                    <a:solidFill>
+                      <a:srgbClr val="39FF88"/>
+                    </a:solidFill>
+                  </a:tcPr>
+                </a:tc>
+                <a:tc>
+                  <a:txBody>
+                    <a:bodyPr/>
+                    <a:lstStyle/>
+                    <a:p>
+                      <a:pPr indent="0" marL="0">
+                        <a:buNone/>
+                      </a:pPr>
+                      <a:r>
+                        <a:rPr lang="en-US" sz="1300" b="1" dirty="0">
+                          <a:solidFill>
+                            <a:srgbClr val="0B0F14"/>
+                          </a:solidFill>
+                          <a:latin typeface="Courier New" pitchFamily="34" charset="0"/>
+                          <a:ea typeface="Courier New" pitchFamily="34" charset="-122"/>
+                          <a:cs typeface="Courier New" pitchFamily="34" charset="-120"/>
+                        </a:rPr>
+                        <a:t>Hybrid</a:t>
+                      </a:r>
+                      <a:endParaRPr lang="en-US" sz="1300" dirty="0">
+                        <a:latin typeface="Courier New" charset="0"/>
+                        <a:ea typeface="Courier New" charset="0"/>
+                        <a:cs typeface="Courier New" charset="0"/>
+                      </a:endParaRPr>
+                    </a:p>
+                  </a:txBody>
+                  <a:tcPr marL="91440" marR="91440" marT="45720" marB="45720">
+                    <a:lnL w="12700" cap="flat" cmpd="sng" algn="ctr">
+                      <a:solidFill>
+                        <a:srgbClr val="2A3441"/>
+                      </a:solidFill>
+                      <a:prstDash val="solid"/>
+                      <a:round/>
+                      <a:headEnd type="none" w="med" len="med"/>
+                      <a:tailEnd type="none" w="med" len="med"/>
+                    </a:lnL>
+                    <a:lnR w="12700" cap="flat" cmpd="sng" algn="ctr">
+                      <a:solidFill>
+                        <a:srgbClr val="2A3441"/>
+                      </a:solidFill>
+                      <a:prstDash val="solid"/>
+                      <a:round/>
+                      <a:headEnd type="none" w="med" len="med"/>
+                      <a:tailEnd type="none" w="med" len="med"/>
+                    </a:lnR>
+                    <a:lnT w="12700" cap="flat" cmpd="sng" algn="ctr">
+                      <a:solidFill>
+                        <a:srgbClr val="2A3441"/>
+                      </a:solidFill>
+                      <a:prstDash val="solid"/>
+                      <a:round/>
+                      <a:headEnd type="none" w="med" len="med"/>
+                      <a:tailEnd type="none" w="med" len="med"/>
+                    </a:lnT>
+                    <a:lnB w="12700" cap="flat" cmpd="sng" algn="ctr">
+                      <a:solidFill>
+                        <a:srgbClr val="2A3441"/>
+                      </a:solidFill>
+                      <a:prstDash val="solid"/>
+                      <a:round/>
+                      <a:headEnd type="none" w="med" len="med"/>
+                      <a:tailEnd type="none" w="med" len="med"/>
+                    </a:lnB>
+                    <a:solidFill>
+                      <a:srgbClr val="39FF88"/>
+                    </a:solidFill>
+                  </a:tcPr>
+                </a:tc>
+              </a:tr>
+              <a:tr h="420624">
+                <a:tc>
+                  <a:txBody>
+                    <a:bodyPr/>
+                    <a:lstStyle/>
+                    <a:p>
+                      <a:pPr indent="0" marL="0">
+                        <a:buNone/>
+                      </a:pPr>
+                      <a:r>
+                        <a:rPr lang="en-US" sz="1300" dirty="0">
+                          <a:solidFill>
+                            <a:srgbClr val="E6EDF3"/>
+                          </a:solidFill>
+                          <a:latin typeface="Calibri" pitchFamily="34" charset="0"/>
+                          <a:ea typeface="Calibri" pitchFamily="34" charset="-122"/>
+                          <a:cs typeface="Calibri" pitchFamily="34" charset="-120"/>
+                        </a:rPr>
+                        <a:t>5G-like</a:t>
+                      </a:r>
+                      <a:endParaRPr lang="en-US" sz="1300" dirty="0">
+                        <a:latin typeface="Calibri" charset="0"/>
+                        <a:ea typeface="Calibri" charset="0"/>
+                        <a:cs typeface="Calibri" charset="0"/>
+                      </a:endParaRPr>
+                    </a:p>
+                  </a:txBody>
+                  <a:tcPr marL="91440" marR="91440" marT="45720" marB="45720">
+                    <a:lnL w="12700" cap="flat" cmpd="sng" algn="ctr">
+                      <a:solidFill>
+                        <a:srgbClr val="2A3441"/>
+                      </a:solidFill>
+                      <a:prstDash val="solid"/>
+                      <a:round/>
+                      <a:headEnd type="none" w="med" len="med"/>
+                      <a:tailEnd type="none" w="med" len="med"/>
+                    </a:lnL>
+                    <a:lnR w="12700" cap="flat" cmpd="sng" algn="ctr">
+                      <a:solidFill>
+                        <a:srgbClr val="2A3441"/>
+                      </a:solidFill>
+                      <a:prstDash val="solid"/>
+                      <a:round/>
+                      <a:headEnd type="none" w="med" len="med"/>
+                      <a:tailEnd type="none" w="med" len="med"/>
+                    </a:lnR>
+                    <a:lnT w="12700" cap="flat" cmpd="sng" algn="ctr">
+                      <a:solidFill>
+                        <a:srgbClr val="2A3441"/>
+                      </a:solidFill>
+                      <a:prstDash val="solid"/>
+                      <a:round/>
+                      <a:headEnd type="none" w="med" len="med"/>
+                      <a:tailEnd type="none" w="med" len="med"/>
+                    </a:lnT>
+                    <a:lnB w="12700" cap="flat" cmpd="sng" algn="ctr">
+                      <a:solidFill>
+                        <a:srgbClr val="2A3441"/>
+                      </a:solidFill>
+                      <a:prstDash val="solid"/>
+                      <a:round/>
+                      <a:headEnd type="none" w="med" len="med"/>
+                      <a:tailEnd type="none" w="med" len="med"/>
+                    </a:lnB>
+                    <a:solidFill>
+                      <a:srgbClr val="141B24"/>
+                    </a:solidFill>
+                  </a:tcPr>
+                </a:tc>
+                <a:tc>
+                  <a:txBody>
+                    <a:bodyPr/>
+                    <a:lstStyle/>
+                    <a:p>
+                      <a:pPr indent="0" marL="0">
+                        <a:buNone/>
+                      </a:pPr>
+                      <a:r>
+                        <a:rPr lang="en-US" sz="1300" dirty="0">
+                          <a:solidFill>
+                            <a:srgbClr val="E6EDF3"/>
+                          </a:solidFill>
+                          <a:latin typeface="Calibri" pitchFamily="34" charset="0"/>
+                          <a:ea typeface="Calibri" pitchFamily="34" charset="-122"/>
+                          <a:cs typeface="Calibri" pitchFamily="34" charset="-120"/>
+                        </a:rPr>
+                        <a:t>1.48</a:t>
+                      </a:r>
+                      <a:endParaRPr lang="en-US" sz="1300" dirty="0">
+                        <a:latin typeface="Calibri" charset="0"/>
+                        <a:ea typeface="Calibri" charset="0"/>
+                        <a:cs typeface="Calibri" charset="0"/>
+                      </a:endParaRPr>
+                    </a:p>
+                  </a:txBody>
+                  <a:tcPr marL="91440" marR="91440" marT="45720" marB="45720">
+                    <a:lnL w="12700" cap="flat" cmpd="sng" algn="ctr">
+                      <a:solidFill>
+                        <a:srgbClr val="2A3441"/>
+                      </a:solidFill>
+                      <a:prstDash val="solid"/>
+                      <a:round/>
+                      <a:headEnd type="none" w="med" len="med"/>
+                      <a:tailEnd type="none" w="med" len="med"/>
+                    </a:lnL>
+                    <a:lnR w="12700" cap="flat" cmpd="sng" algn="ctr">
+                      <a:solidFill>
+                        <a:srgbClr val="2A3441"/>
+                      </a:solidFill>
+                      <a:prstDash val="solid"/>
+                      <a:round/>
+                      <a:headEnd type="none" w="med" len="med"/>
+                      <a:tailEnd type="none" w="med" len="med"/>
+                    </a:lnR>
+                    <a:lnT w="12700" cap="flat" cmpd="sng" algn="ctr">
+                      <a:solidFill>
+                        <a:srgbClr val="2A3441"/>
+                      </a:solidFill>
+                      <a:prstDash val="solid"/>
+                      <a:round/>
+                      <a:headEnd type="none" w="med" len="med"/>
+                      <a:tailEnd type="none" w="med" len="med"/>
+                    </a:lnT>
+                    <a:lnB w="12700" cap="flat" cmpd="sng" algn="ctr">
+                      <a:solidFill>
+                        <a:srgbClr val="2A3441"/>
+                      </a:solidFill>
+                      <a:prstDash val="solid"/>
+                      <a:round/>
+                      <a:headEnd type="none" w="med" len="med"/>
+                      <a:tailEnd type="none" w="med" len="med"/>
+                    </a:lnB>
+                    <a:solidFill>
+                      <a:srgbClr val="141B24"/>
+                    </a:solidFill>
+                  </a:tcPr>
+                </a:tc>
+                <a:tc>
+                  <a:txBody>
+                    <a:bodyPr/>
+                    <a:lstStyle/>
+                    <a:p>
+                      <a:pPr indent="0" marL="0">
+                        <a:buNone/>
+                      </a:pPr>
+                      <a:r>
+                        <a:rPr lang="en-US" sz="1300" dirty="0">
+                          <a:solidFill>
+                            <a:srgbClr val="E6EDF3"/>
+                          </a:solidFill>
+                          <a:latin typeface="Calibri" pitchFamily="34" charset="0"/>
+                          <a:ea typeface="Calibri" pitchFamily="34" charset="-122"/>
+                          <a:cs typeface="Calibri" pitchFamily="34" charset="-120"/>
+                        </a:rPr>
+                        <a:t>1.17</a:t>
+                      </a:r>
+                      <a:endParaRPr lang="en-US" sz="1300" dirty="0">
+                        <a:latin typeface="Calibri" charset="0"/>
+                        <a:ea typeface="Calibri" charset="0"/>
+                        <a:cs typeface="Calibri" charset="0"/>
+                      </a:endParaRPr>
+                    </a:p>
+                  </a:txBody>
+                  <a:tcPr marL="91440" marR="91440" marT="45720" marB="45720">
+                    <a:lnL w="12700" cap="flat" cmpd="sng" algn="ctr">
+                      <a:solidFill>
+                        <a:srgbClr val="2A3441"/>
+                      </a:solidFill>
+                      <a:prstDash val="solid"/>
+                      <a:round/>
+                      <a:headEnd type="none" w="med" len="med"/>
+                      <a:tailEnd type="none" w="med" len="med"/>
+                    </a:lnL>
+                    <a:lnR w="12700" cap="flat" cmpd="sng" algn="ctr">
+                      <a:solidFill>
+                        <a:srgbClr val="2A3441"/>
+                      </a:solidFill>
+                      <a:prstDash val="solid"/>
+                      <a:round/>
+                      <a:headEnd type="none" w="med" len="med"/>
+                      <a:tailEnd type="none" w="med" len="med"/>
+                    </a:lnR>
+                    <a:lnT w="12700" cap="flat" cmpd="sng" algn="ctr">
+                      <a:solidFill>
+                        <a:srgbClr val="2A3441"/>
+                      </a:solidFill>
+                      <a:prstDash val="solid"/>
+                      <a:round/>
+                      <a:headEnd type="none" w="med" len="med"/>
+                      <a:tailEnd type="none" w="med" len="med"/>
+                    </a:lnT>
+                    <a:lnB w="12700" cap="flat" cmpd="sng" algn="ctr">
+                      <a:solidFill>
+                        <a:srgbClr val="2A3441"/>
+                      </a:solidFill>
+                      <a:prstDash val="solid"/>
+                      <a:round/>
+                      <a:headEnd type="none" w="med" len="med"/>
+                      <a:tailEnd type="none" w="med" len="med"/>
+                    </a:lnB>
+                    <a:solidFill>
+                      <a:srgbClr val="141B24"/>
+                    </a:solidFill>
+                  </a:tcPr>
+                </a:tc>
+                <a:tc>
+                  <a:txBody>
+                    <a:bodyPr/>
+                    <a:lstStyle/>
+                    <a:p>
+                      <a:pPr indent="0" marL="0">
+                        <a:buNone/>
+                      </a:pPr>
+                      <a:r>
+                        <a:rPr lang="en-US" sz="1300" dirty="0">
+                          <a:solidFill>
+                            <a:srgbClr val="E6EDF3"/>
+                          </a:solidFill>
+                          <a:latin typeface="Calibri" pitchFamily="34" charset="0"/>
+                          <a:ea typeface="Calibri" pitchFamily="34" charset="-122"/>
+                          <a:cs typeface="Calibri" pitchFamily="34" charset="-120"/>
+                        </a:rPr>
+                        <a:t>1.23</a:t>
+                      </a:r>
+                      <a:endParaRPr lang="en-US" sz="1300" dirty="0">
+                        <a:latin typeface="Calibri" charset="0"/>
+                        <a:ea typeface="Calibri" charset="0"/>
+                        <a:cs typeface="Calibri" charset="0"/>
+                      </a:endParaRPr>
+                    </a:p>
+                  </a:txBody>
+                  <a:tcPr marL="91440" marR="91440" marT="45720" marB="45720">
+                    <a:lnL w="12700" cap="flat" cmpd="sng" algn="ctr">
+                      <a:solidFill>
+                        <a:srgbClr val="2A3441"/>
+                      </a:solidFill>
+                      <a:prstDash val="solid"/>
+                      <a:round/>
+                      <a:headEnd type="none" w="med" len="med"/>
+                      <a:tailEnd type="none" w="med" len="med"/>
+                    </a:lnL>
+                    <a:lnR w="12700" cap="flat" cmpd="sng" algn="ctr">
+                      <a:solidFill>
+                        <a:srgbClr val="2A3441"/>
+                      </a:solidFill>
+                      <a:prstDash val="solid"/>
+                      <a:round/>
+                      <a:headEnd type="none" w="med" len="med"/>
+                      <a:tailEnd type="none" w="med" len="med"/>
+                    </a:lnR>
+                    <a:lnT w="12700" cap="flat" cmpd="sng" algn="ctr">
+                      <a:solidFill>
+                        <a:srgbClr val="2A3441"/>
+                      </a:solidFill>
+                      <a:prstDash val="solid"/>
+                      <a:round/>
+                      <a:headEnd type="none" w="med" len="med"/>
+                      <a:tailEnd type="none" w="med" len="med"/>
+                    </a:lnT>
+                    <a:lnB w="12700" cap="flat" cmpd="sng" algn="ctr">
+                      <a:solidFill>
+                        <a:srgbClr val="2A3441"/>
+                      </a:solidFill>
+                      <a:prstDash val="solid"/>
+                      <a:round/>
+                      <a:headEnd type="none" w="med" len="med"/>
+                      <a:tailEnd type="none" w="med" len="med"/>
+                    </a:lnB>
+                    <a:solidFill>
+                      <a:srgbClr val="141B24"/>
+                    </a:solidFill>
+                  </a:tcPr>
+                </a:tc>
+              </a:tr>
+              <a:tr h="420624">
+                <a:tc>
+                  <a:txBody>
+                    <a:bodyPr/>
+                    <a:lstStyle/>
+                    <a:p>
+                      <a:pPr indent="0" marL="0">
+                        <a:buNone/>
+                      </a:pPr>
+                      <a:r>
+                        <a:rPr lang="en-US" sz="1300" dirty="0">
+                          <a:solidFill>
+                            <a:srgbClr val="E6EDF3"/>
+                          </a:solidFill>
+                          <a:latin typeface="Calibri" pitchFamily="34" charset="0"/>
+                          <a:ea typeface="Calibri" pitchFamily="34" charset="-122"/>
+                          <a:cs typeface="Calibri" pitchFamily="34" charset="-120"/>
+                        </a:rPr>
+                        <a:t>Lossy 2%</a:t>
+                      </a:r>
+                      <a:endParaRPr lang="en-US" sz="1300" dirty="0">
+                        <a:latin typeface="Calibri" charset="0"/>
+                        <a:ea typeface="Calibri" charset="0"/>
+                        <a:cs typeface="Calibri" charset="0"/>
+                      </a:endParaRPr>
+                    </a:p>
+                  </a:txBody>
+                  <a:tcPr marL="91440" marR="91440" marT="45720" marB="45720">
+                    <a:lnL w="12700" cap="flat" cmpd="sng" algn="ctr">
+                      <a:solidFill>
+                        <a:srgbClr val="2A3441"/>
+                      </a:solidFill>
+                      <a:prstDash val="solid"/>
+                      <a:round/>
+                      <a:headEnd type="none" w="med" len="med"/>
+                      <a:tailEnd type="none" w="med" len="med"/>
+                    </a:lnL>
+                    <a:lnR w="12700" cap="flat" cmpd="sng" algn="ctr">
+                      <a:solidFill>
+                        <a:srgbClr val="2A3441"/>
+                      </a:solidFill>
+                      <a:prstDash val="solid"/>
+                      <a:round/>
+                      <a:headEnd type="none" w="med" len="med"/>
+                      <a:tailEnd type="none" w="med" len="med"/>
+                    </a:lnR>
+                    <a:lnT w="12700" cap="flat" cmpd="sng" algn="ctr">
+                      <a:solidFill>
+                        <a:srgbClr val="2A3441"/>
+                      </a:solidFill>
+                      <a:prstDash val="solid"/>
+                      <a:round/>
+                      <a:headEnd type="none" w="med" len="med"/>
+                      <a:tailEnd type="none" w="med" len="med"/>
+                    </a:lnT>
+                    <a:lnB w="12700" cap="flat" cmpd="sng" algn="ctr">
+                      <a:solidFill>
+                        <a:srgbClr val="2A3441"/>
+                      </a:solidFill>
+                      <a:prstDash val="solid"/>
+                      <a:round/>
+                      <a:headEnd type="none" w="med" len="med"/>
+                      <a:tailEnd type="none" w="med" len="med"/>
+                    </a:lnB>
+                    <a:solidFill>
+                      <a:srgbClr val="141B24"/>
+                    </a:solidFill>
+                  </a:tcPr>
+                </a:tc>
+                <a:tc>
+                  <a:txBody>
+                    <a:bodyPr/>
+                    <a:lstStyle/>
+                    <a:p>
+                      <a:pPr indent="0" marL="0">
+                        <a:buNone/>
+                      </a:pPr>
+                      <a:r>
+                        <a:rPr lang="en-US" sz="1300" dirty="0">
+                          <a:solidFill>
+                            <a:srgbClr val="E6EDF3"/>
+                          </a:solidFill>
+                          <a:latin typeface="Calibri" pitchFamily="34" charset="0"/>
+                          <a:ea typeface="Calibri" pitchFamily="34" charset="-122"/>
+                          <a:cs typeface="Calibri" pitchFamily="34" charset="-120"/>
+                        </a:rPr>
+                        <a:t>9.04</a:t>
+                      </a:r>
+                      <a:endParaRPr lang="en-US" sz="1300" dirty="0">
+                        <a:latin typeface="Calibri" charset="0"/>
+                        <a:ea typeface="Calibri" charset="0"/>
+                        <a:cs typeface="Calibri" charset="0"/>
+                      </a:endParaRPr>
+                    </a:p>
+                  </a:txBody>
+                  <a:tcPr marL="91440" marR="91440" marT="45720" marB="45720">
+                    <a:lnL w="12700" cap="flat" cmpd="sng" algn="ctr">
+                      <a:solidFill>
+                        <a:srgbClr val="2A3441"/>
+                      </a:solidFill>
+                      <a:prstDash val="solid"/>
+                      <a:round/>
+                      <a:headEnd type="none" w="med" len="med"/>
+                      <a:tailEnd type="none" w="med" len="med"/>
+                    </a:lnL>
+                    <a:lnR w="12700" cap="flat" cmpd="sng" algn="ctr">
+                      <a:solidFill>
+                        <a:srgbClr val="2A3441"/>
+                      </a:solidFill>
+                      <a:prstDash val="solid"/>
+                      <a:round/>
+                      <a:headEnd type="none" w="med" len="med"/>
+                      <a:tailEnd type="none" w="med" len="med"/>
+                    </a:lnR>
+                    <a:lnT w="12700" cap="flat" cmpd="sng" algn="ctr">
+                      <a:solidFill>
+                        <a:srgbClr val="2A3441"/>
+                      </a:solidFill>
+                      <a:prstDash val="solid"/>
+                      <a:round/>
+                      <a:headEnd type="none" w="med" len="med"/>
+                      <a:tailEnd type="none" w="med" len="med"/>
+                    </a:lnT>
+                    <a:lnB w="12700" cap="flat" cmpd="sng" algn="ctr">
+                      <a:solidFill>
+                        <a:srgbClr val="2A3441"/>
+                      </a:solidFill>
+                      <a:prstDash val="solid"/>
+                      <a:round/>
+                      <a:headEnd type="none" w="med" len="med"/>
+                      <a:tailEnd type="none" w="med" len="med"/>
+                    </a:lnB>
+                    <a:solidFill>
+                      <a:srgbClr val="141B24"/>
+                    </a:solidFill>
+                  </a:tcPr>
+                </a:tc>
+                <a:tc>
+                  <a:txBody>
+                    <a:bodyPr/>
+                    <a:lstStyle/>
+                    <a:p>
+                      <a:pPr indent="0" marL="0">
+                        <a:buNone/>
+                      </a:pPr>
+                      <a:r>
+                        <a:rPr lang="en-US" sz="1300" dirty="0">
+                          <a:solidFill>
+                            <a:srgbClr val="E6EDF3"/>
+                          </a:solidFill>
+                          <a:latin typeface="Calibri" pitchFamily="34" charset="0"/>
+                          <a:ea typeface="Calibri" pitchFamily="34" charset="-122"/>
+                          <a:cs typeface="Calibri" pitchFamily="34" charset="-120"/>
+                        </a:rPr>
+                        <a:t>7.53</a:t>
+                      </a:r>
+                      <a:endParaRPr lang="en-US" sz="1300" dirty="0">
+                        <a:latin typeface="Calibri" charset="0"/>
+                        <a:ea typeface="Calibri" charset="0"/>
+                        <a:cs typeface="Calibri" charset="0"/>
+                      </a:endParaRPr>
+                    </a:p>
+                  </a:txBody>
+                  <a:tcPr marL="91440" marR="91440" marT="45720" marB="45720">
+                    <a:lnL w="12700" cap="flat" cmpd="sng" algn="ctr">
+                      <a:solidFill>
+                        <a:srgbClr val="2A3441"/>
+                      </a:solidFill>
+                      <a:prstDash val="solid"/>
+                      <a:round/>
+                      <a:headEnd type="none" w="med" len="med"/>
+                      <a:tailEnd type="none" w="med" len="med"/>
+                    </a:lnL>
+                    <a:lnR w="12700" cap="flat" cmpd="sng" algn="ctr">
+                      <a:solidFill>
+                        <a:srgbClr val="2A3441"/>
+                      </a:solidFill>
+                      <a:prstDash val="solid"/>
+                      <a:round/>
+                      <a:headEnd type="none" w="med" len="med"/>
+                      <a:tailEnd type="none" w="med" len="med"/>
+                    </a:lnR>
+                    <a:lnT w="12700" cap="flat" cmpd="sng" algn="ctr">
+                      <a:solidFill>
+                        <a:srgbClr val="2A3441"/>
+                      </a:solidFill>
+                      <a:prstDash val="solid"/>
+                      <a:round/>
+                      <a:headEnd type="none" w="med" len="med"/>
+                      <a:tailEnd type="none" w="med" len="med"/>
+                    </a:lnT>
+                    <a:lnB w="12700" cap="flat" cmpd="sng" algn="ctr">
+                      <a:solidFill>
+                        <a:srgbClr val="2A3441"/>
+                      </a:solidFill>
+                      <a:prstDash val="solid"/>
+                      <a:round/>
+                      <a:headEnd type="none" w="med" len="med"/>
+                      <a:tailEnd type="none" w="med" len="med"/>
+                    </a:lnB>
+                    <a:solidFill>
+                      <a:srgbClr val="141B24"/>
+                    </a:solidFill>
+                  </a:tcPr>
+                </a:tc>
+                <a:tc>
+                  <a:txBody>
+                    <a:bodyPr/>
+                    <a:lstStyle/>
+                    <a:p>
+                      <a:pPr indent="0" marL="0">
+                        <a:buNone/>
+                      </a:pPr>
+                      <a:r>
+                        <a:rPr lang="en-US" sz="1300" dirty="0">
+                          <a:solidFill>
+                            <a:srgbClr val="E6EDF3"/>
+                          </a:solidFill>
+                          <a:latin typeface="Calibri" pitchFamily="34" charset="0"/>
+                          <a:ea typeface="Calibri" pitchFamily="34" charset="-122"/>
+                          <a:cs typeface="Calibri" pitchFamily="34" charset="-120"/>
+                        </a:rPr>
+                        <a:t>7.57</a:t>
+                      </a:r>
+                      <a:endParaRPr lang="en-US" sz="1300" dirty="0">
+                        <a:latin typeface="Calibri" charset="0"/>
+                        <a:ea typeface="Calibri" charset="0"/>
+                        <a:cs typeface="Calibri" charset="0"/>
+                      </a:endParaRPr>
+                    </a:p>
+                  </a:txBody>
+                  <a:tcPr marL="91440" marR="91440" marT="45720" marB="45720">
+                    <a:lnL w="12700" cap="flat" cmpd="sng" algn="ctr">
+                      <a:solidFill>
+                        <a:srgbClr val="2A3441"/>
+                      </a:solidFill>
+                      <a:prstDash val="solid"/>
+                      <a:round/>
+                      <a:headEnd type="none" w="med" len="med"/>
+                      <a:tailEnd type="none" w="med" len="med"/>
+                    </a:lnL>
+                    <a:lnR w="12700" cap="flat" cmpd="sng" algn="ctr">
+                      <a:solidFill>
+                        <a:srgbClr val="2A3441"/>
+                      </a:solidFill>
+                      <a:prstDash val="solid"/>
+                      <a:round/>
+                      <a:headEnd type="none" w="med" len="med"/>
+                      <a:tailEnd type="none" w="med" len="med"/>
+                    </a:lnR>
+                    <a:lnT w="12700" cap="flat" cmpd="sng" algn="ctr">
+                      <a:solidFill>
+                        <a:srgbClr val="2A3441"/>
+                      </a:solidFill>
+                      <a:prstDash val="solid"/>
+                      <a:round/>
+                      <a:headEnd type="none" w="med" len="med"/>
+                      <a:tailEnd type="none" w="med" len="med"/>
+                    </a:lnT>
+                    <a:lnB w="12700" cap="flat" cmpd="sng" algn="ctr">
+                      <a:solidFill>
+                        <a:srgbClr val="2A3441"/>
+                      </a:solidFill>
+                      <a:prstDash val="solid"/>
+                      <a:round/>
+                      <a:headEnd type="none" w="med" len="med"/>
+                      <a:tailEnd type="none" w="med" len="med"/>
+                    </a:lnB>
+                    <a:solidFill>
+                      <a:srgbClr val="141B24"/>
+                    </a:solidFill>
+                  </a:tcPr>
+                </a:tc>
+              </a:tr>
+              <a:tr h="420624">
+                <a:tc>
+                  <a:txBody>
+                    <a:bodyPr/>
+                    <a:lstStyle/>
+                    <a:p>
+                      <a:pPr indent="0" marL="0">
+                        <a:buNone/>
+                      </a:pPr>
+                      <a:r>
+                        <a:rPr lang="en-US" sz="1300" dirty="0">
+                          <a:solidFill>
+                            <a:srgbClr val="E6EDF3"/>
+                          </a:solidFill>
+                          <a:latin typeface="Calibri" pitchFamily="34" charset="0"/>
+                          <a:ea typeface="Calibri" pitchFamily="34" charset="-122"/>
+                          <a:cs typeface="Calibri" pitchFamily="34" charset="-120"/>
+                        </a:rPr>
+                        <a:t>Satellite-like</a:t>
+                      </a:r>
+                      <a:endParaRPr lang="en-US" sz="1300" dirty="0">
+                        <a:latin typeface="Calibri" charset="0"/>
+                        <a:ea typeface="Calibri" charset="0"/>
+                        <a:cs typeface="Calibri" charset="0"/>
+                      </a:endParaRPr>
+                    </a:p>
+                  </a:txBody>
+                  <a:tcPr marL="91440" marR="91440" marT="45720" marB="45720">
+                    <a:lnL w="12700" cap="flat" cmpd="sng" algn="ctr">
+                      <a:solidFill>
+                        <a:srgbClr val="2A3441"/>
+                      </a:solidFill>
+                      <a:prstDash val="solid"/>
+                      <a:round/>
+                      <a:headEnd type="none" w="med" len="med"/>
+                      <a:tailEnd type="none" w="med" len="med"/>
+                    </a:lnL>
+                    <a:lnR w="12700" cap="flat" cmpd="sng" algn="ctr">
+                      <a:solidFill>
+                        <a:srgbClr val="2A3441"/>
+                      </a:solidFill>
+                      <a:prstDash val="solid"/>
+                      <a:round/>
+                      <a:headEnd type="none" w="med" len="med"/>
+                      <a:tailEnd type="none" w="med" len="med"/>
+                    </a:lnR>
+                    <a:lnT w="12700" cap="flat" cmpd="sng" algn="ctr">
+                      <a:solidFill>
+                        <a:srgbClr val="2A3441"/>
+                      </a:solidFill>
+                      <a:prstDash val="solid"/>
+                      <a:round/>
+                      <a:headEnd type="none" w="med" len="med"/>
+                      <a:tailEnd type="none" w="med" len="med"/>
+                    </a:lnT>
+                    <a:lnB w="12700" cap="flat" cmpd="sng" algn="ctr">
+                      <a:solidFill>
+                        <a:srgbClr val="2A3441"/>
+                      </a:solidFill>
+                      <a:prstDash val="solid"/>
+                      <a:round/>
+                      <a:headEnd type="none" w="med" len="med"/>
+                      <a:tailEnd type="none" w="med" len="med"/>
+                    </a:lnB>
+                    <a:solidFill>
+                      <a:srgbClr val="141B24"/>
+                    </a:solidFill>
+                  </a:tcPr>
+                </a:tc>
+                <a:tc>
+                  <a:txBody>
+                    <a:bodyPr/>
+                    <a:lstStyle/>
+                    <a:p>
+                      <a:pPr indent="0" marL="0">
+                        <a:buNone/>
+                      </a:pPr>
+                      <a:r>
+                        <a:rPr lang="en-US" sz="1300" dirty="0">
+                          <a:solidFill>
+                            <a:srgbClr val="E6EDF3"/>
+                          </a:solidFill>
+                          <a:latin typeface="Calibri" pitchFamily="34" charset="0"/>
+                          <a:ea typeface="Calibri" pitchFamily="34" charset="-122"/>
+                          <a:cs typeface="Calibri" pitchFamily="34" charset="-120"/>
+                        </a:rPr>
+                        <a:t>19.7</a:t>
+                      </a:r>
+                      <a:endParaRPr lang="en-US" sz="1300" dirty="0">
+                        <a:latin typeface="Calibri" charset="0"/>
+                        <a:ea typeface="Calibri" charset="0"/>
+                        <a:cs typeface="Calibri" charset="0"/>
+                      </a:endParaRPr>
+                    </a:p>
+                  </a:txBody>
+                  <a:tcPr marL="91440" marR="91440" marT="45720" marB="45720">
+                    <a:lnL w="12700" cap="flat" cmpd="sng" algn="ctr">
+                      <a:solidFill>
+                        <a:srgbClr val="2A3441"/>
+                      </a:solidFill>
+                      <a:prstDash val="solid"/>
+                      <a:round/>
+                      <a:headEnd type="none" w="med" len="med"/>
+                      <a:tailEnd type="none" w="med" len="med"/>
+                    </a:lnL>
+                    <a:lnR w="12700" cap="flat" cmpd="sng" algn="ctr">
+                      <a:solidFill>
+                        <a:srgbClr val="2A3441"/>
+                      </a:solidFill>
+                      <a:prstDash val="solid"/>
+                      <a:round/>
+                      <a:headEnd type="none" w="med" len="med"/>
+                      <a:tailEnd type="none" w="med" len="med"/>
+                    </a:lnR>
+                    <a:lnT w="12700" cap="flat" cmpd="sng" algn="ctr">
+                      <a:solidFill>
+                        <a:srgbClr val="2A3441"/>
+                      </a:solidFill>
+                      <a:prstDash val="solid"/>
+                      <a:round/>
+                      <a:headEnd type="none" w="med" len="med"/>
+                      <a:tailEnd type="none" w="med" len="med"/>
+                    </a:lnT>
+                    <a:lnB w="12700" cap="flat" cmpd="sng" algn="ctr">
+                      <a:solidFill>
+                        <a:srgbClr val="2A3441"/>
+                      </a:solidFill>
+                      <a:prstDash val="solid"/>
+                      <a:round/>
+                      <a:headEnd type="none" w="med" len="med"/>
+                      <a:tailEnd type="none" w="med" len="med"/>
+                    </a:lnB>
+                    <a:solidFill>
+                      <a:srgbClr val="141B24"/>
+                    </a:solidFill>
+                  </a:tcPr>
+                </a:tc>
+                <a:tc>
+                  <a:txBody>
+                    <a:bodyPr/>
+                    <a:lstStyle/>
+                    <a:p>
+                      <a:pPr indent="0" marL="0">
+                        <a:buNone/>
+                      </a:pPr>
+                      <a:r>
+                        <a:rPr lang="en-US" sz="1300" dirty="0">
+                          <a:solidFill>
+                            <a:srgbClr val="E6EDF3"/>
+                          </a:solidFill>
+                          <a:latin typeface="Calibri" pitchFamily="34" charset="0"/>
+                          <a:ea typeface="Calibri" pitchFamily="34" charset="-122"/>
+                          <a:cs typeface="Calibri" pitchFamily="34" charset="-120"/>
+                        </a:rPr>
+                        <a:t>13.4</a:t>
+                      </a:r>
+                      <a:endParaRPr lang="en-US" sz="1300" dirty="0">
+                        <a:latin typeface="Calibri" charset="0"/>
+                        <a:ea typeface="Calibri" charset="0"/>
+                        <a:cs typeface="Calibri" charset="0"/>
+                      </a:endParaRPr>
+                    </a:p>
+                  </a:txBody>
+                  <a:tcPr marL="91440" marR="91440" marT="45720" marB="45720">
+                    <a:lnL w="12700" cap="flat" cmpd="sng" algn="ctr">
+                      <a:solidFill>
+                        <a:srgbClr val="2A3441"/>
+                      </a:solidFill>
+                      <a:prstDash val="solid"/>
+                      <a:round/>
+                      <a:headEnd type="none" w="med" len="med"/>
+                      <a:tailEnd type="none" w="med" len="med"/>
+                    </a:lnL>
+                    <a:lnR w="12700" cap="flat" cmpd="sng" algn="ctr">
+                      <a:solidFill>
+                        <a:srgbClr val="2A3441"/>
+                      </a:solidFill>
+                      <a:prstDash val="solid"/>
+                      <a:round/>
+                      <a:headEnd type="none" w="med" len="med"/>
+                      <a:tailEnd type="none" w="med" len="med"/>
+                    </a:lnR>
+                    <a:lnT w="12700" cap="flat" cmpd="sng" algn="ctr">
+                      <a:solidFill>
+                        <a:srgbClr val="2A3441"/>
+                      </a:solidFill>
+                      <a:prstDash val="solid"/>
+                      <a:round/>
+                      <a:headEnd type="none" w="med" len="med"/>
+                      <a:tailEnd type="none" w="med" len="med"/>
+                    </a:lnT>
+                    <a:lnB w="12700" cap="flat" cmpd="sng" algn="ctr">
+                      <a:solidFill>
+                        <a:srgbClr val="2A3441"/>
+                      </a:solidFill>
+                      <a:prstDash val="solid"/>
+                      <a:round/>
+                      <a:headEnd type="none" w="med" len="med"/>
+                      <a:tailEnd type="none" w="med" len="med"/>
+                    </a:lnB>
+                    <a:solidFill>
+                      <a:srgbClr val="141B24"/>
+                    </a:solidFill>
+                  </a:tcPr>
+                </a:tc>
+                <a:tc>
+                  <a:txBody>
+                    <a:bodyPr/>
+                    <a:lstStyle/>
+                    <a:p>
+                      <a:pPr indent="0" marL="0">
+                        <a:buNone/>
+                      </a:pPr>
+                      <a:r>
+                        <a:rPr lang="en-US" sz="1300" dirty="0">
+                          <a:solidFill>
+                            <a:srgbClr val="E6EDF3"/>
+                          </a:solidFill>
+                          <a:latin typeface="Calibri" pitchFamily="34" charset="0"/>
+                          <a:ea typeface="Calibri" pitchFamily="34" charset="-122"/>
+                          <a:cs typeface="Calibri" pitchFamily="34" charset="-120"/>
+                        </a:rPr>
+                        <a:t>13.7</a:t>
+                      </a:r>
+                      <a:endParaRPr lang="en-US" sz="1300" dirty="0">
+                        <a:latin typeface="Calibri" charset="0"/>
+                        <a:ea typeface="Calibri" charset="0"/>
+                        <a:cs typeface="Calibri" charset="0"/>
+                      </a:endParaRPr>
+                    </a:p>
+                  </a:txBody>
+                  <a:tcPr marL="91440" marR="91440" marT="45720" marB="45720">
+                    <a:lnL w="12700" cap="flat" cmpd="sng" algn="ctr">
+                      <a:solidFill>
+                        <a:srgbClr val="2A3441"/>
+                      </a:solidFill>
+                      <a:prstDash val="solid"/>
+                      <a:round/>
+                      <a:headEnd type="none" w="med" len="med"/>
+                      <a:tailEnd type="none" w="med" len="med"/>
+                    </a:lnL>
+                    <a:lnR w="12700" cap="flat" cmpd="sng" algn="ctr">
+                      <a:solidFill>
+                        <a:srgbClr val="2A3441"/>
+                      </a:solidFill>
+                      <a:prstDash val="solid"/>
+                      <a:round/>
+                      <a:headEnd type="none" w="med" len="med"/>
+                      <a:tailEnd type="none" w="med" len="med"/>
+                    </a:lnR>
+                    <a:lnT w="12700" cap="flat" cmpd="sng" algn="ctr">
+                      <a:solidFill>
+                        <a:srgbClr val="2A3441"/>
+                      </a:solidFill>
+                      <a:prstDash val="solid"/>
+                      <a:round/>
+                      <a:headEnd type="none" w="med" len="med"/>
+                      <a:tailEnd type="none" w="med" len="med"/>
+                    </a:lnT>
+                    <a:lnB w="12700" cap="flat" cmpd="sng" algn="ctr">
+                      <a:solidFill>
+                        <a:srgbClr val="2A3441"/>
+                      </a:solidFill>
+                      <a:prstDash val="solid"/>
+                      <a:round/>
+                      <a:headEnd type="none" w="med" len="med"/>
+                      <a:tailEnd type="none" w="med" len="med"/>
+                    </a:lnB>
+                    <a:solidFill>
+                      <a:srgbClr val="141B24"/>
+                    </a:solidFill>
+                  </a:tcPr>
+                </a:tc>
+              </a:tr>
+              <a:tr h="420624">
+                <a:tc>
+                  <a:txBody>
+                    <a:bodyPr/>
+                    <a:lstStyle/>
+                    <a:p>
+                      <a:pPr indent="0" marL="0">
+                        <a:buNone/>
+                      </a:pPr>
+                      <a:r>
+                        <a:rPr lang="en-US" sz="1300" dirty="0">
+                          <a:solidFill>
+                            <a:srgbClr val="E6EDF3"/>
+                          </a:solidFill>
+                          <a:latin typeface="Calibri" pitchFamily="34" charset="0"/>
+                          <a:ea typeface="Calibri" pitchFamily="34" charset="-122"/>
+                          <a:cs typeface="Calibri" pitchFamily="34" charset="-120"/>
+                        </a:rPr>
+                        <a:t>Hostile, 10% loss</a:t>
+                      </a:r>
+                      <a:endParaRPr lang="en-US" sz="1300" dirty="0">
+                        <a:latin typeface="Calibri" charset="0"/>
+                        <a:ea typeface="Calibri" charset="0"/>
+                        <a:cs typeface="Calibri" charset="0"/>
+                      </a:endParaRPr>
+                    </a:p>
+                  </a:txBody>
+                  <a:tcPr marL="91440" marR="91440" marT="45720" marB="45720">
+                    <a:lnL w="12700" cap="flat" cmpd="sng" algn="ctr">
+                      <a:solidFill>
+                        <a:srgbClr val="2A3441"/>
+                      </a:solidFill>
+                      <a:prstDash val="solid"/>
+                      <a:round/>
+                      <a:headEnd type="none" w="med" len="med"/>
+                      <a:tailEnd type="none" w="med" len="med"/>
+                    </a:lnL>
+                    <a:lnR w="12700" cap="flat" cmpd="sng" algn="ctr">
+                      <a:solidFill>
+                        <a:srgbClr val="2A3441"/>
+                      </a:solidFill>
+                      <a:prstDash val="solid"/>
+                      <a:round/>
+                      <a:headEnd type="none" w="med" len="med"/>
+                      <a:tailEnd type="none" w="med" len="med"/>
+                    </a:lnR>
+                    <a:lnT w="12700" cap="flat" cmpd="sng" algn="ctr">
+                      <a:solidFill>
+                        <a:srgbClr val="2A3441"/>
+                      </a:solidFill>
+                      <a:prstDash val="solid"/>
+                      <a:round/>
+                      <a:headEnd type="none" w="med" len="med"/>
+                      <a:tailEnd type="none" w="med" len="med"/>
+                    </a:lnT>
+                    <a:lnB w="12700" cap="flat" cmpd="sng" algn="ctr">
+                      <a:solidFill>
+                        <a:srgbClr val="2A3441"/>
+                      </a:solidFill>
+                      <a:prstDash val="solid"/>
+                      <a:round/>
+                      <a:headEnd type="none" w="med" len="med"/>
+                      <a:tailEnd type="none" w="med" len="med"/>
+                    </a:lnB>
+                    <a:solidFill>
+                      <a:srgbClr val="141B24"/>
+                    </a:solidFill>
+                  </a:tcPr>
+                </a:tc>
+                <a:tc>
+                  <a:txBody>
+                    <a:bodyPr/>
+                    <a:lstStyle/>
+                    <a:p>
+                      <a:pPr indent="0" marL="0">
+                        <a:buNone/>
+                      </a:pPr>
+                      <a:r>
+                        <a:rPr lang="en-US" sz="1300" dirty="0">
+                          <a:solidFill>
+                            <a:srgbClr val="E6EDF3"/>
+                          </a:solidFill>
+                          <a:latin typeface="Calibri" pitchFamily="34" charset="0"/>
+                          <a:ea typeface="Calibri" pitchFamily="34" charset="-122"/>
+                          <a:cs typeface="Calibri" pitchFamily="34" charset="-120"/>
+                        </a:rPr>
+                        <a:t>11.1</a:t>
+                      </a:r>
+                      <a:endParaRPr lang="en-US" sz="1300" dirty="0">
+                        <a:latin typeface="Calibri" charset="0"/>
+                        <a:ea typeface="Calibri" charset="0"/>
+                        <a:cs typeface="Calibri" charset="0"/>
+                      </a:endParaRPr>
+                    </a:p>
+                  </a:txBody>
+                  <a:tcPr marL="91440" marR="91440" marT="45720" marB="45720">
+                    <a:lnL w="12700" cap="flat" cmpd="sng" algn="ctr">
+                      <a:solidFill>
+                        <a:srgbClr val="2A3441"/>
+                      </a:solidFill>
+                      <a:prstDash val="solid"/>
+                      <a:round/>
+                      <a:headEnd type="none" w="med" len="med"/>
+                      <a:tailEnd type="none" w="med" len="med"/>
+                    </a:lnL>
+                    <a:lnR w="12700" cap="flat" cmpd="sng" algn="ctr">
+                      <a:solidFill>
+                        <a:srgbClr val="2A3441"/>
+                      </a:solidFill>
+                      <a:prstDash val="solid"/>
+                      <a:round/>
+                      <a:headEnd type="none" w="med" len="med"/>
+                      <a:tailEnd type="none" w="med" len="med"/>
+                    </a:lnR>
+                    <a:lnT w="12700" cap="flat" cmpd="sng" algn="ctr">
+                      <a:solidFill>
+                        <a:srgbClr val="2A3441"/>
+                      </a:solidFill>
+                      <a:prstDash val="solid"/>
+                      <a:round/>
+                      <a:headEnd type="none" w="med" len="med"/>
+                      <a:tailEnd type="none" w="med" len="med"/>
+                    </a:lnT>
+                    <a:lnB w="12700" cap="flat" cmpd="sng" algn="ctr">
+                      <a:solidFill>
+                        <a:srgbClr val="2A3441"/>
+                      </a:solidFill>
+                      <a:prstDash val="solid"/>
+                      <a:round/>
+                      <a:headEnd type="none" w="med" len="med"/>
+                      <a:tailEnd type="none" w="med" len="med"/>
+                    </a:lnB>
+                    <a:solidFill>
+                      <a:srgbClr val="141B24"/>
+                    </a:solidFill>
+                  </a:tcPr>
+                </a:tc>
+                <a:tc>
+                  <a:txBody>
+                    <a:bodyPr/>
+                    <a:lstStyle/>
+                    <a:p>
+                      <a:pPr indent="0" marL="0">
+                        <a:buNone/>
+                      </a:pPr>
+                      <a:r>
+                        <a:rPr lang="en-US" sz="1300" dirty="0">
+                          <a:solidFill>
+                            <a:srgbClr val="E6EDF3"/>
+                          </a:solidFill>
+                          <a:latin typeface="Calibri" pitchFamily="34" charset="0"/>
+                          <a:ea typeface="Calibri" pitchFamily="34" charset="-122"/>
+                          <a:cs typeface="Calibri" pitchFamily="34" charset="-120"/>
+                        </a:rPr>
+                        <a:t>84.9</a:t>
+                      </a:r>
+                      <a:endParaRPr lang="en-US" sz="1300" dirty="0">
+                        <a:latin typeface="Calibri" charset="0"/>
+                        <a:ea typeface="Calibri" charset="0"/>
+                        <a:cs typeface="Calibri" charset="0"/>
+                      </a:endParaRPr>
+                    </a:p>
+                  </a:txBody>
+                  <a:tcPr marL="91440" marR="91440" marT="45720" marB="45720">
+                    <a:lnL w="12700" cap="flat" cmpd="sng" algn="ctr">
+                      <a:solidFill>
+                        <a:srgbClr val="2A3441"/>
+                      </a:solidFill>
+                      <a:prstDash val="solid"/>
+                      <a:round/>
+                      <a:headEnd type="none" w="med" len="med"/>
+                      <a:tailEnd type="none" w="med" len="med"/>
+                    </a:lnL>
+                    <a:lnR w="12700" cap="flat" cmpd="sng" algn="ctr">
+                      <a:solidFill>
+                        <a:srgbClr val="2A3441"/>
+                      </a:solidFill>
+                      <a:prstDash val="solid"/>
+                      <a:round/>
+                      <a:headEnd type="none" w="med" len="med"/>
+                      <a:tailEnd type="none" w="med" len="med"/>
+                    </a:lnR>
+                    <a:lnT w="12700" cap="flat" cmpd="sng" algn="ctr">
+                      <a:solidFill>
+                        <a:srgbClr val="2A3441"/>
+                      </a:solidFill>
+                      <a:prstDash val="solid"/>
+                      <a:round/>
+                      <a:headEnd type="none" w="med" len="med"/>
+                      <a:tailEnd type="none" w="med" len="med"/>
+                    </a:lnT>
+                    <a:lnB w="12700" cap="flat" cmpd="sng" algn="ctr">
+                      <a:solidFill>
+                        <a:srgbClr val="2A3441"/>
+                      </a:solidFill>
+                      <a:prstDash val="solid"/>
+                      <a:round/>
+                      <a:headEnd type="none" w="med" len="med"/>
+                      <a:tailEnd type="none" w="med" len="med"/>
+                    </a:lnB>
+                    <a:solidFill>
+                      <a:srgbClr val="141B24"/>
+                    </a:solidFill>
+                  </a:tcPr>
+                </a:tc>
+                <a:tc>
+                  <a:txBody>
+                    <a:bodyPr/>
+                    <a:lstStyle/>
+                    <a:p>
+                      <a:pPr indent="0" marL="0">
+                        <a:buNone/>
+                      </a:pPr>
+                      <a:r>
+                        <a:rPr lang="en-US" sz="1300" dirty="0">
+                          <a:solidFill>
+                            <a:srgbClr val="E6EDF3"/>
+                          </a:solidFill>
+                          <a:latin typeface="Calibri" pitchFamily="34" charset="0"/>
+                          <a:ea typeface="Calibri" pitchFamily="34" charset="-122"/>
+                          <a:cs typeface="Calibri" pitchFamily="34" charset="-120"/>
+                        </a:rPr>
+                        <a:t>13.9</a:t>
+                      </a:r>
+                      <a:endParaRPr lang="en-US" sz="1300" dirty="0">
+                        <a:latin typeface="Calibri" charset="0"/>
+                        <a:ea typeface="Calibri" charset="0"/>
+                        <a:cs typeface="Calibri" charset="0"/>
+                      </a:endParaRPr>
+                    </a:p>
+                  </a:txBody>
+                  <a:tcPr marL="91440" marR="91440" marT="45720" marB="45720">
+                    <a:lnL w="12700" cap="flat" cmpd="sng" algn="ctr">
+                      <a:solidFill>
+                        <a:srgbClr val="2A3441"/>
+                      </a:solidFill>
+                      <a:prstDash val="solid"/>
+                      <a:round/>
+                      <a:headEnd type="none" w="med" len="med"/>
+                      <a:tailEnd type="none" w="med" len="med"/>
+                    </a:lnL>
+                    <a:lnR w="12700" cap="flat" cmpd="sng" algn="ctr">
+                      <a:solidFill>
+                        <a:srgbClr val="2A3441"/>
+                      </a:solidFill>
+                      <a:prstDash val="solid"/>
+                      <a:round/>
+                      <a:headEnd type="none" w="med" len="med"/>
+                      <a:tailEnd type="none" w="med" len="med"/>
+                    </a:lnR>
+                    <a:lnT w="12700" cap="flat" cmpd="sng" algn="ctr">
+                      <a:solidFill>
+                        <a:srgbClr val="2A3441"/>
+                      </a:solidFill>
+                      <a:prstDash val="solid"/>
+                      <a:round/>
+                      <a:headEnd type="none" w="med" len="med"/>
+                      <a:tailEnd type="none" w="med" len="med"/>
+                    </a:lnT>
+                    <a:lnB w="12700" cap="flat" cmpd="sng" algn="ctr">
+                      <a:solidFill>
+                        <a:srgbClr val="2A3441"/>
+                      </a:solidFill>
+                      <a:prstDash val="solid"/>
+                      <a:round/>
+                      <a:headEnd type="none" w="med" len="med"/>
+                      <a:tailEnd type="none" w="med" len="med"/>
+                    </a:lnB>
+                    <a:solidFill>
+                      <a:srgbClr val="141B24"/>
+                    </a:solidFill>
+                  </a:tcPr>
+                </a:tc>
+              </a:tr>
+            </a:tbl>
+          </a:graphicData>
+        </a:graphic>
+      </p:graphicFrame>
+      <p:sp>
+        <p:nvSpPr>
+          <p:cNvPr id="5" name="Text 2"/>
           <p:cNvSpPr/>
           <p:nvPr/>
         </p:nvSpPr>
         <p:spPr>
           <a:xfrm>
-            <a:off x="548640" y="1371600"/>
-            <a:ext cx="5394960" cy="4206240"/>
-          </a:xfrm>
-          <a:prstGeom prst="rect">
-            <a:avLst/>
-          </a:prstGeom>
-          <a:solidFill>
-            <a:srgbClr val="141B24"/>
-          </a:solidFill>
-          <a:ln w="12700">
-            <a:solidFill>
-              <a:srgbClr val="39FF88"/>
-            </a:solidFill>
-            <a:prstDash val="solid"/>
-          </a:ln>
-        </p:spPr>
-      </p:sp>
-      <p:sp>
-        <p:nvSpPr>
-          <p:cNvPr id="5" name="Text 3"/>
-          <p:cNvSpPr/>
-          <p:nvPr/>
-        </p:nvSpPr>
-        <p:spPr>
-          <a:xfrm>
-            <a:off x="731520" y="1508760"/>
-            <a:ext cx="5029200" cy="457200"/>
+            <a:off x="6949440" y="1188720"/>
+            <a:ext cx="4846320" cy="4937760"/>
           </a:xfrm>
           <a:prstGeom prst="rect">
             <a:avLst/>
@@ -13158,37 +14649,125 @@
           <a:ln/>
         </p:spPr>
         <p:txBody>
-          <a:bodyPr wrap="square" lIns="0" tIns="0" rIns="0" bIns="0" rtlCol="0" anchor="ctr"/>
-          <a:lstStyle/>
-          <a:p>
-            <a:pPr indent="0" marL="0">
-              <a:buNone/>
-            </a:pPr>
-            <a:r>
-              <a:rPr lang="en-US" sz="2000" b="1" dirty="0">
-                <a:solidFill>
-                  <a:srgbClr val="39FF88"/>
-                </a:solidFill>
-                <a:latin typeface="Courier New" pitchFamily="34" charset="0"/>
-                <a:ea typeface="Courier New" pitchFamily="34" charset="-122"/>
-                <a:cs typeface="Courier New" pitchFamily="34" charset="-120"/>
-              </a:rPr>
-              <a:t>Learned</a:t>
-            </a:r>
-            <a:endParaRPr lang="en-US" sz="2000" dirty="0"/>
-          </a:p>
-        </p:txBody>
-      </p:sp>
-      <p:sp>
-        <p:nvSpPr>
-          <p:cNvPr id="6" name="Text 4"/>
+          <a:bodyPr wrap="square" lIns="0" tIns="0" rIns="0" bIns="0" rtlCol="0" anchor="t"/>
+          <a:lstStyle/>
+          <a:p>
+            <a:pPr marL="342900" indent="-342900">
+              <a:spcAft>
+                <a:spcPts val="800"/>
+              </a:spcAft>
+              <a:buSzPct val="100000"/>
+              <a:buChar char="•"/>
+            </a:pPr>
+            <a:r>
+              <a:rPr lang="en-US" sz="1400" dirty="0">
+                <a:solidFill>
+                  <a:srgbClr val="E6EDF3"/>
+                </a:solidFill>
+                <a:latin typeface="Calibri" pitchFamily="34" charset="0"/>
+                <a:ea typeface="Calibri" pitchFamily="34" charset="-122"/>
+                <a:cs typeface="Calibri" pitchFamily="34" charset="-120"/>
+              </a:rPr>
+              <a:t>Problem found: at 10% loss the neural agent is 7x slower than AIMD</a:t>
+            </a:r>
+            <a:endParaRPr lang="en-US" sz="1400" dirty="0"/>
+          </a:p>
+          <a:p>
+            <a:pPr marL="342900" indent="-342900">
+              <a:spcAft>
+                <a:spcPts val="800"/>
+              </a:spcAft>
+              <a:buSzPct val="100000"/>
+              <a:buChar char="•"/>
+            </a:pPr>
+            <a:r>
+              <a:rPr lang="en-US" sz="1400" dirty="0">
+                <a:solidFill>
+                  <a:srgbClr val="E6EDF3"/>
+                </a:solidFill>
+                <a:latin typeface="Calibri" pitchFamily="34" charset="0"/>
+                <a:ea typeface="Calibri" pitchFamily="34" charset="-122"/>
+                <a:cs typeface="Calibri" pitchFamily="34" charset="-120"/>
+              </a:rPr>
+              <a:t>Fix: while a decision interval loses 10% or more, AIMD drives the window; after 3 clean intervals the agent resumes</a:t>
+            </a:r>
+            <a:endParaRPr lang="en-US" sz="1400" dirty="0"/>
+          </a:p>
+          <a:p>
+            <a:pPr marL="342900" indent="-342900">
+              <a:spcAft>
+                <a:spcPts val="800"/>
+              </a:spcAft>
+              <a:buSzPct val="100000"/>
+              <a:buChar char="•"/>
+            </a:pPr>
+            <a:r>
+              <a:rPr lang="en-US" sz="1400" dirty="0">
+                <a:solidFill>
+                  <a:srgbClr val="E6EDF3"/>
+                </a:solidFill>
+                <a:latin typeface="Calibri" pitchFamily="34" charset="0"/>
+                <a:ea typeface="Calibri" pitchFamily="34" charset="-122"/>
+                <a:cs typeface="Calibri" pitchFamily="34" charset="-120"/>
+              </a:rPr>
+              <a:t>Keeps the wins on the three benign paths, and the hostile path is no longer significantly different from AIMD</a:t>
+            </a:r>
+            <a:endParaRPr lang="en-US" sz="1400" dirty="0"/>
+          </a:p>
+          <a:p>
+            <a:pPr marL="342900" indent="-342900">
+              <a:spcAft>
+                <a:spcPts val="800"/>
+              </a:spcAft>
+              <a:buSzPct val="100000"/>
+              <a:buChar char="•"/>
+            </a:pPr>
+            <a:r>
+              <a:rPr lang="en-US" sz="1400" dirty="0">
+                <a:solidFill>
+                  <a:srgbClr val="E6EDF3"/>
+                </a:solidFill>
+                <a:latin typeface="Calibri" pitchFamily="34" charset="0"/>
+                <a:ea typeface="Calibri" pitchFamily="34" charset="-122"/>
+                <a:cs typeface="Calibri" pitchFamily="34" charset="-120"/>
+              </a:rPr>
+              <a:t>A timeout cut (x0.25) was tried and dropped: it helped the hostile path but hurt the 2% path (24 s vs 9 s)</a:t>
+            </a:r>
+            <a:endParaRPr lang="en-US" sz="1400" dirty="0"/>
+          </a:p>
+          <a:p>
+            <a:pPr marL="342900" indent="-342900">
+              <a:spcAft>
+                <a:spcPts val="800"/>
+              </a:spcAft>
+              <a:buSzPct val="100000"/>
+              <a:buChar char="•"/>
+            </a:pPr>
+            <a:r>
+              <a:rPr lang="en-US" sz="1400" dirty="0">
+                <a:solidFill>
+                  <a:srgbClr val="E6EDF3"/>
+                </a:solidFill>
+                <a:latin typeface="Calibri" pitchFamily="34" charset="0"/>
+                <a:ea typeface="Calibri" pitchFamily="34" charset="-122"/>
+                <a:cs typeface="Calibri" pitchFamily="34" charset="-120"/>
+              </a:rPr>
+              <a:t>Honest summary: the agent helps on clean-to-moderate paths; it needs a classical safety net elsewhere</a:t>
+            </a:r>
+            <a:endParaRPr lang="en-US" sz="1400" dirty="0"/>
+          </a:p>
+        </p:txBody>
+      </p:sp>
+      <p:sp>
+        <p:nvSpPr>
+          <p:cNvPr id="6" name="Text 3"/>
           <p:cNvSpPr/>
           <p:nvPr/>
         </p:nvSpPr>
         <p:spPr>
           <a:xfrm>
-            <a:off x="731520" y="2011680"/>
-            <a:ext cx="5029200" cy="3429000"/>
+            <a:off x="548640" y="3840480"/>
+            <a:ext cx="6035040" cy="731520"/>
           </a:xfrm>
           <a:prstGeom prst="rect">
             <a:avLst/>
@@ -13197,234 +14776,24 @@
           <a:ln/>
         </p:spPr>
         <p:txBody>
-          <a:bodyPr wrap="square" lIns="0" tIns="0" rIns="0" bIns="0" rtlCol="0" anchor="t"/>
+          <a:bodyPr wrap="square" lIns="0" tIns="0" rIns="0" bIns="0" rtlCol="0" anchor="ctr"/>
           <a:lstStyle/>
           <a:p>
             <a:pPr indent="0" marL="0">
               <a:buNone/>
             </a:pPr>
             <a:r>
-              <a:rPr lang="en-US" sz="2000" dirty="0">
-                <a:solidFill>
-                  <a:srgbClr val="E6EDF3"/>
+              <a:rPr lang="en-US" sz="1300" dirty="0">
+                <a:solidFill>
+                  <a:srgbClr val="8B98A5"/>
                 </a:solidFill>
                 <a:latin typeface="Calibri" pitchFamily="34" charset="0"/>
                 <a:ea typeface="Calibri" pitchFamily="34" charset="-122"/>
                 <a:cs typeface="Calibri" pitchFamily="34" charset="-120"/>
               </a:rPr>
-              <a:t>Reliability is a set of simple rules working together.</a:t>
-            </a:r>
-            <a:endParaRPr lang="en-US" sz="2000" dirty="0"/>
-          </a:p>
-          <a:p>
-            <a:pPr indent="0" marL="0">
-              <a:buNone/>
-            </a:pPr>
-            <a:r>
-              <a:rPr lang="en-US" sz="2000" dirty="0">
-                <a:solidFill>
-                  <a:srgbClr val="E6EDF3"/>
-                </a:solidFill>
-                <a:latin typeface="Calibri" pitchFamily="34" charset="0"/>
-                <a:ea typeface="Calibri" pitchFamily="34" charset="-122"/>
-                <a:cs typeface="Calibri" pitchFamily="34" charset="-120"/>
-              </a:rPr>
-              <a:t>Congestion control matters as much as retransmission.</a:t>
-            </a:r>
-            <a:endParaRPr lang="en-US" sz="2000" dirty="0"/>
-          </a:p>
-          <a:p>
-            <a:pPr indent="0" marL="0">
-              <a:buNone/>
-            </a:pPr>
-            <a:r>
-              <a:rPr lang="en-US" sz="2000" dirty="0">
-                <a:solidFill>
-                  <a:srgbClr val="E6EDF3"/>
-                </a:solidFill>
-                <a:latin typeface="Calibri" pitchFamily="34" charset="0"/>
-                <a:ea typeface="Calibri" pitchFamily="34" charset="-122"/>
-                <a:cs typeface="Calibri" pitchFamily="34" charset="-120"/>
-              </a:rPr>
-              <a:t>Testing tools fail in surprising ways.</a:t>
-            </a:r>
-            <a:endParaRPr lang="en-US" sz="2000" dirty="0"/>
-          </a:p>
-        </p:txBody>
-      </p:sp>
-      <p:sp>
-        <p:nvSpPr>
-          <p:cNvPr id="7" name="Shape 5"/>
-          <p:cNvSpPr/>
-          <p:nvPr/>
-        </p:nvSpPr>
-        <p:spPr>
-          <a:xfrm>
-            <a:off x="6217920" y="1371600"/>
-            <a:ext cx="5394960" cy="4206240"/>
-          </a:xfrm>
-          <a:prstGeom prst="rect">
-            <a:avLst/>
-          </a:prstGeom>
-          <a:solidFill>
-            <a:srgbClr val="141B24"/>
-          </a:solidFill>
-          <a:ln w="12700">
-            <a:solidFill>
-              <a:srgbClr val="FFB000"/>
-            </a:solidFill>
-            <a:prstDash val="solid"/>
-          </a:ln>
-        </p:spPr>
-      </p:sp>
-      <p:sp>
-        <p:nvSpPr>
-          <p:cNvPr id="8" name="Text 6"/>
-          <p:cNvSpPr/>
-          <p:nvPr/>
-        </p:nvSpPr>
-        <p:spPr>
-          <a:xfrm>
-            <a:off x="6400800" y="1508760"/>
-            <a:ext cx="5029200" cy="457200"/>
-          </a:xfrm>
-          <a:prstGeom prst="rect">
-            <a:avLst/>
-          </a:prstGeom>
-          <a:noFill/>
-          <a:ln/>
-        </p:spPr>
-        <p:txBody>
-          <a:bodyPr wrap="square" lIns="0" tIns="0" rIns="0" bIns="0" rtlCol="0" anchor="ctr"/>
-          <a:lstStyle/>
-          <a:p>
-            <a:pPr indent="0" marL="0">
-              <a:buNone/>
-            </a:pPr>
-            <a:r>
-              <a:rPr lang="en-US" sz="2000" b="1" dirty="0">
-                <a:solidFill>
-                  <a:srgbClr val="FFB000"/>
-                </a:solidFill>
-                <a:latin typeface="Courier New" pitchFamily="34" charset="0"/>
-                <a:ea typeface="Courier New" pitchFamily="34" charset="-122"/>
-                <a:cs typeface="Courier New" pitchFamily="34" charset="-120"/>
-              </a:rPr>
-              <a:t>Next</a:t>
-            </a:r>
-            <a:endParaRPr lang="en-US" sz="2000" dirty="0"/>
-          </a:p>
-        </p:txBody>
-      </p:sp>
-      <p:sp>
-        <p:nvSpPr>
-          <p:cNvPr id="9" name="Text 7"/>
-          <p:cNvSpPr/>
-          <p:nvPr/>
-        </p:nvSpPr>
-        <p:spPr>
-          <a:xfrm>
-            <a:off x="6400800" y="2011680"/>
-            <a:ext cx="5029200" cy="3429000"/>
-          </a:xfrm>
-          <a:prstGeom prst="rect">
-            <a:avLst/>
-          </a:prstGeom>
-          <a:noFill/>
-          <a:ln/>
-        </p:spPr>
-        <p:txBody>
-          <a:bodyPr wrap="square" lIns="0" tIns="0" rIns="0" bIns="0" rtlCol="0" anchor="t"/>
-          <a:lstStyle/>
-          <a:p>
-            <a:pPr indent="0" marL="0">
-              <a:buNone/>
-            </a:pPr>
-            <a:r>
-              <a:rPr lang="en-US" sz="2000" dirty="0">
-                <a:solidFill>
-                  <a:srgbClr val="E6EDF3"/>
-                </a:solidFill>
-                <a:latin typeface="Calibri" pitchFamily="34" charset="0"/>
-                <a:ea typeface="Calibri" pitchFamily="34" charset="-122"/>
-                <a:cs typeface="Calibri" pitchFamily="34" charset="-120"/>
-              </a:rPr>
-              <a:t>Train the neural agent in C / on real netem</a:t>
-            </a:r>
-            <a:endParaRPr lang="en-US" sz="2000" dirty="0"/>
-          </a:p>
-          <a:p>
-            <a:pPr indent="0" marL="0">
-              <a:buNone/>
-            </a:pPr>
-            <a:r>
-              <a:rPr lang="en-US" sz="2000" dirty="0">
-                <a:solidFill>
-                  <a:srgbClr val="E6EDF3"/>
-                </a:solidFill>
-                <a:latin typeface="Calibri" pitchFamily="34" charset="0"/>
-                <a:ea typeface="Calibri" pitchFamily="34" charset="-122"/>
-                <a:cs typeface="Calibri" pitchFamily="34" charset="-120"/>
-              </a:rPr>
-              <a:t>Selective ACK where throughput limits the path</a:t>
-            </a:r>
-            <a:endParaRPr lang="en-US" sz="2000" dirty="0"/>
-          </a:p>
-          <a:p>
-            <a:pPr indent="0" marL="0">
-              <a:buNone/>
-            </a:pPr>
-            <a:r>
-              <a:rPr lang="en-US" sz="2000" dirty="0">
-                <a:solidFill>
-                  <a:srgbClr val="E6EDF3"/>
-                </a:solidFill>
-                <a:latin typeface="Calibri" pitchFamily="34" charset="0"/>
-                <a:ea typeface="Calibri" pitchFamily="34" charset="-122"/>
-                <a:cs typeface="Calibri" pitchFamily="34" charset="-120"/>
-              </a:rPr>
-              <a:t>Kernel netem and real multi-machine tests</a:t>
-            </a:r>
-            <a:endParaRPr lang="en-US" sz="2000" dirty="0"/>
-          </a:p>
-        </p:txBody>
-      </p:sp>
-      <p:sp>
-        <p:nvSpPr>
-          <p:cNvPr id="10" name="Text 8"/>
-          <p:cNvSpPr/>
-          <p:nvPr/>
-        </p:nvSpPr>
-        <p:spPr>
-          <a:xfrm>
-            <a:off x="548640" y="5852160"/>
-            <a:ext cx="10972800" cy="365760"/>
-          </a:xfrm>
-          <a:prstGeom prst="rect">
-            <a:avLst/>
-          </a:prstGeom>
-          <a:noFill/>
-          <a:ln/>
-        </p:spPr>
-        <p:txBody>
-          <a:bodyPr wrap="square" lIns="0" tIns="0" rIns="0" bIns="0" rtlCol="0" anchor="ctr"/>
-          <a:lstStyle/>
-          <a:p>
-            <a:pPr indent="0" marL="0">
-              <a:buNone/>
-            </a:pPr>
-            <a:r>
-              <a:rPr lang="en-US" sz="1400" dirty="0">
-                <a:solidFill>
-                  <a:srgbClr val="8B98A5"/>
-                </a:solidFill>
-                <a:latin typeface="Calibri" pitchFamily="34" charset="0"/>
-                <a:ea typeface="Calibri" pitchFamily="34" charset="-122"/>
-                <a:cs typeface="Calibri" pitchFamily="34" charset="-120"/>
-              </a:rPr>
-              <a:t>Limits: Go-Back-N wastes bandwidth and suffers under reordering; C tests use an emulated path; the tabular agent did not beat AIMD in C.</a:t>
-            </a:r>
-            <a:endParaRPr lang="en-US" sz="1400" dirty="0"/>
+              <a:t>10 runs per cell (hostile: 5 runs, 300 packets), 95% intervals. Flag: --hybrid 0.10. Code: eval_ci6.sh.</a:t>
+            </a:r>
+            <a:endParaRPr lang="en-US" sz="1300" dirty="0"/>
           </a:p>
         </p:txBody>
       </p:sp>
@@ -13468,8 +14837,8 @@
         </p:nvSpPr>
         <p:spPr>
           <a:xfrm>
-            <a:off x="731520" y="2103120"/>
-            <a:ext cx="10058400" cy="1097280"/>
+            <a:off x="548640" y="320040"/>
+            <a:ext cx="11064240" cy="731520"/>
           </a:xfrm>
           <a:prstGeom prst="rect">
             <a:avLst/>
@@ -13485,7 +14854,7 @@
               <a:buNone/>
             </a:pPr>
             <a:r>
-              <a:rPr lang="en-US" sz="6400" b="1" dirty="0">
+              <a:rPr lang="en-US" sz="3000" b="1" dirty="0">
                 <a:solidFill>
                   <a:srgbClr val="39FF88"/>
                 </a:solidFill>
@@ -13493,9 +14862,9 @@
                 <a:ea typeface="Courier New" pitchFamily="34" charset="-122"/>
                 <a:cs typeface="Courier New" pitchFamily="34" charset="-120"/>
               </a:rPr>
-              <a:t>Thank you</a:t>
-            </a:r>
-            <a:endParaRPr lang="en-US" sz="6400" dirty="0"/>
+              <a:t>Learnings and future work</a:t>
+            </a:r>
+            <a:endParaRPr lang="en-US" sz="3000" dirty="0"/>
           </a:p>
         </p:txBody>
       </p:sp>
@@ -13507,8 +14876,8 @@
         </p:nvSpPr>
         <p:spPr>
           <a:xfrm>
-            <a:off x="731520" y="3474720"/>
-            <a:ext cx="10058400" cy="548640"/>
+            <a:off x="9418320" y="6446520"/>
+            <a:ext cx="2377440" cy="274320"/>
           </a:xfrm>
           <a:prstGeom prst="rect">
             <a:avLst/>
@@ -13520,34 +14889,59 @@
           <a:bodyPr wrap="square" lIns="0" tIns="0" rIns="0" bIns="0" rtlCol="0" anchor="ctr"/>
           <a:lstStyle/>
           <a:p>
-            <a:pPr indent="0" marL="0">
+            <a:pPr algn="r" indent="0" marL="0">
               <a:buNone/>
             </a:pPr>
             <a:r>
-              <a:rPr lang="en-US" sz="2600" dirty="0">
-                <a:solidFill>
-                  <a:srgbClr val="E6EDF3"/>
+              <a:rPr lang="en-US" sz="1000" dirty="0">
+                <a:solidFill>
+                  <a:srgbClr val="8B98A5"/>
                 </a:solidFill>
                 <a:latin typeface="Courier New" pitchFamily="34" charset="0"/>
                 <a:ea typeface="Courier New" pitchFamily="34" charset="-122"/>
                 <a:cs typeface="Courier New" pitchFamily="34" charset="-120"/>
               </a:rPr>
-              <a:t>github.com/Capsturrrr/rudp</a:t>
-            </a:r>
-            <a:endParaRPr lang="en-US" sz="2600" dirty="0"/>
-          </a:p>
-        </p:txBody>
-      </p:sp>
-      <p:sp>
-        <p:nvSpPr>
-          <p:cNvPr id="4" name="Text 2"/>
+              <a:t>25 / 26   Smart-RUDP</a:t>
+            </a:r>
+            <a:endParaRPr lang="en-US" sz="1000" dirty="0"/>
+          </a:p>
+        </p:txBody>
+      </p:sp>
+      <p:sp>
+        <p:nvSpPr>
+          <p:cNvPr id="4" name="Shape 2"/>
           <p:cNvSpPr/>
           <p:nvPr/>
         </p:nvSpPr>
         <p:spPr>
           <a:xfrm>
-            <a:off x="731520" y="4206240"/>
-            <a:ext cx="10058400" cy="457200"/>
+            <a:off x="548640" y="1371600"/>
+            <a:ext cx="5394960" cy="4206240"/>
+          </a:xfrm>
+          <a:prstGeom prst="rect">
+            <a:avLst/>
+          </a:prstGeom>
+          <a:solidFill>
+            <a:srgbClr val="141B24"/>
+          </a:solidFill>
+          <a:ln w="12700">
+            <a:solidFill>
+              <a:srgbClr val="39FF88"/>
+            </a:solidFill>
+            <a:prstDash val="solid"/>
+          </a:ln>
+        </p:spPr>
+      </p:sp>
+      <p:sp>
+        <p:nvSpPr>
+          <p:cNvPr id="5" name="Text 3"/>
+          <p:cNvSpPr/>
+          <p:nvPr/>
+        </p:nvSpPr>
+        <p:spPr>
+          <a:xfrm>
+            <a:off x="731520" y="1508760"/>
+            <a:ext cx="5029200" cy="457200"/>
           </a:xfrm>
           <a:prstGeom prst="rect">
             <a:avLst/>
@@ -13563,17 +14957,266 @@
               <a:buNone/>
             </a:pPr>
             <a:r>
-              <a:rPr lang="en-US" sz="1800" dirty="0">
-                <a:solidFill>
-                  <a:srgbClr val="8B98A5"/>
+              <a:rPr lang="en-US" sz="2000" b="1" dirty="0">
+                <a:solidFill>
+                  <a:srgbClr val="39FF88"/>
+                </a:solidFill>
+                <a:latin typeface="Courier New" pitchFamily="34" charset="0"/>
+                <a:ea typeface="Courier New" pitchFamily="34" charset="-122"/>
+                <a:cs typeface="Courier New" pitchFamily="34" charset="-120"/>
+              </a:rPr>
+              <a:t>Learned</a:t>
+            </a:r>
+            <a:endParaRPr lang="en-US" sz="2000" dirty="0"/>
+          </a:p>
+        </p:txBody>
+      </p:sp>
+      <p:sp>
+        <p:nvSpPr>
+          <p:cNvPr id="6" name="Text 4"/>
+          <p:cNvSpPr/>
+          <p:nvPr/>
+        </p:nvSpPr>
+        <p:spPr>
+          <a:xfrm>
+            <a:off x="731520" y="2011680"/>
+            <a:ext cx="5029200" cy="3429000"/>
+          </a:xfrm>
+          <a:prstGeom prst="rect">
+            <a:avLst/>
+          </a:prstGeom>
+          <a:noFill/>
+          <a:ln/>
+        </p:spPr>
+        <p:txBody>
+          <a:bodyPr wrap="square" lIns="0" tIns="0" rIns="0" bIns="0" rtlCol="0" anchor="t"/>
+          <a:lstStyle/>
+          <a:p>
+            <a:pPr indent="0" marL="0">
+              <a:buNone/>
+            </a:pPr>
+            <a:r>
+              <a:rPr lang="en-US" sz="2000" dirty="0">
+                <a:solidFill>
+                  <a:srgbClr val="E6EDF3"/>
                 </a:solidFill>
                 <a:latin typeface="Calibri" pitchFamily="34" charset="0"/>
                 <a:ea typeface="Calibri" pitchFamily="34" charset="-122"/>
                 <a:cs typeface="Calibri" pitchFamily="34" charset="-120"/>
               </a:rPr>
-              <a:t>Harshavardhan Mallela   Rohit Arya   Shloak Sinha</a:t>
-            </a:r>
-            <a:endParaRPr lang="en-US" sz="1800" dirty="0"/>
+              <a:t>Reliability is a set of simple rules working together.</a:t>
+            </a:r>
+            <a:endParaRPr lang="en-US" sz="2000" dirty="0"/>
+          </a:p>
+          <a:p>
+            <a:pPr indent="0" marL="0">
+              <a:buNone/>
+            </a:pPr>
+            <a:r>
+              <a:rPr lang="en-US" sz="2000" dirty="0">
+                <a:solidFill>
+                  <a:srgbClr val="E6EDF3"/>
+                </a:solidFill>
+                <a:latin typeface="Calibri" pitchFamily="34" charset="0"/>
+                <a:ea typeface="Calibri" pitchFamily="34" charset="-122"/>
+                <a:cs typeface="Calibri" pitchFamily="34" charset="-120"/>
+              </a:rPr>
+              <a:t>Congestion control matters as much as retransmission.</a:t>
+            </a:r>
+            <a:endParaRPr lang="en-US" sz="2000" dirty="0"/>
+          </a:p>
+          <a:p>
+            <a:pPr indent="0" marL="0">
+              <a:buNone/>
+            </a:pPr>
+            <a:r>
+              <a:rPr lang="en-US" sz="2000" dirty="0">
+                <a:solidFill>
+                  <a:srgbClr val="E6EDF3"/>
+                </a:solidFill>
+                <a:latin typeface="Calibri" pitchFamily="34" charset="0"/>
+                <a:ea typeface="Calibri" pitchFamily="34" charset="-122"/>
+                <a:cs typeface="Calibri" pitchFamily="34" charset="-120"/>
+              </a:rPr>
+              <a:t>Testing tools fail in surprising ways.</a:t>
+            </a:r>
+            <a:endParaRPr lang="en-US" sz="2000" dirty="0"/>
+          </a:p>
+        </p:txBody>
+      </p:sp>
+      <p:sp>
+        <p:nvSpPr>
+          <p:cNvPr id="7" name="Shape 5"/>
+          <p:cNvSpPr/>
+          <p:nvPr/>
+        </p:nvSpPr>
+        <p:spPr>
+          <a:xfrm>
+            <a:off x="6217920" y="1371600"/>
+            <a:ext cx="5394960" cy="4206240"/>
+          </a:xfrm>
+          <a:prstGeom prst="rect">
+            <a:avLst/>
+          </a:prstGeom>
+          <a:solidFill>
+            <a:srgbClr val="141B24"/>
+          </a:solidFill>
+          <a:ln w="12700">
+            <a:solidFill>
+              <a:srgbClr val="FFB000"/>
+            </a:solidFill>
+            <a:prstDash val="solid"/>
+          </a:ln>
+        </p:spPr>
+      </p:sp>
+      <p:sp>
+        <p:nvSpPr>
+          <p:cNvPr id="8" name="Text 6"/>
+          <p:cNvSpPr/>
+          <p:nvPr/>
+        </p:nvSpPr>
+        <p:spPr>
+          <a:xfrm>
+            <a:off x="6400800" y="1508760"/>
+            <a:ext cx="5029200" cy="457200"/>
+          </a:xfrm>
+          <a:prstGeom prst="rect">
+            <a:avLst/>
+          </a:prstGeom>
+          <a:noFill/>
+          <a:ln/>
+        </p:spPr>
+        <p:txBody>
+          <a:bodyPr wrap="square" lIns="0" tIns="0" rIns="0" bIns="0" rtlCol="0" anchor="ctr"/>
+          <a:lstStyle/>
+          <a:p>
+            <a:pPr indent="0" marL="0">
+              <a:buNone/>
+            </a:pPr>
+            <a:r>
+              <a:rPr lang="en-US" sz="2000" b="1" dirty="0">
+                <a:solidFill>
+                  <a:srgbClr val="FFB000"/>
+                </a:solidFill>
+                <a:latin typeface="Courier New" pitchFamily="34" charset="0"/>
+                <a:ea typeface="Courier New" pitchFamily="34" charset="-122"/>
+                <a:cs typeface="Courier New" pitchFamily="34" charset="-120"/>
+              </a:rPr>
+              <a:t>Next</a:t>
+            </a:r>
+            <a:endParaRPr lang="en-US" sz="2000" dirty="0"/>
+          </a:p>
+        </p:txBody>
+      </p:sp>
+      <p:sp>
+        <p:nvSpPr>
+          <p:cNvPr id="9" name="Text 7"/>
+          <p:cNvSpPr/>
+          <p:nvPr/>
+        </p:nvSpPr>
+        <p:spPr>
+          <a:xfrm>
+            <a:off x="6400800" y="2011680"/>
+            <a:ext cx="5029200" cy="3429000"/>
+          </a:xfrm>
+          <a:prstGeom prst="rect">
+            <a:avLst/>
+          </a:prstGeom>
+          <a:noFill/>
+          <a:ln/>
+        </p:spPr>
+        <p:txBody>
+          <a:bodyPr wrap="square" lIns="0" tIns="0" rIns="0" bIns="0" rtlCol="0" anchor="t"/>
+          <a:lstStyle/>
+          <a:p>
+            <a:pPr indent="0" marL="0">
+              <a:buNone/>
+            </a:pPr>
+            <a:r>
+              <a:rPr lang="en-US" sz="2000" dirty="0">
+                <a:solidFill>
+                  <a:srgbClr val="E6EDF3"/>
+                </a:solidFill>
+                <a:latin typeface="Calibri" pitchFamily="34" charset="0"/>
+                <a:ea typeface="Calibri" pitchFamily="34" charset="-122"/>
+                <a:cs typeface="Calibri" pitchFamily="34" charset="-120"/>
+              </a:rPr>
+              <a:t>Train the neural agent in C / on real netem</a:t>
+            </a:r>
+            <a:endParaRPr lang="en-US" sz="2000" dirty="0"/>
+          </a:p>
+          <a:p>
+            <a:pPr indent="0" marL="0">
+              <a:buNone/>
+            </a:pPr>
+            <a:r>
+              <a:rPr lang="en-US" sz="2000" dirty="0">
+                <a:solidFill>
+                  <a:srgbClr val="E6EDF3"/>
+                </a:solidFill>
+                <a:latin typeface="Calibri" pitchFamily="34" charset="0"/>
+                <a:ea typeface="Calibri" pitchFamily="34" charset="-122"/>
+                <a:cs typeface="Calibri" pitchFamily="34" charset="-120"/>
+              </a:rPr>
+              <a:t>Selective ACK where throughput limits the path</a:t>
+            </a:r>
+            <a:endParaRPr lang="en-US" sz="2000" dirty="0"/>
+          </a:p>
+          <a:p>
+            <a:pPr indent="0" marL="0">
+              <a:buNone/>
+            </a:pPr>
+            <a:r>
+              <a:rPr lang="en-US" sz="2000" dirty="0">
+                <a:solidFill>
+                  <a:srgbClr val="E6EDF3"/>
+                </a:solidFill>
+                <a:latin typeface="Calibri" pitchFamily="34" charset="0"/>
+                <a:ea typeface="Calibri" pitchFamily="34" charset="-122"/>
+                <a:cs typeface="Calibri" pitchFamily="34" charset="-120"/>
+              </a:rPr>
+              <a:t>Kernel netem and real multi-machine tests</a:t>
+            </a:r>
+            <a:endParaRPr lang="en-US" sz="2000" dirty="0"/>
+          </a:p>
+        </p:txBody>
+      </p:sp>
+      <p:sp>
+        <p:nvSpPr>
+          <p:cNvPr id="10" name="Text 8"/>
+          <p:cNvSpPr/>
+          <p:nvPr/>
+        </p:nvSpPr>
+        <p:spPr>
+          <a:xfrm>
+            <a:off x="548640" y="5852160"/>
+            <a:ext cx="10972800" cy="365760"/>
+          </a:xfrm>
+          <a:prstGeom prst="rect">
+            <a:avLst/>
+          </a:prstGeom>
+          <a:noFill/>
+          <a:ln/>
+        </p:spPr>
+        <p:txBody>
+          <a:bodyPr wrap="square" lIns="0" tIns="0" rIns="0" bIns="0" rtlCol="0" anchor="ctr"/>
+          <a:lstStyle/>
+          <a:p>
+            <a:pPr indent="0" marL="0">
+              <a:buNone/>
+            </a:pPr>
+            <a:r>
+              <a:rPr lang="en-US" sz="1400" dirty="0">
+                <a:solidFill>
+                  <a:srgbClr val="8B98A5"/>
+                </a:solidFill>
+                <a:latin typeface="Calibri" pitchFamily="34" charset="0"/>
+                <a:ea typeface="Calibri" pitchFamily="34" charset="-122"/>
+                <a:cs typeface="Calibri" pitchFamily="34" charset="-120"/>
+              </a:rPr>
+              <a:t>Limits: Go-Back-N wastes bandwidth and suffers under reordering; C tests use an emulated path; the tabular agent did not beat AIMD in C.</a:t>
+            </a:r>
+            <a:endParaRPr lang="en-US" sz="1400" dirty="0"/>
           </a:p>
         </p:txBody>
       </p:sp>
@@ -13617,6 +15260,155 @@
         </p:nvSpPr>
         <p:spPr>
           <a:xfrm>
+            <a:off x="731520" y="2103120"/>
+            <a:ext cx="10058400" cy="1097280"/>
+          </a:xfrm>
+          <a:prstGeom prst="rect">
+            <a:avLst/>
+          </a:prstGeom>
+          <a:noFill/>
+          <a:ln/>
+        </p:spPr>
+        <p:txBody>
+          <a:bodyPr wrap="square" lIns="0" tIns="0" rIns="0" bIns="0" rtlCol="0" anchor="ctr"/>
+          <a:lstStyle/>
+          <a:p>
+            <a:pPr indent="0" marL="0">
+              <a:buNone/>
+            </a:pPr>
+            <a:r>
+              <a:rPr lang="en-US" sz="6400" b="1" dirty="0">
+                <a:solidFill>
+                  <a:srgbClr val="39FF88"/>
+                </a:solidFill>
+                <a:latin typeface="Courier New" pitchFamily="34" charset="0"/>
+                <a:ea typeface="Courier New" pitchFamily="34" charset="-122"/>
+                <a:cs typeface="Courier New" pitchFamily="34" charset="-120"/>
+              </a:rPr>
+              <a:t>Thank you</a:t>
+            </a:r>
+            <a:endParaRPr lang="en-US" sz="6400" dirty="0"/>
+          </a:p>
+        </p:txBody>
+      </p:sp>
+      <p:sp>
+        <p:nvSpPr>
+          <p:cNvPr id="3" name="Text 1"/>
+          <p:cNvSpPr/>
+          <p:nvPr/>
+        </p:nvSpPr>
+        <p:spPr>
+          <a:xfrm>
+            <a:off x="731520" y="3474720"/>
+            <a:ext cx="10058400" cy="548640"/>
+          </a:xfrm>
+          <a:prstGeom prst="rect">
+            <a:avLst/>
+          </a:prstGeom>
+          <a:noFill/>
+          <a:ln/>
+        </p:spPr>
+        <p:txBody>
+          <a:bodyPr wrap="square" lIns="0" tIns="0" rIns="0" bIns="0" rtlCol="0" anchor="ctr"/>
+          <a:lstStyle/>
+          <a:p>
+            <a:pPr indent="0" marL="0">
+              <a:buNone/>
+            </a:pPr>
+            <a:r>
+              <a:rPr lang="en-US" sz="2600" dirty="0">
+                <a:solidFill>
+                  <a:srgbClr val="E6EDF3"/>
+                </a:solidFill>
+                <a:latin typeface="Courier New" pitchFamily="34" charset="0"/>
+                <a:ea typeface="Courier New" pitchFamily="34" charset="-122"/>
+                <a:cs typeface="Courier New" pitchFamily="34" charset="-120"/>
+              </a:rPr>
+              <a:t>github.com/Capsturrrr/rudp</a:t>
+            </a:r>
+            <a:endParaRPr lang="en-US" sz="2600" dirty="0"/>
+          </a:p>
+        </p:txBody>
+      </p:sp>
+      <p:sp>
+        <p:nvSpPr>
+          <p:cNvPr id="4" name="Text 2"/>
+          <p:cNvSpPr/>
+          <p:nvPr/>
+        </p:nvSpPr>
+        <p:spPr>
+          <a:xfrm>
+            <a:off x="731520" y="4206240"/>
+            <a:ext cx="10058400" cy="457200"/>
+          </a:xfrm>
+          <a:prstGeom prst="rect">
+            <a:avLst/>
+          </a:prstGeom>
+          <a:noFill/>
+          <a:ln/>
+        </p:spPr>
+        <p:txBody>
+          <a:bodyPr wrap="square" lIns="0" tIns="0" rIns="0" bIns="0" rtlCol="0" anchor="ctr"/>
+          <a:lstStyle/>
+          <a:p>
+            <a:pPr indent="0" marL="0">
+              <a:buNone/>
+            </a:pPr>
+            <a:r>
+              <a:rPr lang="en-US" sz="1800" dirty="0">
+                <a:solidFill>
+                  <a:srgbClr val="8B98A5"/>
+                </a:solidFill>
+                <a:latin typeface="Calibri" pitchFamily="34" charset="0"/>
+                <a:ea typeface="Calibri" pitchFamily="34" charset="-122"/>
+                <a:cs typeface="Calibri" pitchFamily="34" charset="-120"/>
+              </a:rPr>
+              <a:t>Harshavardhan Mallela   Rohit Arya   Shloak Sinha</a:t>
+            </a:r>
+            <a:endParaRPr lang="en-US" sz="1800" dirty="0"/>
+          </a:p>
+        </p:txBody>
+      </p:sp>
+    </p:spTree>
+  </p:cSld>
+  <p:clrMapOvr>
+    <a:masterClrMapping/>
+  </p:clrMapOvr>
+</p:sld>
+</file>
+
+<file path=ppt/slides/slide27.xml><?xml version="1.0" encoding="utf-8"?>
+<p:sld xmlns:a="http://schemas.openxmlformats.org/drawingml/2006/main" xmlns:r="http://schemas.openxmlformats.org/officeDocument/2006/relationships" xmlns:p="http://schemas.openxmlformats.org/presentationml/2006/main">
+  <p:cSld name="Slide 27">
+    <p:bg>
+      <p:bgPr>
+        <a:solidFill>
+          <a:srgbClr val="0B0F14"/>
+        </a:solidFill>
+      </p:bgPr>
+    </p:bg>
+    <p:spTree>
+      <p:nvGrpSpPr>
+        <p:cNvPr id="1" name=""/>
+        <p:cNvGrpSpPr/>
+        <p:nvPr/>
+      </p:nvGrpSpPr>
+      <p:grpSpPr>
+        <a:xfrm>
+          <a:off x="0" y="0"/>
+          <a:ext cx="0" cy="0"/>
+          <a:chOff x="0" y="0"/>
+          <a:chExt cx="0" cy="0"/>
+        </a:xfrm>
+      </p:grpSpPr>
+      <p:sp>
+        <p:nvSpPr>
+          <p:cNvPr id="2" name="Text 0"/>
+          <p:cNvSpPr/>
+          <p:nvPr/>
+        </p:nvSpPr>
+        <p:spPr>
+          <a:xfrm>
             <a:off x="548640" y="320040"/>
             <a:ext cx="11064240" cy="731520"/>
           </a:xfrm>
@@ -13921,7 +15713,7 @@
                 <a:ea typeface="Courier New" pitchFamily="34" charset="-122"/>
                 <a:cs typeface="Courier New" pitchFamily="34" charset="-120"/>
               </a:rPr>
-              <a:t>3 / 25   Smart-RUDP</a:t>
+              <a:t>3 / 26   Smart-RUDP</a:t>
             </a:r>
             <a:endParaRPr lang="en-US" sz="1000" dirty="0"/>
           </a:p>
@@ -14315,7 +16107,7 @@
                 <a:ea typeface="Courier New" pitchFamily="34" charset="-122"/>
                 <a:cs typeface="Courier New" pitchFamily="34" charset="-120"/>
               </a:rPr>
-              <a:t>4 / 25   Smart-RUDP</a:t>
+              <a:t>4 / 26   Smart-RUDP</a:t>
             </a:r>
             <a:endParaRPr lang="en-US" sz="1000" dirty="0"/>
           </a:p>
@@ -14876,7 +16668,7 @@
                 <a:ea typeface="Courier New" pitchFamily="34" charset="-122"/>
                 <a:cs typeface="Courier New" pitchFamily="34" charset="-120"/>
               </a:rPr>
-              <a:t>5 / 25   Smart-RUDP</a:t>
+              <a:t>5 / 26   Smart-RUDP</a:t>
             </a:r>
             <a:endParaRPr lang="en-US" sz="1000" dirty="0"/>
           </a:p>
@@ -16315,7 +18107,7 @@
                 <a:ea typeface="Courier New" pitchFamily="34" charset="-122"/>
                 <a:cs typeface="Courier New" pitchFamily="34" charset="-120"/>
               </a:rPr>
-              <a:t>6 / 25   Smart-RUDP</a:t>
+              <a:t>6 / 26   Smart-RUDP</a:t>
             </a:r>
             <a:endParaRPr lang="en-US" sz="1000" dirty="0"/>
           </a:p>
@@ -17550,7 +19342,7 @@
                 <a:ea typeface="Courier New" pitchFamily="34" charset="-122"/>
                 <a:cs typeface="Courier New" pitchFamily="34" charset="-120"/>
               </a:rPr>
-              <a:t>7 / 25   Smart-RUDP</a:t>
+              <a:t>7 / 26   Smart-RUDP</a:t>
             </a:r>
             <a:endParaRPr lang="en-US" sz="1000" dirty="0"/>
           </a:p>
@@ -17993,7 +19785,7 @@
                 <a:ea typeface="Courier New" pitchFamily="34" charset="-122"/>
                 <a:cs typeface="Courier New" pitchFamily="34" charset="-120"/>
               </a:rPr>
-              <a:t>8 / 25   Smart-RUDP</a:t>
+              <a:t>8 / 26   Smart-RUDP</a:t>
             </a:r>
             <a:endParaRPr lang="en-US" sz="1000" dirty="0"/>
           </a:p>
@@ -18293,7 +20085,7 @@
                 <a:ea typeface="Courier New" pitchFamily="34" charset="-122"/>
                 <a:cs typeface="Courier New" pitchFamily="34" charset="-120"/>
               </a:rPr>
-              <a:t>9 / 25   Smart-RUDP</a:t>
+              <a:t>9 / 26   Smart-RUDP</a:t>
             </a:r>
             <a:endParaRPr lang="en-US" sz="1000" dirty="0"/>
           </a:p>

--- a/docs/RUDP_Presentation_with_notes.pptx
+++ b/docs/RUDP_Presentation_with_notes.pptx
@@ -32,9 +32,10 @@
     <p:sldId id="280" r:id="rId26"/>
     <p:sldId id="281" r:id="rId27"/>
     <p:sldId id="282" r:id="rId28"/>
+    <p:sldId id="283" r:id="rId29"/>
   </p:sldIdLst>
   <p:notesMasterIdLst>
-    <p:notesMasterId r:id="rId29"/>
+    <p:notesMasterId r:id="rId30"/>
   </p:notesMasterIdLst>
   <p:sldSz cx="12192000" cy="6858000"/>
   <p:notesSz cx="6858000" cy="12192000"/>
@@ -2429,23 +2430,28 @@
           <a:p/>
           <a:p>
             <a:r>
-              <a:t>- Learned: reliability is a set of simple rules working together; congestion control matters as much as retransmission; testing tools fail in surprising ways.</a:t>
-            </a:r>
-          </a:p>
-          <a:p>
-            <a:r>
-              <a:t>- Next: Selective Repeat with SACK, a stronger learning agent, adaptive timeout, and tests on a real multi-machine network.</a:t>
-            </a:r>
-          </a:p>
-          <a:p>
-            <a:r>
-              <a:t>- Name the limits before she does: Go-Back-N, loopback-only protocol tests, Smart-RUDP not beating AIMD.</a:t>
+              <a:t>- We swapped Go-Back-N for Selective Repeat as the default. The receiver now keeps out-of-order packets and tells the sender exactly which ones it holds in a bitmap inside every ACK; the sender has one timer per packet and resends only what is missing.</a:t>
+            </a:r>
+          </a:p>
+          <a:p>
+            <a:r>
+              <a:t>- The result: about ten times fewer retransmissions, and the neural agent's lead over AIMD grows to 46 percent on the lossy path and 50 percent on the satellite path.</a:t>
+            </a:r>
+          </a:p>
+          <a:p>
+            <a:r>
+              <a:t>- The 10 percent loss failure we found earlier was mostly a Go-Back-N effect: with Selective Repeat the agent ties AIMD there.</a:t>
+            </a:r>
+          </a:p>
+          <a:p>
+            <a:r>
+              <a:t>- Go-Back-N is still in the code behind a flag, and the earlier tables in the report were measured with it and are labelled that way.</a:t>
             </a:r>
           </a:p>
           <a:p/>
           <a:p>
             <a:r>
-              <a:t>IF ASKED: End on the limits and the fix order: SACK, adaptive timeout, real-network tests.</a:t>
+              <a:t>IF ASKED: Is it textbook Selective Repeat? Nearly: per-packet timers and a buffering receiver, but we use a cumulative ACK plus a 64-bit bitmap instead of one ACK per packet, and the window is capped at 60.</a:t>
             </a:r>
           </a:p>
         </p:txBody>
@@ -2531,19 +2537,29 @@
           <a:lstStyle/>
           <a:p>
             <a:r>
-              <a:t>Time: 0:15</a:t>
+              <a:t>Time: 0:50</a:t>
             </a:r>
           </a:p>
           <a:p/>
           <a:p>
             <a:r>
-              <a:t>- Thank you. The code, report and captures are at github.com/Capsturrrr/rudp. Happy to take questions.</a:t>
+              <a:t>- Learned: reliability is a set of simple rules working together; congestion control matters as much as retransmission; testing tools fail in surprising ways.</a:t>
+            </a:r>
+          </a:p>
+          <a:p>
+            <a:r>
+              <a:t>- Next: Selective Repeat with SACK, a stronger learning agent, adaptive timeout, and tests on a real multi-machine network.</a:t>
+            </a:r>
+          </a:p>
+          <a:p>
+            <a:r>
+              <a:t>- Name the limits before she does: Go-Back-N, loopback-only protocol tests, Smart-RUDP not beating AIMD.</a:t>
             </a:r>
           </a:p>
           <a:p/>
           <a:p>
             <a:r>
-              <a:t>IF ASKED: Pause and smile; hand over to questions.</a:t>
+              <a:t>IF ASKED: End on the limits and the fix order: SACK, adaptive timeout, real-network tests.</a:t>
             </a:r>
           </a:p>
         </p:txBody>
@@ -2629,19 +2645,19 @@
           <a:lstStyle/>
           <a:p>
             <a:r>
-              <a:t>Time: -</a:t>
+              <a:t>Time: 0:15</a:t>
             </a:r>
           </a:p>
           <a:p/>
           <a:p>
             <a:r>
-              <a:t>- Only if asked: the window starts at 1, adds 1 per ACK until the threshold 16, then 1/window per ACK. In the 62-packet run the final window was 18.71.</a:t>
+              <a:t>- Thank you. The code, report and captures are at github.com/Capsturrrr/rudp. Happy to take questions.</a:t>
             </a:r>
           </a:p>
           <a:p/>
           <a:p>
             <a:r>
-              <a:t>IF ASKED: Use this slide to answer 'show me congestion avoidance'.</a:t>
+              <a:t>IF ASKED: Pause and smile; hand over to questions.</a:t>
             </a:r>
           </a:p>
         </p:txBody>
@@ -2664,6 +2680,104 @@
             <a:fld id="{F7021451-1387-4CA6-816F-3879F97B5CBC}" type="slidenum">
               <a:rPr lang="en-US"/>
               <a:t>27</a:t>
+            </a:fld>
+            <a:endParaRPr lang="en-US"/>
+          </a:p>
+        </p:txBody>
+      </p:sp>
+    </p:spTree>
+    <p:extLst>
+      <p:ext uri="{BB962C8B-B14F-4D97-AF65-F5344CB8AC3E}">
+        <p14:creationId xmlns:p14="http://schemas.microsoft.com/office/powerpoint/2010/main" val="1024086991"/>
+      </p:ext>
+    </p:extLst>
+  </p:cSld>
+  <p:clrMapOvr>
+    <a:masterClrMapping/>
+  </p:clrMapOvr>
+</p:notes>
+</file>
+
+<file path=ppt/notesSlides/notesSlide28.xml><?xml version="1.0" encoding="utf-8"?>
+<p:notes xmlns:a="http://schemas.openxmlformats.org/drawingml/2006/main" xmlns:r="http://schemas.openxmlformats.org/officeDocument/2006/relationships" xmlns:p="http://schemas.openxmlformats.org/presentationml/2006/main">
+  <p:cSld>
+    <p:spTree>
+      <p:nvGrpSpPr>
+        <p:cNvPr id="1" name=""/>
+        <p:cNvGrpSpPr/>
+        <p:nvPr/>
+      </p:nvGrpSpPr>
+      <p:grpSpPr>
+        <a:xfrm>
+          <a:off x="0" y="0"/>
+          <a:ext cx="0" cy="0"/>
+          <a:chOff x="0" y="0"/>
+          <a:chExt cx="0" cy="0"/>
+        </a:xfrm>
+      </p:grpSpPr>
+      <p:sp>
+        <p:nvSpPr>
+          <p:cNvPr id="2" name="Slide Image Placeholder 1"/>
+          <p:cNvSpPr>
+            <a:spLocks noGrp="1" noRot="1" noChangeAspect="1"/>
+          </p:cNvSpPr>
+          <p:nvPr>
+            <p:ph type="sldImg"/>
+          </p:nvPr>
+        </p:nvSpPr>
+        <p:spPr/>
+      </p:sp>
+      <p:sp>
+        <p:nvSpPr>
+          <p:cNvPr id="3" name="Notes Placeholder 2"/>
+          <p:cNvSpPr>
+            <a:spLocks noGrp="1"/>
+          </p:cNvSpPr>
+          <p:nvPr>
+            <p:ph type="body" idx="1"/>
+          </p:nvPr>
+        </p:nvSpPr>
+        <p:spPr/>
+        <p:txBody>
+          <a:bodyPr/>
+          <a:lstStyle/>
+          <a:p>
+            <a:r>
+              <a:t>Time: -</a:t>
+            </a:r>
+          </a:p>
+          <a:p/>
+          <a:p>
+            <a:r>
+              <a:t>- Only if asked: the window starts at 1, adds 1 per ACK until the threshold 16, then 1/window per ACK. In the 62-packet run the final window was 18.71.</a:t>
+            </a:r>
+          </a:p>
+          <a:p/>
+          <a:p>
+            <a:r>
+              <a:t>IF ASKED: Use this slide to answer 'show me congestion avoidance'.</a:t>
+            </a:r>
+          </a:p>
+        </p:txBody>
+      </p:sp>
+      <p:sp>
+        <p:nvSpPr>
+          <p:cNvPr id="4" name="Slide Number Placeholder 3"/>
+          <p:cNvSpPr>
+            <a:spLocks noGrp="1"/>
+          </p:cNvSpPr>
+          <p:nvPr>
+            <p:ph type="sldNum" sz="quarter" idx="10"/>
+          </p:nvPr>
+        </p:nvSpPr>
+        <p:spPr/>
+        <p:txBody>
+          <a:bodyPr/>
+          <a:lstStyle/>
+          <a:p>
+            <a:fld id="{F7021451-1387-4CA6-816F-3879F97B5CBC}" type="slidenum">
+              <a:rPr lang="en-US"/>
+              <a:t>28</a:t>
             </a:fld>
             <a:endParaRPr lang="en-US"/>
           </a:p>
@@ -4019,7 +4133,7 @@
                 <a:ea typeface="Courier New" pitchFamily="34" charset="-122"/>
                 <a:cs typeface="Courier New" pitchFamily="34" charset="-120"/>
               </a:rPr>
-              <a:t>10 / 26   Smart-RUDP</a:t>
+              <a:t>10 / 27   Smart-RUDP</a:t>
             </a:r>
             <a:endParaRPr lang="en-US" sz="1000" dirty="0"/>
           </a:p>
@@ -4216,7 +4330,7 @@
                 <a:ea typeface="Courier New" pitchFamily="34" charset="-122"/>
                 <a:cs typeface="Courier New" pitchFamily="34" charset="-120"/>
               </a:rPr>
-              <a:t>11 / 26   Smart-RUDP</a:t>
+              <a:t>11 / 27   Smart-RUDP</a:t>
             </a:r>
             <a:endParaRPr lang="en-US" sz="1000" dirty="0"/>
           </a:p>
@@ -5046,7 +5160,7 @@
                 <a:ea typeface="Courier New" pitchFamily="34" charset="-122"/>
                 <a:cs typeface="Courier New" pitchFamily="34" charset="-120"/>
               </a:rPr>
-              <a:t>12 / 26   Smart-RUDP</a:t>
+              <a:t>12 / 27   Smart-RUDP</a:t>
             </a:r>
             <a:endParaRPr lang="en-US" sz="1000" dirty="0"/>
           </a:p>
@@ -5343,7 +5457,7 @@
                 <a:ea typeface="Courier New" pitchFamily="34" charset="-122"/>
                 <a:cs typeface="Courier New" pitchFamily="34" charset="-120"/>
               </a:rPr>
-              <a:t>13 / 26   Smart-RUDP</a:t>
+              <a:t>13 / 27   Smart-RUDP</a:t>
             </a:r>
             <a:endParaRPr lang="en-US" sz="1000" dirty="0"/>
           </a:p>
@@ -5643,7 +5757,7 @@
                 <a:ea typeface="Courier New" pitchFamily="34" charset="-122"/>
                 <a:cs typeface="Courier New" pitchFamily="34" charset="-120"/>
               </a:rPr>
-              <a:t>14 / 26   Smart-RUDP</a:t>
+              <a:t>14 / 27   Smart-RUDP</a:t>
             </a:r>
             <a:endParaRPr lang="en-US" sz="1000" dirty="0"/>
           </a:p>
@@ -6027,7 +6141,7 @@
                 <a:ea typeface="Courier New" pitchFamily="34" charset="-122"/>
                 <a:cs typeface="Courier New" pitchFamily="34" charset="-120"/>
               </a:rPr>
-              <a:t>15 / 26   Smart-RUDP</a:t>
+              <a:t>15 / 27   Smart-RUDP</a:t>
             </a:r>
             <a:endParaRPr lang="en-US" sz="1000" dirty="0"/>
           </a:p>
@@ -6485,7 +6599,7 @@
                 <a:ea typeface="Courier New" pitchFamily="34" charset="-122"/>
                 <a:cs typeface="Courier New" pitchFamily="34" charset="-120"/>
               </a:rPr>
-              <a:t>16 / 26   Smart-RUDP</a:t>
+              <a:t>16 / 27   Smart-RUDP</a:t>
             </a:r>
             <a:endParaRPr lang="en-US" sz="1000" dirty="0"/>
           </a:p>
@@ -7170,7 +7284,7 @@
                 <a:ea typeface="Courier New" pitchFamily="34" charset="-122"/>
                 <a:cs typeface="Courier New" pitchFamily="34" charset="-120"/>
               </a:rPr>
-              <a:t>17 / 26   Smart-RUDP</a:t>
+              <a:t>17 / 27   Smart-RUDP</a:t>
             </a:r>
             <a:endParaRPr lang="en-US" sz="1000" dirty="0"/>
           </a:p>
@@ -7410,7 +7524,7 @@
                 <a:ea typeface="Courier New" pitchFamily="34" charset="-122"/>
                 <a:cs typeface="Courier New" pitchFamily="34" charset="-120"/>
               </a:rPr>
-              <a:t>18 / 26   Smart-RUDP</a:t>
+              <a:t>18 / 27   Smart-RUDP</a:t>
             </a:r>
             <a:endParaRPr lang="en-US" sz="1000" dirty="0"/>
           </a:p>
@@ -7650,7 +7764,7 @@
                 <a:ea typeface="Courier New" pitchFamily="34" charset="-122"/>
                 <a:cs typeface="Courier New" pitchFamily="34" charset="-120"/>
               </a:rPr>
-              <a:t>19 / 26   Smart-RUDP</a:t>
+              <a:t>19 / 27   Smart-RUDP</a:t>
             </a:r>
             <a:endParaRPr lang="en-US" sz="1000" dirty="0"/>
           </a:p>
@@ -7872,7 +7986,7 @@
                 <a:ea typeface="Courier New" pitchFamily="34" charset="-122"/>
                 <a:cs typeface="Courier New" pitchFamily="34" charset="-120"/>
               </a:rPr>
-              <a:t>2 / 26   Smart-RUDP</a:t>
+              <a:t>2 / 27   Smart-RUDP</a:t>
             </a:r>
             <a:endParaRPr lang="en-US" sz="1000" dirty="0"/>
           </a:p>
@@ -8266,7 +8380,7 @@
                 <a:ea typeface="Courier New" pitchFamily="34" charset="-122"/>
                 <a:cs typeface="Courier New" pitchFamily="34" charset="-120"/>
               </a:rPr>
-              <a:t>20 / 26   Smart-RUDP</a:t>
+              <a:t>20 / 27   Smart-RUDP</a:t>
             </a:r>
             <a:endParaRPr lang="en-US" sz="1000" dirty="0"/>
           </a:p>
@@ -8590,7 +8704,7 @@
                 <a:ea typeface="Courier New" pitchFamily="34" charset="-122"/>
                 <a:cs typeface="Courier New" pitchFamily="34" charset="-120"/>
               </a:rPr>
-              <a:t>21 / 26   Smart-RUDP</a:t>
+              <a:t>21 / 27   Smart-RUDP</a:t>
             </a:r>
             <a:endParaRPr lang="en-US" sz="1000" dirty="0"/>
           </a:p>
@@ -10297,7 +10411,7 @@
                 <a:ea typeface="Courier New" pitchFamily="34" charset="-122"/>
                 <a:cs typeface="Courier New" pitchFamily="34" charset="-120"/>
               </a:rPr>
-              <a:t>22 / 26   Smart-RUDP</a:t>
+              <a:t>22 / 27   Smart-RUDP</a:t>
             </a:r>
             <a:endParaRPr lang="en-US" sz="1000" dirty="0"/>
           </a:p>
@@ -11680,7 +11794,7 @@
                 <a:ea typeface="Courier New" pitchFamily="34" charset="-122"/>
                 <a:cs typeface="Courier New" pitchFamily="34" charset="-120"/>
               </a:rPr>
-              <a:t>23 / 26   Smart-RUDP</a:t>
+              <a:t>23 / 27   Smart-RUDP</a:t>
             </a:r>
             <a:endParaRPr lang="en-US" sz="1000" dirty="0"/>
           </a:p>
@@ -13223,7 +13337,7 @@
                 <a:ea typeface="Courier New" pitchFamily="34" charset="-122"/>
                 <a:cs typeface="Courier New" pitchFamily="34" charset="-120"/>
               </a:rPr>
-              <a:t>24 / 26   Smart-RUDP</a:t>
+              <a:t>24 / 27   Smart-RUDP</a:t>
             </a:r>
             <a:endParaRPr lang="en-US" sz="1000" dirty="0"/>
           </a:p>
@@ -14862,7 +14976,7 @@
                 <a:ea typeface="Courier New" pitchFamily="34" charset="-122"/>
                 <a:cs typeface="Courier New" pitchFamily="34" charset="-120"/>
               </a:rPr>
-              <a:t>Learnings and future work</a:t>
+              <a:t>Selective Repeat is now the default</a:t>
             </a:r>
             <a:endParaRPr lang="en-US" sz="3000" dirty="0"/>
           </a:p>
@@ -14901,47 +15015,1551 @@
                 <a:ea typeface="Courier New" pitchFamily="34" charset="-122"/>
                 <a:cs typeface="Courier New" pitchFamily="34" charset="-120"/>
               </a:rPr>
-              <a:t>25 / 26   Smart-RUDP</a:t>
+              <a:t>25 / 27   Smart-RUDP</a:t>
             </a:r>
             <a:endParaRPr lang="en-US" sz="1000" dirty="0"/>
           </a:p>
         </p:txBody>
       </p:sp>
-      <p:sp>
-        <p:nvSpPr>
-          <p:cNvPr id="4" name="Shape 2"/>
+      <p:graphicFrame>
+        <p:nvGraphicFramePr>
+          <p:cNvPr id="26" name="Table 0"/>
+          <p:cNvGraphicFramePr>
+            <a:graphicFrameLocks noGrp="1"/>
+          </p:cNvGraphicFramePr>
+          <p:nvPr>
+            <p:extLst>
+              <p:ext uri="{D42A27DB-BD31-4B8C-83A1-F6EECF244321}">
+                <p14:modId xmlns:p14="http://schemas.microsoft.com/office/powerpoint/2010/main" val="1579011935"/>
+              </p:ext>
+            </p:extLst>
+          </p:nvPr>
+        </p:nvGraphicFramePr>
+        <p:xfrm>
+          <a:off x="548640" y="1188720"/>
+          <a:ext cx="6035040" cy="914400"/>
+        </p:xfrm>
+        <a:graphic>
+          <a:graphicData uri="http://schemas.openxmlformats.org/drawingml/2006/table">
+            <a:tbl>
+              <a:tblPr/>
+              <a:tblGrid>
+                <a:gridCol w="2468880"/>
+                <a:gridCol w="1188720"/>
+                <a:gridCol w="1188720"/>
+                <a:gridCol w="1188720"/>
+              </a:tblGrid>
+              <a:tr h="420624">
+                <a:tc>
+                  <a:txBody>
+                    <a:bodyPr/>
+                    <a:lstStyle/>
+                    <a:p>
+                      <a:pPr indent="0" marL="0">
+                        <a:buNone/>
+                      </a:pPr>
+                      <a:r>
+                        <a:rPr lang="en-US" sz="1300" b="1" dirty="0">
+                          <a:solidFill>
+                            <a:srgbClr val="0B0F14"/>
+                          </a:solidFill>
+                          <a:latin typeface="Courier New" pitchFamily="34" charset="0"/>
+                          <a:ea typeface="Courier New" pitchFamily="34" charset="-122"/>
+                          <a:cs typeface="Courier New" pitchFamily="34" charset="-120"/>
+                        </a:rPr>
+                        <a:t>C transport, seconds</a:t>
+                      </a:r>
+                      <a:endParaRPr lang="en-US" sz="1300" dirty="0">
+                        <a:latin typeface="Courier New" charset="0"/>
+                        <a:ea typeface="Courier New" charset="0"/>
+                        <a:cs typeface="Courier New" charset="0"/>
+                      </a:endParaRPr>
+                    </a:p>
+                  </a:txBody>
+                  <a:tcPr marL="91440" marR="91440" marT="45720" marB="45720">
+                    <a:lnL w="12700" cap="flat" cmpd="sng" algn="ctr">
+                      <a:solidFill>
+                        <a:srgbClr val="2A3441"/>
+                      </a:solidFill>
+                      <a:prstDash val="solid"/>
+                      <a:round/>
+                      <a:headEnd type="none" w="med" len="med"/>
+                      <a:tailEnd type="none" w="med" len="med"/>
+                    </a:lnL>
+                    <a:lnR w="12700" cap="flat" cmpd="sng" algn="ctr">
+                      <a:solidFill>
+                        <a:srgbClr val="2A3441"/>
+                      </a:solidFill>
+                      <a:prstDash val="solid"/>
+                      <a:round/>
+                      <a:headEnd type="none" w="med" len="med"/>
+                      <a:tailEnd type="none" w="med" len="med"/>
+                    </a:lnR>
+                    <a:lnT w="12700" cap="flat" cmpd="sng" algn="ctr">
+                      <a:solidFill>
+                        <a:srgbClr val="2A3441"/>
+                      </a:solidFill>
+                      <a:prstDash val="solid"/>
+                      <a:round/>
+                      <a:headEnd type="none" w="med" len="med"/>
+                      <a:tailEnd type="none" w="med" len="med"/>
+                    </a:lnT>
+                    <a:lnB w="12700" cap="flat" cmpd="sng" algn="ctr">
+                      <a:solidFill>
+                        <a:srgbClr val="2A3441"/>
+                      </a:solidFill>
+                      <a:prstDash val="solid"/>
+                      <a:round/>
+                      <a:headEnd type="none" w="med" len="med"/>
+                      <a:tailEnd type="none" w="med" len="med"/>
+                    </a:lnB>
+                    <a:solidFill>
+                      <a:srgbClr val="39FF88"/>
+                    </a:solidFill>
+                  </a:tcPr>
+                </a:tc>
+                <a:tc>
+                  <a:txBody>
+                    <a:bodyPr/>
+                    <a:lstStyle/>
+                    <a:p>
+                      <a:pPr indent="0" marL="0">
+                        <a:buNone/>
+                      </a:pPr>
+                      <a:r>
+                        <a:rPr lang="en-US" sz="1300" b="1" dirty="0">
+                          <a:solidFill>
+                            <a:srgbClr val="0B0F14"/>
+                          </a:solidFill>
+                          <a:latin typeface="Courier New" pitchFamily="34" charset="0"/>
+                          <a:ea typeface="Courier New" pitchFamily="34" charset="-122"/>
+                          <a:cs typeface="Courier New" pitchFamily="34" charset="-120"/>
+                        </a:rPr>
+                        <a:t>AIMD 32</a:t>
+                      </a:r>
+                      <a:endParaRPr lang="en-US" sz="1300" dirty="0">
+                        <a:latin typeface="Courier New" charset="0"/>
+                        <a:ea typeface="Courier New" charset="0"/>
+                        <a:cs typeface="Courier New" charset="0"/>
+                      </a:endParaRPr>
+                    </a:p>
+                  </a:txBody>
+                  <a:tcPr marL="91440" marR="91440" marT="45720" marB="45720">
+                    <a:lnL w="12700" cap="flat" cmpd="sng" algn="ctr">
+                      <a:solidFill>
+                        <a:srgbClr val="2A3441"/>
+                      </a:solidFill>
+                      <a:prstDash val="solid"/>
+                      <a:round/>
+                      <a:headEnd type="none" w="med" len="med"/>
+                      <a:tailEnd type="none" w="med" len="med"/>
+                    </a:lnL>
+                    <a:lnR w="12700" cap="flat" cmpd="sng" algn="ctr">
+                      <a:solidFill>
+                        <a:srgbClr val="2A3441"/>
+                      </a:solidFill>
+                      <a:prstDash val="solid"/>
+                      <a:round/>
+                      <a:headEnd type="none" w="med" len="med"/>
+                      <a:tailEnd type="none" w="med" len="med"/>
+                    </a:lnR>
+                    <a:lnT w="12700" cap="flat" cmpd="sng" algn="ctr">
+                      <a:solidFill>
+                        <a:srgbClr val="2A3441"/>
+                      </a:solidFill>
+                      <a:prstDash val="solid"/>
+                      <a:round/>
+                      <a:headEnd type="none" w="med" len="med"/>
+                      <a:tailEnd type="none" w="med" len="med"/>
+                    </a:lnT>
+                    <a:lnB w="12700" cap="flat" cmpd="sng" algn="ctr">
+                      <a:solidFill>
+                        <a:srgbClr val="2A3441"/>
+                      </a:solidFill>
+                      <a:prstDash val="solid"/>
+                      <a:round/>
+                      <a:headEnd type="none" w="med" len="med"/>
+                      <a:tailEnd type="none" w="med" len="med"/>
+                    </a:lnB>
+                    <a:solidFill>
+                      <a:srgbClr val="39FF88"/>
+                    </a:solidFill>
+                  </a:tcPr>
+                </a:tc>
+                <a:tc>
+                  <a:txBody>
+                    <a:bodyPr/>
+                    <a:lstStyle/>
+                    <a:p>
+                      <a:pPr indent="0" marL="0">
+                        <a:buNone/>
+                      </a:pPr>
+                      <a:r>
+                        <a:rPr lang="en-US" sz="1300" b="1" dirty="0">
+                          <a:solidFill>
+                            <a:srgbClr val="0B0F14"/>
+                          </a:solidFill>
+                          <a:latin typeface="Courier New" pitchFamily="34" charset="0"/>
+                          <a:ea typeface="Courier New" pitchFamily="34" charset="-122"/>
+                          <a:cs typeface="Courier New" pitchFamily="34" charset="-120"/>
+                        </a:rPr>
+                        <a:t>Neural</a:t>
+                      </a:r>
+                      <a:endParaRPr lang="en-US" sz="1300" dirty="0">
+                        <a:latin typeface="Courier New" charset="0"/>
+                        <a:ea typeface="Courier New" charset="0"/>
+                        <a:cs typeface="Courier New" charset="0"/>
+                      </a:endParaRPr>
+                    </a:p>
+                  </a:txBody>
+                  <a:tcPr marL="91440" marR="91440" marT="45720" marB="45720">
+                    <a:lnL w="12700" cap="flat" cmpd="sng" algn="ctr">
+                      <a:solidFill>
+                        <a:srgbClr val="2A3441"/>
+                      </a:solidFill>
+                      <a:prstDash val="solid"/>
+                      <a:round/>
+                      <a:headEnd type="none" w="med" len="med"/>
+                      <a:tailEnd type="none" w="med" len="med"/>
+                    </a:lnL>
+                    <a:lnR w="12700" cap="flat" cmpd="sng" algn="ctr">
+                      <a:solidFill>
+                        <a:srgbClr val="2A3441"/>
+                      </a:solidFill>
+                      <a:prstDash val="solid"/>
+                      <a:round/>
+                      <a:headEnd type="none" w="med" len="med"/>
+                      <a:tailEnd type="none" w="med" len="med"/>
+                    </a:lnR>
+                    <a:lnT w="12700" cap="flat" cmpd="sng" algn="ctr">
+                      <a:solidFill>
+                        <a:srgbClr val="2A3441"/>
+                      </a:solidFill>
+                      <a:prstDash val="solid"/>
+                      <a:round/>
+                      <a:headEnd type="none" w="med" len="med"/>
+                      <a:tailEnd type="none" w="med" len="med"/>
+                    </a:lnT>
+                    <a:lnB w="12700" cap="flat" cmpd="sng" algn="ctr">
+                      <a:solidFill>
+                        <a:srgbClr val="2A3441"/>
+                      </a:solidFill>
+                      <a:prstDash val="solid"/>
+                      <a:round/>
+                      <a:headEnd type="none" w="med" len="med"/>
+                      <a:tailEnd type="none" w="med" len="med"/>
+                    </a:lnB>
+                    <a:solidFill>
+                      <a:srgbClr val="39FF88"/>
+                    </a:solidFill>
+                  </a:tcPr>
+                </a:tc>
+                <a:tc>
+                  <a:txBody>
+                    <a:bodyPr/>
+                    <a:lstStyle/>
+                    <a:p>
+                      <a:pPr indent="0" marL="0">
+                        <a:buNone/>
+                      </a:pPr>
+                      <a:r>
+                        <a:rPr lang="en-US" sz="1300" b="1" dirty="0">
+                          <a:solidFill>
+                            <a:srgbClr val="0B0F14"/>
+                          </a:solidFill>
+                          <a:latin typeface="Courier New" pitchFamily="34" charset="0"/>
+                          <a:ea typeface="Courier New" pitchFamily="34" charset="-122"/>
+                          <a:cs typeface="Courier New" pitchFamily="34" charset="-120"/>
+                        </a:rPr>
+                        <a:t>Gain</a:t>
+                      </a:r>
+                      <a:endParaRPr lang="en-US" sz="1300" dirty="0">
+                        <a:latin typeface="Courier New" charset="0"/>
+                        <a:ea typeface="Courier New" charset="0"/>
+                        <a:cs typeface="Courier New" charset="0"/>
+                      </a:endParaRPr>
+                    </a:p>
+                  </a:txBody>
+                  <a:tcPr marL="91440" marR="91440" marT="45720" marB="45720">
+                    <a:lnL w="12700" cap="flat" cmpd="sng" algn="ctr">
+                      <a:solidFill>
+                        <a:srgbClr val="2A3441"/>
+                      </a:solidFill>
+                      <a:prstDash val="solid"/>
+                      <a:round/>
+                      <a:headEnd type="none" w="med" len="med"/>
+                      <a:tailEnd type="none" w="med" len="med"/>
+                    </a:lnL>
+                    <a:lnR w="12700" cap="flat" cmpd="sng" algn="ctr">
+                      <a:solidFill>
+                        <a:srgbClr val="2A3441"/>
+                      </a:solidFill>
+                      <a:prstDash val="solid"/>
+                      <a:round/>
+                      <a:headEnd type="none" w="med" len="med"/>
+                      <a:tailEnd type="none" w="med" len="med"/>
+                    </a:lnR>
+                    <a:lnT w="12700" cap="flat" cmpd="sng" algn="ctr">
+                      <a:solidFill>
+                        <a:srgbClr val="2A3441"/>
+                      </a:solidFill>
+                      <a:prstDash val="solid"/>
+                      <a:round/>
+                      <a:headEnd type="none" w="med" len="med"/>
+                      <a:tailEnd type="none" w="med" len="med"/>
+                    </a:lnT>
+                    <a:lnB w="12700" cap="flat" cmpd="sng" algn="ctr">
+                      <a:solidFill>
+                        <a:srgbClr val="2A3441"/>
+                      </a:solidFill>
+                      <a:prstDash val="solid"/>
+                      <a:round/>
+                      <a:headEnd type="none" w="med" len="med"/>
+                      <a:tailEnd type="none" w="med" len="med"/>
+                    </a:lnB>
+                    <a:solidFill>
+                      <a:srgbClr val="39FF88"/>
+                    </a:solidFill>
+                  </a:tcPr>
+                </a:tc>
+              </a:tr>
+              <a:tr h="420624">
+                <a:tc>
+                  <a:txBody>
+                    <a:bodyPr/>
+                    <a:lstStyle/>
+                    <a:p>
+                      <a:pPr indent="0" marL="0">
+                        <a:buNone/>
+                      </a:pPr>
+                      <a:r>
+                        <a:rPr lang="en-US" sz="1300" dirty="0">
+                          <a:solidFill>
+                            <a:srgbClr val="E6EDF3"/>
+                          </a:solidFill>
+                          <a:latin typeface="Calibri" pitchFamily="34" charset="0"/>
+                          <a:ea typeface="Calibri" pitchFamily="34" charset="-122"/>
+                          <a:cs typeface="Calibri" pitchFamily="34" charset="-120"/>
+                        </a:rPr>
+                        <a:t>5G-like</a:t>
+                      </a:r>
+                      <a:endParaRPr lang="en-US" sz="1300" dirty="0">
+                        <a:latin typeface="Calibri" charset="0"/>
+                        <a:ea typeface="Calibri" charset="0"/>
+                        <a:cs typeface="Calibri" charset="0"/>
+                      </a:endParaRPr>
+                    </a:p>
+                  </a:txBody>
+                  <a:tcPr marL="91440" marR="91440" marT="45720" marB="45720">
+                    <a:lnL w="12700" cap="flat" cmpd="sng" algn="ctr">
+                      <a:solidFill>
+                        <a:srgbClr val="2A3441"/>
+                      </a:solidFill>
+                      <a:prstDash val="solid"/>
+                      <a:round/>
+                      <a:headEnd type="none" w="med" len="med"/>
+                      <a:tailEnd type="none" w="med" len="med"/>
+                    </a:lnL>
+                    <a:lnR w="12700" cap="flat" cmpd="sng" algn="ctr">
+                      <a:solidFill>
+                        <a:srgbClr val="2A3441"/>
+                      </a:solidFill>
+                      <a:prstDash val="solid"/>
+                      <a:round/>
+                      <a:headEnd type="none" w="med" len="med"/>
+                      <a:tailEnd type="none" w="med" len="med"/>
+                    </a:lnR>
+                    <a:lnT w="12700" cap="flat" cmpd="sng" algn="ctr">
+                      <a:solidFill>
+                        <a:srgbClr val="2A3441"/>
+                      </a:solidFill>
+                      <a:prstDash val="solid"/>
+                      <a:round/>
+                      <a:headEnd type="none" w="med" len="med"/>
+                      <a:tailEnd type="none" w="med" len="med"/>
+                    </a:lnT>
+                    <a:lnB w="12700" cap="flat" cmpd="sng" algn="ctr">
+                      <a:solidFill>
+                        <a:srgbClr val="2A3441"/>
+                      </a:solidFill>
+                      <a:prstDash val="solid"/>
+                      <a:round/>
+                      <a:headEnd type="none" w="med" len="med"/>
+                      <a:tailEnd type="none" w="med" len="med"/>
+                    </a:lnB>
+                    <a:solidFill>
+                      <a:srgbClr val="141B24"/>
+                    </a:solidFill>
+                  </a:tcPr>
+                </a:tc>
+                <a:tc>
+                  <a:txBody>
+                    <a:bodyPr/>
+                    <a:lstStyle/>
+                    <a:p>
+                      <a:pPr indent="0" marL="0">
+                        <a:buNone/>
+                      </a:pPr>
+                      <a:r>
+                        <a:rPr lang="en-US" sz="1300" dirty="0">
+                          <a:solidFill>
+                            <a:srgbClr val="E6EDF3"/>
+                          </a:solidFill>
+                          <a:latin typeface="Calibri" pitchFamily="34" charset="0"/>
+                          <a:ea typeface="Calibri" pitchFamily="34" charset="-122"/>
+                          <a:cs typeface="Calibri" pitchFamily="34" charset="-120"/>
+                        </a:rPr>
+                        <a:t>1.27</a:t>
+                      </a:r>
+                      <a:endParaRPr lang="en-US" sz="1300" dirty="0">
+                        <a:latin typeface="Calibri" charset="0"/>
+                        <a:ea typeface="Calibri" charset="0"/>
+                        <a:cs typeface="Calibri" charset="0"/>
+                      </a:endParaRPr>
+                    </a:p>
+                  </a:txBody>
+                  <a:tcPr marL="91440" marR="91440" marT="45720" marB="45720">
+                    <a:lnL w="12700" cap="flat" cmpd="sng" algn="ctr">
+                      <a:solidFill>
+                        <a:srgbClr val="2A3441"/>
+                      </a:solidFill>
+                      <a:prstDash val="solid"/>
+                      <a:round/>
+                      <a:headEnd type="none" w="med" len="med"/>
+                      <a:tailEnd type="none" w="med" len="med"/>
+                    </a:lnL>
+                    <a:lnR w="12700" cap="flat" cmpd="sng" algn="ctr">
+                      <a:solidFill>
+                        <a:srgbClr val="2A3441"/>
+                      </a:solidFill>
+                      <a:prstDash val="solid"/>
+                      <a:round/>
+                      <a:headEnd type="none" w="med" len="med"/>
+                      <a:tailEnd type="none" w="med" len="med"/>
+                    </a:lnR>
+                    <a:lnT w="12700" cap="flat" cmpd="sng" algn="ctr">
+                      <a:solidFill>
+                        <a:srgbClr val="2A3441"/>
+                      </a:solidFill>
+                      <a:prstDash val="solid"/>
+                      <a:round/>
+                      <a:headEnd type="none" w="med" len="med"/>
+                      <a:tailEnd type="none" w="med" len="med"/>
+                    </a:lnT>
+                    <a:lnB w="12700" cap="flat" cmpd="sng" algn="ctr">
+                      <a:solidFill>
+                        <a:srgbClr val="2A3441"/>
+                      </a:solidFill>
+                      <a:prstDash val="solid"/>
+                      <a:round/>
+                      <a:headEnd type="none" w="med" len="med"/>
+                      <a:tailEnd type="none" w="med" len="med"/>
+                    </a:lnB>
+                    <a:solidFill>
+                      <a:srgbClr val="141B24"/>
+                    </a:solidFill>
+                  </a:tcPr>
+                </a:tc>
+                <a:tc>
+                  <a:txBody>
+                    <a:bodyPr/>
+                    <a:lstStyle/>
+                    <a:p>
+                      <a:pPr indent="0" marL="0">
+                        <a:buNone/>
+                      </a:pPr>
+                      <a:r>
+                        <a:rPr lang="en-US" sz="1300" dirty="0">
+                          <a:solidFill>
+                            <a:srgbClr val="E6EDF3"/>
+                          </a:solidFill>
+                          <a:latin typeface="Calibri" pitchFamily="34" charset="0"/>
+                          <a:ea typeface="Calibri" pitchFamily="34" charset="-122"/>
+                          <a:cs typeface="Calibri" pitchFamily="34" charset="-120"/>
+                        </a:rPr>
+                        <a:t>1.16</a:t>
+                      </a:r>
+                      <a:endParaRPr lang="en-US" sz="1300" dirty="0">
+                        <a:latin typeface="Calibri" charset="0"/>
+                        <a:ea typeface="Calibri" charset="0"/>
+                        <a:cs typeface="Calibri" charset="0"/>
+                      </a:endParaRPr>
+                    </a:p>
+                  </a:txBody>
+                  <a:tcPr marL="91440" marR="91440" marT="45720" marB="45720">
+                    <a:lnL w="12700" cap="flat" cmpd="sng" algn="ctr">
+                      <a:solidFill>
+                        <a:srgbClr val="2A3441"/>
+                      </a:solidFill>
+                      <a:prstDash val="solid"/>
+                      <a:round/>
+                      <a:headEnd type="none" w="med" len="med"/>
+                      <a:tailEnd type="none" w="med" len="med"/>
+                    </a:lnL>
+                    <a:lnR w="12700" cap="flat" cmpd="sng" algn="ctr">
+                      <a:solidFill>
+                        <a:srgbClr val="2A3441"/>
+                      </a:solidFill>
+                      <a:prstDash val="solid"/>
+                      <a:round/>
+                      <a:headEnd type="none" w="med" len="med"/>
+                      <a:tailEnd type="none" w="med" len="med"/>
+                    </a:lnR>
+                    <a:lnT w="12700" cap="flat" cmpd="sng" algn="ctr">
+                      <a:solidFill>
+                        <a:srgbClr val="2A3441"/>
+                      </a:solidFill>
+                      <a:prstDash val="solid"/>
+                      <a:round/>
+                      <a:headEnd type="none" w="med" len="med"/>
+                      <a:tailEnd type="none" w="med" len="med"/>
+                    </a:lnT>
+                    <a:lnB w="12700" cap="flat" cmpd="sng" algn="ctr">
+                      <a:solidFill>
+                        <a:srgbClr val="2A3441"/>
+                      </a:solidFill>
+                      <a:prstDash val="solid"/>
+                      <a:round/>
+                      <a:headEnd type="none" w="med" len="med"/>
+                      <a:tailEnd type="none" w="med" len="med"/>
+                    </a:lnB>
+                    <a:solidFill>
+                      <a:srgbClr val="141B24"/>
+                    </a:solidFill>
+                  </a:tcPr>
+                </a:tc>
+                <a:tc>
+                  <a:txBody>
+                    <a:bodyPr/>
+                    <a:lstStyle/>
+                    <a:p>
+                      <a:pPr indent="0" marL="0">
+                        <a:buNone/>
+                      </a:pPr>
+                      <a:r>
+                        <a:rPr lang="en-US" sz="1300" dirty="0">
+                          <a:solidFill>
+                            <a:srgbClr val="E6EDF3"/>
+                          </a:solidFill>
+                          <a:latin typeface="Calibri" pitchFamily="34" charset="0"/>
+                          <a:ea typeface="Calibri" pitchFamily="34" charset="-122"/>
+                          <a:cs typeface="Calibri" pitchFamily="34" charset="-120"/>
+                        </a:rPr>
+                        <a:t>9%</a:t>
+                      </a:r>
+                      <a:endParaRPr lang="en-US" sz="1300" dirty="0">
+                        <a:latin typeface="Calibri" charset="0"/>
+                        <a:ea typeface="Calibri" charset="0"/>
+                        <a:cs typeface="Calibri" charset="0"/>
+                      </a:endParaRPr>
+                    </a:p>
+                  </a:txBody>
+                  <a:tcPr marL="91440" marR="91440" marT="45720" marB="45720">
+                    <a:lnL w="12700" cap="flat" cmpd="sng" algn="ctr">
+                      <a:solidFill>
+                        <a:srgbClr val="2A3441"/>
+                      </a:solidFill>
+                      <a:prstDash val="solid"/>
+                      <a:round/>
+                      <a:headEnd type="none" w="med" len="med"/>
+                      <a:tailEnd type="none" w="med" len="med"/>
+                    </a:lnL>
+                    <a:lnR w="12700" cap="flat" cmpd="sng" algn="ctr">
+                      <a:solidFill>
+                        <a:srgbClr val="2A3441"/>
+                      </a:solidFill>
+                      <a:prstDash val="solid"/>
+                      <a:round/>
+                      <a:headEnd type="none" w="med" len="med"/>
+                      <a:tailEnd type="none" w="med" len="med"/>
+                    </a:lnR>
+                    <a:lnT w="12700" cap="flat" cmpd="sng" algn="ctr">
+                      <a:solidFill>
+                        <a:srgbClr val="2A3441"/>
+                      </a:solidFill>
+                      <a:prstDash val="solid"/>
+                      <a:round/>
+                      <a:headEnd type="none" w="med" len="med"/>
+                      <a:tailEnd type="none" w="med" len="med"/>
+                    </a:lnT>
+                    <a:lnB w="12700" cap="flat" cmpd="sng" algn="ctr">
+                      <a:solidFill>
+                        <a:srgbClr val="2A3441"/>
+                      </a:solidFill>
+                      <a:prstDash val="solid"/>
+                      <a:round/>
+                      <a:headEnd type="none" w="med" len="med"/>
+                      <a:tailEnd type="none" w="med" len="med"/>
+                    </a:lnB>
+                    <a:solidFill>
+                      <a:srgbClr val="141B24"/>
+                    </a:solidFill>
+                  </a:tcPr>
+                </a:tc>
+              </a:tr>
+              <a:tr h="420624">
+                <a:tc>
+                  <a:txBody>
+                    <a:bodyPr/>
+                    <a:lstStyle/>
+                    <a:p>
+                      <a:pPr indent="0" marL="0">
+                        <a:buNone/>
+                      </a:pPr>
+                      <a:r>
+                        <a:rPr lang="en-US" sz="1300" dirty="0">
+                          <a:solidFill>
+                            <a:srgbClr val="E6EDF3"/>
+                          </a:solidFill>
+                          <a:latin typeface="Calibri" pitchFamily="34" charset="0"/>
+                          <a:ea typeface="Calibri" pitchFamily="34" charset="-122"/>
+                          <a:cs typeface="Calibri" pitchFamily="34" charset="-120"/>
+                        </a:rPr>
+                        <a:t>Lossy 2%</a:t>
+                      </a:r>
+                      <a:endParaRPr lang="en-US" sz="1300" dirty="0">
+                        <a:latin typeface="Calibri" charset="0"/>
+                        <a:ea typeface="Calibri" charset="0"/>
+                        <a:cs typeface="Calibri" charset="0"/>
+                      </a:endParaRPr>
+                    </a:p>
+                  </a:txBody>
+                  <a:tcPr marL="91440" marR="91440" marT="45720" marB="45720">
+                    <a:lnL w="12700" cap="flat" cmpd="sng" algn="ctr">
+                      <a:solidFill>
+                        <a:srgbClr val="2A3441"/>
+                      </a:solidFill>
+                      <a:prstDash val="solid"/>
+                      <a:round/>
+                      <a:headEnd type="none" w="med" len="med"/>
+                      <a:tailEnd type="none" w="med" len="med"/>
+                    </a:lnL>
+                    <a:lnR w="12700" cap="flat" cmpd="sng" algn="ctr">
+                      <a:solidFill>
+                        <a:srgbClr val="2A3441"/>
+                      </a:solidFill>
+                      <a:prstDash val="solid"/>
+                      <a:round/>
+                      <a:headEnd type="none" w="med" len="med"/>
+                      <a:tailEnd type="none" w="med" len="med"/>
+                    </a:lnR>
+                    <a:lnT w="12700" cap="flat" cmpd="sng" algn="ctr">
+                      <a:solidFill>
+                        <a:srgbClr val="2A3441"/>
+                      </a:solidFill>
+                      <a:prstDash val="solid"/>
+                      <a:round/>
+                      <a:headEnd type="none" w="med" len="med"/>
+                      <a:tailEnd type="none" w="med" len="med"/>
+                    </a:lnT>
+                    <a:lnB w="12700" cap="flat" cmpd="sng" algn="ctr">
+                      <a:solidFill>
+                        <a:srgbClr val="2A3441"/>
+                      </a:solidFill>
+                      <a:prstDash val="solid"/>
+                      <a:round/>
+                      <a:headEnd type="none" w="med" len="med"/>
+                      <a:tailEnd type="none" w="med" len="med"/>
+                    </a:lnB>
+                    <a:solidFill>
+                      <a:srgbClr val="141B24"/>
+                    </a:solidFill>
+                  </a:tcPr>
+                </a:tc>
+                <a:tc>
+                  <a:txBody>
+                    <a:bodyPr/>
+                    <a:lstStyle/>
+                    <a:p>
+                      <a:pPr indent="0" marL="0">
+                        <a:buNone/>
+                      </a:pPr>
+                      <a:r>
+                        <a:rPr lang="en-US" sz="1300" dirty="0">
+                          <a:solidFill>
+                            <a:srgbClr val="E6EDF3"/>
+                          </a:solidFill>
+                          <a:latin typeface="Calibri" pitchFamily="34" charset="0"/>
+                          <a:ea typeface="Calibri" pitchFamily="34" charset="-122"/>
+                          <a:cs typeface="Calibri" pitchFamily="34" charset="-120"/>
+                        </a:rPr>
+                        <a:t>7.99</a:t>
+                      </a:r>
+                      <a:endParaRPr lang="en-US" sz="1300" dirty="0">
+                        <a:latin typeface="Calibri" charset="0"/>
+                        <a:ea typeface="Calibri" charset="0"/>
+                        <a:cs typeface="Calibri" charset="0"/>
+                      </a:endParaRPr>
+                    </a:p>
+                  </a:txBody>
+                  <a:tcPr marL="91440" marR="91440" marT="45720" marB="45720">
+                    <a:lnL w="12700" cap="flat" cmpd="sng" algn="ctr">
+                      <a:solidFill>
+                        <a:srgbClr val="2A3441"/>
+                      </a:solidFill>
+                      <a:prstDash val="solid"/>
+                      <a:round/>
+                      <a:headEnd type="none" w="med" len="med"/>
+                      <a:tailEnd type="none" w="med" len="med"/>
+                    </a:lnL>
+                    <a:lnR w="12700" cap="flat" cmpd="sng" algn="ctr">
+                      <a:solidFill>
+                        <a:srgbClr val="2A3441"/>
+                      </a:solidFill>
+                      <a:prstDash val="solid"/>
+                      <a:round/>
+                      <a:headEnd type="none" w="med" len="med"/>
+                      <a:tailEnd type="none" w="med" len="med"/>
+                    </a:lnR>
+                    <a:lnT w="12700" cap="flat" cmpd="sng" algn="ctr">
+                      <a:solidFill>
+                        <a:srgbClr val="2A3441"/>
+                      </a:solidFill>
+                      <a:prstDash val="solid"/>
+                      <a:round/>
+                      <a:headEnd type="none" w="med" len="med"/>
+                      <a:tailEnd type="none" w="med" len="med"/>
+                    </a:lnT>
+                    <a:lnB w="12700" cap="flat" cmpd="sng" algn="ctr">
+                      <a:solidFill>
+                        <a:srgbClr val="2A3441"/>
+                      </a:solidFill>
+                      <a:prstDash val="solid"/>
+                      <a:round/>
+                      <a:headEnd type="none" w="med" len="med"/>
+                      <a:tailEnd type="none" w="med" len="med"/>
+                    </a:lnB>
+                    <a:solidFill>
+                      <a:srgbClr val="141B24"/>
+                    </a:solidFill>
+                  </a:tcPr>
+                </a:tc>
+                <a:tc>
+                  <a:txBody>
+                    <a:bodyPr/>
+                    <a:lstStyle/>
+                    <a:p>
+                      <a:pPr indent="0" marL="0">
+                        <a:buNone/>
+                      </a:pPr>
+                      <a:r>
+                        <a:rPr lang="en-US" sz="1300" dirty="0">
+                          <a:solidFill>
+                            <a:srgbClr val="E6EDF3"/>
+                          </a:solidFill>
+                          <a:latin typeface="Calibri" pitchFamily="34" charset="0"/>
+                          <a:ea typeface="Calibri" pitchFamily="34" charset="-122"/>
+                          <a:cs typeface="Calibri" pitchFamily="34" charset="-120"/>
+                        </a:rPr>
+                        <a:t>4.29</a:t>
+                      </a:r>
+                      <a:endParaRPr lang="en-US" sz="1300" dirty="0">
+                        <a:latin typeface="Calibri" charset="0"/>
+                        <a:ea typeface="Calibri" charset="0"/>
+                        <a:cs typeface="Calibri" charset="0"/>
+                      </a:endParaRPr>
+                    </a:p>
+                  </a:txBody>
+                  <a:tcPr marL="91440" marR="91440" marT="45720" marB="45720">
+                    <a:lnL w="12700" cap="flat" cmpd="sng" algn="ctr">
+                      <a:solidFill>
+                        <a:srgbClr val="2A3441"/>
+                      </a:solidFill>
+                      <a:prstDash val="solid"/>
+                      <a:round/>
+                      <a:headEnd type="none" w="med" len="med"/>
+                      <a:tailEnd type="none" w="med" len="med"/>
+                    </a:lnL>
+                    <a:lnR w="12700" cap="flat" cmpd="sng" algn="ctr">
+                      <a:solidFill>
+                        <a:srgbClr val="2A3441"/>
+                      </a:solidFill>
+                      <a:prstDash val="solid"/>
+                      <a:round/>
+                      <a:headEnd type="none" w="med" len="med"/>
+                      <a:tailEnd type="none" w="med" len="med"/>
+                    </a:lnR>
+                    <a:lnT w="12700" cap="flat" cmpd="sng" algn="ctr">
+                      <a:solidFill>
+                        <a:srgbClr val="2A3441"/>
+                      </a:solidFill>
+                      <a:prstDash val="solid"/>
+                      <a:round/>
+                      <a:headEnd type="none" w="med" len="med"/>
+                      <a:tailEnd type="none" w="med" len="med"/>
+                    </a:lnT>
+                    <a:lnB w="12700" cap="flat" cmpd="sng" algn="ctr">
+                      <a:solidFill>
+                        <a:srgbClr val="2A3441"/>
+                      </a:solidFill>
+                      <a:prstDash val="solid"/>
+                      <a:round/>
+                      <a:headEnd type="none" w="med" len="med"/>
+                      <a:tailEnd type="none" w="med" len="med"/>
+                    </a:lnB>
+                    <a:solidFill>
+                      <a:srgbClr val="141B24"/>
+                    </a:solidFill>
+                  </a:tcPr>
+                </a:tc>
+                <a:tc>
+                  <a:txBody>
+                    <a:bodyPr/>
+                    <a:lstStyle/>
+                    <a:p>
+                      <a:pPr indent="0" marL="0">
+                        <a:buNone/>
+                      </a:pPr>
+                      <a:r>
+                        <a:rPr lang="en-US" sz="1300" dirty="0">
+                          <a:solidFill>
+                            <a:srgbClr val="E6EDF3"/>
+                          </a:solidFill>
+                          <a:latin typeface="Calibri" pitchFamily="34" charset="0"/>
+                          <a:ea typeface="Calibri" pitchFamily="34" charset="-122"/>
+                          <a:cs typeface="Calibri" pitchFamily="34" charset="-120"/>
+                        </a:rPr>
+                        <a:t>46%</a:t>
+                      </a:r>
+                      <a:endParaRPr lang="en-US" sz="1300" dirty="0">
+                        <a:latin typeface="Calibri" charset="0"/>
+                        <a:ea typeface="Calibri" charset="0"/>
+                        <a:cs typeface="Calibri" charset="0"/>
+                      </a:endParaRPr>
+                    </a:p>
+                  </a:txBody>
+                  <a:tcPr marL="91440" marR="91440" marT="45720" marB="45720">
+                    <a:lnL w="12700" cap="flat" cmpd="sng" algn="ctr">
+                      <a:solidFill>
+                        <a:srgbClr val="2A3441"/>
+                      </a:solidFill>
+                      <a:prstDash val="solid"/>
+                      <a:round/>
+                      <a:headEnd type="none" w="med" len="med"/>
+                      <a:tailEnd type="none" w="med" len="med"/>
+                    </a:lnL>
+                    <a:lnR w="12700" cap="flat" cmpd="sng" algn="ctr">
+                      <a:solidFill>
+                        <a:srgbClr val="2A3441"/>
+                      </a:solidFill>
+                      <a:prstDash val="solid"/>
+                      <a:round/>
+                      <a:headEnd type="none" w="med" len="med"/>
+                      <a:tailEnd type="none" w="med" len="med"/>
+                    </a:lnR>
+                    <a:lnT w="12700" cap="flat" cmpd="sng" algn="ctr">
+                      <a:solidFill>
+                        <a:srgbClr val="2A3441"/>
+                      </a:solidFill>
+                      <a:prstDash val="solid"/>
+                      <a:round/>
+                      <a:headEnd type="none" w="med" len="med"/>
+                      <a:tailEnd type="none" w="med" len="med"/>
+                    </a:lnT>
+                    <a:lnB w="12700" cap="flat" cmpd="sng" algn="ctr">
+                      <a:solidFill>
+                        <a:srgbClr val="2A3441"/>
+                      </a:solidFill>
+                      <a:prstDash val="solid"/>
+                      <a:round/>
+                      <a:headEnd type="none" w="med" len="med"/>
+                      <a:tailEnd type="none" w="med" len="med"/>
+                    </a:lnB>
+                    <a:solidFill>
+                      <a:srgbClr val="141B24"/>
+                    </a:solidFill>
+                  </a:tcPr>
+                </a:tc>
+              </a:tr>
+              <a:tr h="420624">
+                <a:tc>
+                  <a:txBody>
+                    <a:bodyPr/>
+                    <a:lstStyle/>
+                    <a:p>
+                      <a:pPr indent="0" marL="0">
+                        <a:buNone/>
+                      </a:pPr>
+                      <a:r>
+                        <a:rPr lang="en-US" sz="1300" dirty="0">
+                          <a:solidFill>
+                            <a:srgbClr val="E6EDF3"/>
+                          </a:solidFill>
+                          <a:latin typeface="Calibri" pitchFamily="34" charset="0"/>
+                          <a:ea typeface="Calibri" pitchFamily="34" charset="-122"/>
+                          <a:cs typeface="Calibri" pitchFamily="34" charset="-120"/>
+                        </a:rPr>
+                        <a:t>Satellite-like</a:t>
+                      </a:r>
+                      <a:endParaRPr lang="en-US" sz="1300" dirty="0">
+                        <a:latin typeface="Calibri" charset="0"/>
+                        <a:ea typeface="Calibri" charset="0"/>
+                        <a:cs typeface="Calibri" charset="0"/>
+                      </a:endParaRPr>
+                    </a:p>
+                  </a:txBody>
+                  <a:tcPr marL="91440" marR="91440" marT="45720" marB="45720">
+                    <a:lnL w="12700" cap="flat" cmpd="sng" algn="ctr">
+                      <a:solidFill>
+                        <a:srgbClr val="2A3441"/>
+                      </a:solidFill>
+                      <a:prstDash val="solid"/>
+                      <a:round/>
+                      <a:headEnd type="none" w="med" len="med"/>
+                      <a:tailEnd type="none" w="med" len="med"/>
+                    </a:lnL>
+                    <a:lnR w="12700" cap="flat" cmpd="sng" algn="ctr">
+                      <a:solidFill>
+                        <a:srgbClr val="2A3441"/>
+                      </a:solidFill>
+                      <a:prstDash val="solid"/>
+                      <a:round/>
+                      <a:headEnd type="none" w="med" len="med"/>
+                      <a:tailEnd type="none" w="med" len="med"/>
+                    </a:lnR>
+                    <a:lnT w="12700" cap="flat" cmpd="sng" algn="ctr">
+                      <a:solidFill>
+                        <a:srgbClr val="2A3441"/>
+                      </a:solidFill>
+                      <a:prstDash val="solid"/>
+                      <a:round/>
+                      <a:headEnd type="none" w="med" len="med"/>
+                      <a:tailEnd type="none" w="med" len="med"/>
+                    </a:lnT>
+                    <a:lnB w="12700" cap="flat" cmpd="sng" algn="ctr">
+                      <a:solidFill>
+                        <a:srgbClr val="2A3441"/>
+                      </a:solidFill>
+                      <a:prstDash val="solid"/>
+                      <a:round/>
+                      <a:headEnd type="none" w="med" len="med"/>
+                      <a:tailEnd type="none" w="med" len="med"/>
+                    </a:lnB>
+                    <a:solidFill>
+                      <a:srgbClr val="141B24"/>
+                    </a:solidFill>
+                  </a:tcPr>
+                </a:tc>
+                <a:tc>
+                  <a:txBody>
+                    <a:bodyPr/>
+                    <a:lstStyle/>
+                    <a:p>
+                      <a:pPr indent="0" marL="0">
+                        <a:buNone/>
+                      </a:pPr>
+                      <a:r>
+                        <a:rPr lang="en-US" sz="1300" dirty="0">
+                          <a:solidFill>
+                            <a:srgbClr val="E6EDF3"/>
+                          </a:solidFill>
+                          <a:latin typeface="Calibri" pitchFamily="34" charset="0"/>
+                          <a:ea typeface="Calibri" pitchFamily="34" charset="-122"/>
+                          <a:cs typeface="Calibri" pitchFamily="34" charset="-120"/>
+                        </a:rPr>
+                        <a:t>25.7</a:t>
+                      </a:r>
+                      <a:endParaRPr lang="en-US" sz="1300" dirty="0">
+                        <a:latin typeface="Calibri" charset="0"/>
+                        <a:ea typeface="Calibri" charset="0"/>
+                        <a:cs typeface="Calibri" charset="0"/>
+                      </a:endParaRPr>
+                    </a:p>
+                  </a:txBody>
+                  <a:tcPr marL="91440" marR="91440" marT="45720" marB="45720">
+                    <a:lnL w="12700" cap="flat" cmpd="sng" algn="ctr">
+                      <a:solidFill>
+                        <a:srgbClr val="2A3441"/>
+                      </a:solidFill>
+                      <a:prstDash val="solid"/>
+                      <a:round/>
+                      <a:headEnd type="none" w="med" len="med"/>
+                      <a:tailEnd type="none" w="med" len="med"/>
+                    </a:lnL>
+                    <a:lnR w="12700" cap="flat" cmpd="sng" algn="ctr">
+                      <a:solidFill>
+                        <a:srgbClr val="2A3441"/>
+                      </a:solidFill>
+                      <a:prstDash val="solid"/>
+                      <a:round/>
+                      <a:headEnd type="none" w="med" len="med"/>
+                      <a:tailEnd type="none" w="med" len="med"/>
+                    </a:lnR>
+                    <a:lnT w="12700" cap="flat" cmpd="sng" algn="ctr">
+                      <a:solidFill>
+                        <a:srgbClr val="2A3441"/>
+                      </a:solidFill>
+                      <a:prstDash val="solid"/>
+                      <a:round/>
+                      <a:headEnd type="none" w="med" len="med"/>
+                      <a:tailEnd type="none" w="med" len="med"/>
+                    </a:lnT>
+                    <a:lnB w="12700" cap="flat" cmpd="sng" algn="ctr">
+                      <a:solidFill>
+                        <a:srgbClr val="2A3441"/>
+                      </a:solidFill>
+                      <a:prstDash val="solid"/>
+                      <a:round/>
+                      <a:headEnd type="none" w="med" len="med"/>
+                      <a:tailEnd type="none" w="med" len="med"/>
+                    </a:lnB>
+                    <a:solidFill>
+                      <a:srgbClr val="141B24"/>
+                    </a:solidFill>
+                  </a:tcPr>
+                </a:tc>
+                <a:tc>
+                  <a:txBody>
+                    <a:bodyPr/>
+                    <a:lstStyle/>
+                    <a:p>
+                      <a:pPr indent="0" marL="0">
+                        <a:buNone/>
+                      </a:pPr>
+                      <a:r>
+                        <a:rPr lang="en-US" sz="1300" dirty="0">
+                          <a:solidFill>
+                            <a:srgbClr val="E6EDF3"/>
+                          </a:solidFill>
+                          <a:latin typeface="Calibri" pitchFamily="34" charset="0"/>
+                          <a:ea typeface="Calibri" pitchFamily="34" charset="-122"/>
+                          <a:cs typeface="Calibri" pitchFamily="34" charset="-120"/>
+                        </a:rPr>
+                        <a:t>12.9</a:t>
+                      </a:r>
+                      <a:endParaRPr lang="en-US" sz="1300" dirty="0">
+                        <a:latin typeface="Calibri" charset="0"/>
+                        <a:ea typeface="Calibri" charset="0"/>
+                        <a:cs typeface="Calibri" charset="0"/>
+                      </a:endParaRPr>
+                    </a:p>
+                  </a:txBody>
+                  <a:tcPr marL="91440" marR="91440" marT="45720" marB="45720">
+                    <a:lnL w="12700" cap="flat" cmpd="sng" algn="ctr">
+                      <a:solidFill>
+                        <a:srgbClr val="2A3441"/>
+                      </a:solidFill>
+                      <a:prstDash val="solid"/>
+                      <a:round/>
+                      <a:headEnd type="none" w="med" len="med"/>
+                      <a:tailEnd type="none" w="med" len="med"/>
+                    </a:lnL>
+                    <a:lnR w="12700" cap="flat" cmpd="sng" algn="ctr">
+                      <a:solidFill>
+                        <a:srgbClr val="2A3441"/>
+                      </a:solidFill>
+                      <a:prstDash val="solid"/>
+                      <a:round/>
+                      <a:headEnd type="none" w="med" len="med"/>
+                      <a:tailEnd type="none" w="med" len="med"/>
+                    </a:lnR>
+                    <a:lnT w="12700" cap="flat" cmpd="sng" algn="ctr">
+                      <a:solidFill>
+                        <a:srgbClr val="2A3441"/>
+                      </a:solidFill>
+                      <a:prstDash val="solid"/>
+                      <a:round/>
+                      <a:headEnd type="none" w="med" len="med"/>
+                      <a:tailEnd type="none" w="med" len="med"/>
+                    </a:lnT>
+                    <a:lnB w="12700" cap="flat" cmpd="sng" algn="ctr">
+                      <a:solidFill>
+                        <a:srgbClr val="2A3441"/>
+                      </a:solidFill>
+                      <a:prstDash val="solid"/>
+                      <a:round/>
+                      <a:headEnd type="none" w="med" len="med"/>
+                      <a:tailEnd type="none" w="med" len="med"/>
+                    </a:lnB>
+                    <a:solidFill>
+                      <a:srgbClr val="141B24"/>
+                    </a:solidFill>
+                  </a:tcPr>
+                </a:tc>
+                <a:tc>
+                  <a:txBody>
+                    <a:bodyPr/>
+                    <a:lstStyle/>
+                    <a:p>
+                      <a:pPr indent="0" marL="0">
+                        <a:buNone/>
+                      </a:pPr>
+                      <a:r>
+                        <a:rPr lang="en-US" sz="1300" dirty="0">
+                          <a:solidFill>
+                            <a:srgbClr val="E6EDF3"/>
+                          </a:solidFill>
+                          <a:latin typeface="Calibri" pitchFamily="34" charset="0"/>
+                          <a:ea typeface="Calibri" pitchFamily="34" charset="-122"/>
+                          <a:cs typeface="Calibri" pitchFamily="34" charset="-120"/>
+                        </a:rPr>
+                        <a:t>50%</a:t>
+                      </a:r>
+                      <a:endParaRPr lang="en-US" sz="1300" dirty="0">
+                        <a:latin typeface="Calibri" charset="0"/>
+                        <a:ea typeface="Calibri" charset="0"/>
+                        <a:cs typeface="Calibri" charset="0"/>
+                      </a:endParaRPr>
+                    </a:p>
+                  </a:txBody>
+                  <a:tcPr marL="91440" marR="91440" marT="45720" marB="45720">
+                    <a:lnL w="12700" cap="flat" cmpd="sng" algn="ctr">
+                      <a:solidFill>
+                        <a:srgbClr val="2A3441"/>
+                      </a:solidFill>
+                      <a:prstDash val="solid"/>
+                      <a:round/>
+                      <a:headEnd type="none" w="med" len="med"/>
+                      <a:tailEnd type="none" w="med" len="med"/>
+                    </a:lnL>
+                    <a:lnR w="12700" cap="flat" cmpd="sng" algn="ctr">
+                      <a:solidFill>
+                        <a:srgbClr val="2A3441"/>
+                      </a:solidFill>
+                      <a:prstDash val="solid"/>
+                      <a:round/>
+                      <a:headEnd type="none" w="med" len="med"/>
+                      <a:tailEnd type="none" w="med" len="med"/>
+                    </a:lnR>
+                    <a:lnT w="12700" cap="flat" cmpd="sng" algn="ctr">
+                      <a:solidFill>
+                        <a:srgbClr val="2A3441"/>
+                      </a:solidFill>
+                      <a:prstDash val="solid"/>
+                      <a:round/>
+                      <a:headEnd type="none" w="med" len="med"/>
+                      <a:tailEnd type="none" w="med" len="med"/>
+                    </a:lnT>
+                    <a:lnB w="12700" cap="flat" cmpd="sng" algn="ctr">
+                      <a:solidFill>
+                        <a:srgbClr val="2A3441"/>
+                      </a:solidFill>
+                      <a:prstDash val="solid"/>
+                      <a:round/>
+                      <a:headEnd type="none" w="med" len="med"/>
+                      <a:tailEnd type="none" w="med" len="med"/>
+                    </a:lnB>
+                    <a:solidFill>
+                      <a:srgbClr val="141B24"/>
+                    </a:solidFill>
+                  </a:tcPr>
+                </a:tc>
+              </a:tr>
+              <a:tr h="420624">
+                <a:tc>
+                  <a:txBody>
+                    <a:bodyPr/>
+                    <a:lstStyle/>
+                    <a:p>
+                      <a:pPr indent="0" marL="0">
+                        <a:buNone/>
+                      </a:pPr>
+                      <a:r>
+                        <a:rPr lang="en-US" sz="1300" dirty="0">
+                          <a:solidFill>
+                            <a:srgbClr val="E6EDF3"/>
+                          </a:solidFill>
+                          <a:latin typeface="Calibri" pitchFamily="34" charset="0"/>
+                          <a:ea typeface="Calibri" pitchFamily="34" charset="-122"/>
+                          <a:cs typeface="Calibri" pitchFamily="34" charset="-120"/>
+                        </a:rPr>
+                        <a:t>Hostile, 10% loss</a:t>
+                      </a:r>
+                      <a:endParaRPr lang="en-US" sz="1300" dirty="0">
+                        <a:latin typeface="Calibri" charset="0"/>
+                        <a:ea typeface="Calibri" charset="0"/>
+                        <a:cs typeface="Calibri" charset="0"/>
+                      </a:endParaRPr>
+                    </a:p>
+                  </a:txBody>
+                  <a:tcPr marL="91440" marR="91440" marT="45720" marB="45720">
+                    <a:lnL w="12700" cap="flat" cmpd="sng" algn="ctr">
+                      <a:solidFill>
+                        <a:srgbClr val="2A3441"/>
+                      </a:solidFill>
+                      <a:prstDash val="solid"/>
+                      <a:round/>
+                      <a:headEnd type="none" w="med" len="med"/>
+                      <a:tailEnd type="none" w="med" len="med"/>
+                    </a:lnL>
+                    <a:lnR w="12700" cap="flat" cmpd="sng" algn="ctr">
+                      <a:solidFill>
+                        <a:srgbClr val="2A3441"/>
+                      </a:solidFill>
+                      <a:prstDash val="solid"/>
+                      <a:round/>
+                      <a:headEnd type="none" w="med" len="med"/>
+                      <a:tailEnd type="none" w="med" len="med"/>
+                    </a:lnR>
+                    <a:lnT w="12700" cap="flat" cmpd="sng" algn="ctr">
+                      <a:solidFill>
+                        <a:srgbClr val="2A3441"/>
+                      </a:solidFill>
+                      <a:prstDash val="solid"/>
+                      <a:round/>
+                      <a:headEnd type="none" w="med" len="med"/>
+                      <a:tailEnd type="none" w="med" len="med"/>
+                    </a:lnT>
+                    <a:lnB w="12700" cap="flat" cmpd="sng" algn="ctr">
+                      <a:solidFill>
+                        <a:srgbClr val="2A3441"/>
+                      </a:solidFill>
+                      <a:prstDash val="solid"/>
+                      <a:round/>
+                      <a:headEnd type="none" w="med" len="med"/>
+                      <a:tailEnd type="none" w="med" len="med"/>
+                    </a:lnB>
+                    <a:solidFill>
+                      <a:srgbClr val="141B24"/>
+                    </a:solidFill>
+                  </a:tcPr>
+                </a:tc>
+                <a:tc>
+                  <a:txBody>
+                    <a:bodyPr/>
+                    <a:lstStyle/>
+                    <a:p>
+                      <a:pPr indent="0" marL="0">
+                        <a:buNone/>
+                      </a:pPr>
+                      <a:r>
+                        <a:rPr lang="en-US" sz="1300" dirty="0">
+                          <a:solidFill>
+                            <a:srgbClr val="E6EDF3"/>
+                          </a:solidFill>
+                          <a:latin typeface="Calibri" pitchFamily="34" charset="0"/>
+                          <a:ea typeface="Calibri" pitchFamily="34" charset="-122"/>
+                          <a:cs typeface="Calibri" pitchFamily="34" charset="-120"/>
+                        </a:rPr>
+                        <a:t>7.3</a:t>
+                      </a:r>
+                      <a:endParaRPr lang="en-US" sz="1300" dirty="0">
+                        <a:latin typeface="Calibri" charset="0"/>
+                        <a:ea typeface="Calibri" charset="0"/>
+                        <a:cs typeface="Calibri" charset="0"/>
+                      </a:endParaRPr>
+                    </a:p>
+                  </a:txBody>
+                  <a:tcPr marL="91440" marR="91440" marT="45720" marB="45720">
+                    <a:lnL w="12700" cap="flat" cmpd="sng" algn="ctr">
+                      <a:solidFill>
+                        <a:srgbClr val="2A3441"/>
+                      </a:solidFill>
+                      <a:prstDash val="solid"/>
+                      <a:round/>
+                      <a:headEnd type="none" w="med" len="med"/>
+                      <a:tailEnd type="none" w="med" len="med"/>
+                    </a:lnL>
+                    <a:lnR w="12700" cap="flat" cmpd="sng" algn="ctr">
+                      <a:solidFill>
+                        <a:srgbClr val="2A3441"/>
+                      </a:solidFill>
+                      <a:prstDash val="solid"/>
+                      <a:round/>
+                      <a:headEnd type="none" w="med" len="med"/>
+                      <a:tailEnd type="none" w="med" len="med"/>
+                    </a:lnR>
+                    <a:lnT w="12700" cap="flat" cmpd="sng" algn="ctr">
+                      <a:solidFill>
+                        <a:srgbClr val="2A3441"/>
+                      </a:solidFill>
+                      <a:prstDash val="solid"/>
+                      <a:round/>
+                      <a:headEnd type="none" w="med" len="med"/>
+                      <a:tailEnd type="none" w="med" len="med"/>
+                    </a:lnT>
+                    <a:lnB w="12700" cap="flat" cmpd="sng" algn="ctr">
+                      <a:solidFill>
+                        <a:srgbClr val="2A3441"/>
+                      </a:solidFill>
+                      <a:prstDash val="solid"/>
+                      <a:round/>
+                      <a:headEnd type="none" w="med" len="med"/>
+                      <a:tailEnd type="none" w="med" len="med"/>
+                    </a:lnB>
+                    <a:solidFill>
+                      <a:srgbClr val="141B24"/>
+                    </a:solidFill>
+                  </a:tcPr>
+                </a:tc>
+                <a:tc>
+                  <a:txBody>
+                    <a:bodyPr/>
+                    <a:lstStyle/>
+                    <a:p>
+                      <a:pPr indent="0" marL="0">
+                        <a:buNone/>
+                      </a:pPr>
+                      <a:r>
+                        <a:rPr lang="en-US" sz="1300" dirty="0">
+                          <a:solidFill>
+                            <a:srgbClr val="E6EDF3"/>
+                          </a:solidFill>
+                          <a:latin typeface="Calibri" pitchFamily="34" charset="0"/>
+                          <a:ea typeface="Calibri" pitchFamily="34" charset="-122"/>
+                          <a:cs typeface="Calibri" pitchFamily="34" charset="-120"/>
+                        </a:rPr>
+                        <a:t>8.1</a:t>
+                      </a:r>
+                      <a:endParaRPr lang="en-US" sz="1300" dirty="0">
+                        <a:latin typeface="Calibri" charset="0"/>
+                        <a:ea typeface="Calibri" charset="0"/>
+                        <a:cs typeface="Calibri" charset="0"/>
+                      </a:endParaRPr>
+                    </a:p>
+                  </a:txBody>
+                  <a:tcPr marL="91440" marR="91440" marT="45720" marB="45720">
+                    <a:lnL w="12700" cap="flat" cmpd="sng" algn="ctr">
+                      <a:solidFill>
+                        <a:srgbClr val="2A3441"/>
+                      </a:solidFill>
+                      <a:prstDash val="solid"/>
+                      <a:round/>
+                      <a:headEnd type="none" w="med" len="med"/>
+                      <a:tailEnd type="none" w="med" len="med"/>
+                    </a:lnL>
+                    <a:lnR w="12700" cap="flat" cmpd="sng" algn="ctr">
+                      <a:solidFill>
+                        <a:srgbClr val="2A3441"/>
+                      </a:solidFill>
+                      <a:prstDash val="solid"/>
+                      <a:round/>
+                      <a:headEnd type="none" w="med" len="med"/>
+                      <a:tailEnd type="none" w="med" len="med"/>
+                    </a:lnR>
+                    <a:lnT w="12700" cap="flat" cmpd="sng" algn="ctr">
+                      <a:solidFill>
+                        <a:srgbClr val="2A3441"/>
+                      </a:solidFill>
+                      <a:prstDash val="solid"/>
+                      <a:round/>
+                      <a:headEnd type="none" w="med" len="med"/>
+                      <a:tailEnd type="none" w="med" len="med"/>
+                    </a:lnT>
+                    <a:lnB w="12700" cap="flat" cmpd="sng" algn="ctr">
+                      <a:solidFill>
+                        <a:srgbClr val="2A3441"/>
+                      </a:solidFill>
+                      <a:prstDash val="solid"/>
+                      <a:round/>
+                      <a:headEnd type="none" w="med" len="med"/>
+                      <a:tailEnd type="none" w="med" len="med"/>
+                    </a:lnB>
+                    <a:solidFill>
+                      <a:srgbClr val="141B24"/>
+                    </a:solidFill>
+                  </a:tcPr>
+                </a:tc>
+                <a:tc>
+                  <a:txBody>
+                    <a:bodyPr/>
+                    <a:lstStyle/>
+                    <a:p>
+                      <a:pPr indent="0" marL="0">
+                        <a:buNone/>
+                      </a:pPr>
+                      <a:r>
+                        <a:rPr lang="en-US" sz="1300" dirty="0">
+                          <a:solidFill>
+                            <a:srgbClr val="E6EDF3"/>
+                          </a:solidFill>
+                          <a:latin typeface="Calibri" pitchFamily="34" charset="0"/>
+                          <a:ea typeface="Calibri" pitchFamily="34" charset="-122"/>
+                          <a:cs typeface="Calibri" pitchFamily="34" charset="-120"/>
+                        </a:rPr>
+                        <a:t>tie</a:t>
+                      </a:r>
+                      <a:endParaRPr lang="en-US" sz="1300" dirty="0">
+                        <a:latin typeface="Calibri" charset="0"/>
+                        <a:ea typeface="Calibri" charset="0"/>
+                        <a:cs typeface="Calibri" charset="0"/>
+                      </a:endParaRPr>
+                    </a:p>
+                  </a:txBody>
+                  <a:tcPr marL="91440" marR="91440" marT="45720" marB="45720">
+                    <a:lnL w="12700" cap="flat" cmpd="sng" algn="ctr">
+                      <a:solidFill>
+                        <a:srgbClr val="2A3441"/>
+                      </a:solidFill>
+                      <a:prstDash val="solid"/>
+                      <a:round/>
+                      <a:headEnd type="none" w="med" len="med"/>
+                      <a:tailEnd type="none" w="med" len="med"/>
+                    </a:lnL>
+                    <a:lnR w="12700" cap="flat" cmpd="sng" algn="ctr">
+                      <a:solidFill>
+                        <a:srgbClr val="2A3441"/>
+                      </a:solidFill>
+                      <a:prstDash val="solid"/>
+                      <a:round/>
+                      <a:headEnd type="none" w="med" len="med"/>
+                      <a:tailEnd type="none" w="med" len="med"/>
+                    </a:lnR>
+                    <a:lnT w="12700" cap="flat" cmpd="sng" algn="ctr">
+                      <a:solidFill>
+                        <a:srgbClr val="2A3441"/>
+                      </a:solidFill>
+                      <a:prstDash val="solid"/>
+                      <a:round/>
+                      <a:headEnd type="none" w="med" len="med"/>
+                      <a:tailEnd type="none" w="med" len="med"/>
+                    </a:lnT>
+                    <a:lnB w="12700" cap="flat" cmpd="sng" algn="ctr">
+                      <a:solidFill>
+                        <a:srgbClr val="2A3441"/>
+                      </a:solidFill>
+                      <a:prstDash val="solid"/>
+                      <a:round/>
+                      <a:headEnd type="none" w="med" len="med"/>
+                      <a:tailEnd type="none" w="med" len="med"/>
+                    </a:lnB>
+                    <a:solidFill>
+                      <a:srgbClr val="141B24"/>
+                    </a:solidFill>
+                  </a:tcPr>
+                </a:tc>
+              </a:tr>
+            </a:tbl>
+          </a:graphicData>
+        </a:graphic>
+      </p:graphicFrame>
+      <p:sp>
+        <p:nvSpPr>
+          <p:cNvPr id="5" name="Text 2"/>
           <p:cNvSpPr/>
           <p:nvPr/>
         </p:nvSpPr>
         <p:spPr>
           <a:xfrm>
-            <a:off x="548640" y="1371600"/>
-            <a:ext cx="5394960" cy="4206240"/>
+            <a:off x="6949440" y="1188720"/>
+            <a:ext cx="4846320" cy="4937760"/>
           </a:xfrm>
           <a:prstGeom prst="rect">
             <a:avLst/>
           </a:prstGeom>
-          <a:solidFill>
-            <a:srgbClr val="141B24"/>
-          </a:solidFill>
-          <a:ln w="12700">
-            <a:solidFill>
-              <a:srgbClr val="39FF88"/>
-            </a:solidFill>
-            <a:prstDash val="solid"/>
-          </a:ln>
+          <a:noFill/>
+          <a:ln/>
         </p:spPr>
-      </p:sp>
-      <p:sp>
-        <p:nvSpPr>
-          <p:cNvPr id="5" name="Text 3"/>
+        <p:txBody>
+          <a:bodyPr wrap="square" lIns="0" tIns="0" rIns="0" bIns="0" rtlCol="0" anchor="t"/>
+          <a:lstStyle/>
+          <a:p>
+            <a:pPr marL="342900" indent="-342900">
+              <a:spcAft>
+                <a:spcPts val="800"/>
+              </a:spcAft>
+              <a:buSzPct val="100000"/>
+              <a:buChar char="•"/>
+            </a:pPr>
+            <a:r>
+              <a:rPr lang="en-US" sz="1400" dirty="0">
+                <a:solidFill>
+                  <a:srgbClr val="E6EDF3"/>
+                </a:solidFill>
+                <a:latin typeface="Calibri" pitchFamily="34" charset="0"/>
+                <a:ea typeface="Calibri" pitchFamily="34" charset="-122"/>
+                <a:cs typeface="Calibri" pitchFamily="34" charset="-120"/>
+              </a:rPr>
+              <a:t>Receiver buffers out-of-order packets (64 window) and reports them in a bitmap in every ACK</a:t>
+            </a:r>
+            <a:endParaRPr lang="en-US" sz="1400" dirty="0"/>
+          </a:p>
+          <a:p>
+            <a:pPr marL="342900" indent="-342900">
+              <a:spcAft>
+                <a:spcPts val="800"/>
+              </a:spcAft>
+              <a:buSzPct val="100000"/>
+              <a:buChar char="•"/>
+            </a:pPr>
+            <a:r>
+              <a:rPr lang="en-US" sz="1400" dirty="0">
+                <a:solidFill>
+                  <a:srgbClr val="E6EDF3"/>
+                </a:solidFill>
+                <a:latin typeface="Calibri" pitchFamily="34" charset="0"/>
+                <a:ea typeface="Calibri" pitchFamily="34" charset="-122"/>
+                <a:cs typeface="Calibri" pitchFamily="34" charset="-120"/>
+              </a:rPr>
+              <a:t>Sender: one timer per packet; resends only the missing ones</a:t>
+            </a:r>
+            <a:endParaRPr lang="en-US" sz="1400" dirty="0"/>
+          </a:p>
+          <a:p>
+            <a:pPr marL="342900" indent="-342900">
+              <a:spcAft>
+                <a:spcPts val="800"/>
+              </a:spcAft>
+              <a:buSzPct val="100000"/>
+              <a:buChar char="•"/>
+            </a:pPr>
+            <a:r>
+              <a:rPr lang="en-US" sz="1400" dirty="0">
+                <a:solidFill>
+                  <a:srgbClr val="E6EDF3"/>
+                </a:solidFill>
+                <a:latin typeface="Calibri" pitchFamily="34" charset="0"/>
+                <a:ea typeface="Calibri" pitchFamily="34" charset="-122"/>
+                <a:cs typeface="Calibri" pitchFamily="34" charset="-120"/>
+              </a:rPr>
+              <a:t>Retransmissions drop about 10x; web chat 200 messages: 6.4 s vs 11.9 s (AIMD)</a:t>
+            </a:r>
+            <a:endParaRPr lang="en-US" sz="1400" dirty="0"/>
+          </a:p>
+          <a:p>
+            <a:pPr marL="342900" indent="-342900">
+              <a:spcAft>
+                <a:spcPts val="800"/>
+              </a:spcAft>
+              <a:buSzPct val="100000"/>
+              <a:buChar char="•"/>
+            </a:pPr>
+            <a:r>
+              <a:rPr lang="en-US" sz="1400" dirty="0">
+                <a:solidFill>
+                  <a:srgbClr val="E6EDF3"/>
+                </a:solidFill>
+                <a:latin typeface="Calibri" pitchFamily="34" charset="0"/>
+                <a:ea typeface="Calibri" pitchFamily="34" charset="-122"/>
+                <a:cs typeface="Calibri" pitchFamily="34" charset="-120"/>
+              </a:rPr>
+              <a:t>The neural agent now wins by more, and the 10% loss failure was mostly a Go-Back-N effect</a:t>
+            </a:r>
+            <a:endParaRPr lang="en-US" sz="1400" dirty="0"/>
+          </a:p>
+          <a:p>
+            <a:pPr marL="342900" indent="-342900">
+              <a:spcAft>
+                <a:spcPts val="800"/>
+              </a:spcAft>
+              <a:buSzPct val="100000"/>
+              <a:buChar char="•"/>
+            </a:pPr>
+            <a:r>
+              <a:rPr lang="en-US" sz="1400" dirty="0">
+                <a:solidFill>
+                  <a:srgbClr val="E6EDF3"/>
+                </a:solidFill>
+                <a:latin typeface="Calibri" pitchFamily="34" charset="0"/>
+                <a:ea typeface="Calibri" pitchFamily="34" charset="-122"/>
+                <a:cs typeface="Calibri" pitchFamily="34" charset="-120"/>
+              </a:rPr>
+              <a:t>Go-Back-N kept for comparison: --gbn / RUDP_GBN</a:t>
+            </a:r>
+            <a:endParaRPr lang="en-US" sz="1400" dirty="0"/>
+          </a:p>
+        </p:txBody>
+      </p:sp>
+      <p:sp>
+        <p:nvSpPr>
+          <p:cNvPr id="6" name="Text 3"/>
           <p:cNvSpPr/>
           <p:nvPr/>
         </p:nvSpPr>
         <p:spPr>
           <a:xfrm>
-            <a:off x="731520" y="1508760"/>
-            <a:ext cx="5029200" cy="457200"/>
+            <a:off x="548640" y="3840480"/>
+            <a:ext cx="6035040" cy="731520"/>
           </a:xfrm>
           <a:prstGeom prst="rect">
             <a:avLst/>
@@ -14957,266 +16575,17 @@
               <a:buNone/>
             </a:pPr>
             <a:r>
-              <a:rPr lang="en-US" sz="2000" b="1" dirty="0">
-                <a:solidFill>
-                  <a:srgbClr val="39FF88"/>
-                </a:solidFill>
-                <a:latin typeface="Courier New" pitchFamily="34" charset="0"/>
-                <a:ea typeface="Courier New" pitchFamily="34" charset="-122"/>
-                <a:cs typeface="Courier New" pitchFamily="34" charset="-120"/>
-              </a:rPr>
-              <a:t>Learned</a:t>
-            </a:r>
-            <a:endParaRPr lang="en-US" sz="2000" dirty="0"/>
-          </a:p>
-        </p:txBody>
-      </p:sp>
-      <p:sp>
-        <p:nvSpPr>
-          <p:cNvPr id="6" name="Text 4"/>
-          <p:cNvSpPr/>
-          <p:nvPr/>
-        </p:nvSpPr>
-        <p:spPr>
-          <a:xfrm>
-            <a:off x="731520" y="2011680"/>
-            <a:ext cx="5029200" cy="3429000"/>
-          </a:xfrm>
-          <a:prstGeom prst="rect">
-            <a:avLst/>
-          </a:prstGeom>
-          <a:noFill/>
-          <a:ln/>
-        </p:spPr>
-        <p:txBody>
-          <a:bodyPr wrap="square" lIns="0" tIns="0" rIns="0" bIns="0" rtlCol="0" anchor="t"/>
-          <a:lstStyle/>
-          <a:p>
-            <a:pPr indent="0" marL="0">
-              <a:buNone/>
-            </a:pPr>
-            <a:r>
-              <a:rPr lang="en-US" sz="2000" dirty="0">
-                <a:solidFill>
-                  <a:srgbClr val="E6EDF3"/>
+              <a:rPr lang="en-US" sz="1300" dirty="0">
+                <a:solidFill>
+                  <a:srgbClr val="8B98A5"/>
                 </a:solidFill>
                 <a:latin typeface="Calibri" pitchFamily="34" charset="0"/>
                 <a:ea typeface="Calibri" pitchFamily="34" charset="-122"/>
                 <a:cs typeface="Calibri" pitchFamily="34" charset="-120"/>
               </a:rPr>
-              <a:t>Reliability is a set of simple rules working together.</a:t>
-            </a:r>
-            <a:endParaRPr lang="en-US" sz="2000" dirty="0"/>
-          </a:p>
-          <a:p>
-            <a:pPr indent="0" marL="0">
-              <a:buNone/>
-            </a:pPr>
-            <a:r>
-              <a:rPr lang="en-US" sz="2000" dirty="0">
-                <a:solidFill>
-                  <a:srgbClr val="E6EDF3"/>
-                </a:solidFill>
-                <a:latin typeface="Calibri" pitchFamily="34" charset="0"/>
-                <a:ea typeface="Calibri" pitchFamily="34" charset="-122"/>
-                <a:cs typeface="Calibri" pitchFamily="34" charset="-120"/>
-              </a:rPr>
-              <a:t>Congestion control matters as much as retransmission.</a:t>
-            </a:r>
-            <a:endParaRPr lang="en-US" sz="2000" dirty="0"/>
-          </a:p>
-          <a:p>
-            <a:pPr indent="0" marL="0">
-              <a:buNone/>
-            </a:pPr>
-            <a:r>
-              <a:rPr lang="en-US" sz="2000" dirty="0">
-                <a:solidFill>
-                  <a:srgbClr val="E6EDF3"/>
-                </a:solidFill>
-                <a:latin typeface="Calibri" pitchFamily="34" charset="0"/>
-                <a:ea typeface="Calibri" pitchFamily="34" charset="-122"/>
-                <a:cs typeface="Calibri" pitchFamily="34" charset="-120"/>
-              </a:rPr>
-              <a:t>Testing tools fail in surprising ways.</a:t>
-            </a:r>
-            <a:endParaRPr lang="en-US" sz="2000" dirty="0"/>
-          </a:p>
-        </p:txBody>
-      </p:sp>
-      <p:sp>
-        <p:nvSpPr>
-          <p:cNvPr id="7" name="Shape 5"/>
-          <p:cNvSpPr/>
-          <p:nvPr/>
-        </p:nvSpPr>
-        <p:spPr>
-          <a:xfrm>
-            <a:off x="6217920" y="1371600"/>
-            <a:ext cx="5394960" cy="4206240"/>
-          </a:xfrm>
-          <a:prstGeom prst="rect">
-            <a:avLst/>
-          </a:prstGeom>
-          <a:solidFill>
-            <a:srgbClr val="141B24"/>
-          </a:solidFill>
-          <a:ln w="12700">
-            <a:solidFill>
-              <a:srgbClr val="FFB000"/>
-            </a:solidFill>
-            <a:prstDash val="solid"/>
-          </a:ln>
-        </p:spPr>
-      </p:sp>
-      <p:sp>
-        <p:nvSpPr>
-          <p:cNvPr id="8" name="Text 6"/>
-          <p:cNvSpPr/>
-          <p:nvPr/>
-        </p:nvSpPr>
-        <p:spPr>
-          <a:xfrm>
-            <a:off x="6400800" y="1508760"/>
-            <a:ext cx="5029200" cy="457200"/>
-          </a:xfrm>
-          <a:prstGeom prst="rect">
-            <a:avLst/>
-          </a:prstGeom>
-          <a:noFill/>
-          <a:ln/>
-        </p:spPr>
-        <p:txBody>
-          <a:bodyPr wrap="square" lIns="0" tIns="0" rIns="0" bIns="0" rtlCol="0" anchor="ctr"/>
-          <a:lstStyle/>
-          <a:p>
-            <a:pPr indent="0" marL="0">
-              <a:buNone/>
-            </a:pPr>
-            <a:r>
-              <a:rPr lang="en-US" sz="2000" b="1" dirty="0">
-                <a:solidFill>
-                  <a:srgbClr val="FFB000"/>
-                </a:solidFill>
-                <a:latin typeface="Courier New" pitchFamily="34" charset="0"/>
-                <a:ea typeface="Courier New" pitchFamily="34" charset="-122"/>
-                <a:cs typeface="Courier New" pitchFamily="34" charset="-120"/>
-              </a:rPr>
-              <a:t>Next</a:t>
-            </a:r>
-            <a:endParaRPr lang="en-US" sz="2000" dirty="0"/>
-          </a:p>
-        </p:txBody>
-      </p:sp>
-      <p:sp>
-        <p:nvSpPr>
-          <p:cNvPr id="9" name="Text 7"/>
-          <p:cNvSpPr/>
-          <p:nvPr/>
-        </p:nvSpPr>
-        <p:spPr>
-          <a:xfrm>
-            <a:off x="6400800" y="2011680"/>
-            <a:ext cx="5029200" cy="3429000"/>
-          </a:xfrm>
-          <a:prstGeom prst="rect">
-            <a:avLst/>
-          </a:prstGeom>
-          <a:noFill/>
-          <a:ln/>
-        </p:spPr>
-        <p:txBody>
-          <a:bodyPr wrap="square" lIns="0" tIns="0" rIns="0" bIns="0" rtlCol="0" anchor="t"/>
-          <a:lstStyle/>
-          <a:p>
-            <a:pPr indent="0" marL="0">
-              <a:buNone/>
-            </a:pPr>
-            <a:r>
-              <a:rPr lang="en-US" sz="2000" dirty="0">
-                <a:solidFill>
-                  <a:srgbClr val="E6EDF3"/>
-                </a:solidFill>
-                <a:latin typeface="Calibri" pitchFamily="34" charset="0"/>
-                <a:ea typeface="Calibri" pitchFamily="34" charset="-122"/>
-                <a:cs typeface="Calibri" pitchFamily="34" charset="-120"/>
-              </a:rPr>
-              <a:t>Train the neural agent in C / on real netem</a:t>
-            </a:r>
-            <a:endParaRPr lang="en-US" sz="2000" dirty="0"/>
-          </a:p>
-          <a:p>
-            <a:pPr indent="0" marL="0">
-              <a:buNone/>
-            </a:pPr>
-            <a:r>
-              <a:rPr lang="en-US" sz="2000" dirty="0">
-                <a:solidFill>
-                  <a:srgbClr val="E6EDF3"/>
-                </a:solidFill>
-                <a:latin typeface="Calibri" pitchFamily="34" charset="0"/>
-                <a:ea typeface="Calibri" pitchFamily="34" charset="-122"/>
-                <a:cs typeface="Calibri" pitchFamily="34" charset="-120"/>
-              </a:rPr>
-              <a:t>Selective ACK where throughput limits the path</a:t>
-            </a:r>
-            <a:endParaRPr lang="en-US" sz="2000" dirty="0"/>
-          </a:p>
-          <a:p>
-            <a:pPr indent="0" marL="0">
-              <a:buNone/>
-            </a:pPr>
-            <a:r>
-              <a:rPr lang="en-US" sz="2000" dirty="0">
-                <a:solidFill>
-                  <a:srgbClr val="E6EDF3"/>
-                </a:solidFill>
-                <a:latin typeface="Calibri" pitchFamily="34" charset="0"/>
-                <a:ea typeface="Calibri" pitchFamily="34" charset="-122"/>
-                <a:cs typeface="Calibri" pitchFamily="34" charset="-120"/>
-              </a:rPr>
-              <a:t>Kernel netem and real multi-machine tests</a:t>
-            </a:r>
-            <a:endParaRPr lang="en-US" sz="2000" dirty="0"/>
-          </a:p>
-        </p:txBody>
-      </p:sp>
-      <p:sp>
-        <p:nvSpPr>
-          <p:cNvPr id="10" name="Text 8"/>
-          <p:cNvSpPr/>
-          <p:nvPr/>
-        </p:nvSpPr>
-        <p:spPr>
-          <a:xfrm>
-            <a:off x="548640" y="5852160"/>
-            <a:ext cx="10972800" cy="365760"/>
-          </a:xfrm>
-          <a:prstGeom prst="rect">
-            <a:avLst/>
-          </a:prstGeom>
-          <a:noFill/>
-          <a:ln/>
-        </p:spPr>
-        <p:txBody>
-          <a:bodyPr wrap="square" lIns="0" tIns="0" rIns="0" bIns="0" rtlCol="0" anchor="ctr"/>
-          <a:lstStyle/>
-          <a:p>
-            <a:pPr indent="0" marL="0">
-              <a:buNone/>
-            </a:pPr>
-            <a:r>
-              <a:rPr lang="en-US" sz="1400" dirty="0">
-                <a:solidFill>
-                  <a:srgbClr val="8B98A5"/>
-                </a:solidFill>
-                <a:latin typeface="Calibri" pitchFamily="34" charset="0"/>
-                <a:ea typeface="Calibri" pitchFamily="34" charset="-122"/>
-                <a:cs typeface="Calibri" pitchFamily="34" charset="-120"/>
-              </a:rPr>
-              <a:t>Limits: Go-Back-N wastes bandwidth and suffers under reordering; C tests use an emulated path; the tabular agent did not beat AIMD in C.</a:t>
-            </a:r>
-            <a:endParaRPr lang="en-US" sz="1400" dirty="0"/>
+              <a:t>10 runs per cell (hostile: 5), 95% intervals, all gains significant except the hostile row. Code: eval_ci7.sh.</a:t>
+            </a:r>
+            <a:endParaRPr lang="en-US" sz="1300" dirty="0"/>
           </a:p>
         </p:txBody>
       </p:sp>
@@ -15260,8 +16629,8 @@
         </p:nvSpPr>
         <p:spPr>
           <a:xfrm>
-            <a:off x="731520" y="2103120"/>
-            <a:ext cx="10058400" cy="1097280"/>
+            <a:off x="548640" y="320040"/>
+            <a:ext cx="11064240" cy="731520"/>
           </a:xfrm>
           <a:prstGeom prst="rect">
             <a:avLst/>
@@ -15277,7 +16646,7 @@
               <a:buNone/>
             </a:pPr>
             <a:r>
-              <a:rPr lang="en-US" sz="6400" b="1" dirty="0">
+              <a:rPr lang="en-US" sz="3000" b="1" dirty="0">
                 <a:solidFill>
                   <a:srgbClr val="39FF88"/>
                 </a:solidFill>
@@ -15285,9 +16654,9 @@
                 <a:ea typeface="Courier New" pitchFamily="34" charset="-122"/>
                 <a:cs typeface="Courier New" pitchFamily="34" charset="-120"/>
               </a:rPr>
-              <a:t>Thank you</a:t>
-            </a:r>
-            <a:endParaRPr lang="en-US" sz="6400" dirty="0"/>
+              <a:t>Learnings and future work</a:t>
+            </a:r>
+            <a:endParaRPr lang="en-US" sz="3000" dirty="0"/>
           </a:p>
         </p:txBody>
       </p:sp>
@@ -15299,8 +16668,8 @@
         </p:nvSpPr>
         <p:spPr>
           <a:xfrm>
-            <a:off x="731520" y="3474720"/>
-            <a:ext cx="10058400" cy="548640"/>
+            <a:off x="9418320" y="6446520"/>
+            <a:ext cx="2377440" cy="274320"/>
           </a:xfrm>
           <a:prstGeom prst="rect">
             <a:avLst/>
@@ -15312,34 +16681,59 @@
           <a:bodyPr wrap="square" lIns="0" tIns="0" rIns="0" bIns="0" rtlCol="0" anchor="ctr"/>
           <a:lstStyle/>
           <a:p>
-            <a:pPr indent="0" marL="0">
+            <a:pPr algn="r" indent="0" marL="0">
               <a:buNone/>
             </a:pPr>
             <a:r>
-              <a:rPr lang="en-US" sz="2600" dirty="0">
-                <a:solidFill>
-                  <a:srgbClr val="E6EDF3"/>
+              <a:rPr lang="en-US" sz="1000" dirty="0">
+                <a:solidFill>
+                  <a:srgbClr val="8B98A5"/>
                 </a:solidFill>
                 <a:latin typeface="Courier New" pitchFamily="34" charset="0"/>
                 <a:ea typeface="Courier New" pitchFamily="34" charset="-122"/>
                 <a:cs typeface="Courier New" pitchFamily="34" charset="-120"/>
               </a:rPr>
-              <a:t>github.com/Capsturrrr/rudp</a:t>
-            </a:r>
-            <a:endParaRPr lang="en-US" sz="2600" dirty="0"/>
+              <a:t>26 / 27   Smart-RUDP</a:t>
+            </a:r>
+            <a:endParaRPr lang="en-US" sz="1000" dirty="0"/>
           </a:p>
         </p:txBody>
       </p:sp>
       <p:sp>
         <p:nvSpPr>
-          <p:cNvPr id="4" name="Text 2"/>
+          <p:cNvPr id="4" name="Shape 2"/>
           <p:cNvSpPr/>
           <p:nvPr/>
         </p:nvSpPr>
         <p:spPr>
           <a:xfrm>
-            <a:off x="731520" y="4206240"/>
-            <a:ext cx="10058400" cy="457200"/>
+            <a:off x="548640" y="1371600"/>
+            <a:ext cx="5394960" cy="4206240"/>
+          </a:xfrm>
+          <a:prstGeom prst="rect">
+            <a:avLst/>
+          </a:prstGeom>
+          <a:solidFill>
+            <a:srgbClr val="141B24"/>
+          </a:solidFill>
+          <a:ln w="12700">
+            <a:solidFill>
+              <a:srgbClr val="39FF88"/>
+            </a:solidFill>
+            <a:prstDash val="solid"/>
+          </a:ln>
+        </p:spPr>
+      </p:sp>
+      <p:sp>
+        <p:nvSpPr>
+          <p:cNvPr id="5" name="Text 3"/>
+          <p:cNvSpPr/>
+          <p:nvPr/>
+        </p:nvSpPr>
+        <p:spPr>
+          <a:xfrm>
+            <a:off x="731520" y="1508760"/>
+            <a:ext cx="5029200" cy="457200"/>
           </a:xfrm>
           <a:prstGeom prst="rect">
             <a:avLst/>
@@ -15355,17 +16749,266 @@
               <a:buNone/>
             </a:pPr>
             <a:r>
-              <a:rPr lang="en-US" sz="1800" dirty="0">
-                <a:solidFill>
-                  <a:srgbClr val="8B98A5"/>
+              <a:rPr lang="en-US" sz="2000" b="1" dirty="0">
+                <a:solidFill>
+                  <a:srgbClr val="39FF88"/>
+                </a:solidFill>
+                <a:latin typeface="Courier New" pitchFamily="34" charset="0"/>
+                <a:ea typeface="Courier New" pitchFamily="34" charset="-122"/>
+                <a:cs typeface="Courier New" pitchFamily="34" charset="-120"/>
+              </a:rPr>
+              <a:t>Learned</a:t>
+            </a:r>
+            <a:endParaRPr lang="en-US" sz="2000" dirty="0"/>
+          </a:p>
+        </p:txBody>
+      </p:sp>
+      <p:sp>
+        <p:nvSpPr>
+          <p:cNvPr id="6" name="Text 4"/>
+          <p:cNvSpPr/>
+          <p:nvPr/>
+        </p:nvSpPr>
+        <p:spPr>
+          <a:xfrm>
+            <a:off x="731520" y="2011680"/>
+            <a:ext cx="5029200" cy="3429000"/>
+          </a:xfrm>
+          <a:prstGeom prst="rect">
+            <a:avLst/>
+          </a:prstGeom>
+          <a:noFill/>
+          <a:ln/>
+        </p:spPr>
+        <p:txBody>
+          <a:bodyPr wrap="square" lIns="0" tIns="0" rIns="0" bIns="0" rtlCol="0" anchor="t"/>
+          <a:lstStyle/>
+          <a:p>
+            <a:pPr indent="0" marL="0">
+              <a:buNone/>
+            </a:pPr>
+            <a:r>
+              <a:rPr lang="en-US" sz="2000" dirty="0">
+                <a:solidFill>
+                  <a:srgbClr val="E6EDF3"/>
                 </a:solidFill>
                 <a:latin typeface="Calibri" pitchFamily="34" charset="0"/>
                 <a:ea typeface="Calibri" pitchFamily="34" charset="-122"/>
                 <a:cs typeface="Calibri" pitchFamily="34" charset="-120"/>
               </a:rPr>
-              <a:t>Harshavardhan Mallela   Rohit Arya   Shloak Sinha</a:t>
-            </a:r>
-            <a:endParaRPr lang="en-US" sz="1800" dirty="0"/>
+              <a:t>Reliability is a set of simple rules working together.</a:t>
+            </a:r>
+            <a:endParaRPr lang="en-US" sz="2000" dirty="0"/>
+          </a:p>
+          <a:p>
+            <a:pPr indent="0" marL="0">
+              <a:buNone/>
+            </a:pPr>
+            <a:r>
+              <a:rPr lang="en-US" sz="2000" dirty="0">
+                <a:solidFill>
+                  <a:srgbClr val="E6EDF3"/>
+                </a:solidFill>
+                <a:latin typeface="Calibri" pitchFamily="34" charset="0"/>
+                <a:ea typeface="Calibri" pitchFamily="34" charset="-122"/>
+                <a:cs typeface="Calibri" pitchFamily="34" charset="-120"/>
+              </a:rPr>
+              <a:t>Congestion control matters as much as retransmission.</a:t>
+            </a:r>
+            <a:endParaRPr lang="en-US" sz="2000" dirty="0"/>
+          </a:p>
+          <a:p>
+            <a:pPr indent="0" marL="0">
+              <a:buNone/>
+            </a:pPr>
+            <a:r>
+              <a:rPr lang="en-US" sz="2000" dirty="0">
+                <a:solidFill>
+                  <a:srgbClr val="E6EDF3"/>
+                </a:solidFill>
+                <a:latin typeface="Calibri" pitchFamily="34" charset="0"/>
+                <a:ea typeface="Calibri" pitchFamily="34" charset="-122"/>
+                <a:cs typeface="Calibri" pitchFamily="34" charset="-120"/>
+              </a:rPr>
+              <a:t>Testing tools fail in surprising ways.</a:t>
+            </a:r>
+            <a:endParaRPr lang="en-US" sz="2000" dirty="0"/>
+          </a:p>
+        </p:txBody>
+      </p:sp>
+      <p:sp>
+        <p:nvSpPr>
+          <p:cNvPr id="7" name="Shape 5"/>
+          <p:cNvSpPr/>
+          <p:nvPr/>
+        </p:nvSpPr>
+        <p:spPr>
+          <a:xfrm>
+            <a:off x="6217920" y="1371600"/>
+            <a:ext cx="5394960" cy="4206240"/>
+          </a:xfrm>
+          <a:prstGeom prst="rect">
+            <a:avLst/>
+          </a:prstGeom>
+          <a:solidFill>
+            <a:srgbClr val="141B24"/>
+          </a:solidFill>
+          <a:ln w="12700">
+            <a:solidFill>
+              <a:srgbClr val="FFB000"/>
+            </a:solidFill>
+            <a:prstDash val="solid"/>
+          </a:ln>
+        </p:spPr>
+      </p:sp>
+      <p:sp>
+        <p:nvSpPr>
+          <p:cNvPr id="8" name="Text 6"/>
+          <p:cNvSpPr/>
+          <p:nvPr/>
+        </p:nvSpPr>
+        <p:spPr>
+          <a:xfrm>
+            <a:off x="6400800" y="1508760"/>
+            <a:ext cx="5029200" cy="457200"/>
+          </a:xfrm>
+          <a:prstGeom prst="rect">
+            <a:avLst/>
+          </a:prstGeom>
+          <a:noFill/>
+          <a:ln/>
+        </p:spPr>
+        <p:txBody>
+          <a:bodyPr wrap="square" lIns="0" tIns="0" rIns="0" bIns="0" rtlCol="0" anchor="ctr"/>
+          <a:lstStyle/>
+          <a:p>
+            <a:pPr indent="0" marL="0">
+              <a:buNone/>
+            </a:pPr>
+            <a:r>
+              <a:rPr lang="en-US" sz="2000" b="1" dirty="0">
+                <a:solidFill>
+                  <a:srgbClr val="FFB000"/>
+                </a:solidFill>
+                <a:latin typeface="Courier New" pitchFamily="34" charset="0"/>
+                <a:ea typeface="Courier New" pitchFamily="34" charset="-122"/>
+                <a:cs typeface="Courier New" pitchFamily="34" charset="-120"/>
+              </a:rPr>
+              <a:t>Next</a:t>
+            </a:r>
+            <a:endParaRPr lang="en-US" sz="2000" dirty="0"/>
+          </a:p>
+        </p:txBody>
+      </p:sp>
+      <p:sp>
+        <p:nvSpPr>
+          <p:cNvPr id="9" name="Text 7"/>
+          <p:cNvSpPr/>
+          <p:nvPr/>
+        </p:nvSpPr>
+        <p:spPr>
+          <a:xfrm>
+            <a:off x="6400800" y="2011680"/>
+            <a:ext cx="5029200" cy="3429000"/>
+          </a:xfrm>
+          <a:prstGeom prst="rect">
+            <a:avLst/>
+          </a:prstGeom>
+          <a:noFill/>
+          <a:ln/>
+        </p:spPr>
+        <p:txBody>
+          <a:bodyPr wrap="square" lIns="0" tIns="0" rIns="0" bIns="0" rtlCol="0" anchor="t"/>
+          <a:lstStyle/>
+          <a:p>
+            <a:pPr indent="0" marL="0">
+              <a:buNone/>
+            </a:pPr>
+            <a:r>
+              <a:rPr lang="en-US" sz="2000" dirty="0">
+                <a:solidFill>
+                  <a:srgbClr val="E6EDF3"/>
+                </a:solidFill>
+                <a:latin typeface="Calibri" pitchFamily="34" charset="0"/>
+                <a:ea typeface="Calibri" pitchFamily="34" charset="-122"/>
+                <a:cs typeface="Calibri" pitchFamily="34" charset="-120"/>
+              </a:rPr>
+              <a:t>Train the neural agent in C / on real netem</a:t>
+            </a:r>
+            <a:endParaRPr lang="en-US" sz="2000" dirty="0"/>
+          </a:p>
+          <a:p>
+            <a:pPr indent="0" marL="0">
+              <a:buNone/>
+            </a:pPr>
+            <a:r>
+              <a:rPr lang="en-US" sz="2000" dirty="0">
+                <a:solidFill>
+                  <a:srgbClr val="E6EDF3"/>
+                </a:solidFill>
+                <a:latin typeface="Calibri" pitchFamily="34" charset="0"/>
+                <a:ea typeface="Calibri" pitchFamily="34" charset="-122"/>
+                <a:cs typeface="Calibri" pitchFamily="34" charset="-120"/>
+              </a:rPr>
+              <a:t>Selective ACK where throughput limits the path</a:t>
+            </a:r>
+            <a:endParaRPr lang="en-US" sz="2000" dirty="0"/>
+          </a:p>
+          <a:p>
+            <a:pPr indent="0" marL="0">
+              <a:buNone/>
+            </a:pPr>
+            <a:r>
+              <a:rPr lang="en-US" sz="2000" dirty="0">
+                <a:solidFill>
+                  <a:srgbClr val="E6EDF3"/>
+                </a:solidFill>
+                <a:latin typeface="Calibri" pitchFamily="34" charset="0"/>
+                <a:ea typeface="Calibri" pitchFamily="34" charset="-122"/>
+                <a:cs typeface="Calibri" pitchFamily="34" charset="-120"/>
+              </a:rPr>
+              <a:t>Kernel netem and real multi-machine tests</a:t>
+            </a:r>
+            <a:endParaRPr lang="en-US" sz="2000" dirty="0"/>
+          </a:p>
+        </p:txBody>
+      </p:sp>
+      <p:sp>
+        <p:nvSpPr>
+          <p:cNvPr id="10" name="Text 8"/>
+          <p:cNvSpPr/>
+          <p:nvPr/>
+        </p:nvSpPr>
+        <p:spPr>
+          <a:xfrm>
+            <a:off x="548640" y="5852160"/>
+            <a:ext cx="10972800" cy="365760"/>
+          </a:xfrm>
+          <a:prstGeom prst="rect">
+            <a:avLst/>
+          </a:prstGeom>
+          <a:noFill/>
+          <a:ln/>
+        </p:spPr>
+        <p:txBody>
+          <a:bodyPr wrap="square" lIns="0" tIns="0" rIns="0" bIns="0" rtlCol="0" anchor="ctr"/>
+          <a:lstStyle/>
+          <a:p>
+            <a:pPr indent="0" marL="0">
+              <a:buNone/>
+            </a:pPr>
+            <a:r>
+              <a:rPr lang="en-US" sz="1400" dirty="0">
+                <a:solidFill>
+                  <a:srgbClr val="8B98A5"/>
+                </a:solidFill>
+                <a:latin typeface="Calibri" pitchFamily="34" charset="0"/>
+                <a:ea typeface="Calibri" pitchFamily="34" charset="-122"/>
+                <a:cs typeface="Calibri" pitchFamily="34" charset="-120"/>
+              </a:rPr>
+              <a:t>Limits: Go-Back-N wastes bandwidth and suffers under reordering; C tests use an emulated path; the tabular agent did not beat AIMD in C.</a:t>
+            </a:r>
+            <a:endParaRPr lang="en-US" sz="1400" dirty="0"/>
           </a:p>
         </p:txBody>
       </p:sp>
@@ -15409,6 +17052,155 @@
         </p:nvSpPr>
         <p:spPr>
           <a:xfrm>
+            <a:off x="731520" y="2103120"/>
+            <a:ext cx="10058400" cy="1097280"/>
+          </a:xfrm>
+          <a:prstGeom prst="rect">
+            <a:avLst/>
+          </a:prstGeom>
+          <a:noFill/>
+          <a:ln/>
+        </p:spPr>
+        <p:txBody>
+          <a:bodyPr wrap="square" lIns="0" tIns="0" rIns="0" bIns="0" rtlCol="0" anchor="ctr"/>
+          <a:lstStyle/>
+          <a:p>
+            <a:pPr indent="0" marL="0">
+              <a:buNone/>
+            </a:pPr>
+            <a:r>
+              <a:rPr lang="en-US" sz="6400" b="1" dirty="0">
+                <a:solidFill>
+                  <a:srgbClr val="39FF88"/>
+                </a:solidFill>
+                <a:latin typeface="Courier New" pitchFamily="34" charset="0"/>
+                <a:ea typeface="Courier New" pitchFamily="34" charset="-122"/>
+                <a:cs typeface="Courier New" pitchFamily="34" charset="-120"/>
+              </a:rPr>
+              <a:t>Thank you</a:t>
+            </a:r>
+            <a:endParaRPr lang="en-US" sz="6400" dirty="0"/>
+          </a:p>
+        </p:txBody>
+      </p:sp>
+      <p:sp>
+        <p:nvSpPr>
+          <p:cNvPr id="3" name="Text 1"/>
+          <p:cNvSpPr/>
+          <p:nvPr/>
+        </p:nvSpPr>
+        <p:spPr>
+          <a:xfrm>
+            <a:off x="731520" y="3474720"/>
+            <a:ext cx="10058400" cy="548640"/>
+          </a:xfrm>
+          <a:prstGeom prst="rect">
+            <a:avLst/>
+          </a:prstGeom>
+          <a:noFill/>
+          <a:ln/>
+        </p:spPr>
+        <p:txBody>
+          <a:bodyPr wrap="square" lIns="0" tIns="0" rIns="0" bIns="0" rtlCol="0" anchor="ctr"/>
+          <a:lstStyle/>
+          <a:p>
+            <a:pPr indent="0" marL="0">
+              <a:buNone/>
+            </a:pPr>
+            <a:r>
+              <a:rPr lang="en-US" sz="2600" dirty="0">
+                <a:solidFill>
+                  <a:srgbClr val="E6EDF3"/>
+                </a:solidFill>
+                <a:latin typeface="Courier New" pitchFamily="34" charset="0"/>
+                <a:ea typeface="Courier New" pitchFamily="34" charset="-122"/>
+                <a:cs typeface="Courier New" pitchFamily="34" charset="-120"/>
+              </a:rPr>
+              <a:t>github.com/Capsturrrr/rudp</a:t>
+            </a:r>
+            <a:endParaRPr lang="en-US" sz="2600" dirty="0"/>
+          </a:p>
+        </p:txBody>
+      </p:sp>
+      <p:sp>
+        <p:nvSpPr>
+          <p:cNvPr id="4" name="Text 2"/>
+          <p:cNvSpPr/>
+          <p:nvPr/>
+        </p:nvSpPr>
+        <p:spPr>
+          <a:xfrm>
+            <a:off x="731520" y="4206240"/>
+            <a:ext cx="10058400" cy="457200"/>
+          </a:xfrm>
+          <a:prstGeom prst="rect">
+            <a:avLst/>
+          </a:prstGeom>
+          <a:noFill/>
+          <a:ln/>
+        </p:spPr>
+        <p:txBody>
+          <a:bodyPr wrap="square" lIns="0" tIns="0" rIns="0" bIns="0" rtlCol="0" anchor="ctr"/>
+          <a:lstStyle/>
+          <a:p>
+            <a:pPr indent="0" marL="0">
+              <a:buNone/>
+            </a:pPr>
+            <a:r>
+              <a:rPr lang="en-US" sz="1800" dirty="0">
+                <a:solidFill>
+                  <a:srgbClr val="8B98A5"/>
+                </a:solidFill>
+                <a:latin typeface="Calibri" pitchFamily="34" charset="0"/>
+                <a:ea typeface="Calibri" pitchFamily="34" charset="-122"/>
+                <a:cs typeface="Calibri" pitchFamily="34" charset="-120"/>
+              </a:rPr>
+              <a:t>Harshavardhan Mallela   Rohit Arya   Shloak Sinha</a:t>
+            </a:r>
+            <a:endParaRPr lang="en-US" sz="1800" dirty="0"/>
+          </a:p>
+        </p:txBody>
+      </p:sp>
+    </p:spTree>
+  </p:cSld>
+  <p:clrMapOvr>
+    <a:masterClrMapping/>
+  </p:clrMapOvr>
+</p:sld>
+</file>
+
+<file path=ppt/slides/slide28.xml><?xml version="1.0" encoding="utf-8"?>
+<p:sld xmlns:a="http://schemas.openxmlformats.org/drawingml/2006/main" xmlns:r="http://schemas.openxmlformats.org/officeDocument/2006/relationships" xmlns:p="http://schemas.openxmlformats.org/presentationml/2006/main">
+  <p:cSld name="Slide 28">
+    <p:bg>
+      <p:bgPr>
+        <a:solidFill>
+          <a:srgbClr val="0B0F14"/>
+        </a:solidFill>
+      </p:bgPr>
+    </p:bg>
+    <p:spTree>
+      <p:nvGrpSpPr>
+        <p:cNvPr id="1" name=""/>
+        <p:cNvGrpSpPr/>
+        <p:nvPr/>
+      </p:nvGrpSpPr>
+      <p:grpSpPr>
+        <a:xfrm>
+          <a:off x="0" y="0"/>
+          <a:ext cx="0" cy="0"/>
+          <a:chOff x="0" y="0"/>
+          <a:chExt cx="0" cy="0"/>
+        </a:xfrm>
+      </p:grpSpPr>
+      <p:sp>
+        <p:nvSpPr>
+          <p:cNvPr id="2" name="Text 0"/>
+          <p:cNvSpPr/>
+          <p:nvPr/>
+        </p:nvSpPr>
+        <p:spPr>
+          <a:xfrm>
             <a:off x="548640" y="320040"/>
             <a:ext cx="11064240" cy="731520"/>
           </a:xfrm>
@@ -15713,7 +17505,7 @@
                 <a:ea typeface="Courier New" pitchFamily="34" charset="-122"/>
                 <a:cs typeface="Courier New" pitchFamily="34" charset="-120"/>
               </a:rPr>
-              <a:t>3 / 26   Smart-RUDP</a:t>
+              <a:t>3 / 27   Smart-RUDP</a:t>
             </a:r>
             <a:endParaRPr lang="en-US" sz="1000" dirty="0"/>
           </a:p>
@@ -16107,7 +17899,7 @@
                 <a:ea typeface="Courier New" pitchFamily="34" charset="-122"/>
                 <a:cs typeface="Courier New" pitchFamily="34" charset="-120"/>
               </a:rPr>
-              <a:t>4 / 26   Smart-RUDP</a:t>
+              <a:t>4 / 27   Smart-RUDP</a:t>
             </a:r>
             <a:endParaRPr lang="en-US" sz="1000" dirty="0"/>
           </a:p>
@@ -16668,7 +18460,7 @@
                 <a:ea typeface="Courier New" pitchFamily="34" charset="-122"/>
                 <a:cs typeface="Courier New" pitchFamily="34" charset="-120"/>
               </a:rPr>
-              <a:t>5 / 26   Smart-RUDP</a:t>
+              <a:t>5 / 27   Smart-RUDP</a:t>
             </a:r>
             <a:endParaRPr lang="en-US" sz="1000" dirty="0"/>
           </a:p>
@@ -18107,7 +19899,7 @@
                 <a:ea typeface="Courier New" pitchFamily="34" charset="-122"/>
                 <a:cs typeface="Courier New" pitchFamily="34" charset="-120"/>
               </a:rPr>
-              <a:t>6 / 26   Smart-RUDP</a:t>
+              <a:t>6 / 27   Smart-RUDP</a:t>
             </a:r>
             <a:endParaRPr lang="en-US" sz="1000" dirty="0"/>
           </a:p>
@@ -19342,7 +21134,7 @@
                 <a:ea typeface="Courier New" pitchFamily="34" charset="-122"/>
                 <a:cs typeface="Courier New" pitchFamily="34" charset="-120"/>
               </a:rPr>
-              <a:t>7 / 26   Smart-RUDP</a:t>
+              <a:t>7 / 27   Smart-RUDP</a:t>
             </a:r>
             <a:endParaRPr lang="en-US" sz="1000" dirty="0"/>
           </a:p>
@@ -19785,7 +21577,7 @@
                 <a:ea typeface="Courier New" pitchFamily="34" charset="-122"/>
                 <a:cs typeface="Courier New" pitchFamily="34" charset="-120"/>
               </a:rPr>
-              <a:t>8 / 26   Smart-RUDP</a:t>
+              <a:t>8 / 27   Smart-RUDP</a:t>
             </a:r>
             <a:endParaRPr lang="en-US" sz="1000" dirty="0"/>
           </a:p>
@@ -20085,7 +21877,7 @@
                 <a:ea typeface="Courier New" pitchFamily="34" charset="-122"/>
                 <a:cs typeface="Courier New" pitchFamily="34" charset="-120"/>
               </a:rPr>
-              <a:t>9 / 26   Smart-RUDP</a:t>
+              <a:t>9 / 27   Smart-RUDP</a:t>
             </a:r>
             <a:endParaRPr lang="en-US" sz="1000" dirty="0"/>
           </a:p>

--- a/docs/RUDP_Presentation_with_notes.pptx
+++ b/docs/RUDP_Presentation_with_notes.pptx
@@ -33,9 +33,10 @@
     <p:sldId id="281" r:id="rId27"/>
     <p:sldId id="282" r:id="rId28"/>
     <p:sldId id="283" r:id="rId29"/>
+    <p:sldId id="284" r:id="rId30"/>
   </p:sldIdLst>
   <p:notesMasterIdLst>
-    <p:notesMasterId r:id="rId30"/>
+    <p:notesMasterId r:id="rId31"/>
   </p:notesMasterIdLst>
   <p:sldSz cx="12192000" cy="6858000"/>
   <p:notesSz cx="6858000" cy="12192000"/>
@@ -2543,23 +2544,23 @@
           <a:p/>
           <a:p>
             <a:r>
-              <a:t>- Learned: reliability is a set of simple rules working together; congestion control matters as much as retransmission; testing tools fail in surprising ways.</a:t>
-            </a:r>
-          </a:p>
-          <a:p>
-            <a:r>
-              <a:t>- Next: Selective Repeat with SACK, a stronger learning agent, adaptive timeout, and tests on a real multi-machine network.</a:t>
-            </a:r>
-          </a:p>
-          <a:p>
-            <a:r>
-              <a:t>- Name the limits before she does: Go-Back-N, loopback-only protocol tests, Smart-RUDP not beating AIMD.</a:t>
+              <a:t>- Performance pass. We found that a window cap of 32 limits the satellite path to about 107 packets per second, and that our AIMD baseline started additive growth too low for high delay. So we raised the receive window to 256, and we also tuned the baseline with a bigger cap and start threshold so the comparison stays fair.</a:t>
+            </a:r>
+          </a:p>
+          <a:p>
+            <a:r>
+              <a:t>- The neural agent with a cap of 128 and the AIMD hand-over is now the default. It is 45 to 77 percent faster than the tuned AIMD on the lossy, satellite and fast paths, and equal on the short 5G path and the hostile path.</a:t>
+            </a:r>
+          </a:p>
+          <a:p>
+            <a:r>
+              <a:t>- Costs: it sends more retransmissions on the fast path, and it was never retrained for larger windows, so we treat this as a measured result on emulated paths, not a guarantee.</a:t>
             </a:r>
           </a:p>
           <a:p/>
           <a:p>
             <a:r>
-              <a:t>IF ASKED: End on the limits and the fix order: SACK, adaptive timeout, real-network tests.</a:t>
+              <a:t>IF ASKED: Is AIMD just badly tuned? We tuned it (cap 128, high start threshold) and it improved, but the agent is still 2 to 4 times faster on the high-delay paths. CUBIC did not close the gap.</a:t>
             </a:r>
           </a:p>
         </p:txBody>
@@ -2645,19 +2646,29 @@
           <a:lstStyle/>
           <a:p>
             <a:r>
-              <a:t>Time: 0:15</a:t>
+              <a:t>Time: 0:50</a:t>
             </a:r>
           </a:p>
           <a:p/>
           <a:p>
             <a:r>
-              <a:t>- Thank you. The code, report and captures are at github.com/Capsturrrr/rudp. Happy to take questions.</a:t>
+              <a:t>- Learned: reliability is a set of simple rules working together; congestion control matters as much as retransmission; testing tools fail in surprising ways.</a:t>
+            </a:r>
+          </a:p>
+          <a:p>
+            <a:r>
+              <a:t>- Next: Selective Repeat with SACK, a stronger learning agent, adaptive timeout, and tests on a real multi-machine network.</a:t>
+            </a:r>
+          </a:p>
+          <a:p>
+            <a:r>
+              <a:t>- Name the limits before she does: Go-Back-N, loopback-only protocol tests, Smart-RUDP not beating AIMD.</a:t>
             </a:r>
           </a:p>
           <a:p/>
           <a:p>
             <a:r>
-              <a:t>IF ASKED: Pause and smile; hand over to questions.</a:t>
+              <a:t>IF ASKED: End on the limits and the fix order: SACK, adaptive timeout, real-network tests.</a:t>
             </a:r>
           </a:p>
         </p:txBody>
@@ -2743,19 +2754,19 @@
           <a:lstStyle/>
           <a:p>
             <a:r>
-              <a:t>Time: -</a:t>
+              <a:t>Time: 0:15</a:t>
             </a:r>
           </a:p>
           <a:p/>
           <a:p>
             <a:r>
-              <a:t>- Only if asked: the window starts at 1, adds 1 per ACK until the threshold 16, then 1/window per ACK. In the 62-packet run the final window was 18.71.</a:t>
+              <a:t>- Thank you. The code, report and captures are at github.com/Capsturrrr/rudp. Happy to take questions.</a:t>
             </a:r>
           </a:p>
           <a:p/>
           <a:p>
             <a:r>
-              <a:t>IF ASKED: Use this slide to answer 'show me congestion avoidance'.</a:t>
+              <a:t>IF ASKED: Pause and smile; hand over to questions.</a:t>
             </a:r>
           </a:p>
         </p:txBody>
@@ -2778,6 +2789,104 @@
             <a:fld id="{F7021451-1387-4CA6-816F-3879F97B5CBC}" type="slidenum">
               <a:rPr lang="en-US"/>
               <a:t>28</a:t>
+            </a:fld>
+            <a:endParaRPr lang="en-US"/>
+          </a:p>
+        </p:txBody>
+      </p:sp>
+    </p:spTree>
+    <p:extLst>
+      <p:ext uri="{BB962C8B-B14F-4D97-AF65-F5344CB8AC3E}">
+        <p14:creationId xmlns:p14="http://schemas.microsoft.com/office/powerpoint/2010/main" val="1024086991"/>
+      </p:ext>
+    </p:extLst>
+  </p:cSld>
+  <p:clrMapOvr>
+    <a:masterClrMapping/>
+  </p:clrMapOvr>
+</p:notes>
+</file>
+
+<file path=ppt/notesSlides/notesSlide29.xml><?xml version="1.0" encoding="utf-8"?>
+<p:notes xmlns:a="http://schemas.openxmlformats.org/drawingml/2006/main" xmlns:r="http://schemas.openxmlformats.org/officeDocument/2006/relationships" xmlns:p="http://schemas.openxmlformats.org/presentationml/2006/main">
+  <p:cSld>
+    <p:spTree>
+      <p:nvGrpSpPr>
+        <p:cNvPr id="1" name=""/>
+        <p:cNvGrpSpPr/>
+        <p:nvPr/>
+      </p:nvGrpSpPr>
+      <p:grpSpPr>
+        <a:xfrm>
+          <a:off x="0" y="0"/>
+          <a:ext cx="0" cy="0"/>
+          <a:chOff x="0" y="0"/>
+          <a:chExt cx="0" cy="0"/>
+        </a:xfrm>
+      </p:grpSpPr>
+      <p:sp>
+        <p:nvSpPr>
+          <p:cNvPr id="2" name="Slide Image Placeholder 1"/>
+          <p:cNvSpPr>
+            <a:spLocks noGrp="1" noRot="1" noChangeAspect="1"/>
+          </p:cNvSpPr>
+          <p:nvPr>
+            <p:ph type="sldImg"/>
+          </p:nvPr>
+        </p:nvSpPr>
+        <p:spPr/>
+      </p:sp>
+      <p:sp>
+        <p:nvSpPr>
+          <p:cNvPr id="3" name="Notes Placeholder 2"/>
+          <p:cNvSpPr>
+            <a:spLocks noGrp="1"/>
+          </p:cNvSpPr>
+          <p:nvPr>
+            <p:ph type="body" idx="1"/>
+          </p:nvPr>
+        </p:nvSpPr>
+        <p:spPr/>
+        <p:txBody>
+          <a:bodyPr/>
+          <a:lstStyle/>
+          <a:p>
+            <a:r>
+              <a:t>Time: -</a:t>
+            </a:r>
+          </a:p>
+          <a:p/>
+          <a:p>
+            <a:r>
+              <a:t>- Only if asked: the window starts at 1, adds 1 per ACK until the threshold 16, then 1/window per ACK. In the 62-packet run the final window was 18.71.</a:t>
+            </a:r>
+          </a:p>
+          <a:p/>
+          <a:p>
+            <a:r>
+              <a:t>IF ASKED: Use this slide to answer 'show me congestion avoidance'.</a:t>
+            </a:r>
+          </a:p>
+        </p:txBody>
+      </p:sp>
+      <p:sp>
+        <p:nvSpPr>
+          <p:cNvPr id="4" name="Slide Number Placeholder 3"/>
+          <p:cNvSpPr>
+            <a:spLocks noGrp="1"/>
+          </p:cNvSpPr>
+          <p:nvPr>
+            <p:ph type="sldNum" sz="quarter" idx="10"/>
+          </p:nvPr>
+        </p:nvSpPr>
+        <p:spPr/>
+        <p:txBody>
+          <a:bodyPr/>
+          <a:lstStyle/>
+          <a:p>
+            <a:fld id="{F7021451-1387-4CA6-816F-3879F97B5CBC}" type="slidenum">
+              <a:rPr lang="en-US"/>
+              <a:t>29</a:t>
             </a:fld>
             <a:endParaRPr lang="en-US"/>
           </a:p>
@@ -4133,7 +4242,7 @@
                 <a:ea typeface="Courier New" pitchFamily="34" charset="-122"/>
                 <a:cs typeface="Courier New" pitchFamily="34" charset="-120"/>
               </a:rPr>
-              <a:t>10 / 27   Smart-RUDP</a:t>
+              <a:t>10 / 28   Smart-RUDP</a:t>
             </a:r>
             <a:endParaRPr lang="en-US" sz="1000" dirty="0"/>
           </a:p>
@@ -4330,7 +4439,7 @@
                 <a:ea typeface="Courier New" pitchFamily="34" charset="-122"/>
                 <a:cs typeface="Courier New" pitchFamily="34" charset="-120"/>
               </a:rPr>
-              <a:t>11 / 27   Smart-RUDP</a:t>
+              <a:t>11 / 28   Smart-RUDP</a:t>
             </a:r>
             <a:endParaRPr lang="en-US" sz="1000" dirty="0"/>
           </a:p>
@@ -5160,7 +5269,7 @@
                 <a:ea typeface="Courier New" pitchFamily="34" charset="-122"/>
                 <a:cs typeface="Courier New" pitchFamily="34" charset="-120"/>
               </a:rPr>
-              <a:t>12 / 27   Smart-RUDP</a:t>
+              <a:t>12 / 28   Smart-RUDP</a:t>
             </a:r>
             <a:endParaRPr lang="en-US" sz="1000" dirty="0"/>
           </a:p>
@@ -5457,7 +5566,7 @@
                 <a:ea typeface="Courier New" pitchFamily="34" charset="-122"/>
                 <a:cs typeface="Courier New" pitchFamily="34" charset="-120"/>
               </a:rPr>
-              <a:t>13 / 27   Smart-RUDP</a:t>
+              <a:t>13 / 28   Smart-RUDP</a:t>
             </a:r>
             <a:endParaRPr lang="en-US" sz="1000" dirty="0"/>
           </a:p>
@@ -5757,7 +5866,7 @@
                 <a:ea typeface="Courier New" pitchFamily="34" charset="-122"/>
                 <a:cs typeface="Courier New" pitchFamily="34" charset="-120"/>
               </a:rPr>
-              <a:t>14 / 27   Smart-RUDP</a:t>
+              <a:t>14 / 28   Smart-RUDP</a:t>
             </a:r>
             <a:endParaRPr lang="en-US" sz="1000" dirty="0"/>
           </a:p>
@@ -6141,7 +6250,7 @@
                 <a:ea typeface="Courier New" pitchFamily="34" charset="-122"/>
                 <a:cs typeface="Courier New" pitchFamily="34" charset="-120"/>
               </a:rPr>
-              <a:t>15 / 27   Smart-RUDP</a:t>
+              <a:t>15 / 28   Smart-RUDP</a:t>
             </a:r>
             <a:endParaRPr lang="en-US" sz="1000" dirty="0"/>
           </a:p>
@@ -6599,7 +6708,7 @@
                 <a:ea typeface="Courier New" pitchFamily="34" charset="-122"/>
                 <a:cs typeface="Courier New" pitchFamily="34" charset="-120"/>
               </a:rPr>
-              <a:t>16 / 27   Smart-RUDP</a:t>
+              <a:t>16 / 28   Smart-RUDP</a:t>
             </a:r>
             <a:endParaRPr lang="en-US" sz="1000" dirty="0"/>
           </a:p>
@@ -7284,7 +7393,7 @@
                 <a:ea typeface="Courier New" pitchFamily="34" charset="-122"/>
                 <a:cs typeface="Courier New" pitchFamily="34" charset="-120"/>
               </a:rPr>
-              <a:t>17 / 27   Smart-RUDP</a:t>
+              <a:t>17 / 28   Smart-RUDP</a:t>
             </a:r>
             <a:endParaRPr lang="en-US" sz="1000" dirty="0"/>
           </a:p>
@@ -7524,7 +7633,7 @@
                 <a:ea typeface="Courier New" pitchFamily="34" charset="-122"/>
                 <a:cs typeface="Courier New" pitchFamily="34" charset="-120"/>
               </a:rPr>
-              <a:t>18 / 27   Smart-RUDP</a:t>
+              <a:t>18 / 28   Smart-RUDP</a:t>
             </a:r>
             <a:endParaRPr lang="en-US" sz="1000" dirty="0"/>
           </a:p>
@@ -7764,7 +7873,7 @@
                 <a:ea typeface="Courier New" pitchFamily="34" charset="-122"/>
                 <a:cs typeface="Courier New" pitchFamily="34" charset="-120"/>
               </a:rPr>
-              <a:t>19 / 27   Smart-RUDP</a:t>
+              <a:t>19 / 28   Smart-RUDP</a:t>
             </a:r>
             <a:endParaRPr lang="en-US" sz="1000" dirty="0"/>
           </a:p>
@@ -7986,7 +8095,7 @@
                 <a:ea typeface="Courier New" pitchFamily="34" charset="-122"/>
                 <a:cs typeface="Courier New" pitchFamily="34" charset="-120"/>
               </a:rPr>
-              <a:t>2 / 27   Smart-RUDP</a:t>
+              <a:t>2 / 28   Smart-RUDP</a:t>
             </a:r>
             <a:endParaRPr lang="en-US" sz="1000" dirty="0"/>
           </a:p>
@@ -8380,7 +8489,7 @@
                 <a:ea typeface="Courier New" pitchFamily="34" charset="-122"/>
                 <a:cs typeface="Courier New" pitchFamily="34" charset="-120"/>
               </a:rPr>
-              <a:t>20 / 27   Smart-RUDP</a:t>
+              <a:t>20 / 28   Smart-RUDP</a:t>
             </a:r>
             <a:endParaRPr lang="en-US" sz="1000" dirty="0"/>
           </a:p>
@@ -8704,7 +8813,7 @@
                 <a:ea typeface="Courier New" pitchFamily="34" charset="-122"/>
                 <a:cs typeface="Courier New" pitchFamily="34" charset="-120"/>
               </a:rPr>
-              <a:t>21 / 27   Smart-RUDP</a:t>
+              <a:t>21 / 28   Smart-RUDP</a:t>
             </a:r>
             <a:endParaRPr lang="en-US" sz="1000" dirty="0"/>
           </a:p>
@@ -10411,7 +10520,7 @@
                 <a:ea typeface="Courier New" pitchFamily="34" charset="-122"/>
                 <a:cs typeface="Courier New" pitchFamily="34" charset="-120"/>
               </a:rPr>
-              <a:t>22 / 27   Smart-RUDP</a:t>
+              <a:t>22 / 28   Smart-RUDP</a:t>
             </a:r>
             <a:endParaRPr lang="en-US" sz="1000" dirty="0"/>
           </a:p>
@@ -11794,7 +11903,7 @@
                 <a:ea typeface="Courier New" pitchFamily="34" charset="-122"/>
                 <a:cs typeface="Courier New" pitchFamily="34" charset="-120"/>
               </a:rPr>
-              <a:t>23 / 27   Smart-RUDP</a:t>
+              <a:t>23 / 28   Smart-RUDP</a:t>
             </a:r>
             <a:endParaRPr lang="en-US" sz="1000" dirty="0"/>
           </a:p>
@@ -13337,7 +13446,7 @@
                 <a:ea typeface="Courier New" pitchFamily="34" charset="-122"/>
                 <a:cs typeface="Courier New" pitchFamily="34" charset="-120"/>
               </a:rPr>
-              <a:t>24 / 27   Smart-RUDP</a:t>
+              <a:t>24 / 28   Smart-RUDP</a:t>
             </a:r>
             <a:endParaRPr lang="en-US" sz="1000" dirty="0"/>
           </a:p>
@@ -15015,7 +15124,7 @@
                 <a:ea typeface="Courier New" pitchFamily="34" charset="-122"/>
                 <a:cs typeface="Courier New" pitchFamily="34" charset="-120"/>
               </a:rPr>
-              <a:t>25 / 27   Smart-RUDP</a:t>
+              <a:t>25 / 28   Smart-RUDP</a:t>
             </a:r>
             <a:endParaRPr lang="en-US" sz="1000" dirty="0"/>
           </a:p>
@@ -16654,7 +16763,7 @@
                 <a:ea typeface="Courier New" pitchFamily="34" charset="-122"/>
                 <a:cs typeface="Courier New" pitchFamily="34" charset="-120"/>
               </a:rPr>
-              <a:t>Learnings and future work</a:t>
+              <a:t>Performance: bigger windows, tuned baseline</a:t>
             </a:r>
             <a:endParaRPr lang="en-US" sz="3000" dirty="0"/>
           </a:p>
@@ -16693,47 +16802,1825 @@
                 <a:ea typeface="Courier New" pitchFamily="34" charset="-122"/>
                 <a:cs typeface="Courier New" pitchFamily="34" charset="-120"/>
               </a:rPr>
-              <a:t>26 / 27   Smart-RUDP</a:t>
+              <a:t>26 / 28   Smart-RUDP</a:t>
             </a:r>
             <a:endParaRPr lang="en-US" sz="1000" dirty="0"/>
           </a:p>
         </p:txBody>
       </p:sp>
-      <p:sp>
-        <p:nvSpPr>
-          <p:cNvPr id="4" name="Shape 2"/>
+      <p:graphicFrame>
+        <p:nvGraphicFramePr>
+          <p:cNvPr id="27" name="Table 0"/>
+          <p:cNvGraphicFramePr>
+            <a:graphicFrameLocks noGrp="1"/>
+          </p:cNvGraphicFramePr>
+          <p:nvPr>
+            <p:extLst>
+              <p:ext uri="{D42A27DB-BD31-4B8C-83A1-F6EECF244321}">
+                <p14:modId xmlns:p14="http://schemas.microsoft.com/office/powerpoint/2010/main" val="1579011935"/>
+              </p:ext>
+            </p:extLst>
+          </p:nvPr>
+        </p:nvGraphicFramePr>
+        <p:xfrm>
+          <a:off x="548640" y="1188720"/>
+          <a:ext cx="6217920" cy="914400"/>
+        </p:xfrm>
+        <a:graphic>
+          <a:graphicData uri="http://schemas.openxmlformats.org/drawingml/2006/table">
+            <a:tbl>
+              <a:tblPr/>
+              <a:tblGrid>
+                <a:gridCol w="2286000"/>
+                <a:gridCol w="1371600"/>
+                <a:gridCol w="1280160"/>
+                <a:gridCol w="1280160"/>
+              </a:tblGrid>
+              <a:tr h="402336">
+                <a:tc>
+                  <a:txBody>
+                    <a:bodyPr/>
+                    <a:lstStyle/>
+                    <a:p>
+                      <a:pPr indent="0" marL="0">
+                        <a:buNone/>
+                      </a:pPr>
+                      <a:r>
+                        <a:rPr lang="en-US" sz="1300" b="1" dirty="0">
+                          <a:solidFill>
+                            <a:srgbClr val="0B0F14"/>
+                          </a:solidFill>
+                          <a:latin typeface="Courier New" pitchFamily="34" charset="0"/>
+                          <a:ea typeface="Courier New" pitchFamily="34" charset="-122"/>
+                          <a:cs typeface="Courier New" pitchFamily="34" charset="-120"/>
+                        </a:rPr>
+                        <a:t>C transport, seconds</a:t>
+                      </a:r>
+                      <a:endParaRPr lang="en-US" sz="1300" dirty="0">
+                        <a:latin typeface="Courier New" charset="0"/>
+                        <a:ea typeface="Courier New" charset="0"/>
+                        <a:cs typeface="Courier New" charset="0"/>
+                      </a:endParaRPr>
+                    </a:p>
+                  </a:txBody>
+                  <a:tcPr marL="91440" marR="91440" marT="45720" marB="45720">
+                    <a:lnL w="12700" cap="flat" cmpd="sng" algn="ctr">
+                      <a:solidFill>
+                        <a:srgbClr val="2A3441"/>
+                      </a:solidFill>
+                      <a:prstDash val="solid"/>
+                      <a:round/>
+                      <a:headEnd type="none" w="med" len="med"/>
+                      <a:tailEnd type="none" w="med" len="med"/>
+                    </a:lnL>
+                    <a:lnR w="12700" cap="flat" cmpd="sng" algn="ctr">
+                      <a:solidFill>
+                        <a:srgbClr val="2A3441"/>
+                      </a:solidFill>
+                      <a:prstDash val="solid"/>
+                      <a:round/>
+                      <a:headEnd type="none" w="med" len="med"/>
+                      <a:tailEnd type="none" w="med" len="med"/>
+                    </a:lnR>
+                    <a:lnT w="12700" cap="flat" cmpd="sng" algn="ctr">
+                      <a:solidFill>
+                        <a:srgbClr val="2A3441"/>
+                      </a:solidFill>
+                      <a:prstDash val="solid"/>
+                      <a:round/>
+                      <a:headEnd type="none" w="med" len="med"/>
+                      <a:tailEnd type="none" w="med" len="med"/>
+                    </a:lnT>
+                    <a:lnB w="12700" cap="flat" cmpd="sng" algn="ctr">
+                      <a:solidFill>
+                        <a:srgbClr val="2A3441"/>
+                      </a:solidFill>
+                      <a:prstDash val="solid"/>
+                      <a:round/>
+                      <a:headEnd type="none" w="med" len="med"/>
+                      <a:tailEnd type="none" w="med" len="med"/>
+                    </a:lnB>
+                    <a:solidFill>
+                      <a:srgbClr val="39FF88"/>
+                    </a:solidFill>
+                  </a:tcPr>
+                </a:tc>
+                <a:tc>
+                  <a:txBody>
+                    <a:bodyPr/>
+                    <a:lstStyle/>
+                    <a:p>
+                      <a:pPr indent="0" marL="0">
+                        <a:buNone/>
+                      </a:pPr>
+                      <a:r>
+                        <a:rPr lang="en-US" sz="1300" b="1" dirty="0">
+                          <a:solidFill>
+                            <a:srgbClr val="0B0F14"/>
+                          </a:solidFill>
+                          <a:latin typeface="Courier New" pitchFamily="34" charset="0"/>
+                          <a:ea typeface="Courier New" pitchFamily="34" charset="-122"/>
+                          <a:cs typeface="Courier New" pitchFamily="34" charset="-120"/>
+                        </a:rPr>
+                        <a:t>AIMD cap 32</a:t>
+                      </a:r>
+                      <a:endParaRPr lang="en-US" sz="1300" dirty="0">
+                        <a:latin typeface="Courier New" charset="0"/>
+                        <a:ea typeface="Courier New" charset="0"/>
+                        <a:cs typeface="Courier New" charset="0"/>
+                      </a:endParaRPr>
+                    </a:p>
+                  </a:txBody>
+                  <a:tcPr marL="91440" marR="91440" marT="45720" marB="45720">
+                    <a:lnL w="12700" cap="flat" cmpd="sng" algn="ctr">
+                      <a:solidFill>
+                        <a:srgbClr val="2A3441"/>
+                      </a:solidFill>
+                      <a:prstDash val="solid"/>
+                      <a:round/>
+                      <a:headEnd type="none" w="med" len="med"/>
+                      <a:tailEnd type="none" w="med" len="med"/>
+                    </a:lnL>
+                    <a:lnR w="12700" cap="flat" cmpd="sng" algn="ctr">
+                      <a:solidFill>
+                        <a:srgbClr val="2A3441"/>
+                      </a:solidFill>
+                      <a:prstDash val="solid"/>
+                      <a:round/>
+                      <a:headEnd type="none" w="med" len="med"/>
+                      <a:tailEnd type="none" w="med" len="med"/>
+                    </a:lnR>
+                    <a:lnT w="12700" cap="flat" cmpd="sng" algn="ctr">
+                      <a:solidFill>
+                        <a:srgbClr val="2A3441"/>
+                      </a:solidFill>
+                      <a:prstDash val="solid"/>
+                      <a:round/>
+                      <a:headEnd type="none" w="med" len="med"/>
+                      <a:tailEnd type="none" w="med" len="med"/>
+                    </a:lnT>
+                    <a:lnB w="12700" cap="flat" cmpd="sng" algn="ctr">
+                      <a:solidFill>
+                        <a:srgbClr val="2A3441"/>
+                      </a:solidFill>
+                      <a:prstDash val="solid"/>
+                      <a:round/>
+                      <a:headEnd type="none" w="med" len="med"/>
+                      <a:tailEnd type="none" w="med" len="med"/>
+                    </a:lnB>
+                    <a:solidFill>
+                      <a:srgbClr val="39FF88"/>
+                    </a:solidFill>
+                  </a:tcPr>
+                </a:tc>
+                <a:tc>
+                  <a:txBody>
+                    <a:bodyPr/>
+                    <a:lstStyle/>
+                    <a:p>
+                      <a:pPr indent="0" marL="0">
+                        <a:buNone/>
+                      </a:pPr>
+                      <a:r>
+                        <a:rPr lang="en-US" sz="1300" b="1" dirty="0">
+                          <a:solidFill>
+                            <a:srgbClr val="0B0F14"/>
+                          </a:solidFill>
+                          <a:latin typeface="Courier New" pitchFamily="34" charset="0"/>
+                          <a:ea typeface="Courier New" pitchFamily="34" charset="-122"/>
+                          <a:cs typeface="Courier New" pitchFamily="34" charset="-120"/>
+                        </a:rPr>
+                        <a:t>AIMD tuned</a:t>
+                      </a:r>
+                      <a:endParaRPr lang="en-US" sz="1300" dirty="0">
+                        <a:latin typeface="Courier New" charset="0"/>
+                        <a:ea typeface="Courier New" charset="0"/>
+                        <a:cs typeface="Courier New" charset="0"/>
+                      </a:endParaRPr>
+                    </a:p>
+                  </a:txBody>
+                  <a:tcPr marL="91440" marR="91440" marT="45720" marB="45720">
+                    <a:lnL w="12700" cap="flat" cmpd="sng" algn="ctr">
+                      <a:solidFill>
+                        <a:srgbClr val="2A3441"/>
+                      </a:solidFill>
+                      <a:prstDash val="solid"/>
+                      <a:round/>
+                      <a:headEnd type="none" w="med" len="med"/>
+                      <a:tailEnd type="none" w="med" len="med"/>
+                    </a:lnL>
+                    <a:lnR w="12700" cap="flat" cmpd="sng" algn="ctr">
+                      <a:solidFill>
+                        <a:srgbClr val="2A3441"/>
+                      </a:solidFill>
+                      <a:prstDash val="solid"/>
+                      <a:round/>
+                      <a:headEnd type="none" w="med" len="med"/>
+                      <a:tailEnd type="none" w="med" len="med"/>
+                    </a:lnR>
+                    <a:lnT w="12700" cap="flat" cmpd="sng" algn="ctr">
+                      <a:solidFill>
+                        <a:srgbClr val="2A3441"/>
+                      </a:solidFill>
+                      <a:prstDash val="solid"/>
+                      <a:round/>
+                      <a:headEnd type="none" w="med" len="med"/>
+                      <a:tailEnd type="none" w="med" len="med"/>
+                    </a:lnT>
+                    <a:lnB w="12700" cap="flat" cmpd="sng" algn="ctr">
+                      <a:solidFill>
+                        <a:srgbClr val="2A3441"/>
+                      </a:solidFill>
+                      <a:prstDash val="solid"/>
+                      <a:round/>
+                      <a:headEnd type="none" w="med" len="med"/>
+                      <a:tailEnd type="none" w="med" len="med"/>
+                    </a:lnB>
+                    <a:solidFill>
+                      <a:srgbClr val="39FF88"/>
+                    </a:solidFill>
+                  </a:tcPr>
+                </a:tc>
+                <a:tc>
+                  <a:txBody>
+                    <a:bodyPr/>
+                    <a:lstStyle/>
+                    <a:p>
+                      <a:pPr indent="0" marL="0">
+                        <a:buNone/>
+                      </a:pPr>
+                      <a:r>
+                        <a:rPr lang="en-US" sz="1300" b="1" dirty="0">
+                          <a:solidFill>
+                            <a:srgbClr val="0B0F14"/>
+                          </a:solidFill>
+                          <a:latin typeface="Courier New" pitchFamily="34" charset="0"/>
+                          <a:ea typeface="Courier New" pitchFamily="34" charset="-122"/>
+                          <a:cs typeface="Courier New" pitchFamily="34" charset="-120"/>
+                        </a:rPr>
+                        <a:t>Neural</a:t>
+                      </a:r>
+                      <a:endParaRPr lang="en-US" sz="1300" dirty="0">
+                        <a:latin typeface="Courier New" charset="0"/>
+                        <a:ea typeface="Courier New" charset="0"/>
+                        <a:cs typeface="Courier New" charset="0"/>
+                      </a:endParaRPr>
+                    </a:p>
+                  </a:txBody>
+                  <a:tcPr marL="91440" marR="91440" marT="45720" marB="45720">
+                    <a:lnL w="12700" cap="flat" cmpd="sng" algn="ctr">
+                      <a:solidFill>
+                        <a:srgbClr val="2A3441"/>
+                      </a:solidFill>
+                      <a:prstDash val="solid"/>
+                      <a:round/>
+                      <a:headEnd type="none" w="med" len="med"/>
+                      <a:tailEnd type="none" w="med" len="med"/>
+                    </a:lnL>
+                    <a:lnR w="12700" cap="flat" cmpd="sng" algn="ctr">
+                      <a:solidFill>
+                        <a:srgbClr val="2A3441"/>
+                      </a:solidFill>
+                      <a:prstDash val="solid"/>
+                      <a:round/>
+                      <a:headEnd type="none" w="med" len="med"/>
+                      <a:tailEnd type="none" w="med" len="med"/>
+                    </a:lnR>
+                    <a:lnT w="12700" cap="flat" cmpd="sng" algn="ctr">
+                      <a:solidFill>
+                        <a:srgbClr val="2A3441"/>
+                      </a:solidFill>
+                      <a:prstDash val="solid"/>
+                      <a:round/>
+                      <a:headEnd type="none" w="med" len="med"/>
+                      <a:tailEnd type="none" w="med" len="med"/>
+                    </a:lnT>
+                    <a:lnB w="12700" cap="flat" cmpd="sng" algn="ctr">
+                      <a:solidFill>
+                        <a:srgbClr val="2A3441"/>
+                      </a:solidFill>
+                      <a:prstDash val="solid"/>
+                      <a:round/>
+                      <a:headEnd type="none" w="med" len="med"/>
+                      <a:tailEnd type="none" w="med" len="med"/>
+                    </a:lnB>
+                    <a:solidFill>
+                      <a:srgbClr val="39FF88"/>
+                    </a:solidFill>
+                  </a:tcPr>
+                </a:tc>
+              </a:tr>
+              <a:tr h="402336">
+                <a:tc>
+                  <a:txBody>
+                    <a:bodyPr/>
+                    <a:lstStyle/>
+                    <a:p>
+                      <a:pPr indent="0" marL="0">
+                        <a:buNone/>
+                      </a:pPr>
+                      <a:r>
+                        <a:rPr lang="en-US" sz="1300" dirty="0">
+                          <a:solidFill>
+                            <a:srgbClr val="E6EDF3"/>
+                          </a:solidFill>
+                          <a:latin typeface="Calibri" pitchFamily="34" charset="0"/>
+                          <a:ea typeface="Calibri" pitchFamily="34" charset="-122"/>
+                          <a:cs typeface="Calibri" pitchFamily="34" charset="-120"/>
+                        </a:rPr>
+                        <a:t>Lossy 2%</a:t>
+                      </a:r>
+                      <a:endParaRPr lang="en-US" sz="1300" dirty="0">
+                        <a:latin typeface="Calibri" charset="0"/>
+                        <a:ea typeface="Calibri" charset="0"/>
+                        <a:cs typeface="Calibri" charset="0"/>
+                      </a:endParaRPr>
+                    </a:p>
+                  </a:txBody>
+                  <a:tcPr marL="91440" marR="91440" marT="45720" marB="45720">
+                    <a:lnL w="12700" cap="flat" cmpd="sng" algn="ctr">
+                      <a:solidFill>
+                        <a:srgbClr val="2A3441"/>
+                      </a:solidFill>
+                      <a:prstDash val="solid"/>
+                      <a:round/>
+                      <a:headEnd type="none" w="med" len="med"/>
+                      <a:tailEnd type="none" w="med" len="med"/>
+                    </a:lnL>
+                    <a:lnR w="12700" cap="flat" cmpd="sng" algn="ctr">
+                      <a:solidFill>
+                        <a:srgbClr val="2A3441"/>
+                      </a:solidFill>
+                      <a:prstDash val="solid"/>
+                      <a:round/>
+                      <a:headEnd type="none" w="med" len="med"/>
+                      <a:tailEnd type="none" w="med" len="med"/>
+                    </a:lnR>
+                    <a:lnT w="12700" cap="flat" cmpd="sng" algn="ctr">
+                      <a:solidFill>
+                        <a:srgbClr val="2A3441"/>
+                      </a:solidFill>
+                      <a:prstDash val="solid"/>
+                      <a:round/>
+                      <a:headEnd type="none" w="med" len="med"/>
+                      <a:tailEnd type="none" w="med" len="med"/>
+                    </a:lnT>
+                    <a:lnB w="12700" cap="flat" cmpd="sng" algn="ctr">
+                      <a:solidFill>
+                        <a:srgbClr val="2A3441"/>
+                      </a:solidFill>
+                      <a:prstDash val="solid"/>
+                      <a:round/>
+                      <a:headEnd type="none" w="med" len="med"/>
+                      <a:tailEnd type="none" w="med" len="med"/>
+                    </a:lnB>
+                    <a:solidFill>
+                      <a:srgbClr val="141B24"/>
+                    </a:solidFill>
+                  </a:tcPr>
+                </a:tc>
+                <a:tc>
+                  <a:txBody>
+                    <a:bodyPr/>
+                    <a:lstStyle/>
+                    <a:p>
+                      <a:pPr indent="0" marL="0">
+                        <a:buNone/>
+                      </a:pPr>
+                      <a:r>
+                        <a:rPr lang="en-US" sz="1300" dirty="0">
+                          <a:solidFill>
+                            <a:srgbClr val="E6EDF3"/>
+                          </a:solidFill>
+                          <a:latin typeface="Calibri" pitchFamily="34" charset="0"/>
+                          <a:ea typeface="Calibri" pitchFamily="34" charset="-122"/>
+                          <a:cs typeface="Calibri" pitchFamily="34" charset="-120"/>
+                        </a:rPr>
+                        <a:t>8.4</a:t>
+                      </a:r>
+                      <a:endParaRPr lang="en-US" sz="1300" dirty="0">
+                        <a:latin typeface="Calibri" charset="0"/>
+                        <a:ea typeface="Calibri" charset="0"/>
+                        <a:cs typeface="Calibri" charset="0"/>
+                      </a:endParaRPr>
+                    </a:p>
+                  </a:txBody>
+                  <a:tcPr marL="91440" marR="91440" marT="45720" marB="45720">
+                    <a:lnL w="12700" cap="flat" cmpd="sng" algn="ctr">
+                      <a:solidFill>
+                        <a:srgbClr val="2A3441"/>
+                      </a:solidFill>
+                      <a:prstDash val="solid"/>
+                      <a:round/>
+                      <a:headEnd type="none" w="med" len="med"/>
+                      <a:tailEnd type="none" w="med" len="med"/>
+                    </a:lnL>
+                    <a:lnR w="12700" cap="flat" cmpd="sng" algn="ctr">
+                      <a:solidFill>
+                        <a:srgbClr val="2A3441"/>
+                      </a:solidFill>
+                      <a:prstDash val="solid"/>
+                      <a:round/>
+                      <a:headEnd type="none" w="med" len="med"/>
+                      <a:tailEnd type="none" w="med" len="med"/>
+                    </a:lnR>
+                    <a:lnT w="12700" cap="flat" cmpd="sng" algn="ctr">
+                      <a:solidFill>
+                        <a:srgbClr val="2A3441"/>
+                      </a:solidFill>
+                      <a:prstDash val="solid"/>
+                      <a:round/>
+                      <a:headEnd type="none" w="med" len="med"/>
+                      <a:tailEnd type="none" w="med" len="med"/>
+                    </a:lnT>
+                    <a:lnB w="12700" cap="flat" cmpd="sng" algn="ctr">
+                      <a:solidFill>
+                        <a:srgbClr val="2A3441"/>
+                      </a:solidFill>
+                      <a:prstDash val="solid"/>
+                      <a:round/>
+                      <a:headEnd type="none" w="med" len="med"/>
+                      <a:tailEnd type="none" w="med" len="med"/>
+                    </a:lnB>
+                    <a:solidFill>
+                      <a:srgbClr val="141B24"/>
+                    </a:solidFill>
+                  </a:tcPr>
+                </a:tc>
+                <a:tc>
+                  <a:txBody>
+                    <a:bodyPr/>
+                    <a:lstStyle/>
+                    <a:p>
+                      <a:pPr indent="0" marL="0">
+                        <a:buNone/>
+                      </a:pPr>
+                      <a:r>
+                        <a:rPr lang="en-US" sz="1300" dirty="0">
+                          <a:solidFill>
+                            <a:srgbClr val="E6EDF3"/>
+                          </a:solidFill>
+                          <a:latin typeface="Calibri" pitchFamily="34" charset="0"/>
+                          <a:ea typeface="Calibri" pitchFamily="34" charset="-122"/>
+                          <a:cs typeface="Calibri" pitchFamily="34" charset="-120"/>
+                        </a:rPr>
+                        <a:t>8.3</a:t>
+                      </a:r>
+                      <a:endParaRPr lang="en-US" sz="1300" dirty="0">
+                        <a:latin typeface="Calibri" charset="0"/>
+                        <a:ea typeface="Calibri" charset="0"/>
+                        <a:cs typeface="Calibri" charset="0"/>
+                      </a:endParaRPr>
+                    </a:p>
+                  </a:txBody>
+                  <a:tcPr marL="91440" marR="91440" marT="45720" marB="45720">
+                    <a:lnL w="12700" cap="flat" cmpd="sng" algn="ctr">
+                      <a:solidFill>
+                        <a:srgbClr val="2A3441"/>
+                      </a:solidFill>
+                      <a:prstDash val="solid"/>
+                      <a:round/>
+                      <a:headEnd type="none" w="med" len="med"/>
+                      <a:tailEnd type="none" w="med" len="med"/>
+                    </a:lnL>
+                    <a:lnR w="12700" cap="flat" cmpd="sng" algn="ctr">
+                      <a:solidFill>
+                        <a:srgbClr val="2A3441"/>
+                      </a:solidFill>
+                      <a:prstDash val="solid"/>
+                      <a:round/>
+                      <a:headEnd type="none" w="med" len="med"/>
+                      <a:tailEnd type="none" w="med" len="med"/>
+                    </a:lnR>
+                    <a:lnT w="12700" cap="flat" cmpd="sng" algn="ctr">
+                      <a:solidFill>
+                        <a:srgbClr val="2A3441"/>
+                      </a:solidFill>
+                      <a:prstDash val="solid"/>
+                      <a:round/>
+                      <a:headEnd type="none" w="med" len="med"/>
+                      <a:tailEnd type="none" w="med" len="med"/>
+                    </a:lnT>
+                    <a:lnB w="12700" cap="flat" cmpd="sng" algn="ctr">
+                      <a:solidFill>
+                        <a:srgbClr val="2A3441"/>
+                      </a:solidFill>
+                      <a:prstDash val="solid"/>
+                      <a:round/>
+                      <a:headEnd type="none" w="med" len="med"/>
+                      <a:tailEnd type="none" w="med" len="med"/>
+                    </a:lnB>
+                    <a:solidFill>
+                      <a:srgbClr val="141B24"/>
+                    </a:solidFill>
+                  </a:tcPr>
+                </a:tc>
+                <a:tc>
+                  <a:txBody>
+                    <a:bodyPr/>
+                    <a:lstStyle/>
+                    <a:p>
+                      <a:pPr indent="0" marL="0">
+                        <a:buNone/>
+                      </a:pPr>
+                      <a:r>
+                        <a:rPr lang="en-US" sz="1300" dirty="0">
+                          <a:solidFill>
+                            <a:srgbClr val="E6EDF3"/>
+                          </a:solidFill>
+                          <a:latin typeface="Calibri" pitchFamily="34" charset="0"/>
+                          <a:ea typeface="Calibri" pitchFamily="34" charset="-122"/>
+                          <a:cs typeface="Calibri" pitchFamily="34" charset="-120"/>
+                        </a:rPr>
+                        <a:t>4.5</a:t>
+                      </a:r>
+                      <a:endParaRPr lang="en-US" sz="1300" dirty="0">
+                        <a:latin typeface="Calibri" charset="0"/>
+                        <a:ea typeface="Calibri" charset="0"/>
+                        <a:cs typeface="Calibri" charset="0"/>
+                      </a:endParaRPr>
+                    </a:p>
+                  </a:txBody>
+                  <a:tcPr marL="91440" marR="91440" marT="45720" marB="45720">
+                    <a:lnL w="12700" cap="flat" cmpd="sng" algn="ctr">
+                      <a:solidFill>
+                        <a:srgbClr val="2A3441"/>
+                      </a:solidFill>
+                      <a:prstDash val="solid"/>
+                      <a:round/>
+                      <a:headEnd type="none" w="med" len="med"/>
+                      <a:tailEnd type="none" w="med" len="med"/>
+                    </a:lnL>
+                    <a:lnR w="12700" cap="flat" cmpd="sng" algn="ctr">
+                      <a:solidFill>
+                        <a:srgbClr val="2A3441"/>
+                      </a:solidFill>
+                      <a:prstDash val="solid"/>
+                      <a:round/>
+                      <a:headEnd type="none" w="med" len="med"/>
+                      <a:tailEnd type="none" w="med" len="med"/>
+                    </a:lnR>
+                    <a:lnT w="12700" cap="flat" cmpd="sng" algn="ctr">
+                      <a:solidFill>
+                        <a:srgbClr val="2A3441"/>
+                      </a:solidFill>
+                      <a:prstDash val="solid"/>
+                      <a:round/>
+                      <a:headEnd type="none" w="med" len="med"/>
+                      <a:tailEnd type="none" w="med" len="med"/>
+                    </a:lnT>
+                    <a:lnB w="12700" cap="flat" cmpd="sng" algn="ctr">
+                      <a:solidFill>
+                        <a:srgbClr val="2A3441"/>
+                      </a:solidFill>
+                      <a:prstDash val="solid"/>
+                      <a:round/>
+                      <a:headEnd type="none" w="med" len="med"/>
+                      <a:tailEnd type="none" w="med" len="med"/>
+                    </a:lnB>
+                    <a:solidFill>
+                      <a:srgbClr val="141B24"/>
+                    </a:solidFill>
+                  </a:tcPr>
+                </a:tc>
+              </a:tr>
+              <a:tr h="402336">
+                <a:tc>
+                  <a:txBody>
+                    <a:bodyPr/>
+                    <a:lstStyle/>
+                    <a:p>
+                      <a:pPr indent="0" marL="0">
+                        <a:buNone/>
+                      </a:pPr>
+                      <a:r>
+                        <a:rPr lang="en-US" sz="1300" dirty="0">
+                          <a:solidFill>
+                            <a:srgbClr val="E6EDF3"/>
+                          </a:solidFill>
+                          <a:latin typeface="Calibri" pitchFamily="34" charset="0"/>
+                          <a:ea typeface="Calibri" pitchFamily="34" charset="-122"/>
+                          <a:cs typeface="Calibri" pitchFamily="34" charset="-120"/>
+                        </a:rPr>
+                        <a:t>Satellite-like</a:t>
+                      </a:r>
+                      <a:endParaRPr lang="en-US" sz="1300" dirty="0">
+                        <a:latin typeface="Calibri" charset="0"/>
+                        <a:ea typeface="Calibri" charset="0"/>
+                        <a:cs typeface="Calibri" charset="0"/>
+                      </a:endParaRPr>
+                    </a:p>
+                  </a:txBody>
+                  <a:tcPr marL="91440" marR="91440" marT="45720" marB="45720">
+                    <a:lnL w="12700" cap="flat" cmpd="sng" algn="ctr">
+                      <a:solidFill>
+                        <a:srgbClr val="2A3441"/>
+                      </a:solidFill>
+                      <a:prstDash val="solid"/>
+                      <a:round/>
+                      <a:headEnd type="none" w="med" len="med"/>
+                      <a:tailEnd type="none" w="med" len="med"/>
+                    </a:lnL>
+                    <a:lnR w="12700" cap="flat" cmpd="sng" algn="ctr">
+                      <a:solidFill>
+                        <a:srgbClr val="2A3441"/>
+                      </a:solidFill>
+                      <a:prstDash val="solid"/>
+                      <a:round/>
+                      <a:headEnd type="none" w="med" len="med"/>
+                      <a:tailEnd type="none" w="med" len="med"/>
+                    </a:lnR>
+                    <a:lnT w="12700" cap="flat" cmpd="sng" algn="ctr">
+                      <a:solidFill>
+                        <a:srgbClr val="2A3441"/>
+                      </a:solidFill>
+                      <a:prstDash val="solid"/>
+                      <a:round/>
+                      <a:headEnd type="none" w="med" len="med"/>
+                      <a:tailEnd type="none" w="med" len="med"/>
+                    </a:lnT>
+                    <a:lnB w="12700" cap="flat" cmpd="sng" algn="ctr">
+                      <a:solidFill>
+                        <a:srgbClr val="2A3441"/>
+                      </a:solidFill>
+                      <a:prstDash val="solid"/>
+                      <a:round/>
+                      <a:headEnd type="none" w="med" len="med"/>
+                      <a:tailEnd type="none" w="med" len="med"/>
+                    </a:lnB>
+                    <a:solidFill>
+                      <a:srgbClr val="141B24"/>
+                    </a:solidFill>
+                  </a:tcPr>
+                </a:tc>
+                <a:tc>
+                  <a:txBody>
+                    <a:bodyPr/>
+                    <a:lstStyle/>
+                    <a:p>
+                      <a:pPr indent="0" marL="0">
+                        <a:buNone/>
+                      </a:pPr>
+                      <a:r>
+                        <a:rPr lang="en-US" sz="1300" dirty="0">
+                          <a:solidFill>
+                            <a:srgbClr val="E6EDF3"/>
+                          </a:solidFill>
+                          <a:latin typeface="Calibri" pitchFamily="34" charset="0"/>
+                          <a:ea typeface="Calibri" pitchFamily="34" charset="-122"/>
+                          <a:cs typeface="Calibri" pitchFamily="34" charset="-120"/>
+                        </a:rPr>
+                        <a:t>25.1</a:t>
+                      </a:r>
+                      <a:endParaRPr lang="en-US" sz="1300" dirty="0">
+                        <a:latin typeface="Calibri" charset="0"/>
+                        <a:ea typeface="Calibri" charset="0"/>
+                        <a:cs typeface="Calibri" charset="0"/>
+                      </a:endParaRPr>
+                    </a:p>
+                  </a:txBody>
+                  <a:tcPr marL="91440" marR="91440" marT="45720" marB="45720">
+                    <a:lnL w="12700" cap="flat" cmpd="sng" algn="ctr">
+                      <a:solidFill>
+                        <a:srgbClr val="2A3441"/>
+                      </a:solidFill>
+                      <a:prstDash val="solid"/>
+                      <a:round/>
+                      <a:headEnd type="none" w="med" len="med"/>
+                      <a:tailEnd type="none" w="med" len="med"/>
+                    </a:lnL>
+                    <a:lnR w="12700" cap="flat" cmpd="sng" algn="ctr">
+                      <a:solidFill>
+                        <a:srgbClr val="2A3441"/>
+                      </a:solidFill>
+                      <a:prstDash val="solid"/>
+                      <a:round/>
+                      <a:headEnd type="none" w="med" len="med"/>
+                      <a:tailEnd type="none" w="med" len="med"/>
+                    </a:lnR>
+                    <a:lnT w="12700" cap="flat" cmpd="sng" algn="ctr">
+                      <a:solidFill>
+                        <a:srgbClr val="2A3441"/>
+                      </a:solidFill>
+                      <a:prstDash val="solid"/>
+                      <a:round/>
+                      <a:headEnd type="none" w="med" len="med"/>
+                      <a:tailEnd type="none" w="med" len="med"/>
+                    </a:lnT>
+                    <a:lnB w="12700" cap="flat" cmpd="sng" algn="ctr">
+                      <a:solidFill>
+                        <a:srgbClr val="2A3441"/>
+                      </a:solidFill>
+                      <a:prstDash val="solid"/>
+                      <a:round/>
+                      <a:headEnd type="none" w="med" len="med"/>
+                      <a:tailEnd type="none" w="med" len="med"/>
+                    </a:lnB>
+                    <a:solidFill>
+                      <a:srgbClr val="141B24"/>
+                    </a:solidFill>
+                  </a:tcPr>
+                </a:tc>
+                <a:tc>
+                  <a:txBody>
+                    <a:bodyPr/>
+                    <a:lstStyle/>
+                    <a:p>
+                      <a:pPr indent="0" marL="0">
+                        <a:buNone/>
+                      </a:pPr>
+                      <a:r>
+                        <a:rPr lang="en-US" sz="1300" dirty="0">
+                          <a:solidFill>
+                            <a:srgbClr val="E6EDF3"/>
+                          </a:solidFill>
+                          <a:latin typeface="Calibri" pitchFamily="34" charset="0"/>
+                          <a:ea typeface="Calibri" pitchFamily="34" charset="-122"/>
+                          <a:cs typeface="Calibri" pitchFamily="34" charset="-120"/>
+                        </a:rPr>
+                        <a:t>20.0</a:t>
+                      </a:r>
+                      <a:endParaRPr lang="en-US" sz="1300" dirty="0">
+                        <a:latin typeface="Calibri" charset="0"/>
+                        <a:ea typeface="Calibri" charset="0"/>
+                        <a:cs typeface="Calibri" charset="0"/>
+                      </a:endParaRPr>
+                    </a:p>
+                  </a:txBody>
+                  <a:tcPr marL="91440" marR="91440" marT="45720" marB="45720">
+                    <a:lnL w="12700" cap="flat" cmpd="sng" algn="ctr">
+                      <a:solidFill>
+                        <a:srgbClr val="2A3441"/>
+                      </a:solidFill>
+                      <a:prstDash val="solid"/>
+                      <a:round/>
+                      <a:headEnd type="none" w="med" len="med"/>
+                      <a:tailEnd type="none" w="med" len="med"/>
+                    </a:lnL>
+                    <a:lnR w="12700" cap="flat" cmpd="sng" algn="ctr">
+                      <a:solidFill>
+                        <a:srgbClr val="2A3441"/>
+                      </a:solidFill>
+                      <a:prstDash val="solid"/>
+                      <a:round/>
+                      <a:headEnd type="none" w="med" len="med"/>
+                      <a:tailEnd type="none" w="med" len="med"/>
+                    </a:lnR>
+                    <a:lnT w="12700" cap="flat" cmpd="sng" algn="ctr">
+                      <a:solidFill>
+                        <a:srgbClr val="2A3441"/>
+                      </a:solidFill>
+                      <a:prstDash val="solid"/>
+                      <a:round/>
+                      <a:headEnd type="none" w="med" len="med"/>
+                      <a:tailEnd type="none" w="med" len="med"/>
+                    </a:lnT>
+                    <a:lnB w="12700" cap="flat" cmpd="sng" algn="ctr">
+                      <a:solidFill>
+                        <a:srgbClr val="2A3441"/>
+                      </a:solidFill>
+                      <a:prstDash val="solid"/>
+                      <a:round/>
+                      <a:headEnd type="none" w="med" len="med"/>
+                      <a:tailEnd type="none" w="med" len="med"/>
+                    </a:lnB>
+                    <a:solidFill>
+                      <a:srgbClr val="141B24"/>
+                    </a:solidFill>
+                  </a:tcPr>
+                </a:tc>
+                <a:tc>
+                  <a:txBody>
+                    <a:bodyPr/>
+                    <a:lstStyle/>
+                    <a:p>
+                      <a:pPr indent="0" marL="0">
+                        <a:buNone/>
+                      </a:pPr>
+                      <a:r>
+                        <a:rPr lang="en-US" sz="1300" dirty="0">
+                          <a:solidFill>
+                            <a:srgbClr val="E6EDF3"/>
+                          </a:solidFill>
+                          <a:latin typeface="Calibri" pitchFamily="34" charset="0"/>
+                          <a:ea typeface="Calibri" pitchFamily="34" charset="-122"/>
+                          <a:cs typeface="Calibri" pitchFamily="34" charset="-120"/>
+                        </a:rPr>
+                        <a:t>6.3</a:t>
+                      </a:r>
+                      <a:endParaRPr lang="en-US" sz="1300" dirty="0">
+                        <a:latin typeface="Calibri" charset="0"/>
+                        <a:ea typeface="Calibri" charset="0"/>
+                        <a:cs typeface="Calibri" charset="0"/>
+                      </a:endParaRPr>
+                    </a:p>
+                  </a:txBody>
+                  <a:tcPr marL="91440" marR="91440" marT="45720" marB="45720">
+                    <a:lnL w="12700" cap="flat" cmpd="sng" algn="ctr">
+                      <a:solidFill>
+                        <a:srgbClr val="2A3441"/>
+                      </a:solidFill>
+                      <a:prstDash val="solid"/>
+                      <a:round/>
+                      <a:headEnd type="none" w="med" len="med"/>
+                      <a:tailEnd type="none" w="med" len="med"/>
+                    </a:lnL>
+                    <a:lnR w="12700" cap="flat" cmpd="sng" algn="ctr">
+                      <a:solidFill>
+                        <a:srgbClr val="2A3441"/>
+                      </a:solidFill>
+                      <a:prstDash val="solid"/>
+                      <a:round/>
+                      <a:headEnd type="none" w="med" len="med"/>
+                      <a:tailEnd type="none" w="med" len="med"/>
+                    </a:lnR>
+                    <a:lnT w="12700" cap="flat" cmpd="sng" algn="ctr">
+                      <a:solidFill>
+                        <a:srgbClr val="2A3441"/>
+                      </a:solidFill>
+                      <a:prstDash val="solid"/>
+                      <a:round/>
+                      <a:headEnd type="none" w="med" len="med"/>
+                      <a:tailEnd type="none" w="med" len="med"/>
+                    </a:lnT>
+                    <a:lnB w="12700" cap="flat" cmpd="sng" algn="ctr">
+                      <a:solidFill>
+                        <a:srgbClr val="2A3441"/>
+                      </a:solidFill>
+                      <a:prstDash val="solid"/>
+                      <a:round/>
+                      <a:headEnd type="none" w="med" len="med"/>
+                      <a:tailEnd type="none" w="med" len="med"/>
+                    </a:lnB>
+                    <a:solidFill>
+                      <a:srgbClr val="141B24"/>
+                    </a:solidFill>
+                  </a:tcPr>
+                </a:tc>
+              </a:tr>
+              <a:tr h="402336">
+                <a:tc>
+                  <a:txBody>
+                    <a:bodyPr/>
+                    <a:lstStyle/>
+                    <a:p>
+                      <a:pPr indent="0" marL="0">
+                        <a:buNone/>
+                      </a:pPr>
+                      <a:r>
+                        <a:rPr lang="en-US" sz="1300" dirty="0">
+                          <a:solidFill>
+                            <a:srgbClr val="E6EDF3"/>
+                          </a:solidFill>
+                          <a:latin typeface="Calibri" pitchFamily="34" charset="0"/>
+                          <a:ea typeface="Calibri" pitchFamily="34" charset="-122"/>
+                          <a:cs typeface="Calibri" pitchFamily="34" charset="-120"/>
+                        </a:rPr>
+                        <a:t>Fast (3,000 pkts)</a:t>
+                      </a:r>
+                      <a:endParaRPr lang="en-US" sz="1300" dirty="0">
+                        <a:latin typeface="Calibri" charset="0"/>
+                        <a:ea typeface="Calibri" charset="0"/>
+                        <a:cs typeface="Calibri" charset="0"/>
+                      </a:endParaRPr>
+                    </a:p>
+                  </a:txBody>
+                  <a:tcPr marL="91440" marR="91440" marT="45720" marB="45720">
+                    <a:lnL w="12700" cap="flat" cmpd="sng" algn="ctr">
+                      <a:solidFill>
+                        <a:srgbClr val="2A3441"/>
+                      </a:solidFill>
+                      <a:prstDash val="solid"/>
+                      <a:round/>
+                      <a:headEnd type="none" w="med" len="med"/>
+                      <a:tailEnd type="none" w="med" len="med"/>
+                    </a:lnL>
+                    <a:lnR w="12700" cap="flat" cmpd="sng" algn="ctr">
+                      <a:solidFill>
+                        <a:srgbClr val="2A3441"/>
+                      </a:solidFill>
+                      <a:prstDash val="solid"/>
+                      <a:round/>
+                      <a:headEnd type="none" w="med" len="med"/>
+                      <a:tailEnd type="none" w="med" len="med"/>
+                    </a:lnR>
+                    <a:lnT w="12700" cap="flat" cmpd="sng" algn="ctr">
+                      <a:solidFill>
+                        <a:srgbClr val="2A3441"/>
+                      </a:solidFill>
+                      <a:prstDash val="solid"/>
+                      <a:round/>
+                      <a:headEnd type="none" w="med" len="med"/>
+                      <a:tailEnd type="none" w="med" len="med"/>
+                    </a:lnT>
+                    <a:lnB w="12700" cap="flat" cmpd="sng" algn="ctr">
+                      <a:solidFill>
+                        <a:srgbClr val="2A3441"/>
+                      </a:solidFill>
+                      <a:prstDash val="solid"/>
+                      <a:round/>
+                      <a:headEnd type="none" w="med" len="med"/>
+                      <a:tailEnd type="none" w="med" len="med"/>
+                    </a:lnB>
+                    <a:solidFill>
+                      <a:srgbClr val="141B24"/>
+                    </a:solidFill>
+                  </a:tcPr>
+                </a:tc>
+                <a:tc>
+                  <a:txBody>
+                    <a:bodyPr/>
+                    <a:lstStyle/>
+                    <a:p>
+                      <a:pPr indent="0" marL="0">
+                        <a:buNone/>
+                      </a:pPr>
+                      <a:r>
+                        <a:rPr lang="en-US" sz="1300" dirty="0">
+                          <a:solidFill>
+                            <a:srgbClr val="E6EDF3"/>
+                          </a:solidFill>
+                          <a:latin typeface="Calibri" pitchFamily="34" charset="0"/>
+                          <a:ea typeface="Calibri" pitchFamily="34" charset="-122"/>
+                          <a:cs typeface="Calibri" pitchFamily="34" charset="-120"/>
+                        </a:rPr>
+                        <a:t>19.8</a:t>
+                      </a:r>
+                      <a:endParaRPr lang="en-US" sz="1300" dirty="0">
+                        <a:latin typeface="Calibri" charset="0"/>
+                        <a:ea typeface="Calibri" charset="0"/>
+                        <a:cs typeface="Calibri" charset="0"/>
+                      </a:endParaRPr>
+                    </a:p>
+                  </a:txBody>
+                  <a:tcPr marL="91440" marR="91440" marT="45720" marB="45720">
+                    <a:lnL w="12700" cap="flat" cmpd="sng" algn="ctr">
+                      <a:solidFill>
+                        <a:srgbClr val="2A3441"/>
+                      </a:solidFill>
+                      <a:prstDash val="solid"/>
+                      <a:round/>
+                      <a:headEnd type="none" w="med" len="med"/>
+                      <a:tailEnd type="none" w="med" len="med"/>
+                    </a:lnL>
+                    <a:lnR w="12700" cap="flat" cmpd="sng" algn="ctr">
+                      <a:solidFill>
+                        <a:srgbClr val="2A3441"/>
+                      </a:solidFill>
+                      <a:prstDash val="solid"/>
+                      <a:round/>
+                      <a:headEnd type="none" w="med" len="med"/>
+                      <a:tailEnd type="none" w="med" len="med"/>
+                    </a:lnR>
+                    <a:lnT w="12700" cap="flat" cmpd="sng" algn="ctr">
+                      <a:solidFill>
+                        <a:srgbClr val="2A3441"/>
+                      </a:solidFill>
+                      <a:prstDash val="solid"/>
+                      <a:round/>
+                      <a:headEnd type="none" w="med" len="med"/>
+                      <a:tailEnd type="none" w="med" len="med"/>
+                    </a:lnT>
+                    <a:lnB w="12700" cap="flat" cmpd="sng" algn="ctr">
+                      <a:solidFill>
+                        <a:srgbClr val="2A3441"/>
+                      </a:solidFill>
+                      <a:prstDash val="solid"/>
+                      <a:round/>
+                      <a:headEnd type="none" w="med" len="med"/>
+                      <a:tailEnd type="none" w="med" len="med"/>
+                    </a:lnB>
+                    <a:solidFill>
+                      <a:srgbClr val="141B24"/>
+                    </a:solidFill>
+                  </a:tcPr>
+                </a:tc>
+                <a:tc>
+                  <a:txBody>
+                    <a:bodyPr/>
+                    <a:lstStyle/>
+                    <a:p>
+                      <a:pPr indent="0" marL="0">
+                        <a:buNone/>
+                      </a:pPr>
+                      <a:r>
+                        <a:rPr lang="en-US" sz="1300" dirty="0">
+                          <a:solidFill>
+                            <a:srgbClr val="E6EDF3"/>
+                          </a:solidFill>
+                          <a:latin typeface="Calibri" pitchFamily="34" charset="0"/>
+                          <a:ea typeface="Calibri" pitchFamily="34" charset="-122"/>
+                          <a:cs typeface="Calibri" pitchFamily="34" charset="-120"/>
+                        </a:rPr>
+                        <a:t>17.3</a:t>
+                      </a:r>
+                      <a:endParaRPr lang="en-US" sz="1300" dirty="0">
+                        <a:latin typeface="Calibri" charset="0"/>
+                        <a:ea typeface="Calibri" charset="0"/>
+                        <a:cs typeface="Calibri" charset="0"/>
+                      </a:endParaRPr>
+                    </a:p>
+                  </a:txBody>
+                  <a:tcPr marL="91440" marR="91440" marT="45720" marB="45720">
+                    <a:lnL w="12700" cap="flat" cmpd="sng" algn="ctr">
+                      <a:solidFill>
+                        <a:srgbClr val="2A3441"/>
+                      </a:solidFill>
+                      <a:prstDash val="solid"/>
+                      <a:round/>
+                      <a:headEnd type="none" w="med" len="med"/>
+                      <a:tailEnd type="none" w="med" len="med"/>
+                    </a:lnL>
+                    <a:lnR w="12700" cap="flat" cmpd="sng" algn="ctr">
+                      <a:solidFill>
+                        <a:srgbClr val="2A3441"/>
+                      </a:solidFill>
+                      <a:prstDash val="solid"/>
+                      <a:round/>
+                      <a:headEnd type="none" w="med" len="med"/>
+                      <a:tailEnd type="none" w="med" len="med"/>
+                    </a:lnR>
+                    <a:lnT w="12700" cap="flat" cmpd="sng" algn="ctr">
+                      <a:solidFill>
+                        <a:srgbClr val="2A3441"/>
+                      </a:solidFill>
+                      <a:prstDash val="solid"/>
+                      <a:round/>
+                      <a:headEnd type="none" w="med" len="med"/>
+                      <a:tailEnd type="none" w="med" len="med"/>
+                    </a:lnT>
+                    <a:lnB w="12700" cap="flat" cmpd="sng" algn="ctr">
+                      <a:solidFill>
+                        <a:srgbClr val="2A3441"/>
+                      </a:solidFill>
+                      <a:prstDash val="solid"/>
+                      <a:round/>
+                      <a:headEnd type="none" w="med" len="med"/>
+                      <a:tailEnd type="none" w="med" len="med"/>
+                    </a:lnB>
+                    <a:solidFill>
+                      <a:srgbClr val="141B24"/>
+                    </a:solidFill>
+                  </a:tcPr>
+                </a:tc>
+                <a:tc>
+                  <a:txBody>
+                    <a:bodyPr/>
+                    <a:lstStyle/>
+                    <a:p>
+                      <a:pPr indent="0" marL="0">
+                        <a:buNone/>
+                      </a:pPr>
+                      <a:r>
+                        <a:rPr lang="en-US" sz="1300" dirty="0">
+                          <a:solidFill>
+                            <a:srgbClr val="E6EDF3"/>
+                          </a:solidFill>
+                          <a:latin typeface="Calibri" pitchFamily="34" charset="0"/>
+                          <a:ea typeface="Calibri" pitchFamily="34" charset="-122"/>
+                          <a:cs typeface="Calibri" pitchFamily="34" charset="-120"/>
+                        </a:rPr>
+                        <a:t>4.0</a:t>
+                      </a:r>
+                      <a:endParaRPr lang="en-US" sz="1300" dirty="0">
+                        <a:latin typeface="Calibri" charset="0"/>
+                        <a:ea typeface="Calibri" charset="0"/>
+                        <a:cs typeface="Calibri" charset="0"/>
+                      </a:endParaRPr>
+                    </a:p>
+                  </a:txBody>
+                  <a:tcPr marL="91440" marR="91440" marT="45720" marB="45720">
+                    <a:lnL w="12700" cap="flat" cmpd="sng" algn="ctr">
+                      <a:solidFill>
+                        <a:srgbClr val="2A3441"/>
+                      </a:solidFill>
+                      <a:prstDash val="solid"/>
+                      <a:round/>
+                      <a:headEnd type="none" w="med" len="med"/>
+                      <a:tailEnd type="none" w="med" len="med"/>
+                    </a:lnL>
+                    <a:lnR w="12700" cap="flat" cmpd="sng" algn="ctr">
+                      <a:solidFill>
+                        <a:srgbClr val="2A3441"/>
+                      </a:solidFill>
+                      <a:prstDash val="solid"/>
+                      <a:round/>
+                      <a:headEnd type="none" w="med" len="med"/>
+                      <a:tailEnd type="none" w="med" len="med"/>
+                    </a:lnR>
+                    <a:lnT w="12700" cap="flat" cmpd="sng" algn="ctr">
+                      <a:solidFill>
+                        <a:srgbClr val="2A3441"/>
+                      </a:solidFill>
+                      <a:prstDash val="solid"/>
+                      <a:round/>
+                      <a:headEnd type="none" w="med" len="med"/>
+                      <a:tailEnd type="none" w="med" len="med"/>
+                    </a:lnT>
+                    <a:lnB w="12700" cap="flat" cmpd="sng" algn="ctr">
+                      <a:solidFill>
+                        <a:srgbClr val="2A3441"/>
+                      </a:solidFill>
+                      <a:prstDash val="solid"/>
+                      <a:round/>
+                      <a:headEnd type="none" w="med" len="med"/>
+                      <a:tailEnd type="none" w="med" len="med"/>
+                    </a:lnB>
+                    <a:solidFill>
+                      <a:srgbClr val="141B24"/>
+                    </a:solidFill>
+                  </a:tcPr>
+                </a:tc>
+              </a:tr>
+              <a:tr h="402336">
+                <a:tc>
+                  <a:txBody>
+                    <a:bodyPr/>
+                    <a:lstStyle/>
+                    <a:p>
+                      <a:pPr indent="0" marL="0">
+                        <a:buNone/>
+                      </a:pPr>
+                      <a:r>
+                        <a:rPr lang="en-US" sz="1300" dirty="0">
+                          <a:solidFill>
+                            <a:srgbClr val="E6EDF3"/>
+                          </a:solidFill>
+                          <a:latin typeface="Calibri" pitchFamily="34" charset="0"/>
+                          <a:ea typeface="Calibri" pitchFamily="34" charset="-122"/>
+                          <a:cs typeface="Calibri" pitchFamily="34" charset="-120"/>
+                        </a:rPr>
+                        <a:t>5G-like</a:t>
+                      </a:r>
+                      <a:endParaRPr lang="en-US" sz="1300" dirty="0">
+                        <a:latin typeface="Calibri" charset="0"/>
+                        <a:ea typeface="Calibri" charset="0"/>
+                        <a:cs typeface="Calibri" charset="0"/>
+                      </a:endParaRPr>
+                    </a:p>
+                  </a:txBody>
+                  <a:tcPr marL="91440" marR="91440" marT="45720" marB="45720">
+                    <a:lnL w="12700" cap="flat" cmpd="sng" algn="ctr">
+                      <a:solidFill>
+                        <a:srgbClr val="2A3441"/>
+                      </a:solidFill>
+                      <a:prstDash val="solid"/>
+                      <a:round/>
+                      <a:headEnd type="none" w="med" len="med"/>
+                      <a:tailEnd type="none" w="med" len="med"/>
+                    </a:lnL>
+                    <a:lnR w="12700" cap="flat" cmpd="sng" algn="ctr">
+                      <a:solidFill>
+                        <a:srgbClr val="2A3441"/>
+                      </a:solidFill>
+                      <a:prstDash val="solid"/>
+                      <a:round/>
+                      <a:headEnd type="none" w="med" len="med"/>
+                      <a:tailEnd type="none" w="med" len="med"/>
+                    </a:lnR>
+                    <a:lnT w="12700" cap="flat" cmpd="sng" algn="ctr">
+                      <a:solidFill>
+                        <a:srgbClr val="2A3441"/>
+                      </a:solidFill>
+                      <a:prstDash val="solid"/>
+                      <a:round/>
+                      <a:headEnd type="none" w="med" len="med"/>
+                      <a:tailEnd type="none" w="med" len="med"/>
+                    </a:lnT>
+                    <a:lnB w="12700" cap="flat" cmpd="sng" algn="ctr">
+                      <a:solidFill>
+                        <a:srgbClr val="2A3441"/>
+                      </a:solidFill>
+                      <a:prstDash val="solid"/>
+                      <a:round/>
+                      <a:headEnd type="none" w="med" len="med"/>
+                      <a:tailEnd type="none" w="med" len="med"/>
+                    </a:lnB>
+                    <a:solidFill>
+                      <a:srgbClr val="141B24"/>
+                    </a:solidFill>
+                  </a:tcPr>
+                </a:tc>
+                <a:tc>
+                  <a:txBody>
+                    <a:bodyPr/>
+                    <a:lstStyle/>
+                    <a:p>
+                      <a:pPr indent="0" marL="0">
+                        <a:buNone/>
+                      </a:pPr>
+                      <a:r>
+                        <a:rPr lang="en-US" sz="1300" dirty="0">
+                          <a:solidFill>
+                            <a:srgbClr val="E6EDF3"/>
+                          </a:solidFill>
+                          <a:latin typeface="Calibri" pitchFamily="34" charset="0"/>
+                          <a:ea typeface="Calibri" pitchFamily="34" charset="-122"/>
+                          <a:cs typeface="Calibri" pitchFamily="34" charset="-120"/>
+                        </a:rPr>
+                        <a:t>1.30</a:t>
+                      </a:r>
+                      <a:endParaRPr lang="en-US" sz="1300" dirty="0">
+                        <a:latin typeface="Calibri" charset="0"/>
+                        <a:ea typeface="Calibri" charset="0"/>
+                        <a:cs typeface="Calibri" charset="0"/>
+                      </a:endParaRPr>
+                    </a:p>
+                  </a:txBody>
+                  <a:tcPr marL="91440" marR="91440" marT="45720" marB="45720">
+                    <a:lnL w="12700" cap="flat" cmpd="sng" algn="ctr">
+                      <a:solidFill>
+                        <a:srgbClr val="2A3441"/>
+                      </a:solidFill>
+                      <a:prstDash val="solid"/>
+                      <a:round/>
+                      <a:headEnd type="none" w="med" len="med"/>
+                      <a:tailEnd type="none" w="med" len="med"/>
+                    </a:lnL>
+                    <a:lnR w="12700" cap="flat" cmpd="sng" algn="ctr">
+                      <a:solidFill>
+                        <a:srgbClr val="2A3441"/>
+                      </a:solidFill>
+                      <a:prstDash val="solid"/>
+                      <a:round/>
+                      <a:headEnd type="none" w="med" len="med"/>
+                      <a:tailEnd type="none" w="med" len="med"/>
+                    </a:lnR>
+                    <a:lnT w="12700" cap="flat" cmpd="sng" algn="ctr">
+                      <a:solidFill>
+                        <a:srgbClr val="2A3441"/>
+                      </a:solidFill>
+                      <a:prstDash val="solid"/>
+                      <a:round/>
+                      <a:headEnd type="none" w="med" len="med"/>
+                      <a:tailEnd type="none" w="med" len="med"/>
+                    </a:lnT>
+                    <a:lnB w="12700" cap="flat" cmpd="sng" algn="ctr">
+                      <a:solidFill>
+                        <a:srgbClr val="2A3441"/>
+                      </a:solidFill>
+                      <a:prstDash val="solid"/>
+                      <a:round/>
+                      <a:headEnd type="none" w="med" len="med"/>
+                      <a:tailEnd type="none" w="med" len="med"/>
+                    </a:lnB>
+                    <a:solidFill>
+                      <a:srgbClr val="141B24"/>
+                    </a:solidFill>
+                  </a:tcPr>
+                </a:tc>
+                <a:tc>
+                  <a:txBody>
+                    <a:bodyPr/>
+                    <a:lstStyle/>
+                    <a:p>
+                      <a:pPr indent="0" marL="0">
+                        <a:buNone/>
+                      </a:pPr>
+                      <a:r>
+                        <a:rPr lang="en-US" sz="1300" dirty="0">
+                          <a:solidFill>
+                            <a:srgbClr val="E6EDF3"/>
+                          </a:solidFill>
+                          <a:latin typeface="Calibri" pitchFamily="34" charset="0"/>
+                          <a:ea typeface="Calibri" pitchFamily="34" charset="-122"/>
+                          <a:cs typeface="Calibri" pitchFamily="34" charset="-120"/>
+                        </a:rPr>
+                        <a:t>1.09</a:t>
+                      </a:r>
+                      <a:endParaRPr lang="en-US" sz="1300" dirty="0">
+                        <a:latin typeface="Calibri" charset="0"/>
+                        <a:ea typeface="Calibri" charset="0"/>
+                        <a:cs typeface="Calibri" charset="0"/>
+                      </a:endParaRPr>
+                    </a:p>
+                  </a:txBody>
+                  <a:tcPr marL="91440" marR="91440" marT="45720" marB="45720">
+                    <a:lnL w="12700" cap="flat" cmpd="sng" algn="ctr">
+                      <a:solidFill>
+                        <a:srgbClr val="2A3441"/>
+                      </a:solidFill>
+                      <a:prstDash val="solid"/>
+                      <a:round/>
+                      <a:headEnd type="none" w="med" len="med"/>
+                      <a:tailEnd type="none" w="med" len="med"/>
+                    </a:lnL>
+                    <a:lnR w="12700" cap="flat" cmpd="sng" algn="ctr">
+                      <a:solidFill>
+                        <a:srgbClr val="2A3441"/>
+                      </a:solidFill>
+                      <a:prstDash val="solid"/>
+                      <a:round/>
+                      <a:headEnd type="none" w="med" len="med"/>
+                      <a:tailEnd type="none" w="med" len="med"/>
+                    </a:lnR>
+                    <a:lnT w="12700" cap="flat" cmpd="sng" algn="ctr">
+                      <a:solidFill>
+                        <a:srgbClr val="2A3441"/>
+                      </a:solidFill>
+                      <a:prstDash val="solid"/>
+                      <a:round/>
+                      <a:headEnd type="none" w="med" len="med"/>
+                      <a:tailEnd type="none" w="med" len="med"/>
+                    </a:lnT>
+                    <a:lnB w="12700" cap="flat" cmpd="sng" algn="ctr">
+                      <a:solidFill>
+                        <a:srgbClr val="2A3441"/>
+                      </a:solidFill>
+                      <a:prstDash val="solid"/>
+                      <a:round/>
+                      <a:headEnd type="none" w="med" len="med"/>
+                      <a:tailEnd type="none" w="med" len="med"/>
+                    </a:lnB>
+                    <a:solidFill>
+                      <a:srgbClr val="141B24"/>
+                    </a:solidFill>
+                  </a:tcPr>
+                </a:tc>
+                <a:tc>
+                  <a:txBody>
+                    <a:bodyPr/>
+                    <a:lstStyle/>
+                    <a:p>
+                      <a:pPr indent="0" marL="0">
+                        <a:buNone/>
+                      </a:pPr>
+                      <a:r>
+                        <a:rPr lang="en-US" sz="1300" dirty="0">
+                          <a:solidFill>
+                            <a:srgbClr val="E6EDF3"/>
+                          </a:solidFill>
+                          <a:latin typeface="Calibri" pitchFamily="34" charset="0"/>
+                          <a:ea typeface="Calibri" pitchFamily="34" charset="-122"/>
+                          <a:cs typeface="Calibri" pitchFamily="34" charset="-120"/>
+                        </a:rPr>
+                        <a:t>1.09</a:t>
+                      </a:r>
+                      <a:endParaRPr lang="en-US" sz="1300" dirty="0">
+                        <a:latin typeface="Calibri" charset="0"/>
+                        <a:ea typeface="Calibri" charset="0"/>
+                        <a:cs typeface="Calibri" charset="0"/>
+                      </a:endParaRPr>
+                    </a:p>
+                  </a:txBody>
+                  <a:tcPr marL="91440" marR="91440" marT="45720" marB="45720">
+                    <a:lnL w="12700" cap="flat" cmpd="sng" algn="ctr">
+                      <a:solidFill>
+                        <a:srgbClr val="2A3441"/>
+                      </a:solidFill>
+                      <a:prstDash val="solid"/>
+                      <a:round/>
+                      <a:headEnd type="none" w="med" len="med"/>
+                      <a:tailEnd type="none" w="med" len="med"/>
+                    </a:lnL>
+                    <a:lnR w="12700" cap="flat" cmpd="sng" algn="ctr">
+                      <a:solidFill>
+                        <a:srgbClr val="2A3441"/>
+                      </a:solidFill>
+                      <a:prstDash val="solid"/>
+                      <a:round/>
+                      <a:headEnd type="none" w="med" len="med"/>
+                      <a:tailEnd type="none" w="med" len="med"/>
+                    </a:lnR>
+                    <a:lnT w="12700" cap="flat" cmpd="sng" algn="ctr">
+                      <a:solidFill>
+                        <a:srgbClr val="2A3441"/>
+                      </a:solidFill>
+                      <a:prstDash val="solid"/>
+                      <a:round/>
+                      <a:headEnd type="none" w="med" len="med"/>
+                      <a:tailEnd type="none" w="med" len="med"/>
+                    </a:lnT>
+                    <a:lnB w="12700" cap="flat" cmpd="sng" algn="ctr">
+                      <a:solidFill>
+                        <a:srgbClr val="2A3441"/>
+                      </a:solidFill>
+                      <a:prstDash val="solid"/>
+                      <a:round/>
+                      <a:headEnd type="none" w="med" len="med"/>
+                      <a:tailEnd type="none" w="med" len="med"/>
+                    </a:lnB>
+                    <a:solidFill>
+                      <a:srgbClr val="141B24"/>
+                    </a:solidFill>
+                  </a:tcPr>
+                </a:tc>
+              </a:tr>
+              <a:tr h="402336">
+                <a:tc>
+                  <a:txBody>
+                    <a:bodyPr/>
+                    <a:lstStyle/>
+                    <a:p>
+                      <a:pPr indent="0" marL="0">
+                        <a:buNone/>
+                      </a:pPr>
+                      <a:r>
+                        <a:rPr lang="en-US" sz="1300" dirty="0">
+                          <a:solidFill>
+                            <a:srgbClr val="E6EDF3"/>
+                          </a:solidFill>
+                          <a:latin typeface="Calibri" pitchFamily="34" charset="0"/>
+                          <a:ea typeface="Calibri" pitchFamily="34" charset="-122"/>
+                          <a:cs typeface="Calibri" pitchFamily="34" charset="-120"/>
+                        </a:rPr>
+                        <a:t>Hostile, 10% loss</a:t>
+                      </a:r>
+                      <a:endParaRPr lang="en-US" sz="1300" dirty="0">
+                        <a:latin typeface="Calibri" charset="0"/>
+                        <a:ea typeface="Calibri" charset="0"/>
+                        <a:cs typeface="Calibri" charset="0"/>
+                      </a:endParaRPr>
+                    </a:p>
+                  </a:txBody>
+                  <a:tcPr marL="91440" marR="91440" marT="45720" marB="45720">
+                    <a:lnL w="12700" cap="flat" cmpd="sng" algn="ctr">
+                      <a:solidFill>
+                        <a:srgbClr val="2A3441"/>
+                      </a:solidFill>
+                      <a:prstDash val="solid"/>
+                      <a:round/>
+                      <a:headEnd type="none" w="med" len="med"/>
+                      <a:tailEnd type="none" w="med" len="med"/>
+                    </a:lnL>
+                    <a:lnR w="12700" cap="flat" cmpd="sng" algn="ctr">
+                      <a:solidFill>
+                        <a:srgbClr val="2A3441"/>
+                      </a:solidFill>
+                      <a:prstDash val="solid"/>
+                      <a:round/>
+                      <a:headEnd type="none" w="med" len="med"/>
+                      <a:tailEnd type="none" w="med" len="med"/>
+                    </a:lnR>
+                    <a:lnT w="12700" cap="flat" cmpd="sng" algn="ctr">
+                      <a:solidFill>
+                        <a:srgbClr val="2A3441"/>
+                      </a:solidFill>
+                      <a:prstDash val="solid"/>
+                      <a:round/>
+                      <a:headEnd type="none" w="med" len="med"/>
+                      <a:tailEnd type="none" w="med" len="med"/>
+                    </a:lnT>
+                    <a:lnB w="12700" cap="flat" cmpd="sng" algn="ctr">
+                      <a:solidFill>
+                        <a:srgbClr val="2A3441"/>
+                      </a:solidFill>
+                      <a:prstDash val="solid"/>
+                      <a:round/>
+                      <a:headEnd type="none" w="med" len="med"/>
+                      <a:tailEnd type="none" w="med" len="med"/>
+                    </a:lnB>
+                    <a:solidFill>
+                      <a:srgbClr val="141B24"/>
+                    </a:solidFill>
+                  </a:tcPr>
+                </a:tc>
+                <a:tc>
+                  <a:txBody>
+                    <a:bodyPr/>
+                    <a:lstStyle/>
+                    <a:p>
+                      <a:pPr indent="0" marL="0">
+                        <a:buNone/>
+                      </a:pPr>
+                      <a:r>
+                        <a:rPr lang="en-US" sz="1300" dirty="0">
+                          <a:solidFill>
+                            <a:srgbClr val="E6EDF3"/>
+                          </a:solidFill>
+                          <a:latin typeface="Calibri" pitchFamily="34" charset="0"/>
+                          <a:ea typeface="Calibri" pitchFamily="34" charset="-122"/>
+                          <a:cs typeface="Calibri" pitchFamily="34" charset="-120"/>
+                        </a:rPr>
+                        <a:t>7.5</a:t>
+                      </a:r>
+                      <a:endParaRPr lang="en-US" sz="1300" dirty="0">
+                        <a:latin typeface="Calibri" charset="0"/>
+                        <a:ea typeface="Calibri" charset="0"/>
+                        <a:cs typeface="Calibri" charset="0"/>
+                      </a:endParaRPr>
+                    </a:p>
+                  </a:txBody>
+                  <a:tcPr marL="91440" marR="91440" marT="45720" marB="45720">
+                    <a:lnL w="12700" cap="flat" cmpd="sng" algn="ctr">
+                      <a:solidFill>
+                        <a:srgbClr val="2A3441"/>
+                      </a:solidFill>
+                      <a:prstDash val="solid"/>
+                      <a:round/>
+                      <a:headEnd type="none" w="med" len="med"/>
+                      <a:tailEnd type="none" w="med" len="med"/>
+                    </a:lnL>
+                    <a:lnR w="12700" cap="flat" cmpd="sng" algn="ctr">
+                      <a:solidFill>
+                        <a:srgbClr val="2A3441"/>
+                      </a:solidFill>
+                      <a:prstDash val="solid"/>
+                      <a:round/>
+                      <a:headEnd type="none" w="med" len="med"/>
+                      <a:tailEnd type="none" w="med" len="med"/>
+                    </a:lnR>
+                    <a:lnT w="12700" cap="flat" cmpd="sng" algn="ctr">
+                      <a:solidFill>
+                        <a:srgbClr val="2A3441"/>
+                      </a:solidFill>
+                      <a:prstDash val="solid"/>
+                      <a:round/>
+                      <a:headEnd type="none" w="med" len="med"/>
+                      <a:tailEnd type="none" w="med" len="med"/>
+                    </a:lnT>
+                    <a:lnB w="12700" cap="flat" cmpd="sng" algn="ctr">
+                      <a:solidFill>
+                        <a:srgbClr val="2A3441"/>
+                      </a:solidFill>
+                      <a:prstDash val="solid"/>
+                      <a:round/>
+                      <a:headEnd type="none" w="med" len="med"/>
+                      <a:tailEnd type="none" w="med" len="med"/>
+                    </a:lnB>
+                    <a:solidFill>
+                      <a:srgbClr val="141B24"/>
+                    </a:solidFill>
+                  </a:tcPr>
+                </a:tc>
+                <a:tc>
+                  <a:txBody>
+                    <a:bodyPr/>
+                    <a:lstStyle/>
+                    <a:p>
+                      <a:pPr indent="0" marL="0">
+                        <a:buNone/>
+                      </a:pPr>
+                      <a:r>
+                        <a:rPr lang="en-US" sz="1300" dirty="0">
+                          <a:solidFill>
+                            <a:srgbClr val="E6EDF3"/>
+                          </a:solidFill>
+                          <a:latin typeface="Calibri" pitchFamily="34" charset="0"/>
+                          <a:ea typeface="Calibri" pitchFamily="34" charset="-122"/>
+                          <a:cs typeface="Calibri" pitchFamily="34" charset="-120"/>
+                        </a:rPr>
+                        <a:t>8.5</a:t>
+                      </a:r>
+                      <a:endParaRPr lang="en-US" sz="1300" dirty="0">
+                        <a:latin typeface="Calibri" charset="0"/>
+                        <a:ea typeface="Calibri" charset="0"/>
+                        <a:cs typeface="Calibri" charset="0"/>
+                      </a:endParaRPr>
+                    </a:p>
+                  </a:txBody>
+                  <a:tcPr marL="91440" marR="91440" marT="45720" marB="45720">
+                    <a:lnL w="12700" cap="flat" cmpd="sng" algn="ctr">
+                      <a:solidFill>
+                        <a:srgbClr val="2A3441"/>
+                      </a:solidFill>
+                      <a:prstDash val="solid"/>
+                      <a:round/>
+                      <a:headEnd type="none" w="med" len="med"/>
+                      <a:tailEnd type="none" w="med" len="med"/>
+                    </a:lnL>
+                    <a:lnR w="12700" cap="flat" cmpd="sng" algn="ctr">
+                      <a:solidFill>
+                        <a:srgbClr val="2A3441"/>
+                      </a:solidFill>
+                      <a:prstDash val="solid"/>
+                      <a:round/>
+                      <a:headEnd type="none" w="med" len="med"/>
+                      <a:tailEnd type="none" w="med" len="med"/>
+                    </a:lnR>
+                    <a:lnT w="12700" cap="flat" cmpd="sng" algn="ctr">
+                      <a:solidFill>
+                        <a:srgbClr val="2A3441"/>
+                      </a:solidFill>
+                      <a:prstDash val="solid"/>
+                      <a:round/>
+                      <a:headEnd type="none" w="med" len="med"/>
+                      <a:tailEnd type="none" w="med" len="med"/>
+                    </a:lnT>
+                    <a:lnB w="12700" cap="flat" cmpd="sng" algn="ctr">
+                      <a:solidFill>
+                        <a:srgbClr val="2A3441"/>
+                      </a:solidFill>
+                      <a:prstDash val="solid"/>
+                      <a:round/>
+                      <a:headEnd type="none" w="med" len="med"/>
+                      <a:tailEnd type="none" w="med" len="med"/>
+                    </a:lnB>
+                    <a:solidFill>
+                      <a:srgbClr val="141B24"/>
+                    </a:solidFill>
+                  </a:tcPr>
+                </a:tc>
+                <a:tc>
+                  <a:txBody>
+                    <a:bodyPr/>
+                    <a:lstStyle/>
+                    <a:p>
+                      <a:pPr indent="0" marL="0">
+                        <a:buNone/>
+                      </a:pPr>
+                      <a:r>
+                        <a:rPr lang="en-US" sz="1300" dirty="0">
+                          <a:solidFill>
+                            <a:srgbClr val="E6EDF3"/>
+                          </a:solidFill>
+                          <a:latin typeface="Calibri" pitchFamily="34" charset="0"/>
+                          <a:ea typeface="Calibri" pitchFamily="34" charset="-122"/>
+                          <a:cs typeface="Calibri" pitchFamily="34" charset="-120"/>
+                        </a:rPr>
+                        <a:t>5.9</a:t>
+                      </a:r>
+                      <a:endParaRPr lang="en-US" sz="1300" dirty="0">
+                        <a:latin typeface="Calibri" charset="0"/>
+                        <a:ea typeface="Calibri" charset="0"/>
+                        <a:cs typeface="Calibri" charset="0"/>
+                      </a:endParaRPr>
+                    </a:p>
+                  </a:txBody>
+                  <a:tcPr marL="91440" marR="91440" marT="45720" marB="45720">
+                    <a:lnL w="12700" cap="flat" cmpd="sng" algn="ctr">
+                      <a:solidFill>
+                        <a:srgbClr val="2A3441"/>
+                      </a:solidFill>
+                      <a:prstDash val="solid"/>
+                      <a:round/>
+                      <a:headEnd type="none" w="med" len="med"/>
+                      <a:tailEnd type="none" w="med" len="med"/>
+                    </a:lnL>
+                    <a:lnR w="12700" cap="flat" cmpd="sng" algn="ctr">
+                      <a:solidFill>
+                        <a:srgbClr val="2A3441"/>
+                      </a:solidFill>
+                      <a:prstDash val="solid"/>
+                      <a:round/>
+                      <a:headEnd type="none" w="med" len="med"/>
+                      <a:tailEnd type="none" w="med" len="med"/>
+                    </a:lnR>
+                    <a:lnT w="12700" cap="flat" cmpd="sng" algn="ctr">
+                      <a:solidFill>
+                        <a:srgbClr val="2A3441"/>
+                      </a:solidFill>
+                      <a:prstDash val="solid"/>
+                      <a:round/>
+                      <a:headEnd type="none" w="med" len="med"/>
+                      <a:tailEnd type="none" w="med" len="med"/>
+                    </a:lnT>
+                    <a:lnB w="12700" cap="flat" cmpd="sng" algn="ctr">
+                      <a:solidFill>
+                        <a:srgbClr val="2A3441"/>
+                      </a:solidFill>
+                      <a:prstDash val="solid"/>
+                      <a:round/>
+                      <a:headEnd type="none" w="med" len="med"/>
+                      <a:tailEnd type="none" w="med" len="med"/>
+                    </a:lnB>
+                    <a:solidFill>
+                      <a:srgbClr val="141B24"/>
+                    </a:solidFill>
+                  </a:tcPr>
+                </a:tc>
+              </a:tr>
+            </a:tbl>
+          </a:graphicData>
+        </a:graphic>
+      </p:graphicFrame>
+      <p:sp>
+        <p:nvSpPr>
+          <p:cNvPr id="5" name="Text 2"/>
           <p:cNvSpPr/>
           <p:nvPr/>
         </p:nvSpPr>
         <p:spPr>
           <a:xfrm>
-            <a:off x="548640" y="1371600"/>
-            <a:ext cx="5394960" cy="4206240"/>
+            <a:off x="7132320" y="1188720"/>
+            <a:ext cx="4663440" cy="4937760"/>
           </a:xfrm>
           <a:prstGeom prst="rect">
             <a:avLst/>
           </a:prstGeom>
-          <a:solidFill>
-            <a:srgbClr val="141B24"/>
-          </a:solidFill>
-          <a:ln w="12700">
-            <a:solidFill>
-              <a:srgbClr val="39FF88"/>
-            </a:solidFill>
-            <a:prstDash val="solid"/>
-          </a:ln>
+          <a:noFill/>
+          <a:ln/>
         </p:spPr>
-      </p:sp>
-      <p:sp>
-        <p:nvSpPr>
-          <p:cNvPr id="5" name="Text 3"/>
+        <p:txBody>
+          <a:bodyPr wrap="square" lIns="0" tIns="0" rIns="0" bIns="0" rtlCol="0" anchor="t"/>
+          <a:lstStyle/>
+          <a:p>
+            <a:pPr marL="342900" indent="-342900">
+              <a:spcAft>
+                <a:spcPts val="800"/>
+              </a:spcAft>
+              <a:buSzPct val="100000"/>
+              <a:buChar char="•"/>
+            </a:pPr>
+            <a:r>
+              <a:rPr lang="en-US" sz="1400" dirty="0">
+                <a:solidFill>
+                  <a:srgbClr val="E6EDF3"/>
+                </a:solidFill>
+                <a:latin typeface="Calibri" pitchFamily="34" charset="0"/>
+                <a:ea typeface="Calibri" pitchFamily="34" charset="-122"/>
+                <a:cs typeface="Calibri" pitchFamily="34" charset="-120"/>
+              </a:rPr>
+              <a:t>Limit found: window cap 32 caps the satellite path at about 107 packets/s; receive window raised to 256</a:t>
+            </a:r>
+            <a:endParaRPr lang="en-US" sz="1400" dirty="0"/>
+          </a:p>
+          <a:p>
+            <a:pPr marL="342900" indent="-342900">
+              <a:spcAft>
+                <a:spcPts val="800"/>
+              </a:spcAft>
+              <a:buSzPct val="100000"/>
+              <a:buChar char="•"/>
+            </a:pPr>
+            <a:r>
+              <a:rPr lang="en-US" sz="1400" dirty="0">
+                <a:solidFill>
+                  <a:srgbClr val="E6EDF3"/>
+                </a:solidFill>
+                <a:latin typeface="Calibri" pitchFamily="34" charset="0"/>
+                <a:ea typeface="Calibri" pitchFamily="34" charset="-122"/>
+                <a:cs typeface="Calibri" pitchFamily="34" charset="-120"/>
+              </a:rPr>
+              <a:t>Baseline tuned too: AIMD with cap 128 and a high start threshold</a:t>
+            </a:r>
+            <a:endParaRPr lang="en-US" sz="1400" dirty="0"/>
+          </a:p>
+          <a:p>
+            <a:pPr marL="342900" indent="-342900">
+              <a:spcAft>
+                <a:spcPts val="800"/>
+              </a:spcAft>
+              <a:buSzPct val="100000"/>
+              <a:buChar char="•"/>
+            </a:pPr>
+            <a:r>
+              <a:rPr lang="en-US" sz="1400" dirty="0">
+                <a:solidFill>
+                  <a:srgbClr val="E6EDF3"/>
+                </a:solidFill>
+                <a:latin typeface="Calibri" pitchFamily="34" charset="0"/>
+                <a:ea typeface="Calibri" pitchFamily="34" charset="-122"/>
+                <a:cs typeface="Calibri" pitchFamily="34" charset="-120"/>
+              </a:rPr>
+              <a:t>New default for the neural agent: cap 128 plus the AIMD hand-over</a:t>
+            </a:r>
+            <a:endParaRPr lang="en-US" sz="1400" dirty="0"/>
+          </a:p>
+          <a:p>
+            <a:pPr marL="342900" indent="-342900">
+              <a:spcAft>
+                <a:spcPts val="800"/>
+              </a:spcAft>
+              <a:buSzPct val="100000"/>
+              <a:buChar char="•"/>
+            </a:pPr>
+            <a:r>
+              <a:rPr lang="en-US" sz="1400" dirty="0">
+                <a:solidFill>
+                  <a:srgbClr val="E6EDF3"/>
+                </a:solidFill>
+                <a:latin typeface="Calibri" pitchFamily="34" charset="0"/>
+                <a:ea typeface="Calibri" pitchFamily="34" charset="-122"/>
+                <a:cs typeface="Calibri" pitchFamily="34" charset="-120"/>
+              </a:rPr>
+              <a:t>45 to 77% faster than tuned AIMD on lossy, satellite and fast paths; equal on 5G-like and hostile</a:t>
+            </a:r>
+            <a:endParaRPr lang="en-US" sz="1400" dirty="0"/>
+          </a:p>
+          <a:p>
+            <a:pPr marL="342900" indent="-342900">
+              <a:spcAft>
+                <a:spcPts val="800"/>
+              </a:spcAft>
+              <a:buSzPct val="100000"/>
+              <a:buChar char="•"/>
+            </a:pPr>
+            <a:r>
+              <a:rPr lang="en-US" sz="1400" dirty="0">
+                <a:solidFill>
+                  <a:srgbClr val="E6EDF3"/>
+                </a:solidFill>
+                <a:latin typeface="Calibri" pitchFamily="34" charset="0"/>
+                <a:ea typeface="Calibri" pitchFamily="34" charset="-122"/>
+                <a:cs typeface="Calibri" pitchFamily="34" charset="-120"/>
+              </a:rPr>
+              <a:t>CUBIC tried: mixed, never beat the agent. Cost of the agent: more retransmissions on the fast path</a:t>
+            </a:r>
+            <a:endParaRPr lang="en-US" sz="1400" dirty="0"/>
+          </a:p>
+        </p:txBody>
+      </p:sp>
+      <p:sp>
+        <p:nvSpPr>
+          <p:cNvPr id="6" name="Text 3"/>
           <p:cNvSpPr/>
           <p:nvPr/>
         </p:nvSpPr>
         <p:spPr>
           <a:xfrm>
-            <a:off x="731520" y="1508760"/>
-            <a:ext cx="5029200" cy="457200"/>
+            <a:off x="548640" y="4023360"/>
+            <a:ext cx="6217920" cy="731520"/>
           </a:xfrm>
           <a:prstGeom prst="rect">
             <a:avLst/>
@@ -16749,256 +18636,7 @@
               <a:buNone/>
             </a:pPr>
             <a:r>
-              <a:rPr lang="en-US" sz="2000" b="1" dirty="0">
-                <a:solidFill>
-                  <a:srgbClr val="39FF88"/>
-                </a:solidFill>
-                <a:latin typeface="Courier New" pitchFamily="34" charset="0"/>
-                <a:ea typeface="Courier New" pitchFamily="34" charset="-122"/>
-                <a:cs typeface="Courier New" pitchFamily="34" charset="-120"/>
-              </a:rPr>
-              <a:t>Learned</a:t>
-            </a:r>
-            <a:endParaRPr lang="en-US" sz="2000" dirty="0"/>
-          </a:p>
-        </p:txBody>
-      </p:sp>
-      <p:sp>
-        <p:nvSpPr>
-          <p:cNvPr id="6" name="Text 4"/>
-          <p:cNvSpPr/>
-          <p:nvPr/>
-        </p:nvSpPr>
-        <p:spPr>
-          <a:xfrm>
-            <a:off x="731520" y="2011680"/>
-            <a:ext cx="5029200" cy="3429000"/>
-          </a:xfrm>
-          <a:prstGeom prst="rect">
-            <a:avLst/>
-          </a:prstGeom>
-          <a:noFill/>
-          <a:ln/>
-        </p:spPr>
-        <p:txBody>
-          <a:bodyPr wrap="square" lIns="0" tIns="0" rIns="0" bIns="0" rtlCol="0" anchor="t"/>
-          <a:lstStyle/>
-          <a:p>
-            <a:pPr indent="0" marL="0">
-              <a:buNone/>
-            </a:pPr>
-            <a:r>
-              <a:rPr lang="en-US" sz="2000" dirty="0">
-                <a:solidFill>
-                  <a:srgbClr val="E6EDF3"/>
-                </a:solidFill>
-                <a:latin typeface="Calibri" pitchFamily="34" charset="0"/>
-                <a:ea typeface="Calibri" pitchFamily="34" charset="-122"/>
-                <a:cs typeface="Calibri" pitchFamily="34" charset="-120"/>
-              </a:rPr>
-              <a:t>Reliability is a set of simple rules working together.</a:t>
-            </a:r>
-            <a:endParaRPr lang="en-US" sz="2000" dirty="0"/>
-          </a:p>
-          <a:p>
-            <a:pPr indent="0" marL="0">
-              <a:buNone/>
-            </a:pPr>
-            <a:r>
-              <a:rPr lang="en-US" sz="2000" dirty="0">
-                <a:solidFill>
-                  <a:srgbClr val="E6EDF3"/>
-                </a:solidFill>
-                <a:latin typeface="Calibri" pitchFamily="34" charset="0"/>
-                <a:ea typeface="Calibri" pitchFamily="34" charset="-122"/>
-                <a:cs typeface="Calibri" pitchFamily="34" charset="-120"/>
-              </a:rPr>
-              <a:t>Congestion control matters as much as retransmission.</a:t>
-            </a:r>
-            <a:endParaRPr lang="en-US" sz="2000" dirty="0"/>
-          </a:p>
-          <a:p>
-            <a:pPr indent="0" marL="0">
-              <a:buNone/>
-            </a:pPr>
-            <a:r>
-              <a:rPr lang="en-US" sz="2000" dirty="0">
-                <a:solidFill>
-                  <a:srgbClr val="E6EDF3"/>
-                </a:solidFill>
-                <a:latin typeface="Calibri" pitchFamily="34" charset="0"/>
-                <a:ea typeface="Calibri" pitchFamily="34" charset="-122"/>
-                <a:cs typeface="Calibri" pitchFamily="34" charset="-120"/>
-              </a:rPr>
-              <a:t>Testing tools fail in surprising ways.</a:t>
-            </a:r>
-            <a:endParaRPr lang="en-US" sz="2000" dirty="0"/>
-          </a:p>
-        </p:txBody>
-      </p:sp>
-      <p:sp>
-        <p:nvSpPr>
-          <p:cNvPr id="7" name="Shape 5"/>
-          <p:cNvSpPr/>
-          <p:nvPr/>
-        </p:nvSpPr>
-        <p:spPr>
-          <a:xfrm>
-            <a:off x="6217920" y="1371600"/>
-            <a:ext cx="5394960" cy="4206240"/>
-          </a:xfrm>
-          <a:prstGeom prst="rect">
-            <a:avLst/>
-          </a:prstGeom>
-          <a:solidFill>
-            <a:srgbClr val="141B24"/>
-          </a:solidFill>
-          <a:ln w="12700">
-            <a:solidFill>
-              <a:srgbClr val="FFB000"/>
-            </a:solidFill>
-            <a:prstDash val="solid"/>
-          </a:ln>
-        </p:spPr>
-      </p:sp>
-      <p:sp>
-        <p:nvSpPr>
-          <p:cNvPr id="8" name="Text 6"/>
-          <p:cNvSpPr/>
-          <p:nvPr/>
-        </p:nvSpPr>
-        <p:spPr>
-          <a:xfrm>
-            <a:off x="6400800" y="1508760"/>
-            <a:ext cx="5029200" cy="457200"/>
-          </a:xfrm>
-          <a:prstGeom prst="rect">
-            <a:avLst/>
-          </a:prstGeom>
-          <a:noFill/>
-          <a:ln/>
-        </p:spPr>
-        <p:txBody>
-          <a:bodyPr wrap="square" lIns="0" tIns="0" rIns="0" bIns="0" rtlCol="0" anchor="ctr"/>
-          <a:lstStyle/>
-          <a:p>
-            <a:pPr indent="0" marL="0">
-              <a:buNone/>
-            </a:pPr>
-            <a:r>
-              <a:rPr lang="en-US" sz="2000" b="1" dirty="0">
-                <a:solidFill>
-                  <a:srgbClr val="FFB000"/>
-                </a:solidFill>
-                <a:latin typeface="Courier New" pitchFamily="34" charset="0"/>
-                <a:ea typeface="Courier New" pitchFamily="34" charset="-122"/>
-                <a:cs typeface="Courier New" pitchFamily="34" charset="-120"/>
-              </a:rPr>
-              <a:t>Next</a:t>
-            </a:r>
-            <a:endParaRPr lang="en-US" sz="2000" dirty="0"/>
-          </a:p>
-        </p:txBody>
-      </p:sp>
-      <p:sp>
-        <p:nvSpPr>
-          <p:cNvPr id="9" name="Text 7"/>
-          <p:cNvSpPr/>
-          <p:nvPr/>
-        </p:nvSpPr>
-        <p:spPr>
-          <a:xfrm>
-            <a:off x="6400800" y="2011680"/>
-            <a:ext cx="5029200" cy="3429000"/>
-          </a:xfrm>
-          <a:prstGeom prst="rect">
-            <a:avLst/>
-          </a:prstGeom>
-          <a:noFill/>
-          <a:ln/>
-        </p:spPr>
-        <p:txBody>
-          <a:bodyPr wrap="square" lIns="0" tIns="0" rIns="0" bIns="0" rtlCol="0" anchor="t"/>
-          <a:lstStyle/>
-          <a:p>
-            <a:pPr indent="0" marL="0">
-              <a:buNone/>
-            </a:pPr>
-            <a:r>
-              <a:rPr lang="en-US" sz="2000" dirty="0">
-                <a:solidFill>
-                  <a:srgbClr val="E6EDF3"/>
-                </a:solidFill>
-                <a:latin typeface="Calibri" pitchFamily="34" charset="0"/>
-                <a:ea typeface="Calibri" pitchFamily="34" charset="-122"/>
-                <a:cs typeface="Calibri" pitchFamily="34" charset="-120"/>
-              </a:rPr>
-              <a:t>Train the neural agent in C / on real netem</a:t>
-            </a:r>
-            <a:endParaRPr lang="en-US" sz="2000" dirty="0"/>
-          </a:p>
-          <a:p>
-            <a:pPr indent="0" marL="0">
-              <a:buNone/>
-            </a:pPr>
-            <a:r>
-              <a:rPr lang="en-US" sz="2000" dirty="0">
-                <a:solidFill>
-                  <a:srgbClr val="E6EDF3"/>
-                </a:solidFill>
-                <a:latin typeface="Calibri" pitchFamily="34" charset="0"/>
-                <a:ea typeface="Calibri" pitchFamily="34" charset="-122"/>
-                <a:cs typeface="Calibri" pitchFamily="34" charset="-120"/>
-              </a:rPr>
-              <a:t>Selective ACK where throughput limits the path</a:t>
-            </a:r>
-            <a:endParaRPr lang="en-US" sz="2000" dirty="0"/>
-          </a:p>
-          <a:p>
-            <a:pPr indent="0" marL="0">
-              <a:buNone/>
-            </a:pPr>
-            <a:r>
-              <a:rPr lang="en-US" sz="2000" dirty="0">
-                <a:solidFill>
-                  <a:srgbClr val="E6EDF3"/>
-                </a:solidFill>
-                <a:latin typeface="Calibri" pitchFamily="34" charset="0"/>
-                <a:ea typeface="Calibri" pitchFamily="34" charset="-122"/>
-                <a:cs typeface="Calibri" pitchFamily="34" charset="-120"/>
-              </a:rPr>
-              <a:t>Kernel netem and real multi-machine tests</a:t>
-            </a:r>
-            <a:endParaRPr lang="en-US" sz="2000" dirty="0"/>
-          </a:p>
-        </p:txBody>
-      </p:sp>
-      <p:sp>
-        <p:nvSpPr>
-          <p:cNvPr id="10" name="Text 8"/>
-          <p:cNvSpPr/>
-          <p:nvPr/>
-        </p:nvSpPr>
-        <p:spPr>
-          <a:xfrm>
-            <a:off x="548640" y="5852160"/>
-            <a:ext cx="10972800" cy="365760"/>
-          </a:xfrm>
-          <a:prstGeom prst="rect">
-            <a:avLst/>
-          </a:prstGeom>
-          <a:noFill/>
-          <a:ln/>
-        </p:spPr>
-        <p:txBody>
-          <a:bodyPr wrap="square" lIns="0" tIns="0" rIns="0" bIns="0" rtlCol="0" anchor="ctr"/>
-          <a:lstStyle/>
-          <a:p>
-            <a:pPr indent="0" marL="0">
-              <a:buNone/>
-            </a:pPr>
-            <a:r>
-              <a:rPr lang="en-US" sz="1400" dirty="0">
+              <a:rPr lang="en-US" sz="1300" dirty="0">
                 <a:solidFill>
                   <a:srgbClr val="8B98A5"/>
                 </a:solidFill>
@@ -17006,9 +18644,9 @@
                 <a:ea typeface="Calibri" pitchFamily="34" charset="-122"/>
                 <a:cs typeface="Calibri" pitchFamily="34" charset="-120"/>
               </a:rPr>
-              <a:t>Limits: Go-Back-N wastes bandwidth and suffers under reordering; C tests use an emulated path; the tabular agent did not beat AIMD in C.</a:t>
-            </a:r>
-            <a:endParaRPr lang="en-US" sz="1400" dirty="0"/>
+              <a:t>10 runs per cell (hostile: 5), 95% intervals. Flags: --maxcwnd, --ssthresh, --hybrid, --mode cubic. Code: eval_perf*.sh.</a:t>
+            </a:r>
+            <a:endParaRPr lang="en-US" sz="1300" dirty="0"/>
           </a:p>
         </p:txBody>
       </p:sp>
@@ -17052,8 +18690,8 @@
         </p:nvSpPr>
         <p:spPr>
           <a:xfrm>
-            <a:off x="731520" y="2103120"/>
-            <a:ext cx="10058400" cy="1097280"/>
+            <a:off x="548640" y="320040"/>
+            <a:ext cx="11064240" cy="731520"/>
           </a:xfrm>
           <a:prstGeom prst="rect">
             <a:avLst/>
@@ -17069,7 +18707,7 @@
               <a:buNone/>
             </a:pPr>
             <a:r>
-              <a:rPr lang="en-US" sz="6400" b="1" dirty="0">
+              <a:rPr lang="en-US" sz="3000" b="1" dirty="0">
                 <a:solidFill>
                   <a:srgbClr val="39FF88"/>
                 </a:solidFill>
@@ -17077,9 +18715,9 @@
                 <a:ea typeface="Courier New" pitchFamily="34" charset="-122"/>
                 <a:cs typeface="Courier New" pitchFamily="34" charset="-120"/>
               </a:rPr>
-              <a:t>Thank you</a:t>
-            </a:r>
-            <a:endParaRPr lang="en-US" sz="6400" dirty="0"/>
+              <a:t>Learnings and future work</a:t>
+            </a:r>
+            <a:endParaRPr lang="en-US" sz="3000" dirty="0"/>
           </a:p>
         </p:txBody>
       </p:sp>
@@ -17091,8 +18729,8 @@
         </p:nvSpPr>
         <p:spPr>
           <a:xfrm>
-            <a:off x="731520" y="3474720"/>
-            <a:ext cx="10058400" cy="548640"/>
+            <a:off x="9418320" y="6446520"/>
+            <a:ext cx="2377440" cy="274320"/>
           </a:xfrm>
           <a:prstGeom prst="rect">
             <a:avLst/>
@@ -17104,34 +18742,59 @@
           <a:bodyPr wrap="square" lIns="0" tIns="0" rIns="0" bIns="0" rtlCol="0" anchor="ctr"/>
           <a:lstStyle/>
           <a:p>
-            <a:pPr indent="0" marL="0">
+            <a:pPr algn="r" indent="0" marL="0">
               <a:buNone/>
             </a:pPr>
             <a:r>
-              <a:rPr lang="en-US" sz="2600" dirty="0">
+              <a:rPr lang="en-US" sz="1000" dirty="0">
                 <a:solidFill>
-                  <a:srgbClr val="E6EDF3"/>
+                  <a:srgbClr val="8B98A5"/>
                 </a:solidFill>
                 <a:latin typeface="Courier New" pitchFamily="34" charset="0"/>
                 <a:ea typeface="Courier New" pitchFamily="34" charset="-122"/>
                 <a:cs typeface="Courier New" pitchFamily="34" charset="-120"/>
               </a:rPr>
-              <a:t>github.com/Capsturrrr/rudp</a:t>
-            </a:r>
-            <a:endParaRPr lang="en-US" sz="2600" dirty="0"/>
+              <a:t>27 / 28   Smart-RUDP</a:t>
+            </a:r>
+            <a:endParaRPr lang="en-US" sz="1000" dirty="0"/>
           </a:p>
         </p:txBody>
       </p:sp>
       <p:sp>
         <p:nvSpPr>
-          <p:cNvPr id="4" name="Text 2"/>
+          <p:cNvPr id="4" name="Shape 2"/>
           <p:cNvSpPr/>
           <p:nvPr/>
         </p:nvSpPr>
         <p:spPr>
           <a:xfrm>
-            <a:off x="731520" y="4206240"/>
-            <a:ext cx="10058400" cy="457200"/>
+            <a:off x="548640" y="1371600"/>
+            <a:ext cx="5394960" cy="4206240"/>
+          </a:xfrm>
+          <a:prstGeom prst="rect">
+            <a:avLst/>
+          </a:prstGeom>
+          <a:solidFill>
+            <a:srgbClr val="141B24"/>
+          </a:solidFill>
+          <a:ln w="12700">
+            <a:solidFill>
+              <a:srgbClr val="39FF88"/>
+            </a:solidFill>
+            <a:prstDash val="solid"/>
+          </a:ln>
+        </p:spPr>
+      </p:sp>
+      <p:sp>
+        <p:nvSpPr>
+          <p:cNvPr id="5" name="Text 3"/>
+          <p:cNvSpPr/>
+          <p:nvPr/>
+        </p:nvSpPr>
+        <p:spPr>
+          <a:xfrm>
+            <a:off x="731520" y="1508760"/>
+            <a:ext cx="5029200" cy="457200"/>
           </a:xfrm>
           <a:prstGeom prst="rect">
             <a:avLst/>
@@ -17147,7 +18810,256 @@
               <a:buNone/>
             </a:pPr>
             <a:r>
-              <a:rPr lang="en-US" sz="1800" dirty="0">
+              <a:rPr lang="en-US" sz="2000" b="1" dirty="0">
+                <a:solidFill>
+                  <a:srgbClr val="39FF88"/>
+                </a:solidFill>
+                <a:latin typeface="Courier New" pitchFamily="34" charset="0"/>
+                <a:ea typeface="Courier New" pitchFamily="34" charset="-122"/>
+                <a:cs typeface="Courier New" pitchFamily="34" charset="-120"/>
+              </a:rPr>
+              <a:t>Learned</a:t>
+            </a:r>
+            <a:endParaRPr lang="en-US" sz="2000" dirty="0"/>
+          </a:p>
+        </p:txBody>
+      </p:sp>
+      <p:sp>
+        <p:nvSpPr>
+          <p:cNvPr id="6" name="Text 4"/>
+          <p:cNvSpPr/>
+          <p:nvPr/>
+        </p:nvSpPr>
+        <p:spPr>
+          <a:xfrm>
+            <a:off x="731520" y="2011680"/>
+            <a:ext cx="5029200" cy="3429000"/>
+          </a:xfrm>
+          <a:prstGeom prst="rect">
+            <a:avLst/>
+          </a:prstGeom>
+          <a:noFill/>
+          <a:ln/>
+        </p:spPr>
+        <p:txBody>
+          <a:bodyPr wrap="square" lIns="0" tIns="0" rIns="0" bIns="0" rtlCol="0" anchor="t"/>
+          <a:lstStyle/>
+          <a:p>
+            <a:pPr indent="0" marL="0">
+              <a:buNone/>
+            </a:pPr>
+            <a:r>
+              <a:rPr lang="en-US" sz="2000" dirty="0">
+                <a:solidFill>
+                  <a:srgbClr val="E6EDF3"/>
+                </a:solidFill>
+                <a:latin typeface="Calibri" pitchFamily="34" charset="0"/>
+                <a:ea typeface="Calibri" pitchFamily="34" charset="-122"/>
+                <a:cs typeface="Calibri" pitchFamily="34" charset="-120"/>
+              </a:rPr>
+              <a:t>Reliability is a set of simple rules working together.</a:t>
+            </a:r>
+            <a:endParaRPr lang="en-US" sz="2000" dirty="0"/>
+          </a:p>
+          <a:p>
+            <a:pPr indent="0" marL="0">
+              <a:buNone/>
+            </a:pPr>
+            <a:r>
+              <a:rPr lang="en-US" sz="2000" dirty="0">
+                <a:solidFill>
+                  <a:srgbClr val="E6EDF3"/>
+                </a:solidFill>
+                <a:latin typeface="Calibri" pitchFamily="34" charset="0"/>
+                <a:ea typeface="Calibri" pitchFamily="34" charset="-122"/>
+                <a:cs typeface="Calibri" pitchFamily="34" charset="-120"/>
+              </a:rPr>
+              <a:t>Congestion control matters as much as retransmission.</a:t>
+            </a:r>
+            <a:endParaRPr lang="en-US" sz="2000" dirty="0"/>
+          </a:p>
+          <a:p>
+            <a:pPr indent="0" marL="0">
+              <a:buNone/>
+            </a:pPr>
+            <a:r>
+              <a:rPr lang="en-US" sz="2000" dirty="0">
+                <a:solidFill>
+                  <a:srgbClr val="E6EDF3"/>
+                </a:solidFill>
+                <a:latin typeface="Calibri" pitchFamily="34" charset="0"/>
+                <a:ea typeface="Calibri" pitchFamily="34" charset="-122"/>
+                <a:cs typeface="Calibri" pitchFamily="34" charset="-120"/>
+              </a:rPr>
+              <a:t>Testing tools fail in surprising ways.</a:t>
+            </a:r>
+            <a:endParaRPr lang="en-US" sz="2000" dirty="0"/>
+          </a:p>
+        </p:txBody>
+      </p:sp>
+      <p:sp>
+        <p:nvSpPr>
+          <p:cNvPr id="7" name="Shape 5"/>
+          <p:cNvSpPr/>
+          <p:nvPr/>
+        </p:nvSpPr>
+        <p:spPr>
+          <a:xfrm>
+            <a:off x="6217920" y="1371600"/>
+            <a:ext cx="5394960" cy="4206240"/>
+          </a:xfrm>
+          <a:prstGeom prst="rect">
+            <a:avLst/>
+          </a:prstGeom>
+          <a:solidFill>
+            <a:srgbClr val="141B24"/>
+          </a:solidFill>
+          <a:ln w="12700">
+            <a:solidFill>
+              <a:srgbClr val="FFB000"/>
+            </a:solidFill>
+            <a:prstDash val="solid"/>
+          </a:ln>
+        </p:spPr>
+      </p:sp>
+      <p:sp>
+        <p:nvSpPr>
+          <p:cNvPr id="8" name="Text 6"/>
+          <p:cNvSpPr/>
+          <p:nvPr/>
+        </p:nvSpPr>
+        <p:spPr>
+          <a:xfrm>
+            <a:off x="6400800" y="1508760"/>
+            <a:ext cx="5029200" cy="457200"/>
+          </a:xfrm>
+          <a:prstGeom prst="rect">
+            <a:avLst/>
+          </a:prstGeom>
+          <a:noFill/>
+          <a:ln/>
+        </p:spPr>
+        <p:txBody>
+          <a:bodyPr wrap="square" lIns="0" tIns="0" rIns="0" bIns="0" rtlCol="0" anchor="ctr"/>
+          <a:lstStyle/>
+          <a:p>
+            <a:pPr indent="0" marL="0">
+              <a:buNone/>
+            </a:pPr>
+            <a:r>
+              <a:rPr lang="en-US" sz="2000" b="1" dirty="0">
+                <a:solidFill>
+                  <a:srgbClr val="FFB000"/>
+                </a:solidFill>
+                <a:latin typeface="Courier New" pitchFamily="34" charset="0"/>
+                <a:ea typeface="Courier New" pitchFamily="34" charset="-122"/>
+                <a:cs typeface="Courier New" pitchFamily="34" charset="-120"/>
+              </a:rPr>
+              <a:t>Next</a:t>
+            </a:r>
+            <a:endParaRPr lang="en-US" sz="2000" dirty="0"/>
+          </a:p>
+        </p:txBody>
+      </p:sp>
+      <p:sp>
+        <p:nvSpPr>
+          <p:cNvPr id="9" name="Text 7"/>
+          <p:cNvSpPr/>
+          <p:nvPr/>
+        </p:nvSpPr>
+        <p:spPr>
+          <a:xfrm>
+            <a:off x="6400800" y="2011680"/>
+            <a:ext cx="5029200" cy="3429000"/>
+          </a:xfrm>
+          <a:prstGeom prst="rect">
+            <a:avLst/>
+          </a:prstGeom>
+          <a:noFill/>
+          <a:ln/>
+        </p:spPr>
+        <p:txBody>
+          <a:bodyPr wrap="square" lIns="0" tIns="0" rIns="0" bIns="0" rtlCol="0" anchor="t"/>
+          <a:lstStyle/>
+          <a:p>
+            <a:pPr indent="0" marL="0">
+              <a:buNone/>
+            </a:pPr>
+            <a:r>
+              <a:rPr lang="en-US" sz="2000" dirty="0">
+                <a:solidFill>
+                  <a:srgbClr val="E6EDF3"/>
+                </a:solidFill>
+                <a:latin typeface="Calibri" pitchFamily="34" charset="0"/>
+                <a:ea typeface="Calibri" pitchFamily="34" charset="-122"/>
+                <a:cs typeface="Calibri" pitchFamily="34" charset="-120"/>
+              </a:rPr>
+              <a:t>Train the neural agent in C / on real netem</a:t>
+            </a:r>
+            <a:endParaRPr lang="en-US" sz="2000" dirty="0"/>
+          </a:p>
+          <a:p>
+            <a:pPr indent="0" marL="0">
+              <a:buNone/>
+            </a:pPr>
+            <a:r>
+              <a:rPr lang="en-US" sz="2000" dirty="0">
+                <a:solidFill>
+                  <a:srgbClr val="E6EDF3"/>
+                </a:solidFill>
+                <a:latin typeface="Calibri" pitchFamily="34" charset="0"/>
+                <a:ea typeface="Calibri" pitchFamily="34" charset="-122"/>
+                <a:cs typeface="Calibri" pitchFamily="34" charset="-120"/>
+              </a:rPr>
+              <a:t>Selective ACK where throughput limits the path</a:t>
+            </a:r>
+            <a:endParaRPr lang="en-US" sz="2000" dirty="0"/>
+          </a:p>
+          <a:p>
+            <a:pPr indent="0" marL="0">
+              <a:buNone/>
+            </a:pPr>
+            <a:r>
+              <a:rPr lang="en-US" sz="2000" dirty="0">
+                <a:solidFill>
+                  <a:srgbClr val="E6EDF3"/>
+                </a:solidFill>
+                <a:latin typeface="Calibri" pitchFamily="34" charset="0"/>
+                <a:ea typeface="Calibri" pitchFamily="34" charset="-122"/>
+                <a:cs typeface="Calibri" pitchFamily="34" charset="-120"/>
+              </a:rPr>
+              <a:t>Kernel netem and real multi-machine tests</a:t>
+            </a:r>
+            <a:endParaRPr lang="en-US" sz="2000" dirty="0"/>
+          </a:p>
+        </p:txBody>
+      </p:sp>
+      <p:sp>
+        <p:nvSpPr>
+          <p:cNvPr id="10" name="Text 8"/>
+          <p:cNvSpPr/>
+          <p:nvPr/>
+        </p:nvSpPr>
+        <p:spPr>
+          <a:xfrm>
+            <a:off x="548640" y="5852160"/>
+            <a:ext cx="10972800" cy="365760"/>
+          </a:xfrm>
+          <a:prstGeom prst="rect">
+            <a:avLst/>
+          </a:prstGeom>
+          <a:noFill/>
+          <a:ln/>
+        </p:spPr>
+        <p:txBody>
+          <a:bodyPr wrap="square" lIns="0" tIns="0" rIns="0" bIns="0" rtlCol="0" anchor="ctr"/>
+          <a:lstStyle/>
+          <a:p>
+            <a:pPr indent="0" marL="0">
+              <a:buNone/>
+            </a:pPr>
+            <a:r>
+              <a:rPr lang="en-US" sz="1400" dirty="0">
                 <a:solidFill>
                   <a:srgbClr val="8B98A5"/>
                 </a:solidFill>
@@ -17155,9 +19067,9 @@
                 <a:ea typeface="Calibri" pitchFamily="34" charset="-122"/>
                 <a:cs typeface="Calibri" pitchFamily="34" charset="-120"/>
               </a:rPr>
-              <a:t>Harshavardhan Mallela   Rohit Arya   Shloak Sinha</a:t>
-            </a:r>
-            <a:endParaRPr lang="en-US" sz="1800" dirty="0"/>
+              <a:t>Limits: Go-Back-N wastes bandwidth and suffers under reordering; C tests use an emulated path; the tabular agent did not beat AIMD in C.</a:t>
+            </a:r>
+            <a:endParaRPr lang="en-US" sz="1400" dirty="0"/>
           </a:p>
         </p:txBody>
       </p:sp>
@@ -17201,6 +19113,155 @@
         </p:nvSpPr>
         <p:spPr>
           <a:xfrm>
+            <a:off x="731520" y="2103120"/>
+            <a:ext cx="10058400" cy="1097280"/>
+          </a:xfrm>
+          <a:prstGeom prst="rect">
+            <a:avLst/>
+          </a:prstGeom>
+          <a:noFill/>
+          <a:ln/>
+        </p:spPr>
+        <p:txBody>
+          <a:bodyPr wrap="square" lIns="0" tIns="0" rIns="0" bIns="0" rtlCol="0" anchor="ctr"/>
+          <a:lstStyle/>
+          <a:p>
+            <a:pPr indent="0" marL="0">
+              <a:buNone/>
+            </a:pPr>
+            <a:r>
+              <a:rPr lang="en-US" sz="6400" b="1" dirty="0">
+                <a:solidFill>
+                  <a:srgbClr val="39FF88"/>
+                </a:solidFill>
+                <a:latin typeface="Courier New" pitchFamily="34" charset="0"/>
+                <a:ea typeface="Courier New" pitchFamily="34" charset="-122"/>
+                <a:cs typeface="Courier New" pitchFamily="34" charset="-120"/>
+              </a:rPr>
+              <a:t>Thank you</a:t>
+            </a:r>
+            <a:endParaRPr lang="en-US" sz="6400" dirty="0"/>
+          </a:p>
+        </p:txBody>
+      </p:sp>
+      <p:sp>
+        <p:nvSpPr>
+          <p:cNvPr id="3" name="Text 1"/>
+          <p:cNvSpPr/>
+          <p:nvPr/>
+        </p:nvSpPr>
+        <p:spPr>
+          <a:xfrm>
+            <a:off x="731520" y="3474720"/>
+            <a:ext cx="10058400" cy="548640"/>
+          </a:xfrm>
+          <a:prstGeom prst="rect">
+            <a:avLst/>
+          </a:prstGeom>
+          <a:noFill/>
+          <a:ln/>
+        </p:spPr>
+        <p:txBody>
+          <a:bodyPr wrap="square" lIns="0" tIns="0" rIns="0" bIns="0" rtlCol="0" anchor="ctr"/>
+          <a:lstStyle/>
+          <a:p>
+            <a:pPr indent="0" marL="0">
+              <a:buNone/>
+            </a:pPr>
+            <a:r>
+              <a:rPr lang="en-US" sz="2600" dirty="0">
+                <a:solidFill>
+                  <a:srgbClr val="E6EDF3"/>
+                </a:solidFill>
+                <a:latin typeface="Courier New" pitchFamily="34" charset="0"/>
+                <a:ea typeface="Courier New" pitchFamily="34" charset="-122"/>
+                <a:cs typeface="Courier New" pitchFamily="34" charset="-120"/>
+              </a:rPr>
+              <a:t>github.com/Capsturrrr/rudp</a:t>
+            </a:r>
+            <a:endParaRPr lang="en-US" sz="2600" dirty="0"/>
+          </a:p>
+        </p:txBody>
+      </p:sp>
+      <p:sp>
+        <p:nvSpPr>
+          <p:cNvPr id="4" name="Text 2"/>
+          <p:cNvSpPr/>
+          <p:nvPr/>
+        </p:nvSpPr>
+        <p:spPr>
+          <a:xfrm>
+            <a:off x="731520" y="4206240"/>
+            <a:ext cx="10058400" cy="457200"/>
+          </a:xfrm>
+          <a:prstGeom prst="rect">
+            <a:avLst/>
+          </a:prstGeom>
+          <a:noFill/>
+          <a:ln/>
+        </p:spPr>
+        <p:txBody>
+          <a:bodyPr wrap="square" lIns="0" tIns="0" rIns="0" bIns="0" rtlCol="0" anchor="ctr"/>
+          <a:lstStyle/>
+          <a:p>
+            <a:pPr indent="0" marL="0">
+              <a:buNone/>
+            </a:pPr>
+            <a:r>
+              <a:rPr lang="en-US" sz="1800" dirty="0">
+                <a:solidFill>
+                  <a:srgbClr val="8B98A5"/>
+                </a:solidFill>
+                <a:latin typeface="Calibri" pitchFamily="34" charset="0"/>
+                <a:ea typeface="Calibri" pitchFamily="34" charset="-122"/>
+                <a:cs typeface="Calibri" pitchFamily="34" charset="-120"/>
+              </a:rPr>
+              <a:t>Harshavardhan Mallela   Rohit Arya   Shloak Sinha</a:t>
+            </a:r>
+            <a:endParaRPr lang="en-US" sz="1800" dirty="0"/>
+          </a:p>
+        </p:txBody>
+      </p:sp>
+    </p:spTree>
+  </p:cSld>
+  <p:clrMapOvr>
+    <a:masterClrMapping/>
+  </p:clrMapOvr>
+</p:sld>
+</file>
+
+<file path=ppt/slides/slide29.xml><?xml version="1.0" encoding="utf-8"?>
+<p:sld xmlns:a="http://schemas.openxmlformats.org/drawingml/2006/main" xmlns:r="http://schemas.openxmlformats.org/officeDocument/2006/relationships" xmlns:p="http://schemas.openxmlformats.org/presentationml/2006/main">
+  <p:cSld name="Slide 29">
+    <p:bg>
+      <p:bgPr>
+        <a:solidFill>
+          <a:srgbClr val="0B0F14"/>
+        </a:solidFill>
+      </p:bgPr>
+    </p:bg>
+    <p:spTree>
+      <p:nvGrpSpPr>
+        <p:cNvPr id="1" name=""/>
+        <p:cNvGrpSpPr/>
+        <p:nvPr/>
+      </p:nvGrpSpPr>
+      <p:grpSpPr>
+        <a:xfrm>
+          <a:off x="0" y="0"/>
+          <a:ext cx="0" cy="0"/>
+          <a:chOff x="0" y="0"/>
+          <a:chExt cx="0" cy="0"/>
+        </a:xfrm>
+      </p:grpSpPr>
+      <p:sp>
+        <p:nvSpPr>
+          <p:cNvPr id="2" name="Text 0"/>
+          <p:cNvSpPr/>
+          <p:nvPr/>
+        </p:nvSpPr>
+        <p:spPr>
+          <a:xfrm>
             <a:off x="548640" y="320040"/>
             <a:ext cx="11064240" cy="731520"/>
           </a:xfrm>
@@ -17505,7 +19566,7 @@
                 <a:ea typeface="Courier New" pitchFamily="34" charset="-122"/>
                 <a:cs typeface="Courier New" pitchFamily="34" charset="-120"/>
               </a:rPr>
-              <a:t>3 / 27   Smart-RUDP</a:t>
+              <a:t>3 / 28   Smart-RUDP</a:t>
             </a:r>
             <a:endParaRPr lang="en-US" sz="1000" dirty="0"/>
           </a:p>
@@ -17899,7 +19960,7 @@
                 <a:ea typeface="Courier New" pitchFamily="34" charset="-122"/>
                 <a:cs typeface="Courier New" pitchFamily="34" charset="-120"/>
               </a:rPr>
-              <a:t>4 / 27   Smart-RUDP</a:t>
+              <a:t>4 / 28   Smart-RUDP</a:t>
             </a:r>
             <a:endParaRPr lang="en-US" sz="1000" dirty="0"/>
           </a:p>
@@ -18460,7 +20521,7 @@
                 <a:ea typeface="Courier New" pitchFamily="34" charset="-122"/>
                 <a:cs typeface="Courier New" pitchFamily="34" charset="-120"/>
               </a:rPr>
-              <a:t>5 / 27   Smart-RUDP</a:t>
+              <a:t>5 / 28   Smart-RUDP</a:t>
             </a:r>
             <a:endParaRPr lang="en-US" sz="1000" dirty="0"/>
           </a:p>
@@ -19899,7 +21960,7 @@
                 <a:ea typeface="Courier New" pitchFamily="34" charset="-122"/>
                 <a:cs typeface="Courier New" pitchFamily="34" charset="-120"/>
               </a:rPr>
-              <a:t>6 / 27   Smart-RUDP</a:t>
+              <a:t>6 / 28   Smart-RUDP</a:t>
             </a:r>
             <a:endParaRPr lang="en-US" sz="1000" dirty="0"/>
           </a:p>
@@ -21134,7 +23195,7 @@
                 <a:ea typeface="Courier New" pitchFamily="34" charset="-122"/>
                 <a:cs typeface="Courier New" pitchFamily="34" charset="-120"/>
               </a:rPr>
-              <a:t>7 / 27   Smart-RUDP</a:t>
+              <a:t>7 / 28   Smart-RUDP</a:t>
             </a:r>
             <a:endParaRPr lang="en-US" sz="1000" dirty="0"/>
           </a:p>
@@ -21577,7 +23638,7 @@
                 <a:ea typeface="Courier New" pitchFamily="34" charset="-122"/>
                 <a:cs typeface="Courier New" pitchFamily="34" charset="-120"/>
               </a:rPr>
-              <a:t>8 / 27   Smart-RUDP</a:t>
+              <a:t>8 / 28   Smart-RUDP</a:t>
             </a:r>
             <a:endParaRPr lang="en-US" sz="1000" dirty="0"/>
           </a:p>
@@ -21877,7 +23938,7 @@
                 <a:ea typeface="Courier New" pitchFamily="34" charset="-122"/>
                 <a:cs typeface="Courier New" pitchFamily="34" charset="-120"/>
               </a:rPr>
-              <a:t>9 / 27   Smart-RUDP</a:t>
+              <a:t>9 / 28   Smart-RUDP</a:t>
             </a:r>
             <a:endParaRPr lang="en-US" sz="1000" dirty="0"/>
           </a:p>

--- a/docs/RUDP_Presentation_with_notes.pptx
+++ b/docs/RUDP_Presentation_with_notes.pptx
@@ -34,9 +34,12 @@
     <p:sldId id="282" r:id="rId28"/>
     <p:sldId id="283" r:id="rId29"/>
     <p:sldId id="284" r:id="rId30"/>
+    <p:sldId id="285" r:id="rId31"/>
+    <p:sldId id="286" r:id="rId32"/>
+    <p:sldId id="287" r:id="rId33"/>
   </p:sldIdLst>
   <p:notesMasterIdLst>
-    <p:notesMasterId r:id="rId31"/>
+    <p:notesMasterId r:id="rId34"/>
   </p:notesMasterIdLst>
   <p:sldSz cx="12192000" cy="6858000"/>
   <p:notesSz cx="6858000" cy="12192000"/>
@@ -133,6 +136,307 @@
     </a:lvl9pPr>
   </p:defaultTextStyle>
 </p:presentation>
+</file>
+
+<file path=ppt/charts/chart1.xml><?xml version="1.0" encoding="utf-8"?>
+<c:chartSpace xmlns:c="http://schemas.openxmlformats.org/drawingml/2006/chart" xmlns:a="http://schemas.openxmlformats.org/drawingml/2006/main" xmlns:r="http://schemas.openxmlformats.org/officeDocument/2006/relationships">
+  <c:date1904 val="0"/>
+  <c:roundedCorners val="1"/>
+  <c:chart>
+    <c:title>
+      <c:tx>
+        <c:rich>
+          <a:bodyPr/>
+          <a:lstStyle/>
+          <a:p>
+            <a:pPr>
+              <a:defRPr sz="1400" b="0" i="0" u="none" strike="noStrike">
+                <a:solidFill>
+                  <a:srgbClr val="E6EDF3"/>
+                </a:solidFill>
+                <a:latin typeface="Arial"/>
+              </a:defRPr>
+            </a:pPr>
+            <a:r>
+              <a:rPr sz="1400" b="0" i="0" u="none" strike="noStrike">
+                <a:solidFill>
+                  <a:srgbClr val="E6EDF3"/>
+                </a:solidFill>
+                <a:latin typeface="Arial"/>
+              </a:rPr>
+              <a:t>Ablation, 100 random held-out paths</a:t>
+            </a:r>
+          </a:p>
+        </c:rich>
+      </c:tx>
+      <c:layout/>
+      <c:overlay val="0"/>
+    </c:title>
+    <c:autoTitleDeleted val="0"/>
+    <c:plotArea>
+      <c:layout/>
+      <c:barChart>
+        <c:barDir val="bar"/>
+        <c:grouping val="clustered"/>
+        <c:varyColors val="0"/>
+        <c:ser>
+          <c:idx val="0"/>
+          <c:order val="0"/>
+          <c:tx>
+            <c:strRef>
+              <c:f>Sheet1!$B$1</c:f>
+              <c:strCache>
+                <c:ptCount val="1"/>
+                <c:pt idx="0">
+                  <c:v>Time relative to tuned AIMD (lower is better)</c:v>
+                </c:pt>
+              </c:strCache>
+            </c:strRef>
+          </c:tx>
+          <c:spPr>
+            <a:solidFill>
+              <a:srgbClr val="39FF88"/>
+            </a:solidFill>
+            <a:effectLst/>
+          </c:spPr>
+          <c:invertIfNegative val="0"/>
+          <c:dLbls>
+            <c:numFmt formatCode="0.00" sourceLinked="0"/>
+            <c:txPr>
+              <a:bodyPr/>
+              <a:lstStyle/>
+              <a:p>
+                <a:pPr>
+                  <a:defRPr b="0" i="0" strike="noStrike" sz="1100" u="none">
+                    <a:solidFill>
+                      <a:srgbClr val="E6EDF3"/>
+                    </a:solidFill>
+                    <a:latin typeface="Arial"/>
+                  </a:defRPr>
+                </a:pPr>
+              </a:p>
+            </c:txPr>
+            <c:showLegendKey val="0"/>
+            <c:showVal val="1"/>
+            <c:showCatName val="0"/>
+            <c:showSerName val="0"/>
+            <c:showPercent val="0"/>
+            <c:showBubbleSize val="0"/>
+            <c:showLeaderLines val="0"/>
+          </c:dLbls>
+          <c:cat>
+            <c:multiLvlStrRef>
+              <c:f>Sheet1!$A$2:$A$9</c:f>
+              <c:multiLvlStrCache>
+                <c:ptCount val="8"/>
+                <c:lvl>
+                  <c:pt idx="0">
+                    <c:v>Tuned AIMD</c:v>
+                  </c:pt>
+                  <c:pt idx="1">
+                    <c:v>Neural, final</c:v>
+                  </c:pt>
+                  <c:pt idx="2">
+                    <c:v>no slow start</c:v>
+                  </c:pt>
+                  <c:pt idx="3">
+                    <c:v>no pacing</c:v>
+                  </c:pt>
+                  <c:pt idx="4">
+                    <c:v>no hand-over</c:v>
+                  </c:pt>
+                  <c:pt idx="5">
+                    <c:v>cap 32</c:v>
+                  </c:pt>
+                  <c:pt idx="6">
+                    <c:v>no timer floor</c:v>
+                  </c:pt>
+                  <c:pt idx="7">
+                    <c:v>original settings</c:v>
+                  </c:pt>
+                </c:lvl>
+              </c:multiLvlStrCache>
+            </c:multiLvlStrRef>
+          </c:cat>
+          <c:val>
+            <c:numRef>
+              <c:f>Sheet1!$B$2:$B$9</c:f>
+              <c:numCache>
+                <c:formatCode>General</c:formatCode>
+                <c:ptCount val="8"/>
+                <c:pt idx="0">
+                  <c:v>1</c:v>
+                </c:pt>
+                <c:pt idx="1">
+                  <c:v>0.51</c:v>
+                </c:pt>
+                <c:pt idx="2">
+                  <c:v>0.527</c:v>
+                </c:pt>
+                <c:pt idx="3">
+                  <c:v>0.549</c:v>
+                </c:pt>
+                <c:pt idx="4">
+                  <c:v>0.506</c:v>
+                </c:pt>
+                <c:pt idx="5">
+                  <c:v>0.837</c:v>
+                </c:pt>
+                <c:pt idx="6">
+                  <c:v>0.519</c:v>
+                </c:pt>
+                <c:pt idx="7">
+                  <c:v>0.859</c:v>
+                </c:pt>
+              </c:numCache>
+            </c:numRef>
+          </c:val>
+        </c:ser>
+        <c:dLbls>
+          <c:numFmt formatCode="0.00" sourceLinked="0"/>
+          <c:txPr>
+            <a:bodyPr/>
+            <a:lstStyle/>
+            <a:p>
+              <a:pPr>
+                <a:defRPr b="0" i="0" strike="noStrike" sz="1100" u="none">
+                  <a:solidFill>
+                    <a:srgbClr val="E6EDF3"/>
+                  </a:solidFill>
+                  <a:latin typeface="Arial"/>
+                </a:defRPr>
+              </a:pPr>
+            </a:p>
+          </c:txPr>
+          <c:showLegendKey val="0"/>
+          <c:showVal val="1"/>
+          <c:showCatName val="0"/>
+          <c:showSerName val="0"/>
+          <c:showPercent val="0"/>
+          <c:showBubbleSize val="0"/>
+          <c:showLeaderLines val="0"/>
+        </c:dLbls>
+        <c:gapWidth val="150"/>
+        <c:overlap val="0"/>
+        <c:axId val="2094734554"/>
+        <c:axId val="2094734552"/>
+        <c:axId val="2094734556"/>
+      </c:barChart>
+      <c:catAx>
+        <c:axId val="2094734554"/>
+        <c:scaling>
+          <c:orientation val="maxMin"/>
+        </c:scaling>
+        <c:delete val="0"/>
+        <c:axPos val="l"/>
+        <c:numFmt formatCode="General" sourceLinked="1"/>
+        <c:majorTickMark val="out"/>
+        <c:minorTickMark val="none"/>
+        <c:tickLblPos val="nextTo"/>
+        <c:spPr>
+          <a:ln w="12700" cap="flat">
+            <a:solidFill>
+              <a:srgbClr val="888888"/>
+            </a:solidFill>
+            <a:prstDash val="solid"/>
+            <a:round/>
+          </a:ln>
+        </c:spPr>
+        <c:txPr>
+          <a:bodyPr/>
+          <a:lstStyle/>
+          <a:p>
+            <a:pPr>
+              <a:defRPr sz="1200" b="0" i="0" u="none" strike="noStrike">
+                <a:solidFill>
+                  <a:srgbClr val="E6EDF3"/>
+                </a:solidFill>
+                <a:latin typeface="Calibri"/>
+              </a:defRPr>
+            </a:pPr>
+            <a:endParaRPr lang="en-US"/>
+          </a:p>
+        </c:txPr>
+        <c:crossAx val="2094734552"/>
+        <c:crosses val="autoZero"/>
+        <c:auto val="1"/>
+        <c:lblAlgn val="ctr"/>
+        <c:noMultiLvlLbl val="1"/>
+      </c:catAx>
+      <c:valAx>
+        <c:axId val="2094734552"/>
+        <c:scaling>
+          <c:orientation val="minMax"/>
+          <c:max val="1.1"/>
+          <c:min val="0"/>
+        </c:scaling>
+        <c:delete val="0"/>
+        <c:axPos val="b"/>
+        <c:majorGridlines>
+          <c:spPr>
+            <a:ln w="6350" cap="flat">
+              <a:solidFill>
+                <a:srgbClr val="2A3441"/>
+              </a:solidFill>
+              <a:prstDash val="solid"/>
+              <a:round/>
+            </a:ln>
+          </c:spPr>
+        </c:majorGridlines>
+        <c:numFmt formatCode="General" sourceLinked="0"/>
+        <c:majorTickMark val="out"/>
+        <c:minorTickMark val="none"/>
+        <c:tickLblPos val="low"/>
+        <c:spPr>
+          <a:ln w="12700" cap="flat">
+            <a:solidFill>
+              <a:srgbClr val="888888"/>
+            </a:solidFill>
+            <a:prstDash val="solid"/>
+            <a:round/>
+          </a:ln>
+        </c:spPr>
+        <c:txPr>
+          <a:bodyPr/>
+          <a:lstStyle/>
+          <a:p>
+            <a:pPr>
+              <a:defRPr sz="1100" b="0" i="0" u="none" strike="noStrike">
+                <a:solidFill>
+                  <a:srgbClr val="8B98A5"/>
+                </a:solidFill>
+                <a:latin typeface="Arial"/>
+              </a:defRPr>
+            </a:pPr>
+            <a:endParaRPr lang="en-US"/>
+          </a:p>
+        </c:txPr>
+        <c:crossAx val="2094734554"/>
+        <c:crosses val="autoZero"/>
+        <c:crossBetween val="between"/>
+      </c:valAx>
+      <c:spPr>
+        <a:noFill/>
+        <a:ln>
+          <a:noFill/>
+        </a:ln>
+        <a:effectLst/>
+      </c:spPr>
+    </c:plotArea>
+    <c:plotVisOnly val="1"/>
+    <c:dispBlanksAs val="span"/>
+  </c:chart>
+  <c:spPr>
+    <a:noFill/>
+    <a:ln>
+      <a:noFill/>
+    </a:ln>
+    <a:effectLst/>
+  </c:spPr>
+  <c:externalData r:id="rId1">
+    <c:autoUpdate val="0"/>
+  </c:externalData>
+</c:chartSpace>
 </file>
 
 <file path=ppt/notesMasters/notesMaster1.xml><?xml version="1.0" encoding="utf-8"?>
@@ -2538,29 +2842,29 @@
           <a:lstStyle/>
           <a:p>
             <a:r>
-              <a:t>Time: 0:50</a:t>
+              <a:t>Time: 1:00</a:t>
             </a:r>
           </a:p>
           <a:p/>
           <a:p>
             <a:r>
-              <a:t>- Performance pass. We found that a window cap of 32 limits the satellite path to about 107 packets per second, and that our AIMD baseline started additive growth too low for high delay. So we raised the receive window to 256, and we also tuned the baseline with a bigger cap and start threshold so the comparison stays fair.</a:t>
-            </a:r>
-          </a:p>
-          <a:p>
-            <a:r>
-              <a:t>- The neural agent with a cap of 128 and the AIMD hand-over is now the default. It is 45 to 77 percent faster than the tuned AIMD on the lossy, satellite and fast paths, and equal on the short 5G path and the hostile path.</a:t>
-            </a:r>
-          </a:p>
-          <a:p>
-            <a:r>
-              <a:t>- Costs: it sends more retransmissions on the fast path, and it was never retrained for larger windows, so we treat this as a measured result on emulated paths, not a guarantee.</a:t>
+              <a:t>- This is the final comparison. Everything runs in the C transport with Selective Repeat, a real clock and a real server process. We compare four policies: the original AIMD with a window cap of 32, AIMD tuned with a cap of 128, tuned CUBIC, and the neural agent with its final settings.</a:t>
+            </a:r>
+          </a:p>
+          <a:p>
+            <a:r>
+              <a:t>- The neural agent is fastest on four of the five paths and significantly faster than tuned AIMD on all four: 15 percent on the 5G-like path, 49 percent on lossy, and 52 percent on the satellite-like and fast paths. It beats CUBIC significantly on lossy and satellite. On the hostile 10 percent loss path nothing is significantly different.</a:t>
+            </a:r>
+          </a:p>
+          <a:p>
+            <a:r>
+              <a:t>- One correction we want to be upfront about: earlier we reported bigger margins and 262 retransmissions on the fast path. That came from a timer that fired too early. Fixing it helped AIMD even more than the agent, so these numbers are the honest ones.</a:t>
             </a:r>
           </a:p>
           <a:p/>
           <a:p>
             <a:r>
-              <a:t>IF ASKED: Is AIMD just badly tuned? We tuned it (cap 128, high start threshold) and it improved, but the agent is still 2 to 4 times faster on the high-delay paths. CUBIC did not close the gap.</a:t>
+              <a:t>IF ASKED: Why did the margin shrink? A retransmission timer defect was hurting AIMD more than the agent. We found it by tracing the retransmissions, fixed it for every policy, and re-ran everything. Without the fix AIMD is 41 percent slower on random paths.</a:t>
             </a:r>
           </a:p>
         </p:txBody>
@@ -2652,23 +2956,23 @@
           <a:p/>
           <a:p>
             <a:r>
-              <a:t>- Learned: reliability is a set of simple rules working together; congestion control matters as much as retransmission; testing tools fail in surprising ways.</a:t>
-            </a:r>
-          </a:p>
-          <a:p>
-            <a:r>
-              <a:t>- Next: Selective Repeat with SACK, a stronger learning agent, adaptive timeout, and tests on a real multi-machine network.</a:t>
-            </a:r>
-          </a:p>
-          <a:p>
-            <a:r>
-              <a:t>- Name the limits before she does: Go-Back-N, loopback-only protocol tests, Smart-RUDP not beating AIMD.</a:t>
+              <a:t>- The emulator is inside our client, so we also tested through a separate impairment process on real UDP sockets. That found three real defects.</a:t>
+            </a:r>
+          </a:p>
+          <a:p>
+            <a:r>
+              <a:t>- First, if the client's last handshake ACK is lost, the server ignored all following data and the transfer hung. We fixed it the way TCP does and added a regression test. Second, the spurious timeouts I just mentioned. Third, a fuzzer showed our byte-sum checksum let about 2 percent of corrupted packets through, so it is now CRC-16 and the fuzzer accepts none.</a:t>
+            </a:r>
+          </a:p>
+          <a:p>
+            <a:r>
+              <a:t>- On real sockets the neural agent is again fastest on every path: 17, 53, 45 and 39 percent faster than tuned AIMD on 5G, lossy, satellite and fast, and a tie on the hostile path.</a:t>
             </a:r>
           </a:p>
           <a:p/>
           <a:p>
             <a:r>
-              <a:t>IF ASKED: End on the limits and the fix order: SACK, adaptive timeout, real-network tests.</a:t>
+              <a:t>IF ASKED: Is this a real network? It is real UDP sockets on one machine, with the impairment applied by a separate process. It is not a kernel netem or a multi-machine path; we provide the script for that but had no root access.</a:t>
             </a:r>
           </a:p>
         </p:txBody>
@@ -2754,19 +3058,29 @@
           <a:lstStyle/>
           <a:p>
             <a:r>
-              <a:t>Time: 0:15</a:t>
+              <a:t>Time: 1:00</a:t>
             </a:r>
           </a:p>
           <a:p/>
           <a:p>
             <a:r>
-              <a:t>- Thank you. The code, report and captures are at github.com/Capsturrrr/rudp. Happy to take questions.</a:t>
+              <a:t>- Our old simulator was in Python and never matched the C code exactly. So we added a virtual-time mode to the C sender itself: same code, simulated receiver and clock, about a thousand times faster. It reproduces the real-clock results in all 15 calibration cells.</a:t>
+            </a:r>
+          </a:p>
+          <a:p>
+            <a:r>
+              <a:t>- That let us test on 100 random paths that we never tuned on. The neural agent needs 0.53 times the time of tuned AIMD, is faster on 89 paths and never more than 20 percent slower. Tuned CUBIC is slower by more than 20 percent on 27 paths.</a:t>
+            </a:r>
+          </a:p>
+          <a:p>
+            <a:r>
+              <a:t>- The ablation shows which parts matter: the window cap of 128 most, then pacing, the timer floor and slow start. We also tried evolution-strategy retraining directly in the C sender and it only gave 2 percent, so we did not adopt it.</a:t>
             </a:r>
           </a:p>
           <a:p/>
           <a:p>
             <a:r>
-              <a:t>IF ASKED: Pause and smile; hand over to questions.</a:t>
+              <a:t>IF ASKED: Is the test set separate from tuning? Yes. Slow-start and hand-over settings were chosen on a different set of random paths; the 100 test paths were used only for the reported numbers.</a:t>
             </a:r>
           </a:p>
         </p:txBody>
@@ -2852,19 +3166,29 @@
           <a:lstStyle/>
           <a:p>
             <a:r>
-              <a:t>Time: -</a:t>
+              <a:t>Time: 0:50</a:t>
             </a:r>
           </a:p>
           <a:p/>
           <a:p>
             <a:r>
-              <a:t>- Only if asked: the window starts at 1, adds 1 per ACK until the threshold 16, then 1/window per ACK. In the 62-packet run the final window was 18.71.</a:t>
+              <a:t>- Fairness on real sockets: two neural flows split the link evenly, and so do two AIMD flows. But against tuned AIMD the neural agent takes 68 percent of the link, and 76 percent against the original AIMD. CUBIC takes 61 percent. So the agent is a more aggressive neighbour. Nothing starves, but it is not polite, and we did not test coexistence with TCP. That is our main limitation.</a:t>
+            </a:r>
+          </a:p>
+          <a:p>
+            <a:r>
+              <a:t>- We also added file transfer: the sender sends a real file and the received file is byte-identical in every run. A 4 megabyte file over the fast path takes 8.9 seconds with the agent against 21 seconds with tuned AIMD.</a:t>
+            </a:r>
+          </a:p>
+          <a:p>
+            <a:r>
+              <a:t>- The chat and web gateway now use the same window and bitmap as the C transport, and there is CI, fuzzing and an architecture document.</a:t>
             </a:r>
           </a:p>
           <a:p/>
           <a:p>
             <a:r>
-              <a:t>IF ASKED: Use this slide to answer 'show me congestion avoidance'.</a:t>
+              <a:t>IF ASKED: Would this be safe to deploy? Not on a shared link yet: it needs fairness-aware training and TCP coexistence tests. For a dedicated path it is a clear win.</a:t>
             </a:r>
           </a:p>
         </p:txBody>
@@ -2995,6 +3319,310 @@
             <a:fld id="{F7021451-1387-4CA6-816F-3879F97B5CBC}" type="slidenum">
               <a:rPr lang="en-US"/>
               <a:t>3</a:t>
+            </a:fld>
+            <a:endParaRPr lang="en-US"/>
+          </a:p>
+        </p:txBody>
+      </p:sp>
+    </p:spTree>
+    <p:extLst>
+      <p:ext uri="{BB962C8B-B14F-4D97-AF65-F5344CB8AC3E}">
+        <p14:creationId xmlns:p14="http://schemas.microsoft.com/office/powerpoint/2010/main" val="1024086991"/>
+      </p:ext>
+    </p:extLst>
+  </p:cSld>
+  <p:clrMapOvr>
+    <a:masterClrMapping/>
+  </p:clrMapOvr>
+</p:notes>
+</file>
+
+<file path=ppt/notesSlides/notesSlide30.xml><?xml version="1.0" encoding="utf-8"?>
+<p:notes xmlns:a="http://schemas.openxmlformats.org/drawingml/2006/main" xmlns:r="http://schemas.openxmlformats.org/officeDocument/2006/relationships" xmlns:p="http://schemas.openxmlformats.org/presentationml/2006/main">
+  <p:cSld>
+    <p:spTree>
+      <p:nvGrpSpPr>
+        <p:cNvPr id="1" name=""/>
+        <p:cNvGrpSpPr/>
+        <p:nvPr/>
+      </p:nvGrpSpPr>
+      <p:grpSpPr>
+        <a:xfrm>
+          <a:off x="0" y="0"/>
+          <a:ext cx="0" cy="0"/>
+          <a:chOff x="0" y="0"/>
+          <a:chExt cx="0" cy="0"/>
+        </a:xfrm>
+      </p:grpSpPr>
+      <p:sp>
+        <p:nvSpPr>
+          <p:cNvPr id="2" name="Slide Image Placeholder 1"/>
+          <p:cNvSpPr>
+            <a:spLocks noGrp="1" noRot="1" noChangeAspect="1"/>
+          </p:cNvSpPr>
+          <p:nvPr>
+            <p:ph type="sldImg"/>
+          </p:nvPr>
+        </p:nvSpPr>
+        <p:spPr/>
+      </p:sp>
+      <p:sp>
+        <p:nvSpPr>
+          <p:cNvPr id="3" name="Notes Placeholder 2"/>
+          <p:cNvSpPr>
+            <a:spLocks noGrp="1"/>
+          </p:cNvSpPr>
+          <p:nvPr>
+            <p:ph type="body" idx="1"/>
+          </p:nvPr>
+        </p:nvSpPr>
+        <p:spPr/>
+        <p:txBody>
+          <a:bodyPr/>
+          <a:lstStyle/>
+          <a:p>
+            <a:r>
+              <a:t>Time: 0:50</a:t>
+            </a:r>
+          </a:p>
+          <a:p/>
+          <a:p>
+            <a:r>
+              <a:t>- What we learned: reliability is a set of simple rules working together, congestion control matters as much as retransmission, and tests tell you things about your own results that you do not want to hear.</a:t>
+            </a:r>
+          </a:p>
+          <a:p>
+            <a:r>
+              <a:t>- Our limits: no kernel netem or multi-machine test, the agent is not a polite neighbour, there is no gain at 10 percent random loss, and the tabular agent did not beat AIMD.</a:t>
+            </a:r>
+          </a:p>
+          <a:p>
+            <a:r>
+              <a:t>- Next: fairness-aware training with TCP coexistence, training on real traces, and kernel and multi-machine tests.</a:t>
+            </a:r>
+          </a:p>
+          <a:p/>
+          <a:p>
+            <a:r>
+              <a:t>IF ASKED: What would you do first? Run the netem script on a Linux machine for kernel TCP and RUDP on the same path, then add a competing flow to the training.</a:t>
+            </a:r>
+          </a:p>
+        </p:txBody>
+      </p:sp>
+      <p:sp>
+        <p:nvSpPr>
+          <p:cNvPr id="4" name="Slide Number Placeholder 3"/>
+          <p:cNvSpPr>
+            <a:spLocks noGrp="1"/>
+          </p:cNvSpPr>
+          <p:nvPr>
+            <p:ph type="sldNum" sz="quarter" idx="10"/>
+          </p:nvPr>
+        </p:nvSpPr>
+        <p:spPr/>
+        <p:txBody>
+          <a:bodyPr/>
+          <a:lstStyle/>
+          <a:p>
+            <a:fld id="{F7021451-1387-4CA6-816F-3879F97B5CBC}" type="slidenum">
+              <a:rPr lang="en-US"/>
+              <a:t>30</a:t>
+            </a:fld>
+            <a:endParaRPr lang="en-US"/>
+          </a:p>
+        </p:txBody>
+      </p:sp>
+    </p:spTree>
+    <p:extLst>
+      <p:ext uri="{BB962C8B-B14F-4D97-AF65-F5344CB8AC3E}">
+        <p14:creationId xmlns:p14="http://schemas.microsoft.com/office/powerpoint/2010/main" val="1024086991"/>
+      </p:ext>
+    </p:extLst>
+  </p:cSld>
+  <p:clrMapOvr>
+    <a:masterClrMapping/>
+  </p:clrMapOvr>
+</p:notes>
+</file>
+
+<file path=ppt/notesSlides/notesSlide31.xml><?xml version="1.0" encoding="utf-8"?>
+<p:notes xmlns:a="http://schemas.openxmlformats.org/drawingml/2006/main" xmlns:r="http://schemas.openxmlformats.org/officeDocument/2006/relationships" xmlns:p="http://schemas.openxmlformats.org/presentationml/2006/main">
+  <p:cSld>
+    <p:spTree>
+      <p:nvGrpSpPr>
+        <p:cNvPr id="1" name=""/>
+        <p:cNvGrpSpPr/>
+        <p:nvPr/>
+      </p:nvGrpSpPr>
+      <p:grpSpPr>
+        <a:xfrm>
+          <a:off x="0" y="0"/>
+          <a:ext cx="0" cy="0"/>
+          <a:chOff x="0" y="0"/>
+          <a:chExt cx="0" cy="0"/>
+        </a:xfrm>
+      </p:grpSpPr>
+      <p:sp>
+        <p:nvSpPr>
+          <p:cNvPr id="2" name="Slide Image Placeholder 1"/>
+          <p:cNvSpPr>
+            <a:spLocks noGrp="1" noRot="1" noChangeAspect="1"/>
+          </p:cNvSpPr>
+          <p:nvPr>
+            <p:ph type="sldImg"/>
+          </p:nvPr>
+        </p:nvSpPr>
+        <p:spPr/>
+      </p:sp>
+      <p:sp>
+        <p:nvSpPr>
+          <p:cNvPr id="3" name="Notes Placeholder 2"/>
+          <p:cNvSpPr>
+            <a:spLocks noGrp="1"/>
+          </p:cNvSpPr>
+          <p:nvPr>
+            <p:ph type="body" idx="1"/>
+          </p:nvPr>
+        </p:nvSpPr>
+        <p:spPr/>
+        <p:txBody>
+          <a:bodyPr/>
+          <a:lstStyle/>
+          <a:p>
+            <a:r>
+              <a:t>Time: 0:15</a:t>
+            </a:r>
+          </a:p>
+          <a:p/>
+          <a:p>
+            <a:r>
+              <a:t>- Thank you. The code, report and captures are at github.com/Capsturrrr/rudp. Happy to take questions.</a:t>
+            </a:r>
+          </a:p>
+          <a:p/>
+          <a:p>
+            <a:r>
+              <a:t>IF ASKED: Pause and smile; hand over to questions.</a:t>
+            </a:r>
+          </a:p>
+        </p:txBody>
+      </p:sp>
+      <p:sp>
+        <p:nvSpPr>
+          <p:cNvPr id="4" name="Slide Number Placeholder 3"/>
+          <p:cNvSpPr>
+            <a:spLocks noGrp="1"/>
+          </p:cNvSpPr>
+          <p:nvPr>
+            <p:ph type="sldNum" sz="quarter" idx="10"/>
+          </p:nvPr>
+        </p:nvSpPr>
+        <p:spPr/>
+        <p:txBody>
+          <a:bodyPr/>
+          <a:lstStyle/>
+          <a:p>
+            <a:fld id="{F7021451-1387-4CA6-816F-3879F97B5CBC}" type="slidenum">
+              <a:rPr lang="en-US"/>
+              <a:t>31</a:t>
+            </a:fld>
+            <a:endParaRPr lang="en-US"/>
+          </a:p>
+        </p:txBody>
+      </p:sp>
+    </p:spTree>
+    <p:extLst>
+      <p:ext uri="{BB962C8B-B14F-4D97-AF65-F5344CB8AC3E}">
+        <p14:creationId xmlns:p14="http://schemas.microsoft.com/office/powerpoint/2010/main" val="1024086991"/>
+      </p:ext>
+    </p:extLst>
+  </p:cSld>
+  <p:clrMapOvr>
+    <a:masterClrMapping/>
+  </p:clrMapOvr>
+</p:notes>
+</file>
+
+<file path=ppt/notesSlides/notesSlide32.xml><?xml version="1.0" encoding="utf-8"?>
+<p:notes xmlns:a="http://schemas.openxmlformats.org/drawingml/2006/main" xmlns:r="http://schemas.openxmlformats.org/officeDocument/2006/relationships" xmlns:p="http://schemas.openxmlformats.org/presentationml/2006/main">
+  <p:cSld>
+    <p:spTree>
+      <p:nvGrpSpPr>
+        <p:cNvPr id="1" name=""/>
+        <p:cNvGrpSpPr/>
+        <p:nvPr/>
+      </p:nvGrpSpPr>
+      <p:grpSpPr>
+        <a:xfrm>
+          <a:off x="0" y="0"/>
+          <a:ext cx="0" cy="0"/>
+          <a:chOff x="0" y="0"/>
+          <a:chExt cx="0" cy="0"/>
+        </a:xfrm>
+      </p:grpSpPr>
+      <p:sp>
+        <p:nvSpPr>
+          <p:cNvPr id="2" name="Slide Image Placeholder 1"/>
+          <p:cNvSpPr>
+            <a:spLocks noGrp="1" noRot="1" noChangeAspect="1"/>
+          </p:cNvSpPr>
+          <p:nvPr>
+            <p:ph type="sldImg"/>
+          </p:nvPr>
+        </p:nvSpPr>
+        <p:spPr/>
+      </p:sp>
+      <p:sp>
+        <p:nvSpPr>
+          <p:cNvPr id="3" name="Notes Placeholder 2"/>
+          <p:cNvSpPr>
+            <a:spLocks noGrp="1"/>
+          </p:cNvSpPr>
+          <p:nvPr>
+            <p:ph type="body" idx="1"/>
+          </p:nvPr>
+        </p:nvSpPr>
+        <p:spPr/>
+        <p:txBody>
+          <a:bodyPr/>
+          <a:lstStyle/>
+          <a:p>
+            <a:r>
+              <a:t>Time: -</a:t>
+            </a:r>
+          </a:p>
+          <a:p/>
+          <a:p>
+            <a:r>
+              <a:t>- Only if asked: the window starts at 1, adds 1 per ACK until the threshold 16, then 1/window per ACK. In the 62-packet run the final window was 18.71.</a:t>
+            </a:r>
+          </a:p>
+          <a:p/>
+          <a:p>
+            <a:r>
+              <a:t>IF ASKED: Use this slide to answer 'show me congestion avoidance'.</a:t>
+            </a:r>
+          </a:p>
+        </p:txBody>
+      </p:sp>
+      <p:sp>
+        <p:nvSpPr>
+          <p:cNvPr id="4" name="Slide Number Placeholder 3"/>
+          <p:cNvSpPr>
+            <a:spLocks noGrp="1"/>
+          </p:cNvSpPr>
+          <p:nvPr>
+            <p:ph type="sldNum" sz="quarter" idx="10"/>
+          </p:nvPr>
+        </p:nvSpPr>
+        <p:spPr/>
+        <p:txBody>
+          <a:bodyPr/>
+          <a:lstStyle/>
+          <a:p>
+            <a:fld id="{F7021451-1387-4CA6-816F-3879F97B5CBC}" type="slidenum">
+              <a:rPr lang="en-US"/>
+              <a:t>32</a:t>
             </a:fld>
             <a:endParaRPr lang="en-US"/>
           </a:p>
@@ -4242,7 +4870,7 @@
                 <a:ea typeface="Courier New" pitchFamily="34" charset="-122"/>
                 <a:cs typeface="Courier New" pitchFamily="34" charset="-120"/>
               </a:rPr>
-              <a:t>10 / 28   Smart-RUDP</a:t>
+              <a:t>10 / 32   Smart-RUDP</a:t>
             </a:r>
             <a:endParaRPr lang="en-US" sz="1000" dirty="0"/>
           </a:p>
@@ -4439,7 +5067,7 @@
                 <a:ea typeface="Courier New" pitchFamily="34" charset="-122"/>
                 <a:cs typeface="Courier New" pitchFamily="34" charset="-120"/>
               </a:rPr>
-              <a:t>11 / 28   Smart-RUDP</a:t>
+              <a:t>11 / 32   Smart-RUDP</a:t>
             </a:r>
             <a:endParaRPr lang="en-US" sz="1000" dirty="0"/>
           </a:p>
@@ -5269,7 +5897,7 @@
                 <a:ea typeface="Courier New" pitchFamily="34" charset="-122"/>
                 <a:cs typeface="Courier New" pitchFamily="34" charset="-120"/>
               </a:rPr>
-              <a:t>12 / 28   Smart-RUDP</a:t>
+              <a:t>12 / 32   Smart-RUDP</a:t>
             </a:r>
             <a:endParaRPr lang="en-US" sz="1000" dirty="0"/>
           </a:p>
@@ -5566,7 +6194,7 @@
                 <a:ea typeface="Courier New" pitchFamily="34" charset="-122"/>
                 <a:cs typeface="Courier New" pitchFamily="34" charset="-120"/>
               </a:rPr>
-              <a:t>13 / 28   Smart-RUDP</a:t>
+              <a:t>13 / 32   Smart-RUDP</a:t>
             </a:r>
             <a:endParaRPr lang="en-US" sz="1000" dirty="0"/>
           </a:p>
@@ -5866,7 +6494,7 @@
                 <a:ea typeface="Courier New" pitchFamily="34" charset="-122"/>
                 <a:cs typeface="Courier New" pitchFamily="34" charset="-120"/>
               </a:rPr>
-              <a:t>14 / 28   Smart-RUDP</a:t>
+              <a:t>14 / 32   Smart-RUDP</a:t>
             </a:r>
             <a:endParaRPr lang="en-US" sz="1000" dirty="0"/>
           </a:p>
@@ -6250,7 +6878,7 @@
                 <a:ea typeface="Courier New" pitchFamily="34" charset="-122"/>
                 <a:cs typeface="Courier New" pitchFamily="34" charset="-120"/>
               </a:rPr>
-              <a:t>15 / 28   Smart-RUDP</a:t>
+              <a:t>15 / 32   Smart-RUDP</a:t>
             </a:r>
             <a:endParaRPr lang="en-US" sz="1000" dirty="0"/>
           </a:p>
@@ -6708,7 +7336,7 @@
                 <a:ea typeface="Courier New" pitchFamily="34" charset="-122"/>
                 <a:cs typeface="Courier New" pitchFamily="34" charset="-120"/>
               </a:rPr>
-              <a:t>16 / 28   Smart-RUDP</a:t>
+              <a:t>16 / 32   Smart-RUDP</a:t>
             </a:r>
             <a:endParaRPr lang="en-US" sz="1000" dirty="0"/>
           </a:p>
@@ -7393,7 +8021,7 @@
                 <a:ea typeface="Courier New" pitchFamily="34" charset="-122"/>
                 <a:cs typeface="Courier New" pitchFamily="34" charset="-120"/>
               </a:rPr>
-              <a:t>17 / 28   Smart-RUDP</a:t>
+              <a:t>17 / 32   Smart-RUDP</a:t>
             </a:r>
             <a:endParaRPr lang="en-US" sz="1000" dirty="0"/>
           </a:p>
@@ -7633,7 +8261,7 @@
                 <a:ea typeface="Courier New" pitchFamily="34" charset="-122"/>
                 <a:cs typeface="Courier New" pitchFamily="34" charset="-120"/>
               </a:rPr>
-              <a:t>18 / 28   Smart-RUDP</a:t>
+              <a:t>18 / 32   Smart-RUDP</a:t>
             </a:r>
             <a:endParaRPr lang="en-US" sz="1000" dirty="0"/>
           </a:p>
@@ -7873,7 +8501,7 @@
                 <a:ea typeface="Courier New" pitchFamily="34" charset="-122"/>
                 <a:cs typeface="Courier New" pitchFamily="34" charset="-120"/>
               </a:rPr>
-              <a:t>19 / 28   Smart-RUDP</a:t>
+              <a:t>19 / 32   Smart-RUDP</a:t>
             </a:r>
             <a:endParaRPr lang="en-US" sz="1000" dirty="0"/>
           </a:p>
@@ -8095,7 +8723,7 @@
                 <a:ea typeface="Courier New" pitchFamily="34" charset="-122"/>
                 <a:cs typeface="Courier New" pitchFamily="34" charset="-120"/>
               </a:rPr>
-              <a:t>2 / 28   Smart-RUDP</a:t>
+              <a:t>2 / 32   Smart-RUDP</a:t>
             </a:r>
             <a:endParaRPr lang="en-US" sz="1000" dirty="0"/>
           </a:p>
@@ -8489,7 +9117,7 @@
                 <a:ea typeface="Courier New" pitchFamily="34" charset="-122"/>
                 <a:cs typeface="Courier New" pitchFamily="34" charset="-120"/>
               </a:rPr>
-              <a:t>20 / 28   Smart-RUDP</a:t>
+              <a:t>20 / 32   Smart-RUDP</a:t>
             </a:r>
             <a:endParaRPr lang="en-US" sz="1000" dirty="0"/>
           </a:p>
@@ -8813,7 +9441,7 @@
                 <a:ea typeface="Courier New" pitchFamily="34" charset="-122"/>
                 <a:cs typeface="Courier New" pitchFamily="34" charset="-120"/>
               </a:rPr>
-              <a:t>21 / 28   Smart-RUDP</a:t>
+              <a:t>21 / 32   Smart-RUDP</a:t>
             </a:r>
             <a:endParaRPr lang="en-US" sz="1000" dirty="0"/>
           </a:p>
@@ -10520,7 +11148,7 @@
                 <a:ea typeface="Courier New" pitchFamily="34" charset="-122"/>
                 <a:cs typeface="Courier New" pitchFamily="34" charset="-120"/>
               </a:rPr>
-              <a:t>22 / 28   Smart-RUDP</a:t>
+              <a:t>22 / 32   Smart-RUDP</a:t>
             </a:r>
             <a:endParaRPr lang="en-US" sz="1000" dirty="0"/>
           </a:p>
@@ -11903,7 +12531,7 @@
                 <a:ea typeface="Courier New" pitchFamily="34" charset="-122"/>
                 <a:cs typeface="Courier New" pitchFamily="34" charset="-120"/>
               </a:rPr>
-              <a:t>23 / 28   Smart-RUDP</a:t>
+              <a:t>23 / 32   Smart-RUDP</a:t>
             </a:r>
             <a:endParaRPr lang="en-US" sz="1000" dirty="0"/>
           </a:p>
@@ -13446,7 +14074,7 @@
                 <a:ea typeface="Courier New" pitchFamily="34" charset="-122"/>
                 <a:cs typeface="Courier New" pitchFamily="34" charset="-120"/>
               </a:rPr>
-              <a:t>24 / 28   Smart-RUDP</a:t>
+              <a:t>24 / 32   Smart-RUDP</a:t>
             </a:r>
             <a:endParaRPr lang="en-US" sz="1000" dirty="0"/>
           </a:p>
@@ -15124,7 +15752,7 @@
                 <a:ea typeface="Courier New" pitchFamily="34" charset="-122"/>
                 <a:cs typeface="Courier New" pitchFamily="34" charset="-120"/>
               </a:rPr>
-              <a:t>25 / 28   Smart-RUDP</a:t>
+              <a:t>25 / 32   Smart-RUDP</a:t>
             </a:r>
             <a:endParaRPr lang="en-US" sz="1000" dirty="0"/>
           </a:p>
@@ -16763,7 +17391,7 @@
                 <a:ea typeface="Courier New" pitchFamily="34" charset="-122"/>
                 <a:cs typeface="Courier New" pitchFamily="34" charset="-120"/>
               </a:rPr>
-              <a:t>Performance: bigger windows, tuned baseline</a:t>
+              <a:t>Final results: tuned baselines, real clock</a:t>
             </a:r>
             <a:endParaRPr lang="en-US" sz="3000" dirty="0"/>
           </a:p>
@@ -16802,7 +17430,7 @@
                 <a:ea typeface="Courier New" pitchFamily="34" charset="-122"/>
                 <a:cs typeface="Courier New" pitchFamily="34" charset="-120"/>
               </a:rPr>
-              <a:t>26 / 28   Smart-RUDP</a:t>
+              <a:t>26 / 32   Smart-RUDP</a:t>
             </a:r>
             <a:endParaRPr lang="en-US" sz="1000" dirty="0"/>
           </a:p>
@@ -16824,19 +17452,20 @@
         </p:nvGraphicFramePr>
         <p:xfrm>
           <a:off x="548640" y="1188720"/>
-          <a:ext cx="6217920" cy="914400"/>
+          <a:ext cx="6583680" cy="914400"/>
         </p:xfrm>
         <a:graphic>
           <a:graphicData uri="http://schemas.openxmlformats.org/drawingml/2006/table">
             <a:tbl>
               <a:tblPr/>
               <a:tblGrid>
-                <a:gridCol w="2286000"/>
-                <a:gridCol w="1371600"/>
-                <a:gridCol w="1280160"/>
-                <a:gridCol w="1280160"/>
+                <a:gridCol w="2194560"/>
+                <a:gridCol w="1097280"/>
+                <a:gridCol w="1097280"/>
+                <a:gridCol w="1097280"/>
+                <a:gridCol w="1097280"/>
               </a:tblGrid>
-              <a:tr h="402336">
+              <a:tr h="420624">
                 <a:tc>
                   <a:txBody>
                     <a:bodyPr/>
@@ -16854,7 +17483,7 @@
                           <a:ea typeface="Courier New" pitchFamily="34" charset="-122"/>
                           <a:cs typeface="Courier New" pitchFamily="34" charset="-120"/>
                         </a:rPr>
-                        <a:t>C transport, seconds</a:t>
+                        <a:t>Path (seconds)</a:t>
                       </a:r>
                       <a:endParaRPr lang="en-US" sz="1300" dirty="0">
                         <a:latin typeface="Courier New" charset="0"/>
@@ -17058,7 +17687,7 @@
                           <a:ea typeface="Courier New" pitchFamily="34" charset="-122"/>
                           <a:cs typeface="Courier New" pitchFamily="34" charset="-120"/>
                         </a:rPr>
-                        <a:t>Neural</a:t>
+                        <a:t>CUBIC tuned</a:t>
                       </a:r>
                       <a:endParaRPr lang="en-US" sz="1300" dirty="0">
                         <a:latin typeface="Courier New" charset="0"/>
@@ -17106,76 +17735,6 @@
                     </a:lnB>
                     <a:solidFill>
                       <a:srgbClr val="39FF88"/>
-                    </a:solidFill>
-                  </a:tcPr>
-                </a:tc>
-              </a:tr>
-              <a:tr h="402336">
-                <a:tc>
-                  <a:txBody>
-                    <a:bodyPr/>
-                    <a:lstStyle/>
-                    <a:p>
-                      <a:pPr indent="0" marL="0">
-                        <a:buNone/>
-                      </a:pPr>
-                      <a:r>
-                        <a:rPr lang="en-US" sz="1300" dirty="0">
-                          <a:solidFill>
-                            <a:srgbClr val="E6EDF3"/>
-                          </a:solidFill>
-                          <a:latin typeface="Calibri" pitchFamily="34" charset="0"/>
-                          <a:ea typeface="Calibri" pitchFamily="34" charset="-122"/>
-                          <a:cs typeface="Calibri" pitchFamily="34" charset="-120"/>
-                        </a:rPr>
-                        <a:t>Lossy 2%</a:t>
-                      </a:r>
-                      <a:endParaRPr lang="en-US" sz="1300" dirty="0">
-                        <a:latin typeface="Calibri" charset="0"/>
-                        <a:ea typeface="Calibri" charset="0"/>
-                        <a:cs typeface="Calibri" charset="0"/>
-                      </a:endParaRPr>
-                    </a:p>
-                  </a:txBody>
-                  <a:tcPr marL="91440" marR="91440" marT="45720" marB="45720">
-                    <a:lnL w="12700" cap="flat" cmpd="sng" algn="ctr">
-                      <a:solidFill>
-                        <a:srgbClr val="2A3441"/>
-                      </a:solidFill>
-                      <a:prstDash val="solid"/>
-                      <a:round/>
-                      <a:headEnd type="none" w="med" len="med"/>
-                      <a:tailEnd type="none" w="med" len="med"/>
-                    </a:lnL>
-                    <a:lnR w="12700" cap="flat" cmpd="sng" algn="ctr">
-                      <a:solidFill>
-                        <a:srgbClr val="2A3441"/>
-                      </a:solidFill>
-                      <a:prstDash val="solid"/>
-                      <a:round/>
-                      <a:headEnd type="none" w="med" len="med"/>
-                      <a:tailEnd type="none" w="med" len="med"/>
-                    </a:lnR>
-                    <a:lnT w="12700" cap="flat" cmpd="sng" algn="ctr">
-                      <a:solidFill>
-                        <a:srgbClr val="2A3441"/>
-                      </a:solidFill>
-                      <a:prstDash val="solid"/>
-                      <a:round/>
-                      <a:headEnd type="none" w="med" len="med"/>
-                      <a:tailEnd type="none" w="med" len="med"/>
-                    </a:lnT>
-                    <a:lnB w="12700" cap="flat" cmpd="sng" algn="ctr">
-                      <a:solidFill>
-                        <a:srgbClr val="2A3441"/>
-                      </a:solidFill>
-                      <a:prstDash val="solid"/>
-                      <a:round/>
-                      <a:headEnd type="none" w="med" len="med"/>
-                      <a:tailEnd type="none" w="med" len="med"/>
-                    </a:lnB>
-                    <a:solidFill>
-                      <a:srgbClr val="141B24"/>
                     </a:solidFill>
                   </a:tcPr>
                 </a:tc>
@@ -17188,20 +17747,20 @@
                         <a:buNone/>
                       </a:pPr>
                       <a:r>
-                        <a:rPr lang="en-US" sz="1300" dirty="0">
+                        <a:rPr lang="en-US" sz="1300" b="1" dirty="0">
                           <a:solidFill>
-                            <a:srgbClr val="E6EDF3"/>
+                            <a:srgbClr val="0B0F14"/>
                           </a:solidFill>
-                          <a:latin typeface="Calibri" pitchFamily="34" charset="0"/>
-                          <a:ea typeface="Calibri" pitchFamily="34" charset="-122"/>
-                          <a:cs typeface="Calibri" pitchFamily="34" charset="-120"/>
+                          <a:latin typeface="Courier New" pitchFamily="34" charset="0"/>
+                          <a:ea typeface="Courier New" pitchFamily="34" charset="-122"/>
+                          <a:cs typeface="Courier New" pitchFamily="34" charset="-120"/>
                         </a:rPr>
-                        <a:t>8.4</a:t>
+                        <a:t>Neural</a:t>
                       </a:r>
                       <a:endParaRPr lang="en-US" sz="1300" dirty="0">
-                        <a:latin typeface="Calibri" charset="0"/>
-                        <a:ea typeface="Calibri" charset="0"/>
-                        <a:cs typeface="Calibri" charset="0"/>
+                        <a:latin typeface="Courier New" charset="0"/>
+                        <a:ea typeface="Courier New" charset="0"/>
+                        <a:cs typeface="Courier New" charset="0"/>
                       </a:endParaRPr>
                     </a:p>
                   </a:txBody>
@@ -17243,696 +17802,12 @@
                       <a:tailEnd type="none" w="med" len="med"/>
                     </a:lnB>
                     <a:solidFill>
-                      <a:srgbClr val="141B24"/>
-                    </a:solidFill>
-                  </a:tcPr>
-                </a:tc>
-                <a:tc>
-                  <a:txBody>
-                    <a:bodyPr/>
-                    <a:lstStyle/>
-                    <a:p>
-                      <a:pPr indent="0" marL="0">
-                        <a:buNone/>
-                      </a:pPr>
-                      <a:r>
-                        <a:rPr lang="en-US" sz="1300" dirty="0">
-                          <a:solidFill>
-                            <a:srgbClr val="E6EDF3"/>
-                          </a:solidFill>
-                          <a:latin typeface="Calibri" pitchFamily="34" charset="0"/>
-                          <a:ea typeface="Calibri" pitchFamily="34" charset="-122"/>
-                          <a:cs typeface="Calibri" pitchFamily="34" charset="-120"/>
-                        </a:rPr>
-                        <a:t>8.3</a:t>
-                      </a:r>
-                      <a:endParaRPr lang="en-US" sz="1300" dirty="0">
-                        <a:latin typeface="Calibri" charset="0"/>
-                        <a:ea typeface="Calibri" charset="0"/>
-                        <a:cs typeface="Calibri" charset="0"/>
-                      </a:endParaRPr>
-                    </a:p>
-                  </a:txBody>
-                  <a:tcPr marL="91440" marR="91440" marT="45720" marB="45720">
-                    <a:lnL w="12700" cap="flat" cmpd="sng" algn="ctr">
-                      <a:solidFill>
-                        <a:srgbClr val="2A3441"/>
-                      </a:solidFill>
-                      <a:prstDash val="solid"/>
-                      <a:round/>
-                      <a:headEnd type="none" w="med" len="med"/>
-                      <a:tailEnd type="none" w="med" len="med"/>
-                    </a:lnL>
-                    <a:lnR w="12700" cap="flat" cmpd="sng" algn="ctr">
-                      <a:solidFill>
-                        <a:srgbClr val="2A3441"/>
-                      </a:solidFill>
-                      <a:prstDash val="solid"/>
-                      <a:round/>
-                      <a:headEnd type="none" w="med" len="med"/>
-                      <a:tailEnd type="none" w="med" len="med"/>
-                    </a:lnR>
-                    <a:lnT w="12700" cap="flat" cmpd="sng" algn="ctr">
-                      <a:solidFill>
-                        <a:srgbClr val="2A3441"/>
-                      </a:solidFill>
-                      <a:prstDash val="solid"/>
-                      <a:round/>
-                      <a:headEnd type="none" w="med" len="med"/>
-                      <a:tailEnd type="none" w="med" len="med"/>
-                    </a:lnT>
-                    <a:lnB w="12700" cap="flat" cmpd="sng" algn="ctr">
-                      <a:solidFill>
-                        <a:srgbClr val="2A3441"/>
-                      </a:solidFill>
-                      <a:prstDash val="solid"/>
-                      <a:round/>
-                      <a:headEnd type="none" w="med" len="med"/>
-                      <a:tailEnd type="none" w="med" len="med"/>
-                    </a:lnB>
-                    <a:solidFill>
-                      <a:srgbClr val="141B24"/>
-                    </a:solidFill>
-                  </a:tcPr>
-                </a:tc>
-                <a:tc>
-                  <a:txBody>
-                    <a:bodyPr/>
-                    <a:lstStyle/>
-                    <a:p>
-                      <a:pPr indent="0" marL="0">
-                        <a:buNone/>
-                      </a:pPr>
-                      <a:r>
-                        <a:rPr lang="en-US" sz="1300" dirty="0">
-                          <a:solidFill>
-                            <a:srgbClr val="E6EDF3"/>
-                          </a:solidFill>
-                          <a:latin typeface="Calibri" pitchFamily="34" charset="0"/>
-                          <a:ea typeface="Calibri" pitchFamily="34" charset="-122"/>
-                          <a:cs typeface="Calibri" pitchFamily="34" charset="-120"/>
-                        </a:rPr>
-                        <a:t>4.5</a:t>
-                      </a:r>
-                      <a:endParaRPr lang="en-US" sz="1300" dirty="0">
-                        <a:latin typeface="Calibri" charset="0"/>
-                        <a:ea typeface="Calibri" charset="0"/>
-                        <a:cs typeface="Calibri" charset="0"/>
-                      </a:endParaRPr>
-                    </a:p>
-                  </a:txBody>
-                  <a:tcPr marL="91440" marR="91440" marT="45720" marB="45720">
-                    <a:lnL w="12700" cap="flat" cmpd="sng" algn="ctr">
-                      <a:solidFill>
-                        <a:srgbClr val="2A3441"/>
-                      </a:solidFill>
-                      <a:prstDash val="solid"/>
-                      <a:round/>
-                      <a:headEnd type="none" w="med" len="med"/>
-                      <a:tailEnd type="none" w="med" len="med"/>
-                    </a:lnL>
-                    <a:lnR w="12700" cap="flat" cmpd="sng" algn="ctr">
-                      <a:solidFill>
-                        <a:srgbClr val="2A3441"/>
-                      </a:solidFill>
-                      <a:prstDash val="solid"/>
-                      <a:round/>
-                      <a:headEnd type="none" w="med" len="med"/>
-                      <a:tailEnd type="none" w="med" len="med"/>
-                    </a:lnR>
-                    <a:lnT w="12700" cap="flat" cmpd="sng" algn="ctr">
-                      <a:solidFill>
-                        <a:srgbClr val="2A3441"/>
-                      </a:solidFill>
-                      <a:prstDash val="solid"/>
-                      <a:round/>
-                      <a:headEnd type="none" w="med" len="med"/>
-                      <a:tailEnd type="none" w="med" len="med"/>
-                    </a:lnT>
-                    <a:lnB w="12700" cap="flat" cmpd="sng" algn="ctr">
-                      <a:solidFill>
-                        <a:srgbClr val="2A3441"/>
-                      </a:solidFill>
-                      <a:prstDash val="solid"/>
-                      <a:round/>
-                      <a:headEnd type="none" w="med" len="med"/>
-                      <a:tailEnd type="none" w="med" len="med"/>
-                    </a:lnB>
-                    <a:solidFill>
-                      <a:srgbClr val="141B24"/>
+                      <a:srgbClr val="39FF88"/>
                     </a:solidFill>
                   </a:tcPr>
                 </a:tc>
               </a:tr>
-              <a:tr h="402336">
-                <a:tc>
-                  <a:txBody>
-                    <a:bodyPr/>
-                    <a:lstStyle/>
-                    <a:p>
-                      <a:pPr indent="0" marL="0">
-                        <a:buNone/>
-                      </a:pPr>
-                      <a:r>
-                        <a:rPr lang="en-US" sz="1300" dirty="0">
-                          <a:solidFill>
-                            <a:srgbClr val="E6EDF3"/>
-                          </a:solidFill>
-                          <a:latin typeface="Calibri" pitchFamily="34" charset="0"/>
-                          <a:ea typeface="Calibri" pitchFamily="34" charset="-122"/>
-                          <a:cs typeface="Calibri" pitchFamily="34" charset="-120"/>
-                        </a:rPr>
-                        <a:t>Satellite-like</a:t>
-                      </a:r>
-                      <a:endParaRPr lang="en-US" sz="1300" dirty="0">
-                        <a:latin typeface="Calibri" charset="0"/>
-                        <a:ea typeface="Calibri" charset="0"/>
-                        <a:cs typeface="Calibri" charset="0"/>
-                      </a:endParaRPr>
-                    </a:p>
-                  </a:txBody>
-                  <a:tcPr marL="91440" marR="91440" marT="45720" marB="45720">
-                    <a:lnL w="12700" cap="flat" cmpd="sng" algn="ctr">
-                      <a:solidFill>
-                        <a:srgbClr val="2A3441"/>
-                      </a:solidFill>
-                      <a:prstDash val="solid"/>
-                      <a:round/>
-                      <a:headEnd type="none" w="med" len="med"/>
-                      <a:tailEnd type="none" w="med" len="med"/>
-                    </a:lnL>
-                    <a:lnR w="12700" cap="flat" cmpd="sng" algn="ctr">
-                      <a:solidFill>
-                        <a:srgbClr val="2A3441"/>
-                      </a:solidFill>
-                      <a:prstDash val="solid"/>
-                      <a:round/>
-                      <a:headEnd type="none" w="med" len="med"/>
-                      <a:tailEnd type="none" w="med" len="med"/>
-                    </a:lnR>
-                    <a:lnT w="12700" cap="flat" cmpd="sng" algn="ctr">
-                      <a:solidFill>
-                        <a:srgbClr val="2A3441"/>
-                      </a:solidFill>
-                      <a:prstDash val="solid"/>
-                      <a:round/>
-                      <a:headEnd type="none" w="med" len="med"/>
-                      <a:tailEnd type="none" w="med" len="med"/>
-                    </a:lnT>
-                    <a:lnB w="12700" cap="flat" cmpd="sng" algn="ctr">
-                      <a:solidFill>
-                        <a:srgbClr val="2A3441"/>
-                      </a:solidFill>
-                      <a:prstDash val="solid"/>
-                      <a:round/>
-                      <a:headEnd type="none" w="med" len="med"/>
-                      <a:tailEnd type="none" w="med" len="med"/>
-                    </a:lnB>
-                    <a:solidFill>
-                      <a:srgbClr val="141B24"/>
-                    </a:solidFill>
-                  </a:tcPr>
-                </a:tc>
-                <a:tc>
-                  <a:txBody>
-                    <a:bodyPr/>
-                    <a:lstStyle/>
-                    <a:p>
-                      <a:pPr indent="0" marL="0">
-                        <a:buNone/>
-                      </a:pPr>
-                      <a:r>
-                        <a:rPr lang="en-US" sz="1300" dirty="0">
-                          <a:solidFill>
-                            <a:srgbClr val="E6EDF3"/>
-                          </a:solidFill>
-                          <a:latin typeface="Calibri" pitchFamily="34" charset="0"/>
-                          <a:ea typeface="Calibri" pitchFamily="34" charset="-122"/>
-                          <a:cs typeface="Calibri" pitchFamily="34" charset="-120"/>
-                        </a:rPr>
-                        <a:t>25.1</a:t>
-                      </a:r>
-                      <a:endParaRPr lang="en-US" sz="1300" dirty="0">
-                        <a:latin typeface="Calibri" charset="0"/>
-                        <a:ea typeface="Calibri" charset="0"/>
-                        <a:cs typeface="Calibri" charset="0"/>
-                      </a:endParaRPr>
-                    </a:p>
-                  </a:txBody>
-                  <a:tcPr marL="91440" marR="91440" marT="45720" marB="45720">
-                    <a:lnL w="12700" cap="flat" cmpd="sng" algn="ctr">
-                      <a:solidFill>
-                        <a:srgbClr val="2A3441"/>
-                      </a:solidFill>
-                      <a:prstDash val="solid"/>
-                      <a:round/>
-                      <a:headEnd type="none" w="med" len="med"/>
-                      <a:tailEnd type="none" w="med" len="med"/>
-                    </a:lnL>
-                    <a:lnR w="12700" cap="flat" cmpd="sng" algn="ctr">
-                      <a:solidFill>
-                        <a:srgbClr val="2A3441"/>
-                      </a:solidFill>
-                      <a:prstDash val="solid"/>
-                      <a:round/>
-                      <a:headEnd type="none" w="med" len="med"/>
-                      <a:tailEnd type="none" w="med" len="med"/>
-                    </a:lnR>
-                    <a:lnT w="12700" cap="flat" cmpd="sng" algn="ctr">
-                      <a:solidFill>
-                        <a:srgbClr val="2A3441"/>
-                      </a:solidFill>
-                      <a:prstDash val="solid"/>
-                      <a:round/>
-                      <a:headEnd type="none" w="med" len="med"/>
-                      <a:tailEnd type="none" w="med" len="med"/>
-                    </a:lnT>
-                    <a:lnB w="12700" cap="flat" cmpd="sng" algn="ctr">
-                      <a:solidFill>
-                        <a:srgbClr val="2A3441"/>
-                      </a:solidFill>
-                      <a:prstDash val="solid"/>
-                      <a:round/>
-                      <a:headEnd type="none" w="med" len="med"/>
-                      <a:tailEnd type="none" w="med" len="med"/>
-                    </a:lnB>
-                    <a:solidFill>
-                      <a:srgbClr val="141B24"/>
-                    </a:solidFill>
-                  </a:tcPr>
-                </a:tc>
-                <a:tc>
-                  <a:txBody>
-                    <a:bodyPr/>
-                    <a:lstStyle/>
-                    <a:p>
-                      <a:pPr indent="0" marL="0">
-                        <a:buNone/>
-                      </a:pPr>
-                      <a:r>
-                        <a:rPr lang="en-US" sz="1300" dirty="0">
-                          <a:solidFill>
-                            <a:srgbClr val="E6EDF3"/>
-                          </a:solidFill>
-                          <a:latin typeface="Calibri" pitchFamily="34" charset="0"/>
-                          <a:ea typeface="Calibri" pitchFamily="34" charset="-122"/>
-                          <a:cs typeface="Calibri" pitchFamily="34" charset="-120"/>
-                        </a:rPr>
-                        <a:t>20.0</a:t>
-                      </a:r>
-                      <a:endParaRPr lang="en-US" sz="1300" dirty="0">
-                        <a:latin typeface="Calibri" charset="0"/>
-                        <a:ea typeface="Calibri" charset="0"/>
-                        <a:cs typeface="Calibri" charset="0"/>
-                      </a:endParaRPr>
-                    </a:p>
-                  </a:txBody>
-                  <a:tcPr marL="91440" marR="91440" marT="45720" marB="45720">
-                    <a:lnL w="12700" cap="flat" cmpd="sng" algn="ctr">
-                      <a:solidFill>
-                        <a:srgbClr val="2A3441"/>
-                      </a:solidFill>
-                      <a:prstDash val="solid"/>
-                      <a:round/>
-                      <a:headEnd type="none" w="med" len="med"/>
-                      <a:tailEnd type="none" w="med" len="med"/>
-                    </a:lnL>
-                    <a:lnR w="12700" cap="flat" cmpd="sng" algn="ctr">
-                      <a:solidFill>
-                        <a:srgbClr val="2A3441"/>
-                      </a:solidFill>
-                      <a:prstDash val="solid"/>
-                      <a:round/>
-                      <a:headEnd type="none" w="med" len="med"/>
-                      <a:tailEnd type="none" w="med" len="med"/>
-                    </a:lnR>
-                    <a:lnT w="12700" cap="flat" cmpd="sng" algn="ctr">
-                      <a:solidFill>
-                        <a:srgbClr val="2A3441"/>
-                      </a:solidFill>
-                      <a:prstDash val="solid"/>
-                      <a:round/>
-                      <a:headEnd type="none" w="med" len="med"/>
-                      <a:tailEnd type="none" w="med" len="med"/>
-                    </a:lnT>
-                    <a:lnB w="12700" cap="flat" cmpd="sng" algn="ctr">
-                      <a:solidFill>
-                        <a:srgbClr val="2A3441"/>
-                      </a:solidFill>
-                      <a:prstDash val="solid"/>
-                      <a:round/>
-                      <a:headEnd type="none" w="med" len="med"/>
-                      <a:tailEnd type="none" w="med" len="med"/>
-                    </a:lnB>
-                    <a:solidFill>
-                      <a:srgbClr val="141B24"/>
-                    </a:solidFill>
-                  </a:tcPr>
-                </a:tc>
-                <a:tc>
-                  <a:txBody>
-                    <a:bodyPr/>
-                    <a:lstStyle/>
-                    <a:p>
-                      <a:pPr indent="0" marL="0">
-                        <a:buNone/>
-                      </a:pPr>
-                      <a:r>
-                        <a:rPr lang="en-US" sz="1300" dirty="0">
-                          <a:solidFill>
-                            <a:srgbClr val="E6EDF3"/>
-                          </a:solidFill>
-                          <a:latin typeface="Calibri" pitchFamily="34" charset="0"/>
-                          <a:ea typeface="Calibri" pitchFamily="34" charset="-122"/>
-                          <a:cs typeface="Calibri" pitchFamily="34" charset="-120"/>
-                        </a:rPr>
-                        <a:t>6.3</a:t>
-                      </a:r>
-                      <a:endParaRPr lang="en-US" sz="1300" dirty="0">
-                        <a:latin typeface="Calibri" charset="0"/>
-                        <a:ea typeface="Calibri" charset="0"/>
-                        <a:cs typeface="Calibri" charset="0"/>
-                      </a:endParaRPr>
-                    </a:p>
-                  </a:txBody>
-                  <a:tcPr marL="91440" marR="91440" marT="45720" marB="45720">
-                    <a:lnL w="12700" cap="flat" cmpd="sng" algn="ctr">
-                      <a:solidFill>
-                        <a:srgbClr val="2A3441"/>
-                      </a:solidFill>
-                      <a:prstDash val="solid"/>
-                      <a:round/>
-                      <a:headEnd type="none" w="med" len="med"/>
-                      <a:tailEnd type="none" w="med" len="med"/>
-                    </a:lnL>
-                    <a:lnR w="12700" cap="flat" cmpd="sng" algn="ctr">
-                      <a:solidFill>
-                        <a:srgbClr val="2A3441"/>
-                      </a:solidFill>
-                      <a:prstDash val="solid"/>
-                      <a:round/>
-                      <a:headEnd type="none" w="med" len="med"/>
-                      <a:tailEnd type="none" w="med" len="med"/>
-                    </a:lnR>
-                    <a:lnT w="12700" cap="flat" cmpd="sng" algn="ctr">
-                      <a:solidFill>
-                        <a:srgbClr val="2A3441"/>
-                      </a:solidFill>
-                      <a:prstDash val="solid"/>
-                      <a:round/>
-                      <a:headEnd type="none" w="med" len="med"/>
-                      <a:tailEnd type="none" w="med" len="med"/>
-                    </a:lnT>
-                    <a:lnB w="12700" cap="flat" cmpd="sng" algn="ctr">
-                      <a:solidFill>
-                        <a:srgbClr val="2A3441"/>
-                      </a:solidFill>
-                      <a:prstDash val="solid"/>
-                      <a:round/>
-                      <a:headEnd type="none" w="med" len="med"/>
-                      <a:tailEnd type="none" w="med" len="med"/>
-                    </a:lnB>
-                    <a:solidFill>
-                      <a:srgbClr val="141B24"/>
-                    </a:solidFill>
-                  </a:tcPr>
-                </a:tc>
-              </a:tr>
-              <a:tr h="402336">
-                <a:tc>
-                  <a:txBody>
-                    <a:bodyPr/>
-                    <a:lstStyle/>
-                    <a:p>
-                      <a:pPr indent="0" marL="0">
-                        <a:buNone/>
-                      </a:pPr>
-                      <a:r>
-                        <a:rPr lang="en-US" sz="1300" dirty="0">
-                          <a:solidFill>
-                            <a:srgbClr val="E6EDF3"/>
-                          </a:solidFill>
-                          <a:latin typeface="Calibri" pitchFamily="34" charset="0"/>
-                          <a:ea typeface="Calibri" pitchFamily="34" charset="-122"/>
-                          <a:cs typeface="Calibri" pitchFamily="34" charset="-120"/>
-                        </a:rPr>
-                        <a:t>Fast (3,000 pkts)</a:t>
-                      </a:r>
-                      <a:endParaRPr lang="en-US" sz="1300" dirty="0">
-                        <a:latin typeface="Calibri" charset="0"/>
-                        <a:ea typeface="Calibri" charset="0"/>
-                        <a:cs typeface="Calibri" charset="0"/>
-                      </a:endParaRPr>
-                    </a:p>
-                  </a:txBody>
-                  <a:tcPr marL="91440" marR="91440" marT="45720" marB="45720">
-                    <a:lnL w="12700" cap="flat" cmpd="sng" algn="ctr">
-                      <a:solidFill>
-                        <a:srgbClr val="2A3441"/>
-                      </a:solidFill>
-                      <a:prstDash val="solid"/>
-                      <a:round/>
-                      <a:headEnd type="none" w="med" len="med"/>
-                      <a:tailEnd type="none" w="med" len="med"/>
-                    </a:lnL>
-                    <a:lnR w="12700" cap="flat" cmpd="sng" algn="ctr">
-                      <a:solidFill>
-                        <a:srgbClr val="2A3441"/>
-                      </a:solidFill>
-                      <a:prstDash val="solid"/>
-                      <a:round/>
-                      <a:headEnd type="none" w="med" len="med"/>
-                      <a:tailEnd type="none" w="med" len="med"/>
-                    </a:lnR>
-                    <a:lnT w="12700" cap="flat" cmpd="sng" algn="ctr">
-                      <a:solidFill>
-                        <a:srgbClr val="2A3441"/>
-                      </a:solidFill>
-                      <a:prstDash val="solid"/>
-                      <a:round/>
-                      <a:headEnd type="none" w="med" len="med"/>
-                      <a:tailEnd type="none" w="med" len="med"/>
-                    </a:lnT>
-                    <a:lnB w="12700" cap="flat" cmpd="sng" algn="ctr">
-                      <a:solidFill>
-                        <a:srgbClr val="2A3441"/>
-                      </a:solidFill>
-                      <a:prstDash val="solid"/>
-                      <a:round/>
-                      <a:headEnd type="none" w="med" len="med"/>
-                      <a:tailEnd type="none" w="med" len="med"/>
-                    </a:lnB>
-                    <a:solidFill>
-                      <a:srgbClr val="141B24"/>
-                    </a:solidFill>
-                  </a:tcPr>
-                </a:tc>
-                <a:tc>
-                  <a:txBody>
-                    <a:bodyPr/>
-                    <a:lstStyle/>
-                    <a:p>
-                      <a:pPr indent="0" marL="0">
-                        <a:buNone/>
-                      </a:pPr>
-                      <a:r>
-                        <a:rPr lang="en-US" sz="1300" dirty="0">
-                          <a:solidFill>
-                            <a:srgbClr val="E6EDF3"/>
-                          </a:solidFill>
-                          <a:latin typeface="Calibri" pitchFamily="34" charset="0"/>
-                          <a:ea typeface="Calibri" pitchFamily="34" charset="-122"/>
-                          <a:cs typeface="Calibri" pitchFamily="34" charset="-120"/>
-                        </a:rPr>
-                        <a:t>19.8</a:t>
-                      </a:r>
-                      <a:endParaRPr lang="en-US" sz="1300" dirty="0">
-                        <a:latin typeface="Calibri" charset="0"/>
-                        <a:ea typeface="Calibri" charset="0"/>
-                        <a:cs typeface="Calibri" charset="0"/>
-                      </a:endParaRPr>
-                    </a:p>
-                  </a:txBody>
-                  <a:tcPr marL="91440" marR="91440" marT="45720" marB="45720">
-                    <a:lnL w="12700" cap="flat" cmpd="sng" algn="ctr">
-                      <a:solidFill>
-                        <a:srgbClr val="2A3441"/>
-                      </a:solidFill>
-                      <a:prstDash val="solid"/>
-                      <a:round/>
-                      <a:headEnd type="none" w="med" len="med"/>
-                      <a:tailEnd type="none" w="med" len="med"/>
-                    </a:lnL>
-                    <a:lnR w="12700" cap="flat" cmpd="sng" algn="ctr">
-                      <a:solidFill>
-                        <a:srgbClr val="2A3441"/>
-                      </a:solidFill>
-                      <a:prstDash val="solid"/>
-                      <a:round/>
-                      <a:headEnd type="none" w="med" len="med"/>
-                      <a:tailEnd type="none" w="med" len="med"/>
-                    </a:lnR>
-                    <a:lnT w="12700" cap="flat" cmpd="sng" algn="ctr">
-                      <a:solidFill>
-                        <a:srgbClr val="2A3441"/>
-                      </a:solidFill>
-                      <a:prstDash val="solid"/>
-                      <a:round/>
-                      <a:headEnd type="none" w="med" len="med"/>
-                      <a:tailEnd type="none" w="med" len="med"/>
-                    </a:lnT>
-                    <a:lnB w="12700" cap="flat" cmpd="sng" algn="ctr">
-                      <a:solidFill>
-                        <a:srgbClr val="2A3441"/>
-                      </a:solidFill>
-                      <a:prstDash val="solid"/>
-                      <a:round/>
-                      <a:headEnd type="none" w="med" len="med"/>
-                      <a:tailEnd type="none" w="med" len="med"/>
-                    </a:lnB>
-                    <a:solidFill>
-                      <a:srgbClr val="141B24"/>
-                    </a:solidFill>
-                  </a:tcPr>
-                </a:tc>
-                <a:tc>
-                  <a:txBody>
-                    <a:bodyPr/>
-                    <a:lstStyle/>
-                    <a:p>
-                      <a:pPr indent="0" marL="0">
-                        <a:buNone/>
-                      </a:pPr>
-                      <a:r>
-                        <a:rPr lang="en-US" sz="1300" dirty="0">
-                          <a:solidFill>
-                            <a:srgbClr val="E6EDF3"/>
-                          </a:solidFill>
-                          <a:latin typeface="Calibri" pitchFamily="34" charset="0"/>
-                          <a:ea typeface="Calibri" pitchFamily="34" charset="-122"/>
-                          <a:cs typeface="Calibri" pitchFamily="34" charset="-120"/>
-                        </a:rPr>
-                        <a:t>17.3</a:t>
-                      </a:r>
-                      <a:endParaRPr lang="en-US" sz="1300" dirty="0">
-                        <a:latin typeface="Calibri" charset="0"/>
-                        <a:ea typeface="Calibri" charset="0"/>
-                        <a:cs typeface="Calibri" charset="0"/>
-                      </a:endParaRPr>
-                    </a:p>
-                  </a:txBody>
-                  <a:tcPr marL="91440" marR="91440" marT="45720" marB="45720">
-                    <a:lnL w="12700" cap="flat" cmpd="sng" algn="ctr">
-                      <a:solidFill>
-                        <a:srgbClr val="2A3441"/>
-                      </a:solidFill>
-                      <a:prstDash val="solid"/>
-                      <a:round/>
-                      <a:headEnd type="none" w="med" len="med"/>
-                      <a:tailEnd type="none" w="med" len="med"/>
-                    </a:lnL>
-                    <a:lnR w="12700" cap="flat" cmpd="sng" algn="ctr">
-                      <a:solidFill>
-                        <a:srgbClr val="2A3441"/>
-                      </a:solidFill>
-                      <a:prstDash val="solid"/>
-                      <a:round/>
-                      <a:headEnd type="none" w="med" len="med"/>
-                      <a:tailEnd type="none" w="med" len="med"/>
-                    </a:lnR>
-                    <a:lnT w="12700" cap="flat" cmpd="sng" algn="ctr">
-                      <a:solidFill>
-                        <a:srgbClr val="2A3441"/>
-                      </a:solidFill>
-                      <a:prstDash val="solid"/>
-                      <a:round/>
-                      <a:headEnd type="none" w="med" len="med"/>
-                      <a:tailEnd type="none" w="med" len="med"/>
-                    </a:lnT>
-                    <a:lnB w="12700" cap="flat" cmpd="sng" algn="ctr">
-                      <a:solidFill>
-                        <a:srgbClr val="2A3441"/>
-                      </a:solidFill>
-                      <a:prstDash val="solid"/>
-                      <a:round/>
-                      <a:headEnd type="none" w="med" len="med"/>
-                      <a:tailEnd type="none" w="med" len="med"/>
-                    </a:lnB>
-                    <a:solidFill>
-                      <a:srgbClr val="141B24"/>
-                    </a:solidFill>
-                  </a:tcPr>
-                </a:tc>
-                <a:tc>
-                  <a:txBody>
-                    <a:bodyPr/>
-                    <a:lstStyle/>
-                    <a:p>
-                      <a:pPr indent="0" marL="0">
-                        <a:buNone/>
-                      </a:pPr>
-                      <a:r>
-                        <a:rPr lang="en-US" sz="1300" dirty="0">
-                          <a:solidFill>
-                            <a:srgbClr val="E6EDF3"/>
-                          </a:solidFill>
-                          <a:latin typeface="Calibri" pitchFamily="34" charset="0"/>
-                          <a:ea typeface="Calibri" pitchFamily="34" charset="-122"/>
-                          <a:cs typeface="Calibri" pitchFamily="34" charset="-120"/>
-                        </a:rPr>
-                        <a:t>4.0</a:t>
-                      </a:r>
-                      <a:endParaRPr lang="en-US" sz="1300" dirty="0">
-                        <a:latin typeface="Calibri" charset="0"/>
-                        <a:ea typeface="Calibri" charset="0"/>
-                        <a:cs typeface="Calibri" charset="0"/>
-                      </a:endParaRPr>
-                    </a:p>
-                  </a:txBody>
-                  <a:tcPr marL="91440" marR="91440" marT="45720" marB="45720">
-                    <a:lnL w="12700" cap="flat" cmpd="sng" algn="ctr">
-                      <a:solidFill>
-                        <a:srgbClr val="2A3441"/>
-                      </a:solidFill>
-                      <a:prstDash val="solid"/>
-                      <a:round/>
-                      <a:headEnd type="none" w="med" len="med"/>
-                      <a:tailEnd type="none" w="med" len="med"/>
-                    </a:lnL>
-                    <a:lnR w="12700" cap="flat" cmpd="sng" algn="ctr">
-                      <a:solidFill>
-                        <a:srgbClr val="2A3441"/>
-                      </a:solidFill>
-                      <a:prstDash val="solid"/>
-                      <a:round/>
-                      <a:headEnd type="none" w="med" len="med"/>
-                      <a:tailEnd type="none" w="med" len="med"/>
-                    </a:lnR>
-                    <a:lnT w="12700" cap="flat" cmpd="sng" algn="ctr">
-                      <a:solidFill>
-                        <a:srgbClr val="2A3441"/>
-                      </a:solidFill>
-                      <a:prstDash val="solid"/>
-                      <a:round/>
-                      <a:headEnd type="none" w="med" len="med"/>
-                      <a:tailEnd type="none" w="med" len="med"/>
-                    </a:lnT>
-                    <a:lnB w="12700" cap="flat" cmpd="sng" algn="ctr">
-                      <a:solidFill>
-                        <a:srgbClr val="2A3441"/>
-                      </a:solidFill>
-                      <a:prstDash val="solid"/>
-                      <a:round/>
-                      <a:headEnd type="none" w="med" len="med"/>
-                      <a:tailEnd type="none" w="med" len="med"/>
-                    </a:lnB>
-                    <a:solidFill>
-                      <a:srgbClr val="141B24"/>
-                    </a:solidFill>
-                  </a:tcPr>
-                </a:tc>
-              </a:tr>
-              <a:tr h="402336">
+              <a:tr h="420624">
                 <a:tc>
                   <a:txBody>
                     <a:bodyPr/>
@@ -18018,7 +17893,7 @@
                           <a:ea typeface="Calibri" pitchFamily="34" charset="-122"/>
                           <a:cs typeface="Calibri" pitchFamily="34" charset="-120"/>
                         </a:rPr>
-                        <a:t>1.30</a:t>
+                        <a:t>1.41</a:t>
                       </a:r>
                       <a:endParaRPr lang="en-US" sz="1300" dirty="0">
                         <a:latin typeface="Calibri" charset="0"/>
@@ -18154,77 +18029,7 @@
                           <a:ea typeface="Calibri" pitchFamily="34" charset="-122"/>
                           <a:cs typeface="Calibri" pitchFamily="34" charset="-120"/>
                         </a:rPr>
-                        <a:t>1.09</a:t>
-                      </a:r>
-                      <a:endParaRPr lang="en-US" sz="1300" dirty="0">
-                        <a:latin typeface="Calibri" charset="0"/>
-                        <a:ea typeface="Calibri" charset="0"/>
-                        <a:cs typeface="Calibri" charset="0"/>
-                      </a:endParaRPr>
-                    </a:p>
-                  </a:txBody>
-                  <a:tcPr marL="91440" marR="91440" marT="45720" marB="45720">
-                    <a:lnL w="12700" cap="flat" cmpd="sng" algn="ctr">
-                      <a:solidFill>
-                        <a:srgbClr val="2A3441"/>
-                      </a:solidFill>
-                      <a:prstDash val="solid"/>
-                      <a:round/>
-                      <a:headEnd type="none" w="med" len="med"/>
-                      <a:tailEnd type="none" w="med" len="med"/>
-                    </a:lnL>
-                    <a:lnR w="12700" cap="flat" cmpd="sng" algn="ctr">
-                      <a:solidFill>
-                        <a:srgbClr val="2A3441"/>
-                      </a:solidFill>
-                      <a:prstDash val="solid"/>
-                      <a:round/>
-                      <a:headEnd type="none" w="med" len="med"/>
-                      <a:tailEnd type="none" w="med" len="med"/>
-                    </a:lnR>
-                    <a:lnT w="12700" cap="flat" cmpd="sng" algn="ctr">
-                      <a:solidFill>
-                        <a:srgbClr val="2A3441"/>
-                      </a:solidFill>
-                      <a:prstDash val="solid"/>
-                      <a:round/>
-                      <a:headEnd type="none" w="med" len="med"/>
-                      <a:tailEnd type="none" w="med" len="med"/>
-                    </a:lnT>
-                    <a:lnB w="12700" cap="flat" cmpd="sng" algn="ctr">
-                      <a:solidFill>
-                        <a:srgbClr val="2A3441"/>
-                      </a:solidFill>
-                      <a:prstDash val="solid"/>
-                      <a:round/>
-                      <a:headEnd type="none" w="med" len="med"/>
-                      <a:tailEnd type="none" w="med" len="med"/>
-                    </a:lnB>
-                    <a:solidFill>
-                      <a:srgbClr val="141B24"/>
-                    </a:solidFill>
-                  </a:tcPr>
-                </a:tc>
-              </a:tr>
-              <a:tr h="402336">
-                <a:tc>
-                  <a:txBody>
-                    <a:bodyPr/>
-                    <a:lstStyle/>
-                    <a:p>
-                      <a:pPr indent="0" marL="0">
-                        <a:buNone/>
-                      </a:pPr>
-                      <a:r>
-                        <a:rPr lang="en-US" sz="1300" dirty="0">
-                          <a:solidFill>
-                            <a:srgbClr val="E6EDF3"/>
-                          </a:solidFill>
-                          <a:latin typeface="Calibri" pitchFamily="34" charset="0"/>
-                          <a:ea typeface="Calibri" pitchFamily="34" charset="-122"/>
-                          <a:cs typeface="Calibri" pitchFamily="34" charset="-120"/>
-                        </a:rPr>
-                        <a:t>Hostile, 10% loss</a:t>
+                        <a:t>1.19</a:t>
                       </a:r>
                       <a:endParaRPr lang="en-US" sz="1300" dirty="0">
                         <a:latin typeface="Calibri" charset="0"/>
@@ -18292,7 +18097,77 @@
                           <a:ea typeface="Calibri" pitchFamily="34" charset="-122"/>
                           <a:cs typeface="Calibri" pitchFamily="34" charset="-120"/>
                         </a:rPr>
-                        <a:t>7.5</a:t>
+                        <a:t>0.92</a:t>
+                      </a:r>
+                      <a:endParaRPr lang="en-US" sz="1300" dirty="0">
+                        <a:latin typeface="Calibri" charset="0"/>
+                        <a:ea typeface="Calibri" charset="0"/>
+                        <a:cs typeface="Calibri" charset="0"/>
+                      </a:endParaRPr>
+                    </a:p>
+                  </a:txBody>
+                  <a:tcPr marL="91440" marR="91440" marT="45720" marB="45720">
+                    <a:lnL w="12700" cap="flat" cmpd="sng" algn="ctr">
+                      <a:solidFill>
+                        <a:srgbClr val="2A3441"/>
+                      </a:solidFill>
+                      <a:prstDash val="solid"/>
+                      <a:round/>
+                      <a:headEnd type="none" w="med" len="med"/>
+                      <a:tailEnd type="none" w="med" len="med"/>
+                    </a:lnL>
+                    <a:lnR w="12700" cap="flat" cmpd="sng" algn="ctr">
+                      <a:solidFill>
+                        <a:srgbClr val="2A3441"/>
+                      </a:solidFill>
+                      <a:prstDash val="solid"/>
+                      <a:round/>
+                      <a:headEnd type="none" w="med" len="med"/>
+                      <a:tailEnd type="none" w="med" len="med"/>
+                    </a:lnR>
+                    <a:lnT w="12700" cap="flat" cmpd="sng" algn="ctr">
+                      <a:solidFill>
+                        <a:srgbClr val="2A3441"/>
+                      </a:solidFill>
+                      <a:prstDash val="solid"/>
+                      <a:round/>
+                      <a:headEnd type="none" w="med" len="med"/>
+                      <a:tailEnd type="none" w="med" len="med"/>
+                    </a:lnT>
+                    <a:lnB w="12700" cap="flat" cmpd="sng" algn="ctr">
+                      <a:solidFill>
+                        <a:srgbClr val="2A3441"/>
+                      </a:solidFill>
+                      <a:prstDash val="solid"/>
+                      <a:round/>
+                      <a:headEnd type="none" w="med" len="med"/>
+                      <a:tailEnd type="none" w="med" len="med"/>
+                    </a:lnB>
+                    <a:solidFill>
+                      <a:srgbClr val="141B24"/>
+                    </a:solidFill>
+                  </a:tcPr>
+                </a:tc>
+              </a:tr>
+              <a:tr h="420624">
+                <a:tc>
+                  <a:txBody>
+                    <a:bodyPr/>
+                    <a:lstStyle/>
+                    <a:p>
+                      <a:pPr indent="0" marL="0">
+                        <a:buNone/>
+                      </a:pPr>
+                      <a:r>
+                        <a:rPr lang="en-US" sz="1300" dirty="0">
+                          <a:solidFill>
+                            <a:srgbClr val="E6EDF3"/>
+                          </a:solidFill>
+                          <a:latin typeface="Calibri" pitchFamily="34" charset="0"/>
+                          <a:ea typeface="Calibri" pitchFamily="34" charset="-122"/>
+                          <a:cs typeface="Calibri" pitchFamily="34" charset="-120"/>
+                        </a:rPr>
+                        <a:t>Lossy 2%</a:t>
                       </a:r>
                       <a:endParaRPr lang="en-US" sz="1300" dirty="0">
                         <a:latin typeface="Calibri" charset="0"/>
@@ -18360,7 +18235,7 @@
                           <a:ea typeface="Calibri" pitchFamily="34" charset="-122"/>
                           <a:cs typeface="Calibri" pitchFamily="34" charset="-120"/>
                         </a:rPr>
-                        <a:t>8.5</a:t>
+                        <a:t>7.98</a:t>
                       </a:r>
                       <a:endParaRPr lang="en-US" sz="1300" dirty="0">
                         <a:latin typeface="Calibri" charset="0"/>
@@ -18428,7 +18303,1169 @@
                           <a:ea typeface="Calibri" pitchFamily="34" charset="-122"/>
                           <a:cs typeface="Calibri" pitchFamily="34" charset="-120"/>
                         </a:rPr>
-                        <a:t>5.9</a:t>
+                        <a:t>7.05</a:t>
+                      </a:r>
+                      <a:endParaRPr lang="en-US" sz="1300" dirty="0">
+                        <a:latin typeface="Calibri" charset="0"/>
+                        <a:ea typeface="Calibri" charset="0"/>
+                        <a:cs typeface="Calibri" charset="0"/>
+                      </a:endParaRPr>
+                    </a:p>
+                  </a:txBody>
+                  <a:tcPr marL="91440" marR="91440" marT="45720" marB="45720">
+                    <a:lnL w="12700" cap="flat" cmpd="sng" algn="ctr">
+                      <a:solidFill>
+                        <a:srgbClr val="2A3441"/>
+                      </a:solidFill>
+                      <a:prstDash val="solid"/>
+                      <a:round/>
+                      <a:headEnd type="none" w="med" len="med"/>
+                      <a:tailEnd type="none" w="med" len="med"/>
+                    </a:lnL>
+                    <a:lnR w="12700" cap="flat" cmpd="sng" algn="ctr">
+                      <a:solidFill>
+                        <a:srgbClr val="2A3441"/>
+                      </a:solidFill>
+                      <a:prstDash val="solid"/>
+                      <a:round/>
+                      <a:headEnd type="none" w="med" len="med"/>
+                      <a:tailEnd type="none" w="med" len="med"/>
+                    </a:lnR>
+                    <a:lnT w="12700" cap="flat" cmpd="sng" algn="ctr">
+                      <a:solidFill>
+                        <a:srgbClr val="2A3441"/>
+                      </a:solidFill>
+                      <a:prstDash val="solid"/>
+                      <a:round/>
+                      <a:headEnd type="none" w="med" len="med"/>
+                      <a:tailEnd type="none" w="med" len="med"/>
+                    </a:lnT>
+                    <a:lnB w="12700" cap="flat" cmpd="sng" algn="ctr">
+                      <a:solidFill>
+                        <a:srgbClr val="2A3441"/>
+                      </a:solidFill>
+                      <a:prstDash val="solid"/>
+                      <a:round/>
+                      <a:headEnd type="none" w="med" len="med"/>
+                      <a:tailEnd type="none" w="med" len="med"/>
+                    </a:lnB>
+                    <a:solidFill>
+                      <a:srgbClr val="141B24"/>
+                    </a:solidFill>
+                  </a:tcPr>
+                </a:tc>
+                <a:tc>
+                  <a:txBody>
+                    <a:bodyPr/>
+                    <a:lstStyle/>
+                    <a:p>
+                      <a:pPr indent="0" marL="0">
+                        <a:buNone/>
+                      </a:pPr>
+                      <a:r>
+                        <a:rPr lang="en-US" sz="1300" dirty="0">
+                          <a:solidFill>
+                            <a:srgbClr val="E6EDF3"/>
+                          </a:solidFill>
+                          <a:latin typeface="Calibri" pitchFamily="34" charset="0"/>
+                          <a:ea typeface="Calibri" pitchFamily="34" charset="-122"/>
+                          <a:cs typeface="Calibri" pitchFamily="34" charset="-120"/>
+                        </a:rPr>
+                        <a:t>13.92</a:t>
+                      </a:r>
+                      <a:endParaRPr lang="en-US" sz="1300" dirty="0">
+                        <a:latin typeface="Calibri" charset="0"/>
+                        <a:ea typeface="Calibri" charset="0"/>
+                        <a:cs typeface="Calibri" charset="0"/>
+                      </a:endParaRPr>
+                    </a:p>
+                  </a:txBody>
+                  <a:tcPr marL="91440" marR="91440" marT="45720" marB="45720">
+                    <a:lnL w="12700" cap="flat" cmpd="sng" algn="ctr">
+                      <a:solidFill>
+                        <a:srgbClr val="2A3441"/>
+                      </a:solidFill>
+                      <a:prstDash val="solid"/>
+                      <a:round/>
+                      <a:headEnd type="none" w="med" len="med"/>
+                      <a:tailEnd type="none" w="med" len="med"/>
+                    </a:lnL>
+                    <a:lnR w="12700" cap="flat" cmpd="sng" algn="ctr">
+                      <a:solidFill>
+                        <a:srgbClr val="2A3441"/>
+                      </a:solidFill>
+                      <a:prstDash val="solid"/>
+                      <a:round/>
+                      <a:headEnd type="none" w="med" len="med"/>
+                      <a:tailEnd type="none" w="med" len="med"/>
+                    </a:lnR>
+                    <a:lnT w="12700" cap="flat" cmpd="sng" algn="ctr">
+                      <a:solidFill>
+                        <a:srgbClr val="2A3441"/>
+                      </a:solidFill>
+                      <a:prstDash val="solid"/>
+                      <a:round/>
+                      <a:headEnd type="none" w="med" len="med"/>
+                      <a:tailEnd type="none" w="med" len="med"/>
+                    </a:lnT>
+                    <a:lnB w="12700" cap="flat" cmpd="sng" algn="ctr">
+                      <a:solidFill>
+                        <a:srgbClr val="2A3441"/>
+                      </a:solidFill>
+                      <a:prstDash val="solid"/>
+                      <a:round/>
+                      <a:headEnd type="none" w="med" len="med"/>
+                      <a:tailEnd type="none" w="med" len="med"/>
+                    </a:lnB>
+                    <a:solidFill>
+                      <a:srgbClr val="141B24"/>
+                    </a:solidFill>
+                  </a:tcPr>
+                </a:tc>
+                <a:tc>
+                  <a:txBody>
+                    <a:bodyPr/>
+                    <a:lstStyle/>
+                    <a:p>
+                      <a:pPr indent="0" marL="0">
+                        <a:buNone/>
+                      </a:pPr>
+                      <a:r>
+                        <a:rPr lang="en-US" sz="1300" dirty="0">
+                          <a:solidFill>
+                            <a:srgbClr val="E6EDF3"/>
+                          </a:solidFill>
+                          <a:latin typeface="Calibri" pitchFamily="34" charset="0"/>
+                          <a:ea typeface="Calibri" pitchFamily="34" charset="-122"/>
+                          <a:cs typeface="Calibri" pitchFamily="34" charset="-120"/>
+                        </a:rPr>
+                        <a:t>3.62</a:t>
+                      </a:r>
+                      <a:endParaRPr lang="en-US" sz="1300" dirty="0">
+                        <a:latin typeface="Calibri" charset="0"/>
+                        <a:ea typeface="Calibri" charset="0"/>
+                        <a:cs typeface="Calibri" charset="0"/>
+                      </a:endParaRPr>
+                    </a:p>
+                  </a:txBody>
+                  <a:tcPr marL="91440" marR="91440" marT="45720" marB="45720">
+                    <a:lnL w="12700" cap="flat" cmpd="sng" algn="ctr">
+                      <a:solidFill>
+                        <a:srgbClr val="2A3441"/>
+                      </a:solidFill>
+                      <a:prstDash val="solid"/>
+                      <a:round/>
+                      <a:headEnd type="none" w="med" len="med"/>
+                      <a:tailEnd type="none" w="med" len="med"/>
+                    </a:lnL>
+                    <a:lnR w="12700" cap="flat" cmpd="sng" algn="ctr">
+                      <a:solidFill>
+                        <a:srgbClr val="2A3441"/>
+                      </a:solidFill>
+                      <a:prstDash val="solid"/>
+                      <a:round/>
+                      <a:headEnd type="none" w="med" len="med"/>
+                      <a:tailEnd type="none" w="med" len="med"/>
+                    </a:lnR>
+                    <a:lnT w="12700" cap="flat" cmpd="sng" algn="ctr">
+                      <a:solidFill>
+                        <a:srgbClr val="2A3441"/>
+                      </a:solidFill>
+                      <a:prstDash val="solid"/>
+                      <a:round/>
+                      <a:headEnd type="none" w="med" len="med"/>
+                      <a:tailEnd type="none" w="med" len="med"/>
+                    </a:lnT>
+                    <a:lnB w="12700" cap="flat" cmpd="sng" algn="ctr">
+                      <a:solidFill>
+                        <a:srgbClr val="2A3441"/>
+                      </a:solidFill>
+                      <a:prstDash val="solid"/>
+                      <a:round/>
+                      <a:headEnd type="none" w="med" len="med"/>
+                      <a:tailEnd type="none" w="med" len="med"/>
+                    </a:lnB>
+                    <a:solidFill>
+                      <a:srgbClr val="141B24"/>
+                    </a:solidFill>
+                  </a:tcPr>
+                </a:tc>
+              </a:tr>
+              <a:tr h="420624">
+                <a:tc>
+                  <a:txBody>
+                    <a:bodyPr/>
+                    <a:lstStyle/>
+                    <a:p>
+                      <a:pPr indent="0" marL="0">
+                        <a:buNone/>
+                      </a:pPr>
+                      <a:r>
+                        <a:rPr lang="en-US" sz="1300" dirty="0">
+                          <a:solidFill>
+                            <a:srgbClr val="E6EDF3"/>
+                          </a:solidFill>
+                          <a:latin typeface="Calibri" pitchFamily="34" charset="0"/>
+                          <a:ea typeface="Calibri" pitchFamily="34" charset="-122"/>
+                          <a:cs typeface="Calibri" pitchFamily="34" charset="-120"/>
+                        </a:rPr>
+                        <a:t>Satellite-like</a:t>
+                      </a:r>
+                      <a:endParaRPr lang="en-US" sz="1300" dirty="0">
+                        <a:latin typeface="Calibri" charset="0"/>
+                        <a:ea typeface="Calibri" charset="0"/>
+                        <a:cs typeface="Calibri" charset="0"/>
+                      </a:endParaRPr>
+                    </a:p>
+                  </a:txBody>
+                  <a:tcPr marL="91440" marR="91440" marT="45720" marB="45720">
+                    <a:lnL w="12700" cap="flat" cmpd="sng" algn="ctr">
+                      <a:solidFill>
+                        <a:srgbClr val="2A3441"/>
+                      </a:solidFill>
+                      <a:prstDash val="solid"/>
+                      <a:round/>
+                      <a:headEnd type="none" w="med" len="med"/>
+                      <a:tailEnd type="none" w="med" len="med"/>
+                    </a:lnL>
+                    <a:lnR w="12700" cap="flat" cmpd="sng" algn="ctr">
+                      <a:solidFill>
+                        <a:srgbClr val="2A3441"/>
+                      </a:solidFill>
+                      <a:prstDash val="solid"/>
+                      <a:round/>
+                      <a:headEnd type="none" w="med" len="med"/>
+                      <a:tailEnd type="none" w="med" len="med"/>
+                    </a:lnR>
+                    <a:lnT w="12700" cap="flat" cmpd="sng" algn="ctr">
+                      <a:solidFill>
+                        <a:srgbClr val="2A3441"/>
+                      </a:solidFill>
+                      <a:prstDash val="solid"/>
+                      <a:round/>
+                      <a:headEnd type="none" w="med" len="med"/>
+                      <a:tailEnd type="none" w="med" len="med"/>
+                    </a:lnT>
+                    <a:lnB w="12700" cap="flat" cmpd="sng" algn="ctr">
+                      <a:solidFill>
+                        <a:srgbClr val="2A3441"/>
+                      </a:solidFill>
+                      <a:prstDash val="solid"/>
+                      <a:round/>
+                      <a:headEnd type="none" w="med" len="med"/>
+                      <a:tailEnd type="none" w="med" len="med"/>
+                    </a:lnB>
+                    <a:solidFill>
+                      <a:srgbClr val="141B24"/>
+                    </a:solidFill>
+                  </a:tcPr>
+                </a:tc>
+                <a:tc>
+                  <a:txBody>
+                    <a:bodyPr/>
+                    <a:lstStyle/>
+                    <a:p>
+                      <a:pPr indent="0" marL="0">
+                        <a:buNone/>
+                      </a:pPr>
+                      <a:r>
+                        <a:rPr lang="en-US" sz="1300" dirty="0">
+                          <a:solidFill>
+                            <a:srgbClr val="E6EDF3"/>
+                          </a:solidFill>
+                          <a:latin typeface="Calibri" pitchFamily="34" charset="0"/>
+                          <a:ea typeface="Calibri" pitchFamily="34" charset="-122"/>
+                          <a:cs typeface="Calibri" pitchFamily="34" charset="-120"/>
+                        </a:rPr>
+                        <a:t>17.93</a:t>
+                      </a:r>
+                      <a:endParaRPr lang="en-US" sz="1300" dirty="0">
+                        <a:latin typeface="Calibri" charset="0"/>
+                        <a:ea typeface="Calibri" charset="0"/>
+                        <a:cs typeface="Calibri" charset="0"/>
+                      </a:endParaRPr>
+                    </a:p>
+                  </a:txBody>
+                  <a:tcPr marL="91440" marR="91440" marT="45720" marB="45720">
+                    <a:lnL w="12700" cap="flat" cmpd="sng" algn="ctr">
+                      <a:solidFill>
+                        <a:srgbClr val="2A3441"/>
+                      </a:solidFill>
+                      <a:prstDash val="solid"/>
+                      <a:round/>
+                      <a:headEnd type="none" w="med" len="med"/>
+                      <a:tailEnd type="none" w="med" len="med"/>
+                    </a:lnL>
+                    <a:lnR w="12700" cap="flat" cmpd="sng" algn="ctr">
+                      <a:solidFill>
+                        <a:srgbClr val="2A3441"/>
+                      </a:solidFill>
+                      <a:prstDash val="solid"/>
+                      <a:round/>
+                      <a:headEnd type="none" w="med" len="med"/>
+                      <a:tailEnd type="none" w="med" len="med"/>
+                    </a:lnR>
+                    <a:lnT w="12700" cap="flat" cmpd="sng" algn="ctr">
+                      <a:solidFill>
+                        <a:srgbClr val="2A3441"/>
+                      </a:solidFill>
+                      <a:prstDash val="solid"/>
+                      <a:round/>
+                      <a:headEnd type="none" w="med" len="med"/>
+                      <a:tailEnd type="none" w="med" len="med"/>
+                    </a:lnT>
+                    <a:lnB w="12700" cap="flat" cmpd="sng" algn="ctr">
+                      <a:solidFill>
+                        <a:srgbClr val="2A3441"/>
+                      </a:solidFill>
+                      <a:prstDash val="solid"/>
+                      <a:round/>
+                      <a:headEnd type="none" w="med" len="med"/>
+                      <a:tailEnd type="none" w="med" len="med"/>
+                    </a:lnB>
+                    <a:solidFill>
+                      <a:srgbClr val="141B24"/>
+                    </a:solidFill>
+                  </a:tcPr>
+                </a:tc>
+                <a:tc>
+                  <a:txBody>
+                    <a:bodyPr/>
+                    <a:lstStyle/>
+                    <a:p>
+                      <a:pPr indent="0" marL="0">
+                        <a:buNone/>
+                      </a:pPr>
+                      <a:r>
+                        <a:rPr lang="en-US" sz="1300" dirty="0">
+                          <a:solidFill>
+                            <a:srgbClr val="E6EDF3"/>
+                          </a:solidFill>
+                          <a:latin typeface="Calibri" pitchFamily="34" charset="0"/>
+                          <a:ea typeface="Calibri" pitchFamily="34" charset="-122"/>
+                          <a:cs typeface="Calibri" pitchFamily="34" charset="-120"/>
+                        </a:rPr>
+                        <a:t>11.36</a:t>
+                      </a:r>
+                      <a:endParaRPr lang="en-US" sz="1300" dirty="0">
+                        <a:latin typeface="Calibri" charset="0"/>
+                        <a:ea typeface="Calibri" charset="0"/>
+                        <a:cs typeface="Calibri" charset="0"/>
+                      </a:endParaRPr>
+                    </a:p>
+                  </a:txBody>
+                  <a:tcPr marL="91440" marR="91440" marT="45720" marB="45720">
+                    <a:lnL w="12700" cap="flat" cmpd="sng" algn="ctr">
+                      <a:solidFill>
+                        <a:srgbClr val="2A3441"/>
+                      </a:solidFill>
+                      <a:prstDash val="solid"/>
+                      <a:round/>
+                      <a:headEnd type="none" w="med" len="med"/>
+                      <a:tailEnd type="none" w="med" len="med"/>
+                    </a:lnL>
+                    <a:lnR w="12700" cap="flat" cmpd="sng" algn="ctr">
+                      <a:solidFill>
+                        <a:srgbClr val="2A3441"/>
+                      </a:solidFill>
+                      <a:prstDash val="solid"/>
+                      <a:round/>
+                      <a:headEnd type="none" w="med" len="med"/>
+                      <a:tailEnd type="none" w="med" len="med"/>
+                    </a:lnR>
+                    <a:lnT w="12700" cap="flat" cmpd="sng" algn="ctr">
+                      <a:solidFill>
+                        <a:srgbClr val="2A3441"/>
+                      </a:solidFill>
+                      <a:prstDash val="solid"/>
+                      <a:round/>
+                      <a:headEnd type="none" w="med" len="med"/>
+                      <a:tailEnd type="none" w="med" len="med"/>
+                    </a:lnT>
+                    <a:lnB w="12700" cap="flat" cmpd="sng" algn="ctr">
+                      <a:solidFill>
+                        <a:srgbClr val="2A3441"/>
+                      </a:solidFill>
+                      <a:prstDash val="solid"/>
+                      <a:round/>
+                      <a:headEnd type="none" w="med" len="med"/>
+                      <a:tailEnd type="none" w="med" len="med"/>
+                    </a:lnB>
+                    <a:solidFill>
+                      <a:srgbClr val="141B24"/>
+                    </a:solidFill>
+                  </a:tcPr>
+                </a:tc>
+                <a:tc>
+                  <a:txBody>
+                    <a:bodyPr/>
+                    <a:lstStyle/>
+                    <a:p>
+                      <a:pPr indent="0" marL="0">
+                        <a:buNone/>
+                      </a:pPr>
+                      <a:r>
+                        <a:rPr lang="en-US" sz="1300" dirty="0">
+                          <a:solidFill>
+                            <a:srgbClr val="E6EDF3"/>
+                          </a:solidFill>
+                          <a:latin typeface="Calibri" pitchFamily="34" charset="0"/>
+                          <a:ea typeface="Calibri" pitchFamily="34" charset="-122"/>
+                          <a:cs typeface="Calibri" pitchFamily="34" charset="-120"/>
+                        </a:rPr>
+                        <a:t>8.26</a:t>
+                      </a:r>
+                      <a:endParaRPr lang="en-US" sz="1300" dirty="0">
+                        <a:latin typeface="Calibri" charset="0"/>
+                        <a:ea typeface="Calibri" charset="0"/>
+                        <a:cs typeface="Calibri" charset="0"/>
+                      </a:endParaRPr>
+                    </a:p>
+                  </a:txBody>
+                  <a:tcPr marL="91440" marR="91440" marT="45720" marB="45720">
+                    <a:lnL w="12700" cap="flat" cmpd="sng" algn="ctr">
+                      <a:solidFill>
+                        <a:srgbClr val="2A3441"/>
+                      </a:solidFill>
+                      <a:prstDash val="solid"/>
+                      <a:round/>
+                      <a:headEnd type="none" w="med" len="med"/>
+                      <a:tailEnd type="none" w="med" len="med"/>
+                    </a:lnL>
+                    <a:lnR w="12700" cap="flat" cmpd="sng" algn="ctr">
+                      <a:solidFill>
+                        <a:srgbClr val="2A3441"/>
+                      </a:solidFill>
+                      <a:prstDash val="solid"/>
+                      <a:round/>
+                      <a:headEnd type="none" w="med" len="med"/>
+                      <a:tailEnd type="none" w="med" len="med"/>
+                    </a:lnR>
+                    <a:lnT w="12700" cap="flat" cmpd="sng" algn="ctr">
+                      <a:solidFill>
+                        <a:srgbClr val="2A3441"/>
+                      </a:solidFill>
+                      <a:prstDash val="solid"/>
+                      <a:round/>
+                      <a:headEnd type="none" w="med" len="med"/>
+                      <a:tailEnd type="none" w="med" len="med"/>
+                    </a:lnT>
+                    <a:lnB w="12700" cap="flat" cmpd="sng" algn="ctr">
+                      <a:solidFill>
+                        <a:srgbClr val="2A3441"/>
+                      </a:solidFill>
+                      <a:prstDash val="solid"/>
+                      <a:round/>
+                      <a:headEnd type="none" w="med" len="med"/>
+                      <a:tailEnd type="none" w="med" len="med"/>
+                    </a:lnB>
+                    <a:solidFill>
+                      <a:srgbClr val="141B24"/>
+                    </a:solidFill>
+                  </a:tcPr>
+                </a:tc>
+                <a:tc>
+                  <a:txBody>
+                    <a:bodyPr/>
+                    <a:lstStyle/>
+                    <a:p>
+                      <a:pPr indent="0" marL="0">
+                        <a:buNone/>
+                      </a:pPr>
+                      <a:r>
+                        <a:rPr lang="en-US" sz="1300" dirty="0">
+                          <a:solidFill>
+                            <a:srgbClr val="E6EDF3"/>
+                          </a:solidFill>
+                          <a:latin typeface="Calibri" pitchFamily="34" charset="0"/>
+                          <a:ea typeface="Calibri" pitchFamily="34" charset="-122"/>
+                          <a:cs typeface="Calibri" pitchFamily="34" charset="-120"/>
+                        </a:rPr>
+                        <a:t>5.46</a:t>
+                      </a:r>
+                      <a:endParaRPr lang="en-US" sz="1300" dirty="0">
+                        <a:latin typeface="Calibri" charset="0"/>
+                        <a:ea typeface="Calibri" charset="0"/>
+                        <a:cs typeface="Calibri" charset="0"/>
+                      </a:endParaRPr>
+                    </a:p>
+                  </a:txBody>
+                  <a:tcPr marL="91440" marR="91440" marT="45720" marB="45720">
+                    <a:lnL w="12700" cap="flat" cmpd="sng" algn="ctr">
+                      <a:solidFill>
+                        <a:srgbClr val="2A3441"/>
+                      </a:solidFill>
+                      <a:prstDash val="solid"/>
+                      <a:round/>
+                      <a:headEnd type="none" w="med" len="med"/>
+                      <a:tailEnd type="none" w="med" len="med"/>
+                    </a:lnL>
+                    <a:lnR w="12700" cap="flat" cmpd="sng" algn="ctr">
+                      <a:solidFill>
+                        <a:srgbClr val="2A3441"/>
+                      </a:solidFill>
+                      <a:prstDash val="solid"/>
+                      <a:round/>
+                      <a:headEnd type="none" w="med" len="med"/>
+                      <a:tailEnd type="none" w="med" len="med"/>
+                    </a:lnR>
+                    <a:lnT w="12700" cap="flat" cmpd="sng" algn="ctr">
+                      <a:solidFill>
+                        <a:srgbClr val="2A3441"/>
+                      </a:solidFill>
+                      <a:prstDash val="solid"/>
+                      <a:round/>
+                      <a:headEnd type="none" w="med" len="med"/>
+                      <a:tailEnd type="none" w="med" len="med"/>
+                    </a:lnT>
+                    <a:lnB w="12700" cap="flat" cmpd="sng" algn="ctr">
+                      <a:solidFill>
+                        <a:srgbClr val="2A3441"/>
+                      </a:solidFill>
+                      <a:prstDash val="solid"/>
+                      <a:round/>
+                      <a:headEnd type="none" w="med" len="med"/>
+                      <a:tailEnd type="none" w="med" len="med"/>
+                    </a:lnB>
+                    <a:solidFill>
+                      <a:srgbClr val="141B24"/>
+                    </a:solidFill>
+                  </a:tcPr>
+                </a:tc>
+              </a:tr>
+              <a:tr h="420624">
+                <a:tc>
+                  <a:txBody>
+                    <a:bodyPr/>
+                    <a:lstStyle/>
+                    <a:p>
+                      <a:pPr indent="0" marL="0">
+                        <a:buNone/>
+                      </a:pPr>
+                      <a:r>
+                        <a:rPr lang="en-US" sz="1300" dirty="0">
+                          <a:solidFill>
+                            <a:srgbClr val="E6EDF3"/>
+                          </a:solidFill>
+                          <a:latin typeface="Calibri" pitchFamily="34" charset="0"/>
+                          <a:ea typeface="Calibri" pitchFamily="34" charset="-122"/>
+                          <a:cs typeface="Calibri" pitchFamily="34" charset="-120"/>
+                        </a:rPr>
+                        <a:t>Fast (3,000 pkts)</a:t>
+                      </a:r>
+                      <a:endParaRPr lang="en-US" sz="1300" dirty="0">
+                        <a:latin typeface="Calibri" charset="0"/>
+                        <a:ea typeface="Calibri" charset="0"/>
+                        <a:cs typeface="Calibri" charset="0"/>
+                      </a:endParaRPr>
+                    </a:p>
+                  </a:txBody>
+                  <a:tcPr marL="91440" marR="91440" marT="45720" marB="45720">
+                    <a:lnL w="12700" cap="flat" cmpd="sng" algn="ctr">
+                      <a:solidFill>
+                        <a:srgbClr val="2A3441"/>
+                      </a:solidFill>
+                      <a:prstDash val="solid"/>
+                      <a:round/>
+                      <a:headEnd type="none" w="med" len="med"/>
+                      <a:tailEnd type="none" w="med" len="med"/>
+                    </a:lnL>
+                    <a:lnR w="12700" cap="flat" cmpd="sng" algn="ctr">
+                      <a:solidFill>
+                        <a:srgbClr val="2A3441"/>
+                      </a:solidFill>
+                      <a:prstDash val="solid"/>
+                      <a:round/>
+                      <a:headEnd type="none" w="med" len="med"/>
+                      <a:tailEnd type="none" w="med" len="med"/>
+                    </a:lnR>
+                    <a:lnT w="12700" cap="flat" cmpd="sng" algn="ctr">
+                      <a:solidFill>
+                        <a:srgbClr val="2A3441"/>
+                      </a:solidFill>
+                      <a:prstDash val="solid"/>
+                      <a:round/>
+                      <a:headEnd type="none" w="med" len="med"/>
+                      <a:tailEnd type="none" w="med" len="med"/>
+                    </a:lnT>
+                    <a:lnB w="12700" cap="flat" cmpd="sng" algn="ctr">
+                      <a:solidFill>
+                        <a:srgbClr val="2A3441"/>
+                      </a:solidFill>
+                      <a:prstDash val="solid"/>
+                      <a:round/>
+                      <a:headEnd type="none" w="med" len="med"/>
+                      <a:tailEnd type="none" w="med" len="med"/>
+                    </a:lnB>
+                    <a:solidFill>
+                      <a:srgbClr val="141B24"/>
+                    </a:solidFill>
+                  </a:tcPr>
+                </a:tc>
+                <a:tc>
+                  <a:txBody>
+                    <a:bodyPr/>
+                    <a:lstStyle/>
+                    <a:p>
+                      <a:pPr indent="0" marL="0">
+                        <a:buNone/>
+                      </a:pPr>
+                      <a:r>
+                        <a:rPr lang="en-US" sz="1300" dirty="0">
+                          <a:solidFill>
+                            <a:srgbClr val="E6EDF3"/>
+                          </a:solidFill>
+                          <a:latin typeface="Calibri" pitchFamily="34" charset="0"/>
+                          <a:ea typeface="Calibri" pitchFamily="34" charset="-122"/>
+                          <a:cs typeface="Calibri" pitchFamily="34" charset="-120"/>
+                        </a:rPr>
+                        <a:t>14.55</a:t>
+                      </a:r>
+                      <a:endParaRPr lang="en-US" sz="1300" dirty="0">
+                        <a:latin typeface="Calibri" charset="0"/>
+                        <a:ea typeface="Calibri" charset="0"/>
+                        <a:cs typeface="Calibri" charset="0"/>
+                      </a:endParaRPr>
+                    </a:p>
+                  </a:txBody>
+                  <a:tcPr marL="91440" marR="91440" marT="45720" marB="45720">
+                    <a:lnL w="12700" cap="flat" cmpd="sng" algn="ctr">
+                      <a:solidFill>
+                        <a:srgbClr val="2A3441"/>
+                      </a:solidFill>
+                      <a:prstDash val="solid"/>
+                      <a:round/>
+                      <a:headEnd type="none" w="med" len="med"/>
+                      <a:tailEnd type="none" w="med" len="med"/>
+                    </a:lnL>
+                    <a:lnR w="12700" cap="flat" cmpd="sng" algn="ctr">
+                      <a:solidFill>
+                        <a:srgbClr val="2A3441"/>
+                      </a:solidFill>
+                      <a:prstDash val="solid"/>
+                      <a:round/>
+                      <a:headEnd type="none" w="med" len="med"/>
+                      <a:tailEnd type="none" w="med" len="med"/>
+                    </a:lnR>
+                    <a:lnT w="12700" cap="flat" cmpd="sng" algn="ctr">
+                      <a:solidFill>
+                        <a:srgbClr val="2A3441"/>
+                      </a:solidFill>
+                      <a:prstDash val="solid"/>
+                      <a:round/>
+                      <a:headEnd type="none" w="med" len="med"/>
+                      <a:tailEnd type="none" w="med" len="med"/>
+                    </a:lnT>
+                    <a:lnB w="12700" cap="flat" cmpd="sng" algn="ctr">
+                      <a:solidFill>
+                        <a:srgbClr val="2A3441"/>
+                      </a:solidFill>
+                      <a:prstDash val="solid"/>
+                      <a:round/>
+                      <a:headEnd type="none" w="med" len="med"/>
+                      <a:tailEnd type="none" w="med" len="med"/>
+                    </a:lnB>
+                    <a:solidFill>
+                      <a:srgbClr val="141B24"/>
+                    </a:solidFill>
+                  </a:tcPr>
+                </a:tc>
+                <a:tc>
+                  <a:txBody>
+                    <a:bodyPr/>
+                    <a:lstStyle/>
+                    <a:p>
+                      <a:pPr indent="0" marL="0">
+                        <a:buNone/>
+                      </a:pPr>
+                      <a:r>
+                        <a:rPr lang="en-US" sz="1300" dirty="0">
+                          <a:solidFill>
+                            <a:srgbClr val="E6EDF3"/>
+                          </a:solidFill>
+                          <a:latin typeface="Calibri" pitchFamily="34" charset="0"/>
+                          <a:ea typeface="Calibri" pitchFamily="34" charset="-122"/>
+                          <a:cs typeface="Calibri" pitchFamily="34" charset="-120"/>
+                        </a:rPr>
+                        <a:t>8.20</a:t>
+                      </a:r>
+                      <a:endParaRPr lang="en-US" sz="1300" dirty="0">
+                        <a:latin typeface="Calibri" charset="0"/>
+                        <a:ea typeface="Calibri" charset="0"/>
+                        <a:cs typeface="Calibri" charset="0"/>
+                      </a:endParaRPr>
+                    </a:p>
+                  </a:txBody>
+                  <a:tcPr marL="91440" marR="91440" marT="45720" marB="45720">
+                    <a:lnL w="12700" cap="flat" cmpd="sng" algn="ctr">
+                      <a:solidFill>
+                        <a:srgbClr val="2A3441"/>
+                      </a:solidFill>
+                      <a:prstDash val="solid"/>
+                      <a:round/>
+                      <a:headEnd type="none" w="med" len="med"/>
+                      <a:tailEnd type="none" w="med" len="med"/>
+                    </a:lnL>
+                    <a:lnR w="12700" cap="flat" cmpd="sng" algn="ctr">
+                      <a:solidFill>
+                        <a:srgbClr val="2A3441"/>
+                      </a:solidFill>
+                      <a:prstDash val="solid"/>
+                      <a:round/>
+                      <a:headEnd type="none" w="med" len="med"/>
+                      <a:tailEnd type="none" w="med" len="med"/>
+                    </a:lnR>
+                    <a:lnT w="12700" cap="flat" cmpd="sng" algn="ctr">
+                      <a:solidFill>
+                        <a:srgbClr val="2A3441"/>
+                      </a:solidFill>
+                      <a:prstDash val="solid"/>
+                      <a:round/>
+                      <a:headEnd type="none" w="med" len="med"/>
+                      <a:tailEnd type="none" w="med" len="med"/>
+                    </a:lnT>
+                    <a:lnB w="12700" cap="flat" cmpd="sng" algn="ctr">
+                      <a:solidFill>
+                        <a:srgbClr val="2A3441"/>
+                      </a:solidFill>
+                      <a:prstDash val="solid"/>
+                      <a:round/>
+                      <a:headEnd type="none" w="med" len="med"/>
+                      <a:tailEnd type="none" w="med" len="med"/>
+                    </a:lnB>
+                    <a:solidFill>
+                      <a:srgbClr val="141B24"/>
+                    </a:solidFill>
+                  </a:tcPr>
+                </a:tc>
+                <a:tc>
+                  <a:txBody>
+                    <a:bodyPr/>
+                    <a:lstStyle/>
+                    <a:p>
+                      <a:pPr indent="0" marL="0">
+                        <a:buNone/>
+                      </a:pPr>
+                      <a:r>
+                        <a:rPr lang="en-US" sz="1300" dirty="0">
+                          <a:solidFill>
+                            <a:srgbClr val="E6EDF3"/>
+                          </a:solidFill>
+                          <a:latin typeface="Calibri" pitchFamily="34" charset="0"/>
+                          <a:ea typeface="Calibri" pitchFamily="34" charset="-122"/>
+                          <a:cs typeface="Calibri" pitchFamily="34" charset="-120"/>
+                        </a:rPr>
+                        <a:t>6.52</a:t>
+                      </a:r>
+                      <a:endParaRPr lang="en-US" sz="1300" dirty="0">
+                        <a:latin typeface="Calibri" charset="0"/>
+                        <a:ea typeface="Calibri" charset="0"/>
+                        <a:cs typeface="Calibri" charset="0"/>
+                      </a:endParaRPr>
+                    </a:p>
+                  </a:txBody>
+                  <a:tcPr marL="91440" marR="91440" marT="45720" marB="45720">
+                    <a:lnL w="12700" cap="flat" cmpd="sng" algn="ctr">
+                      <a:solidFill>
+                        <a:srgbClr val="2A3441"/>
+                      </a:solidFill>
+                      <a:prstDash val="solid"/>
+                      <a:round/>
+                      <a:headEnd type="none" w="med" len="med"/>
+                      <a:tailEnd type="none" w="med" len="med"/>
+                    </a:lnL>
+                    <a:lnR w="12700" cap="flat" cmpd="sng" algn="ctr">
+                      <a:solidFill>
+                        <a:srgbClr val="2A3441"/>
+                      </a:solidFill>
+                      <a:prstDash val="solid"/>
+                      <a:round/>
+                      <a:headEnd type="none" w="med" len="med"/>
+                      <a:tailEnd type="none" w="med" len="med"/>
+                    </a:lnR>
+                    <a:lnT w="12700" cap="flat" cmpd="sng" algn="ctr">
+                      <a:solidFill>
+                        <a:srgbClr val="2A3441"/>
+                      </a:solidFill>
+                      <a:prstDash val="solid"/>
+                      <a:round/>
+                      <a:headEnd type="none" w="med" len="med"/>
+                      <a:tailEnd type="none" w="med" len="med"/>
+                    </a:lnT>
+                    <a:lnB w="12700" cap="flat" cmpd="sng" algn="ctr">
+                      <a:solidFill>
+                        <a:srgbClr val="2A3441"/>
+                      </a:solidFill>
+                      <a:prstDash val="solid"/>
+                      <a:round/>
+                      <a:headEnd type="none" w="med" len="med"/>
+                      <a:tailEnd type="none" w="med" len="med"/>
+                    </a:lnB>
+                    <a:solidFill>
+                      <a:srgbClr val="141B24"/>
+                    </a:solidFill>
+                  </a:tcPr>
+                </a:tc>
+                <a:tc>
+                  <a:txBody>
+                    <a:bodyPr/>
+                    <a:lstStyle/>
+                    <a:p>
+                      <a:pPr indent="0" marL="0">
+                        <a:buNone/>
+                      </a:pPr>
+                      <a:r>
+                        <a:rPr lang="en-US" sz="1300" dirty="0">
+                          <a:solidFill>
+                            <a:srgbClr val="E6EDF3"/>
+                          </a:solidFill>
+                          <a:latin typeface="Calibri" pitchFamily="34" charset="0"/>
+                          <a:ea typeface="Calibri" pitchFamily="34" charset="-122"/>
+                          <a:cs typeface="Calibri" pitchFamily="34" charset="-120"/>
+                        </a:rPr>
+                        <a:t>3.92</a:t>
+                      </a:r>
+                      <a:endParaRPr lang="en-US" sz="1300" dirty="0">
+                        <a:latin typeface="Calibri" charset="0"/>
+                        <a:ea typeface="Calibri" charset="0"/>
+                        <a:cs typeface="Calibri" charset="0"/>
+                      </a:endParaRPr>
+                    </a:p>
+                  </a:txBody>
+                  <a:tcPr marL="91440" marR="91440" marT="45720" marB="45720">
+                    <a:lnL w="12700" cap="flat" cmpd="sng" algn="ctr">
+                      <a:solidFill>
+                        <a:srgbClr val="2A3441"/>
+                      </a:solidFill>
+                      <a:prstDash val="solid"/>
+                      <a:round/>
+                      <a:headEnd type="none" w="med" len="med"/>
+                      <a:tailEnd type="none" w="med" len="med"/>
+                    </a:lnL>
+                    <a:lnR w="12700" cap="flat" cmpd="sng" algn="ctr">
+                      <a:solidFill>
+                        <a:srgbClr val="2A3441"/>
+                      </a:solidFill>
+                      <a:prstDash val="solid"/>
+                      <a:round/>
+                      <a:headEnd type="none" w="med" len="med"/>
+                      <a:tailEnd type="none" w="med" len="med"/>
+                    </a:lnR>
+                    <a:lnT w="12700" cap="flat" cmpd="sng" algn="ctr">
+                      <a:solidFill>
+                        <a:srgbClr val="2A3441"/>
+                      </a:solidFill>
+                      <a:prstDash val="solid"/>
+                      <a:round/>
+                      <a:headEnd type="none" w="med" len="med"/>
+                      <a:tailEnd type="none" w="med" len="med"/>
+                    </a:lnT>
+                    <a:lnB w="12700" cap="flat" cmpd="sng" algn="ctr">
+                      <a:solidFill>
+                        <a:srgbClr val="2A3441"/>
+                      </a:solidFill>
+                      <a:prstDash val="solid"/>
+                      <a:round/>
+                      <a:headEnd type="none" w="med" len="med"/>
+                      <a:tailEnd type="none" w="med" len="med"/>
+                    </a:lnB>
+                    <a:solidFill>
+                      <a:srgbClr val="141B24"/>
+                    </a:solidFill>
+                  </a:tcPr>
+                </a:tc>
+              </a:tr>
+              <a:tr h="420624">
+                <a:tc>
+                  <a:txBody>
+                    <a:bodyPr/>
+                    <a:lstStyle/>
+                    <a:p>
+                      <a:pPr indent="0" marL="0">
+                        <a:buNone/>
+                      </a:pPr>
+                      <a:r>
+                        <a:rPr lang="en-US" sz="1300" dirty="0">
+                          <a:solidFill>
+                            <a:srgbClr val="E6EDF3"/>
+                          </a:solidFill>
+                          <a:latin typeface="Calibri" pitchFamily="34" charset="0"/>
+                          <a:ea typeface="Calibri" pitchFamily="34" charset="-122"/>
+                          <a:cs typeface="Calibri" pitchFamily="34" charset="-120"/>
+                        </a:rPr>
+                        <a:t>Hostile 10% loss</a:t>
+                      </a:r>
+                      <a:endParaRPr lang="en-US" sz="1300" dirty="0">
+                        <a:latin typeface="Calibri" charset="0"/>
+                        <a:ea typeface="Calibri" charset="0"/>
+                        <a:cs typeface="Calibri" charset="0"/>
+                      </a:endParaRPr>
+                    </a:p>
+                  </a:txBody>
+                  <a:tcPr marL="91440" marR="91440" marT="45720" marB="45720">
+                    <a:lnL w="12700" cap="flat" cmpd="sng" algn="ctr">
+                      <a:solidFill>
+                        <a:srgbClr val="2A3441"/>
+                      </a:solidFill>
+                      <a:prstDash val="solid"/>
+                      <a:round/>
+                      <a:headEnd type="none" w="med" len="med"/>
+                      <a:tailEnd type="none" w="med" len="med"/>
+                    </a:lnL>
+                    <a:lnR w="12700" cap="flat" cmpd="sng" algn="ctr">
+                      <a:solidFill>
+                        <a:srgbClr val="2A3441"/>
+                      </a:solidFill>
+                      <a:prstDash val="solid"/>
+                      <a:round/>
+                      <a:headEnd type="none" w="med" len="med"/>
+                      <a:tailEnd type="none" w="med" len="med"/>
+                    </a:lnR>
+                    <a:lnT w="12700" cap="flat" cmpd="sng" algn="ctr">
+                      <a:solidFill>
+                        <a:srgbClr val="2A3441"/>
+                      </a:solidFill>
+                      <a:prstDash val="solid"/>
+                      <a:round/>
+                      <a:headEnd type="none" w="med" len="med"/>
+                      <a:tailEnd type="none" w="med" len="med"/>
+                    </a:lnT>
+                    <a:lnB w="12700" cap="flat" cmpd="sng" algn="ctr">
+                      <a:solidFill>
+                        <a:srgbClr val="2A3441"/>
+                      </a:solidFill>
+                      <a:prstDash val="solid"/>
+                      <a:round/>
+                      <a:headEnd type="none" w="med" len="med"/>
+                      <a:tailEnd type="none" w="med" len="med"/>
+                    </a:lnB>
+                    <a:solidFill>
+                      <a:srgbClr val="141B24"/>
+                    </a:solidFill>
+                  </a:tcPr>
+                </a:tc>
+                <a:tc>
+                  <a:txBody>
+                    <a:bodyPr/>
+                    <a:lstStyle/>
+                    <a:p>
+                      <a:pPr indent="0" marL="0">
+                        <a:buNone/>
+                      </a:pPr>
+                      <a:r>
+                        <a:rPr lang="en-US" sz="1300" dirty="0">
+                          <a:solidFill>
+                            <a:srgbClr val="E6EDF3"/>
+                          </a:solidFill>
+                          <a:latin typeface="Calibri" pitchFamily="34" charset="0"/>
+                          <a:ea typeface="Calibri" pitchFamily="34" charset="-122"/>
+                          <a:cs typeface="Calibri" pitchFamily="34" charset="-120"/>
+                        </a:rPr>
+                        <a:t>7.54</a:t>
+                      </a:r>
+                      <a:endParaRPr lang="en-US" sz="1300" dirty="0">
+                        <a:latin typeface="Calibri" charset="0"/>
+                        <a:ea typeface="Calibri" charset="0"/>
+                        <a:cs typeface="Calibri" charset="0"/>
+                      </a:endParaRPr>
+                    </a:p>
+                  </a:txBody>
+                  <a:tcPr marL="91440" marR="91440" marT="45720" marB="45720">
+                    <a:lnL w="12700" cap="flat" cmpd="sng" algn="ctr">
+                      <a:solidFill>
+                        <a:srgbClr val="2A3441"/>
+                      </a:solidFill>
+                      <a:prstDash val="solid"/>
+                      <a:round/>
+                      <a:headEnd type="none" w="med" len="med"/>
+                      <a:tailEnd type="none" w="med" len="med"/>
+                    </a:lnL>
+                    <a:lnR w="12700" cap="flat" cmpd="sng" algn="ctr">
+                      <a:solidFill>
+                        <a:srgbClr val="2A3441"/>
+                      </a:solidFill>
+                      <a:prstDash val="solid"/>
+                      <a:round/>
+                      <a:headEnd type="none" w="med" len="med"/>
+                      <a:tailEnd type="none" w="med" len="med"/>
+                    </a:lnR>
+                    <a:lnT w="12700" cap="flat" cmpd="sng" algn="ctr">
+                      <a:solidFill>
+                        <a:srgbClr val="2A3441"/>
+                      </a:solidFill>
+                      <a:prstDash val="solid"/>
+                      <a:round/>
+                      <a:headEnd type="none" w="med" len="med"/>
+                      <a:tailEnd type="none" w="med" len="med"/>
+                    </a:lnT>
+                    <a:lnB w="12700" cap="flat" cmpd="sng" algn="ctr">
+                      <a:solidFill>
+                        <a:srgbClr val="2A3441"/>
+                      </a:solidFill>
+                      <a:prstDash val="solid"/>
+                      <a:round/>
+                      <a:headEnd type="none" w="med" len="med"/>
+                      <a:tailEnd type="none" w="med" len="med"/>
+                    </a:lnB>
+                    <a:solidFill>
+                      <a:srgbClr val="141B24"/>
+                    </a:solidFill>
+                  </a:tcPr>
+                </a:tc>
+                <a:tc>
+                  <a:txBody>
+                    <a:bodyPr/>
+                    <a:lstStyle/>
+                    <a:p>
+                      <a:pPr indent="0" marL="0">
+                        <a:buNone/>
+                      </a:pPr>
+                      <a:r>
+                        <a:rPr lang="en-US" sz="1300" dirty="0">
+                          <a:solidFill>
+                            <a:srgbClr val="E6EDF3"/>
+                          </a:solidFill>
+                          <a:latin typeface="Calibri" pitchFamily="34" charset="0"/>
+                          <a:ea typeface="Calibri" pitchFamily="34" charset="-122"/>
+                          <a:cs typeface="Calibri" pitchFamily="34" charset="-120"/>
+                        </a:rPr>
+                        <a:t>8.34</a:t>
+                      </a:r>
+                      <a:endParaRPr lang="en-US" sz="1300" dirty="0">
+                        <a:latin typeface="Calibri" charset="0"/>
+                        <a:ea typeface="Calibri" charset="0"/>
+                        <a:cs typeface="Calibri" charset="0"/>
+                      </a:endParaRPr>
+                    </a:p>
+                  </a:txBody>
+                  <a:tcPr marL="91440" marR="91440" marT="45720" marB="45720">
+                    <a:lnL w="12700" cap="flat" cmpd="sng" algn="ctr">
+                      <a:solidFill>
+                        <a:srgbClr val="2A3441"/>
+                      </a:solidFill>
+                      <a:prstDash val="solid"/>
+                      <a:round/>
+                      <a:headEnd type="none" w="med" len="med"/>
+                      <a:tailEnd type="none" w="med" len="med"/>
+                    </a:lnL>
+                    <a:lnR w="12700" cap="flat" cmpd="sng" algn="ctr">
+                      <a:solidFill>
+                        <a:srgbClr val="2A3441"/>
+                      </a:solidFill>
+                      <a:prstDash val="solid"/>
+                      <a:round/>
+                      <a:headEnd type="none" w="med" len="med"/>
+                      <a:tailEnd type="none" w="med" len="med"/>
+                    </a:lnR>
+                    <a:lnT w="12700" cap="flat" cmpd="sng" algn="ctr">
+                      <a:solidFill>
+                        <a:srgbClr val="2A3441"/>
+                      </a:solidFill>
+                      <a:prstDash val="solid"/>
+                      <a:round/>
+                      <a:headEnd type="none" w="med" len="med"/>
+                      <a:tailEnd type="none" w="med" len="med"/>
+                    </a:lnT>
+                    <a:lnB w="12700" cap="flat" cmpd="sng" algn="ctr">
+                      <a:solidFill>
+                        <a:srgbClr val="2A3441"/>
+                      </a:solidFill>
+                      <a:prstDash val="solid"/>
+                      <a:round/>
+                      <a:headEnd type="none" w="med" len="med"/>
+                      <a:tailEnd type="none" w="med" len="med"/>
+                    </a:lnB>
+                    <a:solidFill>
+                      <a:srgbClr val="141B24"/>
+                    </a:solidFill>
+                  </a:tcPr>
+                </a:tc>
+                <a:tc>
+                  <a:txBody>
+                    <a:bodyPr/>
+                    <a:lstStyle/>
+                    <a:p>
+                      <a:pPr indent="0" marL="0">
+                        <a:buNone/>
+                      </a:pPr>
+                      <a:r>
+                        <a:rPr lang="en-US" sz="1300" dirty="0">
+                          <a:solidFill>
+                            <a:srgbClr val="E6EDF3"/>
+                          </a:solidFill>
+                          <a:latin typeface="Calibri" pitchFamily="34" charset="0"/>
+                          <a:ea typeface="Calibri" pitchFamily="34" charset="-122"/>
+                          <a:cs typeface="Calibri" pitchFamily="34" charset="-120"/>
+                        </a:rPr>
+                        <a:t>12.32</a:t>
+                      </a:r>
+                      <a:endParaRPr lang="en-US" sz="1300" dirty="0">
+                        <a:latin typeface="Calibri" charset="0"/>
+                        <a:ea typeface="Calibri" charset="0"/>
+                        <a:cs typeface="Calibri" charset="0"/>
+                      </a:endParaRPr>
+                    </a:p>
+                  </a:txBody>
+                  <a:tcPr marL="91440" marR="91440" marT="45720" marB="45720">
+                    <a:lnL w="12700" cap="flat" cmpd="sng" algn="ctr">
+                      <a:solidFill>
+                        <a:srgbClr val="2A3441"/>
+                      </a:solidFill>
+                      <a:prstDash val="solid"/>
+                      <a:round/>
+                      <a:headEnd type="none" w="med" len="med"/>
+                      <a:tailEnd type="none" w="med" len="med"/>
+                    </a:lnL>
+                    <a:lnR w="12700" cap="flat" cmpd="sng" algn="ctr">
+                      <a:solidFill>
+                        <a:srgbClr val="2A3441"/>
+                      </a:solidFill>
+                      <a:prstDash val="solid"/>
+                      <a:round/>
+                      <a:headEnd type="none" w="med" len="med"/>
+                      <a:tailEnd type="none" w="med" len="med"/>
+                    </a:lnR>
+                    <a:lnT w="12700" cap="flat" cmpd="sng" algn="ctr">
+                      <a:solidFill>
+                        <a:srgbClr val="2A3441"/>
+                      </a:solidFill>
+                      <a:prstDash val="solid"/>
+                      <a:round/>
+                      <a:headEnd type="none" w="med" len="med"/>
+                      <a:tailEnd type="none" w="med" len="med"/>
+                    </a:lnT>
+                    <a:lnB w="12700" cap="flat" cmpd="sng" algn="ctr">
+                      <a:solidFill>
+                        <a:srgbClr val="2A3441"/>
+                      </a:solidFill>
+                      <a:prstDash val="solid"/>
+                      <a:round/>
+                      <a:headEnd type="none" w="med" len="med"/>
+                      <a:tailEnd type="none" w="med" len="med"/>
+                    </a:lnB>
+                    <a:solidFill>
+                      <a:srgbClr val="141B24"/>
+                    </a:solidFill>
+                  </a:tcPr>
+                </a:tc>
+                <a:tc>
+                  <a:txBody>
+                    <a:bodyPr/>
+                    <a:lstStyle/>
+                    <a:p>
+                      <a:pPr indent="0" marL="0">
+                        <a:buNone/>
+                      </a:pPr>
+                      <a:r>
+                        <a:rPr lang="en-US" sz="1300" dirty="0">
+                          <a:solidFill>
+                            <a:srgbClr val="E6EDF3"/>
+                          </a:solidFill>
+                          <a:latin typeface="Calibri" pitchFamily="34" charset="0"/>
+                          <a:ea typeface="Calibri" pitchFamily="34" charset="-122"/>
+                          <a:cs typeface="Calibri" pitchFamily="34" charset="-120"/>
+                        </a:rPr>
+                        <a:t>8.93</a:t>
                       </a:r>
                       <a:endParaRPr lang="en-US" sz="1300" dirty="0">
                         <a:latin typeface="Calibri" charset="0"/>
@@ -18492,8 +19529,8 @@
         </p:nvSpPr>
         <p:spPr>
           <a:xfrm>
-            <a:off x="7132320" y="1188720"/>
-            <a:ext cx="4663440" cy="4937760"/>
+            <a:off x="7406640" y="1188720"/>
+            <a:ext cx="4389120" cy="4937760"/>
           </a:xfrm>
           <a:prstGeom prst="rect">
             <a:avLst/>
@@ -18521,7 +19558,7 @@
                 <a:ea typeface="Calibri" pitchFamily="34" charset="-122"/>
                 <a:cs typeface="Calibri" pitchFamily="34" charset="-120"/>
               </a:rPr>
-              <a:t>Limit found: window cap 32 caps the satellite path at about 107 packets/s; receive window raised to 256</a:t>
+              <a:t>Neural agent fastest on 4 of 5 paths; significantly faster than tuned AIMD on all four: -15%, -49%, -52%, -52%</a:t>
             </a:r>
             <a:endParaRPr lang="en-US" sz="1400" dirty="0"/>
           </a:p>
@@ -18542,7 +19579,7 @@
                 <a:ea typeface="Calibri" pitchFamily="34" charset="-122"/>
                 <a:cs typeface="Calibri" pitchFamily="34" charset="-120"/>
               </a:rPr>
-              <a:t>Baseline tuned too: AIMD with cap 128 and a high start threshold</a:t>
+              <a:t>Faster than tuned CUBIC on lossy (-74%) and satellite (-34%); equal on 5G-like and fast; CUBIC is 2x slower than AIMD at 2% loss</a:t>
             </a:r>
             <a:endParaRPr lang="en-US" sz="1400" dirty="0"/>
           </a:p>
@@ -18563,7 +19600,7 @@
                 <a:ea typeface="Calibri" pitchFamily="34" charset="-122"/>
                 <a:cs typeface="Calibri" pitchFamily="34" charset="-120"/>
               </a:rPr>
-              <a:t>New default for the neural agent: cap 128 plus the AIMD hand-over</a:t>
+              <a:t>Hostile 10% loss: no significant difference between any two policies</a:t>
             </a:r>
             <a:endParaRPr lang="en-US" sz="1400" dirty="0"/>
           </a:p>
@@ -18584,28 +19621,7 @@
                 <a:ea typeface="Calibri" pitchFamily="34" charset="-122"/>
                 <a:cs typeface="Calibri" pitchFamily="34" charset="-120"/>
               </a:rPr>
-              <a:t>45 to 77% faster than tuned AIMD on lossy, satellite and fast paths; equal on 5G-like and hostile</a:t>
-            </a:r>
-            <a:endParaRPr lang="en-US" sz="1400" dirty="0"/>
-          </a:p>
-          <a:p>
-            <a:pPr marL="342900" indent="-342900">
-              <a:spcAft>
-                <a:spcPts val="800"/>
-              </a:spcAft>
-              <a:buSzPct val="100000"/>
-              <a:buChar char="•"/>
-            </a:pPr>
-            <a:r>
-              <a:rPr lang="en-US" sz="1400" dirty="0">
-                <a:solidFill>
-                  <a:srgbClr val="E6EDF3"/>
-                </a:solidFill>
-                <a:latin typeface="Calibri" pitchFamily="34" charset="0"/>
-                <a:ea typeface="Calibri" pitchFamily="34" charset="-122"/>
-                <a:cs typeface="Calibri" pitchFamily="34" charset="-120"/>
-              </a:rPr>
-              <a:t>CUBIC tried: mixed, never beat the agent. Cost of the agent: more retransmissions on the fast path</a:t>
+              <a:t>Retransmissions now low (3, 6, 4 packets): the old 262 were spurious timeouts, fixed with a timer floor that AIMD also benefits from</a:t>
             </a:r>
             <a:endParaRPr lang="en-US" sz="1400" dirty="0"/>
           </a:p>
@@ -18619,8 +19635,8 @@
         </p:nvSpPr>
         <p:spPr>
           <a:xfrm>
-            <a:off x="548640" y="4023360"/>
-            <a:ext cx="6217920" cy="731520"/>
+            <a:off x="548640" y="4206240"/>
+            <a:ext cx="6583680" cy="822960"/>
           </a:xfrm>
           <a:prstGeom prst="rect">
             <a:avLst/>
@@ -18644,7 +19660,7 @@
                 <a:ea typeface="Calibri" pitchFamily="34" charset="-122"/>
                 <a:cs typeface="Calibri" pitchFamily="34" charset="-120"/>
               </a:rPr>
-              <a:t>10 runs per cell (hostile: 5), 95% intervals. Flags: --maxcwnd, --ssthresh, --hybrid, --mode cubic. Code: eval_perf*.sh.</a:t>
+              <a:t>Real clock, real server process, 10 paired runs per path (hostile: 5), 95% intervals. eval_final.sh. Every policy uses the same timer, window cap rules and Selective Repeat.</a:t>
             </a:r>
             <a:endParaRPr lang="en-US" sz="1300" dirty="0"/>
           </a:p>
@@ -18715,7 +19731,7 @@
                 <a:ea typeface="Courier New" pitchFamily="34" charset="-122"/>
                 <a:cs typeface="Courier New" pitchFamily="34" charset="-120"/>
               </a:rPr>
-              <a:t>Learnings and future work</a:t>
+              <a:t>Real sockets found what the emulator could not</a:t>
             </a:r>
             <a:endParaRPr lang="en-US" sz="3000" dirty="0"/>
           </a:p>
@@ -18754,7 +19770,7 @@
                 <a:ea typeface="Courier New" pitchFamily="34" charset="-122"/>
                 <a:cs typeface="Courier New" pitchFamily="34" charset="-120"/>
               </a:rPr>
-              <a:t>27 / 28   Smart-RUDP</a:t>
+              <a:t>27 / 32   Smart-RUDP</a:t>
             </a:r>
             <a:endParaRPr lang="en-US" sz="1000" dirty="0"/>
           </a:p>
@@ -18768,8 +19784,8 @@
         </p:nvSpPr>
         <p:spPr>
           <a:xfrm>
-            <a:off x="548640" y="1371600"/>
-            <a:ext cx="5394960" cy="4206240"/>
+            <a:off x="548640" y="1280160"/>
+            <a:ext cx="3611880" cy="3291840"/>
           </a:xfrm>
           <a:prstGeom prst="rect">
             <a:avLst/>
@@ -18793,8 +19809,8 @@
         </p:nvSpPr>
         <p:spPr>
           <a:xfrm>
-            <a:off x="731520" y="1508760"/>
-            <a:ext cx="5029200" cy="457200"/>
+            <a:off x="731520" y="1417320"/>
+            <a:ext cx="3246120" cy="457200"/>
           </a:xfrm>
           <a:prstGeom prst="rect">
             <a:avLst/>
@@ -18818,7 +19834,7 @@
                 <a:ea typeface="Courier New" pitchFamily="34" charset="-122"/>
                 <a:cs typeface="Courier New" pitchFamily="34" charset="-120"/>
               </a:rPr>
-              <a:t>Learned</a:t>
+              <a:t>Lost handshake ACK</a:t>
             </a:r>
             <a:endParaRPr lang="en-US" sz="2000" dirty="0"/>
           </a:p>
@@ -18832,8 +19848,8 @@
         </p:nvSpPr>
         <p:spPr>
           <a:xfrm>
-            <a:off x="731520" y="2011680"/>
-            <a:ext cx="5029200" cy="3429000"/>
+            <a:off x="731520" y="1920240"/>
+            <a:ext cx="3246120" cy="2514600"/>
           </a:xfrm>
           <a:prstGeom prst="rect">
             <a:avLst/>
@@ -18857,41 +19873,7 @@
                 <a:ea typeface="Calibri" pitchFamily="34" charset="-122"/>
                 <a:cs typeface="Calibri" pitchFamily="34" charset="-120"/>
               </a:rPr>
-              <a:t>Reliability is a set of simple rules working together.</a:t>
-            </a:r>
-            <a:endParaRPr lang="en-US" sz="2000" dirty="0"/>
-          </a:p>
-          <a:p>
-            <a:pPr indent="0" marL="0">
-              <a:buNone/>
-            </a:pPr>
-            <a:r>
-              <a:rPr lang="en-US" sz="2000" dirty="0">
-                <a:solidFill>
-                  <a:srgbClr val="E6EDF3"/>
-                </a:solidFill>
-                <a:latin typeface="Calibri" pitchFamily="34" charset="0"/>
-                <a:ea typeface="Calibri" pitchFamily="34" charset="-122"/>
-                <a:cs typeface="Calibri" pitchFamily="34" charset="-120"/>
-              </a:rPr>
-              <a:t>Congestion control matters as much as retransmission.</a:t>
-            </a:r>
-            <a:endParaRPr lang="en-US" sz="2000" dirty="0"/>
-          </a:p>
-          <a:p>
-            <a:pPr indent="0" marL="0">
-              <a:buNone/>
-            </a:pPr>
-            <a:r>
-              <a:rPr lang="en-US" sz="2000" dirty="0">
-                <a:solidFill>
-                  <a:srgbClr val="E6EDF3"/>
-                </a:solidFill>
-                <a:latin typeface="Calibri" pitchFamily="34" charset="0"/>
-                <a:ea typeface="Calibri" pitchFamily="34" charset="-122"/>
-                <a:cs typeface="Calibri" pitchFamily="34" charset="-120"/>
-              </a:rPr>
-              <a:t>Testing tools fail in surprising ways.</a:t>
+              <a:t>Server ignored all data after a lost final ACK: transfers hung (2 of 4 runs at 10% loss). Fixed as in TCP; regression test added.</a:t>
             </a:r>
             <a:endParaRPr lang="en-US" sz="2000" dirty="0"/>
           </a:p>
@@ -18905,8 +19887,8 @@
         </p:nvSpPr>
         <p:spPr>
           <a:xfrm>
-            <a:off x="6217920" y="1371600"/>
-            <a:ext cx="5394960" cy="4206240"/>
+            <a:off x="4297680" y="1280160"/>
+            <a:ext cx="3611880" cy="3291840"/>
           </a:xfrm>
           <a:prstGeom prst="rect">
             <a:avLst/>
@@ -18930,8 +19912,8 @@
         </p:nvSpPr>
         <p:spPr>
           <a:xfrm>
-            <a:off x="6400800" y="1508760"/>
-            <a:ext cx="5029200" cy="457200"/>
+            <a:off x="4480560" y="1417320"/>
+            <a:ext cx="3246120" cy="457200"/>
           </a:xfrm>
           <a:prstGeom prst="rect">
             <a:avLst/>
@@ -18955,7 +19937,7 @@
                 <a:ea typeface="Courier New" pitchFamily="34" charset="-122"/>
                 <a:cs typeface="Courier New" pitchFamily="34" charset="-120"/>
               </a:rPr>
-              <a:t>Next</a:t>
+              <a:t>Spurious timeouts</a:t>
             </a:r>
             <a:endParaRPr lang="en-US" sz="2000" dirty="0"/>
           </a:p>
@@ -18969,8 +19951,8 @@
         </p:nvSpPr>
         <p:spPr>
           <a:xfrm>
-            <a:off x="6400800" y="2011680"/>
-            <a:ext cx="5029200" cy="3429000"/>
+            <a:off x="4480560" y="1920240"/>
+            <a:ext cx="3246120" cy="2514600"/>
           </a:xfrm>
           <a:prstGeom prst="rect">
             <a:avLst/>
@@ -18994,56 +19976,47 @@
                 <a:ea typeface="Calibri" pitchFamily="34" charset="-122"/>
                 <a:cs typeface="Calibri" pitchFamily="34" charset="-120"/>
               </a:rPr>
-              <a:t>Train the neural agent in C / on real netem</a:t>
+              <a:t>Timer too tight for window bursts: 262 retransmissions for ~3 losses. Floor of 1.3 x srtt. It also made AIMD 41% faster, so the old margins were too big.</a:t>
             </a:r>
             <a:endParaRPr lang="en-US" sz="2000" dirty="0"/>
           </a:p>
-          <a:p>
-            <a:pPr indent="0" marL="0">
-              <a:buNone/>
-            </a:pPr>
-            <a:r>
-              <a:rPr lang="en-US" sz="2000" dirty="0">
-                <a:solidFill>
-                  <a:srgbClr val="E6EDF3"/>
-                </a:solidFill>
-                <a:latin typeface="Calibri" pitchFamily="34" charset="0"/>
-                <a:ea typeface="Calibri" pitchFamily="34" charset="-122"/>
-                <a:cs typeface="Calibri" pitchFamily="34" charset="-120"/>
-              </a:rPr>
-              <a:t>Selective ACK where throughput limits the path</a:t>
-            </a:r>
-            <a:endParaRPr lang="en-US" sz="2000" dirty="0"/>
-          </a:p>
-          <a:p>
-            <a:pPr indent="0" marL="0">
-              <a:buNone/>
-            </a:pPr>
-            <a:r>
-              <a:rPr lang="en-US" sz="2000" dirty="0">
-                <a:solidFill>
-                  <a:srgbClr val="E6EDF3"/>
-                </a:solidFill>
-                <a:latin typeface="Calibri" pitchFamily="34" charset="0"/>
-                <a:ea typeface="Calibri" pitchFamily="34" charset="-122"/>
-                <a:cs typeface="Calibri" pitchFamily="34" charset="-120"/>
-              </a:rPr>
-              <a:t>Kernel netem and real multi-machine tests</a:t>
-            </a:r>
-            <a:endParaRPr lang="en-US" sz="2000" dirty="0"/>
-          </a:p>
         </p:txBody>
       </p:sp>
       <p:sp>
         <p:nvSpPr>
-          <p:cNvPr id="10" name="Text 8"/>
+          <p:cNvPr id="10" name="Shape 8"/>
           <p:cNvSpPr/>
           <p:nvPr/>
         </p:nvSpPr>
         <p:spPr>
           <a:xfrm>
-            <a:off x="548640" y="5852160"/>
-            <a:ext cx="10972800" cy="365760"/>
+            <a:off x="8046720" y="1280160"/>
+            <a:ext cx="3611880" cy="3291840"/>
+          </a:xfrm>
+          <a:prstGeom prst="rect">
+            <a:avLst/>
+          </a:prstGeom>
+          <a:solidFill>
+            <a:srgbClr val="141B24"/>
+          </a:solidFill>
+          <a:ln w="12700">
+            <a:solidFill>
+              <a:srgbClr val="39FF88"/>
+            </a:solidFill>
+            <a:prstDash val="solid"/>
+          </a:ln>
+        </p:spPr>
+      </p:sp>
+      <p:sp>
+        <p:nvSpPr>
+          <p:cNvPr id="11" name="Text 9"/>
+          <p:cNvSpPr/>
+          <p:nvPr/>
+        </p:nvSpPr>
+        <p:spPr>
+          <a:xfrm>
+            <a:off x="8229600" y="1417320"/>
+            <a:ext cx="3246120" cy="457200"/>
           </a:xfrm>
           <a:prstGeom prst="rect">
             <a:avLst/>
@@ -19059,17 +20032,95 @@
               <a:buNone/>
             </a:pPr>
             <a:r>
-              <a:rPr lang="en-US" sz="1400" dirty="0">
+              <a:rPr lang="en-US" sz="2000" b="1" dirty="0">
                 <a:solidFill>
-                  <a:srgbClr val="8B98A5"/>
+                  <a:srgbClr val="39FF88"/>
+                </a:solidFill>
+                <a:latin typeface="Courier New" pitchFamily="34" charset="0"/>
+                <a:ea typeface="Courier New" pitchFamily="34" charset="-122"/>
+                <a:cs typeface="Courier New" pitchFamily="34" charset="-120"/>
+              </a:rPr>
+              <a:t>Weak checksum</a:t>
+            </a:r>
+            <a:endParaRPr lang="en-US" sz="2000" dirty="0"/>
+          </a:p>
+        </p:txBody>
+      </p:sp>
+      <p:sp>
+        <p:nvSpPr>
+          <p:cNvPr id="12" name="Text 10"/>
+          <p:cNvSpPr/>
+          <p:nvPr/>
+        </p:nvSpPr>
+        <p:spPr>
+          <a:xfrm>
+            <a:off x="8229600" y="1920240"/>
+            <a:ext cx="3246120" cy="2514600"/>
+          </a:xfrm>
+          <a:prstGeom prst="rect">
+            <a:avLst/>
+          </a:prstGeom>
+          <a:noFill/>
+          <a:ln/>
+        </p:spPr>
+        <p:txBody>
+          <a:bodyPr wrap="square" lIns="0" tIns="0" rIns="0" bIns="0" rtlCol="0" anchor="t"/>
+          <a:lstStyle/>
+          <a:p>
+            <a:pPr indent="0" marL="0">
+              <a:buNone/>
+            </a:pPr>
+            <a:r>
+              <a:rPr lang="en-US" sz="2000" dirty="0">
+                <a:solidFill>
+                  <a:srgbClr val="E6EDF3"/>
                 </a:solidFill>
                 <a:latin typeface="Calibri" pitchFamily="34" charset="0"/>
                 <a:ea typeface="Calibri" pitchFamily="34" charset="-122"/>
                 <a:cs typeface="Calibri" pitchFamily="34" charset="-120"/>
               </a:rPr>
-              <a:t>Limits: Go-Back-N wastes bandwidth and suffers under reordering; C tests use an emulated path; the tabular agent did not beat AIMD in C.</a:t>
-            </a:r>
-            <a:endParaRPr lang="en-US" sz="1400" dirty="0"/>
+              <a:t>Byte-sum checksum let 2% of corrupted packets through (fuzzer). Now CRC-16: 0 of 333k accepted, sanitizers clean.</a:t>
+            </a:r>
+            <a:endParaRPr lang="en-US" sz="2000" dirty="0"/>
+          </a:p>
+        </p:txBody>
+      </p:sp>
+      <p:sp>
+        <p:nvSpPr>
+          <p:cNvPr id="13" name="Text 11"/>
+          <p:cNvSpPr/>
+          <p:nvPr/>
+        </p:nvSpPr>
+        <p:spPr>
+          <a:xfrm>
+            <a:off x="548640" y="4892040"/>
+            <a:ext cx="11064240" cy="914400"/>
+          </a:xfrm>
+          <a:prstGeom prst="rect">
+            <a:avLst/>
+          </a:prstGeom>
+          <a:noFill/>
+          <a:ln/>
+        </p:spPr>
+        <p:txBody>
+          <a:bodyPr wrap="square" lIns="0" tIns="0" rIns="0" bIns="0" rtlCol="0" anchor="ctr"/>
+          <a:lstStyle/>
+          <a:p>
+            <a:pPr indent="0" marL="0">
+              <a:buNone/>
+            </a:pPr>
+            <a:r>
+              <a:rPr lang="en-US" sz="1500" dirty="0">
+                <a:solidFill>
+                  <a:srgbClr val="E6EDF3"/>
+                </a:solidFill>
+                <a:latin typeface="Calibri" pitchFamily="34" charset="0"/>
+                <a:ea typeface="Calibri" pitchFamily="34" charset="-122"/>
+                <a:cs typeface="Calibri" pitchFamily="34" charset="-120"/>
+              </a:rPr>
+              <a:t>Independent check on real UDP sockets through an impairment proxy (src/impair.c): neural agent -17% / -53% / -45% / -39% vs tuned AIMD on 5G / lossy / satellite / fast; hostile path a tie. eval_proxy.sh</a:t>
+            </a:r>
+            <a:endParaRPr lang="en-US" sz="1500" dirty="0"/>
           </a:p>
         </p:txBody>
       </p:sp>
@@ -19113,8 +20164,8 @@
         </p:nvSpPr>
         <p:spPr>
           <a:xfrm>
-            <a:off x="731520" y="2103120"/>
-            <a:ext cx="10058400" cy="1097280"/>
+            <a:off x="548640" y="320040"/>
+            <a:ext cx="11064240" cy="731520"/>
           </a:xfrm>
           <a:prstGeom prst="rect">
             <a:avLst/>
@@ -19130,7 +20181,7 @@
               <a:buNone/>
             </a:pPr>
             <a:r>
-              <a:rPr lang="en-US" sz="6400" b="1" dirty="0">
+              <a:rPr lang="en-US" sz="3000" b="1" dirty="0">
                 <a:solidFill>
                   <a:srgbClr val="39FF88"/>
                 </a:solidFill>
@@ -19138,9 +20189,9 @@
                 <a:ea typeface="Courier New" pitchFamily="34" charset="-122"/>
                 <a:cs typeface="Courier New" pitchFamily="34" charset="-120"/>
               </a:rPr>
-              <a:t>Thank you</a:t>
-            </a:r>
-            <a:endParaRPr lang="en-US" sz="6400" dirty="0"/>
+              <a:t>A fast, faithful C simulator, and what it showed</a:t>
+            </a:r>
+            <a:endParaRPr lang="en-US" sz="3000" dirty="0"/>
           </a:p>
         </p:txBody>
       </p:sp>
@@ -19152,8 +20203,8 @@
         </p:nvSpPr>
         <p:spPr>
           <a:xfrm>
-            <a:off x="731520" y="3474720"/>
-            <a:ext cx="10058400" cy="548640"/>
+            <a:off x="9418320" y="6446520"/>
+            <a:ext cx="2377440" cy="274320"/>
           </a:xfrm>
           <a:prstGeom prst="rect">
             <a:avLst/>
@@ -19165,34 +20216,50 @@
           <a:bodyPr wrap="square" lIns="0" tIns="0" rIns="0" bIns="0" rtlCol="0" anchor="ctr"/>
           <a:lstStyle/>
           <a:p>
-            <a:pPr indent="0" marL="0">
+            <a:pPr algn="r" indent="0" marL="0">
               <a:buNone/>
             </a:pPr>
             <a:r>
-              <a:rPr lang="en-US" sz="2600" dirty="0">
+              <a:rPr lang="en-US" sz="1000" dirty="0">
                 <a:solidFill>
-                  <a:srgbClr val="E6EDF3"/>
+                  <a:srgbClr val="8B98A5"/>
                 </a:solidFill>
                 <a:latin typeface="Courier New" pitchFamily="34" charset="0"/>
                 <a:ea typeface="Courier New" pitchFamily="34" charset="-122"/>
                 <a:cs typeface="Courier New" pitchFamily="34" charset="-120"/>
               </a:rPr>
-              <a:t>github.com/Capsturrrr/rudp</a:t>
-            </a:r>
-            <a:endParaRPr lang="en-US" sz="2600" dirty="0"/>
+              <a:t>28 / 32   Smart-RUDP</a:t>
+            </a:r>
+            <a:endParaRPr lang="en-US" sz="1000" dirty="0"/>
           </a:p>
         </p:txBody>
       </p:sp>
-      <p:sp>
-        <p:nvSpPr>
-          <p:cNvPr id="4" name="Text 2"/>
+      <p:graphicFrame>
+        <p:nvGraphicFramePr>
+          <p:cNvPr id="4" name="Chart 0" descr=""/>
+          <p:cNvGraphicFramePr/>
+          <p:nvPr/>
+        </p:nvGraphicFramePr>
+        <p:xfrm>
+          <a:off x="457200" y="1188720"/>
+          <a:ext cx="6766560" cy="4480560"/>
+        </p:xfrm>
+        <a:graphic xmlns:a="http://schemas.openxmlformats.org/drawingml/2006/main">
+          <a:graphicData uri="http://schemas.openxmlformats.org/drawingml/2006/chart">
+            <c:chart xmlns:c="http://schemas.openxmlformats.org/drawingml/2006/chart" r:id="rId1"/>
+          </a:graphicData>
+        </a:graphic>
+      </p:graphicFrame>
+      <p:sp>
+        <p:nvSpPr>
+          <p:cNvPr id="5" name="Text 2"/>
           <p:cNvSpPr/>
           <p:nvPr/>
         </p:nvSpPr>
         <p:spPr>
           <a:xfrm>
-            <a:off x="731520" y="4206240"/>
-            <a:ext cx="10058400" cy="457200"/>
+            <a:off x="7498080" y="1188720"/>
+            <a:ext cx="4206240" cy="4754880"/>
           </a:xfrm>
           <a:prstGeom prst="rect">
             <a:avLst/>
@@ -19201,24 +20268,91 @@
           <a:ln/>
         </p:spPr>
         <p:txBody>
-          <a:bodyPr wrap="square" lIns="0" tIns="0" rIns="0" bIns="0" rtlCol="0" anchor="ctr"/>
+          <a:bodyPr wrap="square" lIns="0" tIns="0" rIns="0" bIns="0" rtlCol="0" anchor="t"/>
           <a:lstStyle/>
           <a:p>
-            <a:pPr indent="0" marL="0">
-              <a:buNone/>
+            <a:pPr marL="342900" indent="-342900">
+              <a:spcAft>
+                <a:spcPts val="800"/>
+              </a:spcAft>
+              <a:buSzPct val="100000"/>
+              <a:buChar char="•"/>
             </a:pPr>
             <a:r>
-              <a:rPr lang="en-US" sz="1800" dirty="0">
+              <a:rPr lang="en-US" sz="1400" dirty="0">
                 <a:solidFill>
-                  <a:srgbClr val="8B98A5"/>
+                  <a:srgbClr val="E6EDF3"/>
                 </a:solidFill>
                 <a:latin typeface="Calibri" pitchFamily="34" charset="0"/>
                 <a:ea typeface="Calibri" pitchFamily="34" charset="-122"/>
                 <a:cs typeface="Calibri" pitchFamily="34" charset="-120"/>
               </a:rPr>
-              <a:t>Harshavardhan Mallela   Rohit Arya   Shloak Sinha</a:t>
-            </a:r>
-            <a:endParaRPr lang="en-US" sz="1800" dirty="0"/>
+              <a:t>--vt 1: the real C sender with a simulated receiver and clock, about 1000x faster; matches the real-clock runs in 15 of 15 cells</a:t>
+            </a:r>
+            <a:endParaRPr lang="en-US" sz="1400" dirty="0"/>
+          </a:p>
+          <a:p>
+            <a:pPr marL="342900" indent="-342900">
+              <a:spcAft>
+                <a:spcPts val="800"/>
+              </a:spcAft>
+              <a:buSzPct val="100000"/>
+              <a:buChar char="•"/>
+            </a:pPr>
+            <a:r>
+              <a:rPr lang="en-US" sz="1400" dirty="0">
+                <a:solidFill>
+                  <a:srgbClr val="E6EDF3"/>
+                </a:solidFill>
+                <a:latin typeface="Calibri" pitchFamily="34" charset="0"/>
+                <a:ea typeface="Calibri" pitchFamily="34" charset="-122"/>
+                <a:cs typeface="Calibri" pitchFamily="34" charset="-120"/>
+              </a:rPr>
+              <a:t>100 random held-out paths: neural agent 0.53x the time of tuned AIMD, faster on 89, never &gt;20% slower (tuned CUBIC: slower by &gt;20% on 27)</a:t>
+            </a:r>
+            <a:endParaRPr lang="en-US" sz="1400" dirty="0"/>
+          </a:p>
+          <a:p>
+            <a:pPr marL="342900" indent="-342900">
+              <a:spcAft>
+                <a:spcPts val="800"/>
+              </a:spcAft>
+              <a:buSzPct val="100000"/>
+              <a:buChar char="•"/>
+            </a:pPr>
+            <a:r>
+              <a:rPr lang="en-US" sz="1400" dirty="0">
+                <a:solidFill>
+                  <a:srgbClr val="E6EDF3"/>
+                </a:solidFill>
+                <a:latin typeface="Calibri" pitchFamily="34" charset="0"/>
+                <a:ea typeface="Calibri" pitchFamily="34" charset="-122"/>
+                <a:cs typeface="Calibri" pitchFamily="34" charset="-120"/>
+              </a:rPr>
+              <a:t>Biggest factors: window cap 128, pacing, timer floor, slow start</a:t>
+            </a:r>
+            <a:endParaRPr lang="en-US" sz="1400" dirty="0"/>
+          </a:p>
+          <a:p>
+            <a:pPr marL="342900" indent="-342900">
+              <a:spcAft>
+                <a:spcPts val="800"/>
+              </a:spcAft>
+              <a:buSzPct val="100000"/>
+              <a:buChar char="•"/>
+            </a:pPr>
+            <a:r>
+              <a:rPr lang="en-US" sz="1400" dirty="0">
+                <a:solidFill>
+                  <a:srgbClr val="E6EDF3"/>
+                </a:solidFill>
+                <a:latin typeface="Calibri" pitchFamily="34" charset="0"/>
+                <a:ea typeface="Calibri" pitchFamily="34" charset="-122"/>
+                <a:cs typeface="Calibri" pitchFamily="34" charset="-120"/>
+              </a:rPr>
+              <a:t>Evolution-strategy retraining in C: +2% only, not adopted</a:t>
+            </a:r>
+            <a:endParaRPr lang="en-US" sz="1400" dirty="0"/>
           </a:p>
         </p:txBody>
       </p:sp>
@@ -19287,7 +20421,7 @@
                 <a:ea typeface="Courier New" pitchFamily="34" charset="-122"/>
                 <a:cs typeface="Courier New" pitchFamily="34" charset="-120"/>
               </a:rPr>
-              <a:t>Appendix: slow start and congestion avoidance</a:t>
+              <a:t>Fairness and file transfer</a:t>
             </a:r>
             <a:endParaRPr lang="en-US" sz="3000" dirty="0"/>
           </a:p>
@@ -19326,46 +20460,2552 @@
                 <a:ea typeface="Courier New" pitchFamily="34" charset="-122"/>
                 <a:cs typeface="Courier New" pitchFamily="34" charset="-120"/>
               </a:rPr>
-              <a:t>Appendix   Smart-RUDP</a:t>
+              <a:t>29 / 32   Smart-RUDP</a:t>
             </a:r>
             <a:endParaRPr lang="en-US" sz="1000" dirty="0"/>
           </a:p>
         </p:txBody>
       </p:sp>
-      <p:pic>
-        <p:nvPicPr>
-          <p:cNvPr id="4" name="Image 0" descr="fig1_cwnd_no_loss.png">    </p:cNvPr>
-          <p:cNvPicPr>
-            <a:picLocks noChangeAspect="1"/>
-          </p:cNvPicPr>
+      <p:graphicFrame>
+        <p:nvGraphicFramePr>
+          <p:cNvPr id="30" name="Table 0"/>
+          <p:cNvGraphicFramePr>
+            <a:graphicFrameLocks noGrp="1"/>
+          </p:cNvGraphicFramePr>
+          <p:nvPr>
+            <p:extLst>
+              <p:ext uri="{D42A27DB-BD31-4B8C-83A1-F6EECF244321}">
+                <p14:modId xmlns:p14="http://schemas.microsoft.com/office/powerpoint/2010/main" val="1579011935"/>
+              </p:ext>
+            </p:extLst>
+          </p:nvPr>
+        </p:nvGraphicFramePr>
+        <p:xfrm>
+          <a:off x="548640" y="1188720"/>
+          <a:ext cx="5486400" cy="914400"/>
+        </p:xfrm>
+        <a:graphic>
+          <a:graphicData uri="http://schemas.openxmlformats.org/drawingml/2006/table">
+            <a:tbl>
+              <a:tblPr/>
+              <a:tblGrid>
+                <a:gridCol w="2651760"/>
+                <a:gridCol w="914400"/>
+                <a:gridCol w="914400"/>
+                <a:gridCol w="1005840"/>
+              </a:tblGrid>
+              <a:tr h="402336">
+                <a:tc>
+                  <a:txBody>
+                    <a:bodyPr/>
+                    <a:lstStyle/>
+                    <a:p>
+                      <a:pPr indent="0" marL="0">
+                        <a:buNone/>
+                      </a:pPr>
+                      <a:r>
+                        <a:rPr lang="en-US" sz="1300" b="1" dirty="0">
+                          <a:solidFill>
+                            <a:srgbClr val="0B0F14"/>
+                          </a:solidFill>
+                          <a:latin typeface="Courier New" pitchFamily="34" charset="0"/>
+                          <a:ea typeface="Courier New" pitchFamily="34" charset="-122"/>
+                          <a:cs typeface="Courier New" pitchFamily="34" charset="-120"/>
+                        </a:rPr>
+                        <a:t>Two flows, real sockets</a:t>
+                      </a:r>
+                      <a:endParaRPr lang="en-US" sz="1300" dirty="0">
+                        <a:latin typeface="Courier New" charset="0"/>
+                        <a:ea typeface="Courier New" charset="0"/>
+                        <a:cs typeface="Courier New" charset="0"/>
+                      </a:endParaRPr>
+                    </a:p>
+                  </a:txBody>
+                  <a:tcPr marL="91440" marR="91440" marT="45720" marB="45720">
+                    <a:lnL w="12700" cap="flat" cmpd="sng" algn="ctr">
+                      <a:solidFill>
+                        <a:srgbClr val="2A3441"/>
+                      </a:solidFill>
+                      <a:prstDash val="solid"/>
+                      <a:round/>
+                      <a:headEnd type="none" w="med" len="med"/>
+                      <a:tailEnd type="none" w="med" len="med"/>
+                    </a:lnL>
+                    <a:lnR w="12700" cap="flat" cmpd="sng" algn="ctr">
+                      <a:solidFill>
+                        <a:srgbClr val="2A3441"/>
+                      </a:solidFill>
+                      <a:prstDash val="solid"/>
+                      <a:round/>
+                      <a:headEnd type="none" w="med" len="med"/>
+                      <a:tailEnd type="none" w="med" len="med"/>
+                    </a:lnR>
+                    <a:lnT w="12700" cap="flat" cmpd="sng" algn="ctr">
+                      <a:solidFill>
+                        <a:srgbClr val="2A3441"/>
+                      </a:solidFill>
+                      <a:prstDash val="solid"/>
+                      <a:round/>
+                      <a:headEnd type="none" w="med" len="med"/>
+                      <a:tailEnd type="none" w="med" len="med"/>
+                    </a:lnT>
+                    <a:lnB w="12700" cap="flat" cmpd="sng" algn="ctr">
+                      <a:solidFill>
+                        <a:srgbClr val="2A3441"/>
+                      </a:solidFill>
+                      <a:prstDash val="solid"/>
+                      <a:round/>
+                      <a:headEnd type="none" w="med" len="med"/>
+                      <a:tailEnd type="none" w="med" len="med"/>
+                    </a:lnB>
+                    <a:solidFill>
+                      <a:srgbClr val="39FF88"/>
+                    </a:solidFill>
+                  </a:tcPr>
+                </a:tc>
+                <a:tc>
+                  <a:txBody>
+                    <a:bodyPr/>
+                    <a:lstStyle/>
+                    <a:p>
+                      <a:pPr indent="0" marL="0">
+                        <a:buNone/>
+                      </a:pPr>
+                      <a:r>
+                        <a:rPr lang="en-US" sz="1300" b="1" dirty="0">
+                          <a:solidFill>
+                            <a:srgbClr val="0B0F14"/>
+                          </a:solidFill>
+                          <a:latin typeface="Courier New" pitchFamily="34" charset="0"/>
+                          <a:ea typeface="Courier New" pitchFamily="34" charset="-122"/>
+                          <a:cs typeface="Courier New" pitchFamily="34" charset="-120"/>
+                        </a:rPr>
+                        <a:t>Share A</a:t>
+                      </a:r>
+                      <a:endParaRPr lang="en-US" sz="1300" dirty="0">
+                        <a:latin typeface="Courier New" charset="0"/>
+                        <a:ea typeface="Courier New" charset="0"/>
+                        <a:cs typeface="Courier New" charset="0"/>
+                      </a:endParaRPr>
+                    </a:p>
+                  </a:txBody>
+                  <a:tcPr marL="91440" marR="91440" marT="45720" marB="45720">
+                    <a:lnL w="12700" cap="flat" cmpd="sng" algn="ctr">
+                      <a:solidFill>
+                        <a:srgbClr val="2A3441"/>
+                      </a:solidFill>
+                      <a:prstDash val="solid"/>
+                      <a:round/>
+                      <a:headEnd type="none" w="med" len="med"/>
+                      <a:tailEnd type="none" w="med" len="med"/>
+                    </a:lnL>
+                    <a:lnR w="12700" cap="flat" cmpd="sng" algn="ctr">
+                      <a:solidFill>
+                        <a:srgbClr val="2A3441"/>
+                      </a:solidFill>
+                      <a:prstDash val="solid"/>
+                      <a:round/>
+                      <a:headEnd type="none" w="med" len="med"/>
+                      <a:tailEnd type="none" w="med" len="med"/>
+                    </a:lnR>
+                    <a:lnT w="12700" cap="flat" cmpd="sng" algn="ctr">
+                      <a:solidFill>
+                        <a:srgbClr val="2A3441"/>
+                      </a:solidFill>
+                      <a:prstDash val="solid"/>
+                      <a:round/>
+                      <a:headEnd type="none" w="med" len="med"/>
+                      <a:tailEnd type="none" w="med" len="med"/>
+                    </a:lnT>
+                    <a:lnB w="12700" cap="flat" cmpd="sng" algn="ctr">
+                      <a:solidFill>
+                        <a:srgbClr val="2A3441"/>
+                      </a:solidFill>
+                      <a:prstDash val="solid"/>
+                      <a:round/>
+                      <a:headEnd type="none" w="med" len="med"/>
+                      <a:tailEnd type="none" w="med" len="med"/>
+                    </a:lnB>
+                    <a:solidFill>
+                      <a:srgbClr val="39FF88"/>
+                    </a:solidFill>
+                  </a:tcPr>
+                </a:tc>
+                <a:tc>
+                  <a:txBody>
+                    <a:bodyPr/>
+                    <a:lstStyle/>
+                    <a:p>
+                      <a:pPr indent="0" marL="0">
+                        <a:buNone/>
+                      </a:pPr>
+                      <a:r>
+                        <a:rPr lang="en-US" sz="1300" b="1" dirty="0">
+                          <a:solidFill>
+                            <a:srgbClr val="0B0F14"/>
+                          </a:solidFill>
+                          <a:latin typeface="Courier New" pitchFamily="34" charset="0"/>
+                          <a:ea typeface="Courier New" pitchFamily="34" charset="-122"/>
+                          <a:cs typeface="Courier New" pitchFamily="34" charset="-120"/>
+                        </a:rPr>
+                        <a:t>Share B</a:t>
+                      </a:r>
+                      <a:endParaRPr lang="en-US" sz="1300" dirty="0">
+                        <a:latin typeface="Courier New" charset="0"/>
+                        <a:ea typeface="Courier New" charset="0"/>
+                        <a:cs typeface="Courier New" charset="0"/>
+                      </a:endParaRPr>
+                    </a:p>
+                  </a:txBody>
+                  <a:tcPr marL="91440" marR="91440" marT="45720" marB="45720">
+                    <a:lnL w="12700" cap="flat" cmpd="sng" algn="ctr">
+                      <a:solidFill>
+                        <a:srgbClr val="2A3441"/>
+                      </a:solidFill>
+                      <a:prstDash val="solid"/>
+                      <a:round/>
+                      <a:headEnd type="none" w="med" len="med"/>
+                      <a:tailEnd type="none" w="med" len="med"/>
+                    </a:lnL>
+                    <a:lnR w="12700" cap="flat" cmpd="sng" algn="ctr">
+                      <a:solidFill>
+                        <a:srgbClr val="2A3441"/>
+                      </a:solidFill>
+                      <a:prstDash val="solid"/>
+                      <a:round/>
+                      <a:headEnd type="none" w="med" len="med"/>
+                      <a:tailEnd type="none" w="med" len="med"/>
+                    </a:lnR>
+                    <a:lnT w="12700" cap="flat" cmpd="sng" algn="ctr">
+                      <a:solidFill>
+                        <a:srgbClr val="2A3441"/>
+                      </a:solidFill>
+                      <a:prstDash val="solid"/>
+                      <a:round/>
+                      <a:headEnd type="none" w="med" len="med"/>
+                      <a:tailEnd type="none" w="med" len="med"/>
+                    </a:lnT>
+                    <a:lnB w="12700" cap="flat" cmpd="sng" algn="ctr">
+                      <a:solidFill>
+                        <a:srgbClr val="2A3441"/>
+                      </a:solidFill>
+                      <a:prstDash val="solid"/>
+                      <a:round/>
+                      <a:headEnd type="none" w="med" len="med"/>
+                      <a:tailEnd type="none" w="med" len="med"/>
+                    </a:lnB>
+                    <a:solidFill>
+                      <a:srgbClr val="39FF88"/>
+                    </a:solidFill>
+                  </a:tcPr>
+                </a:tc>
+                <a:tc>
+                  <a:txBody>
+                    <a:bodyPr/>
+                    <a:lstStyle/>
+                    <a:p>
+                      <a:pPr indent="0" marL="0">
+                        <a:buNone/>
+                      </a:pPr>
+                      <a:r>
+                        <a:rPr lang="en-US" sz="1300" b="1" dirty="0">
+                          <a:solidFill>
+                            <a:srgbClr val="0B0F14"/>
+                          </a:solidFill>
+                          <a:latin typeface="Courier New" pitchFamily="34" charset="0"/>
+                          <a:ea typeface="Courier New" pitchFamily="34" charset="-122"/>
+                          <a:cs typeface="Courier New" pitchFamily="34" charset="-120"/>
+                        </a:rPr>
+                        <a:t>Jain</a:t>
+                      </a:r>
+                      <a:endParaRPr lang="en-US" sz="1300" dirty="0">
+                        <a:latin typeface="Courier New" charset="0"/>
+                        <a:ea typeface="Courier New" charset="0"/>
+                        <a:cs typeface="Courier New" charset="0"/>
+                      </a:endParaRPr>
+                    </a:p>
+                  </a:txBody>
+                  <a:tcPr marL="91440" marR="91440" marT="45720" marB="45720">
+                    <a:lnL w="12700" cap="flat" cmpd="sng" algn="ctr">
+                      <a:solidFill>
+                        <a:srgbClr val="2A3441"/>
+                      </a:solidFill>
+                      <a:prstDash val="solid"/>
+                      <a:round/>
+                      <a:headEnd type="none" w="med" len="med"/>
+                      <a:tailEnd type="none" w="med" len="med"/>
+                    </a:lnL>
+                    <a:lnR w="12700" cap="flat" cmpd="sng" algn="ctr">
+                      <a:solidFill>
+                        <a:srgbClr val="2A3441"/>
+                      </a:solidFill>
+                      <a:prstDash val="solid"/>
+                      <a:round/>
+                      <a:headEnd type="none" w="med" len="med"/>
+                      <a:tailEnd type="none" w="med" len="med"/>
+                    </a:lnR>
+                    <a:lnT w="12700" cap="flat" cmpd="sng" algn="ctr">
+                      <a:solidFill>
+                        <a:srgbClr val="2A3441"/>
+                      </a:solidFill>
+                      <a:prstDash val="solid"/>
+                      <a:round/>
+                      <a:headEnd type="none" w="med" len="med"/>
+                      <a:tailEnd type="none" w="med" len="med"/>
+                    </a:lnT>
+                    <a:lnB w="12700" cap="flat" cmpd="sng" algn="ctr">
+                      <a:solidFill>
+                        <a:srgbClr val="2A3441"/>
+                      </a:solidFill>
+                      <a:prstDash val="solid"/>
+                      <a:round/>
+                      <a:headEnd type="none" w="med" len="med"/>
+                      <a:tailEnd type="none" w="med" len="med"/>
+                    </a:lnB>
+                    <a:solidFill>
+                      <a:srgbClr val="39FF88"/>
+                    </a:solidFill>
+                  </a:tcPr>
+                </a:tc>
+              </a:tr>
+              <a:tr h="402336">
+                <a:tc>
+                  <a:txBody>
+                    <a:bodyPr/>
+                    <a:lstStyle/>
+                    <a:p>
+                      <a:pPr indent="0" marL="0">
+                        <a:buNone/>
+                      </a:pPr>
+                      <a:r>
+                        <a:rPr lang="en-US" sz="1300" dirty="0">
+                          <a:solidFill>
+                            <a:srgbClr val="E6EDF3"/>
+                          </a:solidFill>
+                          <a:latin typeface="Calibri" pitchFamily="34" charset="0"/>
+                          <a:ea typeface="Calibri" pitchFamily="34" charset="-122"/>
+                          <a:cs typeface="Calibri" pitchFamily="34" charset="-120"/>
+                        </a:rPr>
+                        <a:t>AIMD vs AIMD</a:t>
+                      </a:r>
+                      <a:endParaRPr lang="en-US" sz="1300" dirty="0">
+                        <a:latin typeface="Calibri" charset="0"/>
+                        <a:ea typeface="Calibri" charset="0"/>
+                        <a:cs typeface="Calibri" charset="0"/>
+                      </a:endParaRPr>
+                    </a:p>
+                  </a:txBody>
+                  <a:tcPr marL="91440" marR="91440" marT="45720" marB="45720">
+                    <a:lnL w="12700" cap="flat" cmpd="sng" algn="ctr">
+                      <a:solidFill>
+                        <a:srgbClr val="2A3441"/>
+                      </a:solidFill>
+                      <a:prstDash val="solid"/>
+                      <a:round/>
+                      <a:headEnd type="none" w="med" len="med"/>
+                      <a:tailEnd type="none" w="med" len="med"/>
+                    </a:lnL>
+                    <a:lnR w="12700" cap="flat" cmpd="sng" algn="ctr">
+                      <a:solidFill>
+                        <a:srgbClr val="2A3441"/>
+                      </a:solidFill>
+                      <a:prstDash val="solid"/>
+                      <a:round/>
+                      <a:headEnd type="none" w="med" len="med"/>
+                      <a:tailEnd type="none" w="med" len="med"/>
+                    </a:lnR>
+                    <a:lnT w="12700" cap="flat" cmpd="sng" algn="ctr">
+                      <a:solidFill>
+                        <a:srgbClr val="2A3441"/>
+                      </a:solidFill>
+                      <a:prstDash val="solid"/>
+                      <a:round/>
+                      <a:headEnd type="none" w="med" len="med"/>
+                      <a:tailEnd type="none" w="med" len="med"/>
+                    </a:lnT>
+                    <a:lnB w="12700" cap="flat" cmpd="sng" algn="ctr">
+                      <a:solidFill>
+                        <a:srgbClr val="2A3441"/>
+                      </a:solidFill>
+                      <a:prstDash val="solid"/>
+                      <a:round/>
+                      <a:headEnd type="none" w="med" len="med"/>
+                      <a:tailEnd type="none" w="med" len="med"/>
+                    </a:lnB>
+                    <a:solidFill>
+                      <a:srgbClr val="141B24"/>
+                    </a:solidFill>
+                  </a:tcPr>
+                </a:tc>
+                <a:tc>
+                  <a:txBody>
+                    <a:bodyPr/>
+                    <a:lstStyle/>
+                    <a:p>
+                      <a:pPr indent="0" marL="0">
+                        <a:buNone/>
+                      </a:pPr>
+                      <a:r>
+                        <a:rPr lang="en-US" sz="1300" dirty="0">
+                          <a:solidFill>
+                            <a:srgbClr val="E6EDF3"/>
+                          </a:solidFill>
+                          <a:latin typeface="Calibri" pitchFamily="34" charset="0"/>
+                          <a:ea typeface="Calibri" pitchFamily="34" charset="-122"/>
+                          <a:cs typeface="Calibri" pitchFamily="34" charset="-120"/>
+                        </a:rPr>
+                        <a:t>49%</a:t>
+                      </a:r>
+                      <a:endParaRPr lang="en-US" sz="1300" dirty="0">
+                        <a:latin typeface="Calibri" charset="0"/>
+                        <a:ea typeface="Calibri" charset="0"/>
+                        <a:cs typeface="Calibri" charset="0"/>
+                      </a:endParaRPr>
+                    </a:p>
+                  </a:txBody>
+                  <a:tcPr marL="91440" marR="91440" marT="45720" marB="45720">
+                    <a:lnL w="12700" cap="flat" cmpd="sng" algn="ctr">
+                      <a:solidFill>
+                        <a:srgbClr val="2A3441"/>
+                      </a:solidFill>
+                      <a:prstDash val="solid"/>
+                      <a:round/>
+                      <a:headEnd type="none" w="med" len="med"/>
+                      <a:tailEnd type="none" w="med" len="med"/>
+                    </a:lnL>
+                    <a:lnR w="12700" cap="flat" cmpd="sng" algn="ctr">
+                      <a:solidFill>
+                        <a:srgbClr val="2A3441"/>
+                      </a:solidFill>
+                      <a:prstDash val="solid"/>
+                      <a:round/>
+                      <a:headEnd type="none" w="med" len="med"/>
+                      <a:tailEnd type="none" w="med" len="med"/>
+                    </a:lnR>
+                    <a:lnT w="12700" cap="flat" cmpd="sng" algn="ctr">
+                      <a:solidFill>
+                        <a:srgbClr val="2A3441"/>
+                      </a:solidFill>
+                      <a:prstDash val="solid"/>
+                      <a:round/>
+                      <a:headEnd type="none" w="med" len="med"/>
+                      <a:tailEnd type="none" w="med" len="med"/>
+                    </a:lnT>
+                    <a:lnB w="12700" cap="flat" cmpd="sng" algn="ctr">
+                      <a:solidFill>
+                        <a:srgbClr val="2A3441"/>
+                      </a:solidFill>
+                      <a:prstDash val="solid"/>
+                      <a:round/>
+                      <a:headEnd type="none" w="med" len="med"/>
+                      <a:tailEnd type="none" w="med" len="med"/>
+                    </a:lnB>
+                    <a:solidFill>
+                      <a:srgbClr val="141B24"/>
+                    </a:solidFill>
+                  </a:tcPr>
+                </a:tc>
+                <a:tc>
+                  <a:txBody>
+                    <a:bodyPr/>
+                    <a:lstStyle/>
+                    <a:p>
+                      <a:pPr indent="0" marL="0">
+                        <a:buNone/>
+                      </a:pPr>
+                      <a:r>
+                        <a:rPr lang="en-US" sz="1300" dirty="0">
+                          <a:solidFill>
+                            <a:srgbClr val="E6EDF3"/>
+                          </a:solidFill>
+                          <a:latin typeface="Calibri" pitchFamily="34" charset="0"/>
+                          <a:ea typeface="Calibri" pitchFamily="34" charset="-122"/>
+                          <a:cs typeface="Calibri" pitchFamily="34" charset="-120"/>
+                        </a:rPr>
+                        <a:t>51%</a:t>
+                      </a:r>
+                      <a:endParaRPr lang="en-US" sz="1300" dirty="0">
+                        <a:latin typeface="Calibri" charset="0"/>
+                        <a:ea typeface="Calibri" charset="0"/>
+                        <a:cs typeface="Calibri" charset="0"/>
+                      </a:endParaRPr>
+                    </a:p>
+                  </a:txBody>
+                  <a:tcPr marL="91440" marR="91440" marT="45720" marB="45720">
+                    <a:lnL w="12700" cap="flat" cmpd="sng" algn="ctr">
+                      <a:solidFill>
+                        <a:srgbClr val="2A3441"/>
+                      </a:solidFill>
+                      <a:prstDash val="solid"/>
+                      <a:round/>
+                      <a:headEnd type="none" w="med" len="med"/>
+                      <a:tailEnd type="none" w="med" len="med"/>
+                    </a:lnL>
+                    <a:lnR w="12700" cap="flat" cmpd="sng" algn="ctr">
+                      <a:solidFill>
+                        <a:srgbClr val="2A3441"/>
+                      </a:solidFill>
+                      <a:prstDash val="solid"/>
+                      <a:round/>
+                      <a:headEnd type="none" w="med" len="med"/>
+                      <a:tailEnd type="none" w="med" len="med"/>
+                    </a:lnR>
+                    <a:lnT w="12700" cap="flat" cmpd="sng" algn="ctr">
+                      <a:solidFill>
+                        <a:srgbClr val="2A3441"/>
+                      </a:solidFill>
+                      <a:prstDash val="solid"/>
+                      <a:round/>
+                      <a:headEnd type="none" w="med" len="med"/>
+                      <a:tailEnd type="none" w="med" len="med"/>
+                    </a:lnT>
+                    <a:lnB w="12700" cap="flat" cmpd="sng" algn="ctr">
+                      <a:solidFill>
+                        <a:srgbClr val="2A3441"/>
+                      </a:solidFill>
+                      <a:prstDash val="solid"/>
+                      <a:round/>
+                      <a:headEnd type="none" w="med" len="med"/>
+                      <a:tailEnd type="none" w="med" len="med"/>
+                    </a:lnB>
+                    <a:solidFill>
+                      <a:srgbClr val="141B24"/>
+                    </a:solidFill>
+                  </a:tcPr>
+                </a:tc>
+                <a:tc>
+                  <a:txBody>
+                    <a:bodyPr/>
+                    <a:lstStyle/>
+                    <a:p>
+                      <a:pPr indent="0" marL="0">
+                        <a:buNone/>
+                      </a:pPr>
+                      <a:r>
+                        <a:rPr lang="en-US" sz="1300" dirty="0">
+                          <a:solidFill>
+                            <a:srgbClr val="E6EDF3"/>
+                          </a:solidFill>
+                          <a:latin typeface="Calibri" pitchFamily="34" charset="0"/>
+                          <a:ea typeface="Calibri" pitchFamily="34" charset="-122"/>
+                          <a:cs typeface="Calibri" pitchFamily="34" charset="-120"/>
+                        </a:rPr>
+                        <a:t>0.99</a:t>
+                      </a:r>
+                      <a:endParaRPr lang="en-US" sz="1300" dirty="0">
+                        <a:latin typeface="Calibri" charset="0"/>
+                        <a:ea typeface="Calibri" charset="0"/>
+                        <a:cs typeface="Calibri" charset="0"/>
+                      </a:endParaRPr>
+                    </a:p>
+                  </a:txBody>
+                  <a:tcPr marL="91440" marR="91440" marT="45720" marB="45720">
+                    <a:lnL w="12700" cap="flat" cmpd="sng" algn="ctr">
+                      <a:solidFill>
+                        <a:srgbClr val="2A3441"/>
+                      </a:solidFill>
+                      <a:prstDash val="solid"/>
+                      <a:round/>
+                      <a:headEnd type="none" w="med" len="med"/>
+                      <a:tailEnd type="none" w="med" len="med"/>
+                    </a:lnL>
+                    <a:lnR w="12700" cap="flat" cmpd="sng" algn="ctr">
+                      <a:solidFill>
+                        <a:srgbClr val="2A3441"/>
+                      </a:solidFill>
+                      <a:prstDash val="solid"/>
+                      <a:round/>
+                      <a:headEnd type="none" w="med" len="med"/>
+                      <a:tailEnd type="none" w="med" len="med"/>
+                    </a:lnR>
+                    <a:lnT w="12700" cap="flat" cmpd="sng" algn="ctr">
+                      <a:solidFill>
+                        <a:srgbClr val="2A3441"/>
+                      </a:solidFill>
+                      <a:prstDash val="solid"/>
+                      <a:round/>
+                      <a:headEnd type="none" w="med" len="med"/>
+                      <a:tailEnd type="none" w="med" len="med"/>
+                    </a:lnT>
+                    <a:lnB w="12700" cap="flat" cmpd="sng" algn="ctr">
+                      <a:solidFill>
+                        <a:srgbClr val="2A3441"/>
+                      </a:solidFill>
+                      <a:prstDash val="solid"/>
+                      <a:round/>
+                      <a:headEnd type="none" w="med" len="med"/>
+                      <a:tailEnd type="none" w="med" len="med"/>
+                    </a:lnB>
+                    <a:solidFill>
+                      <a:srgbClr val="141B24"/>
+                    </a:solidFill>
+                  </a:tcPr>
+                </a:tc>
+              </a:tr>
+              <a:tr h="402336">
+                <a:tc>
+                  <a:txBody>
+                    <a:bodyPr/>
+                    <a:lstStyle/>
+                    <a:p>
+                      <a:pPr indent="0" marL="0">
+                        <a:buNone/>
+                      </a:pPr>
+                      <a:r>
+                        <a:rPr lang="en-US" sz="1300" dirty="0">
+                          <a:solidFill>
+                            <a:srgbClr val="E6EDF3"/>
+                          </a:solidFill>
+                          <a:latin typeface="Calibri" pitchFamily="34" charset="0"/>
+                          <a:ea typeface="Calibri" pitchFamily="34" charset="-122"/>
+                          <a:cs typeface="Calibri" pitchFamily="34" charset="-120"/>
+                        </a:rPr>
+                        <a:t>Neural vs neural</a:t>
+                      </a:r>
+                      <a:endParaRPr lang="en-US" sz="1300" dirty="0">
+                        <a:latin typeface="Calibri" charset="0"/>
+                        <a:ea typeface="Calibri" charset="0"/>
+                        <a:cs typeface="Calibri" charset="0"/>
+                      </a:endParaRPr>
+                    </a:p>
+                  </a:txBody>
+                  <a:tcPr marL="91440" marR="91440" marT="45720" marB="45720">
+                    <a:lnL w="12700" cap="flat" cmpd="sng" algn="ctr">
+                      <a:solidFill>
+                        <a:srgbClr val="2A3441"/>
+                      </a:solidFill>
+                      <a:prstDash val="solid"/>
+                      <a:round/>
+                      <a:headEnd type="none" w="med" len="med"/>
+                      <a:tailEnd type="none" w="med" len="med"/>
+                    </a:lnL>
+                    <a:lnR w="12700" cap="flat" cmpd="sng" algn="ctr">
+                      <a:solidFill>
+                        <a:srgbClr val="2A3441"/>
+                      </a:solidFill>
+                      <a:prstDash val="solid"/>
+                      <a:round/>
+                      <a:headEnd type="none" w="med" len="med"/>
+                      <a:tailEnd type="none" w="med" len="med"/>
+                    </a:lnR>
+                    <a:lnT w="12700" cap="flat" cmpd="sng" algn="ctr">
+                      <a:solidFill>
+                        <a:srgbClr val="2A3441"/>
+                      </a:solidFill>
+                      <a:prstDash val="solid"/>
+                      <a:round/>
+                      <a:headEnd type="none" w="med" len="med"/>
+                      <a:tailEnd type="none" w="med" len="med"/>
+                    </a:lnT>
+                    <a:lnB w="12700" cap="flat" cmpd="sng" algn="ctr">
+                      <a:solidFill>
+                        <a:srgbClr val="2A3441"/>
+                      </a:solidFill>
+                      <a:prstDash val="solid"/>
+                      <a:round/>
+                      <a:headEnd type="none" w="med" len="med"/>
+                      <a:tailEnd type="none" w="med" len="med"/>
+                    </a:lnB>
+                    <a:solidFill>
+                      <a:srgbClr val="141B24"/>
+                    </a:solidFill>
+                  </a:tcPr>
+                </a:tc>
+                <a:tc>
+                  <a:txBody>
+                    <a:bodyPr/>
+                    <a:lstStyle/>
+                    <a:p>
+                      <a:pPr indent="0" marL="0">
+                        <a:buNone/>
+                      </a:pPr>
+                      <a:r>
+                        <a:rPr lang="en-US" sz="1300" dirty="0">
+                          <a:solidFill>
+                            <a:srgbClr val="E6EDF3"/>
+                          </a:solidFill>
+                          <a:latin typeface="Calibri" pitchFamily="34" charset="0"/>
+                          <a:ea typeface="Calibri" pitchFamily="34" charset="-122"/>
+                          <a:cs typeface="Calibri" pitchFamily="34" charset="-120"/>
+                        </a:rPr>
+                        <a:t>50%</a:t>
+                      </a:r>
+                      <a:endParaRPr lang="en-US" sz="1300" dirty="0">
+                        <a:latin typeface="Calibri" charset="0"/>
+                        <a:ea typeface="Calibri" charset="0"/>
+                        <a:cs typeface="Calibri" charset="0"/>
+                      </a:endParaRPr>
+                    </a:p>
+                  </a:txBody>
+                  <a:tcPr marL="91440" marR="91440" marT="45720" marB="45720">
+                    <a:lnL w="12700" cap="flat" cmpd="sng" algn="ctr">
+                      <a:solidFill>
+                        <a:srgbClr val="2A3441"/>
+                      </a:solidFill>
+                      <a:prstDash val="solid"/>
+                      <a:round/>
+                      <a:headEnd type="none" w="med" len="med"/>
+                      <a:tailEnd type="none" w="med" len="med"/>
+                    </a:lnL>
+                    <a:lnR w="12700" cap="flat" cmpd="sng" algn="ctr">
+                      <a:solidFill>
+                        <a:srgbClr val="2A3441"/>
+                      </a:solidFill>
+                      <a:prstDash val="solid"/>
+                      <a:round/>
+                      <a:headEnd type="none" w="med" len="med"/>
+                      <a:tailEnd type="none" w="med" len="med"/>
+                    </a:lnR>
+                    <a:lnT w="12700" cap="flat" cmpd="sng" algn="ctr">
+                      <a:solidFill>
+                        <a:srgbClr val="2A3441"/>
+                      </a:solidFill>
+                      <a:prstDash val="solid"/>
+                      <a:round/>
+                      <a:headEnd type="none" w="med" len="med"/>
+                      <a:tailEnd type="none" w="med" len="med"/>
+                    </a:lnT>
+                    <a:lnB w="12700" cap="flat" cmpd="sng" algn="ctr">
+                      <a:solidFill>
+                        <a:srgbClr val="2A3441"/>
+                      </a:solidFill>
+                      <a:prstDash val="solid"/>
+                      <a:round/>
+                      <a:headEnd type="none" w="med" len="med"/>
+                      <a:tailEnd type="none" w="med" len="med"/>
+                    </a:lnB>
+                    <a:solidFill>
+                      <a:srgbClr val="141B24"/>
+                    </a:solidFill>
+                  </a:tcPr>
+                </a:tc>
+                <a:tc>
+                  <a:txBody>
+                    <a:bodyPr/>
+                    <a:lstStyle/>
+                    <a:p>
+                      <a:pPr indent="0" marL="0">
+                        <a:buNone/>
+                      </a:pPr>
+                      <a:r>
+                        <a:rPr lang="en-US" sz="1300" dirty="0">
+                          <a:solidFill>
+                            <a:srgbClr val="E6EDF3"/>
+                          </a:solidFill>
+                          <a:latin typeface="Calibri" pitchFamily="34" charset="0"/>
+                          <a:ea typeface="Calibri" pitchFamily="34" charset="-122"/>
+                          <a:cs typeface="Calibri" pitchFamily="34" charset="-120"/>
+                        </a:rPr>
+                        <a:t>50%</a:t>
+                      </a:r>
+                      <a:endParaRPr lang="en-US" sz="1300" dirty="0">
+                        <a:latin typeface="Calibri" charset="0"/>
+                        <a:ea typeface="Calibri" charset="0"/>
+                        <a:cs typeface="Calibri" charset="0"/>
+                      </a:endParaRPr>
+                    </a:p>
+                  </a:txBody>
+                  <a:tcPr marL="91440" marR="91440" marT="45720" marB="45720">
+                    <a:lnL w="12700" cap="flat" cmpd="sng" algn="ctr">
+                      <a:solidFill>
+                        <a:srgbClr val="2A3441"/>
+                      </a:solidFill>
+                      <a:prstDash val="solid"/>
+                      <a:round/>
+                      <a:headEnd type="none" w="med" len="med"/>
+                      <a:tailEnd type="none" w="med" len="med"/>
+                    </a:lnL>
+                    <a:lnR w="12700" cap="flat" cmpd="sng" algn="ctr">
+                      <a:solidFill>
+                        <a:srgbClr val="2A3441"/>
+                      </a:solidFill>
+                      <a:prstDash val="solid"/>
+                      <a:round/>
+                      <a:headEnd type="none" w="med" len="med"/>
+                      <a:tailEnd type="none" w="med" len="med"/>
+                    </a:lnR>
+                    <a:lnT w="12700" cap="flat" cmpd="sng" algn="ctr">
+                      <a:solidFill>
+                        <a:srgbClr val="2A3441"/>
+                      </a:solidFill>
+                      <a:prstDash val="solid"/>
+                      <a:round/>
+                      <a:headEnd type="none" w="med" len="med"/>
+                      <a:tailEnd type="none" w="med" len="med"/>
+                    </a:lnT>
+                    <a:lnB w="12700" cap="flat" cmpd="sng" algn="ctr">
+                      <a:solidFill>
+                        <a:srgbClr val="2A3441"/>
+                      </a:solidFill>
+                      <a:prstDash val="solid"/>
+                      <a:round/>
+                      <a:headEnd type="none" w="med" len="med"/>
+                      <a:tailEnd type="none" w="med" len="med"/>
+                    </a:lnB>
+                    <a:solidFill>
+                      <a:srgbClr val="141B24"/>
+                    </a:solidFill>
+                  </a:tcPr>
+                </a:tc>
+                <a:tc>
+                  <a:txBody>
+                    <a:bodyPr/>
+                    <a:lstStyle/>
+                    <a:p>
+                      <a:pPr indent="0" marL="0">
+                        <a:buNone/>
+                      </a:pPr>
+                      <a:r>
+                        <a:rPr lang="en-US" sz="1300" dirty="0">
+                          <a:solidFill>
+                            <a:srgbClr val="E6EDF3"/>
+                          </a:solidFill>
+                          <a:latin typeface="Calibri" pitchFamily="34" charset="0"/>
+                          <a:ea typeface="Calibri" pitchFamily="34" charset="-122"/>
+                          <a:cs typeface="Calibri" pitchFamily="34" charset="-120"/>
+                        </a:rPr>
+                        <a:t>0.97</a:t>
+                      </a:r>
+                      <a:endParaRPr lang="en-US" sz="1300" dirty="0">
+                        <a:latin typeface="Calibri" charset="0"/>
+                        <a:ea typeface="Calibri" charset="0"/>
+                        <a:cs typeface="Calibri" charset="0"/>
+                      </a:endParaRPr>
+                    </a:p>
+                  </a:txBody>
+                  <a:tcPr marL="91440" marR="91440" marT="45720" marB="45720">
+                    <a:lnL w="12700" cap="flat" cmpd="sng" algn="ctr">
+                      <a:solidFill>
+                        <a:srgbClr val="2A3441"/>
+                      </a:solidFill>
+                      <a:prstDash val="solid"/>
+                      <a:round/>
+                      <a:headEnd type="none" w="med" len="med"/>
+                      <a:tailEnd type="none" w="med" len="med"/>
+                    </a:lnL>
+                    <a:lnR w="12700" cap="flat" cmpd="sng" algn="ctr">
+                      <a:solidFill>
+                        <a:srgbClr val="2A3441"/>
+                      </a:solidFill>
+                      <a:prstDash val="solid"/>
+                      <a:round/>
+                      <a:headEnd type="none" w="med" len="med"/>
+                      <a:tailEnd type="none" w="med" len="med"/>
+                    </a:lnR>
+                    <a:lnT w="12700" cap="flat" cmpd="sng" algn="ctr">
+                      <a:solidFill>
+                        <a:srgbClr val="2A3441"/>
+                      </a:solidFill>
+                      <a:prstDash val="solid"/>
+                      <a:round/>
+                      <a:headEnd type="none" w="med" len="med"/>
+                      <a:tailEnd type="none" w="med" len="med"/>
+                    </a:lnT>
+                    <a:lnB w="12700" cap="flat" cmpd="sng" algn="ctr">
+                      <a:solidFill>
+                        <a:srgbClr val="2A3441"/>
+                      </a:solidFill>
+                      <a:prstDash val="solid"/>
+                      <a:round/>
+                      <a:headEnd type="none" w="med" len="med"/>
+                      <a:tailEnd type="none" w="med" len="med"/>
+                    </a:lnB>
+                    <a:solidFill>
+                      <a:srgbClr val="141B24"/>
+                    </a:solidFill>
+                  </a:tcPr>
+                </a:tc>
+              </a:tr>
+              <a:tr h="402336">
+                <a:tc>
+                  <a:txBody>
+                    <a:bodyPr/>
+                    <a:lstStyle/>
+                    <a:p>
+                      <a:pPr indent="0" marL="0">
+                        <a:buNone/>
+                      </a:pPr>
+                      <a:r>
+                        <a:rPr lang="en-US" sz="1300" dirty="0">
+                          <a:solidFill>
+                            <a:srgbClr val="E6EDF3"/>
+                          </a:solidFill>
+                          <a:latin typeface="Calibri" pitchFamily="34" charset="0"/>
+                          <a:ea typeface="Calibri" pitchFamily="34" charset="-122"/>
+                          <a:cs typeface="Calibri" pitchFamily="34" charset="-120"/>
+                        </a:rPr>
+                        <a:t>Neural vs AIMD tuned</a:t>
+                      </a:r>
+                      <a:endParaRPr lang="en-US" sz="1300" dirty="0">
+                        <a:latin typeface="Calibri" charset="0"/>
+                        <a:ea typeface="Calibri" charset="0"/>
+                        <a:cs typeface="Calibri" charset="0"/>
+                      </a:endParaRPr>
+                    </a:p>
+                  </a:txBody>
+                  <a:tcPr marL="91440" marR="91440" marT="45720" marB="45720">
+                    <a:lnL w="12700" cap="flat" cmpd="sng" algn="ctr">
+                      <a:solidFill>
+                        <a:srgbClr val="2A3441"/>
+                      </a:solidFill>
+                      <a:prstDash val="solid"/>
+                      <a:round/>
+                      <a:headEnd type="none" w="med" len="med"/>
+                      <a:tailEnd type="none" w="med" len="med"/>
+                    </a:lnL>
+                    <a:lnR w="12700" cap="flat" cmpd="sng" algn="ctr">
+                      <a:solidFill>
+                        <a:srgbClr val="2A3441"/>
+                      </a:solidFill>
+                      <a:prstDash val="solid"/>
+                      <a:round/>
+                      <a:headEnd type="none" w="med" len="med"/>
+                      <a:tailEnd type="none" w="med" len="med"/>
+                    </a:lnR>
+                    <a:lnT w="12700" cap="flat" cmpd="sng" algn="ctr">
+                      <a:solidFill>
+                        <a:srgbClr val="2A3441"/>
+                      </a:solidFill>
+                      <a:prstDash val="solid"/>
+                      <a:round/>
+                      <a:headEnd type="none" w="med" len="med"/>
+                      <a:tailEnd type="none" w="med" len="med"/>
+                    </a:lnT>
+                    <a:lnB w="12700" cap="flat" cmpd="sng" algn="ctr">
+                      <a:solidFill>
+                        <a:srgbClr val="2A3441"/>
+                      </a:solidFill>
+                      <a:prstDash val="solid"/>
+                      <a:round/>
+                      <a:headEnd type="none" w="med" len="med"/>
+                      <a:tailEnd type="none" w="med" len="med"/>
+                    </a:lnB>
+                    <a:solidFill>
+                      <a:srgbClr val="141B24"/>
+                    </a:solidFill>
+                  </a:tcPr>
+                </a:tc>
+                <a:tc>
+                  <a:txBody>
+                    <a:bodyPr/>
+                    <a:lstStyle/>
+                    <a:p>
+                      <a:pPr indent="0" marL="0">
+                        <a:buNone/>
+                      </a:pPr>
+                      <a:r>
+                        <a:rPr lang="en-US" sz="1300" dirty="0">
+                          <a:solidFill>
+                            <a:srgbClr val="E6EDF3"/>
+                          </a:solidFill>
+                          <a:latin typeface="Calibri" pitchFamily="34" charset="0"/>
+                          <a:ea typeface="Calibri" pitchFamily="34" charset="-122"/>
+                          <a:cs typeface="Calibri" pitchFamily="34" charset="-120"/>
+                        </a:rPr>
+                        <a:t>68%</a:t>
+                      </a:r>
+                      <a:endParaRPr lang="en-US" sz="1300" dirty="0">
+                        <a:latin typeface="Calibri" charset="0"/>
+                        <a:ea typeface="Calibri" charset="0"/>
+                        <a:cs typeface="Calibri" charset="0"/>
+                      </a:endParaRPr>
+                    </a:p>
+                  </a:txBody>
+                  <a:tcPr marL="91440" marR="91440" marT="45720" marB="45720">
+                    <a:lnL w="12700" cap="flat" cmpd="sng" algn="ctr">
+                      <a:solidFill>
+                        <a:srgbClr val="2A3441"/>
+                      </a:solidFill>
+                      <a:prstDash val="solid"/>
+                      <a:round/>
+                      <a:headEnd type="none" w="med" len="med"/>
+                      <a:tailEnd type="none" w="med" len="med"/>
+                    </a:lnL>
+                    <a:lnR w="12700" cap="flat" cmpd="sng" algn="ctr">
+                      <a:solidFill>
+                        <a:srgbClr val="2A3441"/>
+                      </a:solidFill>
+                      <a:prstDash val="solid"/>
+                      <a:round/>
+                      <a:headEnd type="none" w="med" len="med"/>
+                      <a:tailEnd type="none" w="med" len="med"/>
+                    </a:lnR>
+                    <a:lnT w="12700" cap="flat" cmpd="sng" algn="ctr">
+                      <a:solidFill>
+                        <a:srgbClr val="2A3441"/>
+                      </a:solidFill>
+                      <a:prstDash val="solid"/>
+                      <a:round/>
+                      <a:headEnd type="none" w="med" len="med"/>
+                      <a:tailEnd type="none" w="med" len="med"/>
+                    </a:lnT>
+                    <a:lnB w="12700" cap="flat" cmpd="sng" algn="ctr">
+                      <a:solidFill>
+                        <a:srgbClr val="2A3441"/>
+                      </a:solidFill>
+                      <a:prstDash val="solid"/>
+                      <a:round/>
+                      <a:headEnd type="none" w="med" len="med"/>
+                      <a:tailEnd type="none" w="med" len="med"/>
+                    </a:lnB>
+                    <a:solidFill>
+                      <a:srgbClr val="141B24"/>
+                    </a:solidFill>
+                  </a:tcPr>
+                </a:tc>
+                <a:tc>
+                  <a:txBody>
+                    <a:bodyPr/>
+                    <a:lstStyle/>
+                    <a:p>
+                      <a:pPr indent="0" marL="0">
+                        <a:buNone/>
+                      </a:pPr>
+                      <a:r>
+                        <a:rPr lang="en-US" sz="1300" dirty="0">
+                          <a:solidFill>
+                            <a:srgbClr val="E6EDF3"/>
+                          </a:solidFill>
+                          <a:latin typeface="Calibri" pitchFamily="34" charset="0"/>
+                          <a:ea typeface="Calibri" pitchFamily="34" charset="-122"/>
+                          <a:cs typeface="Calibri" pitchFamily="34" charset="-120"/>
+                        </a:rPr>
+                        <a:t>32%</a:t>
+                      </a:r>
+                      <a:endParaRPr lang="en-US" sz="1300" dirty="0">
+                        <a:latin typeface="Calibri" charset="0"/>
+                        <a:ea typeface="Calibri" charset="0"/>
+                        <a:cs typeface="Calibri" charset="0"/>
+                      </a:endParaRPr>
+                    </a:p>
+                  </a:txBody>
+                  <a:tcPr marL="91440" marR="91440" marT="45720" marB="45720">
+                    <a:lnL w="12700" cap="flat" cmpd="sng" algn="ctr">
+                      <a:solidFill>
+                        <a:srgbClr val="2A3441"/>
+                      </a:solidFill>
+                      <a:prstDash val="solid"/>
+                      <a:round/>
+                      <a:headEnd type="none" w="med" len="med"/>
+                      <a:tailEnd type="none" w="med" len="med"/>
+                    </a:lnL>
+                    <a:lnR w="12700" cap="flat" cmpd="sng" algn="ctr">
+                      <a:solidFill>
+                        <a:srgbClr val="2A3441"/>
+                      </a:solidFill>
+                      <a:prstDash val="solid"/>
+                      <a:round/>
+                      <a:headEnd type="none" w="med" len="med"/>
+                      <a:tailEnd type="none" w="med" len="med"/>
+                    </a:lnR>
+                    <a:lnT w="12700" cap="flat" cmpd="sng" algn="ctr">
+                      <a:solidFill>
+                        <a:srgbClr val="2A3441"/>
+                      </a:solidFill>
+                      <a:prstDash val="solid"/>
+                      <a:round/>
+                      <a:headEnd type="none" w="med" len="med"/>
+                      <a:tailEnd type="none" w="med" len="med"/>
+                    </a:lnT>
+                    <a:lnB w="12700" cap="flat" cmpd="sng" algn="ctr">
+                      <a:solidFill>
+                        <a:srgbClr val="2A3441"/>
+                      </a:solidFill>
+                      <a:prstDash val="solid"/>
+                      <a:round/>
+                      <a:headEnd type="none" w="med" len="med"/>
+                      <a:tailEnd type="none" w="med" len="med"/>
+                    </a:lnB>
+                    <a:solidFill>
+                      <a:srgbClr val="141B24"/>
+                    </a:solidFill>
+                  </a:tcPr>
+                </a:tc>
+                <a:tc>
+                  <a:txBody>
+                    <a:bodyPr/>
+                    <a:lstStyle/>
+                    <a:p>
+                      <a:pPr indent="0" marL="0">
+                        <a:buNone/>
+                      </a:pPr>
+                      <a:r>
+                        <a:rPr lang="en-US" sz="1300" dirty="0">
+                          <a:solidFill>
+                            <a:srgbClr val="E6EDF3"/>
+                          </a:solidFill>
+                          <a:latin typeface="Calibri" pitchFamily="34" charset="0"/>
+                          <a:ea typeface="Calibri" pitchFamily="34" charset="-122"/>
+                          <a:cs typeface="Calibri" pitchFamily="34" charset="-120"/>
+                        </a:rPr>
+                        <a:t>0.88</a:t>
+                      </a:r>
+                      <a:endParaRPr lang="en-US" sz="1300" dirty="0">
+                        <a:latin typeface="Calibri" charset="0"/>
+                        <a:ea typeface="Calibri" charset="0"/>
+                        <a:cs typeface="Calibri" charset="0"/>
+                      </a:endParaRPr>
+                    </a:p>
+                  </a:txBody>
+                  <a:tcPr marL="91440" marR="91440" marT="45720" marB="45720">
+                    <a:lnL w="12700" cap="flat" cmpd="sng" algn="ctr">
+                      <a:solidFill>
+                        <a:srgbClr val="2A3441"/>
+                      </a:solidFill>
+                      <a:prstDash val="solid"/>
+                      <a:round/>
+                      <a:headEnd type="none" w="med" len="med"/>
+                      <a:tailEnd type="none" w="med" len="med"/>
+                    </a:lnL>
+                    <a:lnR w="12700" cap="flat" cmpd="sng" algn="ctr">
+                      <a:solidFill>
+                        <a:srgbClr val="2A3441"/>
+                      </a:solidFill>
+                      <a:prstDash val="solid"/>
+                      <a:round/>
+                      <a:headEnd type="none" w="med" len="med"/>
+                      <a:tailEnd type="none" w="med" len="med"/>
+                    </a:lnR>
+                    <a:lnT w="12700" cap="flat" cmpd="sng" algn="ctr">
+                      <a:solidFill>
+                        <a:srgbClr val="2A3441"/>
+                      </a:solidFill>
+                      <a:prstDash val="solid"/>
+                      <a:round/>
+                      <a:headEnd type="none" w="med" len="med"/>
+                      <a:tailEnd type="none" w="med" len="med"/>
+                    </a:lnT>
+                    <a:lnB w="12700" cap="flat" cmpd="sng" algn="ctr">
+                      <a:solidFill>
+                        <a:srgbClr val="2A3441"/>
+                      </a:solidFill>
+                      <a:prstDash val="solid"/>
+                      <a:round/>
+                      <a:headEnd type="none" w="med" len="med"/>
+                      <a:tailEnd type="none" w="med" len="med"/>
+                    </a:lnB>
+                    <a:solidFill>
+                      <a:srgbClr val="141B24"/>
+                    </a:solidFill>
+                  </a:tcPr>
+                </a:tc>
+              </a:tr>
+              <a:tr h="402336">
+                <a:tc>
+                  <a:txBody>
+                    <a:bodyPr/>
+                    <a:lstStyle/>
+                    <a:p>
+                      <a:pPr indent="0" marL="0">
+                        <a:buNone/>
+                      </a:pPr>
+                      <a:r>
+                        <a:rPr lang="en-US" sz="1300" dirty="0">
+                          <a:solidFill>
+                            <a:srgbClr val="E6EDF3"/>
+                          </a:solidFill>
+                          <a:latin typeface="Calibri" pitchFamily="34" charset="0"/>
+                          <a:ea typeface="Calibri" pitchFamily="34" charset="-122"/>
+                          <a:cs typeface="Calibri" pitchFamily="34" charset="-120"/>
+                        </a:rPr>
+                        <a:t>Neural vs AIMD cap 32</a:t>
+                      </a:r>
+                      <a:endParaRPr lang="en-US" sz="1300" dirty="0">
+                        <a:latin typeface="Calibri" charset="0"/>
+                        <a:ea typeface="Calibri" charset="0"/>
+                        <a:cs typeface="Calibri" charset="0"/>
+                      </a:endParaRPr>
+                    </a:p>
+                  </a:txBody>
+                  <a:tcPr marL="91440" marR="91440" marT="45720" marB="45720">
+                    <a:lnL w="12700" cap="flat" cmpd="sng" algn="ctr">
+                      <a:solidFill>
+                        <a:srgbClr val="2A3441"/>
+                      </a:solidFill>
+                      <a:prstDash val="solid"/>
+                      <a:round/>
+                      <a:headEnd type="none" w="med" len="med"/>
+                      <a:tailEnd type="none" w="med" len="med"/>
+                    </a:lnL>
+                    <a:lnR w="12700" cap="flat" cmpd="sng" algn="ctr">
+                      <a:solidFill>
+                        <a:srgbClr val="2A3441"/>
+                      </a:solidFill>
+                      <a:prstDash val="solid"/>
+                      <a:round/>
+                      <a:headEnd type="none" w="med" len="med"/>
+                      <a:tailEnd type="none" w="med" len="med"/>
+                    </a:lnR>
+                    <a:lnT w="12700" cap="flat" cmpd="sng" algn="ctr">
+                      <a:solidFill>
+                        <a:srgbClr val="2A3441"/>
+                      </a:solidFill>
+                      <a:prstDash val="solid"/>
+                      <a:round/>
+                      <a:headEnd type="none" w="med" len="med"/>
+                      <a:tailEnd type="none" w="med" len="med"/>
+                    </a:lnT>
+                    <a:lnB w="12700" cap="flat" cmpd="sng" algn="ctr">
+                      <a:solidFill>
+                        <a:srgbClr val="2A3441"/>
+                      </a:solidFill>
+                      <a:prstDash val="solid"/>
+                      <a:round/>
+                      <a:headEnd type="none" w="med" len="med"/>
+                      <a:tailEnd type="none" w="med" len="med"/>
+                    </a:lnB>
+                    <a:solidFill>
+                      <a:srgbClr val="141B24"/>
+                    </a:solidFill>
+                  </a:tcPr>
+                </a:tc>
+                <a:tc>
+                  <a:txBody>
+                    <a:bodyPr/>
+                    <a:lstStyle/>
+                    <a:p>
+                      <a:pPr indent="0" marL="0">
+                        <a:buNone/>
+                      </a:pPr>
+                      <a:r>
+                        <a:rPr lang="en-US" sz="1300" dirty="0">
+                          <a:solidFill>
+                            <a:srgbClr val="E6EDF3"/>
+                          </a:solidFill>
+                          <a:latin typeface="Calibri" pitchFamily="34" charset="0"/>
+                          <a:ea typeface="Calibri" pitchFamily="34" charset="-122"/>
+                          <a:cs typeface="Calibri" pitchFamily="34" charset="-120"/>
+                        </a:rPr>
+                        <a:t>76%</a:t>
+                      </a:r>
+                      <a:endParaRPr lang="en-US" sz="1300" dirty="0">
+                        <a:latin typeface="Calibri" charset="0"/>
+                        <a:ea typeface="Calibri" charset="0"/>
+                        <a:cs typeface="Calibri" charset="0"/>
+                      </a:endParaRPr>
+                    </a:p>
+                  </a:txBody>
+                  <a:tcPr marL="91440" marR="91440" marT="45720" marB="45720">
+                    <a:lnL w="12700" cap="flat" cmpd="sng" algn="ctr">
+                      <a:solidFill>
+                        <a:srgbClr val="2A3441"/>
+                      </a:solidFill>
+                      <a:prstDash val="solid"/>
+                      <a:round/>
+                      <a:headEnd type="none" w="med" len="med"/>
+                      <a:tailEnd type="none" w="med" len="med"/>
+                    </a:lnL>
+                    <a:lnR w="12700" cap="flat" cmpd="sng" algn="ctr">
+                      <a:solidFill>
+                        <a:srgbClr val="2A3441"/>
+                      </a:solidFill>
+                      <a:prstDash val="solid"/>
+                      <a:round/>
+                      <a:headEnd type="none" w="med" len="med"/>
+                      <a:tailEnd type="none" w="med" len="med"/>
+                    </a:lnR>
+                    <a:lnT w="12700" cap="flat" cmpd="sng" algn="ctr">
+                      <a:solidFill>
+                        <a:srgbClr val="2A3441"/>
+                      </a:solidFill>
+                      <a:prstDash val="solid"/>
+                      <a:round/>
+                      <a:headEnd type="none" w="med" len="med"/>
+                      <a:tailEnd type="none" w="med" len="med"/>
+                    </a:lnT>
+                    <a:lnB w="12700" cap="flat" cmpd="sng" algn="ctr">
+                      <a:solidFill>
+                        <a:srgbClr val="2A3441"/>
+                      </a:solidFill>
+                      <a:prstDash val="solid"/>
+                      <a:round/>
+                      <a:headEnd type="none" w="med" len="med"/>
+                      <a:tailEnd type="none" w="med" len="med"/>
+                    </a:lnB>
+                    <a:solidFill>
+                      <a:srgbClr val="141B24"/>
+                    </a:solidFill>
+                  </a:tcPr>
+                </a:tc>
+                <a:tc>
+                  <a:txBody>
+                    <a:bodyPr/>
+                    <a:lstStyle/>
+                    <a:p>
+                      <a:pPr indent="0" marL="0">
+                        <a:buNone/>
+                      </a:pPr>
+                      <a:r>
+                        <a:rPr lang="en-US" sz="1300" dirty="0">
+                          <a:solidFill>
+                            <a:srgbClr val="E6EDF3"/>
+                          </a:solidFill>
+                          <a:latin typeface="Calibri" pitchFamily="34" charset="0"/>
+                          <a:ea typeface="Calibri" pitchFamily="34" charset="-122"/>
+                          <a:cs typeface="Calibri" pitchFamily="34" charset="-120"/>
+                        </a:rPr>
+                        <a:t>24%</a:t>
+                      </a:r>
+                      <a:endParaRPr lang="en-US" sz="1300" dirty="0">
+                        <a:latin typeface="Calibri" charset="0"/>
+                        <a:ea typeface="Calibri" charset="0"/>
+                        <a:cs typeface="Calibri" charset="0"/>
+                      </a:endParaRPr>
+                    </a:p>
+                  </a:txBody>
+                  <a:tcPr marL="91440" marR="91440" marT="45720" marB="45720">
+                    <a:lnL w="12700" cap="flat" cmpd="sng" algn="ctr">
+                      <a:solidFill>
+                        <a:srgbClr val="2A3441"/>
+                      </a:solidFill>
+                      <a:prstDash val="solid"/>
+                      <a:round/>
+                      <a:headEnd type="none" w="med" len="med"/>
+                      <a:tailEnd type="none" w="med" len="med"/>
+                    </a:lnL>
+                    <a:lnR w="12700" cap="flat" cmpd="sng" algn="ctr">
+                      <a:solidFill>
+                        <a:srgbClr val="2A3441"/>
+                      </a:solidFill>
+                      <a:prstDash val="solid"/>
+                      <a:round/>
+                      <a:headEnd type="none" w="med" len="med"/>
+                      <a:tailEnd type="none" w="med" len="med"/>
+                    </a:lnR>
+                    <a:lnT w="12700" cap="flat" cmpd="sng" algn="ctr">
+                      <a:solidFill>
+                        <a:srgbClr val="2A3441"/>
+                      </a:solidFill>
+                      <a:prstDash val="solid"/>
+                      <a:round/>
+                      <a:headEnd type="none" w="med" len="med"/>
+                      <a:tailEnd type="none" w="med" len="med"/>
+                    </a:lnT>
+                    <a:lnB w="12700" cap="flat" cmpd="sng" algn="ctr">
+                      <a:solidFill>
+                        <a:srgbClr val="2A3441"/>
+                      </a:solidFill>
+                      <a:prstDash val="solid"/>
+                      <a:round/>
+                      <a:headEnd type="none" w="med" len="med"/>
+                      <a:tailEnd type="none" w="med" len="med"/>
+                    </a:lnB>
+                    <a:solidFill>
+                      <a:srgbClr val="141B24"/>
+                    </a:solidFill>
+                  </a:tcPr>
+                </a:tc>
+                <a:tc>
+                  <a:txBody>
+                    <a:bodyPr/>
+                    <a:lstStyle/>
+                    <a:p>
+                      <a:pPr indent="0" marL="0">
+                        <a:buNone/>
+                      </a:pPr>
+                      <a:r>
+                        <a:rPr lang="en-US" sz="1300" dirty="0">
+                          <a:solidFill>
+                            <a:srgbClr val="E6EDF3"/>
+                          </a:solidFill>
+                          <a:latin typeface="Calibri" pitchFamily="34" charset="0"/>
+                          <a:ea typeface="Calibri" pitchFamily="34" charset="-122"/>
+                          <a:cs typeface="Calibri" pitchFamily="34" charset="-120"/>
+                        </a:rPr>
+                        <a:t>0.78</a:t>
+                      </a:r>
+                      <a:endParaRPr lang="en-US" sz="1300" dirty="0">
+                        <a:latin typeface="Calibri" charset="0"/>
+                        <a:ea typeface="Calibri" charset="0"/>
+                        <a:cs typeface="Calibri" charset="0"/>
+                      </a:endParaRPr>
+                    </a:p>
+                  </a:txBody>
+                  <a:tcPr marL="91440" marR="91440" marT="45720" marB="45720">
+                    <a:lnL w="12700" cap="flat" cmpd="sng" algn="ctr">
+                      <a:solidFill>
+                        <a:srgbClr val="2A3441"/>
+                      </a:solidFill>
+                      <a:prstDash val="solid"/>
+                      <a:round/>
+                      <a:headEnd type="none" w="med" len="med"/>
+                      <a:tailEnd type="none" w="med" len="med"/>
+                    </a:lnL>
+                    <a:lnR w="12700" cap="flat" cmpd="sng" algn="ctr">
+                      <a:solidFill>
+                        <a:srgbClr val="2A3441"/>
+                      </a:solidFill>
+                      <a:prstDash val="solid"/>
+                      <a:round/>
+                      <a:headEnd type="none" w="med" len="med"/>
+                      <a:tailEnd type="none" w="med" len="med"/>
+                    </a:lnR>
+                    <a:lnT w="12700" cap="flat" cmpd="sng" algn="ctr">
+                      <a:solidFill>
+                        <a:srgbClr val="2A3441"/>
+                      </a:solidFill>
+                      <a:prstDash val="solid"/>
+                      <a:round/>
+                      <a:headEnd type="none" w="med" len="med"/>
+                      <a:tailEnd type="none" w="med" len="med"/>
+                    </a:lnT>
+                    <a:lnB w="12700" cap="flat" cmpd="sng" algn="ctr">
+                      <a:solidFill>
+                        <a:srgbClr val="2A3441"/>
+                      </a:solidFill>
+                      <a:prstDash val="solid"/>
+                      <a:round/>
+                      <a:headEnd type="none" w="med" len="med"/>
+                      <a:tailEnd type="none" w="med" len="med"/>
+                    </a:lnB>
+                    <a:solidFill>
+                      <a:srgbClr val="141B24"/>
+                    </a:solidFill>
+                  </a:tcPr>
+                </a:tc>
+              </a:tr>
+              <a:tr h="402336">
+                <a:tc>
+                  <a:txBody>
+                    <a:bodyPr/>
+                    <a:lstStyle/>
+                    <a:p>
+                      <a:pPr indent="0" marL="0">
+                        <a:buNone/>
+                      </a:pPr>
+                      <a:r>
+                        <a:rPr lang="en-US" sz="1300" dirty="0">
+                          <a:solidFill>
+                            <a:srgbClr val="E6EDF3"/>
+                          </a:solidFill>
+                          <a:latin typeface="Calibri" pitchFamily="34" charset="0"/>
+                          <a:ea typeface="Calibri" pitchFamily="34" charset="-122"/>
+                          <a:cs typeface="Calibri" pitchFamily="34" charset="-120"/>
+                        </a:rPr>
+                        <a:t>CUBIC vs AIMD tuned</a:t>
+                      </a:r>
+                      <a:endParaRPr lang="en-US" sz="1300" dirty="0">
+                        <a:latin typeface="Calibri" charset="0"/>
+                        <a:ea typeface="Calibri" charset="0"/>
+                        <a:cs typeface="Calibri" charset="0"/>
+                      </a:endParaRPr>
+                    </a:p>
+                  </a:txBody>
+                  <a:tcPr marL="91440" marR="91440" marT="45720" marB="45720">
+                    <a:lnL w="12700" cap="flat" cmpd="sng" algn="ctr">
+                      <a:solidFill>
+                        <a:srgbClr val="2A3441"/>
+                      </a:solidFill>
+                      <a:prstDash val="solid"/>
+                      <a:round/>
+                      <a:headEnd type="none" w="med" len="med"/>
+                      <a:tailEnd type="none" w="med" len="med"/>
+                    </a:lnL>
+                    <a:lnR w="12700" cap="flat" cmpd="sng" algn="ctr">
+                      <a:solidFill>
+                        <a:srgbClr val="2A3441"/>
+                      </a:solidFill>
+                      <a:prstDash val="solid"/>
+                      <a:round/>
+                      <a:headEnd type="none" w="med" len="med"/>
+                      <a:tailEnd type="none" w="med" len="med"/>
+                    </a:lnR>
+                    <a:lnT w="12700" cap="flat" cmpd="sng" algn="ctr">
+                      <a:solidFill>
+                        <a:srgbClr val="2A3441"/>
+                      </a:solidFill>
+                      <a:prstDash val="solid"/>
+                      <a:round/>
+                      <a:headEnd type="none" w="med" len="med"/>
+                      <a:tailEnd type="none" w="med" len="med"/>
+                    </a:lnT>
+                    <a:lnB w="12700" cap="flat" cmpd="sng" algn="ctr">
+                      <a:solidFill>
+                        <a:srgbClr val="2A3441"/>
+                      </a:solidFill>
+                      <a:prstDash val="solid"/>
+                      <a:round/>
+                      <a:headEnd type="none" w="med" len="med"/>
+                      <a:tailEnd type="none" w="med" len="med"/>
+                    </a:lnB>
+                    <a:solidFill>
+                      <a:srgbClr val="141B24"/>
+                    </a:solidFill>
+                  </a:tcPr>
+                </a:tc>
+                <a:tc>
+                  <a:txBody>
+                    <a:bodyPr/>
+                    <a:lstStyle/>
+                    <a:p>
+                      <a:pPr indent="0" marL="0">
+                        <a:buNone/>
+                      </a:pPr>
+                      <a:r>
+                        <a:rPr lang="en-US" sz="1300" dirty="0">
+                          <a:solidFill>
+                            <a:srgbClr val="E6EDF3"/>
+                          </a:solidFill>
+                          <a:latin typeface="Calibri" pitchFamily="34" charset="0"/>
+                          <a:ea typeface="Calibri" pitchFamily="34" charset="-122"/>
+                          <a:cs typeface="Calibri" pitchFamily="34" charset="-120"/>
+                        </a:rPr>
+                        <a:t>61%</a:t>
+                      </a:r>
+                      <a:endParaRPr lang="en-US" sz="1300" dirty="0">
+                        <a:latin typeface="Calibri" charset="0"/>
+                        <a:ea typeface="Calibri" charset="0"/>
+                        <a:cs typeface="Calibri" charset="0"/>
+                      </a:endParaRPr>
+                    </a:p>
+                  </a:txBody>
+                  <a:tcPr marL="91440" marR="91440" marT="45720" marB="45720">
+                    <a:lnL w="12700" cap="flat" cmpd="sng" algn="ctr">
+                      <a:solidFill>
+                        <a:srgbClr val="2A3441"/>
+                      </a:solidFill>
+                      <a:prstDash val="solid"/>
+                      <a:round/>
+                      <a:headEnd type="none" w="med" len="med"/>
+                      <a:tailEnd type="none" w="med" len="med"/>
+                    </a:lnL>
+                    <a:lnR w="12700" cap="flat" cmpd="sng" algn="ctr">
+                      <a:solidFill>
+                        <a:srgbClr val="2A3441"/>
+                      </a:solidFill>
+                      <a:prstDash val="solid"/>
+                      <a:round/>
+                      <a:headEnd type="none" w="med" len="med"/>
+                      <a:tailEnd type="none" w="med" len="med"/>
+                    </a:lnR>
+                    <a:lnT w="12700" cap="flat" cmpd="sng" algn="ctr">
+                      <a:solidFill>
+                        <a:srgbClr val="2A3441"/>
+                      </a:solidFill>
+                      <a:prstDash val="solid"/>
+                      <a:round/>
+                      <a:headEnd type="none" w="med" len="med"/>
+                      <a:tailEnd type="none" w="med" len="med"/>
+                    </a:lnT>
+                    <a:lnB w="12700" cap="flat" cmpd="sng" algn="ctr">
+                      <a:solidFill>
+                        <a:srgbClr val="2A3441"/>
+                      </a:solidFill>
+                      <a:prstDash val="solid"/>
+                      <a:round/>
+                      <a:headEnd type="none" w="med" len="med"/>
+                      <a:tailEnd type="none" w="med" len="med"/>
+                    </a:lnB>
+                    <a:solidFill>
+                      <a:srgbClr val="141B24"/>
+                    </a:solidFill>
+                  </a:tcPr>
+                </a:tc>
+                <a:tc>
+                  <a:txBody>
+                    <a:bodyPr/>
+                    <a:lstStyle/>
+                    <a:p>
+                      <a:pPr indent="0" marL="0">
+                        <a:buNone/>
+                      </a:pPr>
+                      <a:r>
+                        <a:rPr lang="en-US" sz="1300" dirty="0">
+                          <a:solidFill>
+                            <a:srgbClr val="E6EDF3"/>
+                          </a:solidFill>
+                          <a:latin typeface="Calibri" pitchFamily="34" charset="0"/>
+                          <a:ea typeface="Calibri" pitchFamily="34" charset="-122"/>
+                          <a:cs typeface="Calibri" pitchFamily="34" charset="-120"/>
+                        </a:rPr>
+                        <a:t>39%</a:t>
+                      </a:r>
+                      <a:endParaRPr lang="en-US" sz="1300" dirty="0">
+                        <a:latin typeface="Calibri" charset="0"/>
+                        <a:ea typeface="Calibri" charset="0"/>
+                        <a:cs typeface="Calibri" charset="0"/>
+                      </a:endParaRPr>
+                    </a:p>
+                  </a:txBody>
+                  <a:tcPr marL="91440" marR="91440" marT="45720" marB="45720">
+                    <a:lnL w="12700" cap="flat" cmpd="sng" algn="ctr">
+                      <a:solidFill>
+                        <a:srgbClr val="2A3441"/>
+                      </a:solidFill>
+                      <a:prstDash val="solid"/>
+                      <a:round/>
+                      <a:headEnd type="none" w="med" len="med"/>
+                      <a:tailEnd type="none" w="med" len="med"/>
+                    </a:lnL>
+                    <a:lnR w="12700" cap="flat" cmpd="sng" algn="ctr">
+                      <a:solidFill>
+                        <a:srgbClr val="2A3441"/>
+                      </a:solidFill>
+                      <a:prstDash val="solid"/>
+                      <a:round/>
+                      <a:headEnd type="none" w="med" len="med"/>
+                      <a:tailEnd type="none" w="med" len="med"/>
+                    </a:lnR>
+                    <a:lnT w="12700" cap="flat" cmpd="sng" algn="ctr">
+                      <a:solidFill>
+                        <a:srgbClr val="2A3441"/>
+                      </a:solidFill>
+                      <a:prstDash val="solid"/>
+                      <a:round/>
+                      <a:headEnd type="none" w="med" len="med"/>
+                      <a:tailEnd type="none" w="med" len="med"/>
+                    </a:lnT>
+                    <a:lnB w="12700" cap="flat" cmpd="sng" algn="ctr">
+                      <a:solidFill>
+                        <a:srgbClr val="2A3441"/>
+                      </a:solidFill>
+                      <a:prstDash val="solid"/>
+                      <a:round/>
+                      <a:headEnd type="none" w="med" len="med"/>
+                      <a:tailEnd type="none" w="med" len="med"/>
+                    </a:lnB>
+                    <a:solidFill>
+                      <a:srgbClr val="141B24"/>
+                    </a:solidFill>
+                  </a:tcPr>
+                </a:tc>
+                <a:tc>
+                  <a:txBody>
+                    <a:bodyPr/>
+                    <a:lstStyle/>
+                    <a:p>
+                      <a:pPr indent="0" marL="0">
+                        <a:buNone/>
+                      </a:pPr>
+                      <a:r>
+                        <a:rPr lang="en-US" sz="1300" dirty="0">
+                          <a:solidFill>
+                            <a:srgbClr val="E6EDF3"/>
+                          </a:solidFill>
+                          <a:latin typeface="Calibri" pitchFamily="34" charset="0"/>
+                          <a:ea typeface="Calibri" pitchFamily="34" charset="-122"/>
+                          <a:cs typeface="Calibri" pitchFamily="34" charset="-120"/>
+                        </a:rPr>
+                        <a:t>0.93</a:t>
+                      </a:r>
+                      <a:endParaRPr lang="en-US" sz="1300" dirty="0">
+                        <a:latin typeface="Calibri" charset="0"/>
+                        <a:ea typeface="Calibri" charset="0"/>
+                        <a:cs typeface="Calibri" charset="0"/>
+                      </a:endParaRPr>
+                    </a:p>
+                  </a:txBody>
+                  <a:tcPr marL="91440" marR="91440" marT="45720" marB="45720">
+                    <a:lnL w="12700" cap="flat" cmpd="sng" algn="ctr">
+                      <a:solidFill>
+                        <a:srgbClr val="2A3441"/>
+                      </a:solidFill>
+                      <a:prstDash val="solid"/>
+                      <a:round/>
+                      <a:headEnd type="none" w="med" len="med"/>
+                      <a:tailEnd type="none" w="med" len="med"/>
+                    </a:lnL>
+                    <a:lnR w="12700" cap="flat" cmpd="sng" algn="ctr">
+                      <a:solidFill>
+                        <a:srgbClr val="2A3441"/>
+                      </a:solidFill>
+                      <a:prstDash val="solid"/>
+                      <a:round/>
+                      <a:headEnd type="none" w="med" len="med"/>
+                      <a:tailEnd type="none" w="med" len="med"/>
+                    </a:lnR>
+                    <a:lnT w="12700" cap="flat" cmpd="sng" algn="ctr">
+                      <a:solidFill>
+                        <a:srgbClr val="2A3441"/>
+                      </a:solidFill>
+                      <a:prstDash val="solid"/>
+                      <a:round/>
+                      <a:headEnd type="none" w="med" len="med"/>
+                      <a:tailEnd type="none" w="med" len="med"/>
+                    </a:lnT>
+                    <a:lnB w="12700" cap="flat" cmpd="sng" algn="ctr">
+                      <a:solidFill>
+                        <a:srgbClr val="2A3441"/>
+                      </a:solidFill>
+                      <a:prstDash val="solid"/>
+                      <a:round/>
+                      <a:headEnd type="none" w="med" len="med"/>
+                      <a:tailEnd type="none" w="med" len="med"/>
+                    </a:lnB>
+                    <a:solidFill>
+                      <a:srgbClr val="141B24"/>
+                    </a:solidFill>
+                  </a:tcPr>
+                </a:tc>
+              </a:tr>
+            </a:tbl>
+          </a:graphicData>
+        </a:graphic>
+      </p:graphicFrame>
+      <p:graphicFrame>
+        <p:nvGraphicFramePr>
+          <p:cNvPr id="59" name="Table 1"/>
+          <p:cNvGraphicFramePr>
+            <a:graphicFrameLocks noGrp="1"/>
+          </p:cNvGraphicFramePr>
+          <p:nvPr>
+            <p:extLst>
+              <p:ext uri="{D42A27DB-BD31-4B8C-83A1-F6EECF244321}">
+                <p14:modId xmlns:p14="http://schemas.microsoft.com/office/powerpoint/2010/main" val="1579011935"/>
+              </p:ext>
+            </p:extLst>
+          </p:nvPr>
+        </p:nvGraphicFramePr>
+        <p:xfrm>
+          <a:off x="548640" y="3931920"/>
+          <a:ext cx="5486400" cy="914400"/>
+        </p:xfrm>
+        <a:graphic>
+          <a:graphicData uri="http://schemas.openxmlformats.org/drawingml/2006/table">
+            <a:tbl>
+              <a:tblPr/>
+              <a:tblGrid>
+                <a:gridCol w="2011680"/>
+                <a:gridCol w="1188720"/>
+                <a:gridCol w="1188720"/>
+                <a:gridCol w="1097280"/>
+              </a:tblGrid>
+              <a:tr h="402336">
+                <a:tc>
+                  <a:txBody>
+                    <a:bodyPr/>
+                    <a:lstStyle/>
+                    <a:p>
+                      <a:pPr indent="0" marL="0">
+                        <a:buNone/>
+                      </a:pPr>
+                      <a:r>
+                        <a:rPr lang="en-US" sz="1300" b="1" dirty="0">
+                          <a:solidFill>
+                            <a:srgbClr val="0B0F14"/>
+                          </a:solidFill>
+                          <a:latin typeface="Courier New" pitchFamily="34" charset="0"/>
+                          <a:ea typeface="Courier New" pitchFamily="34" charset="-122"/>
+                          <a:cs typeface="Courier New" pitchFamily="34" charset="-120"/>
+                        </a:rPr>
+                        <a:t>File transfer</a:t>
+                      </a:r>
+                      <a:endParaRPr lang="en-US" sz="1300" dirty="0">
+                        <a:latin typeface="Courier New" charset="0"/>
+                        <a:ea typeface="Courier New" charset="0"/>
+                        <a:cs typeface="Courier New" charset="0"/>
+                      </a:endParaRPr>
+                    </a:p>
+                  </a:txBody>
+                  <a:tcPr marL="91440" marR="91440" marT="45720" marB="45720">
+                    <a:lnL w="12700" cap="flat" cmpd="sng" algn="ctr">
+                      <a:solidFill>
+                        <a:srgbClr val="2A3441"/>
+                      </a:solidFill>
+                      <a:prstDash val="solid"/>
+                      <a:round/>
+                      <a:headEnd type="none" w="med" len="med"/>
+                      <a:tailEnd type="none" w="med" len="med"/>
+                    </a:lnL>
+                    <a:lnR w="12700" cap="flat" cmpd="sng" algn="ctr">
+                      <a:solidFill>
+                        <a:srgbClr val="2A3441"/>
+                      </a:solidFill>
+                      <a:prstDash val="solid"/>
+                      <a:round/>
+                      <a:headEnd type="none" w="med" len="med"/>
+                      <a:tailEnd type="none" w="med" len="med"/>
+                    </a:lnR>
+                    <a:lnT w="12700" cap="flat" cmpd="sng" algn="ctr">
+                      <a:solidFill>
+                        <a:srgbClr val="2A3441"/>
+                      </a:solidFill>
+                      <a:prstDash val="solid"/>
+                      <a:round/>
+                      <a:headEnd type="none" w="med" len="med"/>
+                      <a:tailEnd type="none" w="med" len="med"/>
+                    </a:lnT>
+                    <a:lnB w="12700" cap="flat" cmpd="sng" algn="ctr">
+                      <a:solidFill>
+                        <a:srgbClr val="2A3441"/>
+                      </a:solidFill>
+                      <a:prstDash val="solid"/>
+                      <a:round/>
+                      <a:headEnd type="none" w="med" len="med"/>
+                      <a:tailEnd type="none" w="med" len="med"/>
+                    </a:lnB>
+                    <a:solidFill>
+                      <a:srgbClr val="39FF88"/>
+                    </a:solidFill>
+                  </a:tcPr>
+                </a:tc>
+                <a:tc>
+                  <a:txBody>
+                    <a:bodyPr/>
+                    <a:lstStyle/>
+                    <a:p>
+                      <a:pPr indent="0" marL="0">
+                        <a:buNone/>
+                      </a:pPr>
+                      <a:r>
+                        <a:rPr lang="en-US" sz="1300" b="1" dirty="0">
+                          <a:solidFill>
+                            <a:srgbClr val="0B0F14"/>
+                          </a:solidFill>
+                          <a:latin typeface="Courier New" pitchFamily="34" charset="0"/>
+                          <a:ea typeface="Courier New" pitchFamily="34" charset="-122"/>
+                          <a:cs typeface="Courier New" pitchFamily="34" charset="-120"/>
+                        </a:rPr>
+                        <a:t>AIMD cap 32</a:t>
+                      </a:r>
+                      <a:endParaRPr lang="en-US" sz="1300" dirty="0">
+                        <a:latin typeface="Courier New" charset="0"/>
+                        <a:ea typeface="Courier New" charset="0"/>
+                        <a:cs typeface="Courier New" charset="0"/>
+                      </a:endParaRPr>
+                    </a:p>
+                  </a:txBody>
+                  <a:tcPr marL="91440" marR="91440" marT="45720" marB="45720">
+                    <a:lnL w="12700" cap="flat" cmpd="sng" algn="ctr">
+                      <a:solidFill>
+                        <a:srgbClr val="2A3441"/>
+                      </a:solidFill>
+                      <a:prstDash val="solid"/>
+                      <a:round/>
+                      <a:headEnd type="none" w="med" len="med"/>
+                      <a:tailEnd type="none" w="med" len="med"/>
+                    </a:lnL>
+                    <a:lnR w="12700" cap="flat" cmpd="sng" algn="ctr">
+                      <a:solidFill>
+                        <a:srgbClr val="2A3441"/>
+                      </a:solidFill>
+                      <a:prstDash val="solid"/>
+                      <a:round/>
+                      <a:headEnd type="none" w="med" len="med"/>
+                      <a:tailEnd type="none" w="med" len="med"/>
+                    </a:lnR>
+                    <a:lnT w="12700" cap="flat" cmpd="sng" algn="ctr">
+                      <a:solidFill>
+                        <a:srgbClr val="2A3441"/>
+                      </a:solidFill>
+                      <a:prstDash val="solid"/>
+                      <a:round/>
+                      <a:headEnd type="none" w="med" len="med"/>
+                      <a:tailEnd type="none" w="med" len="med"/>
+                    </a:lnT>
+                    <a:lnB w="12700" cap="flat" cmpd="sng" algn="ctr">
+                      <a:solidFill>
+                        <a:srgbClr val="2A3441"/>
+                      </a:solidFill>
+                      <a:prstDash val="solid"/>
+                      <a:round/>
+                      <a:headEnd type="none" w="med" len="med"/>
+                      <a:tailEnd type="none" w="med" len="med"/>
+                    </a:lnB>
+                    <a:solidFill>
+                      <a:srgbClr val="39FF88"/>
+                    </a:solidFill>
+                  </a:tcPr>
+                </a:tc>
+                <a:tc>
+                  <a:txBody>
+                    <a:bodyPr/>
+                    <a:lstStyle/>
+                    <a:p>
+                      <a:pPr indent="0" marL="0">
+                        <a:buNone/>
+                      </a:pPr>
+                      <a:r>
+                        <a:rPr lang="en-US" sz="1300" b="1" dirty="0">
+                          <a:solidFill>
+                            <a:srgbClr val="0B0F14"/>
+                          </a:solidFill>
+                          <a:latin typeface="Courier New" pitchFamily="34" charset="0"/>
+                          <a:ea typeface="Courier New" pitchFamily="34" charset="-122"/>
+                          <a:cs typeface="Courier New" pitchFamily="34" charset="-120"/>
+                        </a:rPr>
+                        <a:t>AIMD tuned</a:t>
+                      </a:r>
+                      <a:endParaRPr lang="en-US" sz="1300" dirty="0">
+                        <a:latin typeface="Courier New" charset="0"/>
+                        <a:ea typeface="Courier New" charset="0"/>
+                        <a:cs typeface="Courier New" charset="0"/>
+                      </a:endParaRPr>
+                    </a:p>
+                  </a:txBody>
+                  <a:tcPr marL="91440" marR="91440" marT="45720" marB="45720">
+                    <a:lnL w="12700" cap="flat" cmpd="sng" algn="ctr">
+                      <a:solidFill>
+                        <a:srgbClr val="2A3441"/>
+                      </a:solidFill>
+                      <a:prstDash val="solid"/>
+                      <a:round/>
+                      <a:headEnd type="none" w="med" len="med"/>
+                      <a:tailEnd type="none" w="med" len="med"/>
+                    </a:lnL>
+                    <a:lnR w="12700" cap="flat" cmpd="sng" algn="ctr">
+                      <a:solidFill>
+                        <a:srgbClr val="2A3441"/>
+                      </a:solidFill>
+                      <a:prstDash val="solid"/>
+                      <a:round/>
+                      <a:headEnd type="none" w="med" len="med"/>
+                      <a:tailEnd type="none" w="med" len="med"/>
+                    </a:lnR>
+                    <a:lnT w="12700" cap="flat" cmpd="sng" algn="ctr">
+                      <a:solidFill>
+                        <a:srgbClr val="2A3441"/>
+                      </a:solidFill>
+                      <a:prstDash val="solid"/>
+                      <a:round/>
+                      <a:headEnd type="none" w="med" len="med"/>
+                      <a:tailEnd type="none" w="med" len="med"/>
+                    </a:lnT>
+                    <a:lnB w="12700" cap="flat" cmpd="sng" algn="ctr">
+                      <a:solidFill>
+                        <a:srgbClr val="2A3441"/>
+                      </a:solidFill>
+                      <a:prstDash val="solid"/>
+                      <a:round/>
+                      <a:headEnd type="none" w="med" len="med"/>
+                      <a:tailEnd type="none" w="med" len="med"/>
+                    </a:lnB>
+                    <a:solidFill>
+                      <a:srgbClr val="39FF88"/>
+                    </a:solidFill>
+                  </a:tcPr>
+                </a:tc>
+                <a:tc>
+                  <a:txBody>
+                    <a:bodyPr/>
+                    <a:lstStyle/>
+                    <a:p>
+                      <a:pPr indent="0" marL="0">
+                        <a:buNone/>
+                      </a:pPr>
+                      <a:r>
+                        <a:rPr lang="en-US" sz="1300" b="1" dirty="0">
+                          <a:solidFill>
+                            <a:srgbClr val="0B0F14"/>
+                          </a:solidFill>
+                          <a:latin typeface="Courier New" pitchFamily="34" charset="0"/>
+                          <a:ea typeface="Courier New" pitchFamily="34" charset="-122"/>
+                          <a:cs typeface="Courier New" pitchFamily="34" charset="-120"/>
+                        </a:rPr>
+                        <a:t>Neural</a:t>
+                      </a:r>
+                      <a:endParaRPr lang="en-US" sz="1300" dirty="0">
+                        <a:latin typeface="Courier New" charset="0"/>
+                        <a:ea typeface="Courier New" charset="0"/>
+                        <a:cs typeface="Courier New" charset="0"/>
+                      </a:endParaRPr>
+                    </a:p>
+                  </a:txBody>
+                  <a:tcPr marL="91440" marR="91440" marT="45720" marB="45720">
+                    <a:lnL w="12700" cap="flat" cmpd="sng" algn="ctr">
+                      <a:solidFill>
+                        <a:srgbClr val="2A3441"/>
+                      </a:solidFill>
+                      <a:prstDash val="solid"/>
+                      <a:round/>
+                      <a:headEnd type="none" w="med" len="med"/>
+                      <a:tailEnd type="none" w="med" len="med"/>
+                    </a:lnL>
+                    <a:lnR w="12700" cap="flat" cmpd="sng" algn="ctr">
+                      <a:solidFill>
+                        <a:srgbClr val="2A3441"/>
+                      </a:solidFill>
+                      <a:prstDash val="solid"/>
+                      <a:round/>
+                      <a:headEnd type="none" w="med" len="med"/>
+                      <a:tailEnd type="none" w="med" len="med"/>
+                    </a:lnR>
+                    <a:lnT w="12700" cap="flat" cmpd="sng" algn="ctr">
+                      <a:solidFill>
+                        <a:srgbClr val="2A3441"/>
+                      </a:solidFill>
+                      <a:prstDash val="solid"/>
+                      <a:round/>
+                      <a:headEnd type="none" w="med" len="med"/>
+                      <a:tailEnd type="none" w="med" len="med"/>
+                    </a:lnT>
+                    <a:lnB w="12700" cap="flat" cmpd="sng" algn="ctr">
+                      <a:solidFill>
+                        <a:srgbClr val="2A3441"/>
+                      </a:solidFill>
+                      <a:prstDash val="solid"/>
+                      <a:round/>
+                      <a:headEnd type="none" w="med" len="med"/>
+                      <a:tailEnd type="none" w="med" len="med"/>
+                    </a:lnB>
+                    <a:solidFill>
+                      <a:srgbClr val="39FF88"/>
+                    </a:solidFill>
+                  </a:tcPr>
+                </a:tc>
+              </a:tr>
+              <a:tr h="402336">
+                <a:tc>
+                  <a:txBody>
+                    <a:bodyPr/>
+                    <a:lstStyle/>
+                    <a:p>
+                      <a:pPr indent="0" marL="0">
+                        <a:buNone/>
+                      </a:pPr>
+                      <a:r>
+                        <a:rPr lang="en-US" sz="1300" dirty="0">
+                          <a:solidFill>
+                            <a:srgbClr val="E6EDF3"/>
+                          </a:solidFill>
+                          <a:latin typeface="Calibri" pitchFamily="34" charset="0"/>
+                          <a:ea typeface="Calibri" pitchFamily="34" charset="-122"/>
+                          <a:cs typeface="Calibri" pitchFamily="34" charset="-120"/>
+                        </a:rPr>
+                        <a:t>2 MB, lossy 2%</a:t>
+                      </a:r>
+                      <a:endParaRPr lang="en-US" sz="1300" dirty="0">
+                        <a:latin typeface="Calibri" charset="0"/>
+                        <a:ea typeface="Calibri" charset="0"/>
+                        <a:cs typeface="Calibri" charset="0"/>
+                      </a:endParaRPr>
+                    </a:p>
+                  </a:txBody>
+                  <a:tcPr marL="91440" marR="91440" marT="45720" marB="45720">
+                    <a:lnL w="12700" cap="flat" cmpd="sng" algn="ctr">
+                      <a:solidFill>
+                        <a:srgbClr val="2A3441"/>
+                      </a:solidFill>
+                      <a:prstDash val="solid"/>
+                      <a:round/>
+                      <a:headEnd type="none" w="med" len="med"/>
+                      <a:tailEnd type="none" w="med" len="med"/>
+                    </a:lnL>
+                    <a:lnR w="12700" cap="flat" cmpd="sng" algn="ctr">
+                      <a:solidFill>
+                        <a:srgbClr val="2A3441"/>
+                      </a:solidFill>
+                      <a:prstDash val="solid"/>
+                      <a:round/>
+                      <a:headEnd type="none" w="med" len="med"/>
+                      <a:tailEnd type="none" w="med" len="med"/>
+                    </a:lnR>
+                    <a:lnT w="12700" cap="flat" cmpd="sng" algn="ctr">
+                      <a:solidFill>
+                        <a:srgbClr val="2A3441"/>
+                      </a:solidFill>
+                      <a:prstDash val="solid"/>
+                      <a:round/>
+                      <a:headEnd type="none" w="med" len="med"/>
+                      <a:tailEnd type="none" w="med" len="med"/>
+                    </a:lnT>
+                    <a:lnB w="12700" cap="flat" cmpd="sng" algn="ctr">
+                      <a:solidFill>
+                        <a:srgbClr val="2A3441"/>
+                      </a:solidFill>
+                      <a:prstDash val="solid"/>
+                      <a:round/>
+                      <a:headEnd type="none" w="med" len="med"/>
+                      <a:tailEnd type="none" w="med" len="med"/>
+                    </a:lnB>
+                    <a:solidFill>
+                      <a:srgbClr val="141B24"/>
+                    </a:solidFill>
+                  </a:tcPr>
+                </a:tc>
+                <a:tc>
+                  <a:txBody>
+                    <a:bodyPr/>
+                    <a:lstStyle/>
+                    <a:p>
+                      <a:pPr indent="0" marL="0">
+                        <a:buNone/>
+                      </a:pPr>
+                      <a:r>
+                        <a:rPr lang="en-US" sz="1300" dirty="0">
+                          <a:solidFill>
+                            <a:srgbClr val="E6EDF3"/>
+                          </a:solidFill>
+                          <a:latin typeface="Calibri" pitchFamily="34" charset="0"/>
+                          <a:ea typeface="Calibri" pitchFamily="34" charset="-122"/>
+                          <a:cs typeface="Calibri" pitchFamily="34" charset="-120"/>
+                        </a:rPr>
+                        <a:t>26.6 s</a:t>
+                      </a:r>
+                      <a:endParaRPr lang="en-US" sz="1300" dirty="0">
+                        <a:latin typeface="Calibri" charset="0"/>
+                        <a:ea typeface="Calibri" charset="0"/>
+                        <a:cs typeface="Calibri" charset="0"/>
+                      </a:endParaRPr>
+                    </a:p>
+                  </a:txBody>
+                  <a:tcPr marL="91440" marR="91440" marT="45720" marB="45720">
+                    <a:lnL w="12700" cap="flat" cmpd="sng" algn="ctr">
+                      <a:solidFill>
+                        <a:srgbClr val="2A3441"/>
+                      </a:solidFill>
+                      <a:prstDash val="solid"/>
+                      <a:round/>
+                      <a:headEnd type="none" w="med" len="med"/>
+                      <a:tailEnd type="none" w="med" len="med"/>
+                    </a:lnL>
+                    <a:lnR w="12700" cap="flat" cmpd="sng" algn="ctr">
+                      <a:solidFill>
+                        <a:srgbClr val="2A3441"/>
+                      </a:solidFill>
+                      <a:prstDash val="solid"/>
+                      <a:round/>
+                      <a:headEnd type="none" w="med" len="med"/>
+                      <a:tailEnd type="none" w="med" len="med"/>
+                    </a:lnR>
+                    <a:lnT w="12700" cap="flat" cmpd="sng" algn="ctr">
+                      <a:solidFill>
+                        <a:srgbClr val="2A3441"/>
+                      </a:solidFill>
+                      <a:prstDash val="solid"/>
+                      <a:round/>
+                      <a:headEnd type="none" w="med" len="med"/>
+                      <a:tailEnd type="none" w="med" len="med"/>
+                    </a:lnT>
+                    <a:lnB w="12700" cap="flat" cmpd="sng" algn="ctr">
+                      <a:solidFill>
+                        <a:srgbClr val="2A3441"/>
+                      </a:solidFill>
+                      <a:prstDash val="solid"/>
+                      <a:round/>
+                      <a:headEnd type="none" w="med" len="med"/>
+                      <a:tailEnd type="none" w="med" len="med"/>
+                    </a:lnB>
+                    <a:solidFill>
+                      <a:srgbClr val="141B24"/>
+                    </a:solidFill>
+                  </a:tcPr>
+                </a:tc>
+                <a:tc>
+                  <a:txBody>
+                    <a:bodyPr/>
+                    <a:lstStyle/>
+                    <a:p>
+                      <a:pPr indent="0" marL="0">
+                        <a:buNone/>
+                      </a:pPr>
+                      <a:r>
+                        <a:rPr lang="en-US" sz="1300" dirty="0">
+                          <a:solidFill>
+                            <a:srgbClr val="E6EDF3"/>
+                          </a:solidFill>
+                          <a:latin typeface="Calibri" pitchFamily="34" charset="0"/>
+                          <a:ea typeface="Calibri" pitchFamily="34" charset="-122"/>
+                          <a:cs typeface="Calibri" pitchFamily="34" charset="-120"/>
+                        </a:rPr>
+                        <a:t>24.2 s</a:t>
+                      </a:r>
+                      <a:endParaRPr lang="en-US" sz="1300" dirty="0">
+                        <a:latin typeface="Calibri" charset="0"/>
+                        <a:ea typeface="Calibri" charset="0"/>
+                        <a:cs typeface="Calibri" charset="0"/>
+                      </a:endParaRPr>
+                    </a:p>
+                  </a:txBody>
+                  <a:tcPr marL="91440" marR="91440" marT="45720" marB="45720">
+                    <a:lnL w="12700" cap="flat" cmpd="sng" algn="ctr">
+                      <a:solidFill>
+                        <a:srgbClr val="2A3441"/>
+                      </a:solidFill>
+                      <a:prstDash val="solid"/>
+                      <a:round/>
+                      <a:headEnd type="none" w="med" len="med"/>
+                      <a:tailEnd type="none" w="med" len="med"/>
+                    </a:lnL>
+                    <a:lnR w="12700" cap="flat" cmpd="sng" algn="ctr">
+                      <a:solidFill>
+                        <a:srgbClr val="2A3441"/>
+                      </a:solidFill>
+                      <a:prstDash val="solid"/>
+                      <a:round/>
+                      <a:headEnd type="none" w="med" len="med"/>
+                      <a:tailEnd type="none" w="med" len="med"/>
+                    </a:lnR>
+                    <a:lnT w="12700" cap="flat" cmpd="sng" algn="ctr">
+                      <a:solidFill>
+                        <a:srgbClr val="2A3441"/>
+                      </a:solidFill>
+                      <a:prstDash val="solid"/>
+                      <a:round/>
+                      <a:headEnd type="none" w="med" len="med"/>
+                      <a:tailEnd type="none" w="med" len="med"/>
+                    </a:lnT>
+                    <a:lnB w="12700" cap="flat" cmpd="sng" algn="ctr">
+                      <a:solidFill>
+                        <a:srgbClr val="2A3441"/>
+                      </a:solidFill>
+                      <a:prstDash val="solid"/>
+                      <a:round/>
+                      <a:headEnd type="none" w="med" len="med"/>
+                      <a:tailEnd type="none" w="med" len="med"/>
+                    </a:lnB>
+                    <a:solidFill>
+                      <a:srgbClr val="141B24"/>
+                    </a:solidFill>
+                  </a:tcPr>
+                </a:tc>
+                <a:tc>
+                  <a:txBody>
+                    <a:bodyPr/>
+                    <a:lstStyle/>
+                    <a:p>
+                      <a:pPr indent="0" marL="0">
+                        <a:buNone/>
+                      </a:pPr>
+                      <a:r>
+                        <a:rPr lang="en-US" sz="1300" dirty="0">
+                          <a:solidFill>
+                            <a:srgbClr val="E6EDF3"/>
+                          </a:solidFill>
+                          <a:latin typeface="Calibri" pitchFamily="34" charset="0"/>
+                          <a:ea typeface="Calibri" pitchFamily="34" charset="-122"/>
+                          <a:cs typeface="Calibri" pitchFamily="34" charset="-120"/>
+                        </a:rPr>
+                        <a:t>11.9 s</a:t>
+                      </a:r>
+                      <a:endParaRPr lang="en-US" sz="1300" dirty="0">
+                        <a:latin typeface="Calibri" charset="0"/>
+                        <a:ea typeface="Calibri" charset="0"/>
+                        <a:cs typeface="Calibri" charset="0"/>
+                      </a:endParaRPr>
+                    </a:p>
+                  </a:txBody>
+                  <a:tcPr marL="91440" marR="91440" marT="45720" marB="45720">
+                    <a:lnL w="12700" cap="flat" cmpd="sng" algn="ctr">
+                      <a:solidFill>
+                        <a:srgbClr val="2A3441"/>
+                      </a:solidFill>
+                      <a:prstDash val="solid"/>
+                      <a:round/>
+                      <a:headEnd type="none" w="med" len="med"/>
+                      <a:tailEnd type="none" w="med" len="med"/>
+                    </a:lnL>
+                    <a:lnR w="12700" cap="flat" cmpd="sng" algn="ctr">
+                      <a:solidFill>
+                        <a:srgbClr val="2A3441"/>
+                      </a:solidFill>
+                      <a:prstDash val="solid"/>
+                      <a:round/>
+                      <a:headEnd type="none" w="med" len="med"/>
+                      <a:tailEnd type="none" w="med" len="med"/>
+                    </a:lnR>
+                    <a:lnT w="12700" cap="flat" cmpd="sng" algn="ctr">
+                      <a:solidFill>
+                        <a:srgbClr val="2A3441"/>
+                      </a:solidFill>
+                      <a:prstDash val="solid"/>
+                      <a:round/>
+                      <a:headEnd type="none" w="med" len="med"/>
+                      <a:tailEnd type="none" w="med" len="med"/>
+                    </a:lnT>
+                    <a:lnB w="12700" cap="flat" cmpd="sng" algn="ctr">
+                      <a:solidFill>
+                        <a:srgbClr val="2A3441"/>
+                      </a:solidFill>
+                      <a:prstDash val="solid"/>
+                      <a:round/>
+                      <a:headEnd type="none" w="med" len="med"/>
+                      <a:tailEnd type="none" w="med" len="med"/>
+                    </a:lnB>
+                    <a:solidFill>
+                      <a:srgbClr val="141B24"/>
+                    </a:solidFill>
+                  </a:tcPr>
+                </a:tc>
+              </a:tr>
+              <a:tr h="402336">
+                <a:tc>
+                  <a:txBody>
+                    <a:bodyPr/>
+                    <a:lstStyle/>
+                    <a:p>
+                      <a:pPr indent="0" marL="0">
+                        <a:buNone/>
+                      </a:pPr>
+                      <a:r>
+                        <a:rPr lang="en-US" sz="1300" dirty="0">
+                          <a:solidFill>
+                            <a:srgbClr val="E6EDF3"/>
+                          </a:solidFill>
+                          <a:latin typeface="Calibri" pitchFamily="34" charset="0"/>
+                          <a:ea typeface="Calibri" pitchFamily="34" charset="-122"/>
+                          <a:cs typeface="Calibri" pitchFamily="34" charset="-120"/>
+                        </a:rPr>
+                        <a:t>4 MB, fast path</a:t>
+                      </a:r>
+                      <a:endParaRPr lang="en-US" sz="1300" dirty="0">
+                        <a:latin typeface="Calibri" charset="0"/>
+                        <a:ea typeface="Calibri" charset="0"/>
+                        <a:cs typeface="Calibri" charset="0"/>
+                      </a:endParaRPr>
+                    </a:p>
+                  </a:txBody>
+                  <a:tcPr marL="91440" marR="91440" marT="45720" marB="45720">
+                    <a:lnL w="12700" cap="flat" cmpd="sng" algn="ctr">
+                      <a:solidFill>
+                        <a:srgbClr val="2A3441"/>
+                      </a:solidFill>
+                      <a:prstDash val="solid"/>
+                      <a:round/>
+                      <a:headEnd type="none" w="med" len="med"/>
+                      <a:tailEnd type="none" w="med" len="med"/>
+                    </a:lnL>
+                    <a:lnR w="12700" cap="flat" cmpd="sng" algn="ctr">
+                      <a:solidFill>
+                        <a:srgbClr val="2A3441"/>
+                      </a:solidFill>
+                      <a:prstDash val="solid"/>
+                      <a:round/>
+                      <a:headEnd type="none" w="med" len="med"/>
+                      <a:tailEnd type="none" w="med" len="med"/>
+                    </a:lnR>
+                    <a:lnT w="12700" cap="flat" cmpd="sng" algn="ctr">
+                      <a:solidFill>
+                        <a:srgbClr val="2A3441"/>
+                      </a:solidFill>
+                      <a:prstDash val="solid"/>
+                      <a:round/>
+                      <a:headEnd type="none" w="med" len="med"/>
+                      <a:tailEnd type="none" w="med" len="med"/>
+                    </a:lnT>
+                    <a:lnB w="12700" cap="flat" cmpd="sng" algn="ctr">
+                      <a:solidFill>
+                        <a:srgbClr val="2A3441"/>
+                      </a:solidFill>
+                      <a:prstDash val="solid"/>
+                      <a:round/>
+                      <a:headEnd type="none" w="med" len="med"/>
+                      <a:tailEnd type="none" w="med" len="med"/>
+                    </a:lnB>
+                    <a:solidFill>
+                      <a:srgbClr val="141B24"/>
+                    </a:solidFill>
+                  </a:tcPr>
+                </a:tc>
+                <a:tc>
+                  <a:txBody>
+                    <a:bodyPr/>
+                    <a:lstStyle/>
+                    <a:p>
+                      <a:pPr indent="0" marL="0">
+                        <a:buNone/>
+                      </a:pPr>
+                      <a:r>
+                        <a:rPr lang="en-US" sz="1300" dirty="0">
+                          <a:solidFill>
+                            <a:srgbClr val="E6EDF3"/>
+                          </a:solidFill>
+                          <a:latin typeface="Calibri" pitchFamily="34" charset="0"/>
+                          <a:ea typeface="Calibri" pitchFamily="34" charset="-122"/>
+                          <a:cs typeface="Calibri" pitchFamily="34" charset="-120"/>
+                        </a:rPr>
+                        <a:t>34.6 s</a:t>
+                      </a:r>
+                      <a:endParaRPr lang="en-US" sz="1300" dirty="0">
+                        <a:latin typeface="Calibri" charset="0"/>
+                        <a:ea typeface="Calibri" charset="0"/>
+                        <a:cs typeface="Calibri" charset="0"/>
+                      </a:endParaRPr>
+                    </a:p>
+                  </a:txBody>
+                  <a:tcPr marL="91440" marR="91440" marT="45720" marB="45720">
+                    <a:lnL w="12700" cap="flat" cmpd="sng" algn="ctr">
+                      <a:solidFill>
+                        <a:srgbClr val="2A3441"/>
+                      </a:solidFill>
+                      <a:prstDash val="solid"/>
+                      <a:round/>
+                      <a:headEnd type="none" w="med" len="med"/>
+                      <a:tailEnd type="none" w="med" len="med"/>
+                    </a:lnL>
+                    <a:lnR w="12700" cap="flat" cmpd="sng" algn="ctr">
+                      <a:solidFill>
+                        <a:srgbClr val="2A3441"/>
+                      </a:solidFill>
+                      <a:prstDash val="solid"/>
+                      <a:round/>
+                      <a:headEnd type="none" w="med" len="med"/>
+                      <a:tailEnd type="none" w="med" len="med"/>
+                    </a:lnR>
+                    <a:lnT w="12700" cap="flat" cmpd="sng" algn="ctr">
+                      <a:solidFill>
+                        <a:srgbClr val="2A3441"/>
+                      </a:solidFill>
+                      <a:prstDash val="solid"/>
+                      <a:round/>
+                      <a:headEnd type="none" w="med" len="med"/>
+                      <a:tailEnd type="none" w="med" len="med"/>
+                    </a:lnT>
+                    <a:lnB w="12700" cap="flat" cmpd="sng" algn="ctr">
+                      <a:solidFill>
+                        <a:srgbClr val="2A3441"/>
+                      </a:solidFill>
+                      <a:prstDash val="solid"/>
+                      <a:round/>
+                      <a:headEnd type="none" w="med" len="med"/>
+                      <a:tailEnd type="none" w="med" len="med"/>
+                    </a:lnB>
+                    <a:solidFill>
+                      <a:srgbClr val="141B24"/>
+                    </a:solidFill>
+                  </a:tcPr>
+                </a:tc>
+                <a:tc>
+                  <a:txBody>
+                    <a:bodyPr/>
+                    <a:lstStyle/>
+                    <a:p>
+                      <a:pPr indent="0" marL="0">
+                        <a:buNone/>
+                      </a:pPr>
+                      <a:r>
+                        <a:rPr lang="en-US" sz="1300" dirty="0">
+                          <a:solidFill>
+                            <a:srgbClr val="E6EDF3"/>
+                          </a:solidFill>
+                          <a:latin typeface="Calibri" pitchFamily="34" charset="0"/>
+                          <a:ea typeface="Calibri" pitchFamily="34" charset="-122"/>
+                          <a:cs typeface="Calibri" pitchFamily="34" charset="-120"/>
+                        </a:rPr>
+                        <a:t>21.0 s</a:t>
+                      </a:r>
+                      <a:endParaRPr lang="en-US" sz="1300" dirty="0">
+                        <a:latin typeface="Calibri" charset="0"/>
+                        <a:ea typeface="Calibri" charset="0"/>
+                        <a:cs typeface="Calibri" charset="0"/>
+                      </a:endParaRPr>
+                    </a:p>
+                  </a:txBody>
+                  <a:tcPr marL="91440" marR="91440" marT="45720" marB="45720">
+                    <a:lnL w="12700" cap="flat" cmpd="sng" algn="ctr">
+                      <a:solidFill>
+                        <a:srgbClr val="2A3441"/>
+                      </a:solidFill>
+                      <a:prstDash val="solid"/>
+                      <a:round/>
+                      <a:headEnd type="none" w="med" len="med"/>
+                      <a:tailEnd type="none" w="med" len="med"/>
+                    </a:lnL>
+                    <a:lnR w="12700" cap="flat" cmpd="sng" algn="ctr">
+                      <a:solidFill>
+                        <a:srgbClr val="2A3441"/>
+                      </a:solidFill>
+                      <a:prstDash val="solid"/>
+                      <a:round/>
+                      <a:headEnd type="none" w="med" len="med"/>
+                      <a:tailEnd type="none" w="med" len="med"/>
+                    </a:lnR>
+                    <a:lnT w="12700" cap="flat" cmpd="sng" algn="ctr">
+                      <a:solidFill>
+                        <a:srgbClr val="2A3441"/>
+                      </a:solidFill>
+                      <a:prstDash val="solid"/>
+                      <a:round/>
+                      <a:headEnd type="none" w="med" len="med"/>
+                      <a:tailEnd type="none" w="med" len="med"/>
+                    </a:lnT>
+                    <a:lnB w="12700" cap="flat" cmpd="sng" algn="ctr">
+                      <a:solidFill>
+                        <a:srgbClr val="2A3441"/>
+                      </a:solidFill>
+                      <a:prstDash val="solid"/>
+                      <a:round/>
+                      <a:headEnd type="none" w="med" len="med"/>
+                      <a:tailEnd type="none" w="med" len="med"/>
+                    </a:lnB>
+                    <a:solidFill>
+                      <a:srgbClr val="141B24"/>
+                    </a:solidFill>
+                  </a:tcPr>
+                </a:tc>
+                <a:tc>
+                  <a:txBody>
+                    <a:bodyPr/>
+                    <a:lstStyle/>
+                    <a:p>
+                      <a:pPr indent="0" marL="0">
+                        <a:buNone/>
+                      </a:pPr>
+                      <a:r>
+                        <a:rPr lang="en-US" sz="1300" dirty="0">
+                          <a:solidFill>
+                            <a:srgbClr val="E6EDF3"/>
+                          </a:solidFill>
+                          <a:latin typeface="Calibri" pitchFamily="34" charset="0"/>
+                          <a:ea typeface="Calibri" pitchFamily="34" charset="-122"/>
+                          <a:cs typeface="Calibri" pitchFamily="34" charset="-120"/>
+                        </a:rPr>
+                        <a:t>8.9 s</a:t>
+                      </a:r>
+                      <a:endParaRPr lang="en-US" sz="1300" dirty="0">
+                        <a:latin typeface="Calibri" charset="0"/>
+                        <a:ea typeface="Calibri" charset="0"/>
+                        <a:cs typeface="Calibri" charset="0"/>
+                      </a:endParaRPr>
+                    </a:p>
+                  </a:txBody>
+                  <a:tcPr marL="91440" marR="91440" marT="45720" marB="45720">
+                    <a:lnL w="12700" cap="flat" cmpd="sng" algn="ctr">
+                      <a:solidFill>
+                        <a:srgbClr val="2A3441"/>
+                      </a:solidFill>
+                      <a:prstDash val="solid"/>
+                      <a:round/>
+                      <a:headEnd type="none" w="med" len="med"/>
+                      <a:tailEnd type="none" w="med" len="med"/>
+                    </a:lnL>
+                    <a:lnR w="12700" cap="flat" cmpd="sng" algn="ctr">
+                      <a:solidFill>
+                        <a:srgbClr val="2A3441"/>
+                      </a:solidFill>
+                      <a:prstDash val="solid"/>
+                      <a:round/>
+                      <a:headEnd type="none" w="med" len="med"/>
+                      <a:tailEnd type="none" w="med" len="med"/>
+                    </a:lnR>
+                    <a:lnT w="12700" cap="flat" cmpd="sng" algn="ctr">
+                      <a:solidFill>
+                        <a:srgbClr val="2A3441"/>
+                      </a:solidFill>
+                      <a:prstDash val="solid"/>
+                      <a:round/>
+                      <a:headEnd type="none" w="med" len="med"/>
+                      <a:tailEnd type="none" w="med" len="med"/>
+                    </a:lnT>
+                    <a:lnB w="12700" cap="flat" cmpd="sng" algn="ctr">
+                      <a:solidFill>
+                        <a:srgbClr val="2A3441"/>
+                      </a:solidFill>
+                      <a:prstDash val="solid"/>
+                      <a:round/>
+                      <a:headEnd type="none" w="med" len="med"/>
+                      <a:tailEnd type="none" w="med" len="med"/>
+                    </a:lnB>
+                    <a:solidFill>
+                      <a:srgbClr val="141B24"/>
+                    </a:solidFill>
+                  </a:tcPr>
+                </a:tc>
+              </a:tr>
+            </a:tbl>
+          </a:graphicData>
+        </a:graphic>
+      </p:graphicFrame>
+      <p:sp>
+        <p:nvSpPr>
+          <p:cNvPr id="6" name="Text 2"/>
+          <p:cNvSpPr/>
           <p:nvPr/>
-        </p:nvPicPr>
-        <p:blipFill>
-          <a:blip r:embed="rId1"/>
-          <a:stretch>
-            <a:fillRect/>
-          </a:stretch>
-        </p:blipFill>
+        </p:nvSpPr>
         <p:spPr>
           <a:xfrm>
-            <a:off x="731520" y="1188720"/>
-            <a:ext cx="7498080" cy="3998976"/>
-          </a:xfrm>
-          <a:prstGeom prst="rect">
-            <a:avLst/>
-          </a:prstGeom>
-        </p:spPr>
-      </p:pic>
-      <p:sp>
-        <p:nvSpPr>
-          <p:cNvPr id="5" name="Text 2"/>
-          <p:cNvSpPr/>
-          <p:nvPr/>
-        </p:nvSpPr>
-        <p:spPr>
-          <a:xfrm>
-            <a:off x="8503920" y="1463040"/>
-            <a:ext cx="3200400" cy="3200400"/>
+            <a:off x="6400800" y="1188720"/>
+            <a:ext cx="5303520" cy="4937760"/>
           </a:xfrm>
           <a:prstGeom prst="rect">
             <a:avLst/>
@@ -19385,7 +23025,7 @@
               <a:buChar char="•"/>
             </a:pPr>
             <a:r>
-              <a:rPr lang="en-US" sz="1700" dirty="0">
+              <a:rPr lang="en-US" sz="1400" dirty="0">
                 <a:solidFill>
                   <a:srgbClr val="E6EDF3"/>
                 </a:solidFill>
@@ -19393,9 +23033,9 @@
                 <a:ea typeface="Calibri" pitchFamily="34" charset="-122"/>
                 <a:cs typeface="Calibri" pitchFamily="34" charset="-120"/>
               </a:rPr>
-              <a:t>cwnd starts at 1</a:t>
-            </a:r>
-            <a:endParaRPr lang="en-US" sz="1700" dirty="0"/>
+              <a:t>The agent is a more aggressive neighbour than AIMD or CUBIC: no starvation, but not polite. Not trained for fairness; TCP coexistence untested</a:t>
+            </a:r>
+            <a:endParaRPr lang="en-US" sz="1400" dirty="0"/>
           </a:p>
           <a:p>
             <a:pPr marL="342900" indent="-342900">
@@ -19406,7 +23046,7 @@
               <a:buChar char="•"/>
             </a:pPr>
             <a:r>
-              <a:rPr lang="en-US" sz="1700" dirty="0">
+              <a:rPr lang="en-US" sz="1400" dirty="0">
                 <a:solidFill>
                   <a:srgbClr val="E6EDF3"/>
                 </a:solidFill>
@@ -19414,9 +23054,9 @@
                 <a:ea typeface="Calibri" pitchFamily="34" charset="-122"/>
                 <a:cs typeface="Calibri" pitchFamily="34" charset="-120"/>
               </a:rPr>
-              <a:t>+1 per ACK until ssthresh = 16</a:t>
-            </a:r>
-            <a:endParaRPr lang="en-US" sz="1700" dirty="0"/>
+              <a:t>smart_client --file sends a real file; the received file is byte-identical in every run (FNV-1a hash)</a:t>
+            </a:r>
+            <a:endParaRPr lang="en-US" sz="1400" dirty="0"/>
           </a:p>
           <a:p>
             <a:pPr marL="342900" indent="-342900">
@@ -19427,7 +23067,7 @@
               <a:buChar char="•"/>
             </a:pPr>
             <a:r>
-              <a:rPr lang="en-US" sz="1700" dirty="0">
+              <a:rPr lang="en-US" sz="1400" dirty="0">
                 <a:solidFill>
                   <a:srgbClr val="E6EDF3"/>
                 </a:solidFill>
@@ -19435,9 +23075,9 @@
                 <a:ea typeface="Calibri" pitchFamily="34" charset="-122"/>
                 <a:cs typeface="Calibri" pitchFamily="34" charset="-120"/>
               </a:rPr>
-              <a:t>Then +1/cwnd per ACK</a:t>
-            </a:r>
-            <a:endParaRPr lang="en-US" sz="1700" dirty="0"/>
+              <a:t>Terminal chat and web gateway now use the same 256-packet window and 32-byte bitmap as the C transport; interop test at 20% loss</a:t>
+            </a:r>
+            <a:endParaRPr lang="en-US" sz="1400" dirty="0"/>
           </a:p>
           <a:p>
             <a:pPr marL="342900" indent="-342900">
@@ -19448,7 +23088,7 @@
               <a:buChar char="•"/>
             </a:pPr>
             <a:r>
-              <a:rPr lang="en-US" sz="1700" dirty="0">
+              <a:rPr lang="en-US" sz="1400" dirty="0">
                 <a:solidFill>
                   <a:srgbClr val="E6EDF3"/>
                 </a:solidFill>
@@ -19456,9 +23096,9 @@
                 <a:ea typeface="Calibri" pitchFamily="34" charset="-122"/>
                 <a:cs typeface="Calibri" pitchFamily="34" charset="-120"/>
               </a:rPr>
-              <a:t>62 packets, final cwnd 18.71</a:t>
-            </a:r>
-            <a:endParaRPr lang="en-US" sz="1700" dirty="0"/>
+              <a:t>CI, fuzzing, MIT licence, architecture doc</a:t>
+            </a:r>
+            <a:endParaRPr lang="en-US" sz="1400" dirty="0"/>
           </a:p>
         </p:txBody>
       </p:sp>
@@ -19566,7 +23206,7 @@
                 <a:ea typeface="Courier New" pitchFamily="34" charset="-122"/>
                 <a:cs typeface="Courier New" pitchFamily="34" charset="-120"/>
               </a:rPr>
-              <a:t>3 / 28   Smart-RUDP</a:t>
+              <a:t>3 / 32   Smart-RUDP</a:t>
             </a:r>
             <a:endParaRPr lang="en-US" sz="1000" dirty="0"/>
           </a:p>
@@ -19853,6 +23493,818 @@
               <a:t>Validated: protocol tests and Smart-RUDP vs AIMD on emulated paths; network design built and tested in Packet Tracer; traffic analysed in Wireshark.</a:t>
             </a:r>
             <a:endParaRPr lang="en-US" sz="1600" dirty="0"/>
+          </a:p>
+        </p:txBody>
+      </p:sp>
+    </p:spTree>
+  </p:cSld>
+  <p:clrMapOvr>
+    <a:masterClrMapping/>
+  </p:clrMapOvr>
+</p:sld>
+</file>
+
+<file path=ppt/slides/slide30.xml><?xml version="1.0" encoding="utf-8"?>
+<p:sld xmlns:a="http://schemas.openxmlformats.org/drawingml/2006/main" xmlns:r="http://schemas.openxmlformats.org/officeDocument/2006/relationships" xmlns:p="http://schemas.openxmlformats.org/presentationml/2006/main">
+  <p:cSld name="Slide 30">
+    <p:bg>
+      <p:bgPr>
+        <a:solidFill>
+          <a:srgbClr val="0B0F14"/>
+        </a:solidFill>
+      </p:bgPr>
+    </p:bg>
+    <p:spTree>
+      <p:nvGrpSpPr>
+        <p:cNvPr id="1" name=""/>
+        <p:cNvGrpSpPr/>
+        <p:nvPr/>
+      </p:nvGrpSpPr>
+      <p:grpSpPr>
+        <a:xfrm>
+          <a:off x="0" y="0"/>
+          <a:ext cx="0" cy="0"/>
+          <a:chOff x="0" y="0"/>
+          <a:chExt cx="0" cy="0"/>
+        </a:xfrm>
+      </p:grpSpPr>
+      <p:sp>
+        <p:nvSpPr>
+          <p:cNvPr id="2" name="Text 0"/>
+          <p:cNvSpPr/>
+          <p:nvPr/>
+        </p:nvSpPr>
+        <p:spPr>
+          <a:xfrm>
+            <a:off x="548640" y="320040"/>
+            <a:ext cx="11064240" cy="731520"/>
+          </a:xfrm>
+          <a:prstGeom prst="rect">
+            <a:avLst/>
+          </a:prstGeom>
+          <a:noFill/>
+          <a:ln/>
+        </p:spPr>
+        <p:txBody>
+          <a:bodyPr wrap="square" lIns="0" tIns="0" rIns="0" bIns="0" rtlCol="0" anchor="ctr"/>
+          <a:lstStyle/>
+          <a:p>
+            <a:pPr indent="0" marL="0">
+              <a:buNone/>
+            </a:pPr>
+            <a:r>
+              <a:rPr lang="en-US" sz="3000" b="1" dirty="0">
+                <a:solidFill>
+                  <a:srgbClr val="39FF88"/>
+                </a:solidFill>
+                <a:latin typeface="Courier New" pitchFamily="34" charset="0"/>
+                <a:ea typeface="Courier New" pitchFamily="34" charset="-122"/>
+                <a:cs typeface="Courier New" pitchFamily="34" charset="-120"/>
+              </a:rPr>
+              <a:t>Learnings and future work</a:t>
+            </a:r>
+            <a:endParaRPr lang="en-US" sz="3000" dirty="0"/>
+          </a:p>
+        </p:txBody>
+      </p:sp>
+      <p:sp>
+        <p:nvSpPr>
+          <p:cNvPr id="3" name="Text 1"/>
+          <p:cNvSpPr/>
+          <p:nvPr/>
+        </p:nvSpPr>
+        <p:spPr>
+          <a:xfrm>
+            <a:off x="9418320" y="6446520"/>
+            <a:ext cx="2377440" cy="274320"/>
+          </a:xfrm>
+          <a:prstGeom prst="rect">
+            <a:avLst/>
+          </a:prstGeom>
+          <a:noFill/>
+          <a:ln/>
+        </p:spPr>
+        <p:txBody>
+          <a:bodyPr wrap="square" lIns="0" tIns="0" rIns="0" bIns="0" rtlCol="0" anchor="ctr"/>
+          <a:lstStyle/>
+          <a:p>
+            <a:pPr algn="r" indent="0" marL="0">
+              <a:buNone/>
+            </a:pPr>
+            <a:r>
+              <a:rPr lang="en-US" sz="1000" dirty="0">
+                <a:solidFill>
+                  <a:srgbClr val="8B98A5"/>
+                </a:solidFill>
+                <a:latin typeface="Courier New" pitchFamily="34" charset="0"/>
+                <a:ea typeface="Courier New" pitchFamily="34" charset="-122"/>
+                <a:cs typeface="Courier New" pitchFamily="34" charset="-120"/>
+              </a:rPr>
+              <a:t>30 / 32   Smart-RUDP</a:t>
+            </a:r>
+            <a:endParaRPr lang="en-US" sz="1000" dirty="0"/>
+          </a:p>
+        </p:txBody>
+      </p:sp>
+      <p:sp>
+        <p:nvSpPr>
+          <p:cNvPr id="4" name="Shape 2"/>
+          <p:cNvSpPr/>
+          <p:nvPr/>
+        </p:nvSpPr>
+        <p:spPr>
+          <a:xfrm>
+            <a:off x="548640" y="1371600"/>
+            <a:ext cx="5394960" cy="4206240"/>
+          </a:xfrm>
+          <a:prstGeom prst="rect">
+            <a:avLst/>
+          </a:prstGeom>
+          <a:solidFill>
+            <a:srgbClr val="141B24"/>
+          </a:solidFill>
+          <a:ln w="12700">
+            <a:solidFill>
+              <a:srgbClr val="39FF88"/>
+            </a:solidFill>
+            <a:prstDash val="solid"/>
+          </a:ln>
+        </p:spPr>
+      </p:sp>
+      <p:sp>
+        <p:nvSpPr>
+          <p:cNvPr id="5" name="Text 3"/>
+          <p:cNvSpPr/>
+          <p:nvPr/>
+        </p:nvSpPr>
+        <p:spPr>
+          <a:xfrm>
+            <a:off x="731520" y="1508760"/>
+            <a:ext cx="5029200" cy="457200"/>
+          </a:xfrm>
+          <a:prstGeom prst="rect">
+            <a:avLst/>
+          </a:prstGeom>
+          <a:noFill/>
+          <a:ln/>
+        </p:spPr>
+        <p:txBody>
+          <a:bodyPr wrap="square" lIns="0" tIns="0" rIns="0" bIns="0" rtlCol="0" anchor="ctr"/>
+          <a:lstStyle/>
+          <a:p>
+            <a:pPr indent="0" marL="0">
+              <a:buNone/>
+            </a:pPr>
+            <a:r>
+              <a:rPr lang="en-US" sz="2000" b="1" dirty="0">
+                <a:solidFill>
+                  <a:srgbClr val="39FF88"/>
+                </a:solidFill>
+                <a:latin typeface="Courier New" pitchFamily="34" charset="0"/>
+                <a:ea typeface="Courier New" pitchFamily="34" charset="-122"/>
+                <a:cs typeface="Courier New" pitchFamily="34" charset="-120"/>
+              </a:rPr>
+              <a:t>Learned</a:t>
+            </a:r>
+            <a:endParaRPr lang="en-US" sz="2000" dirty="0"/>
+          </a:p>
+        </p:txBody>
+      </p:sp>
+      <p:sp>
+        <p:nvSpPr>
+          <p:cNvPr id="6" name="Text 4"/>
+          <p:cNvSpPr/>
+          <p:nvPr/>
+        </p:nvSpPr>
+        <p:spPr>
+          <a:xfrm>
+            <a:off x="731520" y="2011680"/>
+            <a:ext cx="5029200" cy="3429000"/>
+          </a:xfrm>
+          <a:prstGeom prst="rect">
+            <a:avLst/>
+          </a:prstGeom>
+          <a:noFill/>
+          <a:ln/>
+        </p:spPr>
+        <p:txBody>
+          <a:bodyPr wrap="square" lIns="0" tIns="0" rIns="0" bIns="0" rtlCol="0" anchor="t"/>
+          <a:lstStyle/>
+          <a:p>
+            <a:pPr indent="0" marL="0">
+              <a:buNone/>
+            </a:pPr>
+            <a:r>
+              <a:rPr lang="en-US" sz="2000" dirty="0">
+                <a:solidFill>
+                  <a:srgbClr val="E6EDF3"/>
+                </a:solidFill>
+                <a:latin typeface="Calibri" pitchFamily="34" charset="0"/>
+                <a:ea typeface="Calibri" pitchFamily="34" charset="-122"/>
+                <a:cs typeface="Calibri" pitchFamily="34" charset="-120"/>
+              </a:rPr>
+              <a:t>Reliability is a set of simple rules working together.</a:t>
+            </a:r>
+            <a:endParaRPr lang="en-US" sz="2000" dirty="0"/>
+          </a:p>
+          <a:p>
+            <a:pPr indent="0" marL="0">
+              <a:buNone/>
+            </a:pPr>
+            <a:r>
+              <a:rPr lang="en-US" sz="2000" dirty="0">
+                <a:solidFill>
+                  <a:srgbClr val="E6EDF3"/>
+                </a:solidFill>
+                <a:latin typeface="Calibri" pitchFamily="34" charset="0"/>
+                <a:ea typeface="Calibri" pitchFamily="34" charset="-122"/>
+                <a:cs typeface="Calibri" pitchFamily="34" charset="-120"/>
+              </a:rPr>
+              <a:t>Congestion control matters as much as retransmission.</a:t>
+            </a:r>
+            <a:endParaRPr lang="en-US" sz="2000" dirty="0"/>
+          </a:p>
+          <a:p>
+            <a:pPr indent="0" marL="0">
+              <a:buNone/>
+            </a:pPr>
+            <a:r>
+              <a:rPr lang="en-US" sz="2000" dirty="0">
+                <a:solidFill>
+                  <a:srgbClr val="E6EDF3"/>
+                </a:solidFill>
+                <a:latin typeface="Calibri" pitchFamily="34" charset="0"/>
+                <a:ea typeface="Calibri" pitchFamily="34" charset="-122"/>
+                <a:cs typeface="Calibri" pitchFamily="34" charset="-120"/>
+              </a:rPr>
+              <a:t>Testing tools fail in surprising ways.</a:t>
+            </a:r>
+            <a:endParaRPr lang="en-US" sz="2000" dirty="0"/>
+          </a:p>
+        </p:txBody>
+      </p:sp>
+      <p:sp>
+        <p:nvSpPr>
+          <p:cNvPr id="7" name="Shape 5"/>
+          <p:cNvSpPr/>
+          <p:nvPr/>
+        </p:nvSpPr>
+        <p:spPr>
+          <a:xfrm>
+            <a:off x="6217920" y="1371600"/>
+            <a:ext cx="5394960" cy="4206240"/>
+          </a:xfrm>
+          <a:prstGeom prst="rect">
+            <a:avLst/>
+          </a:prstGeom>
+          <a:solidFill>
+            <a:srgbClr val="141B24"/>
+          </a:solidFill>
+          <a:ln w="12700">
+            <a:solidFill>
+              <a:srgbClr val="FFB000"/>
+            </a:solidFill>
+            <a:prstDash val="solid"/>
+          </a:ln>
+        </p:spPr>
+      </p:sp>
+      <p:sp>
+        <p:nvSpPr>
+          <p:cNvPr id="8" name="Text 6"/>
+          <p:cNvSpPr/>
+          <p:nvPr/>
+        </p:nvSpPr>
+        <p:spPr>
+          <a:xfrm>
+            <a:off x="6400800" y="1508760"/>
+            <a:ext cx="5029200" cy="457200"/>
+          </a:xfrm>
+          <a:prstGeom prst="rect">
+            <a:avLst/>
+          </a:prstGeom>
+          <a:noFill/>
+          <a:ln/>
+        </p:spPr>
+        <p:txBody>
+          <a:bodyPr wrap="square" lIns="0" tIns="0" rIns="0" bIns="0" rtlCol="0" anchor="ctr"/>
+          <a:lstStyle/>
+          <a:p>
+            <a:pPr indent="0" marL="0">
+              <a:buNone/>
+            </a:pPr>
+            <a:r>
+              <a:rPr lang="en-US" sz="2000" b="1" dirty="0">
+                <a:solidFill>
+                  <a:srgbClr val="FFB000"/>
+                </a:solidFill>
+                <a:latin typeface="Courier New" pitchFamily="34" charset="0"/>
+                <a:ea typeface="Courier New" pitchFamily="34" charset="-122"/>
+                <a:cs typeface="Courier New" pitchFamily="34" charset="-120"/>
+              </a:rPr>
+              <a:t>Next</a:t>
+            </a:r>
+            <a:endParaRPr lang="en-US" sz="2000" dirty="0"/>
+          </a:p>
+        </p:txBody>
+      </p:sp>
+      <p:sp>
+        <p:nvSpPr>
+          <p:cNvPr id="9" name="Text 7"/>
+          <p:cNvSpPr/>
+          <p:nvPr/>
+        </p:nvSpPr>
+        <p:spPr>
+          <a:xfrm>
+            <a:off x="6400800" y="2011680"/>
+            <a:ext cx="5029200" cy="3429000"/>
+          </a:xfrm>
+          <a:prstGeom prst="rect">
+            <a:avLst/>
+          </a:prstGeom>
+          <a:noFill/>
+          <a:ln/>
+        </p:spPr>
+        <p:txBody>
+          <a:bodyPr wrap="square" lIns="0" tIns="0" rIns="0" bIns="0" rtlCol="0" anchor="t"/>
+          <a:lstStyle/>
+          <a:p>
+            <a:pPr indent="0" marL="0">
+              <a:buNone/>
+            </a:pPr>
+            <a:r>
+              <a:rPr lang="en-US" sz="2000" dirty="0">
+                <a:solidFill>
+                  <a:srgbClr val="E6EDF3"/>
+                </a:solidFill>
+                <a:latin typeface="Calibri" pitchFamily="34" charset="0"/>
+                <a:ea typeface="Calibri" pitchFamily="34" charset="-122"/>
+                <a:cs typeface="Calibri" pitchFamily="34" charset="-120"/>
+              </a:rPr>
+              <a:t>Fairness-aware training, TCP coexistence</a:t>
+            </a:r>
+            <a:endParaRPr lang="en-US" sz="2000" dirty="0"/>
+          </a:p>
+          <a:p>
+            <a:pPr indent="0" marL="0">
+              <a:buNone/>
+            </a:pPr>
+            <a:r>
+              <a:rPr lang="en-US" sz="2000" dirty="0">
+                <a:solidFill>
+                  <a:srgbClr val="E6EDF3"/>
+                </a:solidFill>
+                <a:latin typeface="Calibri" pitchFamily="34" charset="0"/>
+                <a:ea typeface="Calibri" pitchFamily="34" charset="-122"/>
+                <a:cs typeface="Calibri" pitchFamily="34" charset="-120"/>
+              </a:rPr>
+              <a:t>Train on real traces with cross traffic</a:t>
+            </a:r>
+            <a:endParaRPr lang="en-US" sz="2000" dirty="0"/>
+          </a:p>
+          <a:p>
+            <a:pPr indent="0" marL="0">
+              <a:buNone/>
+            </a:pPr>
+            <a:r>
+              <a:rPr lang="en-US" sz="2000" dirty="0">
+                <a:solidFill>
+                  <a:srgbClr val="E6EDF3"/>
+                </a:solidFill>
+                <a:latin typeface="Calibri" pitchFamily="34" charset="0"/>
+                <a:ea typeface="Calibri" pitchFamily="34" charset="-122"/>
+                <a:cs typeface="Calibri" pitchFamily="34" charset="-120"/>
+              </a:rPr>
+              <a:t>Kernel netem and real multi-machine tests</a:t>
+            </a:r>
+            <a:endParaRPr lang="en-US" sz="2000" dirty="0"/>
+          </a:p>
+        </p:txBody>
+      </p:sp>
+      <p:sp>
+        <p:nvSpPr>
+          <p:cNvPr id="10" name="Text 8"/>
+          <p:cNvSpPr/>
+          <p:nvPr/>
+        </p:nvSpPr>
+        <p:spPr>
+          <a:xfrm>
+            <a:off x="548640" y="5852160"/>
+            <a:ext cx="10972800" cy="365760"/>
+          </a:xfrm>
+          <a:prstGeom prst="rect">
+            <a:avLst/>
+          </a:prstGeom>
+          <a:noFill/>
+          <a:ln/>
+        </p:spPr>
+        <p:txBody>
+          <a:bodyPr wrap="square" lIns="0" tIns="0" rIns="0" bIns="0" rtlCol="0" anchor="ctr"/>
+          <a:lstStyle/>
+          <a:p>
+            <a:pPr indent="0" marL="0">
+              <a:buNone/>
+            </a:pPr>
+            <a:r>
+              <a:rPr lang="en-US" sz="1400" dirty="0">
+                <a:solidFill>
+                  <a:srgbClr val="8B98A5"/>
+                </a:solidFill>
+                <a:latin typeface="Calibri" pitchFamily="34" charset="0"/>
+                <a:ea typeface="Calibri" pitchFamily="34" charset="-122"/>
+                <a:cs typeface="Calibri" pitchFamily="34" charset="-120"/>
+              </a:rPr>
+              <a:t>Limits: no kernel netem or multi-machine test; the agent is not a polite neighbour; no gain at 10% random loss; the tabular agent did not beat AIMD.</a:t>
+            </a:r>
+            <a:endParaRPr lang="en-US" sz="1400" dirty="0"/>
+          </a:p>
+        </p:txBody>
+      </p:sp>
+    </p:spTree>
+  </p:cSld>
+  <p:clrMapOvr>
+    <a:masterClrMapping/>
+  </p:clrMapOvr>
+</p:sld>
+</file>
+
+<file path=ppt/slides/slide31.xml><?xml version="1.0" encoding="utf-8"?>
+<p:sld xmlns:a="http://schemas.openxmlformats.org/drawingml/2006/main" xmlns:r="http://schemas.openxmlformats.org/officeDocument/2006/relationships" xmlns:p="http://schemas.openxmlformats.org/presentationml/2006/main">
+  <p:cSld name="Slide 31">
+    <p:bg>
+      <p:bgPr>
+        <a:solidFill>
+          <a:srgbClr val="0B0F14"/>
+        </a:solidFill>
+      </p:bgPr>
+    </p:bg>
+    <p:spTree>
+      <p:nvGrpSpPr>
+        <p:cNvPr id="1" name=""/>
+        <p:cNvGrpSpPr/>
+        <p:nvPr/>
+      </p:nvGrpSpPr>
+      <p:grpSpPr>
+        <a:xfrm>
+          <a:off x="0" y="0"/>
+          <a:ext cx="0" cy="0"/>
+          <a:chOff x="0" y="0"/>
+          <a:chExt cx="0" cy="0"/>
+        </a:xfrm>
+      </p:grpSpPr>
+      <p:sp>
+        <p:nvSpPr>
+          <p:cNvPr id="2" name="Text 0"/>
+          <p:cNvSpPr/>
+          <p:nvPr/>
+        </p:nvSpPr>
+        <p:spPr>
+          <a:xfrm>
+            <a:off x="731520" y="2103120"/>
+            <a:ext cx="10058400" cy="1097280"/>
+          </a:xfrm>
+          <a:prstGeom prst="rect">
+            <a:avLst/>
+          </a:prstGeom>
+          <a:noFill/>
+          <a:ln/>
+        </p:spPr>
+        <p:txBody>
+          <a:bodyPr wrap="square" lIns="0" tIns="0" rIns="0" bIns="0" rtlCol="0" anchor="ctr"/>
+          <a:lstStyle/>
+          <a:p>
+            <a:pPr indent="0" marL="0">
+              <a:buNone/>
+            </a:pPr>
+            <a:r>
+              <a:rPr lang="en-US" sz="6400" b="1" dirty="0">
+                <a:solidFill>
+                  <a:srgbClr val="39FF88"/>
+                </a:solidFill>
+                <a:latin typeface="Courier New" pitchFamily="34" charset="0"/>
+                <a:ea typeface="Courier New" pitchFamily="34" charset="-122"/>
+                <a:cs typeface="Courier New" pitchFamily="34" charset="-120"/>
+              </a:rPr>
+              <a:t>Thank you</a:t>
+            </a:r>
+            <a:endParaRPr lang="en-US" sz="6400" dirty="0"/>
+          </a:p>
+        </p:txBody>
+      </p:sp>
+      <p:sp>
+        <p:nvSpPr>
+          <p:cNvPr id="3" name="Text 1"/>
+          <p:cNvSpPr/>
+          <p:nvPr/>
+        </p:nvSpPr>
+        <p:spPr>
+          <a:xfrm>
+            <a:off x="731520" y="3474720"/>
+            <a:ext cx="10058400" cy="548640"/>
+          </a:xfrm>
+          <a:prstGeom prst="rect">
+            <a:avLst/>
+          </a:prstGeom>
+          <a:noFill/>
+          <a:ln/>
+        </p:spPr>
+        <p:txBody>
+          <a:bodyPr wrap="square" lIns="0" tIns="0" rIns="0" bIns="0" rtlCol="0" anchor="ctr"/>
+          <a:lstStyle/>
+          <a:p>
+            <a:pPr indent="0" marL="0">
+              <a:buNone/>
+            </a:pPr>
+            <a:r>
+              <a:rPr lang="en-US" sz="2600" dirty="0">
+                <a:solidFill>
+                  <a:srgbClr val="E6EDF3"/>
+                </a:solidFill>
+                <a:latin typeface="Courier New" pitchFamily="34" charset="0"/>
+                <a:ea typeface="Courier New" pitchFamily="34" charset="-122"/>
+                <a:cs typeface="Courier New" pitchFamily="34" charset="-120"/>
+              </a:rPr>
+              <a:t>github.com/Capsturrrr/rudp</a:t>
+            </a:r>
+            <a:endParaRPr lang="en-US" sz="2600" dirty="0"/>
+          </a:p>
+        </p:txBody>
+      </p:sp>
+      <p:sp>
+        <p:nvSpPr>
+          <p:cNvPr id="4" name="Text 2"/>
+          <p:cNvSpPr/>
+          <p:nvPr/>
+        </p:nvSpPr>
+        <p:spPr>
+          <a:xfrm>
+            <a:off x="731520" y="4206240"/>
+            <a:ext cx="10058400" cy="457200"/>
+          </a:xfrm>
+          <a:prstGeom prst="rect">
+            <a:avLst/>
+          </a:prstGeom>
+          <a:noFill/>
+          <a:ln/>
+        </p:spPr>
+        <p:txBody>
+          <a:bodyPr wrap="square" lIns="0" tIns="0" rIns="0" bIns="0" rtlCol="0" anchor="ctr"/>
+          <a:lstStyle/>
+          <a:p>
+            <a:pPr indent="0" marL="0">
+              <a:buNone/>
+            </a:pPr>
+            <a:r>
+              <a:rPr lang="en-US" sz="1800" dirty="0">
+                <a:solidFill>
+                  <a:srgbClr val="8B98A5"/>
+                </a:solidFill>
+                <a:latin typeface="Calibri" pitchFamily="34" charset="0"/>
+                <a:ea typeface="Calibri" pitchFamily="34" charset="-122"/>
+                <a:cs typeface="Calibri" pitchFamily="34" charset="-120"/>
+              </a:rPr>
+              <a:t>Harshavardhan Mallela   Rohit Arya   Shloak Sinha</a:t>
+            </a:r>
+            <a:endParaRPr lang="en-US" sz="1800" dirty="0"/>
+          </a:p>
+        </p:txBody>
+      </p:sp>
+    </p:spTree>
+  </p:cSld>
+  <p:clrMapOvr>
+    <a:masterClrMapping/>
+  </p:clrMapOvr>
+</p:sld>
+</file>
+
+<file path=ppt/slides/slide32.xml><?xml version="1.0" encoding="utf-8"?>
+<p:sld xmlns:a="http://schemas.openxmlformats.org/drawingml/2006/main" xmlns:r="http://schemas.openxmlformats.org/officeDocument/2006/relationships" xmlns:p="http://schemas.openxmlformats.org/presentationml/2006/main">
+  <p:cSld name="Slide 32">
+    <p:bg>
+      <p:bgPr>
+        <a:solidFill>
+          <a:srgbClr val="0B0F14"/>
+        </a:solidFill>
+      </p:bgPr>
+    </p:bg>
+    <p:spTree>
+      <p:nvGrpSpPr>
+        <p:cNvPr id="1" name=""/>
+        <p:cNvGrpSpPr/>
+        <p:nvPr/>
+      </p:nvGrpSpPr>
+      <p:grpSpPr>
+        <a:xfrm>
+          <a:off x="0" y="0"/>
+          <a:ext cx="0" cy="0"/>
+          <a:chOff x="0" y="0"/>
+          <a:chExt cx="0" cy="0"/>
+        </a:xfrm>
+      </p:grpSpPr>
+      <p:sp>
+        <p:nvSpPr>
+          <p:cNvPr id="2" name="Text 0"/>
+          <p:cNvSpPr/>
+          <p:nvPr/>
+        </p:nvSpPr>
+        <p:spPr>
+          <a:xfrm>
+            <a:off x="548640" y="320040"/>
+            <a:ext cx="11064240" cy="731520"/>
+          </a:xfrm>
+          <a:prstGeom prst="rect">
+            <a:avLst/>
+          </a:prstGeom>
+          <a:noFill/>
+          <a:ln/>
+        </p:spPr>
+        <p:txBody>
+          <a:bodyPr wrap="square" lIns="0" tIns="0" rIns="0" bIns="0" rtlCol="0" anchor="ctr"/>
+          <a:lstStyle/>
+          <a:p>
+            <a:pPr indent="0" marL="0">
+              <a:buNone/>
+            </a:pPr>
+            <a:r>
+              <a:rPr lang="en-US" sz="3000" b="1" dirty="0">
+                <a:solidFill>
+                  <a:srgbClr val="39FF88"/>
+                </a:solidFill>
+                <a:latin typeface="Courier New" pitchFamily="34" charset="0"/>
+                <a:ea typeface="Courier New" pitchFamily="34" charset="-122"/>
+                <a:cs typeface="Courier New" pitchFamily="34" charset="-120"/>
+              </a:rPr>
+              <a:t>Appendix: slow start and congestion avoidance</a:t>
+            </a:r>
+            <a:endParaRPr lang="en-US" sz="3000" dirty="0"/>
+          </a:p>
+        </p:txBody>
+      </p:sp>
+      <p:sp>
+        <p:nvSpPr>
+          <p:cNvPr id="3" name="Text 1"/>
+          <p:cNvSpPr/>
+          <p:nvPr/>
+        </p:nvSpPr>
+        <p:spPr>
+          <a:xfrm>
+            <a:off x="9418320" y="6446520"/>
+            <a:ext cx="2377440" cy="274320"/>
+          </a:xfrm>
+          <a:prstGeom prst="rect">
+            <a:avLst/>
+          </a:prstGeom>
+          <a:noFill/>
+          <a:ln/>
+        </p:spPr>
+        <p:txBody>
+          <a:bodyPr wrap="square" lIns="0" tIns="0" rIns="0" bIns="0" rtlCol="0" anchor="ctr"/>
+          <a:lstStyle/>
+          <a:p>
+            <a:pPr algn="r" indent="0" marL="0">
+              <a:buNone/>
+            </a:pPr>
+            <a:r>
+              <a:rPr lang="en-US" sz="1000" dirty="0">
+                <a:solidFill>
+                  <a:srgbClr val="8B98A5"/>
+                </a:solidFill>
+                <a:latin typeface="Courier New" pitchFamily="34" charset="0"/>
+                <a:ea typeface="Courier New" pitchFamily="34" charset="-122"/>
+                <a:cs typeface="Courier New" pitchFamily="34" charset="-120"/>
+              </a:rPr>
+              <a:t>Appendix   Smart-RUDP</a:t>
+            </a:r>
+            <a:endParaRPr lang="en-US" sz="1000" dirty="0"/>
+          </a:p>
+        </p:txBody>
+      </p:sp>
+      <p:pic>
+        <p:nvPicPr>
+          <p:cNvPr id="4" name="Image 0" descr="fig1_cwnd_no_loss.png">    </p:cNvPr>
+          <p:cNvPicPr>
+            <a:picLocks noChangeAspect="1"/>
+          </p:cNvPicPr>
+          <p:nvPr/>
+        </p:nvPicPr>
+        <p:blipFill>
+          <a:blip r:embed="rId1"/>
+          <a:stretch>
+            <a:fillRect/>
+          </a:stretch>
+        </p:blipFill>
+        <p:spPr>
+          <a:xfrm>
+            <a:off x="731520" y="1188720"/>
+            <a:ext cx="7498080" cy="3998976"/>
+          </a:xfrm>
+          <a:prstGeom prst="rect">
+            <a:avLst/>
+          </a:prstGeom>
+        </p:spPr>
+      </p:pic>
+      <p:sp>
+        <p:nvSpPr>
+          <p:cNvPr id="5" name="Text 2"/>
+          <p:cNvSpPr/>
+          <p:nvPr/>
+        </p:nvSpPr>
+        <p:spPr>
+          <a:xfrm>
+            <a:off x="8503920" y="1463040"/>
+            <a:ext cx="3200400" cy="3200400"/>
+          </a:xfrm>
+          <a:prstGeom prst="rect">
+            <a:avLst/>
+          </a:prstGeom>
+          <a:noFill/>
+          <a:ln/>
+        </p:spPr>
+        <p:txBody>
+          <a:bodyPr wrap="square" lIns="0" tIns="0" rIns="0" bIns="0" rtlCol="0" anchor="t"/>
+          <a:lstStyle/>
+          <a:p>
+            <a:pPr marL="342900" indent="-342900">
+              <a:spcAft>
+                <a:spcPts val="800"/>
+              </a:spcAft>
+              <a:buSzPct val="100000"/>
+              <a:buChar char="•"/>
+            </a:pPr>
+            <a:r>
+              <a:rPr lang="en-US" sz="1700" dirty="0">
+                <a:solidFill>
+                  <a:srgbClr val="E6EDF3"/>
+                </a:solidFill>
+                <a:latin typeface="Calibri" pitchFamily="34" charset="0"/>
+                <a:ea typeface="Calibri" pitchFamily="34" charset="-122"/>
+                <a:cs typeface="Calibri" pitchFamily="34" charset="-120"/>
+              </a:rPr>
+              <a:t>cwnd starts at 1</a:t>
+            </a:r>
+            <a:endParaRPr lang="en-US" sz="1700" dirty="0"/>
+          </a:p>
+          <a:p>
+            <a:pPr marL="342900" indent="-342900">
+              <a:spcAft>
+                <a:spcPts val="800"/>
+              </a:spcAft>
+              <a:buSzPct val="100000"/>
+              <a:buChar char="•"/>
+            </a:pPr>
+            <a:r>
+              <a:rPr lang="en-US" sz="1700" dirty="0">
+                <a:solidFill>
+                  <a:srgbClr val="E6EDF3"/>
+                </a:solidFill>
+                <a:latin typeface="Calibri" pitchFamily="34" charset="0"/>
+                <a:ea typeface="Calibri" pitchFamily="34" charset="-122"/>
+                <a:cs typeface="Calibri" pitchFamily="34" charset="-120"/>
+              </a:rPr>
+              <a:t>+1 per ACK until ssthresh = 16</a:t>
+            </a:r>
+            <a:endParaRPr lang="en-US" sz="1700" dirty="0"/>
+          </a:p>
+          <a:p>
+            <a:pPr marL="342900" indent="-342900">
+              <a:spcAft>
+                <a:spcPts val="800"/>
+              </a:spcAft>
+              <a:buSzPct val="100000"/>
+              <a:buChar char="•"/>
+            </a:pPr>
+            <a:r>
+              <a:rPr lang="en-US" sz="1700" dirty="0">
+                <a:solidFill>
+                  <a:srgbClr val="E6EDF3"/>
+                </a:solidFill>
+                <a:latin typeface="Calibri" pitchFamily="34" charset="0"/>
+                <a:ea typeface="Calibri" pitchFamily="34" charset="-122"/>
+                <a:cs typeface="Calibri" pitchFamily="34" charset="-120"/>
+              </a:rPr>
+              <a:t>Then +1/cwnd per ACK</a:t>
+            </a:r>
+            <a:endParaRPr lang="en-US" sz="1700" dirty="0"/>
+          </a:p>
+          <a:p>
+            <a:pPr marL="342900" indent="-342900">
+              <a:spcAft>
+                <a:spcPts val="800"/>
+              </a:spcAft>
+              <a:buSzPct val="100000"/>
+              <a:buChar char="•"/>
+            </a:pPr>
+            <a:r>
+              <a:rPr lang="en-US" sz="1700" dirty="0">
+                <a:solidFill>
+                  <a:srgbClr val="E6EDF3"/>
+                </a:solidFill>
+                <a:latin typeface="Calibri" pitchFamily="34" charset="0"/>
+                <a:ea typeface="Calibri" pitchFamily="34" charset="-122"/>
+                <a:cs typeface="Calibri" pitchFamily="34" charset="-120"/>
+              </a:rPr>
+              <a:t>62 packets, final cwnd 18.71</a:t>
+            </a:r>
+            <a:endParaRPr lang="en-US" sz="1700" dirty="0"/>
           </a:p>
         </p:txBody>
       </p:sp>
@@ -19960,7 +24412,7 @@
                 <a:ea typeface="Courier New" pitchFamily="34" charset="-122"/>
                 <a:cs typeface="Courier New" pitchFamily="34" charset="-120"/>
               </a:rPr>
-              <a:t>4 / 28   Smart-RUDP</a:t>
+              <a:t>4 / 32   Smart-RUDP</a:t>
             </a:r>
             <a:endParaRPr lang="en-US" sz="1000" dirty="0"/>
           </a:p>
@@ -20521,7 +24973,7 @@
                 <a:ea typeface="Courier New" pitchFamily="34" charset="-122"/>
                 <a:cs typeface="Courier New" pitchFamily="34" charset="-120"/>
               </a:rPr>
-              <a:t>5 / 28   Smart-RUDP</a:t>
+              <a:t>5 / 32   Smart-RUDP</a:t>
             </a:r>
             <a:endParaRPr lang="en-US" sz="1000" dirty="0"/>
           </a:p>
@@ -21960,7 +26412,7 @@
                 <a:ea typeface="Courier New" pitchFamily="34" charset="-122"/>
                 <a:cs typeface="Courier New" pitchFamily="34" charset="-120"/>
               </a:rPr>
-              <a:t>6 / 28   Smart-RUDP</a:t>
+              <a:t>6 / 32   Smart-RUDP</a:t>
             </a:r>
             <a:endParaRPr lang="en-US" sz="1000" dirty="0"/>
           </a:p>
@@ -23195,7 +27647,7 @@
                 <a:ea typeface="Courier New" pitchFamily="34" charset="-122"/>
                 <a:cs typeface="Courier New" pitchFamily="34" charset="-120"/>
               </a:rPr>
-              <a:t>7 / 28   Smart-RUDP</a:t>
+              <a:t>7 / 32   Smart-RUDP</a:t>
             </a:r>
             <a:endParaRPr lang="en-US" sz="1000" dirty="0"/>
           </a:p>
@@ -23638,7 +28090,7 @@
                 <a:ea typeface="Courier New" pitchFamily="34" charset="-122"/>
                 <a:cs typeface="Courier New" pitchFamily="34" charset="-120"/>
               </a:rPr>
-              <a:t>8 / 28   Smart-RUDP</a:t>
+              <a:t>8 / 32   Smart-RUDP</a:t>
             </a:r>
             <a:endParaRPr lang="en-US" sz="1000" dirty="0"/>
           </a:p>
@@ -23938,7 +28390,7 @@
                 <a:ea typeface="Courier New" pitchFamily="34" charset="-122"/>
                 <a:cs typeface="Courier New" pitchFamily="34" charset="-120"/>
               </a:rPr>
-              <a:t>9 / 28   Smart-RUDP</a:t>
+              <a:t>9 / 32   Smart-RUDP</a:t>
             </a:r>
             <a:endParaRPr lang="en-US" sz="1000" dirty="0"/>
           </a:p>
